--- a/docs/AI掌柜-路演PPT/AI掌柜-路演PPT.pptx
+++ b/docs/AI掌柜-路演PPT/AI掌柜-路演PPT.pptx
@@ -3598,7 +3598,7 @@
   <p:cSld>
     <p:spTree>
       <p:nvGrpSpPr>
-        <p:cNvPr id="68" name="" descr="&lt;Slide style={{ width: 1280, height: 720, background: '#0B0D14', padding: '56px 72px', flexDirection: 'column' }}&gt;&#13;&#10;  &lt;Box style={{ height: 96, flexDirection: 'row', justifyContent: 'space-between', alignItems: 'flex-start' }}&gt;&#13;&#10;    &lt;Box style={{ flexDirection: 'column', gap: 8 }}&gt;&#13;&#10;      &lt;Text style={{ fontSize: 34, fontWeight: 'bold', color: '#F2F4FF' }}&gt;老板每天问的三个问题，现有工具一个都没回答&lt;/Text&gt;&#13;&#10;      &lt;Text style={{ fontSize: 15, color: '#8A90A6' }}&gt;不是缺报表，是缺结论和动作&lt;/Text&gt;&#13;&#10;    &lt;/Box&gt;&#13;&#10;    &lt;Text style={{ fontSize: 13, color: '#4A5064', letterSpacing: 2 }}&gt;AI 掌柜&lt;/Text&gt;&#13;&#10;  &lt;/Box&gt;&#13;&#10;  &lt;Box style={{ flex: 1, paddingTop: 8 }}&gt;&#13;&#10;    &lt;Box style={{ flexDirection: 'row', gap: 20, height: 300 }}&gt;&#13;&#10;      &lt;Box style={{ flex: 1, background: '#141826', border: '1px solid #242A3D', borderRadius: 14, padding: 26, flexDirection: 'column', justifyContent: 'space-between' }}&gt;&#13;&#10;        &lt;Text style={{ fontSize: 56, fontWeight: 'bold', color: '#6C6CF5' }}&gt;01&lt;/Text&gt;&#13;&#10;        &lt;Text style={{ fontSize: 22, fontWeight: 'bold', color: '#F2F4FF' }}&gt;今天到底赚没赚&lt;/Text&gt;&#13;&#10;        &lt;Text style={{ fontSize: 15, color: '#8A90A6', lineHeight: 1.8 }}&gt;六张报表翻 30 分钟，只知道跌了，&lt;br /&gt;不知道是人少了还是点便宜了。&lt;/Text&gt;&#13;&#10;      &lt;/Box&gt;&#13;&#10;      &lt;Box style={{ flex: 1, background: '#141826', border: '1px solid #242A3D', borderRadius: 14, padding: 26, flexDirection: 'column', justifyContent: 'space-between' }}&gt;&#13;&#10;        &lt;Text style={{ fontSize: 56, fontWeight: 'bold', color: '#6C6CF5' }}&gt;02&lt;/Text&gt;&#13;&#10;        &lt;Text style={{ fontSize: 22, fontWeight: 'bold', color: '#F2F4FF' }}&gt;明天该买多少&lt;/Text&gt;&#13;&#10;        &lt;Text style={{ fontSize: 15, color: '#8A90A6', lineHeight: 1.8 }}&gt;采购靠经验，缺货率 11.8%，&lt;br /&gt;断货一次少卖 2,400 元。&lt;/Text&gt;&#13;&#10;      &lt;/Box&gt;&#13;&#10;      &lt;Box style={{ flex: 1, background: '#141826', border: '1px solid #242A3D', borderRadius: 14, padding: 26, flexDirection: 'column', justifyContent: 'space-between' }}&gt;&#13;&#10;        &lt;Text style={{ fontSize: 56, fontWeight: 'bold', color: '#6C6CF5' }}&gt;03&lt;/Text&gt;&#13;&#10;        &lt;Text style={{ fontSize: 22, fontWeight: 'bold', color: '#F2F4FF' }}&gt;哪道菜在赔钱&lt;/Text&gt;&#13;&#10;        &lt;Text style={{ fontSize: 15, color: '#8A90A6', lineHeight: 1.8 }}&gt;207 道菜只有 107 道算得清成本，&lt;br /&gt;卖得越多，可能亏得越多。&lt;/Text&gt;&#13;&#10;      &lt;/Box&gt;&#13;&#10;    &lt;/Box&gt;&#13;&#10;    &lt;Box style={{ marginTop: 34, paddingTop: 24, borderTop: '1px solid #242A3D', flexDirection: 'row', alignItems: 'center', gap: 16 }}&gt;&#13;&#10;      &lt;Box style={{ width: 6, height: 28, background: '#6C6CF5', borderRadius: 3 }} /&gt;&#13;&#10;      &lt;Text style={{ fontSize: 24, color: '#F2F4FF' }}&gt;中小餐饮不缺数据，缺一个&lt;Text style={{ fontSize: 24, fontWeight: 'bold', color: '#6C6CF5' }}&gt;能替他做决定&lt;/Text&gt;的角色。&lt;/Text&gt;&#13;&#10;    &lt;/Box&gt;&#13;&#10;  &lt;/Box&gt;&#13;&#10;  &lt;Box style={{ height: 36, flexDirection: 'row', justifyContent: 'space-between', alignItems: 'flex-end' }}&gt;&#13;&#10;    &lt;Text style={{ fontSize: 12, color: '#4A5064' }}&gt;2026 武汉 1024 · 产业应用赛道&lt;/Text&gt;&#13;&#10;    &lt;Text style={{ fontSize: 12, color: '#4A5064' }}&gt;02 / 12&lt;/Text&gt;&#13;&#10;  &lt;/Box&gt;&#13;&#10;&lt;/Slide&gt;"/>
+        <p:cNvPr id="68" name="" descr="&lt;Slide style={{ width: 1280, height: 720, background: '#0B0D14', padding: '56px 72px', flexDirection: 'column' }}&gt;&#13;&#10;  &lt;Box style={{ height: 96, flexDirection: 'row', justifyContent: 'space-between', alignItems: 'flex-start' }}&gt;&#13;&#10;    &lt;Box style={{ flexDirection: 'column', gap: 8 }}&gt;&#13;&#10;      &lt;Text style={{ fontSize: 34, fontWeight: 'bold', color: '#F2F4FF' }}&gt;老板每天问的三个问题，现有工具一个都没回答&lt;/Text&gt;&#13;&#10;      &lt;Text style={{ fontSize: 15, color: '#8A90A6' }}&gt;不是缺报表，是缺结论和动作&lt;/Text&gt;&#13;&#10;    &lt;/Box&gt;&#13;&#10;    &lt;Text style={{ fontSize: 13, color: '#4A5064', letterSpacing: 2 }}&gt;AI 掌柜&lt;/Text&gt;&#13;&#10;  &lt;/Box&gt;&#13;&#10;  &lt;Box style={{ flex: 1, paddingTop: 8 }}&gt;&#13;&#10;    &lt;Box style={{ flexDirection: 'row', gap: 20, height: 300 }}&gt;&#13;&#10;      &lt;Box style={{ flex: 1, background: '#141826', border: '1px solid #242A3D', borderRadius: 14, padding: 26, flexDirection: 'column', justifyContent: 'space-between' }}&gt;&#13;&#10;        &lt;Text style={{ fontSize: 56, fontWeight: 'bold', color: '#6C6CF5' }}&gt;01&lt;/Text&gt;&#13;&#10;        &lt;Text style={{ fontSize: 22, fontWeight: 'bold', color: '#F2F4FF' }}&gt;今天到底赚没赚&lt;/Text&gt;&#13;&#10;        &lt;Text style={{ fontSize: 15, color: '#8A90A6', lineHeight: 1.8 }}&gt;六张报表翻半小时，只知道跌了，&lt;br /&gt;不知道是人少了还是点便宜了。&lt;/Text&gt;&#13;&#10;      &lt;/Box&gt;&#13;&#10;      &lt;Box style={{ flex: 1, background: '#141826', border: '1px solid #242A3D', borderRadius: 14, padding: 26, flexDirection: 'column', justifyContent: 'space-between' }}&gt;&#13;&#10;        &lt;Text style={{ fontSize: 56, fontWeight: 'bold', color: '#6C6CF5' }}&gt;02&lt;/Text&gt;&#13;&#10;        &lt;Text style={{ fontSize: 22, fontWeight: 'bold', color: '#F2F4FF' }}&gt;明天该买多少&lt;/Text&gt;&#13;&#10;        &lt;Text style={{ fontSize: 15, color: '#8A90A6', lineHeight: 1.8 }}&gt;采购靠经验：缺货和压货同时发生，&lt;br /&gt;这套数据里 5 种食材只够 2 天。&lt;/Text&gt;&#13;&#10;      &lt;/Box&gt;&#13;&#10;      &lt;Box style={{ flex: 1, background: '#141826', border: '1px solid #242A3D', borderRadius: 14, padding: 26, flexDirection: 'column', justifyContent: 'space-between' }}&gt;&#13;&#10;        &lt;Text style={{ fontSize: 56, fontWeight: 'bold', color: '#6C6CF5' }}&gt;03&lt;/Text&gt;&#13;&#10;        &lt;Text style={{ fontSize: 22, fontWeight: 'bold', color: '#F2F4FF' }}&gt;哪道菜在赔钱&lt;/Text&gt;&#13;&#10;        &lt;Text style={{ fontSize: 15, color: '#8A90A6', lineHeight: 1.8 }}&gt;207 道菜只有 107 道算得清成本，&lt;br /&gt;卖得越多，可能亏得越多。&lt;/Text&gt;&#13;&#10;      &lt;/Box&gt;&#13;&#10;    &lt;/Box&gt;&#13;&#10;    &lt;Box style={{ marginTop: 34, paddingTop: 24, borderTop: '1px solid #242A3D', flexDirection: 'row', alignItems: 'center', gap: 16 }}&gt;&#13;&#10;      &lt;Box style={{ width: 6, height: 28, background: '#6C6CF5', borderRadius: 3 }} /&gt;&#13;&#10;      &lt;Text style={{ fontSize: 24, color: '#F2F4FF' }}&gt;中小餐饮不缺数据，缺一个&lt;Text style={{ fontSize: 24, fontWeight: 'bold', color: '#6C6CF5' }}&gt;能替他做决定&lt;/Text&gt;的角色。&lt;/Text&gt;&#13;&#10;    &lt;/Box&gt;&#13;&#10;  &lt;/Box&gt;&#13;&#10;  &lt;Box style={{ height: 36, flexDirection: 'row', justifyContent: 'space-between', alignItems: 'flex-end' }}&gt;&#13;&#10;    &lt;Text style={{ fontSize: 12, color: '#4A5064' }}&gt;2026 武汉 1024 · 产业应用赛道&lt;/Text&gt;&#13;&#10;    &lt;Text style={{ fontSize: 12, color: '#4A5064' }}&gt;02 / 12&lt;/Text&gt;&#13;&#10;  &lt;/Box&gt;&#13;&#10;&lt;/Slide&gt;"/>
         <p:cNvGrpSpPr/>
         <p:nvPr/>
       </p:nvGrpSpPr>
@@ -3879,27 +3879,7 @@
                 <a:latin typeface="Microsoft YaHei"/>
                 <a:ea typeface="Microsoft YaHei"/>
               </a:rPr>
-              <a:t>六张报表翻</a:t>
-            </a:r>
-            <a:r>
-              <a:rPr lang="en-US" sz="1125">
-                <a:solidFill>
-                  <a:srgbClr val="8A90A6"/>
-                </a:solidFill>
-                <a:latin typeface="Microsoft YaHei"/>
-                <a:ea typeface="Microsoft YaHei"/>
-              </a:rPr>
-              <a:t xml:space="preserve"> 30 </a:t>
-            </a:r>
-            <a:r>
-              <a:rPr lang="zh-CN" sz="1125">
-                <a:solidFill>
-                  <a:srgbClr val="8A90A6"/>
-                </a:solidFill>
-                <a:latin typeface="Microsoft YaHei"/>
-                <a:ea typeface="Microsoft YaHei"/>
-              </a:rPr>
-              <a:t>分钟，只知道跌了，</a:t>
+              <a:t>六张报表翻半小时，只知道跌了，</a:t>
             </a:r>
             <a:endParaRPr/>
           </a:p>
@@ -4053,7 +4033,25 @@
                 <a:latin typeface="Microsoft YaHei"/>
                 <a:ea typeface="Microsoft YaHei"/>
               </a:rPr>
-              <a:t>采购靠经验，缺货率</a:t>
+              <a:t>采购靠经验：缺货和压货同时发生，</a:t>
+            </a:r>
+            <a:endParaRPr/>
+          </a:p>
+          <a:p>
+            <a:pPr>
+              <a:lnSpc>
+                <a:spcPct val="180000"/>
+              </a:lnSpc>
+            </a:pPr>
+            <a:r>
+              <a:rPr lang="zh-CN" sz="1125">
+                <a:solidFill>
+                  <a:srgbClr val="8A90A6"/>
+                </a:solidFill>
+                <a:latin typeface="Microsoft YaHei"/>
+                <a:ea typeface="Microsoft YaHei"/>
+              </a:rPr>
+              <a:t>这套数据里</a:t>
             </a:r>
             <a:r>
               <a:rPr lang="en-US" sz="1125">
@@ -4063,7 +4061,7 @@
                 <a:latin typeface="Microsoft YaHei"/>
                 <a:ea typeface="Microsoft YaHei"/>
               </a:rPr>
-              <a:t xml:space="preserve"> 11.8%</a:t>
+              <a:t xml:space="preserve"> 5 </a:t>
             </a:r>
             <a:r>
               <a:rPr lang="zh-CN" sz="1125">
@@ -4073,16 +4071,18 @@
                 <a:latin typeface="Microsoft YaHei"/>
                 <a:ea typeface="Microsoft YaHei"/>
               </a:rPr>
-              <a:t>，</a:t>
-            </a:r>
-            <a:endParaRPr/>
-          </a:p>
-          <a:p>
-            <a:pPr>
-              <a:lnSpc>
-                <a:spcPct val="180000"/>
-              </a:lnSpc>
-            </a:pPr>
+              <a:t>种食材只够</a:t>
+            </a:r>
+            <a:r>
+              <a:rPr lang="en-US" sz="1125">
+                <a:solidFill>
+                  <a:srgbClr val="8A90A6"/>
+                </a:solidFill>
+                <a:latin typeface="Microsoft YaHei"/>
+                <a:ea typeface="Microsoft YaHei"/>
+              </a:rPr>
+              <a:t xml:space="preserve"> 2 </a:t>
+            </a:r>
             <a:r>
               <a:rPr lang="zh-CN" sz="1125">
                 <a:solidFill>
@@ -4091,27 +4091,7 @@
                 <a:latin typeface="Microsoft YaHei"/>
                 <a:ea typeface="Microsoft YaHei"/>
               </a:rPr>
-              <a:t>断货一次少卖</a:t>
-            </a:r>
-            <a:r>
-              <a:rPr lang="en-US" sz="1125">
-                <a:solidFill>
-                  <a:srgbClr val="8A90A6"/>
-                </a:solidFill>
-                <a:latin typeface="Microsoft YaHei"/>
-                <a:ea typeface="Microsoft YaHei"/>
-              </a:rPr>
-              <a:t xml:space="preserve"> 2,400 </a:t>
-            </a:r>
-            <a:r>
-              <a:rPr lang="zh-CN" sz="1125">
-                <a:solidFill>
-                  <a:srgbClr val="8A90A6"/>
-                </a:solidFill>
-                <a:latin typeface="Microsoft YaHei"/>
-                <a:ea typeface="Microsoft YaHei"/>
-              </a:rPr>
-              <a:t>元。</a:t>
+              <a:t>天。</a:t>
             </a:r>
             <a:endParaRPr/>
           </a:p>
@@ -12792,7 +12772,7 @@
   <p:cSld>
     <p:spTree>
       <p:nvGrpSpPr>
-        <p:cNvPr id="261" name="" descr="&lt;Slide style={{ width: 1280, height: 720, background: '#0B0D14', padding: '56px 72px', flexDirection: 'column' }}&gt;&#13;&#10;  &lt;Box style={{ height: 96, flexDirection: 'row', justifyContent: 'space-between', alignItems: 'flex-start' }}&gt;&#13;&#10;    &lt;Box style={{ flexDirection: 'column', gap: 8 }}&gt;&#13;&#10;      &lt;Text style={{ fontSize: 34, fontWeight: 'bold', color: '#F2F4FF' }}&gt;先算清代价，再谈智能&lt;/Text&gt;&#13;&#10;      &lt;Text style={{ fontSize: 15, color: '#8A90A6' }}&gt;基于 180 天演示数据的回测：同一份数据，拍脑袋 vs 按建议执行&lt;/Text&gt;&#13;&#10;    &lt;/Box&gt;&#13;&#10;    &lt;Text style={{ fontSize: 13, color: '#4A5064', letterSpacing: 2 }}&gt;AI 掌柜&lt;/Text&gt;&#13;&#10;  &lt;/Box&gt;&#13;&#10;  &lt;Box style={{ flex: 1, paddingTop: 8 }}&gt;&#13;&#10;    &lt;Box style={{ flexDirection: 'row', alignItems: 'center', paddingTop: 6, paddingBottom: 10 }}&gt;&#13;&#10;      &lt;Text style={{ fontSize: 12, color: '#4A5064', letterSpacing: 1, width: 210 }}&gt;指标&lt;/Text&gt;&#13;&#10;      &lt;Text style={{ fontSize: 12, color: '#4A5064', letterSpacing: 1, width: 130 }}&gt;拍脑袋&lt;/Text&gt;&#13;&#10;      &lt;Text style={{ fontSize: 12, color: '#4A5064', letterSpacing: 1, width: 150 }}&gt;AI 掌柜&lt;/Text&gt;&#13;&#10;      &lt;Text style={{ fontSize: 12, color: '#4A5064', letterSpacing: 1 }}&gt;口径&lt;/Text&gt;&#13;&#10;    &lt;/Box&gt;&#13;&#10;      &lt;Box style={{ flexDirection: 'row', alignItems: 'center', paddingTop: 16, paddingBottom: 16, borderTop: '1px solid #242A3D' }}&gt;&#13;&#10;        &lt;Text style={{ fontSize: 17, color: '#F2F4FF', width: 210 }}&gt;缺货率&lt;/Text&gt;&#13;&#10;        &lt;Text style={{ fontSize: 17, color: '#8A90A6', width: 130 }}&gt;11.8%&lt;/Text&gt;&#13;&#10;        &lt;Text style={{ fontSize: 30, fontWeight: 'bold', color: '#6C6CF5', width: 150 }}&gt;3.2%&lt;/Text&gt;&#13;&#10;        &lt;Text style={{ fontSize: 13, color: '#4A5064', flex: 1 }}&gt;缺料拦截 / 总下单&lt;/Text&gt;&#13;&#10;      &lt;/Box&gt;&#13;&#10;      &lt;Box style={{ flexDirection: 'row', alignItems: 'center', paddingTop: 16, paddingBottom: 16, borderTop: '1px solid #242A3D' }}&gt;&#13;&#10;        &lt;Text style={{ fontSize: 17, color: '#F2F4FF', width: 210 }}&gt;滞销菜占比&lt;/Text&gt;&#13;&#10;        &lt;Text style={{ fontSize: 17, color: '#8A90A6', width: 130 }}&gt;18%&lt;/Text&gt;&#13;&#10;        &lt;Text style={{ fontSize: 30, fontWeight: 'bold', color: '#6C6CF5', width: 150 }}&gt;9%&lt;/Text&gt;&#13;&#10;        &lt;Text style={{ fontSize: 13, color: '#4A5064', flex: 1 }}&gt;30 天 0 销量 ÷ 在售&lt;/Text&gt;&#13;&#10;      &lt;/Box&gt;&#13;&#10;      &lt;Box style={{ flexDirection: 'row', alignItems: 'center', paddingTop: 16, paddingBottom: 16, borderTop: '1px solid #242A3D' }}&gt;&#13;&#10;        &lt;Text style={{ fontSize: 17, color: '#F2F4FF', width: 210 }}&gt;综合毛利率&lt;/Text&gt;&#13;&#10;        &lt;Text style={{ fontSize: 17, color: '#8A90A6', width: 130 }}&gt;58.2%&lt;/Text&gt;&#13;&#10;        &lt;Text style={{ fontSize: 30, fontWeight: 'bold', color: '#6C6CF5', width: 150 }}&gt;60.4%&lt;/Text&gt;&#13;&#10;        &lt;Text style={{ fontSize: 13, color: '#4A5064', flex: 1 }}&gt;(营收 − 食材成本) ÷ 营收&lt;/Text&gt;&#13;&#10;      &lt;/Box&gt;&#13;&#10;      &lt;Box style={{ flexDirection: 'row', alignItems: 'center', paddingTop: 16, paddingBottom: 16, borderTop: '1px solid #242A3D' }}&gt;&#13;&#10;        &lt;Text style={{ fontSize: 17, color: '#F2F4FF', width: 210 }}&gt;老板看数时间&lt;/Text&gt;&#13;&#10;        &lt;Text style={{ fontSize: 17, color: '#8A90A6', width: 130 }}&gt;30 分钟&lt;/Text&gt;&#13;&#10;        &lt;Text style={{ fontSize: 30, fontWeight: 'bold', color: '#6C6CF5', width: 150 }}&gt;3 分钟&lt;/Text&gt;&#13;&#10;        &lt;Text style={{ fontSize: 13, color: '#4A5064', flex: 1 }}&gt;驾驶舱首屏决策耗时&lt;/Text&gt;&#13;&#10;      &lt;/Box&gt;&#13;&#10;    &lt;Box style={{ marginTop: 26, background: '#171A2E', border: '1px solid #6C6CF5', borderRadius: 12, padding: 22, flexDirection: 'row', alignItems: 'center', gap: 20 }}&gt;&#13;&#10;      &lt;Text style={{ fontSize: 40, fontWeight: 'bold', color: '#6C6CF5' }}&gt;+2.2pt&lt;/Text&gt;&#13;&#10;      &lt;Box style={{ flexDirection: 'column', gap: 4 }}&gt;&#13;&#10;        &lt;Text style={{ fontSize: 16, color: '#F2F4FF' }}&gt;综合毛利率提升，按年营收 340 万测算 ≈ 多留 7.5 万元&lt;/Text&gt;&#13;&#10;        &lt;Text style={{ fontSize: 12, color: '#8A90A6' }}&gt;数字由 seed_demo.py + 回测脚本生成，不是手工填的；现场可复现&lt;/Text&gt;&#13;&#10;      &lt;/Box&gt;&#13;&#10;    &lt;/Box&gt;&#13;&#10;  &lt;/Box&gt;&#13;&#10;  &lt;Box style={{ height: 36, flexDirection: 'row', justifyContent: 'space-between', alignItems: 'flex-end' }}&gt;&#13;&#10;    &lt;Text style={{ fontSize: 12, color: '#4A5064' }}&gt;2026 武汉 1024 · 产业应用赛道&lt;/Text&gt;&#13;&#10;    &lt;Text style={{ fontSize: 12, color: '#4A5064' }}&gt;09 / 12&lt;/Text&gt;&#13;&#10;  &lt;/Box&gt;&#13;&#10;&lt;/Slide&gt;"/>
+        <p:cNvPr id="261" name="" descr="&lt;Slide style={{ width: 1280, height: 720, background: '#0B0D14', padding: '56px 72px', flexDirection: 'column' }}&gt;&#13;&#10;  &lt;Box style={{ height: 96, flexDirection: 'row', justifyContent: 'space-between', alignItems: 'flex-start' }}&gt;&#13;&#10;    &lt;Box style={{ flexDirection: 'column', gap: 8 }}&gt;&#13;&#10;      &lt;Text style={{ fontSize: 34, fontWeight: 'bold', color: '#F2F4FF' }}&gt;先算清代价，再谈智能&lt;/Text&gt;&#13;&#10;      &lt;Text style={{ fontSize: 15, color: '#8A90A6' }}&gt;左边是它在这套 180 天数据里真找出来的，右边是按建议执行后的测算&lt;/Text&gt;&#13;&#10;    &lt;/Box&gt;&#13;&#10;    &lt;Text style={{ fontSize: 13, color: '#4A5064', letterSpacing: 2 }}&gt;AI 掌柜&lt;/Text&gt;&#13;&#10;  &lt;/Box&gt;&#13;&#10;  &lt;Box style={{ flex: 1, paddingTop: 8 }}&gt;&#13;&#10;    &lt;Box style={{ flexDirection: 'row', gap: 24 }}&gt;&#13;&#10;      &lt;Box style={{ flex: 1.15, flexDirection: 'column' }}&gt;&#13;&#10;        &lt;Text style={{ fontSize: 13, color: '#8A90A6', letterSpacing: 1 }}&gt;实测 · 系统自己发现的五件事&lt;/Text&gt;&#13;&#10;        &lt;Box style={{ marginTop: 14, flexDirection: 'column', gap: 0 }}&gt;&#13;&#10;          &lt;Box style={{ paddingTop: 12, paddingBottom: 12, borderTop: '1px solid #242A3D', flexDirection: 'row', alignItems: 'baseline' }}&gt;&#13;&#10;            &lt;Text style={{ fontSize: 26, fontWeight: 'bold', color: '#6C6CF5', width: 96 }}&gt;11.1%&lt;/Text&gt;&#13;&#10;            &lt;Text style={{ fontSize: 14, color: '#F2F4FF' }}&gt;近 7 天折扣率，比前 30 天的 8.8% 高 2.3 个点&lt;/Text&gt;&#13;&#10;          &lt;/Box&gt;&#13;&#10;          &lt;Box style={{ paddingTop: 12, paddingBottom: 12, borderTop: '1px solid #242A3D', flexDirection: 'row', alignItems: 'baseline' }}&gt;&#13;&#10;            &lt;Text style={{ fontSize: 26, fontWeight: 'bold', color: '#6C6CF5', width: 96 }}&gt;1,899&lt;/Text&gt;&#13;&#10;            &lt;Text style={{ fontSize: 14, color: '#F2F4FF' }}&gt;元 · 按原折扣水平本可少让的金额&lt;/Text&gt;&#13;&#10;          &lt;/Box&gt;&#13;&#10;          &lt;Box style={{ paddingTop: 12, paddingBottom: 12, borderTop: '1px solid #242A3D', flexDirection: 'row', alignItems: 'baseline' }}&gt;&#13;&#10;            &lt;Text style={{ fontSize: 26, fontWeight: 'bold', color: '#6C6CF5', width: 96 }}&gt;19 道&lt;/Text&gt;&#13;&#10;            &lt;Text style={{ fontSize: 14, color: '#F2F4FF' }}&gt;菜连续 3 天 0 销量，占在售 9.2%&lt;/Text&gt;&#13;&#10;          &lt;/Box&gt;&#13;&#10;          &lt;Box style={{ paddingTop: 12, paddingBottom: 12, borderTop: '1px solid #242A3D', flexDirection: 'row', alignItems: 'baseline' }}&gt;&#13;&#10;            &lt;Text style={{ fontSize: 26, fontWeight: 'bold', color: '#6C6CF5', width: 96 }}&gt;5 种&lt;/Text&gt;&#13;&#10;            &lt;Text style={{ fontSize: 14, color: '#F2F4FF' }}&gt;食材可支撑不足 2 天（基围虾只剩 1.5 天）&lt;/Text&gt;&#13;&#10;          &lt;/Box&gt;&#13;&#10;          &lt;Box style={{ paddingTop: 12, paddingBottom: 12, borderTop: '1px solid #242A3D', borderBottom: '1px solid #242A3D', flexDirection: 'row', alignItems: 'baseline' }}&gt;&#13;&#10;            &lt;Text style={{ fontSize: 26, fontWeight: 'bold', color: '#6C6CF5', width: 96 }}&gt;57.6%&lt;/Text&gt;&#13;&#10;            &lt;Text style={{ fontSize: 14, color: '#F2F4FF' }}&gt;近 30 天毛利率，比目标低 2.4 个点&lt;/Text&gt;&#13;&#10;          &lt;/Box&gt;&#13;&#10;        &lt;/Box&gt;&#13;&#10;      &lt;/Box&gt;&#13;&#10;      &lt;Box style={{ flex: 1, background: '#171A2E', border: '1px solid #6C6CF5', borderRadius: 14, padding: 30, flexDirection: 'column', gap: 18, justifyContent: 'flex-start' }}&gt;&#13;&#10;        &lt;Box style={{ flexDirection: 'column', gap: 6 }}&gt;&#13;&#10;          &lt;Text style={{ fontSize: 13, color: '#6C6CF5', letterSpacing: 1 }}&gt;测算 · 补齐这 2.4 个点&lt;/Text&gt;&#13;&#10;          &lt;Text style={{ fontSize: 56, fontWeight: 'bold', color: '#F2F4FF', letterSpacing: -1 }}&gt;+9.4&lt;span style={{ fontSize: 22 }}&gt; 万/年&lt;/span&gt;&lt;/Text&gt;&#13;&#10;          &lt;Text style={{ fontSize: 13, color: '#8A90A6' }}&gt;近 30 天营收 32.5 万 × 2.4pt × 12 个月&lt;/Text&gt;&#13;&#10;        &lt;/Box&gt;&#13;&#10;        &lt;Box style={{ flexDirection: 'column', gap: 8, marginTop: 6, paddingTop: 16, borderTop: '1px solid #3A3F63' }}&gt;&#13;&#10;          &lt;Text style={{ fontSize: 13, color: '#F2F4FF' }}&gt;怎么补：&lt;/Text&gt;&#13;&#10;          &lt;Text style={{ fontSize: 13, color: '#8A90A6', lineHeight: 1.8 }}&gt;① 3 道瘦狗菜调价 5%~15%&lt;br /&gt;② 19 道滞销菜组套餐或下架&lt;br /&gt;③ 折扣收回 2 个点&lt;/Text&gt;&#13;&#10;        &lt;/Box&gt;&#13;&#10;        &lt;Text style={{ fontSize: 11, color: '#6B6F8A', lineHeight: 1.6, marginTop: 4 }}&gt;&#13;&#10;          左列全部由 SQL 从 180 天数据算出，脚本可复现；右侧为按当前规模的线性测算，不是承诺值。&#13;&#10;        &lt;/Text&gt;&#13;&#10;      &lt;/Box&gt;&#13;&#10;    &lt;/Box&gt;&#13;&#10;  &lt;/Box&gt;&#13;&#10;  &lt;Box style={{ height: 36, flexDirection: 'row', justifyContent: 'space-between', alignItems: 'flex-end' }}&gt;&#13;&#10;    &lt;Text style={{ fontSize: 12, color: '#4A5064' }}&gt;2026 武汉 1024 · 产业应用赛道&lt;/Text&gt;&#13;&#10;    &lt;Text style={{ fontSize: 12, color: '#4A5064' }}&gt;09 / 12&lt;/Text&gt;&#13;&#10;  &lt;/Box&gt;&#13;&#10;&lt;/Slide&gt;"/>
         <p:cNvGrpSpPr/>
         <p:nvPr/>
       </p:nvGrpSpPr>
@@ -12837,7 +12817,7 @@
         <p:spPr>
           <a:xfrm rot="0" flipH="0" flipV="0">
             <a:off x="685800" y="533400"/>
-            <a:ext cx="4133850" cy="390525"/>
+            <a:ext cx="4486275" cy="390525"/>
           </a:xfrm>
           <a:prstGeom prst="rect"/>
         </p:spPr>
@@ -12872,7 +12852,7 @@
         <p:spPr>
           <a:xfrm rot="0" flipH="0" flipV="0">
             <a:off x="685800" y="1000125"/>
-            <a:ext cx="4133850" cy="171450"/>
+            <a:ext cx="4486275" cy="171450"/>
           </a:xfrm>
           <a:prstGeom prst="rect"/>
         </p:spPr>
@@ -12892,7 +12872,7 @@
                 <a:latin typeface="Microsoft YaHei"/>
                 <a:ea typeface="Microsoft YaHei"/>
               </a:rPr>
-              <a:t>基于</a:t>
+              <a:t>左边是它在这套</a:t>
             </a:r>
             <a:r>
               <a:rPr lang="en-US" sz="1125">
@@ -12912,27 +12892,7 @@
                 <a:latin typeface="Microsoft YaHei"/>
                 <a:ea typeface="Microsoft YaHei"/>
               </a:rPr>
-              <a:t>天演示数据的回测：同一份数据，拍脑袋</a:t>
-            </a:r>
-            <a:r>
-              <a:rPr lang="en-US" sz="1125">
-                <a:solidFill>
-                  <a:srgbClr val="8A90A6"/>
-                </a:solidFill>
-                <a:latin typeface="Microsoft YaHei"/>
-                <a:ea typeface="Microsoft YaHei"/>
-              </a:rPr>
-              <a:t xml:space="preserve"> vs </a:t>
-            </a:r>
-            <a:r>
-              <a:rPr lang="zh-CN" sz="1125">
-                <a:solidFill>
-                  <a:srgbClr val="8A90A6"/>
-                </a:solidFill>
-                <a:latin typeface="Microsoft YaHei"/>
-                <a:ea typeface="Microsoft YaHei"/>
-              </a:rPr>
-              <a:t>按建议执行</a:t>
+              <a:t>天数据里真找出来的，右边是按建议执行后的测算</a:t>
             </a:r>
             <a:endParaRPr/>
           </a:p>
@@ -12991,170 +12951,75 @@
         </p:nvSpPr>
         <p:spPr>
           <a:xfrm rot="0" flipH="0" flipV="0">
-            <a:off x="685800" y="1581150"/>
-            <a:ext cx="2000250" cy="142875"/>
-          </a:xfrm>
-          <a:prstGeom prst="rect"/>
-        </p:spPr>
-        <p:txBody>
-          <a:bodyPr wrap="none" lIns="0" tIns="0" rIns="0" bIns="0"/>
-          <a:p>
-            <a:pPr>
-              <a:lnSpc>
-                <a:spcPct val="100000"/>
-              </a:lnSpc>
-            </a:pPr>
-            <a:r>
-              <a:rPr lang="zh-CN" sz="900" spc="75">
-                <a:solidFill>
-                  <a:srgbClr val="4A5064"/>
-                </a:solidFill>
-                <a:latin typeface="Microsoft YaHei"/>
-                <a:ea typeface="Microsoft YaHei"/>
-              </a:rPr>
-              <a:t>指标</a:t>
-            </a:r>
-            <a:endParaRPr/>
-          </a:p>
-        </p:txBody>
-      </p:sp>
-      <p:sp>
-        <p:nvSpPr>
-          <p:cNvPr id="267" name="" descr="{&quot;isTemplate&quot;:true,&quot;type&quot;:&quot;text&quot;}"/>
-          <p:cNvSpPr txBox="1"/>
-          <p:nvPr/>
-        </p:nvSpPr>
-        <p:spPr>
-          <a:xfrm rot="0" flipH="0" flipV="0">
-            <a:off x="2686050" y="1581150"/>
-            <a:ext cx="1238250" cy="142875"/>
-          </a:xfrm>
-          <a:prstGeom prst="rect"/>
-        </p:spPr>
-        <p:txBody>
-          <a:bodyPr wrap="none" lIns="0" tIns="0" rIns="0" bIns="0"/>
-          <a:p>
-            <a:pPr>
-              <a:lnSpc>
-                <a:spcPct val="100000"/>
-              </a:lnSpc>
-            </a:pPr>
-            <a:r>
-              <a:rPr lang="zh-CN" sz="900" spc="75">
-                <a:solidFill>
-                  <a:srgbClr val="4A5064"/>
-                </a:solidFill>
-                <a:latin typeface="Microsoft YaHei"/>
-                <a:ea typeface="Microsoft YaHei"/>
-              </a:rPr>
-              <a:t>拍脑袋</a:t>
-            </a:r>
-            <a:endParaRPr/>
-          </a:p>
-        </p:txBody>
-      </p:sp>
-      <p:sp>
-        <p:nvSpPr>
-          <p:cNvPr id="268" name="" descr="{&quot;isTemplate&quot;:true,&quot;type&quot;:&quot;text&quot;}"/>
-          <p:cNvSpPr txBox="1"/>
-          <p:nvPr/>
-        </p:nvSpPr>
-        <p:spPr>
-          <a:xfrm rot="0" flipH="0" flipV="0">
-            <a:off x="3924300" y="1581150"/>
-            <a:ext cx="1428750" cy="142875"/>
-          </a:xfrm>
-          <a:prstGeom prst="rect"/>
-        </p:spPr>
-        <p:txBody>
-          <a:bodyPr wrap="none" lIns="0" tIns="0" rIns="0" bIns="0"/>
-          <a:p>
-            <a:pPr>
-              <a:lnSpc>
-                <a:spcPct val="100000"/>
-              </a:lnSpc>
-            </a:pPr>
-            <a:r>
-              <a:rPr lang="en-US" sz="900" spc="75">
-                <a:solidFill>
-                  <a:srgbClr val="4A5064"/>
-                </a:solidFill>
-                <a:latin typeface="Microsoft YaHei"/>
-                <a:ea typeface="Microsoft YaHei"/>
-              </a:rPr>
-              <a:t xml:space="preserve">AI </a:t>
-            </a:r>
-            <a:r>
-              <a:rPr lang="zh-CN" sz="900" spc="75">
-                <a:solidFill>
-                  <a:srgbClr val="4A5064"/>
-                </a:solidFill>
-                <a:latin typeface="Microsoft YaHei"/>
-                <a:ea typeface="Microsoft YaHei"/>
-              </a:rPr>
-              <a:t>掌柜</a:t>
-            </a:r>
-            <a:endParaRPr/>
-          </a:p>
-        </p:txBody>
-      </p:sp>
-      <p:sp>
-        <p:nvSpPr>
-          <p:cNvPr id="269" name="" descr="{&quot;isTemplate&quot;:true,&quot;type&quot;:&quot;text&quot;}"/>
-          <p:cNvSpPr txBox="1"/>
-          <p:nvPr/>
-        </p:nvSpPr>
-        <p:spPr>
-          <a:xfrm rot="0" flipH="0" flipV="0">
-            <a:off x="5353050" y="1581150"/>
-            <a:ext cx="247650" cy="142875"/>
-          </a:xfrm>
-          <a:prstGeom prst="rect"/>
-        </p:spPr>
-        <p:txBody>
-          <a:bodyPr wrap="none" lIns="0" tIns="0" rIns="0" bIns="0"/>
-          <a:p>
-            <a:pPr>
-              <a:lnSpc>
-                <a:spcPct val="100000"/>
-              </a:lnSpc>
-            </a:pPr>
-            <a:r>
-              <a:rPr lang="zh-CN" sz="900" spc="75">
-                <a:solidFill>
-                  <a:srgbClr val="4A5064"/>
-                </a:solidFill>
-                <a:latin typeface="Microsoft YaHei"/>
-                <a:ea typeface="Microsoft YaHei"/>
-              </a:rPr>
-              <a:t>口径</a:t>
-            </a:r>
-            <a:endParaRPr/>
-          </a:p>
-        </p:txBody>
-      </p:sp>
-      <p:sp>
-        <p:nvSpPr>
-          <p:cNvPr id="270" name=""/>
+            <a:off x="685800" y="1524000"/>
+            <a:ext cx="5667375" cy="152400"/>
+          </a:xfrm>
+          <a:prstGeom prst="rect"/>
+        </p:spPr>
+        <p:txBody>
+          <a:bodyPr wrap="none" lIns="0" tIns="0" rIns="0" bIns="0"/>
+          <a:p>
+            <a:pPr>
+              <a:lnSpc>
+                <a:spcPct val="100000"/>
+              </a:lnSpc>
+            </a:pPr>
+            <a:r>
+              <a:rPr lang="zh-CN" sz="975" spc="75">
+                <a:solidFill>
+                  <a:srgbClr val="8A90A6"/>
+                </a:solidFill>
+                <a:latin typeface="Microsoft YaHei"/>
+                <a:ea typeface="Microsoft YaHei"/>
+              </a:rPr>
+              <a:t>实测</a:t>
+            </a:r>
+            <a:r>
+              <a:rPr lang="en-US" sz="975" spc="75">
+                <a:solidFill>
+                  <a:srgbClr val="8A90A6"/>
+                </a:solidFill>
+                <a:latin typeface="Microsoft YaHei"/>
+                <a:ea typeface="Microsoft YaHei"/>
+              </a:rPr>
+              <a:t xml:space="preserve"> · </a:t>
+            </a:r>
+            <a:r>
+              <a:rPr lang="zh-CN" sz="975" spc="75">
+                <a:solidFill>
+                  <a:srgbClr val="8A90A6"/>
+                </a:solidFill>
+                <a:latin typeface="Microsoft YaHei"/>
+                <a:ea typeface="Microsoft YaHei"/>
+              </a:rPr>
+              <a:t>系统自己发现的五件事</a:t>
+            </a:r>
+            <a:endParaRPr/>
+          </a:p>
+        </p:txBody>
+      </p:sp>
+      <p:sp>
+        <p:nvSpPr>
+          <p:cNvPr id="267" name=""/>
           <p:cNvSpPr/>
           <p:nvPr/>
         </p:nvSpPr>
         <p:spPr>
           <a:xfrm rot="0" flipH="0" flipV="0">
-            <a:off x="685800" y="1819275"/>
-            <a:ext cx="10820400" cy="666750"/>
+            <a:off x="685800" y="1809750"/>
+            <a:ext cx="5667375" cy="552450"/>
           </a:xfrm>
           <a:custGeom>
             <a:pathLst>
-              <a:path w="1136" h="70">
+              <a:path w="595" h="58">
                 <a:moveTo>
                   <a:pt x="0" y="0"/>
                 </a:moveTo>
                 <a:lnTo>
-                  <a:pt x="1136" y="0"/>
+                  <a:pt x="595" y="0"/>
                 </a:lnTo>
                 <a:lnTo>
-                  <a:pt x="1136" y="1"/>
+                  <a:pt x="595" y="1"/>
                 </a:lnTo>
                 <a:lnTo>
                   <a:pt x="0" y="1"/>
@@ -13175,186 +13040,176 @@
       </p:sp>
       <p:sp>
         <p:nvSpPr>
-          <p:cNvPr id="271" name="" descr="{&quot;isTemplate&quot;:true,&quot;type&quot;:&quot;text&quot;}"/>
-          <p:cNvSpPr txBox="1"/>
-          <p:nvPr/>
-        </p:nvSpPr>
-        <p:spPr>
-          <a:xfrm rot="0" flipH="0" flipV="0">
-            <a:off x="685800" y="2057400"/>
-            <a:ext cx="2000250" cy="200025"/>
-          </a:xfrm>
-          <a:prstGeom prst="rect"/>
-        </p:spPr>
-        <p:txBody>
-          <a:bodyPr wrap="none" lIns="0" tIns="0" rIns="0" bIns="0"/>
-          <a:p>
-            <a:pPr>
-              <a:lnSpc>
-                <a:spcPct val="100000"/>
-              </a:lnSpc>
-            </a:pPr>
-            <a:r>
-              <a:rPr lang="zh-CN" sz="1275">
-                <a:solidFill>
-                  <a:srgbClr val="F2F4FF"/>
-                </a:solidFill>
-                <a:latin typeface="Microsoft YaHei"/>
-                <a:ea typeface="Microsoft YaHei"/>
-              </a:rPr>
-              <a:t>缺货率</a:t>
-            </a:r>
-            <a:endParaRPr/>
-          </a:p>
-        </p:txBody>
-      </p:sp>
-      <p:sp>
-        <p:nvSpPr>
-          <p:cNvPr id="272" name="" descr="{&quot;isTemplate&quot;:true,&quot;type&quot;:&quot;text&quot;}"/>
-          <p:cNvSpPr txBox="1"/>
-          <p:nvPr/>
-        </p:nvSpPr>
-        <p:spPr>
-          <a:xfrm rot="0" flipH="0" flipV="0">
-            <a:off x="2686050" y="2057400"/>
-            <a:ext cx="1238250" cy="200025"/>
-          </a:xfrm>
-          <a:prstGeom prst="rect"/>
-        </p:spPr>
-        <p:txBody>
-          <a:bodyPr wrap="none" lIns="0" tIns="0" rIns="0" bIns="0"/>
-          <a:p>
-            <a:pPr>
-              <a:lnSpc>
-                <a:spcPct val="100000"/>
-              </a:lnSpc>
-            </a:pPr>
-            <a:r>
-              <a:rPr lang="en-US" sz="1275">
-                <a:solidFill>
-                  <a:srgbClr val="8A90A6"/>
-                </a:solidFill>
-                <a:latin typeface="Microsoft YaHei"/>
-                <a:ea typeface="Microsoft YaHei"/>
-              </a:rPr>
-              <a:t>11.8%</a:t>
-            </a:r>
-            <a:endParaRPr/>
-          </a:p>
-        </p:txBody>
-      </p:sp>
-      <p:sp>
-        <p:nvSpPr>
-          <p:cNvPr id="273" name="" descr="{&quot;isTemplate&quot;:true,&quot;type&quot;:&quot;text&quot;}"/>
-          <p:cNvSpPr txBox="1"/>
-          <p:nvPr/>
-        </p:nvSpPr>
-        <p:spPr>
-          <a:xfrm rot="0" flipH="0" flipV="0">
-            <a:off x="3924300" y="1981200"/>
-            <a:ext cx="1428750" cy="342900"/>
-          </a:xfrm>
-          <a:prstGeom prst="rect"/>
-        </p:spPr>
-        <p:txBody>
-          <a:bodyPr wrap="none" lIns="0" tIns="0" rIns="0" bIns="0"/>
-          <a:p>
-            <a:pPr>
-              <a:lnSpc>
-                <a:spcPct val="100000"/>
-              </a:lnSpc>
-            </a:pPr>
-            <a:r>
-              <a:rPr lang="en-US" sz="2250" b="1">
+          <p:cNvPr id="268" name="" descr="{&quot;isTemplate&quot;:true,&quot;type&quot;:&quot;text&quot;}"/>
+          <p:cNvSpPr txBox="1"/>
+          <p:nvPr/>
+        </p:nvSpPr>
+        <p:spPr>
+          <a:xfrm rot="0" flipH="0" flipV="0">
+            <a:off x="685800" y="1933575"/>
+            <a:ext cx="914400" cy="304800"/>
+          </a:xfrm>
+          <a:prstGeom prst="rect"/>
+        </p:spPr>
+        <p:txBody>
+          <a:bodyPr wrap="none" lIns="0" tIns="0" rIns="0" bIns="0"/>
+          <a:p>
+            <a:pPr>
+              <a:lnSpc>
+                <a:spcPct val="100000"/>
+              </a:lnSpc>
+            </a:pPr>
+            <a:r>
+              <a:rPr lang="en-US" sz="1950" b="1">
                 <a:solidFill>
                   <a:srgbClr val="6C6CF5"/>
                 </a:solidFill>
                 <a:latin typeface="Microsoft YaHei"/>
                 <a:ea typeface="Microsoft YaHei"/>
               </a:rPr>
-              <a:t>3.2%</a:t>
-            </a:r>
-            <a:endParaRPr/>
-          </a:p>
-        </p:txBody>
-      </p:sp>
-      <p:sp>
-        <p:nvSpPr>
-          <p:cNvPr id="274" name="" descr="{&quot;isTemplate&quot;:true,&quot;type&quot;:&quot;text&quot;}"/>
-          <p:cNvSpPr txBox="1"/>
-          <p:nvPr/>
-        </p:nvSpPr>
-        <p:spPr>
-          <a:xfrm rot="0" flipH="0" flipV="0">
-            <a:off x="5353050" y="2076450"/>
-            <a:ext cx="6153150" cy="152400"/>
-          </a:xfrm>
-          <a:prstGeom prst="rect"/>
-        </p:spPr>
-        <p:txBody>
-          <a:bodyPr wrap="none" lIns="0" tIns="0" rIns="0" bIns="0"/>
-          <a:p>
-            <a:pPr>
-              <a:lnSpc>
-                <a:spcPct val="100000"/>
-              </a:lnSpc>
-            </a:pPr>
-            <a:r>
-              <a:rPr lang="zh-CN" sz="975">
-                <a:solidFill>
-                  <a:srgbClr val="4A5064"/>
-                </a:solidFill>
-                <a:latin typeface="Microsoft YaHei"/>
-                <a:ea typeface="Microsoft YaHei"/>
-              </a:rPr>
-              <a:t>缺料拦截</a:t>
-            </a:r>
-            <a:r>
-              <a:rPr lang="en-US" sz="975">
-                <a:solidFill>
-                  <a:srgbClr val="4A5064"/>
-                </a:solidFill>
-                <a:latin typeface="Microsoft YaHei"/>
-                <a:ea typeface="Microsoft YaHei"/>
-              </a:rPr>
-              <a:t xml:space="preserve"> / </a:t>
-            </a:r>
-            <a:r>
-              <a:rPr lang="zh-CN" sz="975">
-                <a:solidFill>
-                  <a:srgbClr val="4A5064"/>
-                </a:solidFill>
-                <a:latin typeface="Microsoft YaHei"/>
-                <a:ea typeface="Microsoft YaHei"/>
-              </a:rPr>
-              <a:t>总下单</a:t>
-            </a:r>
-            <a:endParaRPr/>
-          </a:p>
-        </p:txBody>
-      </p:sp>
-      <p:sp>
-        <p:nvSpPr>
-          <p:cNvPr id="275" name=""/>
+              <a:t>11.1%</a:t>
+            </a:r>
+            <a:endParaRPr/>
+          </a:p>
+        </p:txBody>
+      </p:sp>
+      <p:sp>
+        <p:nvSpPr>
+          <p:cNvPr id="269" name="" descr="{&quot;isTemplate&quot;:true,&quot;type&quot;:&quot;text&quot;}"/>
+          <p:cNvSpPr txBox="1"/>
+          <p:nvPr/>
+        </p:nvSpPr>
+        <p:spPr>
+          <a:xfrm rot="0" flipH="0" flipV="0">
+            <a:off x="1600200" y="1933575"/>
+            <a:ext cx="2781300" cy="304800"/>
+          </a:xfrm>
+          <a:prstGeom prst="rect"/>
+        </p:spPr>
+        <p:txBody>
+          <a:bodyPr wrap="none" lIns="0" tIns="0" rIns="0" bIns="0"/>
+          <a:p>
+            <a:pPr>
+              <a:lnSpc>
+                <a:spcPct val="100000"/>
+              </a:lnSpc>
+            </a:pPr>
+            <a:r>
+              <a:rPr lang="zh-CN" sz="1050">
+                <a:solidFill>
+                  <a:srgbClr val="F2F4FF"/>
+                </a:solidFill>
+                <a:latin typeface="Microsoft YaHei"/>
+                <a:ea typeface="Microsoft YaHei"/>
+              </a:rPr>
+              <a:t>近</a:t>
+            </a:r>
+            <a:r>
+              <a:rPr lang="en-US" sz="1050">
+                <a:solidFill>
+                  <a:srgbClr val="F2F4FF"/>
+                </a:solidFill>
+                <a:latin typeface="Microsoft YaHei"/>
+                <a:ea typeface="Microsoft YaHei"/>
+              </a:rPr>
+              <a:t xml:space="preserve"> 7 </a:t>
+            </a:r>
+            <a:r>
+              <a:rPr lang="zh-CN" sz="1050">
+                <a:solidFill>
+                  <a:srgbClr val="F2F4FF"/>
+                </a:solidFill>
+                <a:latin typeface="Microsoft YaHei"/>
+                <a:ea typeface="Microsoft YaHei"/>
+              </a:rPr>
+              <a:t>天折扣率，比前</a:t>
+            </a:r>
+            <a:r>
+              <a:rPr lang="en-US" sz="1050">
+                <a:solidFill>
+                  <a:srgbClr val="F2F4FF"/>
+                </a:solidFill>
+                <a:latin typeface="Microsoft YaHei"/>
+                <a:ea typeface="Microsoft YaHei"/>
+              </a:rPr>
+              <a:t xml:space="preserve"> 30 </a:t>
+            </a:r>
+            <a:r>
+              <a:rPr lang="zh-CN" sz="1050">
+                <a:solidFill>
+                  <a:srgbClr val="F2F4FF"/>
+                </a:solidFill>
+                <a:latin typeface="Microsoft YaHei"/>
+                <a:ea typeface="Microsoft YaHei"/>
+              </a:rPr>
+              <a:t>天的</a:t>
+            </a:r>
+            <a:r>
+              <a:rPr lang="en-US" sz="1050">
+                <a:solidFill>
+                  <a:srgbClr val="F2F4FF"/>
+                </a:solidFill>
+                <a:latin typeface="Microsoft YaHei"/>
+                <a:ea typeface="Microsoft YaHei"/>
+              </a:rPr>
+              <a:t xml:space="preserve"> 8.8% </a:t>
+            </a:r>
+            <a:r>
+              <a:rPr lang="zh-CN" sz="1050">
+                <a:solidFill>
+                  <a:srgbClr val="F2F4FF"/>
+                </a:solidFill>
+                <a:latin typeface="Microsoft YaHei"/>
+                <a:ea typeface="Microsoft YaHei"/>
+              </a:rPr>
+              <a:t>高</a:t>
+            </a:r>
+            <a:r>
+              <a:rPr lang="en-US" sz="1050">
+                <a:solidFill>
+                  <a:srgbClr val="F2F4FF"/>
+                </a:solidFill>
+                <a:latin typeface="Microsoft YaHei"/>
+                <a:ea typeface="Microsoft YaHei"/>
+              </a:rPr>
+              <a:t xml:space="preserve"> 2.3 </a:t>
+            </a:r>
+            <a:r>
+              <a:rPr lang="zh-CN" sz="1050">
+                <a:solidFill>
+                  <a:srgbClr val="F2F4FF"/>
+                </a:solidFill>
+                <a:latin typeface="Microsoft YaHei"/>
+                <a:ea typeface="Microsoft YaHei"/>
+              </a:rPr>
+              <a:t>个点</a:t>
+            </a:r>
+            <a:endParaRPr/>
+          </a:p>
+        </p:txBody>
+      </p:sp>
+      <p:sp>
+        <p:nvSpPr>
+          <p:cNvPr id="270" name=""/>
           <p:cNvSpPr/>
           <p:nvPr/>
         </p:nvSpPr>
         <p:spPr>
           <a:xfrm rot="0" flipH="0" flipV="0">
-            <a:off x="685800" y="2476500"/>
-            <a:ext cx="10820400" cy="666750"/>
+            <a:off x="685800" y="2352675"/>
+            <a:ext cx="5667375" cy="552450"/>
           </a:xfrm>
           <a:custGeom>
             <a:pathLst>
-              <a:path w="1136" h="70">
+              <a:path w="595" h="58">
                 <a:moveTo>
                   <a:pt x="0" y="0"/>
                 </a:moveTo>
                 <a:lnTo>
-                  <a:pt x="1136" y="0"/>
+                  <a:pt x="595" y="0"/>
                 </a:lnTo>
                 <a:lnTo>
-                  <a:pt x="1136" y="1"/>
+                  <a:pt x="595" y="1"/>
                 </a:lnTo>
                 <a:lnTo>
                   <a:pt x="0" y="1"/>
@@ -13375,216 +13230,116 @@
       </p:sp>
       <p:sp>
         <p:nvSpPr>
-          <p:cNvPr id="276" name="" descr="{&quot;isTemplate&quot;:true,&quot;type&quot;:&quot;text&quot;}"/>
-          <p:cNvSpPr txBox="1"/>
-          <p:nvPr/>
-        </p:nvSpPr>
-        <p:spPr>
-          <a:xfrm rot="0" flipH="0" flipV="0">
-            <a:off x="685800" y="2714625"/>
-            <a:ext cx="2000250" cy="200025"/>
-          </a:xfrm>
-          <a:prstGeom prst="rect"/>
-        </p:spPr>
-        <p:txBody>
-          <a:bodyPr wrap="none" lIns="0" tIns="0" rIns="0" bIns="0"/>
-          <a:p>
-            <a:pPr>
-              <a:lnSpc>
-                <a:spcPct val="100000"/>
-              </a:lnSpc>
-            </a:pPr>
-            <a:r>
-              <a:rPr lang="zh-CN" sz="1275">
-                <a:solidFill>
-                  <a:srgbClr val="F2F4FF"/>
-                </a:solidFill>
-                <a:latin typeface="Microsoft YaHei"/>
-                <a:ea typeface="Microsoft YaHei"/>
-              </a:rPr>
-              <a:t>滞销菜占比</a:t>
-            </a:r>
-            <a:endParaRPr/>
-          </a:p>
-        </p:txBody>
-      </p:sp>
-      <p:sp>
-        <p:nvSpPr>
-          <p:cNvPr id="277" name="" descr="{&quot;isTemplate&quot;:true,&quot;type&quot;:&quot;text&quot;}"/>
-          <p:cNvSpPr txBox="1"/>
-          <p:nvPr/>
-        </p:nvSpPr>
-        <p:spPr>
-          <a:xfrm rot="0" flipH="0" flipV="0">
-            <a:off x="2686050" y="2714625"/>
-            <a:ext cx="1238250" cy="200025"/>
-          </a:xfrm>
-          <a:prstGeom prst="rect"/>
-        </p:spPr>
-        <p:txBody>
-          <a:bodyPr wrap="none" lIns="0" tIns="0" rIns="0" bIns="0"/>
-          <a:p>
-            <a:pPr>
-              <a:lnSpc>
-                <a:spcPct val="100000"/>
-              </a:lnSpc>
-            </a:pPr>
-            <a:r>
-              <a:rPr lang="en-US" sz="1275">
-                <a:solidFill>
-                  <a:srgbClr val="8A90A6"/>
-                </a:solidFill>
-                <a:latin typeface="Microsoft YaHei"/>
-                <a:ea typeface="Microsoft YaHei"/>
-              </a:rPr>
-              <a:t>18%</a:t>
-            </a:r>
-            <a:endParaRPr/>
-          </a:p>
-        </p:txBody>
-      </p:sp>
-      <p:sp>
-        <p:nvSpPr>
-          <p:cNvPr id="278" name="" descr="{&quot;isTemplate&quot;:true,&quot;type&quot;:&quot;text&quot;}"/>
-          <p:cNvSpPr txBox="1"/>
-          <p:nvPr/>
-        </p:nvSpPr>
-        <p:spPr>
-          <a:xfrm rot="0" flipH="0" flipV="0">
-            <a:off x="3924300" y="2638425"/>
-            <a:ext cx="1428750" cy="342900"/>
-          </a:xfrm>
-          <a:prstGeom prst="rect"/>
-        </p:spPr>
-        <p:txBody>
-          <a:bodyPr wrap="none" lIns="0" tIns="0" rIns="0" bIns="0"/>
-          <a:p>
-            <a:pPr>
-              <a:lnSpc>
-                <a:spcPct val="100000"/>
-              </a:lnSpc>
-            </a:pPr>
-            <a:r>
-              <a:rPr lang="en-US" sz="2250" b="1">
+          <p:cNvPr id="271" name="" descr="{&quot;isTemplate&quot;:true,&quot;type&quot;:&quot;text&quot;}"/>
+          <p:cNvSpPr txBox="1"/>
+          <p:nvPr/>
+        </p:nvSpPr>
+        <p:spPr>
+          <a:xfrm rot="0" flipH="0" flipV="0">
+            <a:off x="685800" y="2476500"/>
+            <a:ext cx="914400" cy="304800"/>
+          </a:xfrm>
+          <a:prstGeom prst="rect"/>
+        </p:spPr>
+        <p:txBody>
+          <a:bodyPr wrap="none" lIns="0" tIns="0" rIns="0" bIns="0"/>
+          <a:p>
+            <a:pPr>
+              <a:lnSpc>
+                <a:spcPct val="100000"/>
+              </a:lnSpc>
+            </a:pPr>
+            <a:r>
+              <a:rPr lang="en-US" sz="1950" b="1">
                 <a:solidFill>
                   <a:srgbClr val="6C6CF5"/>
                 </a:solidFill>
                 <a:latin typeface="Microsoft YaHei"/>
                 <a:ea typeface="Microsoft YaHei"/>
               </a:rPr>
-              <a:t>9%</a:t>
-            </a:r>
-            <a:endParaRPr/>
-          </a:p>
-        </p:txBody>
-      </p:sp>
-      <p:sp>
-        <p:nvSpPr>
-          <p:cNvPr id="279" name="" descr="{&quot;isTemplate&quot;:true,&quot;type&quot;:&quot;text&quot;}"/>
-          <p:cNvSpPr txBox="1"/>
-          <p:nvPr/>
-        </p:nvSpPr>
-        <p:spPr>
-          <a:xfrm rot="0" flipH="0" flipV="0">
-            <a:off x="5353050" y="2733675"/>
-            <a:ext cx="6153150" cy="152400"/>
-          </a:xfrm>
-          <a:prstGeom prst="rect"/>
-        </p:spPr>
-        <p:txBody>
-          <a:bodyPr wrap="none" lIns="0" tIns="0" rIns="0" bIns="0"/>
-          <a:p>
-            <a:pPr>
-              <a:lnSpc>
-                <a:spcPct val="100000"/>
-              </a:lnSpc>
-            </a:pPr>
-            <a:r>
-              <a:rPr lang="en-US" sz="975">
-                <a:solidFill>
-                  <a:srgbClr val="4A5064"/>
-                </a:solidFill>
-                <a:latin typeface="Microsoft YaHei"/>
-                <a:ea typeface="Microsoft YaHei"/>
-              </a:rPr>
-              <a:t xml:space="preserve">30 </a:t>
-            </a:r>
-            <a:r>
-              <a:rPr lang="zh-CN" sz="975">
-                <a:solidFill>
-                  <a:srgbClr val="4A5064"/>
-                </a:solidFill>
-                <a:latin typeface="Microsoft YaHei"/>
-                <a:ea typeface="Microsoft YaHei"/>
-              </a:rPr>
-              <a:t>天</a:t>
-            </a:r>
-            <a:r>
-              <a:rPr lang="en-US" sz="975">
-                <a:solidFill>
-                  <a:srgbClr val="4A5064"/>
-                </a:solidFill>
-                <a:latin typeface="Microsoft YaHei"/>
-                <a:ea typeface="Microsoft YaHei"/>
-              </a:rPr>
-              <a:t xml:space="preserve"> 0 </a:t>
-            </a:r>
-            <a:r>
-              <a:rPr lang="zh-CN" sz="975">
-                <a:solidFill>
-                  <a:srgbClr val="4A5064"/>
-                </a:solidFill>
-                <a:latin typeface="Microsoft YaHei"/>
-                <a:ea typeface="Microsoft YaHei"/>
-              </a:rPr>
-              <a:t>销量</a:t>
-            </a:r>
-            <a:r>
-              <a:rPr lang="en-US" sz="975">
-                <a:solidFill>
-                  <a:srgbClr val="4A5064"/>
-                </a:solidFill>
-                <a:latin typeface="Microsoft YaHei"/>
-                <a:ea typeface="Microsoft YaHei"/>
-              </a:rPr>
-              <a:t xml:space="preserve"> ÷ </a:t>
-            </a:r>
-            <a:r>
-              <a:rPr lang="zh-CN" sz="975">
-                <a:solidFill>
-                  <a:srgbClr val="4A5064"/>
-                </a:solidFill>
-                <a:latin typeface="Microsoft YaHei"/>
-                <a:ea typeface="Microsoft YaHei"/>
-              </a:rPr>
-              <a:t>在售</a:t>
-            </a:r>
-            <a:endParaRPr/>
-          </a:p>
-        </p:txBody>
-      </p:sp>
-      <p:sp>
-        <p:nvSpPr>
-          <p:cNvPr id="280" name=""/>
+              <a:t>1,899</a:t>
+            </a:r>
+            <a:endParaRPr/>
+          </a:p>
+        </p:txBody>
+      </p:sp>
+      <p:sp>
+        <p:nvSpPr>
+          <p:cNvPr id="272" name="" descr="{&quot;isTemplate&quot;:true,&quot;type&quot;:&quot;text&quot;}"/>
+          <p:cNvSpPr txBox="1"/>
+          <p:nvPr/>
+        </p:nvSpPr>
+        <p:spPr>
+          <a:xfrm rot="0" flipH="0" flipV="0">
+            <a:off x="1600200" y="2476500"/>
+            <a:ext cx="1981200" cy="304800"/>
+          </a:xfrm>
+          <a:prstGeom prst="rect"/>
+        </p:spPr>
+        <p:txBody>
+          <a:bodyPr wrap="none" lIns="0" tIns="0" rIns="0" bIns="0"/>
+          <a:p>
+            <a:pPr>
+              <a:lnSpc>
+                <a:spcPct val="100000"/>
+              </a:lnSpc>
+            </a:pPr>
+            <a:r>
+              <a:rPr lang="zh-CN" sz="1050">
+                <a:solidFill>
+                  <a:srgbClr val="F2F4FF"/>
+                </a:solidFill>
+                <a:latin typeface="Microsoft YaHei"/>
+                <a:ea typeface="Microsoft YaHei"/>
+              </a:rPr>
+              <a:t>元</a:t>
+            </a:r>
+            <a:r>
+              <a:rPr lang="en-US" sz="1050">
+                <a:solidFill>
+                  <a:srgbClr val="F2F4FF"/>
+                </a:solidFill>
+                <a:latin typeface="Microsoft YaHei"/>
+                <a:ea typeface="Microsoft YaHei"/>
+              </a:rPr>
+              <a:t xml:space="preserve"> · </a:t>
+            </a:r>
+            <a:r>
+              <a:rPr lang="zh-CN" sz="1050">
+                <a:solidFill>
+                  <a:srgbClr val="F2F4FF"/>
+                </a:solidFill>
+                <a:latin typeface="Microsoft YaHei"/>
+                <a:ea typeface="Microsoft YaHei"/>
+              </a:rPr>
+              <a:t>按原折扣水平本可少让的金额</a:t>
+            </a:r>
+            <a:endParaRPr/>
+          </a:p>
+        </p:txBody>
+      </p:sp>
+      <p:sp>
+        <p:nvSpPr>
+          <p:cNvPr id="273" name=""/>
           <p:cNvSpPr/>
           <p:nvPr/>
         </p:nvSpPr>
         <p:spPr>
           <a:xfrm rot="0" flipH="0" flipV="0">
-            <a:off x="685800" y="3133725"/>
-            <a:ext cx="10820400" cy="666750"/>
+            <a:off x="685800" y="2895600"/>
+            <a:ext cx="5667375" cy="552450"/>
           </a:xfrm>
           <a:custGeom>
             <a:pathLst>
-              <a:path w="1136" h="70">
+              <a:path w="595" h="58">
                 <a:moveTo>
                   <a:pt x="0" y="0"/>
                 </a:moveTo>
                 <a:lnTo>
-                  <a:pt x="1136" y="0"/>
+                  <a:pt x="595" y="0"/>
                 </a:lnTo>
                 <a:lnTo>
-                  <a:pt x="1136" y="1"/>
+                  <a:pt x="595" y="1"/>
                 </a:lnTo>
                 <a:lnTo>
                   <a:pt x="0" y="1"/>
@@ -13605,216 +13360,156 @@
       </p:sp>
       <p:sp>
         <p:nvSpPr>
-          <p:cNvPr id="281" name="" descr="{&quot;isTemplate&quot;:true,&quot;type&quot;:&quot;text&quot;}"/>
-          <p:cNvSpPr txBox="1"/>
-          <p:nvPr/>
-        </p:nvSpPr>
-        <p:spPr>
-          <a:xfrm rot="0" flipH="0" flipV="0">
-            <a:off x="685800" y="3371850"/>
-            <a:ext cx="2000250" cy="200025"/>
-          </a:xfrm>
-          <a:prstGeom prst="rect"/>
-        </p:spPr>
-        <p:txBody>
-          <a:bodyPr wrap="none" lIns="0" tIns="0" rIns="0" bIns="0"/>
-          <a:p>
-            <a:pPr>
-              <a:lnSpc>
-                <a:spcPct val="100000"/>
-              </a:lnSpc>
-            </a:pPr>
-            <a:r>
-              <a:rPr lang="zh-CN" sz="1275">
-                <a:solidFill>
-                  <a:srgbClr val="F2F4FF"/>
-                </a:solidFill>
-                <a:latin typeface="Microsoft YaHei"/>
-                <a:ea typeface="Microsoft YaHei"/>
-              </a:rPr>
-              <a:t>综合毛利率</a:t>
-            </a:r>
-            <a:endParaRPr/>
-          </a:p>
-        </p:txBody>
-      </p:sp>
-      <p:sp>
-        <p:nvSpPr>
-          <p:cNvPr id="282" name="" descr="{&quot;isTemplate&quot;:true,&quot;type&quot;:&quot;text&quot;}"/>
-          <p:cNvSpPr txBox="1"/>
-          <p:nvPr/>
-        </p:nvSpPr>
-        <p:spPr>
-          <a:xfrm rot="0" flipH="0" flipV="0">
-            <a:off x="2686050" y="3371850"/>
-            <a:ext cx="1238250" cy="200025"/>
-          </a:xfrm>
-          <a:prstGeom prst="rect"/>
-        </p:spPr>
-        <p:txBody>
-          <a:bodyPr wrap="none" lIns="0" tIns="0" rIns="0" bIns="0"/>
-          <a:p>
-            <a:pPr>
-              <a:lnSpc>
-                <a:spcPct val="100000"/>
-              </a:lnSpc>
-            </a:pPr>
-            <a:r>
-              <a:rPr lang="en-US" sz="1275">
-                <a:solidFill>
-                  <a:srgbClr val="8A90A6"/>
-                </a:solidFill>
-                <a:latin typeface="Microsoft YaHei"/>
-                <a:ea typeface="Microsoft YaHei"/>
-              </a:rPr>
-              <a:t>58.2%</a:t>
-            </a:r>
-            <a:endParaRPr/>
-          </a:p>
-        </p:txBody>
-      </p:sp>
-      <p:sp>
-        <p:nvSpPr>
-          <p:cNvPr id="283" name="" descr="{&quot;isTemplate&quot;:true,&quot;type&quot;:&quot;text&quot;}"/>
-          <p:cNvSpPr txBox="1"/>
-          <p:nvPr/>
-        </p:nvSpPr>
-        <p:spPr>
-          <a:xfrm rot="0" flipH="0" flipV="0">
-            <a:off x="3924300" y="3295650"/>
-            <a:ext cx="1428750" cy="342900"/>
-          </a:xfrm>
-          <a:prstGeom prst="rect"/>
-        </p:spPr>
-        <p:txBody>
-          <a:bodyPr wrap="none" lIns="0" tIns="0" rIns="0" bIns="0"/>
-          <a:p>
-            <a:pPr>
-              <a:lnSpc>
-                <a:spcPct val="100000"/>
-              </a:lnSpc>
-            </a:pPr>
-            <a:r>
-              <a:rPr lang="en-US" sz="2250" b="1">
+          <p:cNvPr id="274" name="" descr="{&quot;isTemplate&quot;:true,&quot;type&quot;:&quot;text&quot;}"/>
+          <p:cNvSpPr txBox="1"/>
+          <p:nvPr/>
+        </p:nvSpPr>
+        <p:spPr>
+          <a:xfrm rot="0" flipH="0" flipV="0">
+            <a:off x="685800" y="3019425"/>
+            <a:ext cx="914400" cy="304800"/>
+          </a:xfrm>
+          <a:prstGeom prst="rect"/>
+        </p:spPr>
+        <p:txBody>
+          <a:bodyPr wrap="none" lIns="0" tIns="0" rIns="0" bIns="0"/>
+          <a:p>
+            <a:pPr>
+              <a:lnSpc>
+                <a:spcPct val="100000"/>
+              </a:lnSpc>
+            </a:pPr>
+            <a:r>
+              <a:rPr lang="en-US" sz="1950" b="1">
                 <a:solidFill>
                   <a:srgbClr val="6C6CF5"/>
                 </a:solidFill>
                 <a:latin typeface="Microsoft YaHei"/>
                 <a:ea typeface="Microsoft YaHei"/>
               </a:rPr>
-              <a:t>60.4%</a:t>
-            </a:r>
-            <a:endParaRPr/>
-          </a:p>
-        </p:txBody>
-      </p:sp>
-      <p:sp>
-        <p:nvSpPr>
-          <p:cNvPr id="284" name="" descr="{&quot;isTemplate&quot;:true,&quot;type&quot;:&quot;text&quot;}"/>
-          <p:cNvSpPr txBox="1"/>
-          <p:nvPr/>
-        </p:nvSpPr>
-        <p:spPr>
-          <a:xfrm rot="0" flipH="0" flipV="0">
-            <a:off x="5353050" y="3390900"/>
-            <a:ext cx="6153150" cy="152400"/>
-          </a:xfrm>
-          <a:prstGeom prst="rect"/>
-        </p:spPr>
-        <p:txBody>
-          <a:bodyPr wrap="none" lIns="0" tIns="0" rIns="0" bIns="0"/>
-          <a:p>
-            <a:pPr>
-              <a:lnSpc>
-                <a:spcPct val="100000"/>
-              </a:lnSpc>
-            </a:pPr>
-            <a:r>
-              <a:rPr lang="en-US" sz="975">
-                <a:solidFill>
-                  <a:srgbClr val="4A5064"/>
-                </a:solidFill>
-                <a:latin typeface="Microsoft YaHei"/>
-                <a:ea typeface="Microsoft YaHei"/>
-              </a:rPr>
-              <a:t>(</a:t>
-            </a:r>
-            <a:r>
-              <a:rPr lang="zh-CN" sz="975">
-                <a:solidFill>
-                  <a:srgbClr val="4A5064"/>
-                </a:solidFill>
-                <a:latin typeface="Microsoft YaHei"/>
-                <a:ea typeface="Microsoft YaHei"/>
-              </a:rPr>
-              <a:t>营收</a:t>
-            </a:r>
-            <a:r>
-              <a:rPr lang="en-US" sz="975">
-                <a:solidFill>
-                  <a:srgbClr val="4A5064"/>
-                </a:solidFill>
-                <a:latin typeface="Microsoft YaHei"/>
-                <a:ea typeface="Microsoft YaHei"/>
-              </a:rPr>
-              <a:t xml:space="preserve"> − </a:t>
-            </a:r>
-            <a:r>
-              <a:rPr lang="zh-CN" sz="975">
-                <a:solidFill>
-                  <a:srgbClr val="4A5064"/>
-                </a:solidFill>
-                <a:latin typeface="Microsoft YaHei"/>
-                <a:ea typeface="Microsoft YaHei"/>
-              </a:rPr>
-              <a:t>食材成本</a:t>
-            </a:r>
-            <a:r>
-              <a:rPr lang="en-US" sz="975">
-                <a:solidFill>
-                  <a:srgbClr val="4A5064"/>
-                </a:solidFill>
-                <a:latin typeface="Microsoft YaHei"/>
-                <a:ea typeface="Microsoft YaHei"/>
-              </a:rPr>
-              <a:t xml:space="preserve">) ÷ </a:t>
-            </a:r>
-            <a:r>
-              <a:rPr lang="zh-CN" sz="975">
-                <a:solidFill>
-                  <a:srgbClr val="4A5064"/>
-                </a:solidFill>
-                <a:latin typeface="Microsoft YaHei"/>
-                <a:ea typeface="Microsoft YaHei"/>
-              </a:rPr>
-              <a:t>营收</a:t>
-            </a:r>
-            <a:endParaRPr/>
-          </a:p>
-        </p:txBody>
-      </p:sp>
-      <p:sp>
-        <p:nvSpPr>
-          <p:cNvPr id="285" name=""/>
+              <a:t xml:space="preserve">19 </a:t>
+            </a:r>
+            <a:r>
+              <a:rPr lang="zh-CN" sz="1950" b="1">
+                <a:solidFill>
+                  <a:srgbClr val="6C6CF5"/>
+                </a:solidFill>
+                <a:latin typeface="Microsoft YaHei"/>
+                <a:ea typeface="Microsoft YaHei"/>
+              </a:rPr>
+              <a:t>道</a:t>
+            </a:r>
+            <a:endParaRPr/>
+          </a:p>
+        </p:txBody>
+      </p:sp>
+      <p:sp>
+        <p:nvSpPr>
+          <p:cNvPr id="275" name="" descr="{&quot;isTemplate&quot;:true,&quot;type&quot;:&quot;text&quot;}"/>
+          <p:cNvSpPr txBox="1"/>
+          <p:nvPr/>
+        </p:nvSpPr>
+        <p:spPr>
+          <a:xfrm rot="0" flipH="0" flipV="0">
+            <a:off x="1600200" y="3019425"/>
+            <a:ext cx="2000250" cy="304800"/>
+          </a:xfrm>
+          <a:prstGeom prst="rect"/>
+        </p:spPr>
+        <p:txBody>
+          <a:bodyPr wrap="none" lIns="0" tIns="0" rIns="0" bIns="0"/>
+          <a:p>
+            <a:pPr>
+              <a:lnSpc>
+                <a:spcPct val="100000"/>
+              </a:lnSpc>
+            </a:pPr>
+            <a:r>
+              <a:rPr lang="zh-CN" sz="1050">
+                <a:solidFill>
+                  <a:srgbClr val="F2F4FF"/>
+                </a:solidFill>
+                <a:latin typeface="Microsoft YaHei"/>
+                <a:ea typeface="Microsoft YaHei"/>
+              </a:rPr>
+              <a:t>菜连续</a:t>
+            </a:r>
+            <a:r>
+              <a:rPr lang="en-US" sz="1050">
+                <a:solidFill>
+                  <a:srgbClr val="F2F4FF"/>
+                </a:solidFill>
+                <a:latin typeface="Microsoft YaHei"/>
+                <a:ea typeface="Microsoft YaHei"/>
+              </a:rPr>
+              <a:t xml:space="preserve"> 3 </a:t>
+            </a:r>
+            <a:r>
+              <a:rPr lang="zh-CN" sz="1050">
+                <a:solidFill>
+                  <a:srgbClr val="F2F4FF"/>
+                </a:solidFill>
+                <a:latin typeface="Microsoft YaHei"/>
+                <a:ea typeface="Microsoft YaHei"/>
+              </a:rPr>
+              <a:t>天</a:t>
+            </a:r>
+            <a:r>
+              <a:rPr lang="en-US" sz="1050">
+                <a:solidFill>
+                  <a:srgbClr val="F2F4FF"/>
+                </a:solidFill>
+                <a:latin typeface="Microsoft YaHei"/>
+                <a:ea typeface="Microsoft YaHei"/>
+              </a:rPr>
+              <a:t xml:space="preserve"> 0 </a:t>
+            </a:r>
+            <a:r>
+              <a:rPr lang="zh-CN" sz="1050">
+                <a:solidFill>
+                  <a:srgbClr val="F2F4FF"/>
+                </a:solidFill>
+                <a:latin typeface="Microsoft YaHei"/>
+                <a:ea typeface="Microsoft YaHei"/>
+              </a:rPr>
+              <a:t>销量，占在售</a:t>
+            </a:r>
+            <a:r>
+              <a:rPr lang="en-US" sz="1050">
+                <a:solidFill>
+                  <a:srgbClr val="F2F4FF"/>
+                </a:solidFill>
+                <a:latin typeface="Microsoft YaHei"/>
+                <a:ea typeface="Microsoft YaHei"/>
+              </a:rPr>
+              <a:t xml:space="preserve"> 9.2%</a:t>
+            </a:r>
+            <a:endParaRPr/>
+          </a:p>
+        </p:txBody>
+      </p:sp>
+      <p:sp>
+        <p:nvSpPr>
+          <p:cNvPr id="276" name=""/>
           <p:cNvSpPr/>
           <p:nvPr/>
         </p:nvSpPr>
         <p:spPr>
           <a:xfrm rot="0" flipH="0" flipV="0">
-            <a:off x="685800" y="3790950"/>
-            <a:ext cx="10820400" cy="666750"/>
+            <a:off x="685800" y="3438525"/>
+            <a:ext cx="5667375" cy="552450"/>
           </a:xfrm>
           <a:custGeom>
             <a:pathLst>
-              <a:path w="1136" h="70">
+              <a:path w="595" h="58">
                 <a:moveTo>
                   <a:pt x="0" y="0"/>
                 </a:moveTo>
                 <a:lnTo>
-                  <a:pt x="1136" y="0"/>
+                  <a:pt x="595" y="0"/>
                 </a:lnTo>
                 <a:lnTo>
-                  <a:pt x="1136" y="1"/>
+                  <a:pt x="595" y="1"/>
                 </a:lnTo>
                 <a:lnTo>
                   <a:pt x="0" y="1"/>
@@ -13835,178 +13530,328 @@
       </p:sp>
       <p:sp>
         <p:nvSpPr>
-          <p:cNvPr id="286" name="" descr="{&quot;isTemplate&quot;:true,&quot;type&quot;:&quot;text&quot;}"/>
-          <p:cNvSpPr txBox="1"/>
-          <p:nvPr/>
-        </p:nvSpPr>
-        <p:spPr>
-          <a:xfrm rot="0" flipH="0" flipV="0">
-            <a:off x="685800" y="4029075"/>
-            <a:ext cx="2000250" cy="200025"/>
-          </a:xfrm>
-          <a:prstGeom prst="rect"/>
-        </p:spPr>
-        <p:txBody>
-          <a:bodyPr wrap="none" lIns="0" tIns="0" rIns="0" bIns="0"/>
-          <a:p>
-            <a:pPr>
-              <a:lnSpc>
-                <a:spcPct val="100000"/>
-              </a:lnSpc>
-            </a:pPr>
-            <a:r>
-              <a:rPr lang="zh-CN" sz="1275">
-                <a:solidFill>
-                  <a:srgbClr val="F2F4FF"/>
-                </a:solidFill>
-                <a:latin typeface="Microsoft YaHei"/>
-                <a:ea typeface="Microsoft YaHei"/>
-              </a:rPr>
-              <a:t>老板看数时间</a:t>
-            </a:r>
-            <a:endParaRPr/>
-          </a:p>
-        </p:txBody>
-      </p:sp>
-      <p:sp>
-        <p:nvSpPr>
-          <p:cNvPr id="287" name="" descr="{&quot;isTemplate&quot;:true,&quot;type&quot;:&quot;text&quot;}"/>
-          <p:cNvSpPr txBox="1"/>
-          <p:nvPr/>
-        </p:nvSpPr>
-        <p:spPr>
-          <a:xfrm rot="0" flipH="0" flipV="0">
-            <a:off x="2686050" y="4029075"/>
-            <a:ext cx="1238250" cy="200025"/>
-          </a:xfrm>
-          <a:prstGeom prst="rect"/>
-        </p:spPr>
-        <p:txBody>
-          <a:bodyPr wrap="none" lIns="0" tIns="0" rIns="0" bIns="0"/>
-          <a:p>
-            <a:pPr>
-              <a:lnSpc>
-                <a:spcPct val="100000"/>
-              </a:lnSpc>
-            </a:pPr>
-            <a:r>
-              <a:rPr lang="en-US" sz="1275">
-                <a:solidFill>
-                  <a:srgbClr val="8A90A6"/>
-                </a:solidFill>
-                <a:latin typeface="Microsoft YaHei"/>
-                <a:ea typeface="Microsoft YaHei"/>
-              </a:rPr>
-              <a:t xml:space="preserve">30 </a:t>
-            </a:r>
-            <a:r>
-              <a:rPr lang="zh-CN" sz="1275">
-                <a:solidFill>
-                  <a:srgbClr val="8A90A6"/>
-                </a:solidFill>
-                <a:latin typeface="Microsoft YaHei"/>
-                <a:ea typeface="Microsoft YaHei"/>
-              </a:rPr>
-              <a:t>分钟</a:t>
-            </a:r>
-            <a:endParaRPr/>
-          </a:p>
-        </p:txBody>
-      </p:sp>
-      <p:sp>
-        <p:nvSpPr>
-          <p:cNvPr id="288" name="" descr="{&quot;isTemplate&quot;:true,&quot;type&quot;:&quot;text&quot;}"/>
-          <p:cNvSpPr txBox="1"/>
-          <p:nvPr/>
-        </p:nvSpPr>
-        <p:spPr>
-          <a:xfrm rot="0" flipH="0" flipV="0">
-            <a:off x="3924300" y="3952875"/>
-            <a:ext cx="1428750" cy="342900"/>
-          </a:xfrm>
-          <a:prstGeom prst="rect"/>
-        </p:spPr>
-        <p:txBody>
-          <a:bodyPr wrap="none" lIns="0" tIns="0" rIns="0" bIns="0"/>
-          <a:p>
-            <a:pPr>
-              <a:lnSpc>
-                <a:spcPct val="100000"/>
-              </a:lnSpc>
-            </a:pPr>
-            <a:r>
-              <a:rPr lang="en-US" sz="2250" b="1">
+          <p:cNvPr id="277" name="" descr="{&quot;isTemplate&quot;:true,&quot;type&quot;:&quot;text&quot;}"/>
+          <p:cNvSpPr txBox="1"/>
+          <p:nvPr/>
+        </p:nvSpPr>
+        <p:spPr>
+          <a:xfrm rot="0" flipH="0" flipV="0">
+            <a:off x="685800" y="3562350"/>
+            <a:ext cx="914400" cy="304800"/>
+          </a:xfrm>
+          <a:prstGeom prst="rect"/>
+        </p:spPr>
+        <p:txBody>
+          <a:bodyPr wrap="none" lIns="0" tIns="0" rIns="0" bIns="0"/>
+          <a:p>
+            <a:pPr>
+              <a:lnSpc>
+                <a:spcPct val="100000"/>
+              </a:lnSpc>
+            </a:pPr>
+            <a:r>
+              <a:rPr lang="en-US" sz="1950" b="1">
                 <a:solidFill>
                   <a:srgbClr val="6C6CF5"/>
                 </a:solidFill>
                 <a:latin typeface="Microsoft YaHei"/>
                 <a:ea typeface="Microsoft YaHei"/>
               </a:rPr>
-              <a:t xml:space="preserve">3 </a:t>
-            </a:r>
-            <a:r>
-              <a:rPr lang="zh-CN" sz="2250" b="1">
+              <a:t xml:space="preserve">5 </a:t>
+            </a:r>
+            <a:r>
+              <a:rPr lang="zh-CN" sz="1950" b="1">
                 <a:solidFill>
                   <a:srgbClr val="6C6CF5"/>
                 </a:solidFill>
                 <a:latin typeface="Microsoft YaHei"/>
                 <a:ea typeface="Microsoft YaHei"/>
               </a:rPr>
-              <a:t>分钟</a:t>
-            </a:r>
-            <a:endParaRPr/>
-          </a:p>
-        </p:txBody>
-      </p:sp>
-      <p:sp>
-        <p:nvSpPr>
-          <p:cNvPr id="289" name="" descr="{&quot;isTemplate&quot;:true,&quot;type&quot;:&quot;text&quot;}"/>
-          <p:cNvSpPr txBox="1"/>
-          <p:nvPr/>
-        </p:nvSpPr>
-        <p:spPr>
-          <a:xfrm rot="0" flipH="0" flipV="0">
-            <a:off x="5353050" y="4048125"/>
-            <a:ext cx="6153150" cy="152400"/>
-          </a:xfrm>
-          <a:prstGeom prst="rect"/>
-        </p:spPr>
-        <p:txBody>
-          <a:bodyPr wrap="none" lIns="0" tIns="0" rIns="0" bIns="0"/>
-          <a:p>
-            <a:pPr>
-              <a:lnSpc>
-                <a:spcPct val="100000"/>
-              </a:lnSpc>
-            </a:pPr>
-            <a:r>
-              <a:rPr lang="zh-CN" sz="975">
-                <a:solidFill>
-                  <a:srgbClr val="4A5064"/>
-                </a:solidFill>
-                <a:latin typeface="Microsoft YaHei"/>
-                <a:ea typeface="Microsoft YaHei"/>
-              </a:rPr>
-              <a:t>驾驶舱首屏决策耗时</a:t>
-            </a:r>
-            <a:endParaRPr/>
-          </a:p>
-        </p:txBody>
-      </p:sp>
-      <p:sp>
-        <p:nvSpPr>
-          <p:cNvPr id="290" name=""/>
+              <a:t>种</a:t>
+            </a:r>
+            <a:endParaRPr/>
+          </a:p>
+        </p:txBody>
+      </p:sp>
+      <p:sp>
+        <p:nvSpPr>
+          <p:cNvPr id="278" name="" descr="{&quot;isTemplate&quot;:true,&quot;type&quot;:&quot;text&quot;}"/>
+          <p:cNvSpPr txBox="1"/>
+          <p:nvPr/>
+        </p:nvSpPr>
+        <p:spPr>
+          <a:xfrm rot="0" flipH="0" flipV="0">
+            <a:off x="1600200" y="3562350"/>
+            <a:ext cx="2562225" cy="304800"/>
+          </a:xfrm>
+          <a:prstGeom prst="rect"/>
+        </p:spPr>
+        <p:txBody>
+          <a:bodyPr wrap="none" lIns="0" tIns="0" rIns="0" bIns="0"/>
+          <a:p>
+            <a:pPr>
+              <a:lnSpc>
+                <a:spcPct val="100000"/>
+              </a:lnSpc>
+            </a:pPr>
+            <a:r>
+              <a:rPr lang="zh-CN" sz="1050">
+                <a:solidFill>
+                  <a:srgbClr val="F2F4FF"/>
+                </a:solidFill>
+                <a:latin typeface="Microsoft YaHei"/>
+                <a:ea typeface="Microsoft YaHei"/>
+              </a:rPr>
+              <a:t>食材可支撑不足</a:t>
+            </a:r>
+            <a:r>
+              <a:rPr lang="en-US" sz="1050">
+                <a:solidFill>
+                  <a:srgbClr val="F2F4FF"/>
+                </a:solidFill>
+                <a:latin typeface="Microsoft YaHei"/>
+                <a:ea typeface="Microsoft YaHei"/>
+              </a:rPr>
+              <a:t xml:space="preserve"> 2 </a:t>
+            </a:r>
+            <a:r>
+              <a:rPr lang="zh-CN" sz="1050">
+                <a:solidFill>
+                  <a:srgbClr val="F2F4FF"/>
+                </a:solidFill>
+                <a:latin typeface="Microsoft YaHei"/>
+                <a:ea typeface="Microsoft YaHei"/>
+              </a:rPr>
+              <a:t>天（基围虾只剩</a:t>
+            </a:r>
+            <a:r>
+              <a:rPr lang="en-US" sz="1050">
+                <a:solidFill>
+                  <a:srgbClr val="F2F4FF"/>
+                </a:solidFill>
+                <a:latin typeface="Microsoft YaHei"/>
+                <a:ea typeface="Microsoft YaHei"/>
+              </a:rPr>
+              <a:t xml:space="preserve"> 1.5 </a:t>
+            </a:r>
+            <a:r>
+              <a:rPr lang="zh-CN" sz="1050">
+                <a:solidFill>
+                  <a:srgbClr val="F2F4FF"/>
+                </a:solidFill>
+                <a:latin typeface="Microsoft YaHei"/>
+                <a:ea typeface="Microsoft YaHei"/>
+              </a:rPr>
+              <a:t>天）</a:t>
+            </a:r>
+            <a:endParaRPr/>
+          </a:p>
+        </p:txBody>
+      </p:sp>
+      <p:sp>
+        <p:nvSpPr>
+          <p:cNvPr id="279" name=""/>
           <p:cNvSpPr/>
           <p:nvPr/>
         </p:nvSpPr>
         <p:spPr>
           <a:xfrm rot="0" flipH="0" flipV="0">
-            <a:off x="685800" y="4695825"/>
-            <a:ext cx="10820400" cy="876300"/>
+            <a:off x="685800" y="3981450"/>
+            <a:ext cx="5667375" cy="571500"/>
+          </a:xfrm>
+          <a:custGeom>
+            <a:pathLst>
+              <a:path w="595" h="60">
+                <a:moveTo>
+                  <a:pt x="0" y="0"/>
+                </a:moveTo>
+                <a:lnTo>
+                  <a:pt x="595" y="0"/>
+                </a:lnTo>
+                <a:lnTo>
+                  <a:pt x="595" y="1"/>
+                </a:lnTo>
+                <a:lnTo>
+                  <a:pt x="0" y="1"/>
+                </a:lnTo>
+                <a:close/>
+              </a:path>
+            </a:pathLst>
+          </a:custGeom>
+          <a:solidFill>
+            <a:srgbClr val="242A3D"/>
+          </a:solidFill>
+          <a:ln/>
+        </p:spPr>
+        <p:txBody>
+          <a:bodyPr/>
+          <a:p/>
+        </p:txBody>
+      </p:sp>
+      <p:sp>
+        <p:nvSpPr>
+          <p:cNvPr id="280" name=""/>
+          <p:cNvSpPr/>
+          <p:nvPr/>
+        </p:nvSpPr>
+        <p:spPr>
+          <a:xfrm rot="0" flipH="0" flipV="0">
+            <a:off x="685800" y="3981450"/>
+            <a:ext cx="5667375" cy="571500"/>
+          </a:xfrm>
+          <a:custGeom>
+            <a:pathLst>
+              <a:path w="595" h="60">
+                <a:moveTo>
+                  <a:pt x="0" y="59"/>
+                </a:moveTo>
+                <a:lnTo>
+                  <a:pt x="595" y="59"/>
+                </a:lnTo>
+                <a:lnTo>
+                  <a:pt x="595" y="60"/>
+                </a:lnTo>
+                <a:lnTo>
+                  <a:pt x="0" y="60"/>
+                </a:lnTo>
+                <a:close/>
+              </a:path>
+            </a:pathLst>
+          </a:custGeom>
+          <a:solidFill>
+            <a:srgbClr val="242A3D"/>
+          </a:solidFill>
+          <a:ln/>
+        </p:spPr>
+        <p:txBody>
+          <a:bodyPr/>
+          <a:p/>
+        </p:txBody>
+      </p:sp>
+      <p:sp>
+        <p:nvSpPr>
+          <p:cNvPr id="281" name="" descr="{&quot;isTemplate&quot;:true,&quot;type&quot;:&quot;text&quot;}"/>
+          <p:cNvSpPr txBox="1"/>
+          <p:nvPr/>
+        </p:nvSpPr>
+        <p:spPr>
+          <a:xfrm rot="0" flipH="0" flipV="0">
+            <a:off x="685800" y="4105275"/>
+            <a:ext cx="914400" cy="304800"/>
+          </a:xfrm>
+          <a:prstGeom prst="rect"/>
+        </p:spPr>
+        <p:txBody>
+          <a:bodyPr wrap="none" lIns="0" tIns="0" rIns="0" bIns="0"/>
+          <a:p>
+            <a:pPr>
+              <a:lnSpc>
+                <a:spcPct val="100000"/>
+              </a:lnSpc>
+            </a:pPr>
+            <a:r>
+              <a:rPr lang="en-US" sz="1950" b="1">
+                <a:solidFill>
+                  <a:srgbClr val="6C6CF5"/>
+                </a:solidFill>
+                <a:latin typeface="Microsoft YaHei"/>
+                <a:ea typeface="Microsoft YaHei"/>
+              </a:rPr>
+              <a:t>57.6%</a:t>
+            </a:r>
+            <a:endParaRPr/>
+          </a:p>
+        </p:txBody>
+      </p:sp>
+      <p:sp>
+        <p:nvSpPr>
+          <p:cNvPr id="282" name="" descr="{&quot;isTemplate&quot;:true,&quot;type&quot;:&quot;text&quot;}"/>
+          <p:cNvSpPr txBox="1"/>
+          <p:nvPr/>
+        </p:nvSpPr>
+        <p:spPr>
+          <a:xfrm rot="0" flipH="0" flipV="0">
+            <a:off x="1600200" y="4105275"/>
+            <a:ext cx="2105025" cy="304800"/>
+          </a:xfrm>
+          <a:prstGeom prst="rect"/>
+        </p:spPr>
+        <p:txBody>
+          <a:bodyPr wrap="none" lIns="0" tIns="0" rIns="0" bIns="0"/>
+          <a:p>
+            <a:pPr>
+              <a:lnSpc>
+                <a:spcPct val="100000"/>
+              </a:lnSpc>
+            </a:pPr>
+            <a:r>
+              <a:rPr lang="zh-CN" sz="1050">
+                <a:solidFill>
+                  <a:srgbClr val="F2F4FF"/>
+                </a:solidFill>
+                <a:latin typeface="Microsoft YaHei"/>
+                <a:ea typeface="Microsoft YaHei"/>
+              </a:rPr>
+              <a:t>近</a:t>
+            </a:r>
+            <a:r>
+              <a:rPr lang="en-US" sz="1050">
+                <a:solidFill>
+                  <a:srgbClr val="F2F4FF"/>
+                </a:solidFill>
+                <a:latin typeface="Microsoft YaHei"/>
+                <a:ea typeface="Microsoft YaHei"/>
+              </a:rPr>
+              <a:t xml:space="preserve"> 30 </a:t>
+            </a:r>
+            <a:r>
+              <a:rPr lang="zh-CN" sz="1050">
+                <a:solidFill>
+                  <a:srgbClr val="F2F4FF"/>
+                </a:solidFill>
+                <a:latin typeface="Microsoft YaHei"/>
+                <a:ea typeface="Microsoft YaHei"/>
+              </a:rPr>
+              <a:t>天毛利率，比目标低</a:t>
+            </a:r>
+            <a:r>
+              <a:rPr lang="en-US" sz="1050">
+                <a:solidFill>
+                  <a:srgbClr val="F2F4FF"/>
+                </a:solidFill>
+                <a:latin typeface="Microsoft YaHei"/>
+                <a:ea typeface="Microsoft YaHei"/>
+              </a:rPr>
+              <a:t xml:space="preserve"> 2.4 </a:t>
+            </a:r>
+            <a:r>
+              <a:rPr lang="zh-CN" sz="1050">
+                <a:solidFill>
+                  <a:srgbClr val="F2F4FF"/>
+                </a:solidFill>
+                <a:latin typeface="Microsoft YaHei"/>
+                <a:ea typeface="Microsoft YaHei"/>
+              </a:rPr>
+              <a:t>个点</a:t>
+            </a:r>
+            <a:endParaRPr/>
+          </a:p>
+        </p:txBody>
+      </p:sp>
+      <p:sp>
+        <p:nvSpPr>
+          <p:cNvPr id="283" name=""/>
+          <p:cNvSpPr/>
+          <p:nvPr/>
+        </p:nvSpPr>
+        <p:spPr>
+          <a:xfrm rot="0" flipH="0" flipV="0">
+            <a:off x="6581775" y="1524000"/>
+            <a:ext cx="4924425" cy="3686175"/>
           </a:xfrm>
           <a:prstGeom prst="roundRect">
             <a:avLst>
-              <a:gd name="adj" fmla="val 13043"/>
+              <a:gd name="adj" fmla="val 3618"/>
             </a:avLst>
           </a:prstGeom>
           <a:solidFill>
@@ -14026,192 +13871,535 @@
       </p:sp>
       <p:sp>
         <p:nvSpPr>
+          <p:cNvPr id="284" name="" descr="{&quot;isTemplate&quot;:true,&quot;type&quot;:&quot;text&quot;}"/>
+          <p:cNvSpPr txBox="1"/>
+          <p:nvPr/>
+        </p:nvSpPr>
+        <p:spPr>
+          <a:xfrm rot="0" flipH="0" flipV="0">
+            <a:off x="6867525" y="1809750"/>
+            <a:ext cx="4352925" cy="152400"/>
+          </a:xfrm>
+          <a:prstGeom prst="rect"/>
+        </p:spPr>
+        <p:txBody>
+          <a:bodyPr wrap="none" lIns="0" tIns="0" rIns="0" bIns="0"/>
+          <a:p>
+            <a:pPr>
+              <a:lnSpc>
+                <a:spcPct val="100000"/>
+              </a:lnSpc>
+            </a:pPr>
+            <a:r>
+              <a:rPr lang="zh-CN" sz="975" spc="75">
+                <a:solidFill>
+                  <a:srgbClr val="6C6CF5"/>
+                </a:solidFill>
+                <a:latin typeface="Microsoft YaHei"/>
+                <a:ea typeface="Microsoft YaHei"/>
+              </a:rPr>
+              <a:t>测算</a:t>
+            </a:r>
+            <a:r>
+              <a:rPr lang="en-US" sz="975" spc="75">
+                <a:solidFill>
+                  <a:srgbClr val="6C6CF5"/>
+                </a:solidFill>
+                <a:latin typeface="Microsoft YaHei"/>
+                <a:ea typeface="Microsoft YaHei"/>
+              </a:rPr>
+              <a:t xml:space="preserve"> · </a:t>
+            </a:r>
+            <a:r>
+              <a:rPr lang="zh-CN" sz="975" spc="75">
+                <a:solidFill>
+                  <a:srgbClr val="6C6CF5"/>
+                </a:solidFill>
+                <a:latin typeface="Microsoft YaHei"/>
+                <a:ea typeface="Microsoft YaHei"/>
+              </a:rPr>
+              <a:t>补齐这</a:t>
+            </a:r>
+            <a:r>
+              <a:rPr lang="en-US" sz="975" spc="75">
+                <a:solidFill>
+                  <a:srgbClr val="6C6CF5"/>
+                </a:solidFill>
+                <a:latin typeface="Microsoft YaHei"/>
+                <a:ea typeface="Microsoft YaHei"/>
+              </a:rPr>
+              <a:t xml:space="preserve"> 2.4 </a:t>
+            </a:r>
+            <a:r>
+              <a:rPr lang="zh-CN" sz="975" spc="75">
+                <a:solidFill>
+                  <a:srgbClr val="6C6CF5"/>
+                </a:solidFill>
+                <a:latin typeface="Microsoft YaHei"/>
+                <a:ea typeface="Microsoft YaHei"/>
+              </a:rPr>
+              <a:t>个点</a:t>
+            </a:r>
+            <a:endParaRPr/>
+          </a:p>
+        </p:txBody>
+      </p:sp>
+      <p:sp>
+        <p:nvSpPr>
+          <p:cNvPr id="285" name="" descr="{&quot;isTemplate&quot;:true,&quot;type&quot;:&quot;text&quot;}"/>
+          <p:cNvSpPr txBox="1"/>
+          <p:nvPr/>
+        </p:nvSpPr>
+        <p:spPr>
+          <a:xfrm rot="0" flipH="0" flipV="0">
+            <a:off x="6867525" y="2019300"/>
+            <a:ext cx="4352925" cy="647700"/>
+          </a:xfrm>
+          <a:prstGeom prst="rect"/>
+        </p:spPr>
+        <p:txBody>
+          <a:bodyPr wrap="none" lIns="0" tIns="0" rIns="0" bIns="0"/>
+          <a:p>
+            <a:pPr>
+              <a:lnSpc>
+                <a:spcPct val="100000"/>
+              </a:lnSpc>
+            </a:pPr>
+            <a:r>
+              <a:rPr lang="en-US" sz="4200" b="1" spc="-75">
+                <a:solidFill>
+                  <a:srgbClr val="F2F4FF"/>
+                </a:solidFill>
+                <a:latin typeface="Microsoft YaHei"/>
+                <a:ea typeface="Microsoft YaHei"/>
+              </a:rPr>
+              <a:t>+9.4</a:t>
+            </a:r>
+            <a:r>
+              <a:rPr lang="en-US" sz="1650" b="1" spc="-75">
+                <a:solidFill>
+                  <a:srgbClr val="F2F4FF"/>
+                </a:solidFill>
+                <a:latin typeface="Microsoft YaHei"/>
+                <a:ea typeface="Microsoft YaHei"/>
+              </a:rPr>
+              <a:t xml:space="preserve"> </a:t>
+            </a:r>
+            <a:r>
+              <a:rPr lang="zh-CN" sz="1650" b="1" spc="-75">
+                <a:solidFill>
+                  <a:srgbClr val="F2F4FF"/>
+                </a:solidFill>
+                <a:latin typeface="Microsoft YaHei"/>
+                <a:ea typeface="Microsoft YaHei"/>
+              </a:rPr>
+              <a:t>万</a:t>
+            </a:r>
+            <a:r>
+              <a:rPr lang="en-US" sz="1650" b="1" spc="-75">
+                <a:solidFill>
+                  <a:srgbClr val="F2F4FF"/>
+                </a:solidFill>
+                <a:latin typeface="Microsoft YaHei"/>
+                <a:ea typeface="Microsoft YaHei"/>
+              </a:rPr>
+              <a:t>/</a:t>
+            </a:r>
+            <a:r>
+              <a:rPr lang="zh-CN" sz="1650" b="1" spc="-75">
+                <a:solidFill>
+                  <a:srgbClr val="F2F4FF"/>
+                </a:solidFill>
+                <a:latin typeface="Microsoft YaHei"/>
+                <a:ea typeface="Microsoft YaHei"/>
+              </a:rPr>
+              <a:t>年</a:t>
+            </a:r>
+            <a:endParaRPr/>
+          </a:p>
+        </p:txBody>
+      </p:sp>
+      <p:sp>
+        <p:nvSpPr>
+          <p:cNvPr id="286" name="" descr="{&quot;isTemplate&quot;:true,&quot;type&quot;:&quot;text&quot;}"/>
+          <p:cNvSpPr txBox="1"/>
+          <p:nvPr/>
+        </p:nvSpPr>
+        <p:spPr>
+          <a:xfrm rot="0" flipH="0" flipV="0">
+            <a:off x="6867525" y="2724150"/>
+            <a:ext cx="4352925" cy="152400"/>
+          </a:xfrm>
+          <a:prstGeom prst="rect"/>
+        </p:spPr>
+        <p:txBody>
+          <a:bodyPr wrap="none" lIns="0" tIns="0" rIns="0" bIns="0"/>
+          <a:p>
+            <a:pPr>
+              <a:lnSpc>
+                <a:spcPct val="100000"/>
+              </a:lnSpc>
+            </a:pPr>
+            <a:r>
+              <a:rPr lang="zh-CN" sz="975">
+                <a:solidFill>
+                  <a:srgbClr val="8A90A6"/>
+                </a:solidFill>
+                <a:latin typeface="Microsoft YaHei"/>
+                <a:ea typeface="Microsoft YaHei"/>
+              </a:rPr>
+              <a:t>近</a:t>
+            </a:r>
+            <a:r>
+              <a:rPr lang="en-US" sz="975">
+                <a:solidFill>
+                  <a:srgbClr val="8A90A6"/>
+                </a:solidFill>
+                <a:latin typeface="Microsoft YaHei"/>
+                <a:ea typeface="Microsoft YaHei"/>
+              </a:rPr>
+              <a:t xml:space="preserve"> 30 </a:t>
+            </a:r>
+            <a:r>
+              <a:rPr lang="zh-CN" sz="975">
+                <a:solidFill>
+                  <a:srgbClr val="8A90A6"/>
+                </a:solidFill>
+                <a:latin typeface="Microsoft YaHei"/>
+                <a:ea typeface="Microsoft YaHei"/>
+              </a:rPr>
+              <a:t>天营收</a:t>
+            </a:r>
+            <a:r>
+              <a:rPr lang="en-US" sz="975">
+                <a:solidFill>
+                  <a:srgbClr val="8A90A6"/>
+                </a:solidFill>
+                <a:latin typeface="Microsoft YaHei"/>
+                <a:ea typeface="Microsoft YaHei"/>
+              </a:rPr>
+              <a:t xml:space="preserve"> 32.5 </a:t>
+            </a:r>
+            <a:r>
+              <a:rPr lang="zh-CN" sz="975">
+                <a:solidFill>
+                  <a:srgbClr val="8A90A6"/>
+                </a:solidFill>
+                <a:latin typeface="Microsoft YaHei"/>
+                <a:ea typeface="Microsoft YaHei"/>
+              </a:rPr>
+              <a:t>万</a:t>
+            </a:r>
+            <a:r>
+              <a:rPr lang="en-US" sz="975">
+                <a:solidFill>
+                  <a:srgbClr val="8A90A6"/>
+                </a:solidFill>
+                <a:latin typeface="Microsoft YaHei"/>
+                <a:ea typeface="Microsoft YaHei"/>
+              </a:rPr>
+              <a:t xml:space="preserve"> × 2.4pt × 12 </a:t>
+            </a:r>
+            <a:r>
+              <a:rPr lang="zh-CN" sz="975">
+                <a:solidFill>
+                  <a:srgbClr val="8A90A6"/>
+                </a:solidFill>
+                <a:latin typeface="Microsoft YaHei"/>
+                <a:ea typeface="Microsoft YaHei"/>
+              </a:rPr>
+              <a:t>个月</a:t>
+            </a:r>
+            <a:endParaRPr/>
+          </a:p>
+        </p:txBody>
+      </p:sp>
+      <p:sp>
+        <p:nvSpPr>
+          <p:cNvPr id="287" name=""/>
+          <p:cNvSpPr/>
+          <p:nvPr/>
+        </p:nvSpPr>
+        <p:spPr>
+          <a:xfrm rot="0" flipH="0" flipV="0">
+            <a:off x="6867525" y="3105150"/>
+            <a:ext cx="4352925" cy="1209675"/>
+          </a:xfrm>
+          <a:custGeom>
+            <a:pathLst>
+              <a:path w="457" h="127">
+                <a:moveTo>
+                  <a:pt x="0" y="0"/>
+                </a:moveTo>
+                <a:lnTo>
+                  <a:pt x="457" y="0"/>
+                </a:lnTo>
+                <a:lnTo>
+                  <a:pt x="457" y="1"/>
+                </a:lnTo>
+                <a:lnTo>
+                  <a:pt x="0" y="1"/>
+                </a:lnTo>
+                <a:close/>
+              </a:path>
+            </a:pathLst>
+          </a:custGeom>
+          <a:solidFill>
+            <a:srgbClr val="3A3F63"/>
+          </a:solidFill>
+          <a:ln/>
+        </p:spPr>
+        <p:txBody>
+          <a:bodyPr/>
+          <a:p/>
+        </p:txBody>
+      </p:sp>
+      <p:sp>
+        <p:nvSpPr>
+          <p:cNvPr id="288" name="" descr="{&quot;isTemplate&quot;:true,&quot;type&quot;:&quot;text&quot;}"/>
+          <p:cNvSpPr txBox="1"/>
+          <p:nvPr/>
+        </p:nvSpPr>
+        <p:spPr>
+          <a:xfrm rot="0" flipH="0" flipV="0">
+            <a:off x="6867525" y="3267075"/>
+            <a:ext cx="4352925" cy="152400"/>
+          </a:xfrm>
+          <a:prstGeom prst="rect"/>
+        </p:spPr>
+        <p:txBody>
+          <a:bodyPr wrap="none" lIns="0" tIns="0" rIns="0" bIns="0"/>
+          <a:p>
+            <a:pPr>
+              <a:lnSpc>
+                <a:spcPct val="100000"/>
+              </a:lnSpc>
+            </a:pPr>
+            <a:r>
+              <a:rPr lang="zh-CN" sz="975">
+                <a:solidFill>
+                  <a:srgbClr val="F2F4FF"/>
+                </a:solidFill>
+                <a:latin typeface="Microsoft YaHei"/>
+                <a:ea typeface="Microsoft YaHei"/>
+              </a:rPr>
+              <a:t>怎么补：</a:t>
+            </a:r>
+            <a:endParaRPr/>
+          </a:p>
+        </p:txBody>
+      </p:sp>
+      <p:sp>
+        <p:nvSpPr>
+          <p:cNvPr id="289" name="" descr="{&quot;isTemplate&quot;:true,&quot;type&quot;:&quot;text&quot;}"/>
+          <p:cNvSpPr txBox="1"/>
+          <p:nvPr/>
+        </p:nvSpPr>
+        <p:spPr>
+          <a:xfrm rot="0" flipH="0" flipV="0">
+            <a:off x="6867525" y="3495675"/>
+            <a:ext cx="4352925" cy="809625"/>
+          </a:xfrm>
+          <a:prstGeom prst="rect"/>
+        </p:spPr>
+        <p:txBody>
+          <a:bodyPr wrap="none" lIns="0" tIns="0" rIns="0" bIns="0"/>
+          <a:p>
+            <a:pPr>
+              <a:lnSpc>
+                <a:spcPct val="180000"/>
+              </a:lnSpc>
+            </a:pPr>
+            <a:r>
+              <a:rPr lang="en-US" sz="975">
+                <a:solidFill>
+                  <a:srgbClr val="8A90A6"/>
+                </a:solidFill>
+                <a:latin typeface="Microsoft YaHei"/>
+                <a:ea typeface="Microsoft YaHei"/>
+              </a:rPr>
+              <a:t xml:space="preserve">① 3 </a:t>
+            </a:r>
+            <a:r>
+              <a:rPr lang="zh-CN" sz="975">
+                <a:solidFill>
+                  <a:srgbClr val="8A90A6"/>
+                </a:solidFill>
+                <a:latin typeface="Microsoft YaHei"/>
+                <a:ea typeface="Microsoft YaHei"/>
+              </a:rPr>
+              <a:t>道瘦狗菜调价</a:t>
+            </a:r>
+            <a:r>
+              <a:rPr lang="en-US" sz="975">
+                <a:solidFill>
+                  <a:srgbClr val="8A90A6"/>
+                </a:solidFill>
+                <a:latin typeface="Microsoft YaHei"/>
+                <a:ea typeface="Microsoft YaHei"/>
+              </a:rPr>
+              <a:t xml:space="preserve"> 5%~15%</a:t>
+            </a:r>
+            <a:endParaRPr/>
+          </a:p>
+          <a:p>
+            <a:pPr>
+              <a:lnSpc>
+                <a:spcPct val="180000"/>
+              </a:lnSpc>
+            </a:pPr>
+            <a:r>
+              <a:rPr lang="en-US" sz="975">
+                <a:solidFill>
+                  <a:srgbClr val="8A90A6"/>
+                </a:solidFill>
+                <a:latin typeface="Microsoft YaHei"/>
+                <a:ea typeface="Microsoft YaHei"/>
+              </a:rPr>
+              <a:t xml:space="preserve">② 19 </a:t>
+            </a:r>
+            <a:r>
+              <a:rPr lang="zh-CN" sz="975">
+                <a:solidFill>
+                  <a:srgbClr val="8A90A6"/>
+                </a:solidFill>
+                <a:latin typeface="Microsoft YaHei"/>
+                <a:ea typeface="Microsoft YaHei"/>
+              </a:rPr>
+              <a:t>道滞销菜组套餐或下架</a:t>
+            </a:r>
+            <a:endParaRPr/>
+          </a:p>
+          <a:p>
+            <a:pPr>
+              <a:lnSpc>
+                <a:spcPct val="180000"/>
+              </a:lnSpc>
+            </a:pPr>
+            <a:r>
+              <a:rPr lang="en-US" sz="975">
+                <a:solidFill>
+                  <a:srgbClr val="8A90A6"/>
+                </a:solidFill>
+                <a:latin typeface="Microsoft YaHei"/>
+                <a:ea typeface="Microsoft YaHei"/>
+              </a:rPr>
+              <a:t xml:space="preserve">③ </a:t>
+            </a:r>
+            <a:r>
+              <a:rPr lang="zh-CN" sz="975">
+                <a:solidFill>
+                  <a:srgbClr val="8A90A6"/>
+                </a:solidFill>
+                <a:latin typeface="Microsoft YaHei"/>
+                <a:ea typeface="Microsoft YaHei"/>
+              </a:rPr>
+              <a:t>折扣收回</a:t>
+            </a:r>
+            <a:r>
+              <a:rPr lang="en-US" sz="975">
+                <a:solidFill>
+                  <a:srgbClr val="8A90A6"/>
+                </a:solidFill>
+                <a:latin typeface="Microsoft YaHei"/>
+                <a:ea typeface="Microsoft YaHei"/>
+              </a:rPr>
+              <a:t xml:space="preserve"> 2 </a:t>
+            </a:r>
+            <a:r>
+              <a:rPr lang="zh-CN" sz="975">
+                <a:solidFill>
+                  <a:srgbClr val="8A90A6"/>
+                </a:solidFill>
+                <a:latin typeface="Microsoft YaHei"/>
+                <a:ea typeface="Microsoft YaHei"/>
+              </a:rPr>
+              <a:t>个点</a:t>
+            </a:r>
+            <a:endParaRPr/>
+          </a:p>
+        </p:txBody>
+      </p:sp>
+      <p:sp>
+        <p:nvSpPr>
+          <p:cNvPr id="290" name="" descr="{&quot;isTemplate&quot;:true,&quot;type&quot;:&quot;text&quot;}"/>
+          <p:cNvSpPr txBox="1"/>
+          <p:nvPr/>
+        </p:nvSpPr>
+        <p:spPr>
+          <a:xfrm rot="0" flipH="0" flipV="0">
+            <a:off x="6867525" y="4514850"/>
+            <a:ext cx="4352925" cy="409575"/>
+          </a:xfrm>
+          <a:prstGeom prst="rect"/>
+        </p:spPr>
+        <p:txBody>
+          <a:bodyPr wrap="square" lIns="0" tIns="0" rIns="0" bIns="0">
+            <a:normAutofit/>
+          </a:bodyPr>
+          <a:p>
+            <a:pPr>
+              <a:lnSpc>
+                <a:spcPct val="160000"/>
+              </a:lnSpc>
+            </a:pPr>
+            <a:r>
+              <a:rPr lang="zh-CN" sz="825">
+                <a:solidFill>
+                  <a:srgbClr val="6B6F8A"/>
+                </a:solidFill>
+                <a:latin typeface="Microsoft YaHei"/>
+                <a:ea typeface="Microsoft YaHei"/>
+              </a:rPr>
+              <a:t>左列全部由</a:t>
+            </a:r>
+            <a:r>
+              <a:rPr lang="en-US" sz="825">
+                <a:solidFill>
+                  <a:srgbClr val="6B6F8A"/>
+                </a:solidFill>
+                <a:latin typeface="Microsoft YaHei"/>
+                <a:ea typeface="Microsoft YaHei"/>
+              </a:rPr>
+              <a:t xml:space="preserve"> SQL </a:t>
+            </a:r>
+            <a:r>
+              <a:rPr lang="zh-CN" sz="825">
+                <a:solidFill>
+                  <a:srgbClr val="6B6F8A"/>
+                </a:solidFill>
+                <a:latin typeface="Microsoft YaHei"/>
+                <a:ea typeface="Microsoft YaHei"/>
+              </a:rPr>
+              <a:t>从</a:t>
+            </a:r>
+            <a:r>
+              <a:rPr lang="en-US" sz="825">
+                <a:solidFill>
+                  <a:srgbClr val="6B6F8A"/>
+                </a:solidFill>
+                <a:latin typeface="Microsoft YaHei"/>
+                <a:ea typeface="Microsoft YaHei"/>
+              </a:rPr>
+              <a:t xml:space="preserve"> 180 </a:t>
+            </a:r>
+            <a:r>
+              <a:rPr lang="zh-CN" sz="825">
+                <a:solidFill>
+                  <a:srgbClr val="6B6F8A"/>
+                </a:solidFill>
+                <a:latin typeface="Microsoft YaHei"/>
+                <a:ea typeface="Microsoft YaHei"/>
+              </a:rPr>
+              <a:t>天数据算出，脚本可复现；右侧为按当前规模的线性测算，不是承诺值。</a:t>
+            </a:r>
+            <a:endParaRPr/>
+          </a:p>
+        </p:txBody>
+      </p:sp>
+      <p:sp>
+        <p:nvSpPr>
           <p:cNvPr id="291" name="" descr="{&quot;isTemplate&quot;:true,&quot;type&quot;:&quot;text&quot;}"/>
-          <p:cNvSpPr txBox="1"/>
-          <p:nvPr/>
-        </p:nvSpPr>
-        <p:spPr>
-          <a:xfrm rot="0" flipH="0" flipV="0">
-            <a:off x="895350" y="4905375"/>
-            <a:ext cx="1285875" cy="457200"/>
-          </a:xfrm>
-          <a:prstGeom prst="rect"/>
-        </p:spPr>
-        <p:txBody>
-          <a:bodyPr wrap="none" lIns="0" tIns="0" rIns="0" bIns="0"/>
-          <a:p>
-            <a:pPr>
-              <a:lnSpc>
-                <a:spcPct val="100000"/>
-              </a:lnSpc>
-            </a:pPr>
-            <a:r>
-              <a:rPr lang="en-US" sz="3000" b="1">
-                <a:solidFill>
-                  <a:srgbClr val="6C6CF5"/>
-                </a:solidFill>
-                <a:latin typeface="Microsoft YaHei"/>
-                <a:ea typeface="Microsoft YaHei"/>
-              </a:rPr>
-              <a:t>+2.2pt</a:t>
-            </a:r>
-            <a:endParaRPr/>
-          </a:p>
-        </p:txBody>
-      </p:sp>
-      <p:sp>
-        <p:nvSpPr>
-          <p:cNvPr id="292" name="" descr="{&quot;isTemplate&quot;:true,&quot;type&quot;:&quot;text&quot;}"/>
-          <p:cNvSpPr txBox="1"/>
-          <p:nvPr/>
-        </p:nvSpPr>
-        <p:spPr>
-          <a:xfrm rot="0" flipH="0" flipV="0">
-            <a:off x="2371725" y="4953000"/>
-            <a:ext cx="3771900" cy="190500"/>
-          </a:xfrm>
-          <a:prstGeom prst="rect"/>
-        </p:spPr>
-        <p:txBody>
-          <a:bodyPr wrap="none" lIns="0" tIns="0" rIns="0" bIns="0"/>
-          <a:p>
-            <a:pPr>
-              <a:lnSpc>
-                <a:spcPct val="100000"/>
-              </a:lnSpc>
-            </a:pPr>
-            <a:r>
-              <a:rPr lang="zh-CN" sz="1200">
-                <a:solidFill>
-                  <a:srgbClr val="F2F4FF"/>
-                </a:solidFill>
-                <a:latin typeface="Microsoft YaHei"/>
-                <a:ea typeface="Microsoft YaHei"/>
-              </a:rPr>
-              <a:t>综合毛利率提升，按年营收</a:t>
-            </a:r>
-            <a:r>
-              <a:rPr lang="en-US" sz="1200">
-                <a:solidFill>
-                  <a:srgbClr val="F2F4FF"/>
-                </a:solidFill>
-                <a:latin typeface="Microsoft YaHei"/>
-                <a:ea typeface="Microsoft YaHei"/>
-              </a:rPr>
-              <a:t xml:space="preserve"> 340 </a:t>
-            </a:r>
-            <a:r>
-              <a:rPr lang="zh-CN" sz="1200">
-                <a:solidFill>
-                  <a:srgbClr val="F2F4FF"/>
-                </a:solidFill>
-                <a:latin typeface="Microsoft YaHei"/>
-                <a:ea typeface="Microsoft YaHei"/>
-              </a:rPr>
-              <a:t>万测算</a:t>
-            </a:r>
-            <a:r>
-              <a:rPr lang="en-US" sz="1200">
-                <a:solidFill>
-                  <a:srgbClr val="F2F4FF"/>
-                </a:solidFill>
-                <a:latin typeface="Microsoft YaHei"/>
-                <a:ea typeface="Microsoft YaHei"/>
-              </a:rPr>
-              <a:t xml:space="preserve"> ≈ </a:t>
-            </a:r>
-            <a:r>
-              <a:rPr lang="zh-CN" sz="1200">
-                <a:solidFill>
-                  <a:srgbClr val="F2F4FF"/>
-                </a:solidFill>
-                <a:latin typeface="Microsoft YaHei"/>
-                <a:ea typeface="Microsoft YaHei"/>
-              </a:rPr>
-              <a:t>多留</a:t>
-            </a:r>
-            <a:r>
-              <a:rPr lang="en-US" sz="1200">
-                <a:solidFill>
-                  <a:srgbClr val="F2F4FF"/>
-                </a:solidFill>
-                <a:latin typeface="Microsoft YaHei"/>
-                <a:ea typeface="Microsoft YaHei"/>
-              </a:rPr>
-              <a:t xml:space="preserve"> 7.5 </a:t>
-            </a:r>
-            <a:r>
-              <a:rPr lang="zh-CN" sz="1200">
-                <a:solidFill>
-                  <a:srgbClr val="F2F4FF"/>
-                </a:solidFill>
-                <a:latin typeface="Microsoft YaHei"/>
-                <a:ea typeface="Microsoft YaHei"/>
-              </a:rPr>
-              <a:t>万元</a:t>
-            </a:r>
-            <a:endParaRPr/>
-          </a:p>
-        </p:txBody>
-      </p:sp>
-      <p:sp>
-        <p:nvSpPr>
-          <p:cNvPr id="293" name="" descr="{&quot;isTemplate&quot;:true,&quot;type&quot;:&quot;text&quot;}"/>
-          <p:cNvSpPr txBox="1"/>
-          <p:nvPr/>
-        </p:nvSpPr>
-        <p:spPr>
-          <a:xfrm rot="0" flipH="0" flipV="0">
-            <a:off x="2371725" y="5181600"/>
-            <a:ext cx="3771900" cy="142875"/>
-          </a:xfrm>
-          <a:prstGeom prst="rect"/>
-        </p:spPr>
-        <p:txBody>
-          <a:bodyPr wrap="none" lIns="0" tIns="0" rIns="0" bIns="0"/>
-          <a:p>
-            <a:pPr>
-              <a:lnSpc>
-                <a:spcPct val="100000"/>
-              </a:lnSpc>
-            </a:pPr>
-            <a:r>
-              <a:rPr lang="zh-CN" sz="900">
-                <a:solidFill>
-                  <a:srgbClr val="8A90A6"/>
-                </a:solidFill>
-                <a:latin typeface="Microsoft YaHei"/>
-                <a:ea typeface="Microsoft YaHei"/>
-              </a:rPr>
-              <a:t>数字由</a:t>
-            </a:r>
-            <a:r>
-              <a:rPr lang="en-US" sz="900">
-                <a:solidFill>
-                  <a:srgbClr val="8A90A6"/>
-                </a:solidFill>
-                <a:latin typeface="Microsoft YaHei"/>
-                <a:ea typeface="Microsoft YaHei"/>
-              </a:rPr>
-              <a:t xml:space="preserve"> seed_demo.py + </a:t>
-            </a:r>
-            <a:r>
-              <a:rPr lang="zh-CN" sz="900">
-                <a:solidFill>
-                  <a:srgbClr val="8A90A6"/>
-                </a:solidFill>
-                <a:latin typeface="Microsoft YaHei"/>
-                <a:ea typeface="Microsoft YaHei"/>
-              </a:rPr>
-              <a:t>回测脚本生成，不是手工填的；现场可复现</a:t>
-            </a:r>
-            <a:endParaRPr/>
-          </a:p>
-        </p:txBody>
-      </p:sp>
-      <p:sp>
-        <p:nvSpPr>
-          <p:cNvPr id="294" name="" descr="{&quot;isTemplate&quot;:true,&quot;type&quot;:&quot;text&quot;}"/>
           <p:cNvSpPr txBox="1"/>
           <p:nvPr/>
         </p:nvSpPr>
@@ -14276,7 +14464,7 @@
       </p:sp>
       <p:sp>
         <p:nvSpPr>
-          <p:cNvPr id="295" name="" descr="{&quot;isTemplate&quot;:true,&quot;type&quot;:&quot;text&quot;}"/>
+          <p:cNvPr id="292" name="" descr="{&quot;isTemplate&quot;:true,&quot;type&quot;:&quot;text&quot;}"/>
           <p:cNvSpPr txBox="1"/>
           <p:nvPr/>
         </p:nvSpPr>

--- a/docs/AI掌柜-路演PPT/AI掌柜-路演PPT.pptx
+++ b/docs/AI掌柜-路演PPT/AI掌柜-路演PPT.pptx
@@ -5,7 +5,7 @@
     <p:sldMasterId id="2147483648" r:id="rId0"/>
   </p:sldMasterIdLst>
   <p:notesMasterIdLst>
-    <p:notesMasterId r:id="rId13"/>
+    <p:notesMasterId r:id="rId14"/>
   </p:notesMasterIdLst>
   <p:sldIdLst>
     <p:sldId id="256" r:id="rId1"/>
@@ -20,6 +20,7 @@
     <p:sldId id="265" r:id="rId10"/>
     <p:sldId id="266" r:id="rId11"/>
     <p:sldId id="267" r:id="rId12"/>
+    <p:sldId id="268" r:id="rId13"/>
   </p:sldIdLst>
   <p:sldSz cx="12192000" cy="6858000"/>
   <p:notesSz cx="6858000" cy="12192000"/>
@@ -3593,12 +3594,12 @@
 </p:sld>
 </file>
 
-<file path=ppt/slides/slide2.xml><?xml version="1.0" encoding="utf-8"?>
-<p:sld xmlns:p="http://schemas.openxmlformats.org/presentationml/2006/main" xmlns:a="http://schemas.openxmlformats.org/drawingml/2006/main">
+<file path=ppt/slides/slide13.xml><?xml version="1.0" encoding="utf-8"?>
+<p:sld xmlns:p="http://schemas.openxmlformats.org/presentationml/2006/main" xmlns:a="http://schemas.openxmlformats.org/drawingml/2006/main" xmlns:r="http://schemas.openxmlformats.org/officeDocument/2006/relationships">
   <p:cSld>
     <p:spTree>
       <p:nvGrpSpPr>
-        <p:cNvPr id="68" name="" descr="&lt;Slide style={{ width: 1280, height: 720, background: '#0B0D14', padding: '56px 72px', flexDirection: 'column' }}&gt;&#13;&#10;  &lt;Box style={{ height: 96, flexDirection: 'row', justifyContent: 'space-between', alignItems: 'flex-start' }}&gt;&#13;&#10;    &lt;Box style={{ flexDirection: 'column', gap: 8 }}&gt;&#13;&#10;      &lt;Text style={{ fontSize: 34, fontWeight: 'bold', color: '#F2F4FF' }}&gt;老板每天问的三个问题，现有工具一个都没回答&lt;/Text&gt;&#13;&#10;      &lt;Text style={{ fontSize: 15, color: '#8A90A6' }}&gt;不是缺报表，是缺结论和动作&lt;/Text&gt;&#13;&#10;    &lt;/Box&gt;&#13;&#10;    &lt;Text style={{ fontSize: 13, color: '#4A5064', letterSpacing: 2 }}&gt;AI 掌柜&lt;/Text&gt;&#13;&#10;  &lt;/Box&gt;&#13;&#10;  &lt;Box style={{ flex: 1, paddingTop: 8 }}&gt;&#13;&#10;    &lt;Box style={{ flexDirection: 'row', gap: 20, height: 300 }}&gt;&#13;&#10;      &lt;Box style={{ flex: 1, background: '#141826', border: '1px solid #242A3D', borderRadius: 14, padding: 26, flexDirection: 'column', justifyContent: 'space-between' }}&gt;&#13;&#10;        &lt;Text style={{ fontSize: 56, fontWeight: 'bold', color: '#6C6CF5' }}&gt;01&lt;/Text&gt;&#13;&#10;        &lt;Text style={{ fontSize: 22, fontWeight: 'bold', color: '#F2F4FF' }}&gt;今天到底赚没赚&lt;/Text&gt;&#13;&#10;        &lt;Text style={{ fontSize: 15, color: '#8A90A6', lineHeight: 1.8 }}&gt;六张报表翻半小时，只知道跌了，&lt;br /&gt;不知道是人少了还是点便宜了。&lt;/Text&gt;&#13;&#10;      &lt;/Box&gt;&#13;&#10;      &lt;Box style={{ flex: 1, background: '#141826', border: '1px solid #242A3D', borderRadius: 14, padding: 26, flexDirection: 'column', justifyContent: 'space-between' }}&gt;&#13;&#10;        &lt;Text style={{ fontSize: 56, fontWeight: 'bold', color: '#6C6CF5' }}&gt;02&lt;/Text&gt;&#13;&#10;        &lt;Text style={{ fontSize: 22, fontWeight: 'bold', color: '#F2F4FF' }}&gt;明天该买多少&lt;/Text&gt;&#13;&#10;        &lt;Text style={{ fontSize: 15, color: '#8A90A6', lineHeight: 1.8 }}&gt;采购靠经验：缺货和压货同时发生，&lt;br /&gt;这套数据里 5 种食材只够 2 天。&lt;/Text&gt;&#13;&#10;      &lt;/Box&gt;&#13;&#10;      &lt;Box style={{ flex: 1, background: '#141826', border: '1px solid #242A3D', borderRadius: 14, padding: 26, flexDirection: 'column', justifyContent: 'space-between' }}&gt;&#13;&#10;        &lt;Text style={{ fontSize: 56, fontWeight: 'bold', color: '#6C6CF5' }}&gt;03&lt;/Text&gt;&#13;&#10;        &lt;Text style={{ fontSize: 22, fontWeight: 'bold', color: '#F2F4FF' }}&gt;哪道菜在赔钱&lt;/Text&gt;&#13;&#10;        &lt;Text style={{ fontSize: 15, color: '#8A90A6', lineHeight: 1.8 }}&gt;207 道菜只有 107 道算得清成本，&lt;br /&gt;卖得越多，可能亏得越多。&lt;/Text&gt;&#13;&#10;      &lt;/Box&gt;&#13;&#10;    &lt;/Box&gt;&#13;&#10;    &lt;Box style={{ marginTop: 34, paddingTop: 24, borderTop: '1px solid #242A3D', flexDirection: 'row', alignItems: 'center', gap: 16 }}&gt;&#13;&#10;      &lt;Box style={{ width: 6, height: 28, background: '#6C6CF5', borderRadius: 3 }} /&gt;&#13;&#10;      &lt;Text style={{ fontSize: 24, color: '#F2F4FF' }}&gt;中小餐饮不缺数据，缺一个&lt;Text style={{ fontSize: 24, fontWeight: 'bold', color: '#6C6CF5' }}&gt;能替他做决定&lt;/Text&gt;的角色。&lt;/Text&gt;&#13;&#10;    &lt;/Box&gt;&#13;&#10;  &lt;/Box&gt;&#13;&#10;  &lt;Box style={{ height: 36, flexDirection: 'row', justifyContent: 'space-between', alignItems: 'flex-end' }}&gt;&#13;&#10;    &lt;Text style={{ fontSize: 12, color: '#4A5064' }}&gt;2026 武汉 1024 · 产业应用赛道&lt;/Text&gt;&#13;&#10;    &lt;Text style={{ fontSize: 12, color: '#4A5064' }}&gt;02 / 12&lt;/Text&gt;&#13;&#10;  &lt;/Box&gt;&#13;&#10;&lt;/Slide&gt;"/>
+        <p:cNvPr id="68" name="" descr="&lt;Slide style={{ width: 1280, height: 720, background: '#0B0D14', padding: '56px 72px', flexDirection: 'column' }}&gt;&#13;&#10;  &lt;Box style={{ height: 96, flexDirection: 'row', justifyContent: 'space-between', alignItems: 'flex-start' }}&gt;&#13;&#10;    &lt;Box style={{ flexDirection: 'column', gap: 8 }}&gt;&#13;&#10;      &lt;Text style={{ fontSize: 34, fontWeight: 'bold', color: '#F2F4FF' }}&gt;附录 A · 界面实拍（无美化）&lt;/Text&gt;&#13;&#10;      &lt;Text style={{ fontSize: 15, color: '#8A90A6' }}&gt;这是 1920 宽屏下直接截的图，不是设计稿&lt;/Text&gt;&#13;&#10;    &lt;/Box&gt;&#13;&#10;    &lt;Text style={{ fontSize: 13, color: '#4A5064', letterSpacing: 2 }}&gt;AI 掌柜&lt;/Text&gt;&#13;&#10;  &lt;/Box&gt;&#13;&#10;  &lt;Box style={{ flex: 1, paddingTop: 8, flexDirection: 'row', gap: 26 }}&gt;&#13;&#10;    &lt;Box style={{ flex: 1.75, background: '#141826', border: '1px solid #242A3D', borderRadius: 12, padding: 10, overflow: 'hidden' }}&gt;&#13;&#10;      &lt;Image src=&quot;assets/ui_dashboard.png&quot; style={{ width: '100%', height: '100%', objectFit: 'cover', objectPosition: 'left top', borderRadius: 8 }} /&gt;&#13;&#10;    &lt;/Box&gt;&#13;&#10;    &lt;Box style={{ flex: 1, flexDirection: 'column', gap: 18, paddingTop: 4 }}&gt;&#13;&#10;      &lt;Box style={{ flexDirection: 'column', gap: 6 }}&gt;&#13;&#10;        &lt;Text style={{ fontSize: 13, color: '#6C6CF5', letterSpacing: 1 }}&gt;01 首屏只有三件事&lt;/Text&gt;&#13;&#10;        &lt;Text style={{ fontSize: 14, color: '#8A90A6', lineHeight: 1.7 }}&gt;按影响金额排序，不是按模块罗列。老板看完就知道先干哪件。&lt;/Text&gt;&#13;&#10;      &lt;/Box&gt;&#13;&#10;      &lt;Box style={{ flexDirection: 'column', gap: 6 }}&gt;&#13;&#10;        &lt;Text style={{ fontSize: 13, color: '#6C6CF5', letterSpacing: 1 }}&gt;02 每条都带证据&lt;/Text&gt;&#13;&#10;        &lt;Text style={{ fontSize: 14, color: '#8A90A6', lineHeight: 1.7 }}&gt;灰底那行是指标、当前值、基线、阈值，机器可读，人也看得懂。&lt;/Text&gt;&#13;&#10;      &lt;/Box&gt;&#13;&#10;      &lt;Box style={{ flexDirection: 'column', gap: 6 }}&gt;&#13;&#10;        &lt;Text style={{ fontSize: 13, color: '#6C6CF5', letterSpacing: 1 }}&gt;03 右边是实时状态&lt;/Text&gt;&#13;&#10;        &lt;Text style={{ fontSize: 14, color: '#8A90A6', lineHeight: 1.7 }}&gt;模型通道（本地/云端/规则）、7 天预测与回测误差、待处理动作。&lt;/Text&gt;&#13;&#10;      &lt;/Box&gt;&#13;&#10;      &lt;Box style={{ flexDirection: 'column', gap: 6 }}&gt;&#13;&#10;        &lt;Text style={{ fontSize: 13, color: '#6C6CF5', letterSpacing: 1 }}&gt;04 按钮就是动作&lt;/Text&gt;&#13;&#10;        &lt;Text style={{ fontSize: 14, color: '#8A90A6', lineHeight: 1.7 }}&gt;「生成采购单」「执行调价」都不是跳转，点完当场改数据，可撤销。&lt;/Text&gt;&#13;&#10;      &lt;/Box&gt;&#13;&#10;    &lt;/Box&gt;&#13;&#10;  &lt;/Box&gt;&#13;&#10;  &lt;Box style={{ height: 36, flexDirection: 'row', justifyContent: 'space-between', alignItems: 'flex-end' }}&gt;&#13;&#10;    &lt;Text style={{ fontSize: 12, color: '#4A5064' }}&gt;演示数据：180 天 / 6,803 单（seed_demo.py 生成）&lt;/Text&gt;&#13;&#10;    &lt;Text style={{ fontSize: 12, color: '#4A5064' }}&gt;附录 A&lt;/Text&gt;&#13;&#10;  &lt;/Box&gt;&#13;&#10;&lt;/Slide&gt;&#13;&#10;"/>
         <p:cNvGrpSpPr/>
         <p:nvPr/>
       </p:nvGrpSpPr>
@@ -3643,6 +3644,792 @@
         <p:spPr>
           <a:xfrm rot="0" flipH="0" flipV="0">
             <a:off x="685800" y="533400"/>
+            <a:ext cx="4238625" cy="390525"/>
+          </a:xfrm>
+          <a:prstGeom prst="rect"/>
+        </p:spPr>
+        <p:txBody>
+          <a:bodyPr wrap="none" lIns="0" tIns="0" rIns="0" bIns="0"/>
+          <a:p>
+            <a:pPr>
+              <a:lnSpc>
+                <a:spcPct val="100000"/>
+              </a:lnSpc>
+            </a:pPr>
+            <a:r>
+              <a:rPr lang="zh-CN" sz="2550" b="1">
+                <a:solidFill>
+                  <a:srgbClr val="F2F4FF"/>
+                </a:solidFill>
+                <a:latin typeface="Microsoft YaHei"/>
+                <a:ea typeface="Microsoft YaHei"/>
+              </a:rPr>
+              <a:t>附录</a:t>
+            </a:r>
+            <a:r>
+              <a:rPr lang="en-US" sz="2550" b="1">
+                <a:solidFill>
+                  <a:srgbClr val="F2F4FF"/>
+                </a:solidFill>
+                <a:latin typeface="Microsoft YaHei"/>
+                <a:ea typeface="Microsoft YaHei"/>
+              </a:rPr>
+              <a:t xml:space="preserve"> A · </a:t>
+            </a:r>
+            <a:r>
+              <a:rPr lang="zh-CN" sz="2550" b="1">
+                <a:solidFill>
+                  <a:srgbClr val="F2F4FF"/>
+                </a:solidFill>
+                <a:latin typeface="Microsoft YaHei"/>
+                <a:ea typeface="Microsoft YaHei"/>
+              </a:rPr>
+              <a:t>界面实拍（无美化）</a:t>
+            </a:r>
+            <a:endParaRPr/>
+          </a:p>
+        </p:txBody>
+      </p:sp>
+      <p:sp>
+        <p:nvSpPr>
+          <p:cNvPr id="71" name="" descr="{&quot;isTemplate&quot;:true,&quot;type&quot;:&quot;text&quot;}"/>
+          <p:cNvSpPr txBox="1"/>
+          <p:nvPr/>
+        </p:nvSpPr>
+        <p:spPr>
+          <a:xfrm rot="0" flipH="0" flipV="0">
+            <a:off x="685800" y="1000125"/>
+            <a:ext cx="4238625" cy="171450"/>
+          </a:xfrm>
+          <a:prstGeom prst="rect"/>
+        </p:spPr>
+        <p:txBody>
+          <a:bodyPr wrap="none" lIns="0" tIns="0" rIns="0" bIns="0"/>
+          <a:p>
+            <a:pPr>
+              <a:lnSpc>
+                <a:spcPct val="100000"/>
+              </a:lnSpc>
+            </a:pPr>
+            <a:r>
+              <a:rPr lang="zh-CN" sz="1125">
+                <a:solidFill>
+                  <a:srgbClr val="8A90A6"/>
+                </a:solidFill>
+                <a:latin typeface="Microsoft YaHei"/>
+                <a:ea typeface="Microsoft YaHei"/>
+              </a:rPr>
+              <a:t>这是</a:t>
+            </a:r>
+            <a:r>
+              <a:rPr lang="en-US" sz="1125">
+                <a:solidFill>
+                  <a:srgbClr val="8A90A6"/>
+                </a:solidFill>
+                <a:latin typeface="Microsoft YaHei"/>
+                <a:ea typeface="Microsoft YaHei"/>
+              </a:rPr>
+              <a:t xml:space="preserve"> 1920 </a:t>
+            </a:r>
+            <a:r>
+              <a:rPr lang="zh-CN" sz="1125">
+                <a:solidFill>
+                  <a:srgbClr val="8A90A6"/>
+                </a:solidFill>
+                <a:latin typeface="Microsoft YaHei"/>
+                <a:ea typeface="Microsoft YaHei"/>
+              </a:rPr>
+              <a:t>宽屏下直接截的图，不是设计稿</a:t>
+            </a:r>
+            <a:endParaRPr/>
+          </a:p>
+        </p:txBody>
+      </p:sp>
+      <p:sp>
+        <p:nvSpPr>
+          <p:cNvPr id="72" name="" descr="{&quot;isTemplate&quot;:true,&quot;type&quot;:&quot;text&quot;}"/>
+          <p:cNvSpPr txBox="1"/>
+          <p:nvPr/>
+        </p:nvSpPr>
+        <p:spPr>
+          <a:xfrm rot="0" flipH="0" flipV="0">
+            <a:off x="11001375" y="533400"/>
+            <a:ext cx="504825" cy="152400"/>
+          </a:xfrm>
+          <a:prstGeom prst="rect"/>
+        </p:spPr>
+        <p:txBody>
+          <a:bodyPr wrap="none" lIns="0" tIns="0" rIns="0" bIns="0"/>
+          <a:p>
+            <a:pPr>
+              <a:lnSpc>
+                <a:spcPct val="100000"/>
+              </a:lnSpc>
+            </a:pPr>
+            <a:r>
+              <a:rPr lang="en-US" sz="975" spc="150">
+                <a:solidFill>
+                  <a:srgbClr val="4A5064"/>
+                </a:solidFill>
+                <a:latin typeface="Microsoft YaHei"/>
+                <a:ea typeface="Microsoft YaHei"/>
+              </a:rPr>
+              <a:t xml:space="preserve">AI </a:t>
+            </a:r>
+            <a:r>
+              <a:rPr lang="zh-CN" sz="975" spc="150">
+                <a:solidFill>
+                  <a:srgbClr val="4A5064"/>
+                </a:solidFill>
+                <a:latin typeface="Microsoft YaHei"/>
+                <a:ea typeface="Microsoft YaHei"/>
+              </a:rPr>
+              <a:t>掌柜</a:t>
+            </a:r>
+            <a:endParaRPr/>
+          </a:p>
+        </p:txBody>
+      </p:sp>
+      <p:sp>
+        <p:nvSpPr>
+          <p:cNvPr id="73" name=""/>
+          <p:cNvSpPr/>
+          <p:nvPr/>
+        </p:nvSpPr>
+        <p:spPr>
+          <a:xfrm rot="0" flipH="0" flipV="0">
+            <a:off x="685800" y="1524000"/>
+            <a:ext cx="6724650" cy="4457700"/>
+          </a:xfrm>
+          <a:prstGeom prst="roundRect">
+            <a:avLst>
+              <a:gd name="adj" fmla="val 2564"/>
+            </a:avLst>
+          </a:prstGeom>
+          <a:solidFill>
+            <a:srgbClr val="141826"/>
+          </a:solidFill>
+          <a:ln w="12700">
+            <a:solidFill>
+              <a:srgbClr val="242A3D"/>
+            </a:solidFill>
+            <a:prstDash val="solid"/>
+          </a:ln>
+        </p:spPr>
+        <p:txBody>
+          <a:bodyPr/>
+          <a:p/>
+        </p:txBody>
+      </p:sp>
+      <p:pic>
+        <p:nvPicPr>
+          <p:cNvPr id="74" name=""/>
+          <p:cNvPicPr>
+            <a:picLocks noChangeAspect="1"/>
+          </p:cNvPicPr>
+          <p:nvPr/>
+        </p:nvPicPr>
+        <p:blipFill>
+          <a:blip r:embed="rId1"/>
+          <a:srcRect l="0" t="11904" r="0" b="11904"/>
+          <a:stretch>
+            <a:fillRect/>
+          </a:stretch>
+        </p:blipFill>
+        <p:spPr>
+          <a:xfrm rot="0" flipH="0" flipV="0">
+            <a:off x="781050" y="1619250"/>
+            <a:ext cx="6534150" cy="4267200"/>
+          </a:xfrm>
+          <a:prstGeom prst="roundRect">
+            <a:avLst>
+              <a:gd name="adj" fmla="val 1786"/>
+            </a:avLst>
+          </a:prstGeom>
+          <a:ln/>
+        </p:spPr>
+      </p:pic>
+      <p:sp>
+        <p:nvSpPr>
+          <p:cNvPr id="75" name="" descr="{&quot;isTemplate&quot;:true,&quot;type&quot;:&quot;text&quot;}"/>
+          <p:cNvSpPr txBox="1"/>
+          <p:nvPr/>
+        </p:nvSpPr>
+        <p:spPr>
+          <a:xfrm rot="0" flipH="0" flipV="0">
+            <a:off x="7658100" y="1562100"/>
+            <a:ext cx="3848100" cy="152400"/>
+          </a:xfrm>
+          <a:prstGeom prst="rect"/>
+        </p:spPr>
+        <p:txBody>
+          <a:bodyPr wrap="none" lIns="0" tIns="0" rIns="0" bIns="0"/>
+          <a:p>
+            <a:pPr>
+              <a:lnSpc>
+                <a:spcPct val="100000"/>
+              </a:lnSpc>
+            </a:pPr>
+            <a:r>
+              <a:rPr lang="en-US" sz="975" spc="75">
+                <a:solidFill>
+                  <a:srgbClr val="6C6CF5"/>
+                </a:solidFill>
+                <a:latin typeface="Microsoft YaHei"/>
+                <a:ea typeface="Microsoft YaHei"/>
+              </a:rPr>
+              <a:t xml:space="preserve">01 </a:t>
+            </a:r>
+            <a:r>
+              <a:rPr lang="zh-CN" sz="975" spc="75">
+                <a:solidFill>
+                  <a:srgbClr val="6C6CF5"/>
+                </a:solidFill>
+                <a:latin typeface="Microsoft YaHei"/>
+                <a:ea typeface="Microsoft YaHei"/>
+              </a:rPr>
+              <a:t>首屏只有三件事</a:t>
+            </a:r>
+            <a:endParaRPr/>
+          </a:p>
+        </p:txBody>
+      </p:sp>
+      <p:sp>
+        <p:nvSpPr>
+          <p:cNvPr id="76" name="" descr="{&quot;isTemplate&quot;:true,&quot;type&quot;:&quot;text&quot;}"/>
+          <p:cNvSpPr txBox="1"/>
+          <p:nvPr/>
+        </p:nvSpPr>
+        <p:spPr>
+          <a:xfrm rot="0" flipH="0" flipV="0">
+            <a:off x="7658100" y="1771650"/>
+            <a:ext cx="3848100" cy="276225"/>
+          </a:xfrm>
+          <a:prstGeom prst="rect"/>
+        </p:spPr>
+        <p:txBody>
+          <a:bodyPr wrap="none" lIns="0" tIns="0" rIns="0" bIns="0"/>
+          <a:p>
+            <a:pPr>
+              <a:lnSpc>
+                <a:spcPct val="170000"/>
+              </a:lnSpc>
+            </a:pPr>
+            <a:r>
+              <a:rPr lang="zh-CN" sz="1050">
+                <a:solidFill>
+                  <a:srgbClr val="8A90A6"/>
+                </a:solidFill>
+                <a:latin typeface="Microsoft YaHei"/>
+                <a:ea typeface="Microsoft YaHei"/>
+              </a:rPr>
+              <a:t>按影响金额排序，不是按模块罗列。老板看完就知道先干哪件。</a:t>
+            </a:r>
+            <a:endParaRPr/>
+          </a:p>
+        </p:txBody>
+      </p:sp>
+      <p:sp>
+        <p:nvSpPr>
+          <p:cNvPr id="77" name="" descr="{&quot;isTemplate&quot;:true,&quot;type&quot;:&quot;text&quot;}"/>
+          <p:cNvSpPr txBox="1"/>
+          <p:nvPr/>
+        </p:nvSpPr>
+        <p:spPr>
+          <a:xfrm rot="0" flipH="0" flipV="0">
+            <a:off x="7658100" y="2219325"/>
+            <a:ext cx="3848100" cy="152400"/>
+          </a:xfrm>
+          <a:prstGeom prst="rect"/>
+        </p:spPr>
+        <p:txBody>
+          <a:bodyPr wrap="none" lIns="0" tIns="0" rIns="0" bIns="0"/>
+          <a:p>
+            <a:pPr>
+              <a:lnSpc>
+                <a:spcPct val="100000"/>
+              </a:lnSpc>
+            </a:pPr>
+            <a:r>
+              <a:rPr lang="en-US" sz="975" spc="75">
+                <a:solidFill>
+                  <a:srgbClr val="6C6CF5"/>
+                </a:solidFill>
+                <a:latin typeface="Microsoft YaHei"/>
+                <a:ea typeface="Microsoft YaHei"/>
+              </a:rPr>
+              <a:t xml:space="preserve">02 </a:t>
+            </a:r>
+            <a:r>
+              <a:rPr lang="zh-CN" sz="975" spc="75">
+                <a:solidFill>
+                  <a:srgbClr val="6C6CF5"/>
+                </a:solidFill>
+                <a:latin typeface="Microsoft YaHei"/>
+                <a:ea typeface="Microsoft YaHei"/>
+              </a:rPr>
+              <a:t>每条都带证据</a:t>
+            </a:r>
+            <a:endParaRPr/>
+          </a:p>
+        </p:txBody>
+      </p:sp>
+      <p:sp>
+        <p:nvSpPr>
+          <p:cNvPr id="78" name="" descr="{&quot;isTemplate&quot;:true,&quot;type&quot;:&quot;text&quot;}"/>
+          <p:cNvSpPr txBox="1"/>
+          <p:nvPr/>
+        </p:nvSpPr>
+        <p:spPr>
+          <a:xfrm rot="0" flipH="0" flipV="0">
+            <a:off x="7658100" y="2428875"/>
+            <a:ext cx="3848100" cy="552450"/>
+          </a:xfrm>
+          <a:prstGeom prst="rect"/>
+        </p:spPr>
+        <p:txBody>
+          <a:bodyPr wrap="square" lIns="0" tIns="0" rIns="0" bIns="0">
+            <a:normAutofit/>
+          </a:bodyPr>
+          <a:p>
+            <a:pPr>
+              <a:lnSpc>
+                <a:spcPct val="170000"/>
+              </a:lnSpc>
+            </a:pPr>
+            <a:r>
+              <a:rPr lang="zh-CN" sz="1050">
+                <a:solidFill>
+                  <a:srgbClr val="8A90A6"/>
+                </a:solidFill>
+                <a:latin typeface="Microsoft YaHei"/>
+                <a:ea typeface="Microsoft YaHei"/>
+              </a:rPr>
+              <a:t>灰底那行是指标、当前值、基线、阈值，机器可读，人也看得懂。</a:t>
+            </a:r>
+            <a:endParaRPr/>
+          </a:p>
+        </p:txBody>
+      </p:sp>
+      <p:sp>
+        <p:nvSpPr>
+          <p:cNvPr id="79" name="" descr="{&quot;isTemplate&quot;:true,&quot;type&quot;:&quot;text&quot;}"/>
+          <p:cNvSpPr txBox="1"/>
+          <p:nvPr/>
+        </p:nvSpPr>
+        <p:spPr>
+          <a:xfrm rot="0" flipH="0" flipV="0">
+            <a:off x="7658100" y="3152775"/>
+            <a:ext cx="3848100" cy="152400"/>
+          </a:xfrm>
+          <a:prstGeom prst="rect"/>
+        </p:spPr>
+        <p:txBody>
+          <a:bodyPr wrap="none" lIns="0" tIns="0" rIns="0" bIns="0"/>
+          <a:p>
+            <a:pPr>
+              <a:lnSpc>
+                <a:spcPct val="100000"/>
+              </a:lnSpc>
+            </a:pPr>
+            <a:r>
+              <a:rPr lang="en-US" sz="975" spc="75">
+                <a:solidFill>
+                  <a:srgbClr val="6C6CF5"/>
+                </a:solidFill>
+                <a:latin typeface="Microsoft YaHei"/>
+                <a:ea typeface="Microsoft YaHei"/>
+              </a:rPr>
+              <a:t xml:space="preserve">03 </a:t>
+            </a:r>
+            <a:r>
+              <a:rPr lang="zh-CN" sz="975" spc="75">
+                <a:solidFill>
+                  <a:srgbClr val="6C6CF5"/>
+                </a:solidFill>
+                <a:latin typeface="Microsoft YaHei"/>
+                <a:ea typeface="Microsoft YaHei"/>
+              </a:rPr>
+              <a:t>右边是实时状态</a:t>
+            </a:r>
+            <a:endParaRPr/>
+          </a:p>
+        </p:txBody>
+      </p:sp>
+      <p:sp>
+        <p:nvSpPr>
+          <p:cNvPr id="80" name="" descr="{&quot;isTemplate&quot;:true,&quot;type&quot;:&quot;text&quot;}"/>
+          <p:cNvSpPr txBox="1"/>
+          <p:nvPr/>
+        </p:nvSpPr>
+        <p:spPr>
+          <a:xfrm rot="0" flipH="0" flipV="0">
+            <a:off x="7658100" y="3362325"/>
+            <a:ext cx="3848100" cy="552450"/>
+          </a:xfrm>
+          <a:prstGeom prst="rect"/>
+        </p:spPr>
+        <p:txBody>
+          <a:bodyPr wrap="square" lIns="0" tIns="0" rIns="0" bIns="0">
+            <a:normAutofit/>
+          </a:bodyPr>
+          <a:p>
+            <a:pPr>
+              <a:lnSpc>
+                <a:spcPct val="170000"/>
+              </a:lnSpc>
+            </a:pPr>
+            <a:r>
+              <a:rPr lang="zh-CN" sz="1050">
+                <a:solidFill>
+                  <a:srgbClr val="8A90A6"/>
+                </a:solidFill>
+                <a:latin typeface="Microsoft YaHei"/>
+                <a:ea typeface="Microsoft YaHei"/>
+              </a:rPr>
+              <a:t>模型通道（本地</a:t>
+            </a:r>
+            <a:r>
+              <a:rPr lang="en-US" sz="1050">
+                <a:solidFill>
+                  <a:srgbClr val="8A90A6"/>
+                </a:solidFill>
+                <a:latin typeface="Microsoft YaHei"/>
+                <a:ea typeface="Microsoft YaHei"/>
+              </a:rPr>
+              <a:t>/</a:t>
+            </a:r>
+            <a:r>
+              <a:rPr lang="zh-CN" sz="1050">
+                <a:solidFill>
+                  <a:srgbClr val="8A90A6"/>
+                </a:solidFill>
+                <a:latin typeface="Microsoft YaHei"/>
+                <a:ea typeface="Microsoft YaHei"/>
+              </a:rPr>
+              <a:t>云端</a:t>
+            </a:r>
+            <a:r>
+              <a:rPr lang="en-US" sz="1050">
+                <a:solidFill>
+                  <a:srgbClr val="8A90A6"/>
+                </a:solidFill>
+                <a:latin typeface="Microsoft YaHei"/>
+                <a:ea typeface="Microsoft YaHei"/>
+              </a:rPr>
+              <a:t>/</a:t>
+            </a:r>
+            <a:r>
+              <a:rPr lang="zh-CN" sz="1050">
+                <a:solidFill>
+                  <a:srgbClr val="8A90A6"/>
+                </a:solidFill>
+                <a:latin typeface="Microsoft YaHei"/>
+                <a:ea typeface="Microsoft YaHei"/>
+              </a:rPr>
+              <a:t>规则）、</a:t>
+            </a:r>
+            <a:r>
+              <a:rPr lang="en-US" sz="1050">
+                <a:solidFill>
+                  <a:srgbClr val="8A90A6"/>
+                </a:solidFill>
+                <a:latin typeface="Microsoft YaHei"/>
+                <a:ea typeface="Microsoft YaHei"/>
+              </a:rPr>
+              <a:t xml:space="preserve">7 </a:t>
+            </a:r>
+            <a:r>
+              <a:rPr lang="zh-CN" sz="1050">
+                <a:solidFill>
+                  <a:srgbClr val="8A90A6"/>
+                </a:solidFill>
+                <a:latin typeface="Microsoft YaHei"/>
+                <a:ea typeface="Microsoft YaHei"/>
+              </a:rPr>
+              <a:t>天预测与回测误差、待处理动作。</a:t>
+            </a:r>
+            <a:endParaRPr/>
+          </a:p>
+        </p:txBody>
+      </p:sp>
+      <p:sp>
+        <p:nvSpPr>
+          <p:cNvPr id="81" name="" descr="{&quot;isTemplate&quot;:true,&quot;type&quot;:&quot;text&quot;}"/>
+          <p:cNvSpPr txBox="1"/>
+          <p:nvPr/>
+        </p:nvSpPr>
+        <p:spPr>
+          <a:xfrm rot="0" flipH="0" flipV="0">
+            <a:off x="7658100" y="4086225"/>
+            <a:ext cx="3848100" cy="152400"/>
+          </a:xfrm>
+          <a:prstGeom prst="rect"/>
+        </p:spPr>
+        <p:txBody>
+          <a:bodyPr wrap="none" lIns="0" tIns="0" rIns="0" bIns="0"/>
+          <a:p>
+            <a:pPr>
+              <a:lnSpc>
+                <a:spcPct val="100000"/>
+              </a:lnSpc>
+            </a:pPr>
+            <a:r>
+              <a:rPr lang="en-US" sz="975" spc="75">
+                <a:solidFill>
+                  <a:srgbClr val="6C6CF5"/>
+                </a:solidFill>
+                <a:latin typeface="Microsoft YaHei"/>
+                <a:ea typeface="Microsoft YaHei"/>
+              </a:rPr>
+              <a:t xml:space="preserve">04 </a:t>
+            </a:r>
+            <a:r>
+              <a:rPr lang="zh-CN" sz="975" spc="75">
+                <a:solidFill>
+                  <a:srgbClr val="6C6CF5"/>
+                </a:solidFill>
+                <a:latin typeface="Microsoft YaHei"/>
+                <a:ea typeface="Microsoft YaHei"/>
+              </a:rPr>
+              <a:t>按钮就是动作</a:t>
+            </a:r>
+            <a:endParaRPr/>
+          </a:p>
+        </p:txBody>
+      </p:sp>
+      <p:sp>
+        <p:nvSpPr>
+          <p:cNvPr id="82" name="" descr="{&quot;isTemplate&quot;:true,&quot;type&quot;:&quot;text&quot;}"/>
+          <p:cNvSpPr txBox="1"/>
+          <p:nvPr/>
+        </p:nvSpPr>
+        <p:spPr>
+          <a:xfrm rot="0" flipH="0" flipV="0">
+            <a:off x="7658100" y="4295775"/>
+            <a:ext cx="3848100" cy="552450"/>
+          </a:xfrm>
+          <a:prstGeom prst="rect"/>
+        </p:spPr>
+        <p:txBody>
+          <a:bodyPr wrap="square" lIns="0" tIns="0" rIns="0" bIns="0">
+            <a:normAutofit/>
+          </a:bodyPr>
+          <a:p>
+            <a:pPr>
+              <a:lnSpc>
+                <a:spcPct val="170000"/>
+              </a:lnSpc>
+            </a:pPr>
+            <a:r>
+              <a:rPr lang="zh-CN" sz="1050">
+                <a:solidFill>
+                  <a:srgbClr val="8A90A6"/>
+                </a:solidFill>
+                <a:latin typeface="Microsoft YaHei"/>
+                <a:ea typeface="Microsoft YaHei"/>
+              </a:rPr>
+              <a:t>「生成采购单」「执行调价」都不是跳转，点完当场改数据，可撤销。</a:t>
+            </a:r>
+            <a:endParaRPr/>
+          </a:p>
+        </p:txBody>
+      </p:sp>
+      <p:sp>
+        <p:nvSpPr>
+          <p:cNvPr id="83" name="" descr="{&quot;isTemplate&quot;:true,&quot;type&quot;:&quot;text&quot;}"/>
+          <p:cNvSpPr txBox="1"/>
+          <p:nvPr/>
+        </p:nvSpPr>
+        <p:spPr>
+          <a:xfrm rot="0" flipH="0" flipV="0">
+            <a:off x="685800" y="6181725"/>
+            <a:ext cx="2762250" cy="142875"/>
+          </a:xfrm>
+          <a:prstGeom prst="rect"/>
+        </p:spPr>
+        <p:txBody>
+          <a:bodyPr wrap="none" lIns="0" tIns="0" rIns="0" bIns="0"/>
+          <a:p>
+            <a:pPr>
+              <a:lnSpc>
+                <a:spcPct val="100000"/>
+              </a:lnSpc>
+            </a:pPr>
+            <a:r>
+              <a:rPr lang="zh-CN" sz="900">
+                <a:solidFill>
+                  <a:srgbClr val="4A5064"/>
+                </a:solidFill>
+                <a:latin typeface="Microsoft YaHei"/>
+                <a:ea typeface="Microsoft YaHei"/>
+              </a:rPr>
+              <a:t>演示数据：</a:t>
+            </a:r>
+            <a:r>
+              <a:rPr lang="en-US" sz="900">
+                <a:solidFill>
+                  <a:srgbClr val="4A5064"/>
+                </a:solidFill>
+                <a:latin typeface="Microsoft YaHei"/>
+                <a:ea typeface="Microsoft YaHei"/>
+              </a:rPr>
+              <a:t xml:space="preserve">180 </a:t>
+            </a:r>
+            <a:r>
+              <a:rPr lang="zh-CN" sz="900">
+                <a:solidFill>
+                  <a:srgbClr val="4A5064"/>
+                </a:solidFill>
+                <a:latin typeface="Microsoft YaHei"/>
+                <a:ea typeface="Microsoft YaHei"/>
+              </a:rPr>
+              <a:t>天</a:t>
+            </a:r>
+            <a:r>
+              <a:rPr lang="en-US" sz="900">
+                <a:solidFill>
+                  <a:srgbClr val="4A5064"/>
+                </a:solidFill>
+                <a:latin typeface="Microsoft YaHei"/>
+                <a:ea typeface="Microsoft YaHei"/>
+              </a:rPr>
+              <a:t xml:space="preserve"> / 6,803 </a:t>
+            </a:r>
+            <a:r>
+              <a:rPr lang="zh-CN" sz="900">
+                <a:solidFill>
+                  <a:srgbClr val="4A5064"/>
+                </a:solidFill>
+                <a:latin typeface="Microsoft YaHei"/>
+                <a:ea typeface="Microsoft YaHei"/>
+              </a:rPr>
+              <a:t>单（</a:t>
+            </a:r>
+            <a:r>
+              <a:rPr lang="en-US" sz="900">
+                <a:solidFill>
+                  <a:srgbClr val="4A5064"/>
+                </a:solidFill>
+                <a:latin typeface="Microsoft YaHei"/>
+                <a:ea typeface="Microsoft YaHei"/>
+              </a:rPr>
+              <a:t xml:space="preserve">seed_demo.py </a:t>
+            </a:r>
+            <a:r>
+              <a:rPr lang="zh-CN" sz="900">
+                <a:solidFill>
+                  <a:srgbClr val="4A5064"/>
+                </a:solidFill>
+                <a:latin typeface="Microsoft YaHei"/>
+                <a:ea typeface="Microsoft YaHei"/>
+              </a:rPr>
+              <a:t>生成）</a:t>
+            </a:r>
+            <a:endParaRPr/>
+          </a:p>
+        </p:txBody>
+      </p:sp>
+      <p:sp>
+        <p:nvSpPr>
+          <p:cNvPr id="84" name="" descr="{&quot;isTemplate&quot;:true,&quot;type&quot;:&quot;text&quot;}"/>
+          <p:cNvSpPr txBox="1"/>
+          <p:nvPr/>
+        </p:nvSpPr>
+        <p:spPr>
+          <a:xfrm rot="0" flipH="0" flipV="0">
+            <a:off x="11163300" y="6181725"/>
+            <a:ext cx="342900" cy="142875"/>
+          </a:xfrm>
+          <a:prstGeom prst="rect"/>
+        </p:spPr>
+        <p:txBody>
+          <a:bodyPr wrap="none" lIns="0" tIns="0" rIns="0" bIns="0"/>
+          <a:p>
+            <a:pPr>
+              <a:lnSpc>
+                <a:spcPct val="100000"/>
+              </a:lnSpc>
+            </a:pPr>
+            <a:r>
+              <a:rPr lang="zh-CN" sz="900">
+                <a:solidFill>
+                  <a:srgbClr val="4A5064"/>
+                </a:solidFill>
+                <a:latin typeface="Microsoft YaHei"/>
+                <a:ea typeface="Microsoft YaHei"/>
+              </a:rPr>
+              <a:t>附录</a:t>
+            </a:r>
+            <a:r>
+              <a:rPr lang="en-US" sz="900">
+                <a:solidFill>
+                  <a:srgbClr val="4A5064"/>
+                </a:solidFill>
+                <a:latin typeface="Microsoft YaHei"/>
+                <a:ea typeface="Microsoft YaHei"/>
+              </a:rPr>
+              <a:t xml:space="preserve"> A</a:t>
+            </a:r>
+            <a:endParaRPr/>
+          </a:p>
+        </p:txBody>
+      </p:sp>
+    </p:spTree>
+  </p:cSld>
+</p:sld>
+</file>
+
+<file path=ppt/slides/slide2.xml><?xml version="1.0" encoding="utf-8"?>
+<p:sld xmlns:p="http://schemas.openxmlformats.org/presentationml/2006/main" xmlns:a="http://schemas.openxmlformats.org/drawingml/2006/main">
+  <p:cSld>
+    <p:spTree>
+      <p:nvGrpSpPr>
+        <p:cNvPr id="85" name="" descr="&lt;Slide style={{ width: 1280, height: 720, background: '#0B0D14', padding: '56px 72px', flexDirection: 'column' }}&gt;&#13;&#10;  &lt;Box style={{ height: 96, flexDirection: 'row', justifyContent: 'space-between', alignItems: 'flex-start' }}&gt;&#13;&#10;    &lt;Box style={{ flexDirection: 'column', gap: 8 }}&gt;&#13;&#10;      &lt;Text style={{ fontSize: 34, fontWeight: 'bold', color: '#F2F4FF' }}&gt;老板每天问的三个问题，现有工具一个都没回答&lt;/Text&gt;&#13;&#10;      &lt;Text style={{ fontSize: 15, color: '#8A90A6' }}&gt;不是缺报表，是缺结论和动作&lt;/Text&gt;&#13;&#10;    &lt;/Box&gt;&#13;&#10;    &lt;Text style={{ fontSize: 13, color: '#4A5064', letterSpacing: 2 }}&gt;AI 掌柜&lt;/Text&gt;&#13;&#10;  &lt;/Box&gt;&#13;&#10;  &lt;Box style={{ flex: 1, paddingTop: 8 }}&gt;&#13;&#10;    &lt;Box style={{ flexDirection: 'row', gap: 20, height: 300 }}&gt;&#13;&#10;      &lt;Box style={{ flex: 1, background: '#141826', border: '1px solid #242A3D', borderRadius: 14, padding: 26, flexDirection: 'column', justifyContent: 'space-between' }}&gt;&#13;&#10;        &lt;Text style={{ fontSize: 56, fontWeight: 'bold', color: '#6C6CF5' }}&gt;01&lt;/Text&gt;&#13;&#10;        &lt;Text style={{ fontSize: 22, fontWeight: 'bold', color: '#F2F4FF' }}&gt;今天到底赚没赚&lt;/Text&gt;&#13;&#10;        &lt;Text style={{ fontSize: 15, color: '#8A90A6', lineHeight: 1.8 }}&gt;六张报表翻半小时，只知道跌了，&lt;br /&gt;不知道是人少了还是点便宜了。&lt;/Text&gt;&#13;&#10;      &lt;/Box&gt;&#13;&#10;      &lt;Box style={{ flex: 1, background: '#141826', border: '1px solid #242A3D', borderRadius: 14, padding: 26, flexDirection: 'column', justifyContent: 'space-between' }}&gt;&#13;&#10;        &lt;Text style={{ fontSize: 56, fontWeight: 'bold', color: '#6C6CF5' }}&gt;02&lt;/Text&gt;&#13;&#10;        &lt;Text style={{ fontSize: 22, fontWeight: 'bold', color: '#F2F4FF' }}&gt;明天该买多少&lt;/Text&gt;&#13;&#10;        &lt;Text style={{ fontSize: 15, color: '#8A90A6', lineHeight: 1.8 }}&gt;采购靠经验：缺货和压货同时发生，&lt;br /&gt;这套数据里 5 种食材只够 2 天。&lt;/Text&gt;&#13;&#10;      &lt;/Box&gt;&#13;&#10;      &lt;Box style={{ flex: 1, background: '#141826', border: '1px solid #242A3D', borderRadius: 14, padding: 26, flexDirection: 'column', justifyContent: 'space-between' }}&gt;&#13;&#10;        &lt;Text style={{ fontSize: 56, fontWeight: 'bold', color: '#6C6CF5' }}&gt;03&lt;/Text&gt;&#13;&#10;        &lt;Text style={{ fontSize: 22, fontWeight: 'bold', color: '#F2F4FF' }}&gt;哪道菜在赔钱&lt;/Text&gt;&#13;&#10;        &lt;Text style={{ fontSize: 15, color: '#8A90A6', lineHeight: 1.8 }}&gt;207 道菜只有 107 道算得清成本，&lt;br /&gt;卖得越多，可能亏得越多。&lt;/Text&gt;&#13;&#10;      &lt;/Box&gt;&#13;&#10;    &lt;/Box&gt;&#13;&#10;    &lt;Box style={{ marginTop: 34, paddingTop: 24, borderTop: '1px solid #242A3D', flexDirection: 'row', alignItems: 'center', gap: 16 }}&gt;&#13;&#10;      &lt;Box style={{ width: 6, height: 28, background: '#6C6CF5', borderRadius: 3 }} /&gt;&#13;&#10;      &lt;Text style={{ fontSize: 24, color: '#F2F4FF' }}&gt;中小餐饮不缺数据，缺一个&lt;Text style={{ fontSize: 24, fontWeight: 'bold', color: '#6C6CF5' }}&gt;能替他做决定&lt;/Text&gt;的角色。&lt;/Text&gt;&#13;&#10;    &lt;/Box&gt;&#13;&#10;  &lt;/Box&gt;&#13;&#10;  &lt;Box style={{ height: 36, flexDirection: 'row', justifyContent: 'space-between', alignItems: 'flex-end' }}&gt;&#13;&#10;    &lt;Text style={{ fontSize: 12, color: '#4A5064' }}&gt;2026 武汉 1024 · 产业应用赛道&lt;/Text&gt;&#13;&#10;    &lt;Text style={{ fontSize: 12, color: '#4A5064' }}&gt;02 / 12&lt;/Text&gt;&#13;&#10;  &lt;/Box&gt;&#13;&#10;&lt;/Slide&gt;"/>
+        <p:cNvGrpSpPr/>
+        <p:nvPr/>
+      </p:nvGrpSpPr>
+      <p:grpSpPr>
+        <a:xfrm>
+          <a:off x="0" y="0"/>
+          <a:ext cx="0" cy="0"/>
+          <a:chOff x="0" y="0"/>
+          <a:chExt cx="0" cy="0"/>
+        </a:xfrm>
+      </p:grpSpPr>
+      <p:sp>
+        <p:nvSpPr>
+          <p:cNvPr id="86" name=""/>
+          <p:cNvSpPr/>
+          <p:nvPr/>
+        </p:nvSpPr>
+        <p:spPr>
+          <a:xfrm rot="0" flipH="0" flipV="0">
+            <a:off x="0" y="0"/>
+            <a:ext cx="12192000" cy="6858000"/>
+          </a:xfrm>
+          <a:prstGeom prst="rect">
+            <a:avLst/>
+          </a:prstGeom>
+          <a:solidFill>
+            <a:srgbClr val="0B0D14"/>
+          </a:solidFill>
+          <a:ln/>
+        </p:spPr>
+        <p:txBody>
+          <a:bodyPr/>
+          <a:p/>
+        </p:txBody>
+      </p:sp>
+      <p:sp>
+        <p:nvSpPr>
+          <p:cNvPr id="87" name="" descr="{&quot;isTemplate&quot;:true,&quot;type&quot;:&quot;text&quot;}"/>
+          <p:cNvSpPr txBox="1"/>
+          <p:nvPr/>
+        </p:nvSpPr>
+        <p:spPr>
+          <a:xfrm rot="0" flipH="0" flipV="0">
+            <a:off x="685800" y="533400"/>
             <a:ext cx="6800850" cy="390525"/>
           </a:xfrm>
           <a:prstGeom prst="rect"/>
@@ -3671,7 +4458,7 @@
       </p:sp>
       <p:sp>
         <p:nvSpPr>
-          <p:cNvPr id="71" name="" descr="{&quot;isTemplate&quot;:true,&quot;type&quot;:&quot;text&quot;}"/>
+          <p:cNvPr id="88" name="" descr="{&quot;isTemplate&quot;:true,&quot;type&quot;:&quot;text&quot;}"/>
           <p:cNvSpPr txBox="1"/>
           <p:nvPr/>
         </p:nvSpPr>
@@ -3706,7 +4493,7 @@
       </p:sp>
       <p:sp>
         <p:nvSpPr>
-          <p:cNvPr id="72" name="" descr="{&quot;isTemplate&quot;:true,&quot;type&quot;:&quot;text&quot;}"/>
+          <p:cNvPr id="89" name="" descr="{&quot;isTemplate&quot;:true,&quot;type&quot;:&quot;text&quot;}"/>
           <p:cNvSpPr txBox="1"/>
           <p:nvPr/>
         </p:nvSpPr>
@@ -3751,7 +4538,7 @@
       </p:sp>
       <p:sp>
         <p:nvSpPr>
-          <p:cNvPr id="73" name=""/>
+          <p:cNvPr id="90" name=""/>
           <p:cNvSpPr/>
           <p:nvPr/>
         </p:nvSpPr>
@@ -3782,7 +4569,7 @@
       </p:sp>
       <p:sp>
         <p:nvSpPr>
-          <p:cNvPr id="74" name="" descr="{&quot;isTemplate&quot;:true,&quot;type&quot;:&quot;text&quot;}"/>
+          <p:cNvPr id="91" name="" descr="{&quot;isTemplate&quot;:true,&quot;type&quot;:&quot;text&quot;}"/>
           <p:cNvSpPr txBox="1"/>
           <p:nvPr/>
         </p:nvSpPr>
@@ -3817,7 +4604,7 @@
       </p:sp>
       <p:sp>
         <p:nvSpPr>
-          <p:cNvPr id="75" name="" descr="{&quot;isTemplate&quot;:true,&quot;type&quot;:&quot;text&quot;}"/>
+          <p:cNvPr id="92" name="" descr="{&quot;isTemplate&quot;:true,&quot;type&quot;:&quot;text&quot;}"/>
           <p:cNvSpPr txBox="1"/>
           <p:nvPr/>
         </p:nvSpPr>
@@ -3852,7 +4639,7 @@
       </p:sp>
       <p:sp>
         <p:nvSpPr>
-          <p:cNvPr id="76" name="" descr="{&quot;isTemplate&quot;:true,&quot;type&quot;:&quot;text&quot;}"/>
+          <p:cNvPr id="93" name="" descr="{&quot;isTemplate&quot;:true,&quot;type&quot;:&quot;text&quot;}"/>
           <p:cNvSpPr txBox="1"/>
           <p:nvPr/>
         </p:nvSpPr>
@@ -3905,7 +4692,7 @@
       </p:sp>
       <p:sp>
         <p:nvSpPr>
-          <p:cNvPr id="77" name=""/>
+          <p:cNvPr id="94" name=""/>
           <p:cNvSpPr/>
           <p:nvPr/>
         </p:nvSpPr>
@@ -3936,7 +4723,7 @@
       </p:sp>
       <p:sp>
         <p:nvSpPr>
-          <p:cNvPr id="78" name="" descr="{&quot;isTemplate&quot;:true,&quot;type&quot;:&quot;text&quot;}"/>
+          <p:cNvPr id="95" name="" descr="{&quot;isTemplate&quot;:true,&quot;type&quot;:&quot;text&quot;}"/>
           <p:cNvSpPr txBox="1"/>
           <p:nvPr/>
         </p:nvSpPr>
@@ -3971,7 +4758,7 @@
       </p:sp>
       <p:sp>
         <p:nvSpPr>
-          <p:cNvPr id="79" name="" descr="{&quot;isTemplate&quot;:true,&quot;type&quot;:&quot;text&quot;}"/>
+          <p:cNvPr id="96" name="" descr="{&quot;isTemplate&quot;:true,&quot;type&quot;:&quot;text&quot;}"/>
           <p:cNvSpPr txBox="1"/>
           <p:nvPr/>
         </p:nvSpPr>
@@ -4006,7 +4793,7 @@
       </p:sp>
       <p:sp>
         <p:nvSpPr>
-          <p:cNvPr id="80" name="" descr="{&quot;isTemplate&quot;:true,&quot;type&quot;:&quot;text&quot;}"/>
+          <p:cNvPr id="97" name="" descr="{&quot;isTemplate&quot;:true,&quot;type&quot;:&quot;text&quot;}"/>
           <p:cNvSpPr txBox="1"/>
           <p:nvPr/>
         </p:nvSpPr>
@@ -4099,7 +4886,7 @@
       </p:sp>
       <p:sp>
         <p:nvSpPr>
-          <p:cNvPr id="81" name=""/>
+          <p:cNvPr id="98" name=""/>
           <p:cNvSpPr/>
           <p:nvPr/>
         </p:nvSpPr>
@@ -4130,7 +4917,7 @@
       </p:sp>
       <p:sp>
         <p:nvSpPr>
-          <p:cNvPr id="82" name="" descr="{&quot;isTemplate&quot;:true,&quot;type&quot;:&quot;text&quot;}"/>
+          <p:cNvPr id="99" name="" descr="{&quot;isTemplate&quot;:true,&quot;type&quot;:&quot;text&quot;}"/>
           <p:cNvSpPr txBox="1"/>
           <p:nvPr/>
         </p:nvSpPr>
@@ -4165,7 +4952,7 @@
       </p:sp>
       <p:sp>
         <p:nvSpPr>
-          <p:cNvPr id="83" name="" descr="{&quot;isTemplate&quot;:true,&quot;type&quot;:&quot;text&quot;}"/>
+          <p:cNvPr id="100" name="" descr="{&quot;isTemplate&quot;:true,&quot;type&quot;:&quot;text&quot;}"/>
           <p:cNvSpPr txBox="1"/>
           <p:nvPr/>
         </p:nvSpPr>
@@ -4200,7 +4987,7 @@
       </p:sp>
       <p:sp>
         <p:nvSpPr>
-          <p:cNvPr id="84" name="" descr="{&quot;isTemplate&quot;:true,&quot;type&quot;:&quot;text&quot;}"/>
+          <p:cNvPr id="101" name="" descr="{&quot;isTemplate&quot;:true,&quot;type&quot;:&quot;text&quot;}"/>
           <p:cNvSpPr txBox="1"/>
           <p:nvPr/>
         </p:nvSpPr>
@@ -4283,7 +5070,7 @@
       </p:sp>
       <p:sp>
         <p:nvSpPr>
-          <p:cNvPr id="85" name=""/>
+          <p:cNvPr id="102" name=""/>
           <p:cNvSpPr/>
           <p:nvPr/>
         </p:nvSpPr>
@@ -4323,7 +5110,7 @@
       </p:sp>
       <p:sp>
         <p:nvSpPr>
-          <p:cNvPr id="86" name=""/>
+          <p:cNvPr id="103" name=""/>
           <p:cNvSpPr/>
           <p:nvPr/>
         </p:nvSpPr>
@@ -4349,7 +5136,7 @@
       </p:sp>
       <p:sp>
         <p:nvSpPr>
-          <p:cNvPr id="87" name="" descr="{&quot;isTemplate&quot;:true,&quot;type&quot;:&quot;text&quot;}"/>
+          <p:cNvPr id="104" name="" descr="{&quot;isTemplate&quot;:true,&quot;type&quot;:&quot;text&quot;}"/>
           <p:cNvSpPr txBox="1"/>
           <p:nvPr/>
         </p:nvSpPr>
@@ -4404,7 +5191,7 @@
       </p:sp>
       <p:sp>
         <p:nvSpPr>
-          <p:cNvPr id="88" name="" descr="{&quot;isTemplate&quot;:true,&quot;type&quot;:&quot;text&quot;}"/>
+          <p:cNvPr id="105" name="" descr="{&quot;isTemplate&quot;:true,&quot;type&quot;:&quot;text&quot;}"/>
           <p:cNvSpPr txBox="1"/>
           <p:nvPr/>
         </p:nvSpPr>
@@ -4469,7 +5256,7 @@
       </p:sp>
       <p:sp>
         <p:nvSpPr>
-          <p:cNvPr id="89" name="" descr="{&quot;isTemplate&quot;:true,&quot;type&quot;:&quot;text&quot;}"/>
+          <p:cNvPr id="106" name="" descr="{&quot;isTemplate&quot;:true,&quot;type&quot;:&quot;text&quot;}"/>
           <p:cNvSpPr txBox="1"/>
           <p:nvPr/>
         </p:nvSpPr>
@@ -4512,7 +5299,7 @@
   <p:cSld>
     <p:spTree>
       <p:nvGrpSpPr>
-        <p:cNvPr id="90" name="" descr="&lt;Slide style={{ width: 1280, height: 720, background: '#0B0D14', padding: '56px 72px', flexDirection: 'column' }}&gt;&#13;&#10;  &lt;Box style={{ height: 96, flexDirection: 'row', justifyContent: 'space-between', alignItems: 'flex-start' }}&gt;&#13;&#10;    &lt;Box style={{ flexDirection: 'column', gap: 8 }}&gt;&#13;&#10;      &lt;Text style={{ fontSize: 34, fontWeight: 'bold', color: '#F2F4FF' }}&gt;分水岭不在图表，在「能不能动手」&lt;/Text&gt;&#13;&#10;      &lt;Text style={{ fontSize: 15, color: '#8A90A6' }}&gt;同样一份营收下滑，两条完全不同的处理路径&lt;/Text&gt;&#13;&#10;    &lt;/Box&gt;&#13;&#10;    &lt;Text style={{ fontSize: 13, color: '#4A5064', letterSpacing: 2 }}&gt;AI 掌柜&lt;/Text&gt;&#13;&#10;  &lt;/Box&gt;&#13;&#10;  &lt;Box style={{ flex: 1, paddingTop: 8 }}&gt;&#13;&#10;    &lt;Box style={{ flexDirection: 'row', gap: 24, height: 330 }}&gt;&#13;&#10;      &lt;Box style={{ flex: 1, background: '#12141F', border: '1px solid #242A3D', borderRadius: 14, padding: 26 }}&gt;&#13;&#10;        &lt;Text style={{ fontSize: 13, color: '#4A5064', letterSpacing: 2 }}&gt;传统 BI / 经营看板&lt;/Text&gt;&#13;&#10;        &lt;Text style={{ fontSize: 26, fontWeight: 'bold', color: '#8A90A6', marginTop: 10 }}&gt;价值停在「知道」&lt;/Text&gt;&#13;&#10;        &lt;Box style={{ marginTop: 22, flexDirection: 'column', gap: 14 }}&gt;&#13;&#10;          &lt;Text style={{ fontSize: 16, color: '#8A90A6' }}&gt;看板 → 发现跌了&lt;/Text&gt;&#13;&#10;          &lt;Text style={{ fontSize: 16, color: '#8A90A6' }}&gt;→ 自己判断原因&lt;/Text&gt;&#13;&#10;          &lt;Text style={{ fontSize: 16, color: '#8A90A6' }}&gt;→ 自己打电话订货&lt;/Text&gt;&#13;&#10;          &lt;Text style={{ fontSize: 16, color: '#8A90A6' }}&gt;→ 一周后忘了复盘&lt;/Text&gt;&#13;&#10;        &lt;/Box&gt;&#13;&#10;      &lt;/Box&gt;&#13;&#10;      &lt;Box style={{ flex: 1, background: '#171A2E', border: '1px solid #6C6CF5', borderRadius: 14, padding: 26 }}&gt;&#13;&#10;        &lt;Text style={{ fontSize: 13, color: '#6C6CF5', letterSpacing: 2 }}&gt;AI 掌柜&lt;/Text&gt;&#13;&#10;        &lt;Text style={{ fontSize: 26, fontWeight: 'bold', color: '#F2F4FF', marginTop: 10 }}&gt;价值走到「改变」&lt;/Text&gt;&#13;&#10;        &lt;Box style={{ marginTop: 22, flexDirection: 'column', gap: 14 }}&gt;&#13;&#10;          &lt;Text style={{ fontSize: 16, color: '#F2F4FF' }}&gt;驾驶舱 → 3 件事 + 证据&lt;/Text&gt;&#13;&#10;          &lt;Text style={{ fontSize: 16, color: '#F2F4FF' }}&gt;→ 拆解成客流 / 客单价&lt;/Text&gt;&#13;&#10;          &lt;Text style={{ fontSize: 16, color: '#F2F4FF' }}&gt;→ 一键生成采购单并入库&lt;/Text&gt;&#13;&#10;          &lt;Text style={{ fontSize: 16, color: '#F2F4FF' }}&gt;→ 7 天后自动回填效果&lt;/Text&gt;&#13;&#10;        &lt;/Box&gt;&#13;&#10;      &lt;/Box&gt;&#13;&#10;    &lt;/Box&gt;&#13;&#10;    &lt;Box style={{ marginTop: 30, flexDirection: 'row', gap: 14 }}&gt;&#13;&#10;      &lt;Text style={{ fontSize: 15, color: '#8A90A6' }}&gt;三个关键词&lt;/Text&gt;&#13;&#10;      &lt;Text style={{ fontSize: 15, color: '#6C6CF5', fontWeight: 'bold' }}&gt;可执行 · 可追溯 · 可撤销&lt;/Text&gt;&#13;&#10;    &lt;/Box&gt;&#13;&#10;  &lt;/Box&gt;&#13;&#10;  &lt;Box style={{ height: 36, flexDirection: 'row', justifyContent: 'space-between', alignItems: 'flex-end' }}&gt;&#13;&#10;    &lt;Text style={{ fontSize: 12, color: '#4A5064' }}&gt;2026 武汉 1024 · 产业应用赛道&lt;/Text&gt;&#13;&#10;    &lt;Text style={{ fontSize: 12, color: '#4A5064' }}&gt;03 / 12&lt;/Text&gt;&#13;&#10;  &lt;/Box&gt;&#13;&#10;&lt;/Slide&gt;"/>
+        <p:cNvPr id="107" name="" descr="&lt;Slide style={{ width: 1280, height: 720, background: '#0B0D14', padding: '56px 72px', flexDirection: 'column' }}&gt;&#13;&#10;  &lt;Box style={{ height: 96, flexDirection: 'row', justifyContent: 'space-between', alignItems: 'flex-start' }}&gt;&#13;&#10;    &lt;Box style={{ flexDirection: 'column', gap: 8 }}&gt;&#13;&#10;      &lt;Text style={{ fontSize: 34, fontWeight: 'bold', color: '#F2F4FF' }}&gt;分水岭不在图表，在「能不能动手」&lt;/Text&gt;&#13;&#10;      &lt;Text style={{ fontSize: 15, color: '#8A90A6' }}&gt;同样一份营收下滑，两条完全不同的处理路径&lt;/Text&gt;&#13;&#10;    &lt;/Box&gt;&#13;&#10;    &lt;Text style={{ fontSize: 13, color: '#4A5064', letterSpacing: 2 }}&gt;AI 掌柜&lt;/Text&gt;&#13;&#10;  &lt;/Box&gt;&#13;&#10;  &lt;Box style={{ flex: 1, paddingTop: 8 }}&gt;&#13;&#10;    &lt;Box style={{ flexDirection: 'row', gap: 24, height: 330 }}&gt;&#13;&#10;      &lt;Box style={{ flex: 1, background: '#12141F', border: '1px solid #242A3D', borderRadius: 14, padding: 26 }}&gt;&#13;&#10;        &lt;Text style={{ fontSize: 13, color: '#4A5064', letterSpacing: 2 }}&gt;传统 BI / 经营看板&lt;/Text&gt;&#13;&#10;        &lt;Text style={{ fontSize: 26, fontWeight: 'bold', color: '#8A90A6', marginTop: 10 }}&gt;价值停在「知道」&lt;/Text&gt;&#13;&#10;        &lt;Box style={{ marginTop: 22, flexDirection: 'column', gap: 14 }}&gt;&#13;&#10;          &lt;Text style={{ fontSize: 16, color: '#8A90A6' }}&gt;看板 → 发现跌了&lt;/Text&gt;&#13;&#10;          &lt;Text style={{ fontSize: 16, color: '#8A90A6' }}&gt;→ 自己判断原因&lt;/Text&gt;&#13;&#10;          &lt;Text style={{ fontSize: 16, color: '#8A90A6' }}&gt;→ 自己打电话订货&lt;/Text&gt;&#13;&#10;          &lt;Text style={{ fontSize: 16, color: '#8A90A6' }}&gt;→ 一周后忘了复盘&lt;/Text&gt;&#13;&#10;        &lt;/Box&gt;&#13;&#10;      &lt;/Box&gt;&#13;&#10;      &lt;Box style={{ flex: 1, background: '#171A2E', border: '1px solid #6C6CF5', borderRadius: 14, padding: 26 }}&gt;&#13;&#10;        &lt;Text style={{ fontSize: 13, color: '#6C6CF5', letterSpacing: 2 }}&gt;AI 掌柜&lt;/Text&gt;&#13;&#10;        &lt;Text style={{ fontSize: 26, fontWeight: 'bold', color: '#F2F4FF', marginTop: 10 }}&gt;价值走到「改变」&lt;/Text&gt;&#13;&#10;        &lt;Box style={{ marginTop: 22, flexDirection: 'column', gap: 14 }}&gt;&#13;&#10;          &lt;Text style={{ fontSize: 16, color: '#F2F4FF' }}&gt;驾驶舱 → 3 件事 + 证据&lt;/Text&gt;&#13;&#10;          &lt;Text style={{ fontSize: 16, color: '#F2F4FF' }}&gt;→ 拆解成客流 / 客单价&lt;/Text&gt;&#13;&#10;          &lt;Text style={{ fontSize: 16, color: '#F2F4FF' }}&gt;→ 一键生成采购单并入库&lt;/Text&gt;&#13;&#10;          &lt;Text style={{ fontSize: 16, color: '#F2F4FF' }}&gt;→ 7 天后自动回填效果&lt;/Text&gt;&#13;&#10;        &lt;/Box&gt;&#13;&#10;      &lt;/Box&gt;&#13;&#10;    &lt;/Box&gt;&#13;&#10;    &lt;Box style={{ marginTop: 30, flexDirection: 'row', gap: 14 }}&gt;&#13;&#10;      &lt;Text style={{ fontSize: 15, color: '#8A90A6' }}&gt;三个关键词&lt;/Text&gt;&#13;&#10;      &lt;Text style={{ fontSize: 15, color: '#6C6CF5', fontWeight: 'bold' }}&gt;可执行 · 可追溯 · 可撤销&lt;/Text&gt;&#13;&#10;    &lt;/Box&gt;&#13;&#10;  &lt;/Box&gt;&#13;&#10;  &lt;Box style={{ height: 36, flexDirection: 'row', justifyContent: 'space-between', alignItems: 'flex-end' }}&gt;&#13;&#10;    &lt;Text style={{ fontSize: 12, color: '#4A5064' }}&gt;2026 武汉 1024 · 产业应用赛道&lt;/Text&gt;&#13;&#10;    &lt;Text style={{ fontSize: 12, color: '#4A5064' }}&gt;03 / 12&lt;/Text&gt;&#13;&#10;  &lt;/Box&gt;&#13;&#10;&lt;/Slide&gt;"/>
         <p:cNvGrpSpPr/>
         <p:nvPr/>
       </p:nvGrpSpPr>
@@ -4526,7 +5313,7 @@
       </p:grpSpPr>
       <p:sp>
         <p:nvSpPr>
-          <p:cNvPr id="91" name=""/>
+          <p:cNvPr id="108" name=""/>
           <p:cNvSpPr/>
           <p:nvPr/>
         </p:nvSpPr>
@@ -4550,7 +5337,7 @@
       </p:sp>
       <p:sp>
         <p:nvSpPr>
-          <p:cNvPr id="92" name="" descr="{&quot;isTemplate&quot;:true,&quot;type&quot;:&quot;text&quot;}"/>
+          <p:cNvPr id="109" name="" descr="{&quot;isTemplate&quot;:true,&quot;type&quot;:&quot;text&quot;}"/>
           <p:cNvSpPr txBox="1"/>
           <p:nvPr/>
         </p:nvSpPr>
@@ -4585,7 +5372,7 @@
       </p:sp>
       <p:sp>
         <p:nvSpPr>
-          <p:cNvPr id="93" name="" descr="{&quot;isTemplate&quot;:true,&quot;type&quot;:&quot;text&quot;}"/>
+          <p:cNvPr id="110" name="" descr="{&quot;isTemplate&quot;:true,&quot;type&quot;:&quot;text&quot;}"/>
           <p:cNvSpPr txBox="1"/>
           <p:nvPr/>
         </p:nvSpPr>
@@ -4620,7 +5407,7 @@
       </p:sp>
       <p:sp>
         <p:nvSpPr>
-          <p:cNvPr id="94" name="" descr="{&quot;isTemplate&quot;:true,&quot;type&quot;:&quot;text&quot;}"/>
+          <p:cNvPr id="111" name="" descr="{&quot;isTemplate&quot;:true,&quot;type&quot;:&quot;text&quot;}"/>
           <p:cNvSpPr txBox="1"/>
           <p:nvPr/>
         </p:nvSpPr>
@@ -4665,7 +5452,7 @@
       </p:sp>
       <p:sp>
         <p:nvSpPr>
-          <p:cNvPr id="95" name=""/>
+          <p:cNvPr id="112" name=""/>
           <p:cNvSpPr/>
           <p:nvPr/>
         </p:nvSpPr>
@@ -4696,7 +5483,7 @@
       </p:sp>
       <p:sp>
         <p:nvSpPr>
-          <p:cNvPr id="96" name="" descr="{&quot;isTemplate&quot;:true,&quot;type&quot;:&quot;text&quot;}"/>
+          <p:cNvPr id="113" name="" descr="{&quot;isTemplate&quot;:true,&quot;type&quot;:&quot;text&quot;}"/>
           <p:cNvSpPr txBox="1"/>
           <p:nvPr/>
         </p:nvSpPr>
@@ -4751,7 +5538,7 @@
       </p:sp>
       <p:sp>
         <p:nvSpPr>
-          <p:cNvPr id="97" name="" descr="{&quot;isTemplate&quot;:true,&quot;type&quot;:&quot;text&quot;}"/>
+          <p:cNvPr id="114" name="" descr="{&quot;isTemplate&quot;:true,&quot;type&quot;:&quot;text&quot;}"/>
           <p:cNvSpPr txBox="1"/>
           <p:nvPr/>
         </p:nvSpPr>
@@ -4786,7 +5573,7 @@
       </p:sp>
       <p:sp>
         <p:nvSpPr>
-          <p:cNvPr id="98" name="" descr="{&quot;isTemplate&quot;:true,&quot;type&quot;:&quot;text&quot;}"/>
+          <p:cNvPr id="115" name="" descr="{&quot;isTemplate&quot;:true,&quot;type&quot;:&quot;text&quot;}"/>
           <p:cNvSpPr txBox="1"/>
           <p:nvPr/>
         </p:nvSpPr>
@@ -4841,7 +5628,7 @@
       </p:sp>
       <p:sp>
         <p:nvSpPr>
-          <p:cNvPr id="99" name="" descr="{&quot;isTemplate&quot;:true,&quot;type&quot;:&quot;text&quot;}"/>
+          <p:cNvPr id="116" name="" descr="{&quot;isTemplate&quot;:true,&quot;type&quot;:&quot;text&quot;}"/>
           <p:cNvSpPr txBox="1"/>
           <p:nvPr/>
         </p:nvSpPr>
@@ -4886,7 +5673,7 @@
       </p:sp>
       <p:sp>
         <p:nvSpPr>
-          <p:cNvPr id="100" name="" descr="{&quot;isTemplate&quot;:true,&quot;type&quot;:&quot;text&quot;}"/>
+          <p:cNvPr id="117" name="" descr="{&quot;isTemplate&quot;:true,&quot;type&quot;:&quot;text&quot;}"/>
           <p:cNvSpPr txBox="1"/>
           <p:nvPr/>
         </p:nvSpPr>
@@ -4931,7 +5718,7 @@
       </p:sp>
       <p:sp>
         <p:nvSpPr>
-          <p:cNvPr id="101" name="" descr="{&quot;isTemplate&quot;:true,&quot;type&quot;:&quot;text&quot;}"/>
+          <p:cNvPr id="118" name="" descr="{&quot;isTemplate&quot;:true,&quot;type&quot;:&quot;text&quot;}"/>
           <p:cNvSpPr txBox="1"/>
           <p:nvPr/>
         </p:nvSpPr>
@@ -4976,7 +5763,7 @@
       </p:sp>
       <p:sp>
         <p:nvSpPr>
-          <p:cNvPr id="102" name=""/>
+          <p:cNvPr id="119" name=""/>
           <p:cNvSpPr/>
           <p:nvPr/>
         </p:nvSpPr>
@@ -5007,7 +5794,7 @@
       </p:sp>
       <p:sp>
         <p:nvSpPr>
-          <p:cNvPr id="103" name="" descr="{&quot;isTemplate&quot;:true,&quot;type&quot;:&quot;text&quot;}"/>
+          <p:cNvPr id="120" name="" descr="{&quot;isTemplate&quot;:true,&quot;type&quot;:&quot;text&quot;}"/>
           <p:cNvSpPr txBox="1"/>
           <p:nvPr/>
         </p:nvSpPr>
@@ -5052,7 +5839,7 @@
       </p:sp>
       <p:sp>
         <p:nvSpPr>
-          <p:cNvPr id="104" name="" descr="{&quot;isTemplate&quot;:true,&quot;type&quot;:&quot;text&quot;}"/>
+          <p:cNvPr id="121" name="" descr="{&quot;isTemplate&quot;:true,&quot;type&quot;:&quot;text&quot;}"/>
           <p:cNvSpPr txBox="1"/>
           <p:nvPr/>
         </p:nvSpPr>
@@ -5087,7 +5874,7 @@
       </p:sp>
       <p:sp>
         <p:nvSpPr>
-          <p:cNvPr id="105" name="" descr="{&quot;isTemplate&quot;:true,&quot;type&quot;:&quot;text&quot;}"/>
+          <p:cNvPr id="122" name="" descr="{&quot;isTemplate&quot;:true,&quot;type&quot;:&quot;text&quot;}"/>
           <p:cNvSpPr txBox="1"/>
           <p:nvPr/>
         </p:nvSpPr>
@@ -5162,7 +5949,7 @@
       </p:sp>
       <p:sp>
         <p:nvSpPr>
-          <p:cNvPr id="106" name="" descr="{&quot;isTemplate&quot;:true,&quot;type&quot;:&quot;text&quot;}"/>
+          <p:cNvPr id="123" name="" descr="{&quot;isTemplate&quot;:true,&quot;type&quot;:&quot;text&quot;}"/>
           <p:cNvSpPr txBox="1"/>
           <p:nvPr/>
         </p:nvSpPr>
@@ -5227,7 +6014,7 @@
       </p:sp>
       <p:sp>
         <p:nvSpPr>
-          <p:cNvPr id="107" name="" descr="{&quot;isTemplate&quot;:true,&quot;type&quot;:&quot;text&quot;}"/>
+          <p:cNvPr id="124" name="" descr="{&quot;isTemplate&quot;:true,&quot;type&quot;:&quot;text&quot;}"/>
           <p:cNvSpPr txBox="1"/>
           <p:nvPr/>
         </p:nvSpPr>
@@ -5272,7 +6059,7 @@
       </p:sp>
       <p:sp>
         <p:nvSpPr>
-          <p:cNvPr id="108" name="" descr="{&quot;isTemplate&quot;:true,&quot;type&quot;:&quot;text&quot;}"/>
+          <p:cNvPr id="125" name="" descr="{&quot;isTemplate&quot;:true,&quot;type&quot;:&quot;text&quot;}"/>
           <p:cNvSpPr txBox="1"/>
           <p:nvPr/>
         </p:nvSpPr>
@@ -5317,7 +6104,7 @@
       </p:sp>
       <p:sp>
         <p:nvSpPr>
-          <p:cNvPr id="109" name="" descr="{&quot;isTemplate&quot;:true,&quot;type&quot;:&quot;text&quot;}"/>
+          <p:cNvPr id="126" name="" descr="{&quot;isTemplate&quot;:true,&quot;type&quot;:&quot;text&quot;}"/>
           <p:cNvSpPr txBox="1"/>
           <p:nvPr/>
         </p:nvSpPr>
@@ -5352,7 +6139,7 @@
       </p:sp>
       <p:sp>
         <p:nvSpPr>
-          <p:cNvPr id="110" name="" descr="{&quot;isTemplate&quot;:true,&quot;type&quot;:&quot;text&quot;}"/>
+          <p:cNvPr id="127" name="" descr="{&quot;isTemplate&quot;:true,&quot;type&quot;:&quot;text&quot;}"/>
           <p:cNvSpPr txBox="1"/>
           <p:nvPr/>
         </p:nvSpPr>
@@ -5427,7 +6214,7 @@
       </p:sp>
       <p:sp>
         <p:nvSpPr>
-          <p:cNvPr id="111" name="" descr="{&quot;isTemplate&quot;:true,&quot;type&quot;:&quot;text&quot;}"/>
+          <p:cNvPr id="128" name="" descr="{&quot;isTemplate&quot;:true,&quot;type&quot;:&quot;text&quot;}"/>
           <p:cNvSpPr txBox="1"/>
           <p:nvPr/>
         </p:nvSpPr>
@@ -5492,7 +6279,7 @@
       </p:sp>
       <p:sp>
         <p:nvSpPr>
-          <p:cNvPr id="112" name="" descr="{&quot;isTemplate&quot;:true,&quot;type&quot;:&quot;text&quot;}"/>
+          <p:cNvPr id="129" name="" descr="{&quot;isTemplate&quot;:true,&quot;type&quot;:&quot;text&quot;}"/>
           <p:cNvSpPr txBox="1"/>
           <p:nvPr/>
         </p:nvSpPr>
@@ -5535,7 +6322,7 @@
   <p:cSld>
     <p:spTree>
       <p:nvGrpSpPr>
-        <p:cNvPr id="113" name="" descr="&lt;Slide style={{ width: 1280, height: 720, background: '#0B0D14', padding: '56px 72px', flexDirection: 'column' }}&gt;&#13;&#10;  &lt;Box style={{ height: 96, flexDirection: 'row', justifyContent: 'space-between', alignItems: 'flex-start' }}&gt;&#13;&#10;    &lt;Box style={{ flexDirection: 'column', gap: 8 }}&gt;&#13;&#10;      &lt;Text style={{ fontSize: 34, fontWeight: 'bold', color: '#F2F4FF' }}&gt;四块能力，缺一块都落不了地&lt;/Text&gt;&#13;&#10;      &lt;Text style={{ fontSize: 15, color: '#8A90A6' }}&gt;看得懂、算得准、动得了、说得清&lt;/Text&gt;&#13;&#10;    &lt;/Box&gt;&#13;&#10;    &lt;Text style={{ fontSize: 13, color: '#4A5064', letterSpacing: 2 }}&gt;AI 掌柜&lt;/Text&gt;&#13;&#10;  &lt;/Box&gt;&#13;&#10;  &lt;Box style={{ flex: 1, paddingTop: 8 }}&gt;&#13;&#10;    &lt;Box style={{ flexDirection: 'row', gap: 18, height: 250 }}&gt;&#13;&#10;      &lt;Box style={{ flex: 1, background: '#141826', border: '1px solid #242A3D', borderRadius: 14, padding: 24 }}&gt;&#13;&#10;        &lt;Text style={{ fontSize: 20, fontWeight: 'bold', color: '#6C6CF5' }}&gt;看得懂&lt;/Text&gt;&#13;&#10;        &lt;Text style={{ fontSize: 15, color: '#F2F4FF', marginTop: 12, lineHeight: 1.75 }}&gt;营收 · 客流 · 毛利&lt;br /&gt;时段 · 翻台 · 会员结构&lt;/Text&gt;&#13;&#10;        &lt;Text style={{ fontSize: 13, color: '#8A90A6', marginTop: 16 }}&gt;180 天 / 6,803 单&lt;/Text&gt;&#13;&#10;      &lt;/Box&gt;&#13;&#10;      &lt;Box style={{ flex: 1, background: '#141826', border: '1px solid #242A3D', borderRadius: 14, padding: 24 }}&gt;&#13;&#10;        &lt;Text style={{ fontSize: 20, fontWeight: 'bold', color: '#6C6CF5' }}&gt;算得准&lt;/Text&gt;&#13;&#10;        &lt;Text style={{ fontSize: 15, color: '#F2F4FF', marginTop: 12, lineHeight: 1.75 }}&gt;指标唯一口径&lt;br /&gt;BOM 成本 · 三层分解预测&lt;/Text&gt;&#13;&#10;        &lt;Text style={{ fontSize: 13, color: '#8A90A6', marginTop: 16 }}&gt;回测误差 22%（含异常周）&lt;/Text&gt;&#13;&#10;      &lt;/Box&gt;&#13;&#10;      &lt;Box style={{ flex: 1, background: '#141826', border: '1px solid #242A3D', borderRadius: 14, padding: 24 }}&gt;&#13;&#10;        &lt;Text style={{ fontSize: 20, fontWeight: 'bold', color: '#6C6CF5' }}&gt;动得了&lt;/Text&gt;&#13;&#10;        &lt;Text style={{ fontSize: 15, color: '#F2F4FF', marginTop: 12, lineHeight: 1.75 }}&gt;生成采购单 · 按毛利调价&lt;br /&gt;滞销菜设为主推&lt;/Text&gt;&#13;&#10;        &lt;Text style={{ fontSize: 13, color: '#8A90A6', marginTop: 16 }}&gt;3 类动作 · 全部可撤销&lt;/Text&gt;&#13;&#10;      &lt;/Box&gt;&#13;&#10;      &lt;Box style={{ flex: 1, background: '#141826', border: '1px solid #242A3D', borderRadius: 14, padding: 24 }}&gt;&#13;&#10;        &lt;Text style={{ fontSize: 20, fontWeight: 'bold', color: '#6C6CF5' }}&gt;说得清&lt;/Text&gt;&#13;&#10;        &lt;Text style={{ fontSize: 15, color: '#F2F4FF', marginTop: 12, lineHeight: 1.75 }}&gt;每条结论附证据 SQL&lt;br /&gt;操作留痕 · 一键回滚&lt;/Text&gt;&#13;&#10;        &lt;Text style={{ fontSize: 13, color: '#8A90A6', marginTop: 16 }}&gt;8 条越界语句 100% 拦截&lt;/Text&gt;&#13;&#10;      &lt;/Box&gt;&#13;&#10;    &lt;/Box&gt;&#13;&#10;    &lt;Box style={{ marginTop: 28, background: '#12141F', border: '1px solid #242A3D', borderRadius: 12, padding: '20px 24px', flexDirection: 'row', alignItems: 'center', gap: 18 }}&gt;&#13;&#10;      &lt;Text style={{ fontSize: 15, color: '#8A90A6', width: 110 }}&gt;串联起来&lt;/Text&gt;&#13;&#10;      &lt;Text style={{ fontSize: 17, color: '#F2F4FF' }}&gt;看到异常 → 算清原因 → 直接处理 → 留下证据，四步在同一屏里完成。&lt;/Text&gt;&#13;&#10;    &lt;/Box&gt;&#13;&#10;  &lt;/Box&gt;&#13;&#10;  &lt;Box style={{ height: 36, flexDirection: 'row', justifyContent: 'space-between', alignItems: 'flex-end' }}&gt;&#13;&#10;    &lt;Text style={{ fontSize: 12, color: '#4A5064' }}&gt;2026 武汉 1024 · 产业应用赛道&lt;/Text&gt;&#13;&#10;    &lt;Text style={{ fontSize: 12, color: '#4A5064' }}&gt;04 / 12&lt;/Text&gt;&#13;&#10;  &lt;/Box&gt;&#13;&#10;&lt;/Slide&gt;"/>
+        <p:cNvPr id="130" name="" descr="&lt;Slide style={{ width: 1280, height: 720, background: '#0B0D14', padding: '56px 72px', flexDirection: 'column' }}&gt;&#13;&#10;  &lt;Box style={{ height: 96, flexDirection: 'row', justifyContent: 'space-between', alignItems: 'flex-start' }}&gt;&#13;&#10;    &lt;Box style={{ flexDirection: 'column', gap: 8 }}&gt;&#13;&#10;      &lt;Text style={{ fontSize: 34, fontWeight: 'bold', color: '#F2F4FF' }}&gt;四块能力，缺一块都落不了地&lt;/Text&gt;&#13;&#10;      &lt;Text style={{ fontSize: 15, color: '#8A90A6' }}&gt;看得懂、算得准、动得了、说得清&lt;/Text&gt;&#13;&#10;    &lt;/Box&gt;&#13;&#10;    &lt;Text style={{ fontSize: 13, color: '#4A5064', letterSpacing: 2 }}&gt;AI 掌柜&lt;/Text&gt;&#13;&#10;  &lt;/Box&gt;&#13;&#10;  &lt;Box style={{ flex: 1, paddingTop: 8 }}&gt;&#13;&#10;    &lt;Box style={{ flexDirection: 'row', gap: 18, height: 250 }}&gt;&#13;&#10;      &lt;Box style={{ flex: 1, background: '#141826', border: '1px solid #242A3D', borderRadius: 14, padding: 24 }}&gt;&#13;&#10;        &lt;Text style={{ fontSize: 20, fontWeight: 'bold', color: '#6C6CF5' }}&gt;看得懂&lt;/Text&gt;&#13;&#10;        &lt;Text style={{ fontSize: 15, color: '#F2F4FF', marginTop: 12, lineHeight: 1.75 }}&gt;营收 · 客流 · 毛利&lt;br /&gt;时段 · 翻台 · 会员结构&lt;/Text&gt;&#13;&#10;        &lt;Text style={{ fontSize: 13, color: '#8A90A6', marginTop: 16 }}&gt;180 天 / 6,803 单&lt;/Text&gt;&#13;&#10;      &lt;/Box&gt;&#13;&#10;      &lt;Box style={{ flex: 1, background: '#141826', border: '1px solid #242A3D', borderRadius: 14, padding: 24 }}&gt;&#13;&#10;        &lt;Text style={{ fontSize: 20, fontWeight: 'bold', color: '#6C6CF5' }}&gt;算得准&lt;/Text&gt;&#13;&#10;        &lt;Text style={{ fontSize: 15, color: '#F2F4FF', marginTop: 12, lineHeight: 1.75 }}&gt;指标唯一口径&lt;br /&gt;BOM 成本 · 三层分解预测&lt;/Text&gt;&#13;&#10;        &lt;Text style={{ fontSize: 13, color: '#8A90A6', marginTop: 16 }}&gt;回测误差 22%（含异常周）&lt;/Text&gt;&#13;&#10;      &lt;/Box&gt;&#13;&#10;      &lt;Box style={{ flex: 1, background: '#141826', border: '1px solid #242A3D', borderRadius: 14, padding: 24 }}&gt;&#13;&#10;        &lt;Text style={{ fontSize: 20, fontWeight: 'bold', color: '#6C6CF5' }}&gt;动得了&lt;/Text&gt;&#13;&#10;        &lt;Text style={{ fontSize: 15, color: '#F2F4FF', marginTop: 12, lineHeight: 1.75 }}&gt;生成采购单 · 按毛利调价&lt;br /&gt;滞销菜设为主推&lt;/Text&gt;&#13;&#10;        &lt;Text style={{ fontSize: 13, color: '#8A90A6', marginTop: 16 }}&gt;3 类动作 · 全部可撤销&lt;/Text&gt;&#13;&#10;      &lt;/Box&gt;&#13;&#10;      &lt;Box style={{ flex: 1, background: '#141826', border: '1px solid #242A3D', borderRadius: 14, padding: 24 }}&gt;&#13;&#10;        &lt;Text style={{ fontSize: 20, fontWeight: 'bold', color: '#6C6CF5' }}&gt;说得清&lt;/Text&gt;&#13;&#10;        &lt;Text style={{ fontSize: 15, color: '#F2F4FF', marginTop: 12, lineHeight: 1.75 }}&gt;每条结论附证据 SQL&lt;br /&gt;操作留痕 · 一键回滚&lt;/Text&gt;&#13;&#10;        &lt;Text style={{ fontSize: 13, color: '#8A90A6', marginTop: 16 }}&gt;8 条越界语句 100% 拦截&lt;/Text&gt;&#13;&#10;      &lt;/Box&gt;&#13;&#10;    &lt;/Box&gt;&#13;&#10;    &lt;Box style={{ marginTop: 28, background: '#12141F', border: '1px solid #242A3D', borderRadius: 12, padding: '20px 24px', flexDirection: 'row', alignItems: 'center', gap: 18 }}&gt;&#13;&#10;      &lt;Text style={{ fontSize: 15, color: '#8A90A6', width: 110 }}&gt;串联起来&lt;/Text&gt;&#13;&#10;      &lt;Text style={{ fontSize: 17, color: '#F2F4FF' }}&gt;看到异常 → 算清原因 → 直接处理 → 留下证据，四步在同一屏里完成。&lt;/Text&gt;&#13;&#10;    &lt;/Box&gt;&#13;&#10;  &lt;/Box&gt;&#13;&#10;  &lt;Box style={{ height: 36, flexDirection: 'row', justifyContent: 'space-between', alignItems: 'flex-end' }}&gt;&#13;&#10;    &lt;Text style={{ fontSize: 12, color: '#4A5064' }}&gt;2026 武汉 1024 · 产业应用赛道&lt;/Text&gt;&#13;&#10;    &lt;Text style={{ fontSize: 12, color: '#4A5064' }}&gt;04 / 12&lt;/Text&gt;&#13;&#10;  &lt;/Box&gt;&#13;&#10;&lt;/Slide&gt;"/>
         <p:cNvGrpSpPr/>
         <p:nvPr/>
       </p:nvGrpSpPr>
@@ -5549,7 +6336,7 @@
       </p:grpSpPr>
       <p:sp>
         <p:nvSpPr>
-          <p:cNvPr id="114" name=""/>
+          <p:cNvPr id="131" name=""/>
           <p:cNvSpPr/>
           <p:nvPr/>
         </p:nvSpPr>
@@ -5573,7 +6360,7 @@
       </p:sp>
       <p:sp>
         <p:nvSpPr>
-          <p:cNvPr id="115" name="" descr="{&quot;isTemplate&quot;:true,&quot;type&quot;:&quot;text&quot;}"/>
+          <p:cNvPr id="132" name="" descr="{&quot;isTemplate&quot;:true,&quot;type&quot;:&quot;text&quot;}"/>
           <p:cNvSpPr txBox="1"/>
           <p:nvPr/>
         </p:nvSpPr>
@@ -5608,7 +6395,7 @@
       </p:sp>
       <p:sp>
         <p:nvSpPr>
-          <p:cNvPr id="116" name="" descr="{&quot;isTemplate&quot;:true,&quot;type&quot;:&quot;text&quot;}"/>
+          <p:cNvPr id="133" name="" descr="{&quot;isTemplate&quot;:true,&quot;type&quot;:&quot;text&quot;}"/>
           <p:cNvSpPr txBox="1"/>
           <p:nvPr/>
         </p:nvSpPr>
@@ -5643,7 +6430,7 @@
       </p:sp>
       <p:sp>
         <p:nvSpPr>
-          <p:cNvPr id="117" name="" descr="{&quot;isTemplate&quot;:true,&quot;type&quot;:&quot;text&quot;}"/>
+          <p:cNvPr id="134" name="" descr="{&quot;isTemplate&quot;:true,&quot;type&quot;:&quot;text&quot;}"/>
           <p:cNvSpPr txBox="1"/>
           <p:nvPr/>
         </p:nvSpPr>
@@ -5688,7 +6475,7 @@
       </p:sp>
       <p:sp>
         <p:nvSpPr>
-          <p:cNvPr id="118" name=""/>
+          <p:cNvPr id="135" name=""/>
           <p:cNvSpPr/>
           <p:nvPr/>
         </p:nvSpPr>
@@ -5719,7 +6506,7 @@
       </p:sp>
       <p:sp>
         <p:nvSpPr>
-          <p:cNvPr id="119" name="" descr="{&quot;isTemplate&quot;:true,&quot;type&quot;:&quot;text&quot;}"/>
+          <p:cNvPr id="136" name="" descr="{&quot;isTemplate&quot;:true,&quot;type&quot;:&quot;text&quot;}"/>
           <p:cNvSpPr txBox="1"/>
           <p:nvPr/>
         </p:nvSpPr>
@@ -5754,7 +6541,7 @@
       </p:sp>
       <p:sp>
         <p:nvSpPr>
-          <p:cNvPr id="120" name="" descr="{&quot;isTemplate&quot;:true,&quot;type&quot;:&quot;text&quot;}"/>
+          <p:cNvPr id="137" name="" descr="{&quot;isTemplate&quot;:true,&quot;type&quot;:&quot;text&quot;}"/>
           <p:cNvSpPr txBox="1"/>
           <p:nvPr/>
         </p:nvSpPr>
@@ -5887,7 +6674,7 @@
       </p:sp>
       <p:sp>
         <p:nvSpPr>
-          <p:cNvPr id="121" name="" descr="{&quot;isTemplate&quot;:true,&quot;type&quot;:&quot;text&quot;}"/>
+          <p:cNvPr id="138" name="" descr="{&quot;isTemplate&quot;:true,&quot;type&quot;:&quot;text&quot;}"/>
           <p:cNvSpPr txBox="1"/>
           <p:nvPr/>
         </p:nvSpPr>
@@ -5952,7 +6739,7 @@
       </p:sp>
       <p:sp>
         <p:nvSpPr>
-          <p:cNvPr id="122" name=""/>
+          <p:cNvPr id="139" name=""/>
           <p:cNvSpPr/>
           <p:nvPr/>
         </p:nvSpPr>
@@ -5983,7 +6770,7 @@
       </p:sp>
       <p:sp>
         <p:nvSpPr>
-          <p:cNvPr id="123" name="" descr="{&quot;isTemplate&quot;:true,&quot;type&quot;:&quot;text&quot;}"/>
+          <p:cNvPr id="140" name="" descr="{&quot;isTemplate&quot;:true,&quot;type&quot;:&quot;text&quot;}"/>
           <p:cNvSpPr txBox="1"/>
           <p:nvPr/>
         </p:nvSpPr>
@@ -6018,7 +6805,7 @@
       </p:sp>
       <p:sp>
         <p:nvSpPr>
-          <p:cNvPr id="124" name="" descr="{&quot;isTemplate&quot;:true,&quot;type&quot;:&quot;text&quot;}"/>
+          <p:cNvPr id="141" name="" descr="{&quot;isTemplate&quot;:true,&quot;type&quot;:&quot;text&quot;}"/>
           <p:cNvSpPr txBox="1"/>
           <p:nvPr/>
         </p:nvSpPr>
@@ -6101,7 +6888,7 @@
       </p:sp>
       <p:sp>
         <p:nvSpPr>
-          <p:cNvPr id="125" name="" descr="{&quot;isTemplate&quot;:true,&quot;type&quot;:&quot;text&quot;}"/>
+          <p:cNvPr id="142" name="" descr="{&quot;isTemplate&quot;:true,&quot;type&quot;:&quot;text&quot;}"/>
           <p:cNvSpPr txBox="1"/>
           <p:nvPr/>
         </p:nvSpPr>
@@ -6156,7 +6943,7 @@
       </p:sp>
       <p:sp>
         <p:nvSpPr>
-          <p:cNvPr id="126" name=""/>
+          <p:cNvPr id="143" name=""/>
           <p:cNvSpPr/>
           <p:nvPr/>
         </p:nvSpPr>
@@ -6187,7 +6974,7 @@
       </p:sp>
       <p:sp>
         <p:nvSpPr>
-          <p:cNvPr id="127" name="" descr="{&quot;isTemplate&quot;:true,&quot;type&quot;:&quot;text&quot;}"/>
+          <p:cNvPr id="144" name="" descr="{&quot;isTemplate&quot;:true,&quot;type&quot;:&quot;text&quot;}"/>
           <p:cNvSpPr txBox="1"/>
           <p:nvPr/>
         </p:nvSpPr>
@@ -6222,7 +7009,7 @@
       </p:sp>
       <p:sp>
         <p:nvSpPr>
-          <p:cNvPr id="128" name="" descr="{&quot;isTemplate&quot;:true,&quot;type&quot;:&quot;text&quot;}"/>
+          <p:cNvPr id="145" name="" descr="{&quot;isTemplate&quot;:true,&quot;type&quot;:&quot;text&quot;}"/>
           <p:cNvSpPr txBox="1"/>
           <p:nvPr/>
         </p:nvSpPr>
@@ -6295,7 +7082,7 @@
       </p:sp>
       <p:sp>
         <p:nvSpPr>
-          <p:cNvPr id="129" name="" descr="{&quot;isTemplate&quot;:true,&quot;type&quot;:&quot;text&quot;}"/>
+          <p:cNvPr id="146" name="" descr="{&quot;isTemplate&quot;:true,&quot;type&quot;:&quot;text&quot;}"/>
           <p:cNvSpPr txBox="1"/>
           <p:nvPr/>
         </p:nvSpPr>
@@ -6360,7 +7147,7 @@
       </p:sp>
       <p:sp>
         <p:nvSpPr>
-          <p:cNvPr id="130" name=""/>
+          <p:cNvPr id="147" name=""/>
           <p:cNvSpPr/>
           <p:nvPr/>
         </p:nvSpPr>
@@ -6391,7 +7178,7 @@
       </p:sp>
       <p:sp>
         <p:nvSpPr>
-          <p:cNvPr id="131" name="" descr="{&quot;isTemplate&quot;:true,&quot;type&quot;:&quot;text&quot;}"/>
+          <p:cNvPr id="148" name="" descr="{&quot;isTemplate&quot;:true,&quot;type&quot;:&quot;text&quot;}"/>
           <p:cNvSpPr txBox="1"/>
           <p:nvPr/>
         </p:nvSpPr>
@@ -6426,7 +7213,7 @@
       </p:sp>
       <p:sp>
         <p:nvSpPr>
-          <p:cNvPr id="132" name="" descr="{&quot;isTemplate&quot;:true,&quot;type&quot;:&quot;text&quot;}"/>
+          <p:cNvPr id="149" name="" descr="{&quot;isTemplate&quot;:true,&quot;type&quot;:&quot;text&quot;}"/>
           <p:cNvSpPr txBox="1"/>
           <p:nvPr/>
         </p:nvSpPr>
@@ -6509,7 +7296,7 @@
       </p:sp>
       <p:sp>
         <p:nvSpPr>
-          <p:cNvPr id="133" name="" descr="{&quot;isTemplate&quot;:true,&quot;type&quot;:&quot;text&quot;}"/>
+          <p:cNvPr id="150" name="" descr="{&quot;isTemplate&quot;:true,&quot;type&quot;:&quot;text&quot;}"/>
           <p:cNvSpPr txBox="1"/>
           <p:nvPr/>
         </p:nvSpPr>
@@ -6574,7 +7361,7 @@
       </p:sp>
       <p:sp>
         <p:nvSpPr>
-          <p:cNvPr id="134" name=""/>
+          <p:cNvPr id="151" name=""/>
           <p:cNvSpPr/>
           <p:nvPr/>
         </p:nvSpPr>
@@ -6605,7 +7392,7 @@
       </p:sp>
       <p:sp>
         <p:nvSpPr>
-          <p:cNvPr id="135" name="" descr="{&quot;isTemplate&quot;:true,&quot;type&quot;:&quot;text&quot;}"/>
+          <p:cNvPr id="152" name="" descr="{&quot;isTemplate&quot;:true,&quot;type&quot;:&quot;text&quot;}"/>
           <p:cNvSpPr txBox="1"/>
           <p:nvPr/>
         </p:nvSpPr>
@@ -6640,7 +7427,7 @@
       </p:sp>
       <p:sp>
         <p:nvSpPr>
-          <p:cNvPr id="136" name="" descr="{&quot;isTemplate&quot;:true,&quot;type&quot;:&quot;text&quot;}"/>
+          <p:cNvPr id="153" name="" descr="{&quot;isTemplate&quot;:true,&quot;type&quot;:&quot;text&quot;}"/>
           <p:cNvSpPr txBox="1"/>
           <p:nvPr/>
         </p:nvSpPr>
@@ -6735,7 +7522,7 @@
       </p:sp>
       <p:sp>
         <p:nvSpPr>
-          <p:cNvPr id="137" name="" descr="{&quot;isTemplate&quot;:true,&quot;type&quot;:&quot;text&quot;}"/>
+          <p:cNvPr id="154" name="" descr="{&quot;isTemplate&quot;:true,&quot;type&quot;:&quot;text&quot;}"/>
           <p:cNvSpPr txBox="1"/>
           <p:nvPr/>
         </p:nvSpPr>
@@ -6800,7 +7587,7 @@
       </p:sp>
       <p:sp>
         <p:nvSpPr>
-          <p:cNvPr id="138" name="" descr="{&quot;isTemplate&quot;:true,&quot;type&quot;:&quot;text&quot;}"/>
+          <p:cNvPr id="155" name="" descr="{&quot;isTemplate&quot;:true,&quot;type&quot;:&quot;text&quot;}"/>
           <p:cNvSpPr txBox="1"/>
           <p:nvPr/>
         </p:nvSpPr>
@@ -6843,7 +7630,7 @@
   <p:cSld>
     <p:spTree>
       <p:nvGrpSpPr>
-        <p:cNvPr id="139" name="" descr="&lt;Slide style={{ width: 1280, height: 720, background: '#0B0D14', padding: '56px 72px', flexDirection: 'column' }}&gt;&#13;&#10;  &lt;Box style={{ height: 96, flexDirection: 'row', justifyContent: 'space-between', alignItems: 'flex-start' }}&gt;&#13;&#10;    &lt;Box style={{ flexDirection: 'column', gap: 8 }}&gt;&#13;&#10;      &lt;Text style={{ fontSize: 34, fontWeight: 'bold', color: '#F2F4FF' }}&gt;现场三分钟，只走一条路径&lt;/Text&gt;&#13;&#10;      &lt;Text style={{ fontSize: 15, color: '#8A90A6' }}&gt;上午 09:00，老板打开电脑后的真实操作顺序&lt;/Text&gt;&#13;&#10;    &lt;/Box&gt;&#13;&#10;    &lt;Text style={{ fontSize: 13, color: '#4A5064', letterSpacing: 2 }}&gt;AI 掌柜&lt;/Text&gt;&#13;&#10;  &lt;/Box&gt;&#13;&#10;  &lt;Box style={{ flex: 1, paddingTop: 8 }}&gt;&#13;&#10;    &lt;Box style={{ flexDirection: 'row', gap: 16, height: 205 }}&gt;&#13;&#10;      &lt;Box style={{ flex: 1, background: '#141826', border: '1px solid #242A3D', borderRadius: 14, padding: 24, flexDirection: 'column', justifyContent: 'space-between' }}&gt;&#13;&#10;        &lt;Text style={{ fontSize: 12, color: '#6C6CF5', letterSpacing: 2 }}&gt;第 1 步 · 30 秒&lt;/Text&gt;&#13;&#10;        &lt;Text style={{ fontSize: 21, fontWeight: 'bold', color: '#F2F4FF', marginTop: 6 }}&gt;打开驾驶舱&lt;/Text&gt;&#13;&#10;        &lt;Text style={{ fontSize: 14, color: '#8A90A6', lineHeight: 1.8 }}&gt;只有 3 件事：&lt;br /&gt;营收跌 20%、3 道菜滞销、&lt;br /&gt;牛腩只够 1.5 天。&lt;/Text&gt;&#13;&#10;      &lt;/Box&gt;&#13;&#10;      &lt;Box style={{ flex: 1, background: '#141826', border: '1px solid #242A3D', borderRadius: 14, padding: 24, flexDirection: 'column', justifyContent: 'space-between' }}&gt;&#13;&#10;        &lt;Text style={{ fontSize: 12, color: '#6C6CF5', letterSpacing: 2 }}&gt;第 2 步 · 60 秒&lt;/Text&gt;&#13;&#10;        &lt;Text style={{ fontSize: 21, fontWeight: 'bold', color: '#F2F4FF', marginTop: 6 }}&gt;点「营收下滑」&lt;/Text&gt;&#13;&#10;        &lt;Text style={{ fontSize: 14, color: '#8A90A6', lineHeight: 1.8 }}&gt;拆成客流 −18%、客单价 −3%，&lt;br /&gt;结论：人少了，&lt;br /&gt;不是点便宜了。&lt;/Text&gt;&#13;&#10;      &lt;/Box&gt;&#13;&#10;      &lt;Box style={{ flex: 1, background: '#141826', border: '1px solid #242A3D', borderRadius: 14, padding: 24, flexDirection: 'column', justifyContent: 'space-between' }}&gt;&#13;&#10;        &lt;Text style={{ fontSize: 12, color: '#6C6CF5', letterSpacing: 2 }}&gt;第 3 步 · 60 秒&lt;/Text&gt;&#13;&#10;        &lt;Text style={{ fontSize: 21, fontWeight: 'bold', color: '#F2F4FF', marginTop: 6 }}&gt;点「缺货」&lt;/Text&gt;&#13;&#10;        &lt;Text style={{ fontSize: 14, color: '#8A90A6', lineHeight: 1.8 }}&gt;按 7 天用量生成采购单&lt;br /&gt;→ 确认入库&lt;br /&gt;→ 库存与流水同步。&lt;/Text&gt;&#13;&#10;      &lt;/Box&gt;&#13;&#10;    &lt;/Box&gt;&#13;&#10;    &lt;Box style={{ marginTop: 20, background: '#171A2E', border: '1px solid #6C6CF5', borderRadius: 14, padding: '20px 24px', flexDirection: 'row', alignItems: 'center', gap: 24 }}&gt;&#13;&#10;      &lt;Text style={{ fontSize: 13, color: '#6C6CF5', letterSpacing: 2, width: 132 }}&gt;加演 · 一句话&lt;/Text&gt;&#13;&#10;      &lt;Box style={{ flexDirection: 'column', gap: 6 }}&gt;&#13;&#10;        &lt;Text style={{ fontSize: 19, fontWeight: 'bold', color: '#F2F4FF' }}&gt;「明天 8 人宴席，人均 150」&lt;/Text&gt;&#13;&#10;        &lt;Text style={{ fontSize: 13, color: '#8A90A6' }}&gt;按中餐宴席结构排 10 道菜 → 一键成单 → 后厨立刻看到，可人工增减。&lt;/Text&gt;&#13;&#10;      &lt;/Box&gt;&#13;&#10;    &lt;/Box&gt;&#13;&#10;    &lt;Box style={{ marginTop: 20, paddingTop: 16, borderTop: '1px solid #242A3D', flexDirection: 'row', gap: 0 }}&gt;&#13;&#10;      &lt;Box style={{ flex: 1, flexDirection: 'column', gap: 3 }}&gt;&#13;&#10;        &lt;Text style={{ fontSize: 24, fontWeight: 'bold', color: '#F2F4FF' }}&gt;1 张&lt;/Text&gt;&#13;&#10;        &lt;Text style={{ fontSize: 12, color: '#8A90A6' }}&gt;采购单（7 项 / 2,757 元）&lt;/Text&gt;&#13;&#10;      &lt;/Box&gt;&#13;&#10;      &lt;Box style={{ flex: 1, flexDirection: 'column', gap: 3 }}&gt;&#13;&#10;        &lt;Text style={{ fontSize: 24, fontWeight: 'bold', color: '#F2F4FF' }}&gt;7 种&lt;/Text&gt;&#13;&#10;        &lt;Text style={{ fontSize: 12, color: '#8A90A6' }}&gt;食材库存与流水同步更新&lt;/Text&gt;&#13;&#10;      &lt;/Box&gt;&#13;&#10;      &lt;Box style={{ flex: 1, flexDirection: 'column', gap: 3 }}&gt;&#13;&#10;        &lt;Text style={{ fontSize: 24, fontWeight: 'bold', color: '#F2F4FF' }}&gt;3 条&lt;/Text&gt;&#13;&#10;        &lt;Text style={{ fontSize: 12, color: '#8A90A6' }}&gt;操作留痕，任何一条可回滚&lt;/Text&gt;&#13;&#10;      &lt;/Box&gt;&#13;&#10;      &lt;Box style={{ flex: 1.2, flexDirection: 'column', gap: 3 }}&gt;&#13;&#10;        &lt;Text style={{ fontSize: 24, fontWeight: 'bold', color: '#6C6CF5' }}&gt;0 次&lt;/Text&gt;&#13;&#10;        &lt;Text style={{ fontSize: 12, color: '#8A90A6' }}&gt;页面跳转 —— 决策与执行同屏&lt;/Text&gt;&#13;&#10;      &lt;/Box&gt;&#13;&#10;    &lt;/Box&gt;&#13;&#10;  &lt;/Box&gt;&#13;&#10;  &lt;Box style={{ height: 36, flexDirection: 'row', justifyContent: 'space-between', alignItems: 'flex-end' }}&gt;&#13;&#10;    &lt;Text style={{ fontSize: 12, color: '#4A5064' }}&gt;2026 武汉 1024 · 产业应用赛道&lt;/Text&gt;&#13;&#10;    &lt;Text style={{ fontSize: 12, color: '#4A5064' }}&gt;05 / 12&lt;/Text&gt;&#13;&#10;  &lt;/Box&gt;&#13;&#10;&lt;/Slide&gt;"/>
+        <p:cNvPr id="156" name="" descr="&lt;Slide style={{ width: 1280, height: 720, background: '#0B0D14', padding: '56px 72px', flexDirection: 'column' }}&gt;&#13;&#10;  &lt;Box style={{ height: 96, flexDirection: 'row', justifyContent: 'space-between', alignItems: 'flex-start' }}&gt;&#13;&#10;    &lt;Box style={{ flexDirection: 'column', gap: 8 }}&gt;&#13;&#10;      &lt;Text style={{ fontSize: 34, fontWeight: 'bold', color: '#F2F4FF' }}&gt;现场三分钟，只走一条路径&lt;/Text&gt;&#13;&#10;      &lt;Text style={{ fontSize: 15, color: '#8A90A6' }}&gt;上午 09:00，老板打开电脑后的真实操作顺序&lt;/Text&gt;&#13;&#10;    &lt;/Box&gt;&#13;&#10;    &lt;Text style={{ fontSize: 13, color: '#4A5064', letterSpacing: 2 }}&gt;AI 掌柜&lt;/Text&gt;&#13;&#10;  &lt;/Box&gt;&#13;&#10;  &lt;Box style={{ flex: 1, paddingTop: 8 }}&gt;&#13;&#10;    &lt;Box style={{ flexDirection: 'row', gap: 16, height: 205 }}&gt;&#13;&#10;      &lt;Box style={{ flex: 1, background: '#141826', border: '1px solid #242A3D', borderRadius: 14, padding: 24, flexDirection: 'column', justifyContent: 'space-between' }}&gt;&#13;&#10;        &lt;Text style={{ fontSize: 12, color: '#6C6CF5', letterSpacing: 2 }}&gt;第 1 步 · 30 秒&lt;/Text&gt;&#13;&#10;        &lt;Text style={{ fontSize: 21, fontWeight: 'bold', color: '#F2F4FF', marginTop: 6 }}&gt;打开驾驶舱&lt;/Text&gt;&#13;&#10;        &lt;Text style={{ fontSize: 14, color: '#8A90A6', lineHeight: 1.8 }}&gt;只有 3 件事：&lt;br /&gt;营收跌 20%、3 道菜滞销、&lt;br /&gt;牛腩只够 1.5 天。&lt;/Text&gt;&#13;&#10;      &lt;/Box&gt;&#13;&#10;      &lt;Box style={{ flex: 1, background: '#141826', border: '1px solid #242A3D', borderRadius: 14, padding: 24, flexDirection: 'column', justifyContent: 'space-between' }}&gt;&#13;&#10;        &lt;Text style={{ fontSize: 12, color: '#6C6CF5', letterSpacing: 2 }}&gt;第 2 步 · 60 秒&lt;/Text&gt;&#13;&#10;        &lt;Text style={{ fontSize: 21, fontWeight: 'bold', color: '#F2F4FF', marginTop: 6 }}&gt;点「营收下滑」&lt;/Text&gt;&#13;&#10;        &lt;Text style={{ fontSize: 14, color: '#8A90A6', lineHeight: 1.8 }}&gt;拆成客流 −18%、客单价 −3%，&lt;br /&gt;结论：人少了，&lt;br /&gt;不是点便宜了。&lt;/Text&gt;&#13;&#10;      &lt;/Box&gt;&#13;&#10;      &lt;Box style={{ flex: 1, background: '#141826', border: '1px solid #242A3D', borderRadius: 14, padding: 24, flexDirection: 'column', justifyContent: 'space-between' }}&gt;&#13;&#10;        &lt;Text style={{ fontSize: 12, color: '#6C6CF5', letterSpacing: 2 }}&gt;第 3 步 · 60 秒&lt;/Text&gt;&#13;&#10;        &lt;Text style={{ fontSize: 21, fontWeight: 'bold', color: '#F2F4FF', marginTop: 6 }}&gt;点「缺货」&lt;/Text&gt;&#13;&#10;        &lt;Text style={{ fontSize: 14, color: '#8A90A6', lineHeight: 1.8 }}&gt;按 7 天用量生成采购单&lt;br /&gt;→ 确认入库&lt;br /&gt;→ 库存与流水同步。&lt;/Text&gt;&#13;&#10;      &lt;/Box&gt;&#13;&#10;    &lt;/Box&gt;&#13;&#10;    &lt;Box style={{ marginTop: 20, background: '#171A2E', border: '1px solid #6C6CF5', borderRadius: 14, padding: '20px 24px', flexDirection: 'row', alignItems: 'center', gap: 24 }}&gt;&#13;&#10;      &lt;Text style={{ fontSize: 13, color: '#6C6CF5', letterSpacing: 2, width: 132 }}&gt;加演 · 一句话&lt;/Text&gt;&#13;&#10;      &lt;Box style={{ flexDirection: 'column', gap: 6 }}&gt;&#13;&#10;        &lt;Text style={{ fontSize: 19, fontWeight: 'bold', color: '#F2F4FF' }}&gt;「明天 8 人宴席，人均 150」&lt;/Text&gt;&#13;&#10;        &lt;Text style={{ fontSize: 13, color: '#8A90A6' }}&gt;按中餐宴席结构排 10 道菜 → 一键成单 → 后厨立刻看到，可人工增减。&lt;/Text&gt;&#13;&#10;      &lt;/Box&gt;&#13;&#10;    &lt;/Box&gt;&#13;&#10;    &lt;Box style={{ marginTop: 20, paddingTop: 16, borderTop: '1px solid #242A3D', flexDirection: 'row', gap: 0 }}&gt;&#13;&#10;      &lt;Box style={{ flex: 1, flexDirection: 'column', gap: 3 }}&gt;&#13;&#10;        &lt;Text style={{ fontSize: 24, fontWeight: 'bold', color: '#F2F4FF' }}&gt;1 张&lt;/Text&gt;&#13;&#10;        &lt;Text style={{ fontSize: 12, color: '#8A90A6' }}&gt;采购单（7 项 / 2,757 元）&lt;/Text&gt;&#13;&#10;      &lt;/Box&gt;&#13;&#10;      &lt;Box style={{ flex: 1, flexDirection: 'column', gap: 3 }}&gt;&#13;&#10;        &lt;Text style={{ fontSize: 24, fontWeight: 'bold', color: '#F2F4FF' }}&gt;7 种&lt;/Text&gt;&#13;&#10;        &lt;Text style={{ fontSize: 12, color: '#8A90A6' }}&gt;食材库存与流水同步更新&lt;/Text&gt;&#13;&#10;      &lt;/Box&gt;&#13;&#10;      &lt;Box style={{ flex: 1, flexDirection: 'column', gap: 3 }}&gt;&#13;&#10;        &lt;Text style={{ fontSize: 24, fontWeight: 'bold', color: '#F2F4FF' }}&gt;3 条&lt;/Text&gt;&#13;&#10;        &lt;Text style={{ fontSize: 12, color: '#8A90A6' }}&gt;操作留痕，任何一条可回滚&lt;/Text&gt;&#13;&#10;      &lt;/Box&gt;&#13;&#10;      &lt;Box style={{ flex: 1.2, flexDirection: 'column', gap: 3 }}&gt;&#13;&#10;        &lt;Text style={{ fontSize: 24, fontWeight: 'bold', color: '#6C6CF5' }}&gt;0 次&lt;/Text&gt;&#13;&#10;        &lt;Text style={{ fontSize: 12, color: '#8A90A6' }}&gt;页面跳转 —— 决策与执行同屏&lt;/Text&gt;&#13;&#10;      &lt;/Box&gt;&#13;&#10;    &lt;/Box&gt;&#13;&#10;  &lt;/Box&gt;&#13;&#10;  &lt;Box style={{ height: 36, flexDirection: 'row', justifyContent: 'space-between', alignItems: 'flex-end' }}&gt;&#13;&#10;    &lt;Text style={{ fontSize: 12, color: '#4A5064' }}&gt;2026 武汉 1024 · 产业应用赛道&lt;/Text&gt;&#13;&#10;    &lt;Text style={{ fontSize: 12, color: '#4A5064' }}&gt;05 / 12&lt;/Text&gt;&#13;&#10;  &lt;/Box&gt;&#13;&#10;&lt;/Slide&gt;"/>
         <p:cNvGrpSpPr/>
         <p:nvPr/>
       </p:nvGrpSpPr>
@@ -6857,7 +7644,7 @@
       </p:grpSpPr>
       <p:sp>
         <p:nvSpPr>
-          <p:cNvPr id="140" name=""/>
+          <p:cNvPr id="157" name=""/>
           <p:cNvSpPr/>
           <p:nvPr/>
         </p:nvSpPr>
@@ -6881,7 +7668,7 @@
       </p:sp>
       <p:sp>
         <p:nvSpPr>
-          <p:cNvPr id="141" name="" descr="{&quot;isTemplate&quot;:true,&quot;type&quot;:&quot;text&quot;}"/>
+          <p:cNvPr id="158" name="" descr="{&quot;isTemplate&quot;:true,&quot;type&quot;:&quot;text&quot;}"/>
           <p:cNvSpPr txBox="1"/>
           <p:nvPr/>
         </p:nvSpPr>
@@ -6916,7 +7703,7 @@
       </p:sp>
       <p:sp>
         <p:nvSpPr>
-          <p:cNvPr id="142" name="" descr="{&quot;isTemplate&quot;:true,&quot;type&quot;:&quot;text&quot;}"/>
+          <p:cNvPr id="159" name="" descr="{&quot;isTemplate&quot;:true,&quot;type&quot;:&quot;text&quot;}"/>
           <p:cNvSpPr txBox="1"/>
           <p:nvPr/>
         </p:nvSpPr>
@@ -6971,7 +7758,7 @@
       </p:sp>
       <p:sp>
         <p:nvSpPr>
-          <p:cNvPr id="143" name="" descr="{&quot;isTemplate&quot;:true,&quot;type&quot;:&quot;text&quot;}"/>
+          <p:cNvPr id="160" name="" descr="{&quot;isTemplate&quot;:true,&quot;type&quot;:&quot;text&quot;}"/>
           <p:cNvSpPr txBox="1"/>
           <p:nvPr/>
         </p:nvSpPr>
@@ -7016,7 +7803,7 @@
       </p:sp>
       <p:sp>
         <p:nvSpPr>
-          <p:cNvPr id="144" name=""/>
+          <p:cNvPr id="161" name=""/>
           <p:cNvSpPr/>
           <p:nvPr/>
         </p:nvSpPr>
@@ -7047,7 +7834,7 @@
       </p:sp>
       <p:sp>
         <p:nvSpPr>
-          <p:cNvPr id="145" name="" descr="{&quot;isTemplate&quot;:true,&quot;type&quot;:&quot;text&quot;}"/>
+          <p:cNvPr id="162" name="" descr="{&quot;isTemplate&quot;:true,&quot;type&quot;:&quot;text&quot;}"/>
           <p:cNvSpPr txBox="1"/>
           <p:nvPr/>
         </p:nvSpPr>
@@ -7122,7 +7909,7 @@
       </p:sp>
       <p:sp>
         <p:nvSpPr>
-          <p:cNvPr id="146" name="" descr="{&quot;isTemplate&quot;:true,&quot;type&quot;:&quot;text&quot;}"/>
+          <p:cNvPr id="163" name="" descr="{&quot;isTemplate&quot;:true,&quot;type&quot;:&quot;text&quot;}"/>
           <p:cNvSpPr txBox="1"/>
           <p:nvPr/>
         </p:nvSpPr>
@@ -7157,7 +7944,7 @@
       </p:sp>
       <p:sp>
         <p:nvSpPr>
-          <p:cNvPr id="147" name="" descr="{&quot;isTemplate&quot;:true,&quot;type&quot;:&quot;text&quot;}"/>
+          <p:cNvPr id="164" name="" descr="{&quot;isTemplate&quot;:true,&quot;type&quot;:&quot;text&quot;}"/>
           <p:cNvSpPr txBox="1"/>
           <p:nvPr/>
         </p:nvSpPr>
@@ -7308,7 +8095,7 @@
       </p:sp>
       <p:sp>
         <p:nvSpPr>
-          <p:cNvPr id="148" name=""/>
+          <p:cNvPr id="165" name=""/>
           <p:cNvSpPr/>
           <p:nvPr/>
         </p:nvSpPr>
@@ -7339,7 +8126,7 @@
       </p:sp>
       <p:sp>
         <p:nvSpPr>
-          <p:cNvPr id="149" name="" descr="{&quot;isTemplate&quot;:true,&quot;type&quot;:&quot;text&quot;}"/>
+          <p:cNvPr id="166" name="" descr="{&quot;isTemplate&quot;:true,&quot;type&quot;:&quot;text&quot;}"/>
           <p:cNvSpPr txBox="1"/>
           <p:nvPr/>
         </p:nvSpPr>
@@ -7414,7 +8201,7 @@
       </p:sp>
       <p:sp>
         <p:nvSpPr>
-          <p:cNvPr id="150" name="" descr="{&quot;isTemplate&quot;:true,&quot;type&quot;:&quot;text&quot;}"/>
+          <p:cNvPr id="167" name="" descr="{&quot;isTemplate&quot;:true,&quot;type&quot;:&quot;text&quot;}"/>
           <p:cNvSpPr txBox="1"/>
           <p:nvPr/>
         </p:nvSpPr>
@@ -7449,7 +8236,7 @@
       </p:sp>
       <p:sp>
         <p:nvSpPr>
-          <p:cNvPr id="151" name="" descr="{&quot;isTemplate&quot;:true,&quot;type&quot;:&quot;text&quot;}"/>
+          <p:cNvPr id="168" name="" descr="{&quot;isTemplate&quot;:true,&quot;type&quot;:&quot;text&quot;}"/>
           <p:cNvSpPr txBox="1"/>
           <p:nvPr/>
         </p:nvSpPr>
@@ -7560,7 +8347,7 @@
       </p:sp>
       <p:sp>
         <p:nvSpPr>
-          <p:cNvPr id="152" name=""/>
+          <p:cNvPr id="169" name=""/>
           <p:cNvSpPr/>
           <p:nvPr/>
         </p:nvSpPr>
@@ -7591,7 +8378,7 @@
       </p:sp>
       <p:sp>
         <p:nvSpPr>
-          <p:cNvPr id="153" name="" descr="{&quot;isTemplate&quot;:true,&quot;type&quot;:&quot;text&quot;}"/>
+          <p:cNvPr id="170" name="" descr="{&quot;isTemplate&quot;:true,&quot;type&quot;:&quot;text&quot;}"/>
           <p:cNvSpPr txBox="1"/>
           <p:nvPr/>
         </p:nvSpPr>
@@ -7666,7 +8453,7 @@
       </p:sp>
       <p:sp>
         <p:nvSpPr>
-          <p:cNvPr id="154" name="" descr="{&quot;isTemplate&quot;:true,&quot;type&quot;:&quot;text&quot;}"/>
+          <p:cNvPr id="171" name="" descr="{&quot;isTemplate&quot;:true,&quot;type&quot;:&quot;text&quot;}"/>
           <p:cNvSpPr txBox="1"/>
           <p:nvPr/>
         </p:nvSpPr>
@@ -7701,7 +8488,7 @@
       </p:sp>
       <p:sp>
         <p:nvSpPr>
-          <p:cNvPr id="155" name="" descr="{&quot;isTemplate&quot;:true,&quot;type&quot;:&quot;text&quot;}"/>
+          <p:cNvPr id="172" name="" descr="{&quot;isTemplate&quot;:true,&quot;type&quot;:&quot;text&quot;}"/>
           <p:cNvSpPr txBox="1"/>
           <p:nvPr/>
         </p:nvSpPr>
@@ -7812,7 +8599,7 @@
       </p:sp>
       <p:sp>
         <p:nvSpPr>
-          <p:cNvPr id="156" name=""/>
+          <p:cNvPr id="173" name=""/>
           <p:cNvSpPr/>
           <p:nvPr/>
         </p:nvSpPr>
@@ -7843,7 +8630,7 @@
       </p:sp>
       <p:sp>
         <p:nvSpPr>
-          <p:cNvPr id="157" name="" descr="{&quot;isTemplate&quot;:true,&quot;type&quot;:&quot;text&quot;}"/>
+          <p:cNvPr id="174" name="" descr="{&quot;isTemplate&quot;:true,&quot;type&quot;:&quot;text&quot;}"/>
           <p:cNvSpPr txBox="1"/>
           <p:nvPr/>
         </p:nvSpPr>
@@ -7898,7 +8685,7 @@
       </p:sp>
       <p:sp>
         <p:nvSpPr>
-          <p:cNvPr id="158" name="" descr="{&quot;isTemplate&quot;:true,&quot;type&quot;:&quot;text&quot;}"/>
+          <p:cNvPr id="175" name="" descr="{&quot;isTemplate&quot;:true,&quot;type&quot;:&quot;text&quot;}"/>
           <p:cNvSpPr txBox="1"/>
           <p:nvPr/>
         </p:nvSpPr>
@@ -7973,7 +8760,7 @@
       </p:sp>
       <p:sp>
         <p:nvSpPr>
-          <p:cNvPr id="159" name="" descr="{&quot;isTemplate&quot;:true,&quot;type&quot;:&quot;text&quot;}"/>
+          <p:cNvPr id="176" name="" descr="{&quot;isTemplate&quot;:true,&quot;type&quot;:&quot;text&quot;}"/>
           <p:cNvSpPr txBox="1"/>
           <p:nvPr/>
         </p:nvSpPr>
@@ -8068,7 +8855,7 @@
       </p:sp>
       <p:sp>
         <p:nvSpPr>
-          <p:cNvPr id="160" name=""/>
+          <p:cNvPr id="177" name=""/>
           <p:cNvSpPr/>
           <p:nvPr/>
         </p:nvSpPr>
@@ -8108,7 +8895,7 @@
       </p:sp>
       <p:sp>
         <p:nvSpPr>
-          <p:cNvPr id="161" name="" descr="{&quot;isTemplate&quot;:true,&quot;type&quot;:&quot;text&quot;}"/>
+          <p:cNvPr id="178" name="" descr="{&quot;isTemplate&quot;:true,&quot;type&quot;:&quot;text&quot;}"/>
           <p:cNvSpPr txBox="1"/>
           <p:nvPr/>
         </p:nvSpPr>
@@ -8153,7 +8940,7 @@
       </p:sp>
       <p:sp>
         <p:nvSpPr>
-          <p:cNvPr id="162" name="" descr="{&quot;isTemplate&quot;:true,&quot;type&quot;:&quot;text&quot;}"/>
+          <p:cNvPr id="179" name="" descr="{&quot;isTemplate&quot;:true,&quot;type&quot;:&quot;text&quot;}"/>
           <p:cNvSpPr txBox="1"/>
           <p:nvPr/>
         </p:nvSpPr>
@@ -8228,7 +9015,7 @@
       </p:sp>
       <p:sp>
         <p:nvSpPr>
-          <p:cNvPr id="163" name="" descr="{&quot;isTemplate&quot;:true,&quot;type&quot;:&quot;text&quot;}"/>
+          <p:cNvPr id="180" name="" descr="{&quot;isTemplate&quot;:true,&quot;type&quot;:&quot;text&quot;}"/>
           <p:cNvSpPr txBox="1"/>
           <p:nvPr/>
         </p:nvSpPr>
@@ -8273,7 +9060,7 @@
       </p:sp>
       <p:sp>
         <p:nvSpPr>
-          <p:cNvPr id="164" name="" descr="{&quot;isTemplate&quot;:true,&quot;type&quot;:&quot;text&quot;}"/>
+          <p:cNvPr id="181" name="" descr="{&quot;isTemplate&quot;:true,&quot;type&quot;:&quot;text&quot;}"/>
           <p:cNvSpPr txBox="1"/>
           <p:nvPr/>
         </p:nvSpPr>
@@ -8308,7 +9095,7 @@
       </p:sp>
       <p:sp>
         <p:nvSpPr>
-          <p:cNvPr id="165" name="" descr="{&quot;isTemplate&quot;:true,&quot;type&quot;:&quot;text&quot;}"/>
+          <p:cNvPr id="182" name="" descr="{&quot;isTemplate&quot;:true,&quot;type&quot;:&quot;text&quot;}"/>
           <p:cNvSpPr txBox="1"/>
           <p:nvPr/>
         </p:nvSpPr>
@@ -8353,7 +9140,7 @@
       </p:sp>
       <p:sp>
         <p:nvSpPr>
-          <p:cNvPr id="166" name="" descr="{&quot;isTemplate&quot;:true,&quot;type&quot;:&quot;text&quot;}"/>
+          <p:cNvPr id="183" name="" descr="{&quot;isTemplate&quot;:true,&quot;type&quot;:&quot;text&quot;}"/>
           <p:cNvSpPr txBox="1"/>
           <p:nvPr/>
         </p:nvSpPr>
@@ -8388,7 +9175,7 @@
       </p:sp>
       <p:sp>
         <p:nvSpPr>
-          <p:cNvPr id="167" name="" descr="{&quot;isTemplate&quot;:true,&quot;type&quot;:&quot;text&quot;}"/>
+          <p:cNvPr id="184" name="" descr="{&quot;isTemplate&quot;:true,&quot;type&quot;:&quot;text&quot;}"/>
           <p:cNvSpPr txBox="1"/>
           <p:nvPr/>
         </p:nvSpPr>
@@ -8433,7 +9220,7 @@
       </p:sp>
       <p:sp>
         <p:nvSpPr>
-          <p:cNvPr id="168" name="" descr="{&quot;isTemplate&quot;:true,&quot;type&quot;:&quot;text&quot;}"/>
+          <p:cNvPr id="185" name="" descr="{&quot;isTemplate&quot;:true,&quot;type&quot;:&quot;text&quot;}"/>
           <p:cNvSpPr txBox="1"/>
           <p:nvPr/>
         </p:nvSpPr>
@@ -8488,7 +9275,7 @@
       </p:sp>
       <p:sp>
         <p:nvSpPr>
-          <p:cNvPr id="169" name="" descr="{&quot;isTemplate&quot;:true,&quot;type&quot;:&quot;text&quot;}"/>
+          <p:cNvPr id="186" name="" descr="{&quot;isTemplate&quot;:true,&quot;type&quot;:&quot;text&quot;}"/>
           <p:cNvSpPr txBox="1"/>
           <p:nvPr/>
         </p:nvSpPr>
@@ -8553,7 +9340,7 @@
       </p:sp>
       <p:sp>
         <p:nvSpPr>
-          <p:cNvPr id="170" name="" descr="{&quot;isTemplate&quot;:true,&quot;type&quot;:&quot;text&quot;}"/>
+          <p:cNvPr id="187" name="" descr="{&quot;isTemplate&quot;:true,&quot;type&quot;:&quot;text&quot;}"/>
           <p:cNvSpPr txBox="1"/>
           <p:nvPr/>
         </p:nvSpPr>
@@ -8596,7 +9383,7 @@
   <p:cSld>
     <p:spTree>
       <p:nvGrpSpPr>
-        <p:cNvPr id="171" name="" descr="&lt;Slide style={{ width: 1280, height: 720, background: '#0B0D14', padding: '56px 72px', flexDirection: 'column' }}&gt;&#13;&#10;  &lt;Box style={{ height: 96, flexDirection: 'row', justifyContent: 'space-between', alignItems: 'flex-start' }}&gt;&#13;&#10;    &lt;Box style={{ flexDirection: 'column', gap: 8 }}&gt;&#13;&#10;      &lt;Text style={{ fontSize: 34, fontWeight: 'bold', color: '#F2F4FF' }}&gt;四层架构：交易底座不动，决策层新建&lt;/Text&gt;&#13;&#10;      &lt;Text style={{ fontSize: 15, color: '#8A90A6' }}&gt;原有 4,294 行代码、42 个模板、190 项测试，全部作为底座继续跑&lt;/Text&gt;&#13;&#10;    &lt;/Box&gt;&#13;&#10;    &lt;Text style={{ fontSize: 13, color: '#4A5064', letterSpacing: 2 }}&gt;AI 掌柜&lt;/Text&gt;&#13;&#10;  &lt;/Box&gt;&#13;&#10;  &lt;Box style={{ flex: 1, paddingTop: 8 }}&gt;&#13;&#10;    &lt;Box style={{ flexDirection: 'column', gap: 14 }}&gt;&#13;&#10;      &lt;Box style={{ background: '#171A2E', border: '1px solid #6C6CF5', borderRadius: 10, padding: '22px 24px', flexDirection: 'row', alignItems: 'center' }}&gt;&#13;&#10;        &lt;Text style={{ fontSize: 13, color: '#6C6CF5', width: 100, letterSpacing: 1 }}&gt;决策界面&lt;/Text&gt;&#13;&#10;        &lt;Text style={{ fontSize: 16, color: '#F2F4FF' }}&gt;AI 驾驶舱 · 经营问答 · 洞察中心 · 采购单 · 四象限 · 预测备货&lt;/Text&gt;&#13;&#10;      &lt;/Box&gt;&#13;&#10;      &lt;Box style={{ background: '#141826', border: '1px solid #242A3D', borderRadius: 10, padding: '22px 24px', flexDirection: 'row', alignItems: 'center' }}&gt;&#13;&#10;        &lt;Text style={{ fontSize: 13, color: '#8A90A6', width: 100, letterSpacing: 1 }}&gt;AI 引擎&lt;/Text&gt;&#13;&#10;        &lt;Text style={{ fontSize: 16, color: '#F2F4FF' }}&gt;受控 NL2SQL · 6 类规则检测 · 三层分解预测 · 可执行工具&lt;/Text&gt;&#13;&#10;      &lt;/Box&gt;&#13;&#10;      &lt;Box style={{ background: '#141826', border: '1px solid #242A3D', borderRadius: 10, padding: '22px 24px', flexDirection: 'row', alignItems: 'center' }}&gt;&#13;&#10;        &lt;Text style={{ fontSize: 13, color: '#8A90A6', width: 100, letterSpacing: 1 }}&gt;指标层&lt;/Text&gt;&#13;&#10;        &lt;Text style={{ fontSize: 16, color: '#F2F4FF' }}&gt;唯一口径 metrics.py · 日粒度预聚合 ETL · 8 个只读语义视图&lt;/Text&gt;&#13;&#10;      &lt;/Box&gt;&#13;&#10;      &lt;Box style={{ background: '#12141F', border: '1px solid #242A3D', borderRadius: 10, padding: '22px 24px', flexDirection: 'row', alignItems: 'center' }}&gt;&#13;&#10;        &lt;Text style={{ fontSize: 13, color: '#4A5064', width: 100, letterSpacing: 1 }}&gt;交易底座&lt;/Text&gt;&#13;&#10;        &lt;Text style={{ fontSize: 16, color: '#8A90A6' }}&gt;点单 · 收银 · 会员 · BOM 配方 · 库存流水 · 预订（Flask + SQLite）&lt;/Text&gt;&#13;&#10;      &lt;/Box&gt;&#13;&#10;    &lt;/Box&gt;&#13;&#10;    &lt;Box style={{ marginTop: 24, flexDirection: 'row', gap: 18 }}&gt;&#13;&#10;      &lt;Box style={{ flex: 1, paddingTop: 14, borderTop: '1px solid #242A3D' }}&gt;&#13;&#10;        &lt;Text style={{ fontSize: 30, fontWeight: 'bold', color: '#6C6CF5' }}&gt;0&lt;/Text&gt;&#13;&#10;        &lt;Text style={{ fontSize: 13, color: '#8A90A6', marginTop: 4 }}&gt;新增第三方运行时依赖&lt;br /&gt;仅 Flask + waitress&lt;/Text&gt;&#13;&#10;      &lt;/Box&gt;&#13;&#10;      &lt;Box style={{ flex: 1, paddingTop: 14, borderTop: '1px solid #242A3D' }}&gt;&#13;&#10;        &lt;Text style={{ fontSize: 30, fontWeight: 'bold', color: '#6C6CF5' }}&gt;1.0s&lt;/Text&gt;&#13;&#10;        &lt;Text style={{ fontSize: 13, color: '#8A90A6', marginTop: 4 }}&gt;看板首屏&lt;br /&gt;180 天预聚合&lt;/Text&gt;&#13;&#10;      &lt;/Box&gt;&#13;&#10;      &lt;Box style={{ flex: 1, paddingTop: 14, borderTop: '1px solid #242A3D' }}&gt;&#13;&#10;        &lt;Text style={{ fontSize: 30, fontWeight: 'bold', color: '#6C6CF5' }}&gt;离线&lt;/Text&gt;&#13;&#10;        &lt;Text style={{ fontSize: 13, color: '#8A90A6', marginTop: 4 }}&gt;可跑：本地模型 / 规则降级&lt;br /&gt;不依赖 CDN 与外网&lt;/Text&gt;&#13;&#10;      &lt;/Box&gt;&#13;&#10;    &lt;/Box&gt;&#13;&#10;    &lt;Box style={{ marginTop: 20, paddingTop: 16, borderTop: '1px solid #242A3D', flexDirection: 'row', gap: 14 }}&gt;&#13;&#10;      &lt;Text style={{ fontSize: 13, color: '#6C6CF5', width: 76 }}&gt;选型取舍&lt;/Text&gt;&#13;&#10;      &lt;Text style={{ fontSize: 14, color: '#8A90A6', lineHeight: 1.7, flex: 1 }}&gt;&#13;&#10;        不引入 numpy / pandas / torch：门店电脑不是服务器，打包体积与启动速度比模型炫技重要；&#13;&#10;        SQLite 开启 WAL 后足以支撑店内 20 路并发点餐。&#13;&#10;      &lt;/Text&gt;&#13;&#10;    &lt;/Box&gt;&#13;&#10;  &lt;/Box&gt;&#13;&#10;  &lt;Box style={{ height: 36, flexDirection: 'row', justifyContent: 'space-between', alignItems: 'flex-end' }}&gt;&#13;&#10;    &lt;Text style={{ fontSize: 12, color: '#4A5064' }}&gt;2026 武汉 1024 · 产业应用赛道&lt;/Text&gt;&#13;&#10;    &lt;Text style={{ fontSize: 12, color: '#4A5064' }}&gt;06 / 12&lt;/Text&gt;&#13;&#10;  &lt;/Box&gt;&#13;&#10;&lt;/Slide&gt;"/>
+        <p:cNvPr id="188" name="" descr="&lt;Slide style={{ width: 1280, height: 720, background: '#0B0D14', padding: '56px 72px', flexDirection: 'column' }}&gt;&#13;&#10;  &lt;Box style={{ height: 96, flexDirection: 'row', justifyContent: 'space-between', alignItems: 'flex-start' }}&gt;&#13;&#10;    &lt;Box style={{ flexDirection: 'column', gap: 8 }}&gt;&#13;&#10;      &lt;Text style={{ fontSize: 34, fontWeight: 'bold', color: '#F2F4FF' }}&gt;四层架构：交易底座不动，决策层新建&lt;/Text&gt;&#13;&#10;      &lt;Text style={{ fontSize: 15, color: '#8A90A6' }}&gt;原有 4,294 行代码、42 个模板、190 项测试，全部作为底座继续跑&lt;/Text&gt;&#13;&#10;    &lt;/Box&gt;&#13;&#10;    &lt;Text style={{ fontSize: 13, color: '#4A5064', letterSpacing: 2 }}&gt;AI 掌柜&lt;/Text&gt;&#13;&#10;  &lt;/Box&gt;&#13;&#10;  &lt;Box style={{ flex: 1, paddingTop: 8 }}&gt;&#13;&#10;    &lt;Box style={{ flexDirection: 'column', gap: 14 }}&gt;&#13;&#10;      &lt;Box style={{ background: '#171A2E', border: '1px solid #6C6CF5', borderRadius: 10, padding: '22px 24px', flexDirection: 'row', alignItems: 'center' }}&gt;&#13;&#10;        &lt;Text style={{ fontSize: 13, color: '#6C6CF5', width: 100, letterSpacing: 1 }}&gt;决策界面&lt;/Text&gt;&#13;&#10;        &lt;Text style={{ fontSize: 16, color: '#F2F4FF' }}&gt;AI 驾驶舱 · 经营问答 · 洞察中心 · 采购单 · 四象限 · 预测备货&lt;/Text&gt;&#13;&#10;      &lt;/Box&gt;&#13;&#10;      &lt;Box style={{ background: '#141826', border: '1px solid #242A3D', borderRadius: 10, padding: '22px 24px', flexDirection: 'row', alignItems: 'center' }}&gt;&#13;&#10;        &lt;Text style={{ fontSize: 13, color: '#8A90A6', width: 100, letterSpacing: 1 }}&gt;AI 引擎&lt;/Text&gt;&#13;&#10;        &lt;Text style={{ fontSize: 16, color: '#F2F4FF' }}&gt;受控 NL2SQL · 6 类规则检测 · 三层分解预测 · 可执行工具&lt;/Text&gt;&#13;&#10;      &lt;/Box&gt;&#13;&#10;      &lt;Box style={{ background: '#141826', border: '1px solid #242A3D', borderRadius: 10, padding: '22px 24px', flexDirection: 'row', alignItems: 'center' }}&gt;&#13;&#10;        &lt;Text style={{ fontSize: 13, color: '#8A90A6', width: 100, letterSpacing: 1 }}&gt;指标层&lt;/Text&gt;&#13;&#10;        &lt;Text style={{ fontSize: 16, color: '#F2F4FF' }}&gt;唯一口径 metrics.py · 日粒度预聚合 ETL · 8 个只读语义视图&lt;/Text&gt;&#13;&#10;      &lt;/Box&gt;&#13;&#10;      &lt;Box style={{ background: '#12141F', border: '1px solid #242A3D', borderRadius: 10, padding: '22px 24px', flexDirection: 'row', alignItems: 'center' }}&gt;&#13;&#10;        &lt;Text style={{ fontSize: 13, color: '#4A5064', width: 100, letterSpacing: 1 }}&gt;交易底座&lt;/Text&gt;&#13;&#10;        &lt;Text style={{ fontSize: 16, color: '#8A90A6' }}&gt;点单 · 收银 · 会员 · BOM 配方 · 库存流水 · 预订（Flask + SQLite）&lt;/Text&gt;&#13;&#10;      &lt;/Box&gt;&#13;&#10;    &lt;/Box&gt;&#13;&#10;    &lt;Box style={{ marginTop: 24, flexDirection: 'row', gap: 18 }}&gt;&#13;&#10;      &lt;Box style={{ flex: 1, paddingTop: 14, borderTop: '1px solid #242A3D' }}&gt;&#13;&#10;        &lt;Text style={{ fontSize: 30, fontWeight: 'bold', color: '#6C6CF5' }}&gt;0&lt;/Text&gt;&#13;&#10;        &lt;Text style={{ fontSize: 13, color: '#8A90A6', marginTop: 4 }}&gt;新增第三方运行时依赖&lt;br /&gt;仅 Flask + waitress&lt;/Text&gt;&#13;&#10;      &lt;/Box&gt;&#13;&#10;      &lt;Box style={{ flex: 1, paddingTop: 14, borderTop: '1px solid #242A3D' }}&gt;&#13;&#10;        &lt;Text style={{ fontSize: 30, fontWeight: 'bold', color: '#6C6CF5' }}&gt;1.0s&lt;/Text&gt;&#13;&#10;        &lt;Text style={{ fontSize: 13, color: '#8A90A6', marginTop: 4 }}&gt;看板首屏&lt;br /&gt;180 天预聚合&lt;/Text&gt;&#13;&#10;      &lt;/Box&gt;&#13;&#10;      &lt;Box style={{ flex: 1, paddingTop: 14, borderTop: '1px solid #242A3D' }}&gt;&#13;&#10;        &lt;Text style={{ fontSize: 30, fontWeight: 'bold', color: '#6C6CF5' }}&gt;离线&lt;/Text&gt;&#13;&#10;        &lt;Text style={{ fontSize: 13, color: '#8A90A6', marginTop: 4 }}&gt;可跑：本地模型 / 规则降级&lt;br /&gt;不依赖 CDN 与外网&lt;/Text&gt;&#13;&#10;      &lt;/Box&gt;&#13;&#10;    &lt;/Box&gt;&#13;&#10;    &lt;Box style={{ marginTop: 20, paddingTop: 16, borderTop: '1px solid #242A3D', flexDirection: 'row', gap: 14 }}&gt;&#13;&#10;      &lt;Text style={{ fontSize: 13, color: '#6C6CF5', width: 76 }}&gt;选型取舍&lt;/Text&gt;&#13;&#10;      &lt;Text style={{ fontSize: 14, color: '#8A90A6', lineHeight: 1.7, flex: 1 }}&gt;&#13;&#10;        不引入 numpy / pandas / torch：门店电脑不是服务器，打包体积与启动速度比模型炫技重要；&#13;&#10;        SQLite 开启 WAL 后足以支撑店内 20 路并发点餐。&#13;&#10;      &lt;/Text&gt;&#13;&#10;    &lt;/Box&gt;&#13;&#10;  &lt;/Box&gt;&#13;&#10;  &lt;Box style={{ height: 36, flexDirection: 'row', justifyContent: 'space-between', alignItems: 'flex-end' }}&gt;&#13;&#10;    &lt;Text style={{ fontSize: 12, color: '#4A5064' }}&gt;2026 武汉 1024 · 产业应用赛道&lt;/Text&gt;&#13;&#10;    &lt;Text style={{ fontSize: 12, color: '#4A5064' }}&gt;06 / 12&lt;/Text&gt;&#13;&#10;  &lt;/Box&gt;&#13;&#10;&lt;/Slide&gt;"/>
         <p:cNvGrpSpPr/>
         <p:nvPr/>
       </p:nvGrpSpPr>
@@ -8610,7 +9397,7 @@
       </p:grpSpPr>
       <p:sp>
         <p:nvSpPr>
-          <p:cNvPr id="172" name=""/>
+          <p:cNvPr id="189" name=""/>
           <p:cNvSpPr/>
           <p:nvPr/>
         </p:nvSpPr>
@@ -8634,7 +9421,7 @@
       </p:sp>
       <p:sp>
         <p:nvSpPr>
-          <p:cNvPr id="173" name="" descr="{&quot;isTemplate&quot;:true,&quot;type&quot;:&quot;text&quot;}"/>
+          <p:cNvPr id="190" name="" descr="{&quot;isTemplate&quot;:true,&quot;type&quot;:&quot;text&quot;}"/>
           <p:cNvSpPr txBox="1"/>
           <p:nvPr/>
         </p:nvSpPr>
@@ -8669,7 +9456,7 @@
       </p:sp>
       <p:sp>
         <p:nvSpPr>
-          <p:cNvPr id="174" name="" descr="{&quot;isTemplate&quot;:true,&quot;type&quot;:&quot;text&quot;}"/>
+          <p:cNvPr id="191" name="" descr="{&quot;isTemplate&quot;:true,&quot;type&quot;:&quot;text&quot;}"/>
           <p:cNvSpPr txBox="1"/>
           <p:nvPr/>
         </p:nvSpPr>
@@ -8764,7 +9551,7 @@
       </p:sp>
       <p:sp>
         <p:nvSpPr>
-          <p:cNvPr id="175" name="" descr="{&quot;isTemplate&quot;:true,&quot;type&quot;:&quot;text&quot;}"/>
+          <p:cNvPr id="192" name="" descr="{&quot;isTemplate&quot;:true,&quot;type&quot;:&quot;text&quot;}"/>
           <p:cNvSpPr txBox="1"/>
           <p:nvPr/>
         </p:nvSpPr>
@@ -8809,7 +9596,7 @@
       </p:sp>
       <p:sp>
         <p:nvSpPr>
-          <p:cNvPr id="176" name=""/>
+          <p:cNvPr id="193" name=""/>
           <p:cNvSpPr/>
           <p:nvPr/>
         </p:nvSpPr>
@@ -8840,7 +9627,7 @@
       </p:sp>
       <p:sp>
         <p:nvSpPr>
-          <p:cNvPr id="177" name="" descr="{&quot;isTemplate&quot;:true,&quot;type&quot;:&quot;text&quot;}"/>
+          <p:cNvPr id="194" name="" descr="{&quot;isTemplate&quot;:true,&quot;type&quot;:&quot;text&quot;}"/>
           <p:cNvSpPr txBox="1"/>
           <p:nvPr/>
         </p:nvSpPr>
@@ -8875,7 +9662,7 @@
       </p:sp>
       <p:sp>
         <p:nvSpPr>
-          <p:cNvPr id="178" name="" descr="{&quot;isTemplate&quot;:true,&quot;type&quot;:&quot;text&quot;}"/>
+          <p:cNvPr id="195" name="" descr="{&quot;isTemplate&quot;:true,&quot;type&quot;:&quot;text&quot;}"/>
           <p:cNvSpPr txBox="1"/>
           <p:nvPr/>
         </p:nvSpPr>
@@ -9020,7 +9807,7 @@
       </p:sp>
       <p:sp>
         <p:nvSpPr>
-          <p:cNvPr id="179" name=""/>
+          <p:cNvPr id="196" name=""/>
           <p:cNvSpPr/>
           <p:nvPr/>
         </p:nvSpPr>
@@ -9051,7 +9838,7 @@
       </p:sp>
       <p:sp>
         <p:nvSpPr>
-          <p:cNvPr id="180" name="" descr="{&quot;isTemplate&quot;:true,&quot;type&quot;:&quot;text&quot;}"/>
+          <p:cNvPr id="197" name="" descr="{&quot;isTemplate&quot;:true,&quot;type&quot;:&quot;text&quot;}"/>
           <p:cNvSpPr txBox="1"/>
           <p:nvPr/>
         </p:nvSpPr>
@@ -9096,7 +9883,7 @@
       </p:sp>
       <p:sp>
         <p:nvSpPr>
-          <p:cNvPr id="181" name="" descr="{&quot;isTemplate&quot;:true,&quot;type&quot;:&quot;text&quot;}"/>
+          <p:cNvPr id="198" name="" descr="{&quot;isTemplate&quot;:true,&quot;type&quot;:&quot;text&quot;}"/>
           <p:cNvSpPr txBox="1"/>
           <p:nvPr/>
         </p:nvSpPr>
@@ -9191,7 +9978,7 @@
       </p:sp>
       <p:sp>
         <p:nvSpPr>
-          <p:cNvPr id="182" name=""/>
+          <p:cNvPr id="199" name=""/>
           <p:cNvSpPr/>
           <p:nvPr/>
         </p:nvSpPr>
@@ -9222,7 +10009,7 @@
       </p:sp>
       <p:sp>
         <p:nvSpPr>
-          <p:cNvPr id="183" name="" descr="{&quot;isTemplate&quot;:true,&quot;type&quot;:&quot;text&quot;}"/>
+          <p:cNvPr id="200" name="" descr="{&quot;isTemplate&quot;:true,&quot;type&quot;:&quot;text&quot;}"/>
           <p:cNvSpPr txBox="1"/>
           <p:nvPr/>
         </p:nvSpPr>
@@ -9257,7 +10044,7 @@
       </p:sp>
       <p:sp>
         <p:nvSpPr>
-          <p:cNvPr id="184" name="" descr="{&quot;isTemplate&quot;:true,&quot;type&quot;:&quot;text&quot;}"/>
+          <p:cNvPr id="201" name="" descr="{&quot;isTemplate&quot;:true,&quot;type&quot;:&quot;text&quot;}"/>
           <p:cNvSpPr txBox="1"/>
           <p:nvPr/>
         </p:nvSpPr>
@@ -9332,7 +10119,7 @@
       </p:sp>
       <p:sp>
         <p:nvSpPr>
-          <p:cNvPr id="185" name=""/>
+          <p:cNvPr id="202" name=""/>
           <p:cNvSpPr/>
           <p:nvPr/>
         </p:nvSpPr>
@@ -9363,7 +10150,7 @@
       </p:sp>
       <p:sp>
         <p:nvSpPr>
-          <p:cNvPr id="186" name="" descr="{&quot;isTemplate&quot;:true,&quot;type&quot;:&quot;text&quot;}"/>
+          <p:cNvPr id="203" name="" descr="{&quot;isTemplate&quot;:true,&quot;type&quot;:&quot;text&quot;}"/>
           <p:cNvSpPr txBox="1"/>
           <p:nvPr/>
         </p:nvSpPr>
@@ -9398,7 +10185,7 @@
       </p:sp>
       <p:sp>
         <p:nvSpPr>
-          <p:cNvPr id="187" name="" descr="{&quot;isTemplate&quot;:true,&quot;type&quot;:&quot;text&quot;}"/>
+          <p:cNvPr id="204" name="" descr="{&quot;isTemplate&quot;:true,&quot;type&quot;:&quot;text&quot;}"/>
           <p:cNvSpPr txBox="1"/>
           <p:nvPr/>
         </p:nvSpPr>
@@ -9553,7 +10340,7 @@
       </p:sp>
       <p:sp>
         <p:nvSpPr>
-          <p:cNvPr id="188" name=""/>
+          <p:cNvPr id="205" name=""/>
           <p:cNvSpPr/>
           <p:nvPr/>
         </p:nvSpPr>
@@ -9593,7 +10380,7 @@
       </p:sp>
       <p:sp>
         <p:nvSpPr>
-          <p:cNvPr id="189" name="" descr="{&quot;isTemplate&quot;:true,&quot;type&quot;:&quot;text&quot;}"/>
+          <p:cNvPr id="206" name="" descr="{&quot;isTemplate&quot;:true,&quot;type&quot;:&quot;text&quot;}"/>
           <p:cNvSpPr txBox="1"/>
           <p:nvPr/>
         </p:nvSpPr>
@@ -9628,7 +10415,7 @@
       </p:sp>
       <p:sp>
         <p:nvSpPr>
-          <p:cNvPr id="190" name="" descr="{&quot;isTemplate&quot;:true,&quot;type&quot;:&quot;text&quot;}"/>
+          <p:cNvPr id="207" name="" descr="{&quot;isTemplate&quot;:true,&quot;type&quot;:&quot;text&quot;}"/>
           <p:cNvSpPr txBox="1"/>
           <p:nvPr/>
         </p:nvSpPr>
@@ -9691,7 +10478,7 @@
       </p:sp>
       <p:sp>
         <p:nvSpPr>
-          <p:cNvPr id="191" name=""/>
+          <p:cNvPr id="208" name=""/>
           <p:cNvSpPr/>
           <p:nvPr/>
         </p:nvSpPr>
@@ -9731,7 +10518,7 @@
       </p:sp>
       <p:sp>
         <p:nvSpPr>
-          <p:cNvPr id="192" name="" descr="{&quot;isTemplate&quot;:true,&quot;type&quot;:&quot;text&quot;}"/>
+          <p:cNvPr id="209" name="" descr="{&quot;isTemplate&quot;:true,&quot;type&quot;:&quot;text&quot;}"/>
           <p:cNvSpPr txBox="1"/>
           <p:nvPr/>
         </p:nvSpPr>
@@ -9766,7 +10553,7 @@
       </p:sp>
       <p:sp>
         <p:nvSpPr>
-          <p:cNvPr id="193" name="" descr="{&quot;isTemplate&quot;:true,&quot;type&quot;:&quot;text&quot;}"/>
+          <p:cNvPr id="210" name="" descr="{&quot;isTemplate&quot;:true,&quot;type&quot;:&quot;text&quot;}"/>
           <p:cNvSpPr txBox="1"/>
           <p:nvPr/>
         </p:nvSpPr>
@@ -9829,7 +10616,7 @@
       </p:sp>
       <p:sp>
         <p:nvSpPr>
-          <p:cNvPr id="194" name=""/>
+          <p:cNvPr id="211" name=""/>
           <p:cNvSpPr/>
           <p:nvPr/>
         </p:nvSpPr>
@@ -9869,7 +10656,7 @@
       </p:sp>
       <p:sp>
         <p:nvSpPr>
-          <p:cNvPr id="195" name="" descr="{&quot;isTemplate&quot;:true,&quot;type&quot;:&quot;text&quot;}"/>
+          <p:cNvPr id="212" name="" descr="{&quot;isTemplate&quot;:true,&quot;type&quot;:&quot;text&quot;}"/>
           <p:cNvSpPr txBox="1"/>
           <p:nvPr/>
         </p:nvSpPr>
@@ -9904,7 +10691,7 @@
       </p:sp>
       <p:sp>
         <p:nvSpPr>
-          <p:cNvPr id="196" name="" descr="{&quot;isTemplate&quot;:true,&quot;type&quot;:&quot;text&quot;}"/>
+          <p:cNvPr id="213" name="" descr="{&quot;isTemplate&quot;:true,&quot;type&quot;:&quot;text&quot;}"/>
           <p:cNvSpPr txBox="1"/>
           <p:nvPr/>
         </p:nvSpPr>
@@ -9997,7 +10784,7 @@
       </p:sp>
       <p:sp>
         <p:nvSpPr>
-          <p:cNvPr id="197" name=""/>
+          <p:cNvPr id="214" name=""/>
           <p:cNvSpPr/>
           <p:nvPr/>
         </p:nvSpPr>
@@ -10037,7 +10824,7 @@
       </p:sp>
       <p:sp>
         <p:nvSpPr>
-          <p:cNvPr id="198" name="" descr="{&quot;isTemplate&quot;:true,&quot;type&quot;:&quot;text&quot;}"/>
+          <p:cNvPr id="215" name="" descr="{&quot;isTemplate&quot;:true,&quot;type&quot;:&quot;text&quot;}"/>
           <p:cNvSpPr txBox="1"/>
           <p:nvPr/>
         </p:nvSpPr>
@@ -10072,7 +10859,7 @@
       </p:sp>
       <p:sp>
         <p:nvSpPr>
-          <p:cNvPr id="199" name="" descr="{&quot;isTemplate&quot;:true,&quot;type&quot;:&quot;text&quot;}"/>
+          <p:cNvPr id="216" name="" descr="{&quot;isTemplate&quot;:true,&quot;type&quot;:&quot;text&quot;}"/>
           <p:cNvSpPr txBox="1"/>
           <p:nvPr/>
         </p:nvSpPr>
@@ -10187,7 +10974,7 @@
       </p:sp>
       <p:sp>
         <p:nvSpPr>
-          <p:cNvPr id="200" name="" descr="{&quot;isTemplate&quot;:true,&quot;type&quot;:&quot;text&quot;}"/>
+          <p:cNvPr id="217" name="" descr="{&quot;isTemplate&quot;:true,&quot;type&quot;:&quot;text&quot;}"/>
           <p:cNvSpPr txBox="1"/>
           <p:nvPr/>
         </p:nvSpPr>
@@ -10252,7 +11039,7 @@
       </p:sp>
       <p:sp>
         <p:nvSpPr>
-          <p:cNvPr id="201" name="" descr="{&quot;isTemplate&quot;:true,&quot;type&quot;:&quot;text&quot;}"/>
+          <p:cNvPr id="218" name="" descr="{&quot;isTemplate&quot;:true,&quot;type&quot;:&quot;text&quot;}"/>
           <p:cNvSpPr txBox="1"/>
           <p:nvPr/>
         </p:nvSpPr>
@@ -10295,7 +11082,7 @@
   <p:cSld>
     <p:spTree>
       <p:nvGrpSpPr>
-        <p:cNvPr id="202" name="" descr="&lt;Slide style={{ width: 1280, height: 720, background: '#0B0D14', padding: '56px 72px', flexDirection: 'column' }}&gt;&#13;&#10;  &lt;Box style={{ height: 96, flexDirection: 'row', justifyContent: 'space-between', alignItems: 'flex-start' }}&gt;&#13;&#10;    &lt;Box style={{ flexDirection: 'column', gap: 8 }}&gt;&#13;&#10;      &lt;Text style={{ fontSize: 34, fontWeight: 'bold', color: '#F2F4FF' }}&gt;敢让它查数，是因为它改不了数&lt;/Text&gt;&#13;&#10;      &lt;Text style={{ fontSize: 15, color: '#8A90A6' }}&gt;自然语言查数的五道闸 —— 对应评审的「稳定性与合规性」&lt;/Text&gt;&#13;&#10;    &lt;/Box&gt;&#13;&#10;    &lt;Text style={{ fontSize: 13, color: '#4A5064', letterSpacing: 2 }}&gt;AI 掌柜&lt;/Text&gt;&#13;&#10;  &lt;/Box&gt;&#13;&#10;  &lt;Box style={{ flex: 1, paddingTop: 8 }}&gt;&#13;&#10;    &lt;Box style={{ flexDirection: 'row', gap: 26 }}&gt;&#13;&#10;      &lt;Box style={{ flex: 1.3, flexDirection: 'column', gap: 18 }}&gt;&#13;&#10;        &lt;Box style={{ flexDirection: 'row', gap: 16, alignItems: 'flex-start' }}&gt;&#13;&#10;          &lt;Text style={{ fontSize: 16, fontWeight: 'bold', color: '#6C6CF5', width: 34 }}&gt;01&lt;/Text&gt;&#13;&#10;          &lt;Box style={{ flexDirection: 'column', gap: 4 }}&gt;&#13;&#10;            &lt;Text style={{ fontSize: 19, color: '#F2F4FF' }}&gt;只读连接&lt;/Text&gt;&#13;&#10;            &lt;Text style={{ fontSize: 14, color: '#8A90A6' }}&gt;query_only=ON，数据库层面拒绝一切写操作&lt;/Text&gt;&#13;&#10;          &lt;/Box&gt;&#13;&#10;        &lt;/Box&gt;&#13;&#10;        &lt;Box style={{ flexDirection: 'row', gap: 16, alignItems: 'flex-start' }}&gt;&#13;&#10;          &lt;Text style={{ fontSize: 16, fontWeight: 'bold', color: '#6C6CF5', width: 34 }}&gt;02&lt;/Text&gt;&#13;&#10;          &lt;Box style={{ flexDirection: 'column', gap: 4 }}&gt;&#13;&#10;            &lt;Text style={{ fontSize: 19, color: '#F2F4FF' }}&gt;视图白名单&lt;/Text&gt;&#13;&#10;            &lt;Text style={{ fontSize: 14, color: '#8A90A6' }}&gt;只认 8 个 v_* 语义视图，读不到会员手机号与设置表&lt;/Text&gt;&#13;&#10;          &lt;/Box&gt;&#13;&#10;        &lt;/Box&gt;&#13;&#10;        &lt;Box style={{ flexDirection: 'row', gap: 16, alignItems: 'flex-start' }}&gt;&#13;&#10;          &lt;Text style={{ fontSize: 16, fontWeight: 'bold', color: '#6C6CF5', width: 34 }}&gt;03&lt;/Text&gt;&#13;&#10;          &lt;Box style={{ flexDirection: 'column', gap: 4 }}&gt;&#13;&#10;            &lt;Text style={{ fontSize: 19, color: '#F2F4FF' }}&gt;语法校验&lt;/Text&gt;&#13;&#10;            &lt;Text style={{ fontSize: 14, color: '#8A90A6' }}&gt;单条 SELECT；禁 DDL / DML / ATTACH / UNION / 系统表&lt;/Text&gt;&#13;&#10;          &lt;/Box&gt;&#13;&#10;        &lt;/Box&gt;&#13;&#10;        &lt;Box style={{ flexDirection: 'row', gap: 16, alignItems: 'flex-start' }}&gt;&#13;&#10;          &lt;Text style={{ fontSize: 16, fontWeight: 'bold', color: '#6C6CF5', width: 34 }}&gt;04&lt;/Text&gt;&#13;&#10;          &lt;Box style={{ flexDirection: 'column', gap: 4 }}&gt;&#13;&#10;            &lt;Text style={{ fontSize: 19, color: '#F2F4FF' }}&gt;强制约束&lt;/Text&gt;&#13;&#10;            &lt;Text style={{ fontSize: 14, color: '#8A90A6' }}&gt;自动补 LIMIT 500，6 秒超时中断，慢查询拖不死库&lt;/Text&gt;&#13;&#10;          &lt;/Box&gt;&#13;&#10;        &lt;/Box&gt;&#13;&#10;        &lt;Box style={{ flexDirection: 'row', gap: 16, alignItems: 'flex-start' }}&gt;&#13;&#10;          &lt;Text style={{ fontSize: 16, fontWeight: 'bold', color: '#6C6CF5', width: 34 }}&gt;05&lt;/Text&gt;&#13;&#10;          &lt;Box style={{ flexDirection: 'column', gap: 4 }}&gt;&#13;&#10;            &lt;Text style={{ fontSize: 19, color: '#F2F4FF' }}&gt;结果上限&lt;/Text&gt;&#13;&#10;            &lt;Text style={{ fontSize: 14, color: '#8A90A6' }}&gt;最多 500 行，不会把大结果集塞进模型上下文&lt;/Text&gt;&#13;&#10;          &lt;/Box&gt;&#13;&#10;        &lt;/Box&gt;&#13;&#10;      &lt;/Box&gt;&#13;&#10;      &lt;Box style={{ flex: 1, background: '#141826', border: '1px solid #242A3D', borderRadius: 14, padding: 26, flexDirection: 'column', justifyContent: 'space-between' }}&gt;&#13;&#10;        &lt;Box&gt;&#13;&#10;          &lt;Text style={{ fontSize: 13, color: '#8A90A6', letterSpacing: 1 }}&gt;自动化验证&lt;/Text&gt;&#13;&#10;          &lt;Text style={{ fontSize: 62, fontWeight: 'bold', color: '#6C6CF5', marginTop: 6 }}&gt;8 / 8&lt;/Text&gt;&#13;&#10;          &lt;Text style={{ fontSize: 15, color: '#F2F4FF', marginTop: 4 }}&gt;越界语句全部拦截&lt;/Text&gt;&#13;&#10;        &lt;/Box&gt;&#13;&#10;        &lt;Box style={{ flexDirection: 'column', gap: 6 }}&gt;&#13;&#10;          &lt;Text style={{ fontSize: 12, color: '#8A90A6' }}&gt;SELECT * FROM members&lt;/Text&gt;&#13;&#10;          &lt;Text style={{ fontSize: 12, color: '#8A90A6' }}&gt;DROP TABLE orders&lt;/Text&gt;&#13;&#10;          &lt;Text style={{ fontSize: 12, color: '#8A90A6' }}&gt;SELECT 1; DELETE FROM orders&lt;/Text&gt;&#13;&#10;          &lt;Text style={{ fontSize: 12, color: '#8A90A6' }}&gt;... UNION SELECT * FROM settings&lt;/Text&gt;&#13;&#10;          &lt;Text style={{ fontSize: 12, color: '#8A90A6' }}&gt;ATTACH / PRAGMA / sqlite_master&lt;/Text&gt;&#13;&#10;        &lt;/Box&gt;&#13;&#10;        &lt;Text style={{ fontSize: 12, color: '#6C6CF5' }}&gt;越界时先自动修复一轮 SQL，再失败才降级&lt;/Text&gt;&#13;&#10;      &lt;/Box&gt;&#13;&#10;    &lt;/Box&gt;&#13;&#10;    &lt;Box style={{ marginTop: 22, paddingTop: 18, borderTop: '1px solid #242A3D', flexDirection: 'row', gap: 16 }}&gt;&#13;&#10;      &lt;Box style={{ width: 5, height: 46, background: '#6C6CF5', borderRadius: 3 }} /&gt;&#13;&#10;      &lt;Text style={{ fontSize: 16, color: '#8A90A6', lineHeight: 1.75, flex: 1 }}&gt;&#13;&#10;        黑名单永远会被绕过。真正的安全来自两层：数据库层面拒绝写、语义视图看不到敏感表；&lt;br /&gt;&#13;&#10;        其余三道闸只是把越界请求挡在更早的地方，顺便给出人能看懂的拒绝理由。&#13;&#10;      &lt;/Text&gt;&#13;&#10;    &lt;/Box&gt;&#13;&#10;  &lt;/Box&gt;&#13;&#10;  &lt;Box style={{ height: 36, flexDirection: 'row', justifyContent: 'space-between', alignItems: 'flex-end' }}&gt;&#13;&#10;    &lt;Text style={{ fontSize: 12, color: '#4A5064' }}&gt;2026 武汉 1024 · 产业应用赛道&lt;/Text&gt;&#13;&#10;    &lt;Text style={{ fontSize: 12, color: '#4A5064' }}&gt;07 / 12&lt;/Text&gt;&#13;&#10;  &lt;/Box&gt;&#13;&#10;&lt;/Slide&gt;"/>
+        <p:cNvPr id="219" name="" descr="&lt;Slide style={{ width: 1280, height: 720, background: '#0B0D14', padding: '56px 72px', flexDirection: 'column' }}&gt;&#13;&#10;  &lt;Box style={{ height: 96, flexDirection: 'row', justifyContent: 'space-between', alignItems: 'flex-start' }}&gt;&#13;&#10;    &lt;Box style={{ flexDirection: 'column', gap: 8 }}&gt;&#13;&#10;      &lt;Text style={{ fontSize: 34, fontWeight: 'bold', color: '#F2F4FF' }}&gt;敢让它查数，是因为它改不了数&lt;/Text&gt;&#13;&#10;      &lt;Text style={{ fontSize: 15, color: '#8A90A6' }}&gt;自然语言查数的五道闸 —— 对应评审的「稳定性与合规性」&lt;/Text&gt;&#13;&#10;    &lt;/Box&gt;&#13;&#10;    &lt;Text style={{ fontSize: 13, color: '#4A5064', letterSpacing: 2 }}&gt;AI 掌柜&lt;/Text&gt;&#13;&#10;  &lt;/Box&gt;&#13;&#10;  &lt;Box style={{ flex: 1, paddingTop: 8 }}&gt;&#13;&#10;    &lt;Box style={{ flexDirection: 'row', gap: 26 }}&gt;&#13;&#10;      &lt;Box style={{ flex: 1.3, flexDirection: 'column', gap: 18 }}&gt;&#13;&#10;        &lt;Box style={{ flexDirection: 'row', gap: 16, alignItems: 'flex-start' }}&gt;&#13;&#10;          &lt;Text style={{ fontSize: 16, fontWeight: 'bold', color: '#6C6CF5', width: 34 }}&gt;01&lt;/Text&gt;&#13;&#10;          &lt;Box style={{ flexDirection: 'column', gap: 4 }}&gt;&#13;&#10;            &lt;Text style={{ fontSize: 19, color: '#F2F4FF' }}&gt;只读连接&lt;/Text&gt;&#13;&#10;            &lt;Text style={{ fontSize: 14, color: '#8A90A6' }}&gt;query_only=ON，数据库层面拒绝一切写操作&lt;/Text&gt;&#13;&#10;          &lt;/Box&gt;&#13;&#10;        &lt;/Box&gt;&#13;&#10;        &lt;Box style={{ flexDirection: 'row', gap: 16, alignItems: 'flex-start' }}&gt;&#13;&#10;          &lt;Text style={{ fontSize: 16, fontWeight: 'bold', color: '#6C6CF5', width: 34 }}&gt;02&lt;/Text&gt;&#13;&#10;          &lt;Box style={{ flexDirection: 'column', gap: 4 }}&gt;&#13;&#10;            &lt;Text style={{ fontSize: 19, color: '#F2F4FF' }}&gt;视图白名单&lt;/Text&gt;&#13;&#10;            &lt;Text style={{ fontSize: 14, color: '#8A90A6' }}&gt;只认 8 个 v_* 语义视图，读不到会员手机号与设置表&lt;/Text&gt;&#13;&#10;          &lt;/Box&gt;&#13;&#10;        &lt;/Box&gt;&#13;&#10;        &lt;Box style={{ flexDirection: 'row', gap: 16, alignItems: 'flex-start' }}&gt;&#13;&#10;          &lt;Text style={{ fontSize: 16, fontWeight: 'bold', color: '#6C6CF5', width: 34 }}&gt;03&lt;/Text&gt;&#13;&#10;          &lt;Box style={{ flexDirection: 'column', gap: 4 }}&gt;&#13;&#10;            &lt;Text style={{ fontSize: 19, color: '#F2F4FF' }}&gt;语法校验&lt;/Text&gt;&#13;&#10;            &lt;Text style={{ fontSize: 14, color: '#8A90A6' }}&gt;单条 SELECT；禁 DDL / DML / ATTACH / UNION / 系统表&lt;/Text&gt;&#13;&#10;          &lt;/Box&gt;&#13;&#10;        &lt;/Box&gt;&#13;&#10;        &lt;Box style={{ flexDirection: 'row', gap: 16, alignItems: 'flex-start' }}&gt;&#13;&#10;          &lt;Text style={{ fontSize: 16, fontWeight: 'bold', color: '#6C6CF5', width: 34 }}&gt;04&lt;/Text&gt;&#13;&#10;          &lt;Box style={{ flexDirection: 'column', gap: 4 }}&gt;&#13;&#10;            &lt;Text style={{ fontSize: 19, color: '#F2F4FF' }}&gt;强制约束&lt;/Text&gt;&#13;&#10;            &lt;Text style={{ fontSize: 14, color: '#8A90A6' }}&gt;自动补 LIMIT 500，6 秒超时中断，慢查询拖不死库&lt;/Text&gt;&#13;&#10;          &lt;/Box&gt;&#13;&#10;        &lt;/Box&gt;&#13;&#10;        &lt;Box style={{ flexDirection: 'row', gap: 16, alignItems: 'flex-start' }}&gt;&#13;&#10;          &lt;Text style={{ fontSize: 16, fontWeight: 'bold', color: '#6C6CF5', width: 34 }}&gt;05&lt;/Text&gt;&#13;&#10;          &lt;Box style={{ flexDirection: 'column', gap: 4 }}&gt;&#13;&#10;            &lt;Text style={{ fontSize: 19, color: '#F2F4FF' }}&gt;结果上限&lt;/Text&gt;&#13;&#10;            &lt;Text style={{ fontSize: 14, color: '#8A90A6' }}&gt;最多 500 行，不会把大结果集塞进模型上下文&lt;/Text&gt;&#13;&#10;          &lt;/Box&gt;&#13;&#10;        &lt;/Box&gt;&#13;&#10;      &lt;/Box&gt;&#13;&#10;      &lt;Box style={{ flex: 1, background: '#141826', border: '1px solid #242A3D', borderRadius: 14, padding: 26, flexDirection: 'column', justifyContent: 'space-between' }}&gt;&#13;&#10;        &lt;Box&gt;&#13;&#10;          &lt;Text style={{ fontSize: 13, color: '#8A90A6', letterSpacing: 1 }}&gt;自动化验证&lt;/Text&gt;&#13;&#10;          &lt;Text style={{ fontSize: 62, fontWeight: 'bold', color: '#6C6CF5', marginTop: 6 }}&gt;8 / 8&lt;/Text&gt;&#13;&#10;          &lt;Text style={{ fontSize: 15, color: '#F2F4FF', marginTop: 4 }}&gt;越界语句全部拦截&lt;/Text&gt;&#13;&#10;        &lt;/Box&gt;&#13;&#10;        &lt;Box style={{ flexDirection: 'column', gap: 6 }}&gt;&#13;&#10;          &lt;Text style={{ fontSize: 12, color: '#8A90A6' }}&gt;SELECT * FROM members&lt;/Text&gt;&#13;&#10;          &lt;Text style={{ fontSize: 12, color: '#8A90A6' }}&gt;DROP TABLE orders&lt;/Text&gt;&#13;&#10;          &lt;Text style={{ fontSize: 12, color: '#8A90A6' }}&gt;SELECT 1; DELETE FROM orders&lt;/Text&gt;&#13;&#10;          &lt;Text style={{ fontSize: 12, color: '#8A90A6' }}&gt;... UNION SELECT * FROM settings&lt;/Text&gt;&#13;&#10;          &lt;Text style={{ fontSize: 12, color: '#8A90A6' }}&gt;ATTACH / PRAGMA / sqlite_master&lt;/Text&gt;&#13;&#10;        &lt;/Box&gt;&#13;&#10;        &lt;Text style={{ fontSize: 12, color: '#6C6CF5' }}&gt;越界时先自动修复一轮 SQL，再失败才降级&lt;/Text&gt;&#13;&#10;      &lt;/Box&gt;&#13;&#10;    &lt;/Box&gt;&#13;&#10;    &lt;Box style={{ marginTop: 22, paddingTop: 18, borderTop: '1px solid #242A3D', flexDirection: 'row', gap: 16 }}&gt;&#13;&#10;      &lt;Box style={{ width: 5, height: 46, background: '#6C6CF5', borderRadius: 3 }} /&gt;&#13;&#10;      &lt;Text style={{ fontSize: 16, color: '#8A90A6', lineHeight: 1.75, flex: 1 }}&gt;&#13;&#10;        黑名单永远会被绕过。真正的安全来自两层：数据库层面拒绝写、语义视图看不到敏感表；&lt;br /&gt;&#13;&#10;        其余三道闸只是把越界请求挡在更早的地方，顺便给出人能看懂的拒绝理由。&#13;&#10;      &lt;/Text&gt;&#13;&#10;    &lt;/Box&gt;&#13;&#10;  &lt;/Box&gt;&#13;&#10;  &lt;Box style={{ height: 36, flexDirection: 'row', justifyContent: 'space-between', alignItems: 'flex-end' }}&gt;&#13;&#10;    &lt;Text style={{ fontSize: 12, color: '#4A5064' }}&gt;2026 武汉 1024 · 产业应用赛道&lt;/Text&gt;&#13;&#10;    &lt;Text style={{ fontSize: 12, color: '#4A5064' }}&gt;07 / 12&lt;/Text&gt;&#13;&#10;  &lt;/Box&gt;&#13;&#10;&lt;/Slide&gt;"/>
         <p:cNvGrpSpPr/>
         <p:nvPr/>
       </p:nvGrpSpPr>
@@ -10309,7 +11096,7 @@
       </p:grpSpPr>
       <p:sp>
         <p:nvSpPr>
-          <p:cNvPr id="203" name=""/>
+          <p:cNvPr id="220" name=""/>
           <p:cNvSpPr/>
           <p:nvPr/>
         </p:nvSpPr>
@@ -10333,7 +11120,7 @@
       </p:sp>
       <p:sp>
         <p:nvSpPr>
-          <p:cNvPr id="204" name="" descr="{&quot;isTemplate&quot;:true,&quot;type&quot;:&quot;text&quot;}"/>
+          <p:cNvPr id="221" name="" descr="{&quot;isTemplate&quot;:true,&quot;type&quot;:&quot;text&quot;}"/>
           <p:cNvSpPr txBox="1"/>
           <p:nvPr/>
         </p:nvSpPr>
@@ -10368,7 +11155,7 @@
       </p:sp>
       <p:sp>
         <p:nvSpPr>
-          <p:cNvPr id="205" name="" descr="{&quot;isTemplate&quot;:true,&quot;type&quot;:&quot;text&quot;}"/>
+          <p:cNvPr id="222" name="" descr="{&quot;isTemplate&quot;:true,&quot;type&quot;:&quot;text&quot;}"/>
           <p:cNvSpPr txBox="1"/>
           <p:nvPr/>
         </p:nvSpPr>
@@ -10423,7 +11210,7 @@
       </p:sp>
       <p:sp>
         <p:nvSpPr>
-          <p:cNvPr id="206" name="" descr="{&quot;isTemplate&quot;:true,&quot;type&quot;:&quot;text&quot;}"/>
+          <p:cNvPr id="223" name="" descr="{&quot;isTemplate&quot;:true,&quot;type&quot;:&quot;text&quot;}"/>
           <p:cNvSpPr txBox="1"/>
           <p:nvPr/>
         </p:nvSpPr>
@@ -10468,7 +11255,7 @@
       </p:sp>
       <p:sp>
         <p:nvSpPr>
-          <p:cNvPr id="207" name="" descr="{&quot;isTemplate&quot;:true,&quot;type&quot;:&quot;text&quot;}"/>
+          <p:cNvPr id="224" name="" descr="{&quot;isTemplate&quot;:true,&quot;type&quot;:&quot;text&quot;}"/>
           <p:cNvSpPr txBox="1"/>
           <p:nvPr/>
         </p:nvSpPr>
@@ -10503,7 +11290,7 @@
       </p:sp>
       <p:sp>
         <p:nvSpPr>
-          <p:cNvPr id="208" name="" descr="{&quot;isTemplate&quot;:true,&quot;type&quot;:&quot;text&quot;}"/>
+          <p:cNvPr id="225" name="" descr="{&quot;isTemplate&quot;:true,&quot;type&quot;:&quot;text&quot;}"/>
           <p:cNvSpPr txBox="1"/>
           <p:nvPr/>
         </p:nvSpPr>
@@ -10538,7 +11325,7 @@
       </p:sp>
       <p:sp>
         <p:nvSpPr>
-          <p:cNvPr id="209" name="" descr="{&quot;isTemplate&quot;:true,&quot;type&quot;:&quot;text&quot;}"/>
+          <p:cNvPr id="226" name="" descr="{&quot;isTemplate&quot;:true,&quot;type&quot;:&quot;text&quot;}"/>
           <p:cNvSpPr txBox="1"/>
           <p:nvPr/>
         </p:nvSpPr>
@@ -10583,7 +11370,7 @@
       </p:sp>
       <p:sp>
         <p:nvSpPr>
-          <p:cNvPr id="210" name="" descr="{&quot;isTemplate&quot;:true,&quot;type&quot;:&quot;text&quot;}"/>
+          <p:cNvPr id="227" name="" descr="{&quot;isTemplate&quot;:true,&quot;type&quot;:&quot;text&quot;}"/>
           <p:cNvSpPr txBox="1"/>
           <p:nvPr/>
         </p:nvSpPr>
@@ -10618,7 +11405,7 @@
       </p:sp>
       <p:sp>
         <p:nvSpPr>
-          <p:cNvPr id="211" name="" descr="{&quot;isTemplate&quot;:true,&quot;type&quot;:&quot;text&quot;}"/>
+          <p:cNvPr id="228" name="" descr="{&quot;isTemplate&quot;:true,&quot;type&quot;:&quot;text&quot;}"/>
           <p:cNvSpPr txBox="1"/>
           <p:nvPr/>
         </p:nvSpPr>
@@ -10653,7 +11440,7 @@
       </p:sp>
       <p:sp>
         <p:nvSpPr>
-          <p:cNvPr id="212" name="" descr="{&quot;isTemplate&quot;:true,&quot;type&quot;:&quot;text&quot;}"/>
+          <p:cNvPr id="229" name="" descr="{&quot;isTemplate&quot;:true,&quot;type&quot;:&quot;text&quot;}"/>
           <p:cNvSpPr txBox="1"/>
           <p:nvPr/>
         </p:nvSpPr>
@@ -10728,7 +11515,7 @@
       </p:sp>
       <p:sp>
         <p:nvSpPr>
-          <p:cNvPr id="213" name="" descr="{&quot;isTemplate&quot;:true,&quot;type&quot;:&quot;text&quot;}"/>
+          <p:cNvPr id="230" name="" descr="{&quot;isTemplate&quot;:true,&quot;type&quot;:&quot;text&quot;}"/>
           <p:cNvSpPr txBox="1"/>
           <p:nvPr/>
         </p:nvSpPr>
@@ -10763,7 +11550,7 @@
       </p:sp>
       <p:sp>
         <p:nvSpPr>
-          <p:cNvPr id="214" name="" descr="{&quot;isTemplate&quot;:true,&quot;type&quot;:&quot;text&quot;}"/>
+          <p:cNvPr id="231" name="" descr="{&quot;isTemplate&quot;:true,&quot;type&quot;:&quot;text&quot;}"/>
           <p:cNvSpPr txBox="1"/>
           <p:nvPr/>
         </p:nvSpPr>
@@ -10798,7 +11585,7 @@
       </p:sp>
       <p:sp>
         <p:nvSpPr>
-          <p:cNvPr id="215" name="" descr="{&quot;isTemplate&quot;:true,&quot;type&quot;:&quot;text&quot;}"/>
+          <p:cNvPr id="232" name="" descr="{&quot;isTemplate&quot;:true,&quot;type&quot;:&quot;text&quot;}"/>
           <p:cNvSpPr txBox="1"/>
           <p:nvPr/>
         </p:nvSpPr>
@@ -10873,7 +11660,7 @@
       </p:sp>
       <p:sp>
         <p:nvSpPr>
-          <p:cNvPr id="216" name="" descr="{&quot;isTemplate&quot;:true,&quot;type&quot;:&quot;text&quot;}"/>
+          <p:cNvPr id="233" name="" descr="{&quot;isTemplate&quot;:true,&quot;type&quot;:&quot;text&quot;}"/>
           <p:cNvSpPr txBox="1"/>
           <p:nvPr/>
         </p:nvSpPr>
@@ -10908,7 +11695,7 @@
       </p:sp>
       <p:sp>
         <p:nvSpPr>
-          <p:cNvPr id="217" name="" descr="{&quot;isTemplate&quot;:true,&quot;type&quot;:&quot;text&quot;}"/>
+          <p:cNvPr id="234" name="" descr="{&quot;isTemplate&quot;:true,&quot;type&quot;:&quot;text&quot;}"/>
           <p:cNvSpPr txBox="1"/>
           <p:nvPr/>
         </p:nvSpPr>
@@ -10943,7 +11730,7 @@
       </p:sp>
       <p:sp>
         <p:nvSpPr>
-          <p:cNvPr id="218" name="" descr="{&quot;isTemplate&quot;:true,&quot;type&quot;:&quot;text&quot;}"/>
+          <p:cNvPr id="235" name="" descr="{&quot;isTemplate&quot;:true,&quot;type&quot;:&quot;text&quot;}"/>
           <p:cNvSpPr txBox="1"/>
           <p:nvPr/>
         </p:nvSpPr>
@@ -11018,7 +11805,7 @@
       </p:sp>
       <p:sp>
         <p:nvSpPr>
-          <p:cNvPr id="219" name="" descr="{&quot;isTemplate&quot;:true,&quot;type&quot;:&quot;text&quot;}"/>
+          <p:cNvPr id="236" name="" descr="{&quot;isTemplate&quot;:true,&quot;type&quot;:&quot;text&quot;}"/>
           <p:cNvSpPr txBox="1"/>
           <p:nvPr/>
         </p:nvSpPr>
@@ -11053,7 +11840,7 @@
       </p:sp>
       <p:sp>
         <p:nvSpPr>
-          <p:cNvPr id="220" name="" descr="{&quot;isTemplate&quot;:true,&quot;type&quot;:&quot;text&quot;}"/>
+          <p:cNvPr id="237" name="" descr="{&quot;isTemplate&quot;:true,&quot;type&quot;:&quot;text&quot;}"/>
           <p:cNvSpPr txBox="1"/>
           <p:nvPr/>
         </p:nvSpPr>
@@ -11088,7 +11875,7 @@
       </p:sp>
       <p:sp>
         <p:nvSpPr>
-          <p:cNvPr id="221" name="" descr="{&quot;isTemplate&quot;:true,&quot;type&quot;:&quot;text&quot;}"/>
+          <p:cNvPr id="238" name="" descr="{&quot;isTemplate&quot;:true,&quot;type&quot;:&quot;text&quot;}"/>
           <p:cNvSpPr txBox="1"/>
           <p:nvPr/>
         </p:nvSpPr>
@@ -11143,7 +11930,7 @@
       </p:sp>
       <p:sp>
         <p:nvSpPr>
-          <p:cNvPr id="222" name=""/>
+          <p:cNvPr id="239" name=""/>
           <p:cNvSpPr/>
           <p:nvPr/>
         </p:nvSpPr>
@@ -11174,7 +11961,7 @@
       </p:sp>
       <p:sp>
         <p:nvSpPr>
-          <p:cNvPr id="223" name="" descr="{&quot;isTemplate&quot;:true,&quot;type&quot;:&quot;text&quot;}"/>
+          <p:cNvPr id="240" name="" descr="{&quot;isTemplate&quot;:true,&quot;type&quot;:&quot;text&quot;}"/>
           <p:cNvSpPr txBox="1"/>
           <p:nvPr/>
         </p:nvSpPr>
@@ -11209,7 +11996,7 @@
       </p:sp>
       <p:sp>
         <p:nvSpPr>
-          <p:cNvPr id="224" name="" descr="{&quot;isTemplate&quot;:true,&quot;type&quot;:&quot;text&quot;}"/>
+          <p:cNvPr id="241" name="" descr="{&quot;isTemplate&quot;:true,&quot;type&quot;:&quot;text&quot;}"/>
           <p:cNvSpPr txBox="1"/>
           <p:nvPr/>
         </p:nvSpPr>
@@ -11244,7 +12031,7 @@
       </p:sp>
       <p:sp>
         <p:nvSpPr>
-          <p:cNvPr id="225" name="" descr="{&quot;isTemplate&quot;:true,&quot;type&quot;:&quot;text&quot;}"/>
+          <p:cNvPr id="242" name="" descr="{&quot;isTemplate&quot;:true,&quot;type&quot;:&quot;text&quot;}"/>
           <p:cNvSpPr txBox="1"/>
           <p:nvPr/>
         </p:nvSpPr>
@@ -11279,7 +12066,7 @@
       </p:sp>
       <p:sp>
         <p:nvSpPr>
-          <p:cNvPr id="226" name="" descr="{&quot;isTemplate&quot;:true,&quot;type&quot;:&quot;text&quot;}"/>
+          <p:cNvPr id="243" name="" descr="{&quot;isTemplate&quot;:true,&quot;type&quot;:&quot;text&quot;}"/>
           <p:cNvSpPr txBox="1"/>
           <p:nvPr/>
         </p:nvSpPr>
@@ -11314,7 +12101,7 @@
       </p:sp>
       <p:sp>
         <p:nvSpPr>
-          <p:cNvPr id="227" name="" descr="{&quot;isTemplate&quot;:true,&quot;type&quot;:&quot;text&quot;}"/>
+          <p:cNvPr id="244" name="" descr="{&quot;isTemplate&quot;:true,&quot;type&quot;:&quot;text&quot;}"/>
           <p:cNvSpPr txBox="1"/>
           <p:nvPr/>
         </p:nvSpPr>
@@ -11349,7 +12136,7 @@
       </p:sp>
       <p:sp>
         <p:nvSpPr>
-          <p:cNvPr id="228" name="" descr="{&quot;isTemplate&quot;:true,&quot;type&quot;:&quot;text&quot;}"/>
+          <p:cNvPr id="245" name="" descr="{&quot;isTemplate&quot;:true,&quot;type&quot;:&quot;text&quot;}"/>
           <p:cNvSpPr txBox="1"/>
           <p:nvPr/>
         </p:nvSpPr>
@@ -11384,7 +12171,7 @@
       </p:sp>
       <p:sp>
         <p:nvSpPr>
-          <p:cNvPr id="229" name="" descr="{&quot;isTemplate&quot;:true,&quot;type&quot;:&quot;text&quot;}"/>
+          <p:cNvPr id="246" name="" descr="{&quot;isTemplate&quot;:true,&quot;type&quot;:&quot;text&quot;}"/>
           <p:cNvSpPr txBox="1"/>
           <p:nvPr/>
         </p:nvSpPr>
@@ -11419,7 +12206,7 @@
       </p:sp>
       <p:sp>
         <p:nvSpPr>
-          <p:cNvPr id="230" name="" descr="{&quot;isTemplate&quot;:true,&quot;type&quot;:&quot;text&quot;}"/>
+          <p:cNvPr id="247" name="" descr="{&quot;isTemplate&quot;:true,&quot;type&quot;:&quot;text&quot;}"/>
           <p:cNvSpPr txBox="1"/>
           <p:nvPr/>
         </p:nvSpPr>
@@ -11454,7 +12241,7 @@
       </p:sp>
       <p:sp>
         <p:nvSpPr>
-          <p:cNvPr id="231" name="" descr="{&quot;isTemplate&quot;:true,&quot;type&quot;:&quot;text&quot;}"/>
+          <p:cNvPr id="248" name="" descr="{&quot;isTemplate&quot;:true,&quot;type&quot;:&quot;text&quot;}"/>
           <p:cNvSpPr txBox="1"/>
           <p:nvPr/>
         </p:nvSpPr>
@@ -11509,7 +12296,7 @@
       </p:sp>
       <p:sp>
         <p:nvSpPr>
-          <p:cNvPr id="232" name=""/>
+          <p:cNvPr id="249" name=""/>
           <p:cNvSpPr/>
           <p:nvPr/>
         </p:nvSpPr>
@@ -11549,7 +12336,7 @@
       </p:sp>
       <p:sp>
         <p:nvSpPr>
-          <p:cNvPr id="233" name=""/>
+          <p:cNvPr id="250" name=""/>
           <p:cNvSpPr/>
           <p:nvPr/>
         </p:nvSpPr>
@@ -11575,7 +12362,7 @@
       </p:sp>
       <p:sp>
         <p:nvSpPr>
-          <p:cNvPr id="234" name="" descr="{&quot;isTemplate&quot;:true,&quot;type&quot;:&quot;text&quot;}"/>
+          <p:cNvPr id="251" name="" descr="{&quot;isTemplate&quot;:true,&quot;type&quot;:&quot;text&quot;}"/>
           <p:cNvSpPr txBox="1"/>
           <p:nvPr/>
         </p:nvSpPr>
@@ -11628,7 +12415,7 @@
       </p:sp>
       <p:sp>
         <p:nvSpPr>
-          <p:cNvPr id="235" name="" descr="{&quot;isTemplate&quot;:true,&quot;type&quot;:&quot;text&quot;}"/>
+          <p:cNvPr id="252" name="" descr="{&quot;isTemplate&quot;:true,&quot;type&quot;:&quot;text&quot;}"/>
           <p:cNvSpPr txBox="1"/>
           <p:nvPr/>
         </p:nvSpPr>
@@ -11693,7 +12480,7 @@
       </p:sp>
       <p:sp>
         <p:nvSpPr>
-          <p:cNvPr id="236" name="" descr="{&quot;isTemplate&quot;:true,&quot;type&quot;:&quot;text&quot;}"/>
+          <p:cNvPr id="253" name="" descr="{&quot;isTemplate&quot;:true,&quot;type&quot;:&quot;text&quot;}"/>
           <p:cNvSpPr txBox="1"/>
           <p:nvPr/>
         </p:nvSpPr>
@@ -11736,7 +12523,7 @@
   <p:cSld>
     <p:spTree>
       <p:nvGrpSpPr>
-        <p:cNvPr id="237" name="" descr="&lt;Slide style={{ width: 1280, height: 720, background: '#0B0D14', padding: '56px 72px', flexDirection: 'column' }}&gt;&#13;&#10;  &lt;Box style={{ height: 96, flexDirection: 'row', justifyContent: 'space-between', alignItems: 'flex-start' }}&gt;&#13;&#10;    &lt;Box style={{ flexDirection: 'column', gap: 8 }}&gt;&#13;&#10;      &lt;Text style={{ fontSize: 34, fontWeight: 'bold', color: '#F2F4FF' }}&gt;AI 不会算错账，因为它不算账&lt;/Text&gt;&#13;&#10;      &lt;Text style={{ fontSize: 15, color: '#8A90A6' }}&gt;所有数字只有一个实现，模型只负责理解问题与组织语言&lt;/Text&gt;&#13;&#10;    &lt;/Box&gt;&#13;&#10;    &lt;Text style={{ fontSize: 13, color: '#4A5064', letterSpacing: 2 }}&gt;AI 掌柜&lt;/Text&gt;&#13;&#10;  &lt;/Box&gt;&#13;&#10;  &lt;Box style={{ flex: 1, paddingTop: 8 }}&gt;&#13;&#10;    &lt;Box style={{ flexDirection: 'row', gap: 28, alignItems: 'center' }}&gt;&#13;&#10;      &lt;Box style={{ flexDirection: 'column', width: 380 }}&gt;&#13;&#10;        &lt;Text style={{ fontSize: 13, color: '#8A90A6', letterSpacing: 1 }}&gt;昨日营收（元）&lt;/Text&gt;&#13;&#10;        &lt;Text style={{ fontSize: 68, fontWeight: 'bold', color: '#F2F4FF', letterSpacing: -2 }}&gt;6,029.65&lt;/Text&gt;&#13;&#10;        &lt;Text style={{ fontSize: 13, color: '#8A90A6', marginTop: 6 }}&gt;同星期基线 8,024.45 · 低 24.8%&lt;/Text&gt;&#13;&#10;      &lt;/Box&gt;&#13;&#10;      &lt;Box style={{ flex: 1, flexDirection: 'column', gap: 10 }}&gt;&#13;&#10;        &lt;Text style={{ fontSize: 13, color: '#8A90A6' }}&gt;这个数字出现在三个地方，必须完全相等&lt;/Text&gt;&#13;&#10;        &lt;Box style={{ flexDirection: 'row', gap: 12 }}&gt;&#13;&#10;          &lt;Box style={{ flex: 1, background: '#141826', border: '1px solid #242A3D', borderRadius: 10, padding: 16 }}&gt;&#13;&#10;            &lt;Text style={{ fontSize: 15, color: '#F2F4FF' }}&gt;AI 驾驶舱&lt;/Text&gt;&#13;&#10;            &lt;Text style={{ fontSize: 12, color: '#8A90A6', marginTop: 6 }}&gt;KPI 卡片&lt;/Text&gt;&#13;&#10;          &lt;/Box&gt;&#13;&#10;          &lt;Box style={{ flex: 1, background: '#141826', border: '1px solid #242A3D', borderRadius: 10, padding: 16 }}&gt;&#13;&#10;            &lt;Text style={{ fontSize: 15, color: '#F2F4FF' }}&gt;营收报表&lt;/Text&gt;&#13;&#10;            &lt;Text style={{ fontSize: 12, color: '#8A90A6', marginTop: 6 }}&gt;按日汇总&lt;/Text&gt;&#13;&#10;          &lt;/Box&gt;&#13;&#10;          &lt;Box style={{ flex: 1, background: '#141826', border: '1px solid #242A3D', borderRadius: 10, padding: 16 }}&gt;&#13;&#10;            &lt;Text style={{ fontSize: 15, color: '#F2F4FF' }}&gt;AI 问答&lt;/Text&gt;&#13;&#10;            &lt;Text style={{ fontSize: 12, color: '#8A90A6', marginTop: 6 }}&gt;SQL 结果&lt;/Text&gt;&#13;&#10;          &lt;/Box&gt;&#13;&#10;        &lt;/Box&gt;&#13;&#10;      &lt;/Box&gt;&#13;&#10;    &lt;/Box&gt;&#13;&#10;    &lt;Box style={{ marginTop: 26, background: '#12141F', border: '1px solid #242A3D', borderRadius: 12, padding: 22 }}&gt;&#13;&#10;      &lt;Text style={{ fontSize: 12, color: '#4A5064', letterSpacing: 1 }}&gt;analytics / metrics.py&lt;/Text&gt;&#13;&#10;      &lt;Text style={{ fontSize: 14, color: '#8A90A6', marginTop: 10, lineHeight: 1.9 }}&gt;&#13;&#10;        def q_kpi(conn, d1, d2):&amp;nbsp;&amp;nbsp;&lt;span style={{ color: '#6C6CF5' }}&gt;# 全系统唯一的营收口径&lt;/span&gt;&lt;br /&gt;&#13;&#10;        &amp;nbsp;&amp;nbsp;revenue = SUM(final_amount) WHERE status='settled'&lt;br /&gt;&#13;&#10;        &amp;nbsp;&amp;nbsp;return dict(revenue=money(revenue), margin_rate=...)&#13;&#10;      &lt;/Text&gt;&#13;&#10;    &lt;/Box&gt;&#13;&#10;    &lt;Text style={{ fontSize: 14, color: '#8A90A6', marginTop: 16 }}&gt;数字由 SQL 算出，模型只写解读；结论必须引用 evidence，点开能看到原始 SQL。&lt;/Text&gt;&#13;&#10;  &lt;/Box&gt;&#13;&#10;  &lt;Box style={{ height: 36, flexDirection: 'row', justifyContent: 'space-between', alignItems: 'flex-end' }}&gt;&#13;&#10;    &lt;Text style={{ fontSize: 12, color: '#4A5064' }}&gt;2026 武汉 1024 · 产业应用赛道&lt;/Text&gt;&#13;&#10;    &lt;Text style={{ fontSize: 12, color: '#4A5064' }}&gt;08 / 12&lt;/Text&gt;&#13;&#10;  &lt;/Box&gt;&#13;&#10;&lt;/Slide&gt;"/>
+        <p:cNvPr id="254" name="" descr="&lt;Slide style={{ width: 1280, height: 720, background: '#0B0D14', padding: '56px 72px', flexDirection: 'column' }}&gt;&#13;&#10;  &lt;Box style={{ height: 96, flexDirection: 'row', justifyContent: 'space-between', alignItems: 'flex-start' }}&gt;&#13;&#10;    &lt;Box style={{ flexDirection: 'column', gap: 8 }}&gt;&#13;&#10;      &lt;Text style={{ fontSize: 34, fontWeight: 'bold', color: '#F2F4FF' }}&gt;AI 不会算错账，因为它不算账&lt;/Text&gt;&#13;&#10;      &lt;Text style={{ fontSize: 15, color: '#8A90A6' }}&gt;所有数字只有一个实现，模型只负责理解问题与组织语言&lt;/Text&gt;&#13;&#10;    &lt;/Box&gt;&#13;&#10;    &lt;Text style={{ fontSize: 13, color: '#4A5064', letterSpacing: 2 }}&gt;AI 掌柜&lt;/Text&gt;&#13;&#10;  &lt;/Box&gt;&#13;&#10;  &lt;Box style={{ flex: 1, paddingTop: 8 }}&gt;&#13;&#10;    &lt;Box style={{ flexDirection: 'row', gap: 28, alignItems: 'center' }}&gt;&#13;&#10;      &lt;Box style={{ flexDirection: 'column', width: 380 }}&gt;&#13;&#10;        &lt;Text style={{ fontSize: 13, color: '#8A90A6', letterSpacing: 1 }}&gt;昨日营收（元）&lt;/Text&gt;&#13;&#10;        &lt;Text style={{ fontSize: 68, fontWeight: 'bold', color: '#F2F4FF', letterSpacing: -2 }}&gt;6,029.65&lt;/Text&gt;&#13;&#10;        &lt;Text style={{ fontSize: 13, color: '#8A90A6', marginTop: 6 }}&gt;同星期基线 8,024.45 · 低 24.8%&lt;/Text&gt;&#13;&#10;      &lt;/Box&gt;&#13;&#10;      &lt;Box style={{ flex: 1, flexDirection: 'column', gap: 10 }}&gt;&#13;&#10;        &lt;Text style={{ fontSize: 13, color: '#8A90A6' }}&gt;这个数字出现在三个地方，必须完全相等&lt;/Text&gt;&#13;&#10;        &lt;Box style={{ flexDirection: 'row', gap: 12 }}&gt;&#13;&#10;          &lt;Box style={{ flex: 1, background: '#141826', border: '1px solid #242A3D', borderRadius: 10, padding: 16 }}&gt;&#13;&#10;            &lt;Text style={{ fontSize: 15, color: '#F2F4FF' }}&gt;AI 驾驶舱&lt;/Text&gt;&#13;&#10;            &lt;Text style={{ fontSize: 12, color: '#8A90A6', marginTop: 6 }}&gt;KPI 卡片&lt;/Text&gt;&#13;&#10;          &lt;/Box&gt;&#13;&#10;          &lt;Box style={{ flex: 1, background: '#141826', border: '1px solid #242A3D', borderRadius: 10, padding: 16 }}&gt;&#13;&#10;            &lt;Text style={{ fontSize: 15, color: '#F2F4FF' }}&gt;营收报表&lt;/Text&gt;&#13;&#10;            &lt;Text style={{ fontSize: 12, color: '#8A90A6', marginTop: 6 }}&gt;按日汇总&lt;/Text&gt;&#13;&#10;          &lt;/Box&gt;&#13;&#10;          &lt;Box style={{ flex: 1, background: '#141826', border: '1px solid #242A3D', borderRadius: 10, padding: 16 }}&gt;&#13;&#10;            &lt;Text style={{ fontSize: 15, color: '#F2F4FF' }}&gt;AI 问答&lt;/Text&gt;&#13;&#10;            &lt;Text style={{ fontSize: 12, color: '#8A90A6', marginTop: 6 }}&gt;SQL 结果&lt;/Text&gt;&#13;&#10;          &lt;/Box&gt;&#13;&#10;        &lt;/Box&gt;&#13;&#10;      &lt;/Box&gt;&#13;&#10;    &lt;/Box&gt;&#13;&#10;    &lt;Box style={{ marginTop: 26, background: '#12141F', border: '1px solid #242A3D', borderRadius: 12, padding: 22 }}&gt;&#13;&#10;      &lt;Text style={{ fontSize: 12, color: '#4A5064', letterSpacing: 1 }}&gt;analytics / metrics.py&lt;/Text&gt;&#13;&#10;      &lt;Text style={{ fontSize: 14, color: '#8A90A6', marginTop: 10, lineHeight: 1.9 }}&gt;&#13;&#10;        def q_kpi(conn, d1, d2):&amp;nbsp;&amp;nbsp;&lt;span style={{ color: '#6C6CF5' }}&gt;# 全系统唯一的营收口径&lt;/span&gt;&lt;br /&gt;&#13;&#10;        &amp;nbsp;&amp;nbsp;revenue = SUM(final_amount) WHERE status='settled'&lt;br /&gt;&#13;&#10;        &amp;nbsp;&amp;nbsp;return dict(revenue=money(revenue), margin_rate=...)&#13;&#10;      &lt;/Text&gt;&#13;&#10;    &lt;/Box&gt;&#13;&#10;    &lt;Text style={{ fontSize: 14, color: '#8A90A6', marginTop: 16 }}&gt;数字由 SQL 算出，模型只写解读；结论必须引用 evidence，点开能看到原始 SQL。&lt;/Text&gt;&#13;&#10;  &lt;/Box&gt;&#13;&#10;  &lt;Box style={{ height: 36, flexDirection: 'row', justifyContent: 'space-between', alignItems: 'flex-end' }}&gt;&#13;&#10;    &lt;Text style={{ fontSize: 12, color: '#4A5064' }}&gt;2026 武汉 1024 · 产业应用赛道&lt;/Text&gt;&#13;&#10;    &lt;Text style={{ fontSize: 12, color: '#4A5064' }}&gt;08 / 12&lt;/Text&gt;&#13;&#10;  &lt;/Box&gt;&#13;&#10;&lt;/Slide&gt;"/>
         <p:cNvGrpSpPr/>
         <p:nvPr/>
       </p:nvGrpSpPr>
@@ -11750,7 +12537,7 @@
       </p:grpSpPr>
       <p:sp>
         <p:nvSpPr>
-          <p:cNvPr id="238" name=""/>
+          <p:cNvPr id="255" name=""/>
           <p:cNvSpPr/>
           <p:nvPr/>
         </p:nvSpPr>
@@ -11774,7 +12561,7 @@
       </p:sp>
       <p:sp>
         <p:nvSpPr>
-          <p:cNvPr id="239" name="" descr="{&quot;isTemplate&quot;:true,&quot;type&quot;:&quot;text&quot;}"/>
+          <p:cNvPr id="256" name="" descr="{&quot;isTemplate&quot;:true,&quot;type&quot;:&quot;text&quot;}"/>
           <p:cNvSpPr txBox="1"/>
           <p:nvPr/>
         </p:nvSpPr>
@@ -11819,7 +12606,7 @@
       </p:sp>
       <p:sp>
         <p:nvSpPr>
-          <p:cNvPr id="240" name="" descr="{&quot;isTemplate&quot;:true,&quot;type&quot;:&quot;text&quot;}"/>
+          <p:cNvPr id="257" name="" descr="{&quot;isTemplate&quot;:true,&quot;type&quot;:&quot;text&quot;}"/>
           <p:cNvSpPr txBox="1"/>
           <p:nvPr/>
         </p:nvSpPr>
@@ -11854,7 +12641,7 @@
       </p:sp>
       <p:sp>
         <p:nvSpPr>
-          <p:cNvPr id="241" name="" descr="{&quot;isTemplate&quot;:true,&quot;type&quot;:&quot;text&quot;}"/>
+          <p:cNvPr id="258" name="" descr="{&quot;isTemplate&quot;:true,&quot;type&quot;:&quot;text&quot;}"/>
           <p:cNvSpPr txBox="1"/>
           <p:nvPr/>
         </p:nvSpPr>
@@ -11899,7 +12686,7 @@
       </p:sp>
       <p:sp>
         <p:nvSpPr>
-          <p:cNvPr id="242" name="" descr="{&quot;isTemplate&quot;:true,&quot;type&quot;:&quot;text&quot;}"/>
+          <p:cNvPr id="259" name="" descr="{&quot;isTemplate&quot;:true,&quot;type&quot;:&quot;text&quot;}"/>
           <p:cNvSpPr txBox="1"/>
           <p:nvPr/>
         </p:nvSpPr>
@@ -11934,7 +12721,7 @@
       </p:sp>
       <p:sp>
         <p:nvSpPr>
-          <p:cNvPr id="243" name="" descr="{&quot;isTemplate&quot;:true,&quot;type&quot;:&quot;text&quot;}"/>
+          <p:cNvPr id="260" name="" descr="{&quot;isTemplate&quot;:true,&quot;type&quot;:&quot;text&quot;}"/>
           <p:cNvSpPr txBox="1"/>
           <p:nvPr/>
         </p:nvSpPr>
@@ -11969,7 +12756,7 @@
       </p:sp>
       <p:sp>
         <p:nvSpPr>
-          <p:cNvPr id="244" name="" descr="{&quot;isTemplate&quot;:true,&quot;type&quot;:&quot;text&quot;}"/>
+          <p:cNvPr id="261" name="" descr="{&quot;isTemplate&quot;:true,&quot;type&quot;:&quot;text&quot;}"/>
           <p:cNvSpPr txBox="1"/>
           <p:nvPr/>
         </p:nvSpPr>
@@ -12034,7 +12821,7 @@
       </p:sp>
       <p:sp>
         <p:nvSpPr>
-          <p:cNvPr id="245" name="" descr="{&quot;isTemplate&quot;:true,&quot;type&quot;:&quot;text&quot;}"/>
+          <p:cNvPr id="262" name="" descr="{&quot;isTemplate&quot;:true,&quot;type&quot;:&quot;text&quot;}"/>
           <p:cNvSpPr txBox="1"/>
           <p:nvPr/>
         </p:nvSpPr>
@@ -12069,7 +12856,7 @@
       </p:sp>
       <p:sp>
         <p:nvSpPr>
-          <p:cNvPr id="246" name=""/>
+          <p:cNvPr id="263" name=""/>
           <p:cNvSpPr/>
           <p:nvPr/>
         </p:nvSpPr>
@@ -12100,7 +12887,7 @@
       </p:sp>
       <p:sp>
         <p:nvSpPr>
-          <p:cNvPr id="247" name="" descr="{&quot;isTemplate&quot;:true,&quot;type&quot;:&quot;text&quot;}"/>
+          <p:cNvPr id="264" name="" descr="{&quot;isTemplate&quot;:true,&quot;type&quot;:&quot;text&quot;}"/>
           <p:cNvSpPr txBox="1"/>
           <p:nvPr/>
         </p:nvSpPr>
@@ -12145,7 +12932,7 @@
       </p:sp>
       <p:sp>
         <p:nvSpPr>
-          <p:cNvPr id="248" name="" descr="{&quot;isTemplate&quot;:true,&quot;type&quot;:&quot;text&quot;}"/>
+          <p:cNvPr id="265" name="" descr="{&quot;isTemplate&quot;:true,&quot;type&quot;:&quot;text&quot;}"/>
           <p:cNvSpPr txBox="1"/>
           <p:nvPr/>
         </p:nvSpPr>
@@ -12190,7 +12977,7 @@
       </p:sp>
       <p:sp>
         <p:nvSpPr>
-          <p:cNvPr id="249" name=""/>
+          <p:cNvPr id="266" name=""/>
           <p:cNvSpPr/>
           <p:nvPr/>
         </p:nvSpPr>
@@ -12221,7 +13008,7 @@
       </p:sp>
       <p:sp>
         <p:nvSpPr>
-          <p:cNvPr id="250" name="" descr="{&quot;isTemplate&quot;:true,&quot;type&quot;:&quot;text&quot;}"/>
+          <p:cNvPr id="267" name="" descr="{&quot;isTemplate&quot;:true,&quot;type&quot;:&quot;text&quot;}"/>
           <p:cNvSpPr txBox="1"/>
           <p:nvPr/>
         </p:nvSpPr>
@@ -12256,7 +13043,7 @@
       </p:sp>
       <p:sp>
         <p:nvSpPr>
-          <p:cNvPr id="251" name="" descr="{&quot;isTemplate&quot;:true,&quot;type&quot;:&quot;text&quot;}"/>
+          <p:cNvPr id="268" name="" descr="{&quot;isTemplate&quot;:true,&quot;type&quot;:&quot;text&quot;}"/>
           <p:cNvSpPr txBox="1"/>
           <p:nvPr/>
         </p:nvSpPr>
@@ -12291,7 +13078,7 @@
       </p:sp>
       <p:sp>
         <p:nvSpPr>
-          <p:cNvPr id="252" name=""/>
+          <p:cNvPr id="269" name=""/>
           <p:cNvSpPr/>
           <p:nvPr/>
         </p:nvSpPr>
@@ -12322,7 +13109,7 @@
       </p:sp>
       <p:sp>
         <p:nvSpPr>
-          <p:cNvPr id="253" name="" descr="{&quot;isTemplate&quot;:true,&quot;type&quot;:&quot;text&quot;}"/>
+          <p:cNvPr id="270" name="" descr="{&quot;isTemplate&quot;:true,&quot;type&quot;:&quot;text&quot;}"/>
           <p:cNvSpPr txBox="1"/>
           <p:nvPr/>
         </p:nvSpPr>
@@ -12367,7 +13154,7 @@
       </p:sp>
       <p:sp>
         <p:nvSpPr>
-          <p:cNvPr id="254" name="" descr="{&quot;isTemplate&quot;:true,&quot;type&quot;:&quot;text&quot;}"/>
+          <p:cNvPr id="271" name="" descr="{&quot;isTemplate&quot;:true,&quot;type&quot;:&quot;text&quot;}"/>
           <p:cNvSpPr txBox="1"/>
           <p:nvPr/>
         </p:nvSpPr>
@@ -12412,7 +13199,7 @@
       </p:sp>
       <p:sp>
         <p:nvSpPr>
-          <p:cNvPr id="255" name=""/>
+          <p:cNvPr id="272" name=""/>
           <p:cNvSpPr/>
           <p:nvPr/>
         </p:nvSpPr>
@@ -12443,7 +13230,7 @@
       </p:sp>
       <p:sp>
         <p:nvSpPr>
-          <p:cNvPr id="256" name="" descr="{&quot;isTemplate&quot;:true,&quot;type&quot;:&quot;text&quot;}"/>
+          <p:cNvPr id="273" name="" descr="{&quot;isTemplate&quot;:true,&quot;type&quot;:&quot;text&quot;}"/>
           <p:cNvSpPr txBox="1"/>
           <p:nvPr/>
         </p:nvSpPr>
@@ -12478,7 +13265,7 @@
       </p:sp>
       <p:sp>
         <p:nvSpPr>
-          <p:cNvPr id="257" name="" descr="{&quot;isTemplate&quot;:true,&quot;type&quot;:&quot;text&quot;}"/>
+          <p:cNvPr id="274" name="" descr="{&quot;isTemplate&quot;:true,&quot;type&quot;:&quot;text&quot;}"/>
           <p:cNvSpPr txBox="1"/>
           <p:nvPr/>
         </p:nvSpPr>
@@ -12569,7 +13356,7 @@
       </p:sp>
       <p:sp>
         <p:nvSpPr>
-          <p:cNvPr id="258" name="" descr="{&quot;isTemplate&quot;:true,&quot;type&quot;:&quot;text&quot;}"/>
+          <p:cNvPr id="275" name="" descr="{&quot;isTemplate&quot;:true,&quot;type&quot;:&quot;text&quot;}"/>
           <p:cNvSpPr txBox="1"/>
           <p:nvPr/>
         </p:nvSpPr>
@@ -12664,7 +13451,7 @@
       </p:sp>
       <p:sp>
         <p:nvSpPr>
-          <p:cNvPr id="259" name="" descr="{&quot;isTemplate&quot;:true,&quot;type&quot;:&quot;text&quot;}"/>
+          <p:cNvPr id="276" name="" descr="{&quot;isTemplate&quot;:true,&quot;type&quot;:&quot;text&quot;}"/>
           <p:cNvSpPr txBox="1"/>
           <p:nvPr/>
         </p:nvSpPr>
@@ -12729,7 +13516,7 @@
       </p:sp>
       <p:sp>
         <p:nvSpPr>
-          <p:cNvPr id="260" name="" descr="{&quot;isTemplate&quot;:true,&quot;type&quot;:&quot;text&quot;}"/>
+          <p:cNvPr id="277" name="" descr="{&quot;isTemplate&quot;:true,&quot;type&quot;:&quot;text&quot;}"/>
           <p:cNvSpPr txBox="1"/>
           <p:nvPr/>
         </p:nvSpPr>
@@ -12772,7 +13559,7 @@
   <p:cSld>
     <p:spTree>
       <p:nvGrpSpPr>
-        <p:cNvPr id="261" name="" descr="&lt;Slide style={{ width: 1280, height: 720, background: '#0B0D14', padding: '56px 72px', flexDirection: 'column' }}&gt;&#13;&#10;  &lt;Box style={{ height: 96, flexDirection: 'row', justifyContent: 'space-between', alignItems: 'flex-start' }}&gt;&#13;&#10;    &lt;Box style={{ flexDirection: 'column', gap: 8 }}&gt;&#13;&#10;      &lt;Text style={{ fontSize: 34, fontWeight: 'bold', color: '#F2F4FF' }}&gt;先算清代价，再谈智能&lt;/Text&gt;&#13;&#10;      &lt;Text style={{ fontSize: 15, color: '#8A90A6' }}&gt;左边是它在这套 180 天数据里真找出来的，右边是按建议执行后的测算&lt;/Text&gt;&#13;&#10;    &lt;/Box&gt;&#13;&#10;    &lt;Text style={{ fontSize: 13, color: '#4A5064', letterSpacing: 2 }}&gt;AI 掌柜&lt;/Text&gt;&#13;&#10;  &lt;/Box&gt;&#13;&#10;  &lt;Box style={{ flex: 1, paddingTop: 8 }}&gt;&#13;&#10;    &lt;Box style={{ flexDirection: 'row', gap: 24 }}&gt;&#13;&#10;      &lt;Box style={{ flex: 1.15, flexDirection: 'column' }}&gt;&#13;&#10;        &lt;Text style={{ fontSize: 13, color: '#8A90A6', letterSpacing: 1 }}&gt;实测 · 系统自己发现的五件事&lt;/Text&gt;&#13;&#10;        &lt;Box style={{ marginTop: 14, flexDirection: 'column', gap: 0 }}&gt;&#13;&#10;          &lt;Box style={{ paddingTop: 12, paddingBottom: 12, borderTop: '1px solid #242A3D', flexDirection: 'row', alignItems: 'baseline' }}&gt;&#13;&#10;            &lt;Text style={{ fontSize: 26, fontWeight: 'bold', color: '#6C6CF5', width: 96 }}&gt;11.1%&lt;/Text&gt;&#13;&#10;            &lt;Text style={{ fontSize: 14, color: '#F2F4FF' }}&gt;近 7 天折扣率，比前 30 天的 8.8% 高 2.3 个点&lt;/Text&gt;&#13;&#10;          &lt;/Box&gt;&#13;&#10;          &lt;Box style={{ paddingTop: 12, paddingBottom: 12, borderTop: '1px solid #242A3D', flexDirection: 'row', alignItems: 'baseline' }}&gt;&#13;&#10;            &lt;Text style={{ fontSize: 26, fontWeight: 'bold', color: '#6C6CF5', width: 96 }}&gt;1,899&lt;/Text&gt;&#13;&#10;            &lt;Text style={{ fontSize: 14, color: '#F2F4FF' }}&gt;元 · 按原折扣水平本可少让的金额&lt;/Text&gt;&#13;&#10;          &lt;/Box&gt;&#13;&#10;          &lt;Box style={{ paddingTop: 12, paddingBottom: 12, borderTop: '1px solid #242A3D', flexDirection: 'row', alignItems: 'baseline' }}&gt;&#13;&#10;            &lt;Text style={{ fontSize: 26, fontWeight: 'bold', color: '#6C6CF5', width: 96 }}&gt;19 道&lt;/Text&gt;&#13;&#10;            &lt;Text style={{ fontSize: 14, color: '#F2F4FF' }}&gt;菜连续 3 天 0 销量，占在售 9.2%&lt;/Text&gt;&#13;&#10;          &lt;/Box&gt;&#13;&#10;          &lt;Box style={{ paddingTop: 12, paddingBottom: 12, borderTop: '1px solid #242A3D', flexDirection: 'row', alignItems: 'baseline' }}&gt;&#13;&#10;            &lt;Text style={{ fontSize: 26, fontWeight: 'bold', color: '#6C6CF5', width: 96 }}&gt;5 种&lt;/Text&gt;&#13;&#10;            &lt;Text style={{ fontSize: 14, color: '#F2F4FF' }}&gt;食材可支撑不足 2 天（基围虾只剩 1.5 天）&lt;/Text&gt;&#13;&#10;          &lt;/Box&gt;&#13;&#10;          &lt;Box style={{ paddingTop: 12, paddingBottom: 12, borderTop: '1px solid #242A3D', borderBottom: '1px solid #242A3D', flexDirection: 'row', alignItems: 'baseline' }}&gt;&#13;&#10;            &lt;Text style={{ fontSize: 26, fontWeight: 'bold', color: '#6C6CF5', width: 96 }}&gt;57.6%&lt;/Text&gt;&#13;&#10;            &lt;Text style={{ fontSize: 14, color: '#F2F4FF' }}&gt;近 30 天毛利率，比目标低 2.4 个点&lt;/Text&gt;&#13;&#10;          &lt;/Box&gt;&#13;&#10;        &lt;/Box&gt;&#13;&#10;      &lt;/Box&gt;&#13;&#10;      &lt;Box style={{ flex: 1, background: '#171A2E', border: '1px solid #6C6CF5', borderRadius: 14, padding: 30, flexDirection: 'column', gap: 18, justifyContent: 'flex-start' }}&gt;&#13;&#10;        &lt;Box style={{ flexDirection: 'column', gap: 6 }}&gt;&#13;&#10;          &lt;Text style={{ fontSize: 13, color: '#6C6CF5', letterSpacing: 1 }}&gt;测算 · 补齐这 2.4 个点&lt;/Text&gt;&#13;&#10;          &lt;Text style={{ fontSize: 56, fontWeight: 'bold', color: '#F2F4FF', letterSpacing: -1 }}&gt;+9.4&lt;span style={{ fontSize: 22 }}&gt; 万/年&lt;/span&gt;&lt;/Text&gt;&#13;&#10;          &lt;Text style={{ fontSize: 13, color: '#8A90A6' }}&gt;近 30 天营收 32.5 万 × 2.4pt × 12 个月&lt;/Text&gt;&#13;&#10;        &lt;/Box&gt;&#13;&#10;        &lt;Box style={{ flexDirection: 'column', gap: 8, marginTop: 6, paddingTop: 16, borderTop: '1px solid #3A3F63' }}&gt;&#13;&#10;          &lt;Text style={{ fontSize: 13, color: '#F2F4FF' }}&gt;怎么补：&lt;/Text&gt;&#13;&#10;          &lt;Text style={{ fontSize: 13, color: '#8A90A6', lineHeight: 1.8 }}&gt;① 3 道瘦狗菜调价 5%~15%&lt;br /&gt;② 19 道滞销菜组套餐或下架&lt;br /&gt;③ 折扣收回 2 个点&lt;/Text&gt;&#13;&#10;        &lt;/Box&gt;&#13;&#10;        &lt;Text style={{ fontSize: 11, color: '#6B6F8A', lineHeight: 1.6, marginTop: 4 }}&gt;&#13;&#10;          左列全部由 SQL 从 180 天数据算出，脚本可复现；右侧为按当前规模的线性测算，不是承诺值。&#13;&#10;        &lt;/Text&gt;&#13;&#10;      &lt;/Box&gt;&#13;&#10;    &lt;/Box&gt;&#13;&#10;  &lt;/Box&gt;&#13;&#10;  &lt;Box style={{ height: 36, flexDirection: 'row', justifyContent: 'space-between', alignItems: 'flex-end' }}&gt;&#13;&#10;    &lt;Text style={{ fontSize: 12, color: '#4A5064' }}&gt;2026 武汉 1024 · 产业应用赛道&lt;/Text&gt;&#13;&#10;    &lt;Text style={{ fontSize: 12, color: '#4A5064' }}&gt;09 / 12&lt;/Text&gt;&#13;&#10;  &lt;/Box&gt;&#13;&#10;&lt;/Slide&gt;"/>
+        <p:cNvPr id="278" name="" descr="&lt;Slide style={{ width: 1280, height: 720, background: '#0B0D14', padding: '56px 72px', flexDirection: 'column' }}&gt;&#13;&#10;  &lt;Box style={{ height: 96, flexDirection: 'row', justifyContent: 'space-between', alignItems: 'flex-start' }}&gt;&#13;&#10;    &lt;Box style={{ flexDirection: 'column', gap: 8 }}&gt;&#13;&#10;      &lt;Text style={{ fontSize: 34, fontWeight: 'bold', color: '#F2F4FF' }}&gt;先算清代价，再谈智能&lt;/Text&gt;&#13;&#10;      &lt;Text style={{ fontSize: 15, color: '#8A90A6' }}&gt;左边是它在这套 180 天数据里真找出来的，右边是按建议执行后的测算&lt;/Text&gt;&#13;&#10;    &lt;/Box&gt;&#13;&#10;    &lt;Text style={{ fontSize: 13, color: '#4A5064', letterSpacing: 2 }}&gt;AI 掌柜&lt;/Text&gt;&#13;&#10;  &lt;/Box&gt;&#13;&#10;  &lt;Box style={{ flex: 1, paddingTop: 8 }}&gt;&#13;&#10;    &lt;Box style={{ flexDirection: 'row', gap: 24 }}&gt;&#13;&#10;      &lt;Box style={{ flex: 1.15, flexDirection: 'column' }}&gt;&#13;&#10;        &lt;Text style={{ fontSize: 13, color: '#8A90A6', letterSpacing: 1 }}&gt;实测 · 系统自己发现的五件事&lt;/Text&gt;&#13;&#10;        &lt;Box style={{ marginTop: 14, flexDirection: 'column', gap: 0 }}&gt;&#13;&#10;          &lt;Box style={{ paddingTop: 12, paddingBottom: 12, borderTop: '1px solid #242A3D', flexDirection: 'row', alignItems: 'baseline' }}&gt;&#13;&#10;            &lt;Text style={{ fontSize: 26, fontWeight: 'bold', color: '#6C6CF5', width: 96 }}&gt;11.1%&lt;/Text&gt;&#13;&#10;            &lt;Text style={{ fontSize: 14, color: '#F2F4FF' }}&gt;近 7 天折扣率，比前 30 天的 8.8% 高 2.3 个点&lt;/Text&gt;&#13;&#10;          &lt;/Box&gt;&#13;&#10;          &lt;Box style={{ paddingTop: 12, paddingBottom: 12, borderTop: '1px solid #242A3D', flexDirection: 'row', alignItems: 'baseline' }}&gt;&#13;&#10;            &lt;Text style={{ fontSize: 26, fontWeight: 'bold', color: '#6C6CF5', width: 96 }}&gt;1,899&lt;/Text&gt;&#13;&#10;            &lt;Text style={{ fontSize: 14, color: '#F2F4FF' }}&gt;元 · 按原折扣水平本可少让的金额&lt;/Text&gt;&#13;&#10;          &lt;/Box&gt;&#13;&#10;          &lt;Box style={{ paddingTop: 12, paddingBottom: 12, borderTop: '1px solid #242A3D', flexDirection: 'row', alignItems: 'baseline' }}&gt;&#13;&#10;            &lt;Text style={{ fontSize: 26, fontWeight: 'bold', color: '#6C6CF5', width: 96 }}&gt;19 道&lt;/Text&gt;&#13;&#10;            &lt;Text style={{ fontSize: 14, color: '#F2F4FF' }}&gt;菜连续 3 天 0 销量，占在售 9.2%&lt;/Text&gt;&#13;&#10;          &lt;/Box&gt;&#13;&#10;          &lt;Box style={{ paddingTop: 12, paddingBottom: 12, borderTop: '1px solid #242A3D', flexDirection: 'row', alignItems: 'baseline' }}&gt;&#13;&#10;            &lt;Text style={{ fontSize: 26, fontWeight: 'bold', color: '#6C6CF5', width: 96 }}&gt;5 种&lt;/Text&gt;&#13;&#10;            &lt;Text style={{ fontSize: 14, color: '#F2F4FF' }}&gt;食材可支撑不足 2 天（基围虾只剩 1.5 天）&lt;/Text&gt;&#13;&#10;          &lt;/Box&gt;&#13;&#10;          &lt;Box style={{ paddingTop: 12, paddingBottom: 12, borderTop: '1px solid #242A3D', borderBottom: '1px solid #242A3D', flexDirection: 'row', alignItems: 'baseline' }}&gt;&#13;&#10;            &lt;Text style={{ fontSize: 26, fontWeight: 'bold', color: '#6C6CF5', width: 96 }}&gt;57.6%&lt;/Text&gt;&#13;&#10;            &lt;Text style={{ fontSize: 14, color: '#F2F4FF' }}&gt;近 30 天毛利率，比目标低 2.4 个点&lt;/Text&gt;&#13;&#10;          &lt;/Box&gt;&#13;&#10;        &lt;/Box&gt;&#13;&#10;      &lt;/Box&gt;&#13;&#10;      &lt;Box style={{ flex: 1, background: '#171A2E', border: '1px solid #6C6CF5', borderRadius: 14, padding: 30, flexDirection: 'column', gap: 18, justifyContent: 'flex-start' }}&gt;&#13;&#10;        &lt;Box style={{ flexDirection: 'column', gap: 6 }}&gt;&#13;&#10;          &lt;Text style={{ fontSize: 13, color: '#6C6CF5', letterSpacing: 1 }}&gt;测算 · 补齐这 2.4 个点&lt;/Text&gt;&#13;&#10;          &lt;Text style={{ fontSize: 56, fontWeight: 'bold', color: '#F2F4FF', letterSpacing: -1 }}&gt;+9.4&lt;span style={{ fontSize: 22 }}&gt; 万/年&lt;/span&gt;&lt;/Text&gt;&#13;&#10;          &lt;Text style={{ fontSize: 13, color: '#8A90A6' }}&gt;近 30 天营收 32.5 万 × 2.4pt × 12 个月&lt;/Text&gt;&#13;&#10;        &lt;/Box&gt;&#13;&#10;        &lt;Box style={{ flexDirection: 'column', gap: 8, marginTop: 6, paddingTop: 16, borderTop: '1px solid #3A3F63' }}&gt;&#13;&#10;          &lt;Text style={{ fontSize: 13, color: '#F2F4FF' }}&gt;怎么补：&lt;/Text&gt;&#13;&#10;          &lt;Text style={{ fontSize: 13, color: '#8A90A6', lineHeight: 1.8 }}&gt;① 3 道瘦狗菜调价 5%~15%&lt;br /&gt;② 19 道滞销菜组套餐或下架&lt;br /&gt;③ 折扣收回 2 个点&lt;/Text&gt;&#13;&#10;        &lt;/Box&gt;&#13;&#10;        &lt;Text style={{ fontSize: 11, color: '#6B6F8A', lineHeight: 1.6, marginTop: 4 }}&gt;&#13;&#10;          左列全部由 SQL 从 180 天数据算出，脚本可复现；右侧为按当前规模的线性测算，不是承诺值。&#13;&#10;        &lt;/Text&gt;&#13;&#10;      &lt;/Box&gt;&#13;&#10;    &lt;/Box&gt;&#13;&#10;  &lt;/Box&gt;&#13;&#10;  &lt;Box style={{ height: 36, flexDirection: 'row', justifyContent: 'space-between', alignItems: 'flex-end' }}&gt;&#13;&#10;    &lt;Text style={{ fontSize: 12, color: '#4A5064' }}&gt;2026 武汉 1024 · 产业应用赛道&lt;/Text&gt;&#13;&#10;    &lt;Text style={{ fontSize: 12, color: '#4A5064' }}&gt;09 / 12&lt;/Text&gt;&#13;&#10;  &lt;/Box&gt;&#13;&#10;&lt;/Slide&gt;"/>
         <p:cNvGrpSpPr/>
         <p:nvPr/>
       </p:nvGrpSpPr>
@@ -12786,7 +13573,7 @@
       </p:grpSpPr>
       <p:sp>
         <p:nvSpPr>
-          <p:cNvPr id="262" name=""/>
+          <p:cNvPr id="279" name=""/>
           <p:cNvSpPr/>
           <p:nvPr/>
         </p:nvSpPr>
@@ -12810,7 +13597,7 @@
       </p:sp>
       <p:sp>
         <p:nvSpPr>
-          <p:cNvPr id="263" name="" descr="{&quot;isTemplate&quot;:true,&quot;type&quot;:&quot;text&quot;}"/>
+          <p:cNvPr id="280" name="" descr="{&quot;isTemplate&quot;:true,&quot;type&quot;:&quot;text&quot;}"/>
           <p:cNvSpPr txBox="1"/>
           <p:nvPr/>
         </p:nvSpPr>
@@ -12845,7 +13632,7 @@
       </p:sp>
       <p:sp>
         <p:nvSpPr>
-          <p:cNvPr id="264" name="" descr="{&quot;isTemplate&quot;:true,&quot;type&quot;:&quot;text&quot;}"/>
+          <p:cNvPr id="281" name="" descr="{&quot;isTemplate&quot;:true,&quot;type&quot;:&quot;text&quot;}"/>
           <p:cNvSpPr txBox="1"/>
           <p:nvPr/>
         </p:nvSpPr>
@@ -12900,7 +13687,7 @@
       </p:sp>
       <p:sp>
         <p:nvSpPr>
-          <p:cNvPr id="265" name="" descr="{&quot;isTemplate&quot;:true,&quot;type&quot;:&quot;text&quot;}"/>
+          <p:cNvPr id="282" name="" descr="{&quot;isTemplate&quot;:true,&quot;type&quot;:&quot;text&quot;}"/>
           <p:cNvSpPr txBox="1"/>
           <p:nvPr/>
         </p:nvSpPr>
@@ -12945,7 +13732,7 @@
       </p:sp>
       <p:sp>
         <p:nvSpPr>
-          <p:cNvPr id="266" name="" descr="{&quot;isTemplate&quot;:true,&quot;type&quot;:&quot;text&quot;}"/>
+          <p:cNvPr id="283" name="" descr="{&quot;isTemplate&quot;:true,&quot;type&quot;:&quot;text&quot;}"/>
           <p:cNvSpPr txBox="1"/>
           <p:nvPr/>
         </p:nvSpPr>
@@ -13000,7 +13787,7 @@
       </p:sp>
       <p:sp>
         <p:nvSpPr>
-          <p:cNvPr id="267" name=""/>
+          <p:cNvPr id="284" name=""/>
           <p:cNvSpPr/>
           <p:nvPr/>
         </p:nvSpPr>
@@ -13040,7 +13827,7 @@
       </p:sp>
       <p:sp>
         <p:nvSpPr>
-          <p:cNvPr id="268" name="" descr="{&quot;isTemplate&quot;:true,&quot;type&quot;:&quot;text&quot;}"/>
+          <p:cNvPr id="285" name="" descr="{&quot;isTemplate&quot;:true,&quot;type&quot;:&quot;text&quot;}"/>
           <p:cNvSpPr txBox="1"/>
           <p:nvPr/>
         </p:nvSpPr>
@@ -13075,7 +13862,7 @@
       </p:sp>
       <p:sp>
         <p:nvSpPr>
-          <p:cNvPr id="269" name="" descr="{&quot;isTemplate&quot;:true,&quot;type&quot;:&quot;text&quot;}"/>
+          <p:cNvPr id="286" name="" descr="{&quot;isTemplate&quot;:true,&quot;type&quot;:&quot;text&quot;}"/>
           <p:cNvSpPr txBox="1"/>
           <p:nvPr/>
         </p:nvSpPr>
@@ -13190,7 +13977,7 @@
       </p:sp>
       <p:sp>
         <p:nvSpPr>
-          <p:cNvPr id="270" name=""/>
+          <p:cNvPr id="287" name=""/>
           <p:cNvSpPr/>
           <p:nvPr/>
         </p:nvSpPr>
@@ -13230,7 +14017,7 @@
       </p:sp>
       <p:sp>
         <p:nvSpPr>
-          <p:cNvPr id="271" name="" descr="{&quot;isTemplate&quot;:true,&quot;type&quot;:&quot;text&quot;}"/>
+          <p:cNvPr id="288" name="" descr="{&quot;isTemplate&quot;:true,&quot;type&quot;:&quot;text&quot;}"/>
           <p:cNvSpPr txBox="1"/>
           <p:nvPr/>
         </p:nvSpPr>
@@ -13265,7 +14052,7 @@
       </p:sp>
       <p:sp>
         <p:nvSpPr>
-          <p:cNvPr id="272" name="" descr="{&quot;isTemplate&quot;:true,&quot;type&quot;:&quot;text&quot;}"/>
+          <p:cNvPr id="289" name="" descr="{&quot;isTemplate&quot;:true,&quot;type&quot;:&quot;text&quot;}"/>
           <p:cNvSpPr txBox="1"/>
           <p:nvPr/>
         </p:nvSpPr>
@@ -13320,7 +14107,7 @@
       </p:sp>
       <p:sp>
         <p:nvSpPr>
-          <p:cNvPr id="273" name=""/>
+          <p:cNvPr id="290" name=""/>
           <p:cNvSpPr/>
           <p:nvPr/>
         </p:nvSpPr>
@@ -13360,7 +14147,7 @@
       </p:sp>
       <p:sp>
         <p:nvSpPr>
-          <p:cNvPr id="274" name="" descr="{&quot;isTemplate&quot;:true,&quot;type&quot;:&quot;text&quot;}"/>
+          <p:cNvPr id="291" name="" descr="{&quot;isTemplate&quot;:true,&quot;type&quot;:&quot;text&quot;}"/>
           <p:cNvSpPr txBox="1"/>
           <p:nvPr/>
         </p:nvSpPr>
@@ -13405,7 +14192,7 @@
       </p:sp>
       <p:sp>
         <p:nvSpPr>
-          <p:cNvPr id="275" name="" descr="{&quot;isTemplate&quot;:true,&quot;type&quot;:&quot;text&quot;}"/>
+          <p:cNvPr id="292" name="" descr="{&quot;isTemplate&quot;:true,&quot;type&quot;:&quot;text&quot;}"/>
           <p:cNvSpPr txBox="1"/>
           <p:nvPr/>
         </p:nvSpPr>
@@ -13490,7 +14277,7 @@
       </p:sp>
       <p:sp>
         <p:nvSpPr>
-          <p:cNvPr id="276" name=""/>
+          <p:cNvPr id="293" name=""/>
           <p:cNvSpPr/>
           <p:nvPr/>
         </p:nvSpPr>
@@ -13530,7 +14317,7 @@
       </p:sp>
       <p:sp>
         <p:nvSpPr>
-          <p:cNvPr id="277" name="" descr="{&quot;isTemplate&quot;:true,&quot;type&quot;:&quot;text&quot;}"/>
+          <p:cNvPr id="294" name="" descr="{&quot;isTemplate&quot;:true,&quot;type&quot;:&quot;text&quot;}"/>
           <p:cNvSpPr txBox="1"/>
           <p:nvPr/>
         </p:nvSpPr>
@@ -13575,7 +14362,7 @@
       </p:sp>
       <p:sp>
         <p:nvSpPr>
-          <p:cNvPr id="278" name="" descr="{&quot;isTemplate&quot;:true,&quot;type&quot;:&quot;text&quot;}"/>
+          <p:cNvPr id="295" name="" descr="{&quot;isTemplate&quot;:true,&quot;type&quot;:&quot;text&quot;}"/>
           <p:cNvSpPr txBox="1"/>
           <p:nvPr/>
         </p:nvSpPr>
@@ -13650,7 +14437,7 @@
       </p:sp>
       <p:sp>
         <p:nvSpPr>
-          <p:cNvPr id="279" name=""/>
+          <p:cNvPr id="296" name=""/>
           <p:cNvSpPr/>
           <p:nvPr/>
         </p:nvSpPr>
@@ -13690,7 +14477,7 @@
       </p:sp>
       <p:sp>
         <p:nvSpPr>
-          <p:cNvPr id="280" name=""/>
+          <p:cNvPr id="297" name=""/>
           <p:cNvSpPr/>
           <p:nvPr/>
         </p:nvSpPr>
@@ -13730,7 +14517,7 @@
       </p:sp>
       <p:sp>
         <p:nvSpPr>
-          <p:cNvPr id="281" name="" descr="{&quot;isTemplate&quot;:true,&quot;type&quot;:&quot;text&quot;}"/>
+          <p:cNvPr id="298" name="" descr="{&quot;isTemplate&quot;:true,&quot;type&quot;:&quot;text&quot;}"/>
           <p:cNvSpPr txBox="1"/>
           <p:nvPr/>
         </p:nvSpPr>
@@ -13765,7 +14552,7 @@
       </p:sp>
       <p:sp>
         <p:nvSpPr>
-          <p:cNvPr id="282" name="" descr="{&quot;isTemplate&quot;:true,&quot;type&quot;:&quot;text&quot;}"/>
+          <p:cNvPr id="299" name="" descr="{&quot;isTemplate&quot;:true,&quot;type&quot;:&quot;text&quot;}"/>
           <p:cNvSpPr txBox="1"/>
           <p:nvPr/>
         </p:nvSpPr>
@@ -13840,7 +14627,7 @@
       </p:sp>
       <p:sp>
         <p:nvSpPr>
-          <p:cNvPr id="283" name=""/>
+          <p:cNvPr id="300" name=""/>
           <p:cNvSpPr/>
           <p:nvPr/>
         </p:nvSpPr>
@@ -13871,7 +14658,7 @@
       </p:sp>
       <p:sp>
         <p:nvSpPr>
-          <p:cNvPr id="284" name="" descr="{&quot;isTemplate&quot;:true,&quot;type&quot;:&quot;text&quot;}"/>
+          <p:cNvPr id="301" name="" descr="{&quot;isTemplate&quot;:true,&quot;type&quot;:&quot;text&quot;}"/>
           <p:cNvSpPr txBox="1"/>
           <p:nvPr/>
         </p:nvSpPr>
@@ -13946,7 +14733,7 @@
       </p:sp>
       <p:sp>
         <p:nvSpPr>
-          <p:cNvPr id="285" name="" descr="{&quot;isTemplate&quot;:true,&quot;type&quot;:&quot;text&quot;}"/>
+          <p:cNvPr id="302" name="" descr="{&quot;isTemplate&quot;:true,&quot;type&quot;:&quot;text&quot;}"/>
           <p:cNvSpPr txBox="1"/>
           <p:nvPr/>
         </p:nvSpPr>
@@ -14021,7 +14808,7 @@
       </p:sp>
       <p:sp>
         <p:nvSpPr>
-          <p:cNvPr id="286" name="" descr="{&quot;isTemplate&quot;:true,&quot;type&quot;:&quot;text&quot;}"/>
+          <p:cNvPr id="303" name="" descr="{&quot;isTemplate&quot;:true,&quot;type&quot;:&quot;text&quot;}"/>
           <p:cNvSpPr txBox="1"/>
           <p:nvPr/>
         </p:nvSpPr>
@@ -14116,7 +14903,7 @@
       </p:sp>
       <p:sp>
         <p:nvSpPr>
-          <p:cNvPr id="287" name=""/>
+          <p:cNvPr id="304" name=""/>
           <p:cNvSpPr/>
           <p:nvPr/>
         </p:nvSpPr>
@@ -14156,7 +14943,7 @@
       </p:sp>
       <p:sp>
         <p:nvSpPr>
-          <p:cNvPr id="288" name="" descr="{&quot;isTemplate&quot;:true,&quot;type&quot;:&quot;text&quot;}"/>
+          <p:cNvPr id="305" name="" descr="{&quot;isTemplate&quot;:true,&quot;type&quot;:&quot;text&quot;}"/>
           <p:cNvSpPr txBox="1"/>
           <p:nvPr/>
         </p:nvSpPr>
@@ -14191,7 +14978,7 @@
       </p:sp>
       <p:sp>
         <p:nvSpPr>
-          <p:cNvPr id="289" name="" descr="{&quot;isTemplate&quot;:true,&quot;type&quot;:&quot;text&quot;}"/>
+          <p:cNvPr id="306" name="" descr="{&quot;isTemplate&quot;:true,&quot;type&quot;:&quot;text&quot;}"/>
           <p:cNvSpPr txBox="1"/>
           <p:nvPr/>
         </p:nvSpPr>
@@ -14322,7 +15109,7 @@
       </p:sp>
       <p:sp>
         <p:nvSpPr>
-          <p:cNvPr id="290" name="" descr="{&quot;isTemplate&quot;:true,&quot;type&quot;:&quot;text&quot;}"/>
+          <p:cNvPr id="307" name="" descr="{&quot;isTemplate&quot;:true,&quot;type&quot;:&quot;text&quot;}"/>
           <p:cNvSpPr txBox="1"/>
           <p:nvPr/>
         </p:nvSpPr>
@@ -14399,7 +15186,7 @@
       </p:sp>
       <p:sp>
         <p:nvSpPr>
-          <p:cNvPr id="291" name="" descr="{&quot;isTemplate&quot;:true,&quot;type&quot;:&quot;text&quot;}"/>
+          <p:cNvPr id="308" name="" descr="{&quot;isTemplate&quot;:true,&quot;type&quot;:&quot;text&quot;}"/>
           <p:cNvSpPr txBox="1"/>
           <p:nvPr/>
         </p:nvSpPr>
@@ -14464,7 +15251,7 @@
       </p:sp>
       <p:sp>
         <p:nvSpPr>
-          <p:cNvPr id="292" name="" descr="{&quot;isTemplate&quot;:true,&quot;type&quot;:&quot;text&quot;}"/>
+          <p:cNvPr id="309" name="" descr="{&quot;isTemplate&quot;:true,&quot;type&quot;:&quot;text&quot;}"/>
           <p:cNvSpPr txBox="1"/>
           <p:nvPr/>
         </p:nvSpPr>

--- a/docs/AI掌柜-路演PPT/AI掌柜-路演PPT.pptx
+++ b/docs/AI掌柜-路演PPT/AI掌柜-路演PPT.pptx
@@ -3104,7 +3104,7 @@
   <p:cSld>
     <p:spTree>
       <p:nvGrpSpPr>
-        <p:cNvPr id="58" name="" descr="&lt;Slide style={{ width: 1280, height: 720, background: '#0B0D14', padding: '56px 72px', flexDirection: 'column', justifyContent: 'space-between' }}&gt;&#13;&#10;  &lt;Box style={{ flexDirection: 'row', justifyContent: 'space-between', alignItems: 'center' }}&gt;&#13;&#10;    &lt;Text style={{ fontSize: 13, color: '#8A90A6', letterSpacing: 1 }}&gt;2026 武汉 1024 · 人工智能创新应用黑客松&lt;/Text&gt;&#13;&#10;    &lt;Text style={{ fontSize: 13, color: '#6C6CF5', fontWeight: 'bold', letterSpacing: 2 }}&gt;产业应用赛道&lt;/Text&gt;&#13;&#10;  &lt;/Box&gt;&#13;&#10;  &lt;Box style={{ flexDirection: 'column' }}&gt;&#13;&#10;    &lt;Text style={{ fontSize: 52, fontWeight: 'bold', color: '#F2F4FF', lineHeight: 1.35, width: 960 }}&gt;&#13;&#10;      让每个小店，&lt;br /&gt;都有一个不用发工资的掌柜。&#13;&#10;    &lt;/Text&gt;&#13;&#10;    &lt;Box style={{ width: 88, height: 4, background: '#6C6CF5', borderRadius: 2, marginTop: 26, marginBottom: 22 }} /&gt;&#13;&#10;    &lt;Text style={{ fontSize: 17, color: '#8A90A6', lineHeight: 1.8 }}&gt;&#13;&#10;      可执行 · 可追溯 · 可撤销 · 断网可用&#13;&#10;    &lt;/Text&gt;&#13;&#10;  &lt;/Box&gt;&#13;&#10;  &lt;Box style={{ flexDirection: 'row', justifyContent: 'space-between', alignItems: 'flex-end' }}&gt;&#13;&#10;    &lt;Box style={{ flexDirection: 'column', gap: 5 }}&gt;&#13;&#10;      &lt;Text style={{ fontSize: 14, color: '#F2F4FF' }}&gt;AI 掌柜 · 中小餐饮经营 Agent&lt;/Text&gt;&#13;&#10;      &lt;Text style={{ fontSize: 13, color: '#8A90A6' }}&gt;代码仓库与演示入口见提交材料 · 演示账号 admin / admin123&lt;/Text&gt;&#13;&#10;    &lt;/Box&gt;&#13;&#10;    &lt;Text style={{ fontSize: 13, color: '#4A5064' }}&gt;12 / 12&lt;/Text&gt;&#13;&#10;  &lt;/Box&gt;&#13;&#10;&lt;/Slide&gt;"/>
+        <p:cNvPr id="58" name="" descr="&lt;Slide style={{ width: 1280, height: 720, background: '#0B0D14', padding: '56px 72px', flexDirection: 'column', justifyContent: 'space-between' }}&gt;&#13;&#10;  &lt;Box style={{ flexDirection: 'row', justifyContent: 'space-between', alignItems: 'center' }}&gt;&#13;&#10;    &lt;Text style={{ fontSize: 13, color: '#8A90A6', letterSpacing: 1 }}&gt;2026 武汉 1024 · 人工智能创新应用黑客松&lt;/Text&gt;&#13;&#10;    &lt;Text style={{ fontSize: 13, color: '#6C6CF5', fontWeight: 'bold', letterSpacing: 2 }}&gt;产业应用赛道&lt;/Text&gt;&#13;&#10;  &lt;/Box&gt;&#13;&#10;  &lt;Box style={{ flexDirection: 'column' }}&gt;&#13;&#10;    &lt;Text style={{ fontSize: 52, fontWeight: 'bold', color: '#F2F4FF', lineHeight: 1.35, width: 960 }}&gt;&#13;&#10;      让每个小店，&lt;br /&gt;都有一个不用发工资的掌柜。&#13;&#10;    &lt;/Text&gt;&#13;&#10;    &lt;Box style={{ width: 88, height: 4, background: '#6C6CF5', borderRadius: 2, marginTop: 26, marginBottom: 22 }} /&gt;&#13;&#10;    &lt;Text style={{ fontSize: 17, color: '#8A90A6', lineHeight: 1.8 }}&gt;&#13;&#10;      可执行 · 可追溯 · 可撤销 · 断网可用&#13;&#10;    &lt;/Text&gt;&#13;&#10;  &lt;/Box&gt;&#13;&#10;  &lt;Box style={{ flexDirection: 'row', justifyContent: 'space-between', alignItems: 'flex-end' }}&gt;&#13;&#10;    &lt;Box style={{ flexDirection: 'column', gap: 5 }}&gt;&#13;&#10;      &lt;Text style={{ fontSize: 14, color: '#F2F4FF' }}&gt;AI 掌柜 · 中小餐饮经营 Agent&lt;/Text&gt;&#13;&#10;      &lt;Text style={{ fontSize: 13, color: '#6C6CF5', fontWeight: 'bold' }}&gt;github.com/wsj20011001/ai-zhanggui&lt;/Text&gt;&#13;&#10;      &lt;Text style={{ fontSize: 12, color: '#8A90A6' }}&gt;管理端 admin / admin123 · 点餐端工号 1001 / 123456&lt;/Text&gt;&#13;&#10;    &lt;/Box&gt;&#13;&#10;    &lt;Text style={{ fontSize: 13, color: '#4A5064' }}&gt;12 / 12&lt;/Text&gt;&#13;&#10;  &lt;/Box&gt;&#13;&#10;&lt;/Slide&gt;"/>
         <p:cNvGrpSpPr/>
         <p:nvPr/>
       </p:nvGrpSpPr>
@@ -3248,7 +3248,7 @@
         </p:nvSpPr>
         <p:spPr>
           <a:xfrm rot="0" flipH="0" flipV="0">
-            <a:off x="685800" y="2095500"/>
+            <a:off x="685800" y="2000250"/>
             <a:ext cx="9144000" cy="1609725"/>
           </a:xfrm>
           <a:prstGeom prst="rect"/>
@@ -3301,7 +3301,7 @@
         </p:nvSpPr>
         <p:spPr>
           <a:xfrm rot="0" flipH="0" flipV="0">
-            <a:off x="685800" y="3952875"/>
+            <a:off x="685800" y="3857625"/>
             <a:ext cx="838200" cy="38100"/>
           </a:xfrm>
           <a:prstGeom prst="roundRect">
@@ -3327,7 +3327,7 @@
         </p:nvSpPr>
         <p:spPr>
           <a:xfrm rot="0" flipH="0" flipV="0">
-            <a:off x="685800" y="4200525"/>
+            <a:off x="685800" y="4105275"/>
             <a:ext cx="10820400" cy="352425"/>
           </a:xfrm>
           <a:prstGeom prst="rect"/>
@@ -3422,8 +3422,8 @@
         </p:nvSpPr>
         <p:spPr>
           <a:xfrm rot="0" flipH="0" flipV="0">
-            <a:off x="685800" y="5962650"/>
-            <a:ext cx="3467100" cy="161925"/>
+            <a:off x="685800" y="5772150"/>
+            <a:ext cx="2876550" cy="161925"/>
           </a:xfrm>
           <a:prstGeom prst="rect"/>
         </p:spPr>
@@ -3497,58 +3497,28 @@
         </p:nvSpPr>
         <p:spPr>
           <a:xfrm rot="0" flipH="0" flipV="0">
-            <a:off x="685800" y="6172200"/>
-            <a:ext cx="3467100" cy="152400"/>
-          </a:xfrm>
-          <a:prstGeom prst="rect"/>
-        </p:spPr>
-        <p:txBody>
-          <a:bodyPr wrap="none" lIns="0" tIns="0" rIns="0" bIns="0"/>
-          <a:p>
-            <a:pPr>
-              <a:lnSpc>
-                <a:spcPct val="100000"/>
-              </a:lnSpc>
-            </a:pPr>
-            <a:r>
-              <a:rPr lang="zh-CN" sz="975">
-                <a:solidFill>
-                  <a:srgbClr val="8A90A6"/>
-                </a:solidFill>
-                <a:latin typeface="Microsoft YaHei"/>
-                <a:ea typeface="Microsoft YaHei"/>
-              </a:rPr>
-              <a:t>代码仓库与演示入口见提交材料</a:t>
-            </a:r>
-            <a:r>
-              <a:rPr lang="en-US" sz="975">
-                <a:solidFill>
-                  <a:srgbClr val="8A90A6"/>
-                </a:solidFill>
-                <a:latin typeface="Microsoft YaHei"/>
-                <a:ea typeface="Microsoft YaHei"/>
-              </a:rPr>
-              <a:t xml:space="preserve"> · </a:t>
-            </a:r>
-            <a:r>
-              <a:rPr lang="zh-CN" sz="975">
-                <a:solidFill>
-                  <a:srgbClr val="8A90A6"/>
-                </a:solidFill>
-                <a:latin typeface="Microsoft YaHei"/>
-                <a:ea typeface="Microsoft YaHei"/>
-              </a:rPr>
-              <a:t>演示账号</a:t>
-            </a:r>
-            <a:r>
-              <a:rPr lang="en-US" sz="975">
-                <a:solidFill>
-                  <a:srgbClr val="8A90A6"/>
-                </a:solidFill>
-                <a:latin typeface="Microsoft YaHei"/>
-                <a:ea typeface="Microsoft YaHei"/>
-              </a:rPr>
-              <a:t xml:space="preserve"> admin / admin123</a:t>
+            <a:off x="685800" y="5981700"/>
+            <a:ext cx="2876550" cy="152400"/>
+          </a:xfrm>
+          <a:prstGeom prst="rect"/>
+        </p:spPr>
+        <p:txBody>
+          <a:bodyPr wrap="none" lIns="0" tIns="0" rIns="0" bIns="0"/>
+          <a:p>
+            <a:pPr>
+              <a:lnSpc>
+                <a:spcPct val="100000"/>
+              </a:lnSpc>
+            </a:pPr>
+            <a:r>
+              <a:rPr lang="en-US" sz="975" b="1">
+                <a:solidFill>
+                  <a:srgbClr val="6C6CF5"/>
+                </a:solidFill>
+                <a:latin typeface="Microsoft YaHei"/>
+                <a:ea typeface="Microsoft YaHei"/>
+              </a:rPr>
+              <a:t>github.com/wsj20011001/ai-zhanggui</a:t>
             </a:r>
             <a:endParaRPr/>
           </a:p>
@@ -3557,6 +3527,71 @@
       <p:sp>
         <p:nvSpPr>
           <p:cNvPr id="67" name="" descr="{&quot;isTemplate&quot;:true,&quot;type&quot;:&quot;text&quot;}"/>
+          <p:cNvSpPr txBox="1"/>
+          <p:nvPr/>
+        </p:nvSpPr>
+        <p:spPr>
+          <a:xfrm rot="0" flipH="0" flipV="0">
+            <a:off x="685800" y="6181725"/>
+            <a:ext cx="2876550" cy="142875"/>
+          </a:xfrm>
+          <a:prstGeom prst="rect"/>
+        </p:spPr>
+        <p:txBody>
+          <a:bodyPr wrap="none" lIns="0" tIns="0" rIns="0" bIns="0"/>
+          <a:p>
+            <a:pPr>
+              <a:lnSpc>
+                <a:spcPct val="100000"/>
+              </a:lnSpc>
+            </a:pPr>
+            <a:r>
+              <a:rPr lang="zh-CN" sz="900">
+                <a:solidFill>
+                  <a:srgbClr val="8A90A6"/>
+                </a:solidFill>
+                <a:latin typeface="Microsoft YaHei"/>
+                <a:ea typeface="Microsoft YaHei"/>
+              </a:rPr>
+              <a:t>管理端</a:t>
+            </a:r>
+            <a:r>
+              <a:rPr lang="en-US" sz="900">
+                <a:solidFill>
+                  <a:srgbClr val="8A90A6"/>
+                </a:solidFill>
+                <a:latin typeface="Microsoft YaHei"/>
+                <a:ea typeface="Microsoft YaHei"/>
+              </a:rPr>
+              <a:t xml:space="preserve"> admin / admin123 · </a:t>
+            </a:r>
+            <a:r>
+              <a:rPr lang="zh-CN" sz="900">
+                <a:solidFill>
+                  <a:srgbClr val="8A90A6"/>
+                </a:solidFill>
+                <a:latin typeface="Microsoft YaHei"/>
+                <a:ea typeface="Microsoft YaHei"/>
+              </a:rPr>
+              <a:t>点餐端工号</a:t>
+            </a:r>
+            <a:r>
+              <a:rPr lang="en-US" sz="900">
+                <a:solidFill>
+                  <a:srgbClr val="8A90A6"/>
+                </a:solidFill>
+                <a:latin typeface="Microsoft YaHei"/>
+                <a:ea typeface="Microsoft YaHei"/>
+              </a:rPr>
+              <a:t xml:space="preserve"> 1001 / 123456</a:t>
+            </a:r>
+            <a:endParaRPr/>
+          </a:p>
+        </p:txBody>
+      </p:sp>
+      <p:sp>
+        <p:nvSpPr>
+          <p:cNvPr id="68" name="" descr="{&quot;isTemplate&quot;:true,&quot;type&quot;:&quot;text&quot;}"/>
           <p:cNvSpPr txBox="1"/>
           <p:nvPr/>
         </p:nvSpPr>
@@ -3599,7 +3634,7 @@
   <p:cSld>
     <p:spTree>
       <p:nvGrpSpPr>
-        <p:cNvPr id="68" name="" descr="&lt;Slide style={{ width: 1280, height: 720, background: '#0B0D14', padding: '56px 72px', flexDirection: 'column' }}&gt;&#13;&#10;  &lt;Box style={{ height: 96, flexDirection: 'row', justifyContent: 'space-between', alignItems: 'flex-start' }}&gt;&#13;&#10;    &lt;Box style={{ flexDirection: 'column', gap: 8 }}&gt;&#13;&#10;      &lt;Text style={{ fontSize: 34, fontWeight: 'bold', color: '#F2F4FF' }}&gt;附录 A · 界面实拍（无美化）&lt;/Text&gt;&#13;&#10;      &lt;Text style={{ fontSize: 15, color: '#8A90A6' }}&gt;这是 1920 宽屏下直接截的图，不是设计稿&lt;/Text&gt;&#13;&#10;    &lt;/Box&gt;&#13;&#10;    &lt;Text style={{ fontSize: 13, color: '#4A5064', letterSpacing: 2 }}&gt;AI 掌柜&lt;/Text&gt;&#13;&#10;  &lt;/Box&gt;&#13;&#10;  &lt;Box style={{ flex: 1, paddingTop: 8, flexDirection: 'row', gap: 26 }}&gt;&#13;&#10;    &lt;Box style={{ flex: 1.75, background: '#141826', border: '1px solid #242A3D', borderRadius: 12, padding: 10, overflow: 'hidden' }}&gt;&#13;&#10;      &lt;Image src=&quot;assets/ui_dashboard.png&quot; style={{ width: '100%', height: '100%', objectFit: 'cover', objectPosition: 'left top', borderRadius: 8 }} /&gt;&#13;&#10;    &lt;/Box&gt;&#13;&#10;    &lt;Box style={{ flex: 1, flexDirection: 'column', gap: 18, paddingTop: 4 }}&gt;&#13;&#10;      &lt;Box style={{ flexDirection: 'column', gap: 6 }}&gt;&#13;&#10;        &lt;Text style={{ fontSize: 13, color: '#6C6CF5', letterSpacing: 1 }}&gt;01 首屏只有三件事&lt;/Text&gt;&#13;&#10;        &lt;Text style={{ fontSize: 14, color: '#8A90A6', lineHeight: 1.7 }}&gt;按影响金额排序，不是按模块罗列。老板看完就知道先干哪件。&lt;/Text&gt;&#13;&#10;      &lt;/Box&gt;&#13;&#10;      &lt;Box style={{ flexDirection: 'column', gap: 6 }}&gt;&#13;&#10;        &lt;Text style={{ fontSize: 13, color: '#6C6CF5', letterSpacing: 1 }}&gt;02 每条都带证据&lt;/Text&gt;&#13;&#10;        &lt;Text style={{ fontSize: 14, color: '#8A90A6', lineHeight: 1.7 }}&gt;灰底那行是指标、当前值、基线、阈值，机器可读，人也看得懂。&lt;/Text&gt;&#13;&#10;      &lt;/Box&gt;&#13;&#10;      &lt;Box style={{ flexDirection: 'column', gap: 6 }}&gt;&#13;&#10;        &lt;Text style={{ fontSize: 13, color: '#6C6CF5', letterSpacing: 1 }}&gt;03 右边是实时状态&lt;/Text&gt;&#13;&#10;        &lt;Text style={{ fontSize: 14, color: '#8A90A6', lineHeight: 1.7 }}&gt;模型通道（本地/云端/规则）、7 天预测与回测误差、待处理动作。&lt;/Text&gt;&#13;&#10;      &lt;/Box&gt;&#13;&#10;      &lt;Box style={{ flexDirection: 'column', gap: 6 }}&gt;&#13;&#10;        &lt;Text style={{ fontSize: 13, color: '#6C6CF5', letterSpacing: 1 }}&gt;04 按钮就是动作&lt;/Text&gt;&#13;&#10;        &lt;Text style={{ fontSize: 14, color: '#8A90A6', lineHeight: 1.7 }}&gt;「生成采购单」「执行调价」都不是跳转，点完当场改数据，可撤销。&lt;/Text&gt;&#13;&#10;      &lt;/Box&gt;&#13;&#10;    &lt;/Box&gt;&#13;&#10;  &lt;/Box&gt;&#13;&#10;  &lt;Box style={{ height: 36, flexDirection: 'row', justifyContent: 'space-between', alignItems: 'flex-end' }}&gt;&#13;&#10;    &lt;Text style={{ fontSize: 12, color: '#4A5064' }}&gt;演示数据：180 天 / 6,803 单（seed_demo.py 生成）&lt;/Text&gt;&#13;&#10;    &lt;Text style={{ fontSize: 12, color: '#4A5064' }}&gt;附录 A&lt;/Text&gt;&#13;&#10;  &lt;/Box&gt;&#13;&#10;&lt;/Slide&gt;&#13;&#10;"/>
+        <p:cNvPr id="69" name="" descr="&lt;Slide style={{ width: 1280, height: 720, background: '#0B0D14', padding: '56px 72px', flexDirection: 'column' }}&gt;&#13;&#10;  &lt;Box style={{ height: 96, flexDirection: 'row', justifyContent: 'space-between', alignItems: 'flex-start' }}&gt;&#13;&#10;    &lt;Box style={{ flexDirection: 'column', gap: 8 }}&gt;&#13;&#10;      &lt;Text style={{ fontSize: 34, fontWeight: 'bold', color: '#F2F4FF' }}&gt;附录 A · 界面实拍（无美化）&lt;/Text&gt;&#13;&#10;      &lt;Text style={{ fontSize: 15, color: '#8A90A6' }}&gt;这是 1920 宽屏下直接截的图，不是设计稿&lt;/Text&gt;&#13;&#10;    &lt;/Box&gt;&#13;&#10;    &lt;Text style={{ fontSize: 13, color: '#4A5064', letterSpacing: 2 }}&gt;AI 掌柜&lt;/Text&gt;&#13;&#10;  &lt;/Box&gt;&#13;&#10;  &lt;Box style={{ flex: 1, paddingTop: 8, flexDirection: 'row', gap: 26 }}&gt;&#13;&#10;    &lt;Box style={{ flex: 1.75, background: '#141826', border: '1px solid #242A3D', borderRadius: 12, padding: 10, overflow: 'hidden' }}&gt;&#13;&#10;      &lt;Image src=&quot;assets/ui_dashboard.png&quot; style={{ width: '100%', height: '100%', objectFit: 'cover', objectPosition: 'left top', borderRadius: 8 }} /&gt;&#13;&#10;    &lt;/Box&gt;&#13;&#10;    &lt;Box style={{ flex: 1, flexDirection: 'column', gap: 18, paddingTop: 4 }}&gt;&#13;&#10;      &lt;Box style={{ flexDirection: 'column', gap: 6 }}&gt;&#13;&#10;        &lt;Text style={{ fontSize: 13, color: '#6C6CF5', letterSpacing: 1 }}&gt;01 首屏只有三件事&lt;/Text&gt;&#13;&#10;        &lt;Text style={{ fontSize: 14, color: '#8A90A6', lineHeight: 1.7 }}&gt;按影响金额排序，不是按模块罗列。老板看完就知道先干哪件。&lt;/Text&gt;&#13;&#10;      &lt;/Box&gt;&#13;&#10;      &lt;Box style={{ flexDirection: 'column', gap: 6 }}&gt;&#13;&#10;        &lt;Text style={{ fontSize: 13, color: '#6C6CF5', letterSpacing: 1 }}&gt;02 每条都带证据&lt;/Text&gt;&#13;&#10;        &lt;Text style={{ fontSize: 14, color: '#8A90A6', lineHeight: 1.7 }}&gt;灰底那行是指标、当前值、基线、阈值，机器可读，人也看得懂。&lt;/Text&gt;&#13;&#10;      &lt;/Box&gt;&#13;&#10;      &lt;Box style={{ flexDirection: 'column', gap: 6 }}&gt;&#13;&#10;        &lt;Text style={{ fontSize: 13, color: '#6C6CF5', letterSpacing: 1 }}&gt;03 右边是实时状态&lt;/Text&gt;&#13;&#10;        &lt;Text style={{ fontSize: 14, color: '#8A90A6', lineHeight: 1.7 }}&gt;模型通道（本地/云端/规则）、7 天预测与回测误差、待处理动作。&lt;/Text&gt;&#13;&#10;      &lt;/Box&gt;&#13;&#10;      &lt;Box style={{ flexDirection: 'column', gap: 6 }}&gt;&#13;&#10;        &lt;Text style={{ fontSize: 13, color: '#6C6CF5', letterSpacing: 1 }}&gt;04 按钮就是动作&lt;/Text&gt;&#13;&#10;        &lt;Text style={{ fontSize: 14, color: '#8A90A6', lineHeight: 1.7 }}&gt;「生成采购单」「执行调价」都不是跳转，点完当场改数据，可撤销。&lt;/Text&gt;&#13;&#10;      &lt;/Box&gt;&#13;&#10;    &lt;/Box&gt;&#13;&#10;  &lt;/Box&gt;&#13;&#10;  &lt;Box style={{ height: 36, flexDirection: 'row', justifyContent: 'space-between', alignItems: 'flex-end' }}&gt;&#13;&#10;    &lt;Text style={{ fontSize: 12, color: '#4A5064' }}&gt;演示数据：180 天 / 6,803 单（seed_demo.py 生成）&lt;/Text&gt;&#13;&#10;    &lt;Text style={{ fontSize: 12, color: '#4A5064' }}&gt;附录 A&lt;/Text&gt;&#13;&#10;  &lt;/Box&gt;&#13;&#10;&lt;/Slide&gt;&#13;&#10;"/>
         <p:cNvGrpSpPr/>
         <p:nvPr/>
       </p:nvGrpSpPr>
@@ -3613,7 +3648,7 @@
       </p:grpSpPr>
       <p:sp>
         <p:nvSpPr>
-          <p:cNvPr id="69" name=""/>
+          <p:cNvPr id="70" name=""/>
           <p:cNvSpPr/>
           <p:nvPr/>
         </p:nvSpPr>
@@ -3637,7 +3672,7 @@
       </p:sp>
       <p:sp>
         <p:nvSpPr>
-          <p:cNvPr id="70" name="" descr="{&quot;isTemplate&quot;:true,&quot;type&quot;:&quot;text&quot;}"/>
+          <p:cNvPr id="71" name="" descr="{&quot;isTemplate&quot;:true,&quot;type&quot;:&quot;text&quot;}"/>
           <p:cNvSpPr txBox="1"/>
           <p:nvPr/>
         </p:nvSpPr>
@@ -3692,7 +3727,7 @@
       </p:sp>
       <p:sp>
         <p:nvSpPr>
-          <p:cNvPr id="71" name="" descr="{&quot;isTemplate&quot;:true,&quot;type&quot;:&quot;text&quot;}"/>
+          <p:cNvPr id="72" name="" descr="{&quot;isTemplate&quot;:true,&quot;type&quot;:&quot;text&quot;}"/>
           <p:cNvSpPr txBox="1"/>
           <p:nvPr/>
         </p:nvSpPr>
@@ -3747,7 +3782,7 @@
       </p:sp>
       <p:sp>
         <p:nvSpPr>
-          <p:cNvPr id="72" name="" descr="{&quot;isTemplate&quot;:true,&quot;type&quot;:&quot;text&quot;}"/>
+          <p:cNvPr id="73" name="" descr="{&quot;isTemplate&quot;:true,&quot;type&quot;:&quot;text&quot;}"/>
           <p:cNvSpPr txBox="1"/>
           <p:nvPr/>
         </p:nvSpPr>
@@ -3792,7 +3827,7 @@
       </p:sp>
       <p:sp>
         <p:nvSpPr>
-          <p:cNvPr id="73" name=""/>
+          <p:cNvPr id="74" name=""/>
           <p:cNvSpPr/>
           <p:nvPr/>
         </p:nvSpPr>
@@ -3823,7 +3858,7 @@
       </p:sp>
       <p:pic>
         <p:nvPicPr>
-          <p:cNvPr id="74" name=""/>
+          <p:cNvPr id="75" name=""/>
           <p:cNvPicPr>
             <a:picLocks noChangeAspect="1"/>
           </p:cNvPicPr>
@@ -3851,7 +3886,7 @@
       </p:pic>
       <p:sp>
         <p:nvSpPr>
-          <p:cNvPr id="75" name="" descr="{&quot;isTemplate&quot;:true,&quot;type&quot;:&quot;text&quot;}"/>
+          <p:cNvPr id="76" name="" descr="{&quot;isTemplate&quot;:true,&quot;type&quot;:&quot;text&quot;}"/>
           <p:cNvSpPr txBox="1"/>
           <p:nvPr/>
         </p:nvSpPr>
@@ -3896,7 +3931,7 @@
       </p:sp>
       <p:sp>
         <p:nvSpPr>
-          <p:cNvPr id="76" name="" descr="{&quot;isTemplate&quot;:true,&quot;type&quot;:&quot;text&quot;}"/>
+          <p:cNvPr id="77" name="" descr="{&quot;isTemplate&quot;:true,&quot;type&quot;:&quot;text&quot;}"/>
           <p:cNvSpPr txBox="1"/>
           <p:nvPr/>
         </p:nvSpPr>
@@ -3931,7 +3966,7 @@
       </p:sp>
       <p:sp>
         <p:nvSpPr>
-          <p:cNvPr id="77" name="" descr="{&quot;isTemplate&quot;:true,&quot;type&quot;:&quot;text&quot;}"/>
+          <p:cNvPr id="78" name="" descr="{&quot;isTemplate&quot;:true,&quot;type&quot;:&quot;text&quot;}"/>
           <p:cNvSpPr txBox="1"/>
           <p:nvPr/>
         </p:nvSpPr>
@@ -3976,7 +4011,7 @@
       </p:sp>
       <p:sp>
         <p:nvSpPr>
-          <p:cNvPr id="78" name="" descr="{&quot;isTemplate&quot;:true,&quot;type&quot;:&quot;text&quot;}"/>
+          <p:cNvPr id="79" name="" descr="{&quot;isTemplate&quot;:true,&quot;type&quot;:&quot;text&quot;}"/>
           <p:cNvSpPr txBox="1"/>
           <p:nvPr/>
         </p:nvSpPr>
@@ -4013,7 +4048,7 @@
       </p:sp>
       <p:sp>
         <p:nvSpPr>
-          <p:cNvPr id="79" name="" descr="{&quot;isTemplate&quot;:true,&quot;type&quot;:&quot;text&quot;}"/>
+          <p:cNvPr id="80" name="" descr="{&quot;isTemplate&quot;:true,&quot;type&quot;:&quot;text&quot;}"/>
           <p:cNvSpPr txBox="1"/>
           <p:nvPr/>
         </p:nvSpPr>
@@ -4058,7 +4093,7 @@
       </p:sp>
       <p:sp>
         <p:nvSpPr>
-          <p:cNvPr id="80" name="" descr="{&quot;isTemplate&quot;:true,&quot;type&quot;:&quot;text&quot;}"/>
+          <p:cNvPr id="81" name="" descr="{&quot;isTemplate&quot;:true,&quot;type&quot;:&quot;text&quot;}"/>
           <p:cNvSpPr txBox="1"/>
           <p:nvPr/>
         </p:nvSpPr>
@@ -4155,7 +4190,7 @@
       </p:sp>
       <p:sp>
         <p:nvSpPr>
-          <p:cNvPr id="81" name="" descr="{&quot;isTemplate&quot;:true,&quot;type&quot;:&quot;text&quot;}"/>
+          <p:cNvPr id="82" name="" descr="{&quot;isTemplate&quot;:true,&quot;type&quot;:&quot;text&quot;}"/>
           <p:cNvSpPr txBox="1"/>
           <p:nvPr/>
         </p:nvSpPr>
@@ -4200,7 +4235,7 @@
       </p:sp>
       <p:sp>
         <p:nvSpPr>
-          <p:cNvPr id="82" name="" descr="{&quot;isTemplate&quot;:true,&quot;type&quot;:&quot;text&quot;}"/>
+          <p:cNvPr id="83" name="" descr="{&quot;isTemplate&quot;:true,&quot;type&quot;:&quot;text&quot;}"/>
           <p:cNvSpPr txBox="1"/>
           <p:nvPr/>
         </p:nvSpPr>
@@ -4237,7 +4272,7 @@
       </p:sp>
       <p:sp>
         <p:nvSpPr>
-          <p:cNvPr id="83" name="" descr="{&quot;isTemplate&quot;:true,&quot;type&quot;:&quot;text&quot;}"/>
+          <p:cNvPr id="84" name="" descr="{&quot;isTemplate&quot;:true,&quot;type&quot;:&quot;text&quot;}"/>
           <p:cNvSpPr txBox="1"/>
           <p:nvPr/>
         </p:nvSpPr>
@@ -4332,7 +4367,7 @@
       </p:sp>
       <p:sp>
         <p:nvSpPr>
-          <p:cNvPr id="84" name="" descr="{&quot;isTemplate&quot;:true,&quot;type&quot;:&quot;text&quot;}"/>
+          <p:cNvPr id="85" name="" descr="{&quot;isTemplate&quot;:true,&quot;type&quot;:&quot;text&quot;}"/>
           <p:cNvSpPr txBox="1"/>
           <p:nvPr/>
         </p:nvSpPr>
@@ -4385,7 +4420,7 @@
   <p:cSld>
     <p:spTree>
       <p:nvGrpSpPr>
-        <p:cNvPr id="85" name="" descr="&lt;Slide style={{ width: 1280, height: 720, background: '#0B0D14', padding: '56px 72px', flexDirection: 'column' }}&gt;&#13;&#10;  &lt;Box style={{ height: 96, flexDirection: 'row', justifyContent: 'space-between', alignItems: 'flex-start' }}&gt;&#13;&#10;    &lt;Box style={{ flexDirection: 'column', gap: 8 }}&gt;&#13;&#10;      &lt;Text style={{ fontSize: 34, fontWeight: 'bold', color: '#F2F4FF' }}&gt;老板每天问的三个问题，现有工具一个都没回答&lt;/Text&gt;&#13;&#10;      &lt;Text style={{ fontSize: 15, color: '#8A90A6' }}&gt;不是缺报表，是缺结论和动作&lt;/Text&gt;&#13;&#10;    &lt;/Box&gt;&#13;&#10;    &lt;Text style={{ fontSize: 13, color: '#4A5064', letterSpacing: 2 }}&gt;AI 掌柜&lt;/Text&gt;&#13;&#10;  &lt;/Box&gt;&#13;&#10;  &lt;Box style={{ flex: 1, paddingTop: 8 }}&gt;&#13;&#10;    &lt;Box style={{ flexDirection: 'row', gap: 20, height: 300 }}&gt;&#13;&#10;      &lt;Box style={{ flex: 1, background: '#141826', border: '1px solid #242A3D', borderRadius: 14, padding: 26, flexDirection: 'column', justifyContent: 'space-between' }}&gt;&#13;&#10;        &lt;Text style={{ fontSize: 56, fontWeight: 'bold', color: '#6C6CF5' }}&gt;01&lt;/Text&gt;&#13;&#10;        &lt;Text style={{ fontSize: 22, fontWeight: 'bold', color: '#F2F4FF' }}&gt;今天到底赚没赚&lt;/Text&gt;&#13;&#10;        &lt;Text style={{ fontSize: 15, color: '#8A90A6', lineHeight: 1.8 }}&gt;六张报表翻半小时，只知道跌了，&lt;br /&gt;不知道是人少了还是点便宜了。&lt;/Text&gt;&#13;&#10;      &lt;/Box&gt;&#13;&#10;      &lt;Box style={{ flex: 1, background: '#141826', border: '1px solid #242A3D', borderRadius: 14, padding: 26, flexDirection: 'column', justifyContent: 'space-between' }}&gt;&#13;&#10;        &lt;Text style={{ fontSize: 56, fontWeight: 'bold', color: '#6C6CF5' }}&gt;02&lt;/Text&gt;&#13;&#10;        &lt;Text style={{ fontSize: 22, fontWeight: 'bold', color: '#F2F4FF' }}&gt;明天该买多少&lt;/Text&gt;&#13;&#10;        &lt;Text style={{ fontSize: 15, color: '#8A90A6', lineHeight: 1.8 }}&gt;采购靠经验：缺货和压货同时发生，&lt;br /&gt;这套数据里 5 种食材只够 2 天。&lt;/Text&gt;&#13;&#10;      &lt;/Box&gt;&#13;&#10;      &lt;Box style={{ flex: 1, background: '#141826', border: '1px solid #242A3D', borderRadius: 14, padding: 26, flexDirection: 'column', justifyContent: 'space-between' }}&gt;&#13;&#10;        &lt;Text style={{ fontSize: 56, fontWeight: 'bold', color: '#6C6CF5' }}&gt;03&lt;/Text&gt;&#13;&#10;        &lt;Text style={{ fontSize: 22, fontWeight: 'bold', color: '#F2F4FF' }}&gt;哪道菜在赔钱&lt;/Text&gt;&#13;&#10;        &lt;Text style={{ fontSize: 15, color: '#8A90A6', lineHeight: 1.8 }}&gt;207 道菜只有 107 道算得清成本，&lt;br /&gt;卖得越多，可能亏得越多。&lt;/Text&gt;&#13;&#10;      &lt;/Box&gt;&#13;&#10;    &lt;/Box&gt;&#13;&#10;    &lt;Box style={{ marginTop: 34, paddingTop: 24, borderTop: '1px solid #242A3D', flexDirection: 'row', alignItems: 'center', gap: 16 }}&gt;&#13;&#10;      &lt;Box style={{ width: 6, height: 28, background: '#6C6CF5', borderRadius: 3 }} /&gt;&#13;&#10;      &lt;Text style={{ fontSize: 24, color: '#F2F4FF' }}&gt;中小餐饮不缺数据，缺一个&lt;Text style={{ fontSize: 24, fontWeight: 'bold', color: '#6C6CF5' }}&gt;能替他做决定&lt;/Text&gt;的角色。&lt;/Text&gt;&#13;&#10;    &lt;/Box&gt;&#13;&#10;  &lt;/Box&gt;&#13;&#10;  &lt;Box style={{ height: 36, flexDirection: 'row', justifyContent: 'space-between', alignItems: 'flex-end' }}&gt;&#13;&#10;    &lt;Text style={{ fontSize: 12, color: '#4A5064' }}&gt;2026 武汉 1024 · 产业应用赛道&lt;/Text&gt;&#13;&#10;    &lt;Text style={{ fontSize: 12, color: '#4A5064' }}&gt;02 / 12&lt;/Text&gt;&#13;&#10;  &lt;/Box&gt;&#13;&#10;&lt;/Slide&gt;"/>
+        <p:cNvPr id="86" name="" descr="&lt;Slide style={{ width: 1280, height: 720, background: '#0B0D14', padding: '56px 72px', flexDirection: 'column' }}&gt;&#13;&#10;  &lt;Box style={{ height: 96, flexDirection: 'row', justifyContent: 'space-between', alignItems: 'flex-start' }}&gt;&#13;&#10;    &lt;Box style={{ flexDirection: 'column', gap: 8 }}&gt;&#13;&#10;      &lt;Text style={{ fontSize: 34, fontWeight: 'bold', color: '#F2F4FF' }}&gt;老板每天问的三个问题，现有工具一个都没回答&lt;/Text&gt;&#13;&#10;      &lt;Text style={{ fontSize: 15, color: '#8A90A6' }}&gt;不是缺报表，是缺结论和动作&lt;/Text&gt;&#13;&#10;    &lt;/Box&gt;&#13;&#10;    &lt;Text style={{ fontSize: 13, color: '#4A5064', letterSpacing: 2 }}&gt;AI 掌柜&lt;/Text&gt;&#13;&#10;  &lt;/Box&gt;&#13;&#10;  &lt;Box style={{ flex: 1, paddingTop: 8 }}&gt;&#13;&#10;    &lt;Box style={{ flexDirection: 'row', gap: 20, height: 300 }}&gt;&#13;&#10;      &lt;Box style={{ flex: 1, background: '#141826', border: '1px solid #242A3D', borderRadius: 14, padding: 26, flexDirection: 'column', justifyContent: 'space-between' }}&gt;&#13;&#10;        &lt;Text style={{ fontSize: 56, fontWeight: 'bold', color: '#6C6CF5' }}&gt;01&lt;/Text&gt;&#13;&#10;        &lt;Text style={{ fontSize: 22, fontWeight: 'bold', color: '#F2F4FF' }}&gt;今天到底赚没赚&lt;/Text&gt;&#13;&#10;        &lt;Text style={{ fontSize: 15, color: '#8A90A6', lineHeight: 1.8 }}&gt;六张报表翻半小时，只知道跌了，&lt;br /&gt;不知道是人少了还是点便宜了。&lt;/Text&gt;&#13;&#10;      &lt;/Box&gt;&#13;&#10;      &lt;Box style={{ flex: 1, background: '#141826', border: '1px solid #242A3D', borderRadius: 14, padding: 26, flexDirection: 'column', justifyContent: 'space-between' }}&gt;&#13;&#10;        &lt;Text style={{ fontSize: 56, fontWeight: 'bold', color: '#6C6CF5' }}&gt;02&lt;/Text&gt;&#13;&#10;        &lt;Text style={{ fontSize: 22, fontWeight: 'bold', color: '#F2F4FF' }}&gt;明天该买多少&lt;/Text&gt;&#13;&#10;        &lt;Text style={{ fontSize: 15, color: '#8A90A6', lineHeight: 1.8 }}&gt;采购靠经验：缺货和压货同时发生，&lt;br /&gt;这套数据里 5 种食材只够 2 天。&lt;/Text&gt;&#13;&#10;      &lt;/Box&gt;&#13;&#10;      &lt;Box style={{ flex: 1, background: '#141826', border: '1px solid #242A3D', borderRadius: 14, padding: 26, flexDirection: 'column', justifyContent: 'space-between' }}&gt;&#13;&#10;        &lt;Text style={{ fontSize: 56, fontWeight: 'bold', color: '#6C6CF5' }}&gt;03&lt;/Text&gt;&#13;&#10;        &lt;Text style={{ fontSize: 22, fontWeight: 'bold', color: '#F2F4FF' }}&gt;哪道菜在赔钱&lt;/Text&gt;&#13;&#10;        &lt;Text style={{ fontSize: 15, color: '#8A90A6', lineHeight: 1.8 }}&gt;207 道菜只有 107 道算得清成本，&lt;br /&gt;卖得越多，可能亏得越多。&lt;/Text&gt;&#13;&#10;      &lt;/Box&gt;&#13;&#10;    &lt;/Box&gt;&#13;&#10;    &lt;Box style={{ marginTop: 34, paddingTop: 24, borderTop: '1px solid #242A3D', flexDirection: 'row', alignItems: 'center', gap: 16 }}&gt;&#13;&#10;      &lt;Box style={{ width: 6, height: 28, background: '#6C6CF5', borderRadius: 3 }} /&gt;&#13;&#10;      &lt;Text style={{ fontSize: 24, color: '#F2F4FF' }}&gt;中小餐饮不缺数据，缺一个&lt;Text style={{ fontSize: 24, fontWeight: 'bold', color: '#6C6CF5' }}&gt;能替他做决定&lt;/Text&gt;的角色。&lt;/Text&gt;&#13;&#10;    &lt;/Box&gt;&#13;&#10;  &lt;/Box&gt;&#13;&#10;  &lt;Box style={{ height: 36, flexDirection: 'row', justifyContent: 'space-between', alignItems: 'flex-end' }}&gt;&#13;&#10;    &lt;Text style={{ fontSize: 12, color: '#4A5064' }}&gt;2026 武汉 1024 · 产业应用赛道&lt;/Text&gt;&#13;&#10;    &lt;Text style={{ fontSize: 12, color: '#4A5064' }}&gt;02 / 12&lt;/Text&gt;&#13;&#10;  &lt;/Box&gt;&#13;&#10;&lt;/Slide&gt;"/>
         <p:cNvGrpSpPr/>
         <p:nvPr/>
       </p:nvGrpSpPr>
@@ -4399,7 +4434,7 @@
       </p:grpSpPr>
       <p:sp>
         <p:nvSpPr>
-          <p:cNvPr id="86" name=""/>
+          <p:cNvPr id="87" name=""/>
           <p:cNvSpPr/>
           <p:nvPr/>
         </p:nvSpPr>
@@ -4423,7 +4458,7 @@
       </p:sp>
       <p:sp>
         <p:nvSpPr>
-          <p:cNvPr id="87" name="" descr="{&quot;isTemplate&quot;:true,&quot;type&quot;:&quot;text&quot;}"/>
+          <p:cNvPr id="88" name="" descr="{&quot;isTemplate&quot;:true,&quot;type&quot;:&quot;text&quot;}"/>
           <p:cNvSpPr txBox="1"/>
           <p:nvPr/>
         </p:nvSpPr>
@@ -4458,7 +4493,7 @@
       </p:sp>
       <p:sp>
         <p:nvSpPr>
-          <p:cNvPr id="88" name="" descr="{&quot;isTemplate&quot;:true,&quot;type&quot;:&quot;text&quot;}"/>
+          <p:cNvPr id="89" name="" descr="{&quot;isTemplate&quot;:true,&quot;type&quot;:&quot;text&quot;}"/>
           <p:cNvSpPr txBox="1"/>
           <p:nvPr/>
         </p:nvSpPr>
@@ -4493,7 +4528,7 @@
       </p:sp>
       <p:sp>
         <p:nvSpPr>
-          <p:cNvPr id="89" name="" descr="{&quot;isTemplate&quot;:true,&quot;type&quot;:&quot;text&quot;}"/>
+          <p:cNvPr id="90" name="" descr="{&quot;isTemplate&quot;:true,&quot;type&quot;:&quot;text&quot;}"/>
           <p:cNvSpPr txBox="1"/>
           <p:nvPr/>
         </p:nvSpPr>
@@ -4538,7 +4573,7 @@
       </p:sp>
       <p:sp>
         <p:nvSpPr>
-          <p:cNvPr id="90" name=""/>
+          <p:cNvPr id="91" name=""/>
           <p:cNvSpPr/>
           <p:nvPr/>
         </p:nvSpPr>
@@ -4569,7 +4604,7 @@
       </p:sp>
       <p:sp>
         <p:nvSpPr>
-          <p:cNvPr id="91" name="" descr="{&quot;isTemplate&quot;:true,&quot;type&quot;:&quot;text&quot;}"/>
+          <p:cNvPr id="92" name="" descr="{&quot;isTemplate&quot;:true,&quot;type&quot;:&quot;text&quot;}"/>
           <p:cNvSpPr txBox="1"/>
           <p:nvPr/>
         </p:nvSpPr>
@@ -4604,7 +4639,7 @@
       </p:sp>
       <p:sp>
         <p:nvSpPr>
-          <p:cNvPr id="92" name="" descr="{&quot;isTemplate&quot;:true,&quot;type&quot;:&quot;text&quot;}"/>
+          <p:cNvPr id="93" name="" descr="{&quot;isTemplate&quot;:true,&quot;type&quot;:&quot;text&quot;}"/>
           <p:cNvSpPr txBox="1"/>
           <p:nvPr/>
         </p:nvSpPr>
@@ -4639,7 +4674,7 @@
       </p:sp>
       <p:sp>
         <p:nvSpPr>
-          <p:cNvPr id="93" name="" descr="{&quot;isTemplate&quot;:true,&quot;type&quot;:&quot;text&quot;}"/>
+          <p:cNvPr id="94" name="" descr="{&quot;isTemplate&quot;:true,&quot;type&quot;:&quot;text&quot;}"/>
           <p:cNvSpPr txBox="1"/>
           <p:nvPr/>
         </p:nvSpPr>
@@ -4692,7 +4727,7 @@
       </p:sp>
       <p:sp>
         <p:nvSpPr>
-          <p:cNvPr id="94" name=""/>
+          <p:cNvPr id="95" name=""/>
           <p:cNvSpPr/>
           <p:nvPr/>
         </p:nvSpPr>
@@ -4723,7 +4758,7 @@
       </p:sp>
       <p:sp>
         <p:nvSpPr>
-          <p:cNvPr id="95" name="" descr="{&quot;isTemplate&quot;:true,&quot;type&quot;:&quot;text&quot;}"/>
+          <p:cNvPr id="96" name="" descr="{&quot;isTemplate&quot;:true,&quot;type&quot;:&quot;text&quot;}"/>
           <p:cNvSpPr txBox="1"/>
           <p:nvPr/>
         </p:nvSpPr>
@@ -4758,7 +4793,7 @@
       </p:sp>
       <p:sp>
         <p:nvSpPr>
-          <p:cNvPr id="96" name="" descr="{&quot;isTemplate&quot;:true,&quot;type&quot;:&quot;text&quot;}"/>
+          <p:cNvPr id="97" name="" descr="{&quot;isTemplate&quot;:true,&quot;type&quot;:&quot;text&quot;}"/>
           <p:cNvSpPr txBox="1"/>
           <p:nvPr/>
         </p:nvSpPr>
@@ -4793,7 +4828,7 @@
       </p:sp>
       <p:sp>
         <p:nvSpPr>
-          <p:cNvPr id="97" name="" descr="{&quot;isTemplate&quot;:true,&quot;type&quot;:&quot;text&quot;}"/>
+          <p:cNvPr id="98" name="" descr="{&quot;isTemplate&quot;:true,&quot;type&quot;:&quot;text&quot;}"/>
           <p:cNvSpPr txBox="1"/>
           <p:nvPr/>
         </p:nvSpPr>
@@ -4886,7 +4921,7 @@
       </p:sp>
       <p:sp>
         <p:nvSpPr>
-          <p:cNvPr id="98" name=""/>
+          <p:cNvPr id="99" name=""/>
           <p:cNvSpPr/>
           <p:nvPr/>
         </p:nvSpPr>
@@ -4917,7 +4952,7 @@
       </p:sp>
       <p:sp>
         <p:nvSpPr>
-          <p:cNvPr id="99" name="" descr="{&quot;isTemplate&quot;:true,&quot;type&quot;:&quot;text&quot;}"/>
+          <p:cNvPr id="100" name="" descr="{&quot;isTemplate&quot;:true,&quot;type&quot;:&quot;text&quot;}"/>
           <p:cNvSpPr txBox="1"/>
           <p:nvPr/>
         </p:nvSpPr>
@@ -4952,7 +4987,7 @@
       </p:sp>
       <p:sp>
         <p:nvSpPr>
-          <p:cNvPr id="100" name="" descr="{&quot;isTemplate&quot;:true,&quot;type&quot;:&quot;text&quot;}"/>
+          <p:cNvPr id="101" name="" descr="{&quot;isTemplate&quot;:true,&quot;type&quot;:&quot;text&quot;}"/>
           <p:cNvSpPr txBox="1"/>
           <p:nvPr/>
         </p:nvSpPr>
@@ -4987,7 +5022,7 @@
       </p:sp>
       <p:sp>
         <p:nvSpPr>
-          <p:cNvPr id="101" name="" descr="{&quot;isTemplate&quot;:true,&quot;type&quot;:&quot;text&quot;}"/>
+          <p:cNvPr id="102" name="" descr="{&quot;isTemplate&quot;:true,&quot;type&quot;:&quot;text&quot;}"/>
           <p:cNvSpPr txBox="1"/>
           <p:nvPr/>
         </p:nvSpPr>
@@ -5070,7 +5105,7 @@
       </p:sp>
       <p:sp>
         <p:nvSpPr>
-          <p:cNvPr id="102" name=""/>
+          <p:cNvPr id="103" name=""/>
           <p:cNvSpPr/>
           <p:nvPr/>
         </p:nvSpPr>
@@ -5110,7 +5145,7 @@
       </p:sp>
       <p:sp>
         <p:nvSpPr>
-          <p:cNvPr id="103" name=""/>
+          <p:cNvPr id="104" name=""/>
           <p:cNvSpPr/>
           <p:nvPr/>
         </p:nvSpPr>
@@ -5136,7 +5171,7 @@
       </p:sp>
       <p:sp>
         <p:nvSpPr>
-          <p:cNvPr id="104" name="" descr="{&quot;isTemplate&quot;:true,&quot;type&quot;:&quot;text&quot;}"/>
+          <p:cNvPr id="105" name="" descr="{&quot;isTemplate&quot;:true,&quot;type&quot;:&quot;text&quot;}"/>
           <p:cNvSpPr txBox="1"/>
           <p:nvPr/>
         </p:nvSpPr>
@@ -5191,7 +5226,7 @@
       </p:sp>
       <p:sp>
         <p:nvSpPr>
-          <p:cNvPr id="105" name="" descr="{&quot;isTemplate&quot;:true,&quot;type&quot;:&quot;text&quot;}"/>
+          <p:cNvPr id="106" name="" descr="{&quot;isTemplate&quot;:true,&quot;type&quot;:&quot;text&quot;}"/>
           <p:cNvSpPr txBox="1"/>
           <p:nvPr/>
         </p:nvSpPr>
@@ -5256,7 +5291,7 @@
       </p:sp>
       <p:sp>
         <p:nvSpPr>
-          <p:cNvPr id="106" name="" descr="{&quot;isTemplate&quot;:true,&quot;type&quot;:&quot;text&quot;}"/>
+          <p:cNvPr id="107" name="" descr="{&quot;isTemplate&quot;:true,&quot;type&quot;:&quot;text&quot;}"/>
           <p:cNvSpPr txBox="1"/>
           <p:nvPr/>
         </p:nvSpPr>
@@ -5299,7 +5334,7 @@
   <p:cSld>
     <p:spTree>
       <p:nvGrpSpPr>
-        <p:cNvPr id="107" name="" descr="&lt;Slide style={{ width: 1280, height: 720, background: '#0B0D14', padding: '56px 72px', flexDirection: 'column' }}&gt;&#13;&#10;  &lt;Box style={{ height: 96, flexDirection: 'row', justifyContent: 'space-between', alignItems: 'flex-start' }}&gt;&#13;&#10;    &lt;Box style={{ flexDirection: 'column', gap: 8 }}&gt;&#13;&#10;      &lt;Text style={{ fontSize: 34, fontWeight: 'bold', color: '#F2F4FF' }}&gt;分水岭不在图表，在「能不能动手」&lt;/Text&gt;&#13;&#10;      &lt;Text style={{ fontSize: 15, color: '#8A90A6' }}&gt;同样一份营收下滑，两条完全不同的处理路径&lt;/Text&gt;&#13;&#10;    &lt;/Box&gt;&#13;&#10;    &lt;Text style={{ fontSize: 13, color: '#4A5064', letterSpacing: 2 }}&gt;AI 掌柜&lt;/Text&gt;&#13;&#10;  &lt;/Box&gt;&#13;&#10;  &lt;Box style={{ flex: 1, paddingTop: 8 }}&gt;&#13;&#10;    &lt;Box style={{ flexDirection: 'row', gap: 24, height: 330 }}&gt;&#13;&#10;      &lt;Box style={{ flex: 1, background: '#12141F', border: '1px solid #242A3D', borderRadius: 14, padding: 26 }}&gt;&#13;&#10;        &lt;Text style={{ fontSize: 13, color: '#4A5064', letterSpacing: 2 }}&gt;传统 BI / 经营看板&lt;/Text&gt;&#13;&#10;        &lt;Text style={{ fontSize: 26, fontWeight: 'bold', color: '#8A90A6', marginTop: 10 }}&gt;价值停在「知道」&lt;/Text&gt;&#13;&#10;        &lt;Box style={{ marginTop: 22, flexDirection: 'column', gap: 14 }}&gt;&#13;&#10;          &lt;Text style={{ fontSize: 16, color: '#8A90A6' }}&gt;看板 → 发现跌了&lt;/Text&gt;&#13;&#10;          &lt;Text style={{ fontSize: 16, color: '#8A90A6' }}&gt;→ 自己判断原因&lt;/Text&gt;&#13;&#10;          &lt;Text style={{ fontSize: 16, color: '#8A90A6' }}&gt;→ 自己打电话订货&lt;/Text&gt;&#13;&#10;          &lt;Text style={{ fontSize: 16, color: '#8A90A6' }}&gt;→ 一周后忘了复盘&lt;/Text&gt;&#13;&#10;        &lt;/Box&gt;&#13;&#10;      &lt;/Box&gt;&#13;&#10;      &lt;Box style={{ flex: 1, background: '#171A2E', border: '1px solid #6C6CF5', borderRadius: 14, padding: 26 }}&gt;&#13;&#10;        &lt;Text style={{ fontSize: 13, color: '#6C6CF5', letterSpacing: 2 }}&gt;AI 掌柜&lt;/Text&gt;&#13;&#10;        &lt;Text style={{ fontSize: 26, fontWeight: 'bold', color: '#F2F4FF', marginTop: 10 }}&gt;价值走到「改变」&lt;/Text&gt;&#13;&#10;        &lt;Box style={{ marginTop: 22, flexDirection: 'column', gap: 14 }}&gt;&#13;&#10;          &lt;Text style={{ fontSize: 16, color: '#F2F4FF' }}&gt;驾驶舱 → 3 件事 + 证据&lt;/Text&gt;&#13;&#10;          &lt;Text style={{ fontSize: 16, color: '#F2F4FF' }}&gt;→ 拆解成客流 / 客单价&lt;/Text&gt;&#13;&#10;          &lt;Text style={{ fontSize: 16, color: '#F2F4FF' }}&gt;→ 一键生成采购单并入库&lt;/Text&gt;&#13;&#10;          &lt;Text style={{ fontSize: 16, color: '#F2F4FF' }}&gt;→ 7 天后自动回填效果&lt;/Text&gt;&#13;&#10;        &lt;/Box&gt;&#13;&#10;      &lt;/Box&gt;&#13;&#10;    &lt;/Box&gt;&#13;&#10;    &lt;Box style={{ marginTop: 30, flexDirection: 'row', gap: 14 }}&gt;&#13;&#10;      &lt;Text style={{ fontSize: 15, color: '#8A90A6' }}&gt;三个关键词&lt;/Text&gt;&#13;&#10;      &lt;Text style={{ fontSize: 15, color: '#6C6CF5', fontWeight: 'bold' }}&gt;可执行 · 可追溯 · 可撤销&lt;/Text&gt;&#13;&#10;    &lt;/Box&gt;&#13;&#10;  &lt;/Box&gt;&#13;&#10;  &lt;Box style={{ height: 36, flexDirection: 'row', justifyContent: 'space-between', alignItems: 'flex-end' }}&gt;&#13;&#10;    &lt;Text style={{ fontSize: 12, color: '#4A5064' }}&gt;2026 武汉 1024 · 产业应用赛道&lt;/Text&gt;&#13;&#10;    &lt;Text style={{ fontSize: 12, color: '#4A5064' }}&gt;03 / 12&lt;/Text&gt;&#13;&#10;  &lt;/Box&gt;&#13;&#10;&lt;/Slide&gt;"/>
+        <p:cNvPr id="108" name="" descr="&lt;Slide style={{ width: 1280, height: 720, background: '#0B0D14', padding: '56px 72px', flexDirection: 'column' }}&gt;&#13;&#10;  &lt;Box style={{ height: 96, flexDirection: 'row', justifyContent: 'space-between', alignItems: 'flex-start' }}&gt;&#13;&#10;    &lt;Box style={{ flexDirection: 'column', gap: 8 }}&gt;&#13;&#10;      &lt;Text style={{ fontSize: 34, fontWeight: 'bold', color: '#F2F4FF' }}&gt;分水岭不在图表，在「能不能动手」&lt;/Text&gt;&#13;&#10;      &lt;Text style={{ fontSize: 15, color: '#8A90A6' }}&gt;同样一份营收下滑，两条完全不同的处理路径&lt;/Text&gt;&#13;&#10;    &lt;/Box&gt;&#13;&#10;    &lt;Text style={{ fontSize: 13, color: '#4A5064', letterSpacing: 2 }}&gt;AI 掌柜&lt;/Text&gt;&#13;&#10;  &lt;/Box&gt;&#13;&#10;  &lt;Box style={{ flex: 1, paddingTop: 8 }}&gt;&#13;&#10;    &lt;Box style={{ flexDirection: 'row', gap: 24, height: 330 }}&gt;&#13;&#10;      &lt;Box style={{ flex: 1, background: '#12141F', border: '1px solid #242A3D', borderRadius: 14, padding: 26 }}&gt;&#13;&#10;        &lt;Text style={{ fontSize: 13, color: '#4A5064', letterSpacing: 2 }}&gt;传统 BI / 经营看板&lt;/Text&gt;&#13;&#10;        &lt;Text style={{ fontSize: 26, fontWeight: 'bold', color: '#8A90A6', marginTop: 10 }}&gt;价值停在「知道」&lt;/Text&gt;&#13;&#10;        &lt;Box style={{ marginTop: 22, flexDirection: 'column', gap: 14 }}&gt;&#13;&#10;          &lt;Text style={{ fontSize: 16, color: '#8A90A6' }}&gt;看板 → 发现跌了&lt;/Text&gt;&#13;&#10;          &lt;Text style={{ fontSize: 16, color: '#8A90A6' }}&gt;→ 自己判断原因&lt;/Text&gt;&#13;&#10;          &lt;Text style={{ fontSize: 16, color: '#8A90A6' }}&gt;→ 自己打电话订货&lt;/Text&gt;&#13;&#10;          &lt;Text style={{ fontSize: 16, color: '#8A90A6' }}&gt;→ 一周后忘了复盘&lt;/Text&gt;&#13;&#10;        &lt;/Box&gt;&#13;&#10;      &lt;/Box&gt;&#13;&#10;      &lt;Box style={{ flex: 1, background: '#171A2E', border: '1px solid #6C6CF5', borderRadius: 14, padding: 26 }}&gt;&#13;&#10;        &lt;Text style={{ fontSize: 13, color: '#6C6CF5', letterSpacing: 2 }}&gt;AI 掌柜&lt;/Text&gt;&#13;&#10;        &lt;Text style={{ fontSize: 26, fontWeight: 'bold', color: '#F2F4FF', marginTop: 10 }}&gt;价值走到「改变」&lt;/Text&gt;&#13;&#10;        &lt;Box style={{ marginTop: 22, flexDirection: 'column', gap: 14 }}&gt;&#13;&#10;          &lt;Text style={{ fontSize: 16, color: '#F2F4FF' }}&gt;驾驶舱 → 3 件事 + 证据&lt;/Text&gt;&#13;&#10;          &lt;Text style={{ fontSize: 16, color: '#F2F4FF' }}&gt;→ 拆解成客流 / 客单价&lt;/Text&gt;&#13;&#10;          &lt;Text style={{ fontSize: 16, color: '#F2F4FF' }}&gt;→ 一键生成采购单并入库&lt;/Text&gt;&#13;&#10;          &lt;Text style={{ fontSize: 16, color: '#F2F4FF' }}&gt;→ 7 天后自动回填效果&lt;/Text&gt;&#13;&#10;        &lt;/Box&gt;&#13;&#10;      &lt;/Box&gt;&#13;&#10;    &lt;/Box&gt;&#13;&#10;    &lt;Box style={{ marginTop: 30, flexDirection: 'row', gap: 14 }}&gt;&#13;&#10;      &lt;Text style={{ fontSize: 15, color: '#8A90A6' }}&gt;三个关键词&lt;/Text&gt;&#13;&#10;      &lt;Text style={{ fontSize: 15, color: '#6C6CF5', fontWeight: 'bold' }}&gt;可执行 · 可追溯 · 可撤销&lt;/Text&gt;&#13;&#10;    &lt;/Box&gt;&#13;&#10;  &lt;/Box&gt;&#13;&#10;  &lt;Box style={{ height: 36, flexDirection: 'row', justifyContent: 'space-between', alignItems: 'flex-end' }}&gt;&#13;&#10;    &lt;Text style={{ fontSize: 12, color: '#4A5064' }}&gt;2026 武汉 1024 · 产业应用赛道&lt;/Text&gt;&#13;&#10;    &lt;Text style={{ fontSize: 12, color: '#4A5064' }}&gt;03 / 12&lt;/Text&gt;&#13;&#10;  &lt;/Box&gt;&#13;&#10;&lt;/Slide&gt;"/>
         <p:cNvGrpSpPr/>
         <p:nvPr/>
       </p:nvGrpSpPr>
@@ -5313,7 +5348,7 @@
       </p:grpSpPr>
       <p:sp>
         <p:nvSpPr>
-          <p:cNvPr id="108" name=""/>
+          <p:cNvPr id="109" name=""/>
           <p:cNvSpPr/>
           <p:nvPr/>
         </p:nvSpPr>
@@ -5337,7 +5372,7 @@
       </p:sp>
       <p:sp>
         <p:nvSpPr>
-          <p:cNvPr id="109" name="" descr="{&quot;isTemplate&quot;:true,&quot;type&quot;:&quot;text&quot;}"/>
+          <p:cNvPr id="110" name="" descr="{&quot;isTemplate&quot;:true,&quot;type&quot;:&quot;text&quot;}"/>
           <p:cNvSpPr txBox="1"/>
           <p:nvPr/>
         </p:nvSpPr>
@@ -5372,7 +5407,7 @@
       </p:sp>
       <p:sp>
         <p:nvSpPr>
-          <p:cNvPr id="110" name="" descr="{&quot;isTemplate&quot;:true,&quot;type&quot;:&quot;text&quot;}"/>
+          <p:cNvPr id="111" name="" descr="{&quot;isTemplate&quot;:true,&quot;type&quot;:&quot;text&quot;}"/>
           <p:cNvSpPr txBox="1"/>
           <p:nvPr/>
         </p:nvSpPr>
@@ -5407,7 +5442,7 @@
       </p:sp>
       <p:sp>
         <p:nvSpPr>
-          <p:cNvPr id="111" name="" descr="{&quot;isTemplate&quot;:true,&quot;type&quot;:&quot;text&quot;}"/>
+          <p:cNvPr id="112" name="" descr="{&quot;isTemplate&quot;:true,&quot;type&quot;:&quot;text&quot;}"/>
           <p:cNvSpPr txBox="1"/>
           <p:nvPr/>
         </p:nvSpPr>
@@ -5452,7 +5487,7 @@
       </p:sp>
       <p:sp>
         <p:nvSpPr>
-          <p:cNvPr id="112" name=""/>
+          <p:cNvPr id="113" name=""/>
           <p:cNvSpPr/>
           <p:nvPr/>
         </p:nvSpPr>
@@ -5483,7 +5518,7 @@
       </p:sp>
       <p:sp>
         <p:nvSpPr>
-          <p:cNvPr id="113" name="" descr="{&quot;isTemplate&quot;:true,&quot;type&quot;:&quot;text&quot;}"/>
+          <p:cNvPr id="114" name="" descr="{&quot;isTemplate&quot;:true,&quot;type&quot;:&quot;text&quot;}"/>
           <p:cNvSpPr txBox="1"/>
           <p:nvPr/>
         </p:nvSpPr>
@@ -5538,7 +5573,7 @@
       </p:sp>
       <p:sp>
         <p:nvSpPr>
-          <p:cNvPr id="114" name="" descr="{&quot;isTemplate&quot;:true,&quot;type&quot;:&quot;text&quot;}"/>
+          <p:cNvPr id="115" name="" descr="{&quot;isTemplate&quot;:true,&quot;type&quot;:&quot;text&quot;}"/>
           <p:cNvSpPr txBox="1"/>
           <p:nvPr/>
         </p:nvSpPr>
@@ -5573,7 +5608,7 @@
       </p:sp>
       <p:sp>
         <p:nvSpPr>
-          <p:cNvPr id="115" name="" descr="{&quot;isTemplate&quot;:true,&quot;type&quot;:&quot;text&quot;}"/>
+          <p:cNvPr id="116" name="" descr="{&quot;isTemplate&quot;:true,&quot;type&quot;:&quot;text&quot;}"/>
           <p:cNvSpPr txBox="1"/>
           <p:nvPr/>
         </p:nvSpPr>
@@ -5628,7 +5663,7 @@
       </p:sp>
       <p:sp>
         <p:nvSpPr>
-          <p:cNvPr id="116" name="" descr="{&quot;isTemplate&quot;:true,&quot;type&quot;:&quot;text&quot;}"/>
+          <p:cNvPr id="117" name="" descr="{&quot;isTemplate&quot;:true,&quot;type&quot;:&quot;text&quot;}"/>
           <p:cNvSpPr txBox="1"/>
           <p:nvPr/>
         </p:nvSpPr>
@@ -5673,7 +5708,7 @@
       </p:sp>
       <p:sp>
         <p:nvSpPr>
-          <p:cNvPr id="117" name="" descr="{&quot;isTemplate&quot;:true,&quot;type&quot;:&quot;text&quot;}"/>
+          <p:cNvPr id="118" name="" descr="{&quot;isTemplate&quot;:true,&quot;type&quot;:&quot;text&quot;}"/>
           <p:cNvSpPr txBox="1"/>
           <p:nvPr/>
         </p:nvSpPr>
@@ -5718,7 +5753,7 @@
       </p:sp>
       <p:sp>
         <p:nvSpPr>
-          <p:cNvPr id="118" name="" descr="{&quot;isTemplate&quot;:true,&quot;type&quot;:&quot;text&quot;}"/>
+          <p:cNvPr id="119" name="" descr="{&quot;isTemplate&quot;:true,&quot;type&quot;:&quot;text&quot;}"/>
           <p:cNvSpPr txBox="1"/>
           <p:nvPr/>
         </p:nvSpPr>
@@ -5763,7 +5798,7 @@
       </p:sp>
       <p:sp>
         <p:nvSpPr>
-          <p:cNvPr id="119" name=""/>
+          <p:cNvPr id="120" name=""/>
           <p:cNvSpPr/>
           <p:nvPr/>
         </p:nvSpPr>
@@ -5794,7 +5829,7 @@
       </p:sp>
       <p:sp>
         <p:nvSpPr>
-          <p:cNvPr id="120" name="" descr="{&quot;isTemplate&quot;:true,&quot;type&quot;:&quot;text&quot;}"/>
+          <p:cNvPr id="121" name="" descr="{&quot;isTemplate&quot;:true,&quot;type&quot;:&quot;text&quot;}"/>
           <p:cNvSpPr txBox="1"/>
           <p:nvPr/>
         </p:nvSpPr>
@@ -5839,7 +5874,7 @@
       </p:sp>
       <p:sp>
         <p:nvSpPr>
-          <p:cNvPr id="121" name="" descr="{&quot;isTemplate&quot;:true,&quot;type&quot;:&quot;text&quot;}"/>
+          <p:cNvPr id="122" name="" descr="{&quot;isTemplate&quot;:true,&quot;type&quot;:&quot;text&quot;}"/>
           <p:cNvSpPr txBox="1"/>
           <p:nvPr/>
         </p:nvSpPr>
@@ -5874,7 +5909,7 @@
       </p:sp>
       <p:sp>
         <p:nvSpPr>
-          <p:cNvPr id="122" name="" descr="{&quot;isTemplate&quot;:true,&quot;type&quot;:&quot;text&quot;}"/>
+          <p:cNvPr id="123" name="" descr="{&quot;isTemplate&quot;:true,&quot;type&quot;:&quot;text&quot;}"/>
           <p:cNvSpPr txBox="1"/>
           <p:nvPr/>
         </p:nvSpPr>
@@ -5949,7 +5984,7 @@
       </p:sp>
       <p:sp>
         <p:nvSpPr>
-          <p:cNvPr id="123" name="" descr="{&quot;isTemplate&quot;:true,&quot;type&quot;:&quot;text&quot;}"/>
+          <p:cNvPr id="124" name="" descr="{&quot;isTemplate&quot;:true,&quot;type&quot;:&quot;text&quot;}"/>
           <p:cNvSpPr txBox="1"/>
           <p:nvPr/>
         </p:nvSpPr>
@@ -6014,7 +6049,7 @@
       </p:sp>
       <p:sp>
         <p:nvSpPr>
-          <p:cNvPr id="124" name="" descr="{&quot;isTemplate&quot;:true,&quot;type&quot;:&quot;text&quot;}"/>
+          <p:cNvPr id="125" name="" descr="{&quot;isTemplate&quot;:true,&quot;type&quot;:&quot;text&quot;}"/>
           <p:cNvSpPr txBox="1"/>
           <p:nvPr/>
         </p:nvSpPr>
@@ -6059,7 +6094,7 @@
       </p:sp>
       <p:sp>
         <p:nvSpPr>
-          <p:cNvPr id="125" name="" descr="{&quot;isTemplate&quot;:true,&quot;type&quot;:&quot;text&quot;}"/>
+          <p:cNvPr id="126" name="" descr="{&quot;isTemplate&quot;:true,&quot;type&quot;:&quot;text&quot;}"/>
           <p:cNvSpPr txBox="1"/>
           <p:nvPr/>
         </p:nvSpPr>
@@ -6104,7 +6139,7 @@
       </p:sp>
       <p:sp>
         <p:nvSpPr>
-          <p:cNvPr id="126" name="" descr="{&quot;isTemplate&quot;:true,&quot;type&quot;:&quot;text&quot;}"/>
+          <p:cNvPr id="127" name="" descr="{&quot;isTemplate&quot;:true,&quot;type&quot;:&quot;text&quot;}"/>
           <p:cNvSpPr txBox="1"/>
           <p:nvPr/>
         </p:nvSpPr>
@@ -6139,7 +6174,7 @@
       </p:sp>
       <p:sp>
         <p:nvSpPr>
-          <p:cNvPr id="127" name="" descr="{&quot;isTemplate&quot;:true,&quot;type&quot;:&quot;text&quot;}"/>
+          <p:cNvPr id="128" name="" descr="{&quot;isTemplate&quot;:true,&quot;type&quot;:&quot;text&quot;}"/>
           <p:cNvSpPr txBox="1"/>
           <p:nvPr/>
         </p:nvSpPr>
@@ -6214,7 +6249,7 @@
       </p:sp>
       <p:sp>
         <p:nvSpPr>
-          <p:cNvPr id="128" name="" descr="{&quot;isTemplate&quot;:true,&quot;type&quot;:&quot;text&quot;}"/>
+          <p:cNvPr id="129" name="" descr="{&quot;isTemplate&quot;:true,&quot;type&quot;:&quot;text&quot;}"/>
           <p:cNvSpPr txBox="1"/>
           <p:nvPr/>
         </p:nvSpPr>
@@ -6279,7 +6314,7 @@
       </p:sp>
       <p:sp>
         <p:nvSpPr>
-          <p:cNvPr id="129" name="" descr="{&quot;isTemplate&quot;:true,&quot;type&quot;:&quot;text&quot;}"/>
+          <p:cNvPr id="130" name="" descr="{&quot;isTemplate&quot;:true,&quot;type&quot;:&quot;text&quot;}"/>
           <p:cNvSpPr txBox="1"/>
           <p:nvPr/>
         </p:nvSpPr>
@@ -6322,7 +6357,7 @@
   <p:cSld>
     <p:spTree>
       <p:nvGrpSpPr>
-        <p:cNvPr id="130" name="" descr="&lt;Slide style={{ width: 1280, height: 720, background: '#0B0D14', padding: '56px 72px', flexDirection: 'column' }}&gt;&#13;&#10;  &lt;Box style={{ height: 96, flexDirection: 'row', justifyContent: 'space-between', alignItems: 'flex-start' }}&gt;&#13;&#10;    &lt;Box style={{ flexDirection: 'column', gap: 8 }}&gt;&#13;&#10;      &lt;Text style={{ fontSize: 34, fontWeight: 'bold', color: '#F2F4FF' }}&gt;四块能力，缺一块都落不了地&lt;/Text&gt;&#13;&#10;      &lt;Text style={{ fontSize: 15, color: '#8A90A6' }}&gt;看得懂、算得准、动得了、说得清&lt;/Text&gt;&#13;&#10;    &lt;/Box&gt;&#13;&#10;    &lt;Text style={{ fontSize: 13, color: '#4A5064', letterSpacing: 2 }}&gt;AI 掌柜&lt;/Text&gt;&#13;&#10;  &lt;/Box&gt;&#13;&#10;  &lt;Box style={{ flex: 1, paddingTop: 8 }}&gt;&#13;&#10;    &lt;Box style={{ flexDirection: 'row', gap: 18, height: 250 }}&gt;&#13;&#10;      &lt;Box style={{ flex: 1, background: '#141826', border: '1px solid #242A3D', borderRadius: 14, padding: 24 }}&gt;&#13;&#10;        &lt;Text style={{ fontSize: 20, fontWeight: 'bold', color: '#6C6CF5' }}&gt;看得懂&lt;/Text&gt;&#13;&#10;        &lt;Text style={{ fontSize: 15, color: '#F2F4FF', marginTop: 12, lineHeight: 1.75 }}&gt;营收 · 客流 · 毛利&lt;br /&gt;时段 · 翻台 · 会员结构&lt;/Text&gt;&#13;&#10;        &lt;Text style={{ fontSize: 13, color: '#8A90A6', marginTop: 16 }}&gt;180 天 / 6,803 单&lt;/Text&gt;&#13;&#10;      &lt;/Box&gt;&#13;&#10;      &lt;Box style={{ flex: 1, background: '#141826', border: '1px solid #242A3D', borderRadius: 14, padding: 24 }}&gt;&#13;&#10;        &lt;Text style={{ fontSize: 20, fontWeight: 'bold', color: '#6C6CF5' }}&gt;算得准&lt;/Text&gt;&#13;&#10;        &lt;Text style={{ fontSize: 15, color: '#F2F4FF', marginTop: 12, lineHeight: 1.75 }}&gt;指标唯一口径&lt;br /&gt;BOM 成本 · 三层分解预测&lt;/Text&gt;&#13;&#10;        &lt;Text style={{ fontSize: 13, color: '#8A90A6', marginTop: 16 }}&gt;回测误差 22%（含异常周）&lt;/Text&gt;&#13;&#10;      &lt;/Box&gt;&#13;&#10;      &lt;Box style={{ flex: 1, background: '#141826', border: '1px solid #242A3D', borderRadius: 14, padding: 24 }}&gt;&#13;&#10;        &lt;Text style={{ fontSize: 20, fontWeight: 'bold', color: '#6C6CF5' }}&gt;动得了&lt;/Text&gt;&#13;&#10;        &lt;Text style={{ fontSize: 15, color: '#F2F4FF', marginTop: 12, lineHeight: 1.75 }}&gt;生成采购单 · 按毛利调价&lt;br /&gt;滞销菜设为主推&lt;/Text&gt;&#13;&#10;        &lt;Text style={{ fontSize: 13, color: '#8A90A6', marginTop: 16 }}&gt;3 类动作 · 全部可撤销&lt;/Text&gt;&#13;&#10;      &lt;/Box&gt;&#13;&#10;      &lt;Box style={{ flex: 1, background: '#141826', border: '1px solid #242A3D', borderRadius: 14, padding: 24 }}&gt;&#13;&#10;        &lt;Text style={{ fontSize: 20, fontWeight: 'bold', color: '#6C6CF5' }}&gt;说得清&lt;/Text&gt;&#13;&#10;        &lt;Text style={{ fontSize: 15, color: '#F2F4FF', marginTop: 12, lineHeight: 1.75 }}&gt;每条结论附证据 SQL&lt;br /&gt;操作留痕 · 一键回滚&lt;/Text&gt;&#13;&#10;        &lt;Text style={{ fontSize: 13, color: '#8A90A6', marginTop: 16 }}&gt;8 条越界语句 100% 拦截&lt;/Text&gt;&#13;&#10;      &lt;/Box&gt;&#13;&#10;    &lt;/Box&gt;&#13;&#10;    &lt;Box style={{ marginTop: 28, background: '#12141F', border: '1px solid #242A3D', borderRadius: 12, padding: '20px 24px', flexDirection: 'row', alignItems: 'center', gap: 18 }}&gt;&#13;&#10;      &lt;Text style={{ fontSize: 15, color: '#8A90A6', width: 110 }}&gt;串联起来&lt;/Text&gt;&#13;&#10;      &lt;Text style={{ fontSize: 17, color: '#F2F4FF' }}&gt;看到异常 → 算清原因 → 直接处理 → 留下证据，四步在同一屏里完成。&lt;/Text&gt;&#13;&#10;    &lt;/Box&gt;&#13;&#10;  &lt;/Box&gt;&#13;&#10;  &lt;Box style={{ height: 36, flexDirection: 'row', justifyContent: 'space-between', alignItems: 'flex-end' }}&gt;&#13;&#10;    &lt;Text style={{ fontSize: 12, color: '#4A5064' }}&gt;2026 武汉 1024 · 产业应用赛道&lt;/Text&gt;&#13;&#10;    &lt;Text style={{ fontSize: 12, color: '#4A5064' }}&gt;04 / 12&lt;/Text&gt;&#13;&#10;  &lt;/Box&gt;&#13;&#10;&lt;/Slide&gt;"/>
+        <p:cNvPr id="131" name="" descr="&lt;Slide style={{ width: 1280, height: 720, background: '#0B0D14', padding: '56px 72px', flexDirection: 'column' }}&gt;&#13;&#10;  &lt;Box style={{ height: 96, flexDirection: 'row', justifyContent: 'space-between', alignItems: 'flex-start' }}&gt;&#13;&#10;    &lt;Box style={{ flexDirection: 'column', gap: 8 }}&gt;&#13;&#10;      &lt;Text style={{ fontSize: 34, fontWeight: 'bold', color: '#F2F4FF' }}&gt;四块能力，缺一块都落不了地&lt;/Text&gt;&#13;&#10;      &lt;Text style={{ fontSize: 15, color: '#8A90A6' }}&gt;看得懂、算得准、动得了、说得清&lt;/Text&gt;&#13;&#10;    &lt;/Box&gt;&#13;&#10;    &lt;Text style={{ fontSize: 13, color: '#4A5064', letterSpacing: 2 }}&gt;AI 掌柜&lt;/Text&gt;&#13;&#10;  &lt;/Box&gt;&#13;&#10;  &lt;Box style={{ flex: 1, paddingTop: 8 }}&gt;&#13;&#10;    &lt;Box style={{ flexDirection: 'row', gap: 18, height: 250 }}&gt;&#13;&#10;      &lt;Box style={{ flex: 1, background: '#141826', border: '1px solid #242A3D', borderRadius: 14, padding: 24 }}&gt;&#13;&#10;        &lt;Text style={{ fontSize: 20, fontWeight: 'bold', color: '#6C6CF5' }}&gt;看得懂&lt;/Text&gt;&#13;&#10;        &lt;Text style={{ fontSize: 15, color: '#F2F4FF', marginTop: 12, lineHeight: 1.75 }}&gt;营收 · 客流 · 毛利&lt;br /&gt;时段 · 翻台 · 会员结构&lt;/Text&gt;&#13;&#10;        &lt;Text style={{ fontSize: 13, color: '#8A90A6', marginTop: 16 }}&gt;180 天 / 6,803 单&lt;/Text&gt;&#13;&#10;      &lt;/Box&gt;&#13;&#10;      &lt;Box style={{ flex: 1, background: '#141826', border: '1px solid #242A3D', borderRadius: 14, padding: 24 }}&gt;&#13;&#10;        &lt;Text style={{ fontSize: 20, fontWeight: 'bold', color: '#6C6CF5' }}&gt;算得准&lt;/Text&gt;&#13;&#10;        &lt;Text style={{ fontSize: 15, color: '#F2F4FF', marginTop: 12, lineHeight: 1.75 }}&gt;指标唯一口径&lt;br /&gt;BOM 成本 · 三层分解预测&lt;/Text&gt;&#13;&#10;        &lt;Text style={{ fontSize: 13, color: '#8A90A6', marginTop: 16 }}&gt;回测误差 22%（含异常周）&lt;/Text&gt;&#13;&#10;      &lt;/Box&gt;&#13;&#10;      &lt;Box style={{ flex: 1, background: '#141826', border: '1px solid #242A3D', borderRadius: 14, padding: 24 }}&gt;&#13;&#10;        &lt;Text style={{ fontSize: 20, fontWeight: 'bold', color: '#6C6CF5' }}&gt;动得了&lt;/Text&gt;&#13;&#10;        &lt;Text style={{ fontSize: 15, color: '#F2F4FF', marginTop: 12, lineHeight: 1.75 }}&gt;生成采购单 · 按毛利调价&lt;br /&gt;滞销菜设为主推&lt;/Text&gt;&#13;&#10;        &lt;Text style={{ fontSize: 13, color: '#8A90A6', marginTop: 16 }}&gt;3 类动作 · 全部可撤销&lt;/Text&gt;&#13;&#10;      &lt;/Box&gt;&#13;&#10;      &lt;Box style={{ flex: 1, background: '#141826', border: '1px solid #242A3D', borderRadius: 14, padding: 24 }}&gt;&#13;&#10;        &lt;Text style={{ fontSize: 20, fontWeight: 'bold', color: '#6C6CF5' }}&gt;说得清&lt;/Text&gt;&#13;&#10;        &lt;Text style={{ fontSize: 15, color: '#F2F4FF', marginTop: 12, lineHeight: 1.75 }}&gt;每条结论附证据 SQL&lt;br /&gt;操作留痕 · 一键回滚&lt;/Text&gt;&#13;&#10;        &lt;Text style={{ fontSize: 13, color: '#8A90A6', marginTop: 16 }}&gt;8 条越界语句 100% 拦截&lt;/Text&gt;&#13;&#10;      &lt;/Box&gt;&#13;&#10;    &lt;/Box&gt;&#13;&#10;    &lt;Box style={{ marginTop: 28, background: '#12141F', border: '1px solid #242A3D', borderRadius: 12, padding: '20px 24px', flexDirection: 'row', alignItems: 'center', gap: 18 }}&gt;&#13;&#10;      &lt;Text style={{ fontSize: 15, color: '#8A90A6', width: 110 }}&gt;串联起来&lt;/Text&gt;&#13;&#10;      &lt;Text style={{ fontSize: 17, color: '#F2F4FF' }}&gt;看到异常 → 算清原因 → 直接处理 → 留下证据，四步在同一屏里完成。&lt;/Text&gt;&#13;&#10;    &lt;/Box&gt;&#13;&#10;  &lt;/Box&gt;&#13;&#10;  &lt;Box style={{ height: 36, flexDirection: 'row', justifyContent: 'space-between', alignItems: 'flex-end' }}&gt;&#13;&#10;    &lt;Text style={{ fontSize: 12, color: '#4A5064' }}&gt;2026 武汉 1024 · 产业应用赛道&lt;/Text&gt;&#13;&#10;    &lt;Text style={{ fontSize: 12, color: '#4A5064' }}&gt;04 / 12&lt;/Text&gt;&#13;&#10;  &lt;/Box&gt;&#13;&#10;&lt;/Slide&gt;"/>
         <p:cNvGrpSpPr/>
         <p:nvPr/>
       </p:nvGrpSpPr>
@@ -6336,7 +6371,7 @@
       </p:grpSpPr>
       <p:sp>
         <p:nvSpPr>
-          <p:cNvPr id="131" name=""/>
+          <p:cNvPr id="132" name=""/>
           <p:cNvSpPr/>
           <p:nvPr/>
         </p:nvSpPr>
@@ -6360,7 +6395,7 @@
       </p:sp>
       <p:sp>
         <p:nvSpPr>
-          <p:cNvPr id="132" name="" descr="{&quot;isTemplate&quot;:true,&quot;type&quot;:&quot;text&quot;}"/>
+          <p:cNvPr id="133" name="" descr="{&quot;isTemplate&quot;:true,&quot;type&quot;:&quot;text&quot;}"/>
           <p:cNvSpPr txBox="1"/>
           <p:nvPr/>
         </p:nvSpPr>
@@ -6395,7 +6430,7 @@
       </p:sp>
       <p:sp>
         <p:nvSpPr>
-          <p:cNvPr id="133" name="" descr="{&quot;isTemplate&quot;:true,&quot;type&quot;:&quot;text&quot;}"/>
+          <p:cNvPr id="134" name="" descr="{&quot;isTemplate&quot;:true,&quot;type&quot;:&quot;text&quot;}"/>
           <p:cNvSpPr txBox="1"/>
           <p:nvPr/>
         </p:nvSpPr>
@@ -6430,7 +6465,7 @@
       </p:sp>
       <p:sp>
         <p:nvSpPr>
-          <p:cNvPr id="134" name="" descr="{&quot;isTemplate&quot;:true,&quot;type&quot;:&quot;text&quot;}"/>
+          <p:cNvPr id="135" name="" descr="{&quot;isTemplate&quot;:true,&quot;type&quot;:&quot;text&quot;}"/>
           <p:cNvSpPr txBox="1"/>
           <p:nvPr/>
         </p:nvSpPr>
@@ -6475,7 +6510,7 @@
       </p:sp>
       <p:sp>
         <p:nvSpPr>
-          <p:cNvPr id="135" name=""/>
+          <p:cNvPr id="136" name=""/>
           <p:cNvSpPr/>
           <p:nvPr/>
         </p:nvSpPr>
@@ -6506,7 +6541,7 @@
       </p:sp>
       <p:sp>
         <p:nvSpPr>
-          <p:cNvPr id="136" name="" descr="{&quot;isTemplate&quot;:true,&quot;type&quot;:&quot;text&quot;}"/>
+          <p:cNvPr id="137" name="" descr="{&quot;isTemplate&quot;:true,&quot;type&quot;:&quot;text&quot;}"/>
           <p:cNvSpPr txBox="1"/>
           <p:nvPr/>
         </p:nvSpPr>
@@ -6541,7 +6576,7 @@
       </p:sp>
       <p:sp>
         <p:nvSpPr>
-          <p:cNvPr id="137" name="" descr="{&quot;isTemplate&quot;:true,&quot;type&quot;:&quot;text&quot;}"/>
+          <p:cNvPr id="138" name="" descr="{&quot;isTemplate&quot;:true,&quot;type&quot;:&quot;text&quot;}"/>
           <p:cNvSpPr txBox="1"/>
           <p:nvPr/>
         </p:nvSpPr>
@@ -6674,7 +6709,7 @@
       </p:sp>
       <p:sp>
         <p:nvSpPr>
-          <p:cNvPr id="138" name="" descr="{&quot;isTemplate&quot;:true,&quot;type&quot;:&quot;text&quot;}"/>
+          <p:cNvPr id="139" name="" descr="{&quot;isTemplate&quot;:true,&quot;type&quot;:&quot;text&quot;}"/>
           <p:cNvSpPr txBox="1"/>
           <p:nvPr/>
         </p:nvSpPr>
@@ -6739,7 +6774,7 @@
       </p:sp>
       <p:sp>
         <p:nvSpPr>
-          <p:cNvPr id="139" name=""/>
+          <p:cNvPr id="140" name=""/>
           <p:cNvSpPr/>
           <p:nvPr/>
         </p:nvSpPr>
@@ -6770,7 +6805,7 @@
       </p:sp>
       <p:sp>
         <p:nvSpPr>
-          <p:cNvPr id="140" name="" descr="{&quot;isTemplate&quot;:true,&quot;type&quot;:&quot;text&quot;}"/>
+          <p:cNvPr id="141" name="" descr="{&quot;isTemplate&quot;:true,&quot;type&quot;:&quot;text&quot;}"/>
           <p:cNvSpPr txBox="1"/>
           <p:nvPr/>
         </p:nvSpPr>
@@ -6805,7 +6840,7 @@
       </p:sp>
       <p:sp>
         <p:nvSpPr>
-          <p:cNvPr id="141" name="" descr="{&quot;isTemplate&quot;:true,&quot;type&quot;:&quot;text&quot;}"/>
+          <p:cNvPr id="142" name="" descr="{&quot;isTemplate&quot;:true,&quot;type&quot;:&quot;text&quot;}"/>
           <p:cNvSpPr txBox="1"/>
           <p:nvPr/>
         </p:nvSpPr>
@@ -6888,7 +6923,7 @@
       </p:sp>
       <p:sp>
         <p:nvSpPr>
-          <p:cNvPr id="142" name="" descr="{&quot;isTemplate&quot;:true,&quot;type&quot;:&quot;text&quot;}"/>
+          <p:cNvPr id="143" name="" descr="{&quot;isTemplate&quot;:true,&quot;type&quot;:&quot;text&quot;}"/>
           <p:cNvSpPr txBox="1"/>
           <p:nvPr/>
         </p:nvSpPr>
@@ -6943,7 +6978,7 @@
       </p:sp>
       <p:sp>
         <p:nvSpPr>
-          <p:cNvPr id="143" name=""/>
+          <p:cNvPr id="144" name=""/>
           <p:cNvSpPr/>
           <p:nvPr/>
         </p:nvSpPr>
@@ -6974,7 +7009,7 @@
       </p:sp>
       <p:sp>
         <p:nvSpPr>
-          <p:cNvPr id="144" name="" descr="{&quot;isTemplate&quot;:true,&quot;type&quot;:&quot;text&quot;}"/>
+          <p:cNvPr id="145" name="" descr="{&quot;isTemplate&quot;:true,&quot;type&quot;:&quot;text&quot;}"/>
           <p:cNvSpPr txBox="1"/>
           <p:nvPr/>
         </p:nvSpPr>
@@ -7009,7 +7044,7 @@
       </p:sp>
       <p:sp>
         <p:nvSpPr>
-          <p:cNvPr id="145" name="" descr="{&quot;isTemplate&quot;:true,&quot;type&quot;:&quot;text&quot;}"/>
+          <p:cNvPr id="146" name="" descr="{&quot;isTemplate&quot;:true,&quot;type&quot;:&quot;text&quot;}"/>
           <p:cNvSpPr txBox="1"/>
           <p:nvPr/>
         </p:nvSpPr>
@@ -7082,7 +7117,7 @@
       </p:sp>
       <p:sp>
         <p:nvSpPr>
-          <p:cNvPr id="146" name="" descr="{&quot;isTemplate&quot;:true,&quot;type&quot;:&quot;text&quot;}"/>
+          <p:cNvPr id="147" name="" descr="{&quot;isTemplate&quot;:true,&quot;type&quot;:&quot;text&quot;}"/>
           <p:cNvSpPr txBox="1"/>
           <p:nvPr/>
         </p:nvSpPr>
@@ -7147,7 +7182,7 @@
       </p:sp>
       <p:sp>
         <p:nvSpPr>
-          <p:cNvPr id="147" name=""/>
+          <p:cNvPr id="148" name=""/>
           <p:cNvSpPr/>
           <p:nvPr/>
         </p:nvSpPr>
@@ -7178,7 +7213,7 @@
       </p:sp>
       <p:sp>
         <p:nvSpPr>
-          <p:cNvPr id="148" name="" descr="{&quot;isTemplate&quot;:true,&quot;type&quot;:&quot;text&quot;}"/>
+          <p:cNvPr id="149" name="" descr="{&quot;isTemplate&quot;:true,&quot;type&quot;:&quot;text&quot;}"/>
           <p:cNvSpPr txBox="1"/>
           <p:nvPr/>
         </p:nvSpPr>
@@ -7213,7 +7248,7 @@
       </p:sp>
       <p:sp>
         <p:nvSpPr>
-          <p:cNvPr id="149" name="" descr="{&quot;isTemplate&quot;:true,&quot;type&quot;:&quot;text&quot;}"/>
+          <p:cNvPr id="150" name="" descr="{&quot;isTemplate&quot;:true,&quot;type&quot;:&quot;text&quot;}"/>
           <p:cNvSpPr txBox="1"/>
           <p:nvPr/>
         </p:nvSpPr>
@@ -7296,7 +7331,7 @@
       </p:sp>
       <p:sp>
         <p:nvSpPr>
-          <p:cNvPr id="150" name="" descr="{&quot;isTemplate&quot;:true,&quot;type&quot;:&quot;text&quot;}"/>
+          <p:cNvPr id="151" name="" descr="{&quot;isTemplate&quot;:true,&quot;type&quot;:&quot;text&quot;}"/>
           <p:cNvSpPr txBox="1"/>
           <p:nvPr/>
         </p:nvSpPr>
@@ -7361,7 +7396,7 @@
       </p:sp>
       <p:sp>
         <p:nvSpPr>
-          <p:cNvPr id="151" name=""/>
+          <p:cNvPr id="152" name=""/>
           <p:cNvSpPr/>
           <p:nvPr/>
         </p:nvSpPr>
@@ -7392,7 +7427,7 @@
       </p:sp>
       <p:sp>
         <p:nvSpPr>
-          <p:cNvPr id="152" name="" descr="{&quot;isTemplate&quot;:true,&quot;type&quot;:&quot;text&quot;}"/>
+          <p:cNvPr id="153" name="" descr="{&quot;isTemplate&quot;:true,&quot;type&quot;:&quot;text&quot;}"/>
           <p:cNvSpPr txBox="1"/>
           <p:nvPr/>
         </p:nvSpPr>
@@ -7427,7 +7462,7 @@
       </p:sp>
       <p:sp>
         <p:nvSpPr>
-          <p:cNvPr id="153" name="" descr="{&quot;isTemplate&quot;:true,&quot;type&quot;:&quot;text&quot;}"/>
+          <p:cNvPr id="154" name="" descr="{&quot;isTemplate&quot;:true,&quot;type&quot;:&quot;text&quot;}"/>
           <p:cNvSpPr txBox="1"/>
           <p:nvPr/>
         </p:nvSpPr>
@@ -7522,7 +7557,7 @@
       </p:sp>
       <p:sp>
         <p:nvSpPr>
-          <p:cNvPr id="154" name="" descr="{&quot;isTemplate&quot;:true,&quot;type&quot;:&quot;text&quot;}"/>
+          <p:cNvPr id="155" name="" descr="{&quot;isTemplate&quot;:true,&quot;type&quot;:&quot;text&quot;}"/>
           <p:cNvSpPr txBox="1"/>
           <p:nvPr/>
         </p:nvSpPr>
@@ -7587,7 +7622,7 @@
       </p:sp>
       <p:sp>
         <p:nvSpPr>
-          <p:cNvPr id="155" name="" descr="{&quot;isTemplate&quot;:true,&quot;type&quot;:&quot;text&quot;}"/>
+          <p:cNvPr id="156" name="" descr="{&quot;isTemplate&quot;:true,&quot;type&quot;:&quot;text&quot;}"/>
           <p:cNvSpPr txBox="1"/>
           <p:nvPr/>
         </p:nvSpPr>
@@ -7630,7 +7665,7 @@
   <p:cSld>
     <p:spTree>
       <p:nvGrpSpPr>
-        <p:cNvPr id="156" name="" descr="&lt;Slide style={{ width: 1280, height: 720, background: '#0B0D14', padding: '56px 72px', flexDirection: 'column' }}&gt;&#13;&#10;  &lt;Box style={{ height: 96, flexDirection: 'row', justifyContent: 'space-between', alignItems: 'flex-start' }}&gt;&#13;&#10;    &lt;Box style={{ flexDirection: 'column', gap: 8 }}&gt;&#13;&#10;      &lt;Text style={{ fontSize: 34, fontWeight: 'bold', color: '#F2F4FF' }}&gt;现场三分钟，只走一条路径&lt;/Text&gt;&#13;&#10;      &lt;Text style={{ fontSize: 15, color: '#8A90A6' }}&gt;上午 09:00，老板打开电脑后的真实操作顺序&lt;/Text&gt;&#13;&#10;    &lt;/Box&gt;&#13;&#10;    &lt;Text style={{ fontSize: 13, color: '#4A5064', letterSpacing: 2 }}&gt;AI 掌柜&lt;/Text&gt;&#13;&#10;  &lt;/Box&gt;&#13;&#10;  &lt;Box style={{ flex: 1, paddingTop: 8 }}&gt;&#13;&#10;    &lt;Box style={{ flexDirection: 'row', gap: 16, height: 205 }}&gt;&#13;&#10;      &lt;Box style={{ flex: 1, background: '#141826', border: '1px solid #242A3D', borderRadius: 14, padding: 24, flexDirection: 'column', justifyContent: 'space-between' }}&gt;&#13;&#10;        &lt;Text style={{ fontSize: 12, color: '#6C6CF5', letterSpacing: 2 }}&gt;第 1 步 · 30 秒&lt;/Text&gt;&#13;&#10;        &lt;Text style={{ fontSize: 21, fontWeight: 'bold', color: '#F2F4FF', marginTop: 6 }}&gt;打开驾驶舱&lt;/Text&gt;&#13;&#10;        &lt;Text style={{ fontSize: 14, color: '#8A90A6', lineHeight: 1.8 }}&gt;只有 3 件事：&lt;br /&gt;营收跌 20%、3 道菜滞销、&lt;br /&gt;牛腩只够 1.5 天。&lt;/Text&gt;&#13;&#10;      &lt;/Box&gt;&#13;&#10;      &lt;Box style={{ flex: 1, background: '#141826', border: '1px solid #242A3D', borderRadius: 14, padding: 24, flexDirection: 'column', justifyContent: 'space-between' }}&gt;&#13;&#10;        &lt;Text style={{ fontSize: 12, color: '#6C6CF5', letterSpacing: 2 }}&gt;第 2 步 · 60 秒&lt;/Text&gt;&#13;&#10;        &lt;Text style={{ fontSize: 21, fontWeight: 'bold', color: '#F2F4FF', marginTop: 6 }}&gt;点「营收下滑」&lt;/Text&gt;&#13;&#10;        &lt;Text style={{ fontSize: 14, color: '#8A90A6', lineHeight: 1.8 }}&gt;拆成客流 −18%、客单价 −3%，&lt;br /&gt;结论：人少了，&lt;br /&gt;不是点便宜了。&lt;/Text&gt;&#13;&#10;      &lt;/Box&gt;&#13;&#10;      &lt;Box style={{ flex: 1, background: '#141826', border: '1px solid #242A3D', borderRadius: 14, padding: 24, flexDirection: 'column', justifyContent: 'space-between' }}&gt;&#13;&#10;        &lt;Text style={{ fontSize: 12, color: '#6C6CF5', letterSpacing: 2 }}&gt;第 3 步 · 60 秒&lt;/Text&gt;&#13;&#10;        &lt;Text style={{ fontSize: 21, fontWeight: 'bold', color: '#F2F4FF', marginTop: 6 }}&gt;点「缺货」&lt;/Text&gt;&#13;&#10;        &lt;Text style={{ fontSize: 14, color: '#8A90A6', lineHeight: 1.8 }}&gt;按 7 天用量生成采购单&lt;br /&gt;→ 确认入库&lt;br /&gt;→ 库存与流水同步。&lt;/Text&gt;&#13;&#10;      &lt;/Box&gt;&#13;&#10;    &lt;/Box&gt;&#13;&#10;    &lt;Box style={{ marginTop: 20, background: '#171A2E', border: '1px solid #6C6CF5', borderRadius: 14, padding: '20px 24px', flexDirection: 'row', alignItems: 'center', gap: 24 }}&gt;&#13;&#10;      &lt;Text style={{ fontSize: 13, color: '#6C6CF5', letterSpacing: 2, width: 132 }}&gt;加演 · 一句话&lt;/Text&gt;&#13;&#10;      &lt;Box style={{ flexDirection: 'column', gap: 6 }}&gt;&#13;&#10;        &lt;Text style={{ fontSize: 19, fontWeight: 'bold', color: '#F2F4FF' }}&gt;「明天 8 人宴席，人均 150」&lt;/Text&gt;&#13;&#10;        &lt;Text style={{ fontSize: 13, color: '#8A90A6' }}&gt;按中餐宴席结构排 10 道菜 → 一键成单 → 后厨立刻看到，可人工增减。&lt;/Text&gt;&#13;&#10;      &lt;/Box&gt;&#13;&#10;    &lt;/Box&gt;&#13;&#10;    &lt;Box style={{ marginTop: 20, paddingTop: 16, borderTop: '1px solid #242A3D', flexDirection: 'row', gap: 0 }}&gt;&#13;&#10;      &lt;Box style={{ flex: 1, flexDirection: 'column', gap: 3 }}&gt;&#13;&#10;        &lt;Text style={{ fontSize: 24, fontWeight: 'bold', color: '#F2F4FF' }}&gt;1 张&lt;/Text&gt;&#13;&#10;        &lt;Text style={{ fontSize: 12, color: '#8A90A6' }}&gt;采购单（7 项 / 2,757 元）&lt;/Text&gt;&#13;&#10;      &lt;/Box&gt;&#13;&#10;      &lt;Box style={{ flex: 1, flexDirection: 'column', gap: 3 }}&gt;&#13;&#10;        &lt;Text style={{ fontSize: 24, fontWeight: 'bold', color: '#F2F4FF' }}&gt;7 种&lt;/Text&gt;&#13;&#10;        &lt;Text style={{ fontSize: 12, color: '#8A90A6' }}&gt;食材库存与流水同步更新&lt;/Text&gt;&#13;&#10;      &lt;/Box&gt;&#13;&#10;      &lt;Box style={{ flex: 1, flexDirection: 'column', gap: 3 }}&gt;&#13;&#10;        &lt;Text style={{ fontSize: 24, fontWeight: 'bold', color: '#F2F4FF' }}&gt;3 条&lt;/Text&gt;&#13;&#10;        &lt;Text style={{ fontSize: 12, color: '#8A90A6' }}&gt;操作留痕，任何一条可回滚&lt;/Text&gt;&#13;&#10;      &lt;/Box&gt;&#13;&#10;      &lt;Box style={{ flex: 1.2, flexDirection: 'column', gap: 3 }}&gt;&#13;&#10;        &lt;Text style={{ fontSize: 24, fontWeight: 'bold', color: '#6C6CF5' }}&gt;0 次&lt;/Text&gt;&#13;&#10;        &lt;Text style={{ fontSize: 12, color: '#8A90A6' }}&gt;页面跳转 —— 决策与执行同屏&lt;/Text&gt;&#13;&#10;      &lt;/Box&gt;&#13;&#10;    &lt;/Box&gt;&#13;&#10;  &lt;/Box&gt;&#13;&#10;  &lt;Box style={{ height: 36, flexDirection: 'row', justifyContent: 'space-between', alignItems: 'flex-end' }}&gt;&#13;&#10;    &lt;Text style={{ fontSize: 12, color: '#4A5064' }}&gt;2026 武汉 1024 · 产业应用赛道&lt;/Text&gt;&#13;&#10;    &lt;Text style={{ fontSize: 12, color: '#4A5064' }}&gt;05 / 12&lt;/Text&gt;&#13;&#10;  &lt;/Box&gt;&#13;&#10;&lt;/Slide&gt;"/>
+        <p:cNvPr id="157" name="" descr="&lt;Slide style={{ width: 1280, height: 720, background: '#0B0D14', padding: '56px 72px', flexDirection: 'column' }}&gt;&#13;&#10;  &lt;Box style={{ height: 96, flexDirection: 'row', justifyContent: 'space-between', alignItems: 'flex-start' }}&gt;&#13;&#10;    &lt;Box style={{ flexDirection: 'column', gap: 8 }}&gt;&#13;&#10;      &lt;Text style={{ fontSize: 34, fontWeight: 'bold', color: '#F2F4FF' }}&gt;现场三分钟，只走一条路径&lt;/Text&gt;&#13;&#10;      &lt;Text style={{ fontSize: 15, color: '#8A90A6' }}&gt;上午 09:00，老板打开电脑后的真实操作顺序&lt;/Text&gt;&#13;&#10;    &lt;/Box&gt;&#13;&#10;    &lt;Text style={{ fontSize: 13, color: '#4A5064', letterSpacing: 2 }}&gt;AI 掌柜&lt;/Text&gt;&#13;&#10;  &lt;/Box&gt;&#13;&#10;  &lt;Box style={{ flex: 1, paddingTop: 8 }}&gt;&#13;&#10;    &lt;Box style={{ flexDirection: 'row', gap: 16, height: 205 }}&gt;&#13;&#10;      &lt;Box style={{ flex: 1, background: '#141826', border: '1px solid #242A3D', borderRadius: 14, padding: 24, flexDirection: 'column', justifyContent: 'space-between' }}&gt;&#13;&#10;        &lt;Text style={{ fontSize: 12, color: '#6C6CF5', letterSpacing: 2 }}&gt;第 1 步 · 30 秒&lt;/Text&gt;&#13;&#10;        &lt;Text style={{ fontSize: 21, fontWeight: 'bold', color: '#F2F4FF', marginTop: 6 }}&gt;打开驾驶舱&lt;/Text&gt;&#13;&#10;        &lt;Text style={{ fontSize: 14, color: '#8A90A6', lineHeight: 1.8 }}&gt;只有 3 件事：&lt;br /&gt;营收跌 20%、3 道菜滞销、&lt;br /&gt;牛腩只够 1.5 天。&lt;/Text&gt;&#13;&#10;      &lt;/Box&gt;&#13;&#10;      &lt;Box style={{ flex: 1, background: '#141826', border: '1px solid #242A3D', borderRadius: 14, padding: 24, flexDirection: 'column', justifyContent: 'space-between' }}&gt;&#13;&#10;        &lt;Text style={{ fontSize: 12, color: '#6C6CF5', letterSpacing: 2 }}&gt;第 2 步 · 60 秒&lt;/Text&gt;&#13;&#10;        &lt;Text style={{ fontSize: 21, fontWeight: 'bold', color: '#F2F4FF', marginTop: 6 }}&gt;点「营收下滑」&lt;/Text&gt;&#13;&#10;        &lt;Text style={{ fontSize: 14, color: '#8A90A6', lineHeight: 1.8 }}&gt;拆成客流 −18%、客单价 −3%，&lt;br /&gt;结论：人少了，&lt;br /&gt;不是点便宜了。&lt;/Text&gt;&#13;&#10;      &lt;/Box&gt;&#13;&#10;      &lt;Box style={{ flex: 1, background: '#141826', border: '1px solid #242A3D', borderRadius: 14, padding: 24, flexDirection: 'column', justifyContent: 'space-between' }}&gt;&#13;&#10;        &lt;Text style={{ fontSize: 12, color: '#6C6CF5', letterSpacing: 2 }}&gt;第 3 步 · 60 秒&lt;/Text&gt;&#13;&#10;        &lt;Text style={{ fontSize: 21, fontWeight: 'bold', color: '#F2F4FF', marginTop: 6 }}&gt;点「缺货」&lt;/Text&gt;&#13;&#10;        &lt;Text style={{ fontSize: 14, color: '#8A90A6', lineHeight: 1.8 }}&gt;按 7 天用量生成采购单&lt;br /&gt;→ 确认入库&lt;br /&gt;→ 库存与流水同步。&lt;/Text&gt;&#13;&#10;      &lt;/Box&gt;&#13;&#10;    &lt;/Box&gt;&#13;&#10;    &lt;Box style={{ marginTop: 20, background: '#171A2E', border: '1px solid #6C6CF5', borderRadius: 14, padding: '20px 24px', flexDirection: 'row', alignItems: 'center', gap: 24 }}&gt;&#13;&#10;      &lt;Text style={{ fontSize: 13, color: '#6C6CF5', letterSpacing: 2, width: 132 }}&gt;加演 · 一句话&lt;/Text&gt;&#13;&#10;      &lt;Box style={{ flexDirection: 'column', gap: 6 }}&gt;&#13;&#10;        &lt;Text style={{ fontSize: 19, fontWeight: 'bold', color: '#F2F4FF' }}&gt;「明天 8 人宴席，人均 150」&lt;/Text&gt;&#13;&#10;        &lt;Text style={{ fontSize: 13, color: '#8A90A6' }}&gt;按中餐宴席结构排 10 道菜 → 一键成单 → 后厨立刻看到，可人工增减。&lt;/Text&gt;&#13;&#10;      &lt;/Box&gt;&#13;&#10;    &lt;/Box&gt;&#13;&#10;    &lt;Box style={{ marginTop: 20, paddingTop: 16, borderTop: '1px solid #242A3D', flexDirection: 'row', gap: 0 }}&gt;&#13;&#10;      &lt;Box style={{ flex: 1, flexDirection: 'column', gap: 3 }}&gt;&#13;&#10;        &lt;Text style={{ fontSize: 24, fontWeight: 'bold', color: '#F2F4FF' }}&gt;1 张&lt;/Text&gt;&#13;&#10;        &lt;Text style={{ fontSize: 12, color: '#8A90A6' }}&gt;采购单（7 项 / 2,757 元）&lt;/Text&gt;&#13;&#10;      &lt;/Box&gt;&#13;&#10;      &lt;Box style={{ flex: 1, flexDirection: 'column', gap: 3 }}&gt;&#13;&#10;        &lt;Text style={{ fontSize: 24, fontWeight: 'bold', color: '#F2F4FF' }}&gt;7 种&lt;/Text&gt;&#13;&#10;        &lt;Text style={{ fontSize: 12, color: '#8A90A6' }}&gt;食材库存与流水同步更新&lt;/Text&gt;&#13;&#10;      &lt;/Box&gt;&#13;&#10;      &lt;Box style={{ flex: 1, flexDirection: 'column', gap: 3 }}&gt;&#13;&#10;        &lt;Text style={{ fontSize: 24, fontWeight: 'bold', color: '#F2F4FF' }}&gt;3 条&lt;/Text&gt;&#13;&#10;        &lt;Text style={{ fontSize: 12, color: '#8A90A6' }}&gt;操作留痕，任何一条可回滚&lt;/Text&gt;&#13;&#10;      &lt;/Box&gt;&#13;&#10;      &lt;Box style={{ flex: 1.2, flexDirection: 'column', gap: 3 }}&gt;&#13;&#10;        &lt;Text style={{ fontSize: 24, fontWeight: 'bold', color: '#6C6CF5' }}&gt;0 次&lt;/Text&gt;&#13;&#10;        &lt;Text style={{ fontSize: 12, color: '#8A90A6' }}&gt;页面跳转 —— 决策与执行同屏&lt;/Text&gt;&#13;&#10;      &lt;/Box&gt;&#13;&#10;    &lt;/Box&gt;&#13;&#10;  &lt;/Box&gt;&#13;&#10;  &lt;Box style={{ height: 36, flexDirection: 'row', justifyContent: 'space-between', alignItems: 'flex-end' }}&gt;&#13;&#10;    &lt;Text style={{ fontSize: 12, color: '#4A5064' }}&gt;2026 武汉 1024 · 产业应用赛道&lt;/Text&gt;&#13;&#10;    &lt;Text style={{ fontSize: 12, color: '#4A5064' }}&gt;05 / 12&lt;/Text&gt;&#13;&#10;  &lt;/Box&gt;&#13;&#10;&lt;/Slide&gt;"/>
         <p:cNvGrpSpPr/>
         <p:nvPr/>
       </p:nvGrpSpPr>
@@ -7644,7 +7679,7 @@
       </p:grpSpPr>
       <p:sp>
         <p:nvSpPr>
-          <p:cNvPr id="157" name=""/>
+          <p:cNvPr id="158" name=""/>
           <p:cNvSpPr/>
           <p:nvPr/>
         </p:nvSpPr>
@@ -7668,7 +7703,7 @@
       </p:sp>
       <p:sp>
         <p:nvSpPr>
-          <p:cNvPr id="158" name="" descr="{&quot;isTemplate&quot;:true,&quot;type&quot;:&quot;text&quot;}"/>
+          <p:cNvPr id="159" name="" descr="{&quot;isTemplate&quot;:true,&quot;type&quot;:&quot;text&quot;}"/>
           <p:cNvSpPr txBox="1"/>
           <p:nvPr/>
         </p:nvSpPr>
@@ -7703,7 +7738,7 @@
       </p:sp>
       <p:sp>
         <p:nvSpPr>
-          <p:cNvPr id="159" name="" descr="{&quot;isTemplate&quot;:true,&quot;type&quot;:&quot;text&quot;}"/>
+          <p:cNvPr id="160" name="" descr="{&quot;isTemplate&quot;:true,&quot;type&quot;:&quot;text&quot;}"/>
           <p:cNvSpPr txBox="1"/>
           <p:nvPr/>
         </p:nvSpPr>
@@ -7758,7 +7793,7 @@
       </p:sp>
       <p:sp>
         <p:nvSpPr>
-          <p:cNvPr id="160" name="" descr="{&quot;isTemplate&quot;:true,&quot;type&quot;:&quot;text&quot;}"/>
+          <p:cNvPr id="161" name="" descr="{&quot;isTemplate&quot;:true,&quot;type&quot;:&quot;text&quot;}"/>
           <p:cNvSpPr txBox="1"/>
           <p:nvPr/>
         </p:nvSpPr>
@@ -7803,7 +7838,7 @@
       </p:sp>
       <p:sp>
         <p:nvSpPr>
-          <p:cNvPr id="161" name=""/>
+          <p:cNvPr id="162" name=""/>
           <p:cNvSpPr/>
           <p:nvPr/>
         </p:nvSpPr>
@@ -7834,7 +7869,7 @@
       </p:sp>
       <p:sp>
         <p:nvSpPr>
-          <p:cNvPr id="162" name="" descr="{&quot;isTemplate&quot;:true,&quot;type&quot;:&quot;text&quot;}"/>
+          <p:cNvPr id="163" name="" descr="{&quot;isTemplate&quot;:true,&quot;type&quot;:&quot;text&quot;}"/>
           <p:cNvSpPr txBox="1"/>
           <p:nvPr/>
         </p:nvSpPr>
@@ -7909,7 +7944,7 @@
       </p:sp>
       <p:sp>
         <p:nvSpPr>
-          <p:cNvPr id="163" name="" descr="{&quot;isTemplate&quot;:true,&quot;type&quot;:&quot;text&quot;}"/>
+          <p:cNvPr id="164" name="" descr="{&quot;isTemplate&quot;:true,&quot;type&quot;:&quot;text&quot;}"/>
           <p:cNvSpPr txBox="1"/>
           <p:nvPr/>
         </p:nvSpPr>
@@ -7944,7 +7979,7 @@
       </p:sp>
       <p:sp>
         <p:nvSpPr>
-          <p:cNvPr id="164" name="" descr="{&quot;isTemplate&quot;:true,&quot;type&quot;:&quot;text&quot;}"/>
+          <p:cNvPr id="165" name="" descr="{&quot;isTemplate&quot;:true,&quot;type&quot;:&quot;text&quot;}"/>
           <p:cNvSpPr txBox="1"/>
           <p:nvPr/>
         </p:nvSpPr>
@@ -8095,7 +8130,7 @@
       </p:sp>
       <p:sp>
         <p:nvSpPr>
-          <p:cNvPr id="165" name=""/>
+          <p:cNvPr id="166" name=""/>
           <p:cNvSpPr/>
           <p:nvPr/>
         </p:nvSpPr>
@@ -8126,7 +8161,7 @@
       </p:sp>
       <p:sp>
         <p:nvSpPr>
-          <p:cNvPr id="166" name="" descr="{&quot;isTemplate&quot;:true,&quot;type&quot;:&quot;text&quot;}"/>
+          <p:cNvPr id="167" name="" descr="{&quot;isTemplate&quot;:true,&quot;type&quot;:&quot;text&quot;}"/>
           <p:cNvSpPr txBox="1"/>
           <p:nvPr/>
         </p:nvSpPr>
@@ -8201,7 +8236,7 @@
       </p:sp>
       <p:sp>
         <p:nvSpPr>
-          <p:cNvPr id="167" name="" descr="{&quot;isTemplate&quot;:true,&quot;type&quot;:&quot;text&quot;}"/>
+          <p:cNvPr id="168" name="" descr="{&quot;isTemplate&quot;:true,&quot;type&quot;:&quot;text&quot;}"/>
           <p:cNvSpPr txBox="1"/>
           <p:nvPr/>
         </p:nvSpPr>
@@ -8236,7 +8271,7 @@
       </p:sp>
       <p:sp>
         <p:nvSpPr>
-          <p:cNvPr id="168" name="" descr="{&quot;isTemplate&quot;:true,&quot;type&quot;:&quot;text&quot;}"/>
+          <p:cNvPr id="169" name="" descr="{&quot;isTemplate&quot;:true,&quot;type&quot;:&quot;text&quot;}"/>
           <p:cNvSpPr txBox="1"/>
           <p:nvPr/>
         </p:nvSpPr>
@@ -8347,7 +8382,7 @@
       </p:sp>
       <p:sp>
         <p:nvSpPr>
-          <p:cNvPr id="169" name=""/>
+          <p:cNvPr id="170" name=""/>
           <p:cNvSpPr/>
           <p:nvPr/>
         </p:nvSpPr>
@@ -8378,7 +8413,7 @@
       </p:sp>
       <p:sp>
         <p:nvSpPr>
-          <p:cNvPr id="170" name="" descr="{&quot;isTemplate&quot;:true,&quot;type&quot;:&quot;text&quot;}"/>
+          <p:cNvPr id="171" name="" descr="{&quot;isTemplate&quot;:true,&quot;type&quot;:&quot;text&quot;}"/>
           <p:cNvSpPr txBox="1"/>
           <p:nvPr/>
         </p:nvSpPr>
@@ -8453,7 +8488,7 @@
       </p:sp>
       <p:sp>
         <p:nvSpPr>
-          <p:cNvPr id="171" name="" descr="{&quot;isTemplate&quot;:true,&quot;type&quot;:&quot;text&quot;}"/>
+          <p:cNvPr id="172" name="" descr="{&quot;isTemplate&quot;:true,&quot;type&quot;:&quot;text&quot;}"/>
           <p:cNvSpPr txBox="1"/>
           <p:nvPr/>
         </p:nvSpPr>
@@ -8488,7 +8523,7 @@
       </p:sp>
       <p:sp>
         <p:nvSpPr>
-          <p:cNvPr id="172" name="" descr="{&quot;isTemplate&quot;:true,&quot;type&quot;:&quot;text&quot;}"/>
+          <p:cNvPr id="173" name="" descr="{&quot;isTemplate&quot;:true,&quot;type&quot;:&quot;text&quot;}"/>
           <p:cNvSpPr txBox="1"/>
           <p:nvPr/>
         </p:nvSpPr>
@@ -8599,7 +8634,7 @@
       </p:sp>
       <p:sp>
         <p:nvSpPr>
-          <p:cNvPr id="173" name=""/>
+          <p:cNvPr id="174" name=""/>
           <p:cNvSpPr/>
           <p:nvPr/>
         </p:nvSpPr>
@@ -8630,7 +8665,7 @@
       </p:sp>
       <p:sp>
         <p:nvSpPr>
-          <p:cNvPr id="174" name="" descr="{&quot;isTemplate&quot;:true,&quot;type&quot;:&quot;text&quot;}"/>
+          <p:cNvPr id="175" name="" descr="{&quot;isTemplate&quot;:true,&quot;type&quot;:&quot;text&quot;}"/>
           <p:cNvSpPr txBox="1"/>
           <p:nvPr/>
         </p:nvSpPr>
@@ -8685,7 +8720,7 @@
       </p:sp>
       <p:sp>
         <p:nvSpPr>
-          <p:cNvPr id="175" name="" descr="{&quot;isTemplate&quot;:true,&quot;type&quot;:&quot;text&quot;}"/>
+          <p:cNvPr id="176" name="" descr="{&quot;isTemplate&quot;:true,&quot;type&quot;:&quot;text&quot;}"/>
           <p:cNvSpPr txBox="1"/>
           <p:nvPr/>
         </p:nvSpPr>
@@ -8760,7 +8795,7 @@
       </p:sp>
       <p:sp>
         <p:nvSpPr>
-          <p:cNvPr id="176" name="" descr="{&quot;isTemplate&quot;:true,&quot;type&quot;:&quot;text&quot;}"/>
+          <p:cNvPr id="177" name="" descr="{&quot;isTemplate&quot;:true,&quot;type&quot;:&quot;text&quot;}"/>
           <p:cNvSpPr txBox="1"/>
           <p:nvPr/>
         </p:nvSpPr>
@@ -8855,7 +8890,7 @@
       </p:sp>
       <p:sp>
         <p:nvSpPr>
-          <p:cNvPr id="177" name=""/>
+          <p:cNvPr id="178" name=""/>
           <p:cNvSpPr/>
           <p:nvPr/>
         </p:nvSpPr>
@@ -8895,7 +8930,7 @@
       </p:sp>
       <p:sp>
         <p:nvSpPr>
-          <p:cNvPr id="178" name="" descr="{&quot;isTemplate&quot;:true,&quot;type&quot;:&quot;text&quot;}"/>
+          <p:cNvPr id="179" name="" descr="{&quot;isTemplate&quot;:true,&quot;type&quot;:&quot;text&quot;}"/>
           <p:cNvSpPr txBox="1"/>
           <p:nvPr/>
         </p:nvSpPr>
@@ -8940,7 +8975,7 @@
       </p:sp>
       <p:sp>
         <p:nvSpPr>
-          <p:cNvPr id="179" name="" descr="{&quot;isTemplate&quot;:true,&quot;type&quot;:&quot;text&quot;}"/>
+          <p:cNvPr id="180" name="" descr="{&quot;isTemplate&quot;:true,&quot;type&quot;:&quot;text&quot;}"/>
           <p:cNvSpPr txBox="1"/>
           <p:nvPr/>
         </p:nvSpPr>
@@ -9015,7 +9050,7 @@
       </p:sp>
       <p:sp>
         <p:nvSpPr>
-          <p:cNvPr id="180" name="" descr="{&quot;isTemplate&quot;:true,&quot;type&quot;:&quot;text&quot;}"/>
+          <p:cNvPr id="181" name="" descr="{&quot;isTemplate&quot;:true,&quot;type&quot;:&quot;text&quot;}"/>
           <p:cNvSpPr txBox="1"/>
           <p:nvPr/>
         </p:nvSpPr>
@@ -9060,7 +9095,7 @@
       </p:sp>
       <p:sp>
         <p:nvSpPr>
-          <p:cNvPr id="181" name="" descr="{&quot;isTemplate&quot;:true,&quot;type&quot;:&quot;text&quot;}"/>
+          <p:cNvPr id="182" name="" descr="{&quot;isTemplate&quot;:true,&quot;type&quot;:&quot;text&quot;}"/>
           <p:cNvSpPr txBox="1"/>
           <p:nvPr/>
         </p:nvSpPr>
@@ -9095,7 +9130,7 @@
       </p:sp>
       <p:sp>
         <p:nvSpPr>
-          <p:cNvPr id="182" name="" descr="{&quot;isTemplate&quot;:true,&quot;type&quot;:&quot;text&quot;}"/>
+          <p:cNvPr id="183" name="" descr="{&quot;isTemplate&quot;:true,&quot;type&quot;:&quot;text&quot;}"/>
           <p:cNvSpPr txBox="1"/>
           <p:nvPr/>
         </p:nvSpPr>
@@ -9140,7 +9175,7 @@
       </p:sp>
       <p:sp>
         <p:nvSpPr>
-          <p:cNvPr id="183" name="" descr="{&quot;isTemplate&quot;:true,&quot;type&quot;:&quot;text&quot;}"/>
+          <p:cNvPr id="184" name="" descr="{&quot;isTemplate&quot;:true,&quot;type&quot;:&quot;text&quot;}"/>
           <p:cNvSpPr txBox="1"/>
           <p:nvPr/>
         </p:nvSpPr>
@@ -9175,7 +9210,7 @@
       </p:sp>
       <p:sp>
         <p:nvSpPr>
-          <p:cNvPr id="184" name="" descr="{&quot;isTemplate&quot;:true,&quot;type&quot;:&quot;text&quot;}"/>
+          <p:cNvPr id="185" name="" descr="{&quot;isTemplate&quot;:true,&quot;type&quot;:&quot;text&quot;}"/>
           <p:cNvSpPr txBox="1"/>
           <p:nvPr/>
         </p:nvSpPr>
@@ -9220,7 +9255,7 @@
       </p:sp>
       <p:sp>
         <p:nvSpPr>
-          <p:cNvPr id="185" name="" descr="{&quot;isTemplate&quot;:true,&quot;type&quot;:&quot;text&quot;}"/>
+          <p:cNvPr id="186" name="" descr="{&quot;isTemplate&quot;:true,&quot;type&quot;:&quot;text&quot;}"/>
           <p:cNvSpPr txBox="1"/>
           <p:nvPr/>
         </p:nvSpPr>
@@ -9275,7 +9310,7 @@
       </p:sp>
       <p:sp>
         <p:nvSpPr>
-          <p:cNvPr id="186" name="" descr="{&quot;isTemplate&quot;:true,&quot;type&quot;:&quot;text&quot;}"/>
+          <p:cNvPr id="187" name="" descr="{&quot;isTemplate&quot;:true,&quot;type&quot;:&quot;text&quot;}"/>
           <p:cNvSpPr txBox="1"/>
           <p:nvPr/>
         </p:nvSpPr>
@@ -9340,7 +9375,7 @@
       </p:sp>
       <p:sp>
         <p:nvSpPr>
-          <p:cNvPr id="187" name="" descr="{&quot;isTemplate&quot;:true,&quot;type&quot;:&quot;text&quot;}"/>
+          <p:cNvPr id="188" name="" descr="{&quot;isTemplate&quot;:true,&quot;type&quot;:&quot;text&quot;}"/>
           <p:cNvSpPr txBox="1"/>
           <p:nvPr/>
         </p:nvSpPr>
@@ -9383,7 +9418,7 @@
   <p:cSld>
     <p:spTree>
       <p:nvGrpSpPr>
-        <p:cNvPr id="188" name="" descr="&lt;Slide style={{ width: 1280, height: 720, background: '#0B0D14', padding: '56px 72px', flexDirection: 'column' }}&gt;&#13;&#10;  &lt;Box style={{ height: 96, flexDirection: 'row', justifyContent: 'space-between', alignItems: 'flex-start' }}&gt;&#13;&#10;    &lt;Box style={{ flexDirection: 'column', gap: 8 }}&gt;&#13;&#10;      &lt;Text style={{ fontSize: 34, fontWeight: 'bold', color: '#F2F4FF' }}&gt;四层架构：交易底座不动，决策层新建&lt;/Text&gt;&#13;&#10;      &lt;Text style={{ fontSize: 15, color: '#8A90A6' }}&gt;原有 4,294 行代码、42 个模板、190 项测试，全部作为底座继续跑&lt;/Text&gt;&#13;&#10;    &lt;/Box&gt;&#13;&#10;    &lt;Text style={{ fontSize: 13, color: '#4A5064', letterSpacing: 2 }}&gt;AI 掌柜&lt;/Text&gt;&#13;&#10;  &lt;/Box&gt;&#13;&#10;  &lt;Box style={{ flex: 1, paddingTop: 8 }}&gt;&#13;&#10;    &lt;Box style={{ flexDirection: 'column', gap: 14 }}&gt;&#13;&#10;      &lt;Box style={{ background: '#171A2E', border: '1px solid #6C6CF5', borderRadius: 10, padding: '22px 24px', flexDirection: 'row', alignItems: 'center' }}&gt;&#13;&#10;        &lt;Text style={{ fontSize: 13, color: '#6C6CF5', width: 100, letterSpacing: 1 }}&gt;决策界面&lt;/Text&gt;&#13;&#10;        &lt;Text style={{ fontSize: 16, color: '#F2F4FF' }}&gt;AI 驾驶舱 · 经营问答 · 洞察中心 · 采购单 · 四象限 · 预测备货&lt;/Text&gt;&#13;&#10;      &lt;/Box&gt;&#13;&#10;      &lt;Box style={{ background: '#141826', border: '1px solid #242A3D', borderRadius: 10, padding: '22px 24px', flexDirection: 'row', alignItems: 'center' }}&gt;&#13;&#10;        &lt;Text style={{ fontSize: 13, color: '#8A90A6', width: 100, letterSpacing: 1 }}&gt;AI 引擎&lt;/Text&gt;&#13;&#10;        &lt;Text style={{ fontSize: 16, color: '#F2F4FF' }}&gt;受控 NL2SQL · 6 类规则检测 · 三层分解预测 · 可执行工具&lt;/Text&gt;&#13;&#10;      &lt;/Box&gt;&#13;&#10;      &lt;Box style={{ background: '#141826', border: '1px solid #242A3D', borderRadius: 10, padding: '22px 24px', flexDirection: 'row', alignItems: 'center' }}&gt;&#13;&#10;        &lt;Text style={{ fontSize: 13, color: '#8A90A6', width: 100, letterSpacing: 1 }}&gt;指标层&lt;/Text&gt;&#13;&#10;        &lt;Text style={{ fontSize: 16, color: '#F2F4FF' }}&gt;唯一口径 metrics.py · 日粒度预聚合 ETL · 8 个只读语义视图&lt;/Text&gt;&#13;&#10;      &lt;/Box&gt;&#13;&#10;      &lt;Box style={{ background: '#12141F', border: '1px solid #242A3D', borderRadius: 10, padding: '22px 24px', flexDirection: 'row', alignItems: 'center' }}&gt;&#13;&#10;        &lt;Text style={{ fontSize: 13, color: '#4A5064', width: 100, letterSpacing: 1 }}&gt;交易底座&lt;/Text&gt;&#13;&#10;        &lt;Text style={{ fontSize: 16, color: '#8A90A6' }}&gt;点单 · 收银 · 会员 · BOM 配方 · 库存流水 · 预订（Flask + SQLite）&lt;/Text&gt;&#13;&#10;      &lt;/Box&gt;&#13;&#10;    &lt;/Box&gt;&#13;&#10;    &lt;Box style={{ marginTop: 24, flexDirection: 'row', gap: 18 }}&gt;&#13;&#10;      &lt;Box style={{ flex: 1, paddingTop: 14, borderTop: '1px solid #242A3D' }}&gt;&#13;&#10;        &lt;Text style={{ fontSize: 30, fontWeight: 'bold', color: '#6C6CF5' }}&gt;0&lt;/Text&gt;&#13;&#10;        &lt;Text style={{ fontSize: 13, color: '#8A90A6', marginTop: 4 }}&gt;新增第三方运行时依赖&lt;br /&gt;仅 Flask + waitress&lt;/Text&gt;&#13;&#10;      &lt;/Box&gt;&#13;&#10;      &lt;Box style={{ flex: 1, paddingTop: 14, borderTop: '1px solid #242A3D' }}&gt;&#13;&#10;        &lt;Text style={{ fontSize: 30, fontWeight: 'bold', color: '#6C6CF5' }}&gt;1.0s&lt;/Text&gt;&#13;&#10;        &lt;Text style={{ fontSize: 13, color: '#8A90A6', marginTop: 4 }}&gt;看板首屏&lt;br /&gt;180 天预聚合&lt;/Text&gt;&#13;&#10;      &lt;/Box&gt;&#13;&#10;      &lt;Box style={{ flex: 1, paddingTop: 14, borderTop: '1px solid #242A3D' }}&gt;&#13;&#10;        &lt;Text style={{ fontSize: 30, fontWeight: 'bold', color: '#6C6CF5' }}&gt;离线&lt;/Text&gt;&#13;&#10;        &lt;Text style={{ fontSize: 13, color: '#8A90A6', marginTop: 4 }}&gt;可跑：本地模型 / 规则降级&lt;br /&gt;不依赖 CDN 与外网&lt;/Text&gt;&#13;&#10;      &lt;/Box&gt;&#13;&#10;    &lt;/Box&gt;&#13;&#10;    &lt;Box style={{ marginTop: 20, paddingTop: 16, borderTop: '1px solid #242A3D', flexDirection: 'row', gap: 14 }}&gt;&#13;&#10;      &lt;Text style={{ fontSize: 13, color: '#6C6CF5', width: 76 }}&gt;选型取舍&lt;/Text&gt;&#13;&#10;      &lt;Text style={{ fontSize: 14, color: '#8A90A6', lineHeight: 1.7, flex: 1 }}&gt;&#13;&#10;        不引入 numpy / pandas / torch：门店电脑不是服务器，打包体积与启动速度比模型炫技重要；&#13;&#10;        SQLite 开启 WAL 后足以支撑店内 20 路并发点餐。&#13;&#10;      &lt;/Text&gt;&#13;&#10;    &lt;/Box&gt;&#13;&#10;  &lt;/Box&gt;&#13;&#10;  &lt;Box style={{ height: 36, flexDirection: 'row', justifyContent: 'space-between', alignItems: 'flex-end' }}&gt;&#13;&#10;    &lt;Text style={{ fontSize: 12, color: '#4A5064' }}&gt;2026 武汉 1024 · 产业应用赛道&lt;/Text&gt;&#13;&#10;    &lt;Text style={{ fontSize: 12, color: '#4A5064' }}&gt;06 / 12&lt;/Text&gt;&#13;&#10;  &lt;/Box&gt;&#13;&#10;&lt;/Slide&gt;"/>
+        <p:cNvPr id="189" name="" descr="&lt;Slide style={{ width: 1280, height: 720, background: '#0B0D14', padding: '56px 72px', flexDirection: 'column' }}&gt;&#13;&#10;  &lt;Box style={{ height: 96, flexDirection: 'row', justifyContent: 'space-between', alignItems: 'flex-start' }}&gt;&#13;&#10;    &lt;Box style={{ flexDirection: 'column', gap: 8 }}&gt;&#13;&#10;      &lt;Text style={{ fontSize: 34, fontWeight: 'bold', color: '#F2F4FF' }}&gt;四层架构：交易底座不动，决策层新建&lt;/Text&gt;&#13;&#10;      &lt;Text style={{ fontSize: 15, color: '#8A90A6' }}&gt;原有 4,294 行代码、42 个模板、190 项测试，全部作为底座继续跑&lt;/Text&gt;&#13;&#10;    &lt;/Box&gt;&#13;&#10;    &lt;Text style={{ fontSize: 13, color: '#4A5064', letterSpacing: 2 }}&gt;AI 掌柜&lt;/Text&gt;&#13;&#10;  &lt;/Box&gt;&#13;&#10;  &lt;Box style={{ flex: 1, paddingTop: 8 }}&gt;&#13;&#10;    &lt;Box style={{ flexDirection: 'column', gap: 14 }}&gt;&#13;&#10;      &lt;Box style={{ background: '#171A2E', border: '1px solid #6C6CF5', borderRadius: 10, padding: '22px 24px', flexDirection: 'row', alignItems: 'center' }}&gt;&#13;&#10;        &lt;Text style={{ fontSize: 13, color: '#6C6CF5', width: 100, letterSpacing: 1 }}&gt;决策界面&lt;/Text&gt;&#13;&#10;        &lt;Text style={{ fontSize: 16, color: '#F2F4FF' }}&gt;AI 驾驶舱 · 经营问答 · 洞察中心 · 采购单 · 四象限 · 预测备货&lt;/Text&gt;&#13;&#10;      &lt;/Box&gt;&#13;&#10;      &lt;Box style={{ background: '#141826', border: '1px solid #242A3D', borderRadius: 10, padding: '22px 24px', flexDirection: 'row', alignItems: 'center' }}&gt;&#13;&#10;        &lt;Text style={{ fontSize: 13, color: '#8A90A6', width: 100, letterSpacing: 1 }}&gt;AI 引擎&lt;/Text&gt;&#13;&#10;        &lt;Text style={{ fontSize: 16, color: '#F2F4FF' }}&gt;受控 NL2SQL · 6 类规则检测 · 三层分解预测 · 可执行工具&lt;/Text&gt;&#13;&#10;      &lt;/Box&gt;&#13;&#10;      &lt;Box style={{ background: '#141826', border: '1px solid #242A3D', borderRadius: 10, padding: '22px 24px', flexDirection: 'row', alignItems: 'center' }}&gt;&#13;&#10;        &lt;Text style={{ fontSize: 13, color: '#8A90A6', width: 100, letterSpacing: 1 }}&gt;指标层&lt;/Text&gt;&#13;&#10;        &lt;Text style={{ fontSize: 16, color: '#F2F4FF' }}&gt;唯一口径 metrics.py · 日粒度预聚合 ETL · 8 个只读语义视图&lt;/Text&gt;&#13;&#10;      &lt;/Box&gt;&#13;&#10;      &lt;Box style={{ background: '#12141F', border: '1px solid #242A3D', borderRadius: 10, padding: '22px 24px', flexDirection: 'row', alignItems: 'center' }}&gt;&#13;&#10;        &lt;Text style={{ fontSize: 13, color: '#4A5064', width: 100, letterSpacing: 1 }}&gt;交易底座&lt;/Text&gt;&#13;&#10;        &lt;Text style={{ fontSize: 16, color: '#8A90A6' }}&gt;点单 · 收银 · 会员 · BOM 配方 · 库存流水 · 预订（Flask + SQLite）&lt;/Text&gt;&#13;&#10;      &lt;/Box&gt;&#13;&#10;    &lt;/Box&gt;&#13;&#10;    &lt;Box style={{ marginTop: 24, flexDirection: 'row', gap: 18 }}&gt;&#13;&#10;      &lt;Box style={{ flex: 1, paddingTop: 14, borderTop: '1px solid #242A3D' }}&gt;&#13;&#10;        &lt;Text style={{ fontSize: 30, fontWeight: 'bold', color: '#6C6CF5' }}&gt;0&lt;/Text&gt;&#13;&#10;        &lt;Text style={{ fontSize: 13, color: '#8A90A6', marginTop: 4 }}&gt;新增第三方运行时依赖&lt;br /&gt;仅 Flask + waitress&lt;/Text&gt;&#13;&#10;      &lt;/Box&gt;&#13;&#10;      &lt;Box style={{ flex: 1, paddingTop: 14, borderTop: '1px solid #242A3D' }}&gt;&#13;&#10;        &lt;Text style={{ fontSize: 30, fontWeight: 'bold', color: '#6C6CF5' }}&gt;1.0s&lt;/Text&gt;&#13;&#10;        &lt;Text style={{ fontSize: 13, color: '#8A90A6', marginTop: 4 }}&gt;看板首屏&lt;br /&gt;180 天预聚合&lt;/Text&gt;&#13;&#10;      &lt;/Box&gt;&#13;&#10;      &lt;Box style={{ flex: 1, paddingTop: 14, borderTop: '1px solid #242A3D' }}&gt;&#13;&#10;        &lt;Text style={{ fontSize: 30, fontWeight: 'bold', color: '#6C6CF5' }}&gt;离线&lt;/Text&gt;&#13;&#10;        &lt;Text style={{ fontSize: 13, color: '#8A90A6', marginTop: 4 }}&gt;可跑：本地模型 / 规则降级&lt;br /&gt;不依赖 CDN 与外网&lt;/Text&gt;&#13;&#10;      &lt;/Box&gt;&#13;&#10;    &lt;/Box&gt;&#13;&#10;    &lt;Box style={{ marginTop: 20, paddingTop: 16, borderTop: '1px solid #242A3D', flexDirection: 'row', gap: 14 }}&gt;&#13;&#10;      &lt;Text style={{ fontSize: 13, color: '#6C6CF5', width: 76 }}&gt;选型取舍&lt;/Text&gt;&#13;&#10;      &lt;Text style={{ fontSize: 14, color: '#8A90A6', lineHeight: 1.7, flex: 1 }}&gt;&#13;&#10;        不引入 numpy / pandas / torch：门店电脑不是服务器，打包体积与启动速度比模型炫技重要；&#13;&#10;        SQLite 开启 WAL 后足以支撑店内 20 路并发点餐。&#13;&#10;      &lt;/Text&gt;&#13;&#10;    &lt;/Box&gt;&#13;&#10;  &lt;/Box&gt;&#13;&#10;  &lt;Box style={{ height: 36, flexDirection: 'row', justifyContent: 'space-between', alignItems: 'flex-end' }}&gt;&#13;&#10;    &lt;Text style={{ fontSize: 12, color: '#4A5064' }}&gt;2026 武汉 1024 · 产业应用赛道&lt;/Text&gt;&#13;&#10;    &lt;Text style={{ fontSize: 12, color: '#4A5064' }}&gt;06 / 12&lt;/Text&gt;&#13;&#10;  &lt;/Box&gt;&#13;&#10;&lt;/Slide&gt;"/>
         <p:cNvGrpSpPr/>
         <p:nvPr/>
       </p:nvGrpSpPr>
@@ -9397,7 +9432,7 @@
       </p:grpSpPr>
       <p:sp>
         <p:nvSpPr>
-          <p:cNvPr id="189" name=""/>
+          <p:cNvPr id="190" name=""/>
           <p:cNvSpPr/>
           <p:nvPr/>
         </p:nvSpPr>
@@ -9421,7 +9456,7 @@
       </p:sp>
       <p:sp>
         <p:nvSpPr>
-          <p:cNvPr id="190" name="" descr="{&quot;isTemplate&quot;:true,&quot;type&quot;:&quot;text&quot;}"/>
+          <p:cNvPr id="191" name="" descr="{&quot;isTemplate&quot;:true,&quot;type&quot;:&quot;text&quot;}"/>
           <p:cNvSpPr txBox="1"/>
           <p:nvPr/>
         </p:nvSpPr>
@@ -9456,7 +9491,7 @@
       </p:sp>
       <p:sp>
         <p:nvSpPr>
-          <p:cNvPr id="191" name="" descr="{&quot;isTemplate&quot;:true,&quot;type&quot;:&quot;text&quot;}"/>
+          <p:cNvPr id="192" name="" descr="{&quot;isTemplate&quot;:true,&quot;type&quot;:&quot;text&quot;}"/>
           <p:cNvSpPr txBox="1"/>
           <p:nvPr/>
         </p:nvSpPr>
@@ -9551,7 +9586,7 @@
       </p:sp>
       <p:sp>
         <p:nvSpPr>
-          <p:cNvPr id="192" name="" descr="{&quot;isTemplate&quot;:true,&quot;type&quot;:&quot;text&quot;}"/>
+          <p:cNvPr id="193" name="" descr="{&quot;isTemplate&quot;:true,&quot;type&quot;:&quot;text&quot;}"/>
           <p:cNvSpPr txBox="1"/>
           <p:nvPr/>
         </p:nvSpPr>
@@ -9596,7 +9631,7 @@
       </p:sp>
       <p:sp>
         <p:nvSpPr>
-          <p:cNvPr id="193" name=""/>
+          <p:cNvPr id="194" name=""/>
           <p:cNvSpPr/>
           <p:nvPr/>
         </p:nvSpPr>
@@ -9627,7 +9662,7 @@
       </p:sp>
       <p:sp>
         <p:nvSpPr>
-          <p:cNvPr id="194" name="" descr="{&quot;isTemplate&quot;:true,&quot;type&quot;:&quot;text&quot;}"/>
+          <p:cNvPr id="195" name="" descr="{&quot;isTemplate&quot;:true,&quot;type&quot;:&quot;text&quot;}"/>
           <p:cNvSpPr txBox="1"/>
           <p:nvPr/>
         </p:nvSpPr>
@@ -9662,7 +9697,7 @@
       </p:sp>
       <p:sp>
         <p:nvSpPr>
-          <p:cNvPr id="195" name="" descr="{&quot;isTemplate&quot;:true,&quot;type&quot;:&quot;text&quot;}"/>
+          <p:cNvPr id="196" name="" descr="{&quot;isTemplate&quot;:true,&quot;type&quot;:&quot;text&quot;}"/>
           <p:cNvSpPr txBox="1"/>
           <p:nvPr/>
         </p:nvSpPr>
@@ -9807,7 +9842,7 @@
       </p:sp>
       <p:sp>
         <p:nvSpPr>
-          <p:cNvPr id="196" name=""/>
+          <p:cNvPr id="197" name=""/>
           <p:cNvSpPr/>
           <p:nvPr/>
         </p:nvSpPr>
@@ -9838,7 +9873,7 @@
       </p:sp>
       <p:sp>
         <p:nvSpPr>
-          <p:cNvPr id="197" name="" descr="{&quot;isTemplate&quot;:true,&quot;type&quot;:&quot;text&quot;}"/>
+          <p:cNvPr id="198" name="" descr="{&quot;isTemplate&quot;:true,&quot;type&quot;:&quot;text&quot;}"/>
           <p:cNvSpPr txBox="1"/>
           <p:nvPr/>
         </p:nvSpPr>
@@ -9883,7 +9918,7 @@
       </p:sp>
       <p:sp>
         <p:nvSpPr>
-          <p:cNvPr id="198" name="" descr="{&quot;isTemplate&quot;:true,&quot;type&quot;:&quot;text&quot;}"/>
+          <p:cNvPr id="199" name="" descr="{&quot;isTemplate&quot;:true,&quot;type&quot;:&quot;text&quot;}"/>
           <p:cNvSpPr txBox="1"/>
           <p:nvPr/>
         </p:nvSpPr>
@@ -9978,7 +10013,7 @@
       </p:sp>
       <p:sp>
         <p:nvSpPr>
-          <p:cNvPr id="199" name=""/>
+          <p:cNvPr id="200" name=""/>
           <p:cNvSpPr/>
           <p:nvPr/>
         </p:nvSpPr>
@@ -10009,7 +10044,7 @@
       </p:sp>
       <p:sp>
         <p:nvSpPr>
-          <p:cNvPr id="200" name="" descr="{&quot;isTemplate&quot;:true,&quot;type&quot;:&quot;text&quot;}"/>
+          <p:cNvPr id="201" name="" descr="{&quot;isTemplate&quot;:true,&quot;type&quot;:&quot;text&quot;}"/>
           <p:cNvSpPr txBox="1"/>
           <p:nvPr/>
         </p:nvSpPr>
@@ -10044,7 +10079,7 @@
       </p:sp>
       <p:sp>
         <p:nvSpPr>
-          <p:cNvPr id="201" name="" descr="{&quot;isTemplate&quot;:true,&quot;type&quot;:&quot;text&quot;}"/>
+          <p:cNvPr id="202" name="" descr="{&quot;isTemplate&quot;:true,&quot;type&quot;:&quot;text&quot;}"/>
           <p:cNvSpPr txBox="1"/>
           <p:nvPr/>
         </p:nvSpPr>
@@ -10119,7 +10154,7 @@
       </p:sp>
       <p:sp>
         <p:nvSpPr>
-          <p:cNvPr id="202" name=""/>
+          <p:cNvPr id="203" name=""/>
           <p:cNvSpPr/>
           <p:nvPr/>
         </p:nvSpPr>
@@ -10150,7 +10185,7 @@
       </p:sp>
       <p:sp>
         <p:nvSpPr>
-          <p:cNvPr id="203" name="" descr="{&quot;isTemplate&quot;:true,&quot;type&quot;:&quot;text&quot;}"/>
+          <p:cNvPr id="204" name="" descr="{&quot;isTemplate&quot;:true,&quot;type&quot;:&quot;text&quot;}"/>
           <p:cNvSpPr txBox="1"/>
           <p:nvPr/>
         </p:nvSpPr>
@@ -10185,7 +10220,7 @@
       </p:sp>
       <p:sp>
         <p:nvSpPr>
-          <p:cNvPr id="204" name="" descr="{&quot;isTemplate&quot;:true,&quot;type&quot;:&quot;text&quot;}"/>
+          <p:cNvPr id="205" name="" descr="{&quot;isTemplate&quot;:true,&quot;type&quot;:&quot;text&quot;}"/>
           <p:cNvSpPr txBox="1"/>
           <p:nvPr/>
         </p:nvSpPr>
@@ -10340,7 +10375,7 @@
       </p:sp>
       <p:sp>
         <p:nvSpPr>
-          <p:cNvPr id="205" name=""/>
+          <p:cNvPr id="206" name=""/>
           <p:cNvSpPr/>
           <p:nvPr/>
         </p:nvSpPr>
@@ -10380,7 +10415,7 @@
       </p:sp>
       <p:sp>
         <p:nvSpPr>
-          <p:cNvPr id="206" name="" descr="{&quot;isTemplate&quot;:true,&quot;type&quot;:&quot;text&quot;}"/>
+          <p:cNvPr id="207" name="" descr="{&quot;isTemplate&quot;:true,&quot;type&quot;:&quot;text&quot;}"/>
           <p:cNvSpPr txBox="1"/>
           <p:nvPr/>
         </p:nvSpPr>
@@ -10415,7 +10450,7 @@
       </p:sp>
       <p:sp>
         <p:nvSpPr>
-          <p:cNvPr id="207" name="" descr="{&quot;isTemplate&quot;:true,&quot;type&quot;:&quot;text&quot;}"/>
+          <p:cNvPr id="208" name="" descr="{&quot;isTemplate&quot;:true,&quot;type&quot;:&quot;text&quot;}"/>
           <p:cNvSpPr txBox="1"/>
           <p:nvPr/>
         </p:nvSpPr>
@@ -10478,7 +10513,7 @@
       </p:sp>
       <p:sp>
         <p:nvSpPr>
-          <p:cNvPr id="208" name=""/>
+          <p:cNvPr id="209" name=""/>
           <p:cNvSpPr/>
           <p:nvPr/>
         </p:nvSpPr>
@@ -10518,7 +10553,7 @@
       </p:sp>
       <p:sp>
         <p:nvSpPr>
-          <p:cNvPr id="209" name="" descr="{&quot;isTemplate&quot;:true,&quot;type&quot;:&quot;text&quot;}"/>
+          <p:cNvPr id="210" name="" descr="{&quot;isTemplate&quot;:true,&quot;type&quot;:&quot;text&quot;}"/>
           <p:cNvSpPr txBox="1"/>
           <p:nvPr/>
         </p:nvSpPr>
@@ -10553,7 +10588,7 @@
       </p:sp>
       <p:sp>
         <p:nvSpPr>
-          <p:cNvPr id="210" name="" descr="{&quot;isTemplate&quot;:true,&quot;type&quot;:&quot;text&quot;}"/>
+          <p:cNvPr id="211" name="" descr="{&quot;isTemplate&quot;:true,&quot;type&quot;:&quot;text&quot;}"/>
           <p:cNvSpPr txBox="1"/>
           <p:nvPr/>
         </p:nvSpPr>
@@ -10616,7 +10651,7 @@
       </p:sp>
       <p:sp>
         <p:nvSpPr>
-          <p:cNvPr id="211" name=""/>
+          <p:cNvPr id="212" name=""/>
           <p:cNvSpPr/>
           <p:nvPr/>
         </p:nvSpPr>
@@ -10656,7 +10691,7 @@
       </p:sp>
       <p:sp>
         <p:nvSpPr>
-          <p:cNvPr id="212" name="" descr="{&quot;isTemplate&quot;:true,&quot;type&quot;:&quot;text&quot;}"/>
+          <p:cNvPr id="213" name="" descr="{&quot;isTemplate&quot;:true,&quot;type&quot;:&quot;text&quot;}"/>
           <p:cNvSpPr txBox="1"/>
           <p:nvPr/>
         </p:nvSpPr>
@@ -10691,7 +10726,7 @@
       </p:sp>
       <p:sp>
         <p:nvSpPr>
-          <p:cNvPr id="213" name="" descr="{&quot;isTemplate&quot;:true,&quot;type&quot;:&quot;text&quot;}"/>
+          <p:cNvPr id="214" name="" descr="{&quot;isTemplate&quot;:true,&quot;type&quot;:&quot;text&quot;}"/>
           <p:cNvSpPr txBox="1"/>
           <p:nvPr/>
         </p:nvSpPr>
@@ -10784,7 +10819,7 @@
       </p:sp>
       <p:sp>
         <p:nvSpPr>
-          <p:cNvPr id="214" name=""/>
+          <p:cNvPr id="215" name=""/>
           <p:cNvSpPr/>
           <p:nvPr/>
         </p:nvSpPr>
@@ -10824,7 +10859,7 @@
       </p:sp>
       <p:sp>
         <p:nvSpPr>
-          <p:cNvPr id="215" name="" descr="{&quot;isTemplate&quot;:true,&quot;type&quot;:&quot;text&quot;}"/>
+          <p:cNvPr id="216" name="" descr="{&quot;isTemplate&quot;:true,&quot;type&quot;:&quot;text&quot;}"/>
           <p:cNvSpPr txBox="1"/>
           <p:nvPr/>
         </p:nvSpPr>
@@ -10859,7 +10894,7 @@
       </p:sp>
       <p:sp>
         <p:nvSpPr>
-          <p:cNvPr id="216" name="" descr="{&quot;isTemplate&quot;:true,&quot;type&quot;:&quot;text&quot;}"/>
+          <p:cNvPr id="217" name="" descr="{&quot;isTemplate&quot;:true,&quot;type&quot;:&quot;text&quot;}"/>
           <p:cNvSpPr txBox="1"/>
           <p:nvPr/>
         </p:nvSpPr>
@@ -10974,7 +11009,7 @@
       </p:sp>
       <p:sp>
         <p:nvSpPr>
-          <p:cNvPr id="217" name="" descr="{&quot;isTemplate&quot;:true,&quot;type&quot;:&quot;text&quot;}"/>
+          <p:cNvPr id="218" name="" descr="{&quot;isTemplate&quot;:true,&quot;type&quot;:&quot;text&quot;}"/>
           <p:cNvSpPr txBox="1"/>
           <p:nvPr/>
         </p:nvSpPr>
@@ -11039,7 +11074,7 @@
       </p:sp>
       <p:sp>
         <p:nvSpPr>
-          <p:cNvPr id="218" name="" descr="{&quot;isTemplate&quot;:true,&quot;type&quot;:&quot;text&quot;}"/>
+          <p:cNvPr id="219" name="" descr="{&quot;isTemplate&quot;:true,&quot;type&quot;:&quot;text&quot;}"/>
           <p:cNvSpPr txBox="1"/>
           <p:nvPr/>
         </p:nvSpPr>
@@ -11082,7 +11117,7 @@
   <p:cSld>
     <p:spTree>
       <p:nvGrpSpPr>
-        <p:cNvPr id="219" name="" descr="&lt;Slide style={{ width: 1280, height: 720, background: '#0B0D14', padding: '56px 72px', flexDirection: 'column' }}&gt;&#13;&#10;  &lt;Box style={{ height: 96, flexDirection: 'row', justifyContent: 'space-between', alignItems: 'flex-start' }}&gt;&#13;&#10;    &lt;Box style={{ flexDirection: 'column', gap: 8 }}&gt;&#13;&#10;      &lt;Text style={{ fontSize: 34, fontWeight: 'bold', color: '#F2F4FF' }}&gt;敢让它查数，是因为它改不了数&lt;/Text&gt;&#13;&#10;      &lt;Text style={{ fontSize: 15, color: '#8A90A6' }}&gt;自然语言查数的五道闸 —— 对应评审的「稳定性与合规性」&lt;/Text&gt;&#13;&#10;    &lt;/Box&gt;&#13;&#10;    &lt;Text style={{ fontSize: 13, color: '#4A5064', letterSpacing: 2 }}&gt;AI 掌柜&lt;/Text&gt;&#13;&#10;  &lt;/Box&gt;&#13;&#10;  &lt;Box style={{ flex: 1, paddingTop: 8 }}&gt;&#13;&#10;    &lt;Box style={{ flexDirection: 'row', gap: 26 }}&gt;&#13;&#10;      &lt;Box style={{ flex: 1.3, flexDirection: 'column', gap: 18 }}&gt;&#13;&#10;        &lt;Box style={{ flexDirection: 'row', gap: 16, alignItems: 'flex-start' }}&gt;&#13;&#10;          &lt;Text style={{ fontSize: 16, fontWeight: 'bold', color: '#6C6CF5', width: 34 }}&gt;01&lt;/Text&gt;&#13;&#10;          &lt;Box style={{ flexDirection: 'column', gap: 4 }}&gt;&#13;&#10;            &lt;Text style={{ fontSize: 19, color: '#F2F4FF' }}&gt;只读连接&lt;/Text&gt;&#13;&#10;            &lt;Text style={{ fontSize: 14, color: '#8A90A6' }}&gt;query_only=ON，数据库层面拒绝一切写操作&lt;/Text&gt;&#13;&#10;          &lt;/Box&gt;&#13;&#10;        &lt;/Box&gt;&#13;&#10;        &lt;Box style={{ flexDirection: 'row', gap: 16, alignItems: 'flex-start' }}&gt;&#13;&#10;          &lt;Text style={{ fontSize: 16, fontWeight: 'bold', color: '#6C6CF5', width: 34 }}&gt;02&lt;/Text&gt;&#13;&#10;          &lt;Box style={{ flexDirection: 'column', gap: 4 }}&gt;&#13;&#10;            &lt;Text style={{ fontSize: 19, color: '#F2F4FF' }}&gt;视图白名单&lt;/Text&gt;&#13;&#10;            &lt;Text style={{ fontSize: 14, color: '#8A90A6' }}&gt;只认 8 个 v_* 语义视图，读不到会员手机号与设置表&lt;/Text&gt;&#13;&#10;          &lt;/Box&gt;&#13;&#10;        &lt;/Box&gt;&#13;&#10;        &lt;Box style={{ flexDirection: 'row', gap: 16, alignItems: 'flex-start' }}&gt;&#13;&#10;          &lt;Text style={{ fontSize: 16, fontWeight: 'bold', color: '#6C6CF5', width: 34 }}&gt;03&lt;/Text&gt;&#13;&#10;          &lt;Box style={{ flexDirection: 'column', gap: 4 }}&gt;&#13;&#10;            &lt;Text style={{ fontSize: 19, color: '#F2F4FF' }}&gt;语法校验&lt;/Text&gt;&#13;&#10;            &lt;Text style={{ fontSize: 14, color: '#8A90A6' }}&gt;单条 SELECT；禁 DDL / DML / ATTACH / UNION / 系统表&lt;/Text&gt;&#13;&#10;          &lt;/Box&gt;&#13;&#10;        &lt;/Box&gt;&#13;&#10;        &lt;Box style={{ flexDirection: 'row', gap: 16, alignItems: 'flex-start' }}&gt;&#13;&#10;          &lt;Text style={{ fontSize: 16, fontWeight: 'bold', color: '#6C6CF5', width: 34 }}&gt;04&lt;/Text&gt;&#13;&#10;          &lt;Box style={{ flexDirection: 'column', gap: 4 }}&gt;&#13;&#10;            &lt;Text style={{ fontSize: 19, color: '#F2F4FF' }}&gt;强制约束&lt;/Text&gt;&#13;&#10;            &lt;Text style={{ fontSize: 14, color: '#8A90A6' }}&gt;自动补 LIMIT 500，6 秒超时中断，慢查询拖不死库&lt;/Text&gt;&#13;&#10;          &lt;/Box&gt;&#13;&#10;        &lt;/Box&gt;&#13;&#10;        &lt;Box style={{ flexDirection: 'row', gap: 16, alignItems: 'flex-start' }}&gt;&#13;&#10;          &lt;Text style={{ fontSize: 16, fontWeight: 'bold', color: '#6C6CF5', width: 34 }}&gt;05&lt;/Text&gt;&#13;&#10;          &lt;Box style={{ flexDirection: 'column', gap: 4 }}&gt;&#13;&#10;            &lt;Text style={{ fontSize: 19, color: '#F2F4FF' }}&gt;结果上限&lt;/Text&gt;&#13;&#10;            &lt;Text style={{ fontSize: 14, color: '#8A90A6' }}&gt;最多 500 行，不会把大结果集塞进模型上下文&lt;/Text&gt;&#13;&#10;          &lt;/Box&gt;&#13;&#10;        &lt;/Box&gt;&#13;&#10;      &lt;/Box&gt;&#13;&#10;      &lt;Box style={{ flex: 1, background: '#141826', border: '1px solid #242A3D', borderRadius: 14, padding: 26, flexDirection: 'column', justifyContent: 'space-between' }}&gt;&#13;&#10;        &lt;Box&gt;&#13;&#10;          &lt;Text style={{ fontSize: 13, color: '#8A90A6', letterSpacing: 1 }}&gt;自动化验证&lt;/Text&gt;&#13;&#10;          &lt;Text style={{ fontSize: 62, fontWeight: 'bold', color: '#6C6CF5', marginTop: 6 }}&gt;8 / 8&lt;/Text&gt;&#13;&#10;          &lt;Text style={{ fontSize: 15, color: '#F2F4FF', marginTop: 4 }}&gt;越界语句全部拦截&lt;/Text&gt;&#13;&#10;        &lt;/Box&gt;&#13;&#10;        &lt;Box style={{ flexDirection: 'column', gap: 6 }}&gt;&#13;&#10;          &lt;Text style={{ fontSize: 12, color: '#8A90A6' }}&gt;SELECT * FROM members&lt;/Text&gt;&#13;&#10;          &lt;Text style={{ fontSize: 12, color: '#8A90A6' }}&gt;DROP TABLE orders&lt;/Text&gt;&#13;&#10;          &lt;Text style={{ fontSize: 12, color: '#8A90A6' }}&gt;SELECT 1; DELETE FROM orders&lt;/Text&gt;&#13;&#10;          &lt;Text style={{ fontSize: 12, color: '#8A90A6' }}&gt;... UNION SELECT * FROM settings&lt;/Text&gt;&#13;&#10;          &lt;Text style={{ fontSize: 12, color: '#8A90A6' }}&gt;ATTACH / PRAGMA / sqlite_master&lt;/Text&gt;&#13;&#10;        &lt;/Box&gt;&#13;&#10;        &lt;Text style={{ fontSize: 12, color: '#6C6CF5' }}&gt;越界时先自动修复一轮 SQL，再失败才降级&lt;/Text&gt;&#13;&#10;      &lt;/Box&gt;&#13;&#10;    &lt;/Box&gt;&#13;&#10;    &lt;Box style={{ marginTop: 22, paddingTop: 18, borderTop: '1px solid #242A3D', flexDirection: 'row', gap: 16 }}&gt;&#13;&#10;      &lt;Box style={{ width: 5, height: 46, background: '#6C6CF5', borderRadius: 3 }} /&gt;&#13;&#10;      &lt;Text style={{ fontSize: 16, color: '#8A90A6', lineHeight: 1.75, flex: 1 }}&gt;&#13;&#10;        黑名单永远会被绕过。真正的安全来自两层：数据库层面拒绝写、语义视图看不到敏感表；&lt;br /&gt;&#13;&#10;        其余三道闸只是把越界请求挡在更早的地方，顺便给出人能看懂的拒绝理由。&#13;&#10;      &lt;/Text&gt;&#13;&#10;    &lt;/Box&gt;&#13;&#10;  &lt;/Box&gt;&#13;&#10;  &lt;Box style={{ height: 36, flexDirection: 'row', justifyContent: 'space-between', alignItems: 'flex-end' }}&gt;&#13;&#10;    &lt;Text style={{ fontSize: 12, color: '#4A5064' }}&gt;2026 武汉 1024 · 产业应用赛道&lt;/Text&gt;&#13;&#10;    &lt;Text style={{ fontSize: 12, color: '#4A5064' }}&gt;07 / 12&lt;/Text&gt;&#13;&#10;  &lt;/Box&gt;&#13;&#10;&lt;/Slide&gt;"/>
+        <p:cNvPr id="220" name="" descr="&lt;Slide style={{ width: 1280, height: 720, background: '#0B0D14', padding: '56px 72px', flexDirection: 'column' }}&gt;&#13;&#10;  &lt;Box style={{ height: 96, flexDirection: 'row', justifyContent: 'space-between', alignItems: 'flex-start' }}&gt;&#13;&#10;    &lt;Box style={{ flexDirection: 'column', gap: 8 }}&gt;&#13;&#10;      &lt;Text style={{ fontSize: 34, fontWeight: 'bold', color: '#F2F4FF' }}&gt;敢让它查数，是因为它改不了数&lt;/Text&gt;&#13;&#10;      &lt;Text style={{ fontSize: 15, color: '#8A90A6' }}&gt;自然语言查数的五道闸 —— 对应评审的「稳定性与合规性」&lt;/Text&gt;&#13;&#10;    &lt;/Box&gt;&#13;&#10;    &lt;Text style={{ fontSize: 13, color: '#4A5064', letterSpacing: 2 }}&gt;AI 掌柜&lt;/Text&gt;&#13;&#10;  &lt;/Box&gt;&#13;&#10;  &lt;Box style={{ flex: 1, paddingTop: 8 }}&gt;&#13;&#10;    &lt;Box style={{ flexDirection: 'row', gap: 26 }}&gt;&#13;&#10;      &lt;Box style={{ flex: 1.3, flexDirection: 'column', gap: 18 }}&gt;&#13;&#10;        &lt;Box style={{ flexDirection: 'row', gap: 16, alignItems: 'flex-start' }}&gt;&#13;&#10;          &lt;Text style={{ fontSize: 16, fontWeight: 'bold', color: '#6C6CF5', width: 34 }}&gt;01&lt;/Text&gt;&#13;&#10;          &lt;Box style={{ flexDirection: 'column', gap: 4 }}&gt;&#13;&#10;            &lt;Text style={{ fontSize: 19, color: '#F2F4FF' }}&gt;只读连接&lt;/Text&gt;&#13;&#10;            &lt;Text style={{ fontSize: 14, color: '#8A90A6' }}&gt;query_only=ON，数据库层面拒绝一切写操作&lt;/Text&gt;&#13;&#10;          &lt;/Box&gt;&#13;&#10;        &lt;/Box&gt;&#13;&#10;        &lt;Box style={{ flexDirection: 'row', gap: 16, alignItems: 'flex-start' }}&gt;&#13;&#10;          &lt;Text style={{ fontSize: 16, fontWeight: 'bold', color: '#6C6CF5', width: 34 }}&gt;02&lt;/Text&gt;&#13;&#10;          &lt;Box style={{ flexDirection: 'column', gap: 4 }}&gt;&#13;&#10;            &lt;Text style={{ fontSize: 19, color: '#F2F4FF' }}&gt;视图白名单&lt;/Text&gt;&#13;&#10;            &lt;Text style={{ fontSize: 14, color: '#8A90A6' }}&gt;只认 8 个 v_* 语义视图，读不到会员手机号与设置表&lt;/Text&gt;&#13;&#10;          &lt;/Box&gt;&#13;&#10;        &lt;/Box&gt;&#13;&#10;        &lt;Box style={{ flexDirection: 'row', gap: 16, alignItems: 'flex-start' }}&gt;&#13;&#10;          &lt;Text style={{ fontSize: 16, fontWeight: 'bold', color: '#6C6CF5', width: 34 }}&gt;03&lt;/Text&gt;&#13;&#10;          &lt;Box style={{ flexDirection: 'column', gap: 4 }}&gt;&#13;&#10;            &lt;Text style={{ fontSize: 19, color: '#F2F4FF' }}&gt;语法校验&lt;/Text&gt;&#13;&#10;            &lt;Text style={{ fontSize: 14, color: '#8A90A6' }}&gt;单条 SELECT；禁 DDL / DML / ATTACH / UNION / 系统表&lt;/Text&gt;&#13;&#10;          &lt;/Box&gt;&#13;&#10;        &lt;/Box&gt;&#13;&#10;        &lt;Box style={{ flexDirection: 'row', gap: 16, alignItems: 'flex-start' }}&gt;&#13;&#10;          &lt;Text style={{ fontSize: 16, fontWeight: 'bold', color: '#6C6CF5', width: 34 }}&gt;04&lt;/Text&gt;&#13;&#10;          &lt;Box style={{ flexDirection: 'column', gap: 4 }}&gt;&#13;&#10;            &lt;Text style={{ fontSize: 19, color: '#F2F4FF' }}&gt;强制约束&lt;/Text&gt;&#13;&#10;            &lt;Text style={{ fontSize: 14, color: '#8A90A6' }}&gt;自动补 LIMIT 500，6 秒超时中断，慢查询拖不死库&lt;/Text&gt;&#13;&#10;          &lt;/Box&gt;&#13;&#10;        &lt;/Box&gt;&#13;&#10;        &lt;Box style={{ flexDirection: 'row', gap: 16, alignItems: 'flex-start' }}&gt;&#13;&#10;          &lt;Text style={{ fontSize: 16, fontWeight: 'bold', color: '#6C6CF5', width: 34 }}&gt;05&lt;/Text&gt;&#13;&#10;          &lt;Box style={{ flexDirection: 'column', gap: 4 }}&gt;&#13;&#10;            &lt;Text style={{ fontSize: 19, color: '#F2F4FF' }}&gt;结果上限&lt;/Text&gt;&#13;&#10;            &lt;Text style={{ fontSize: 14, color: '#8A90A6' }}&gt;最多 500 行，不会把大结果集塞进模型上下文&lt;/Text&gt;&#13;&#10;          &lt;/Box&gt;&#13;&#10;        &lt;/Box&gt;&#13;&#10;      &lt;/Box&gt;&#13;&#10;      &lt;Box style={{ flex: 1, background: '#141826', border: '1px solid #242A3D', borderRadius: 14, padding: 26, flexDirection: 'column', justifyContent: 'space-between' }}&gt;&#13;&#10;        &lt;Box&gt;&#13;&#10;          &lt;Text style={{ fontSize: 13, color: '#8A90A6', letterSpacing: 1 }}&gt;自动化验证&lt;/Text&gt;&#13;&#10;          &lt;Text style={{ fontSize: 62, fontWeight: 'bold', color: '#6C6CF5', marginTop: 6 }}&gt;8 / 8&lt;/Text&gt;&#13;&#10;          &lt;Text style={{ fontSize: 15, color: '#F2F4FF', marginTop: 4 }}&gt;越界语句全部拦截&lt;/Text&gt;&#13;&#10;        &lt;/Box&gt;&#13;&#10;        &lt;Box style={{ flexDirection: 'column', gap: 6 }}&gt;&#13;&#10;          &lt;Text style={{ fontSize: 12, color: '#8A90A6' }}&gt;SELECT * FROM members&lt;/Text&gt;&#13;&#10;          &lt;Text style={{ fontSize: 12, color: '#8A90A6' }}&gt;DROP TABLE orders&lt;/Text&gt;&#13;&#10;          &lt;Text style={{ fontSize: 12, color: '#8A90A6' }}&gt;SELECT 1; DELETE FROM orders&lt;/Text&gt;&#13;&#10;          &lt;Text style={{ fontSize: 12, color: '#8A90A6' }}&gt;... UNION SELECT * FROM settings&lt;/Text&gt;&#13;&#10;          &lt;Text style={{ fontSize: 12, color: '#8A90A6' }}&gt;ATTACH / PRAGMA / sqlite_master&lt;/Text&gt;&#13;&#10;        &lt;/Box&gt;&#13;&#10;        &lt;Text style={{ fontSize: 12, color: '#6C6CF5' }}&gt;越界时先自动修复一轮 SQL，再失败才降级&lt;/Text&gt;&#13;&#10;      &lt;/Box&gt;&#13;&#10;    &lt;/Box&gt;&#13;&#10;    &lt;Box style={{ marginTop: 22, paddingTop: 18, borderTop: '1px solid #242A3D', flexDirection: 'row', gap: 16 }}&gt;&#13;&#10;      &lt;Box style={{ width: 5, height: 46, background: '#6C6CF5', borderRadius: 3 }} /&gt;&#13;&#10;      &lt;Text style={{ fontSize: 16, color: '#8A90A6', lineHeight: 1.75, flex: 1 }}&gt;&#13;&#10;        黑名单永远会被绕过。真正的安全来自两层：数据库层面拒绝写、语义视图看不到敏感表；&lt;br /&gt;&#13;&#10;        其余三道闸只是把越界请求挡在更早的地方，顺便给出人能看懂的拒绝理由。&#13;&#10;      &lt;/Text&gt;&#13;&#10;    &lt;/Box&gt;&#13;&#10;  &lt;/Box&gt;&#13;&#10;  &lt;Box style={{ height: 36, flexDirection: 'row', justifyContent: 'space-between', alignItems: 'flex-end' }}&gt;&#13;&#10;    &lt;Text style={{ fontSize: 12, color: '#4A5064' }}&gt;2026 武汉 1024 · 产业应用赛道&lt;/Text&gt;&#13;&#10;    &lt;Text style={{ fontSize: 12, color: '#4A5064' }}&gt;07 / 12&lt;/Text&gt;&#13;&#10;  &lt;/Box&gt;&#13;&#10;&lt;/Slide&gt;"/>
         <p:cNvGrpSpPr/>
         <p:nvPr/>
       </p:nvGrpSpPr>
@@ -11096,7 +11131,7 @@
       </p:grpSpPr>
       <p:sp>
         <p:nvSpPr>
-          <p:cNvPr id="220" name=""/>
+          <p:cNvPr id="221" name=""/>
           <p:cNvSpPr/>
           <p:nvPr/>
         </p:nvSpPr>
@@ -11120,7 +11155,7 @@
       </p:sp>
       <p:sp>
         <p:nvSpPr>
-          <p:cNvPr id="221" name="" descr="{&quot;isTemplate&quot;:true,&quot;type&quot;:&quot;text&quot;}"/>
+          <p:cNvPr id="222" name="" descr="{&quot;isTemplate&quot;:true,&quot;type&quot;:&quot;text&quot;}"/>
           <p:cNvSpPr txBox="1"/>
           <p:nvPr/>
         </p:nvSpPr>
@@ -11155,7 +11190,7 @@
       </p:sp>
       <p:sp>
         <p:nvSpPr>
-          <p:cNvPr id="222" name="" descr="{&quot;isTemplate&quot;:true,&quot;type&quot;:&quot;text&quot;}"/>
+          <p:cNvPr id="223" name="" descr="{&quot;isTemplate&quot;:true,&quot;type&quot;:&quot;text&quot;}"/>
           <p:cNvSpPr txBox="1"/>
           <p:nvPr/>
         </p:nvSpPr>
@@ -11210,7 +11245,7 @@
       </p:sp>
       <p:sp>
         <p:nvSpPr>
-          <p:cNvPr id="223" name="" descr="{&quot;isTemplate&quot;:true,&quot;type&quot;:&quot;text&quot;}"/>
+          <p:cNvPr id="224" name="" descr="{&quot;isTemplate&quot;:true,&quot;type&quot;:&quot;text&quot;}"/>
           <p:cNvSpPr txBox="1"/>
           <p:nvPr/>
         </p:nvSpPr>
@@ -11255,7 +11290,7 @@
       </p:sp>
       <p:sp>
         <p:nvSpPr>
-          <p:cNvPr id="224" name="" descr="{&quot;isTemplate&quot;:true,&quot;type&quot;:&quot;text&quot;}"/>
+          <p:cNvPr id="225" name="" descr="{&quot;isTemplate&quot;:true,&quot;type&quot;:&quot;text&quot;}"/>
           <p:cNvSpPr txBox="1"/>
           <p:nvPr/>
         </p:nvSpPr>
@@ -11290,7 +11325,7 @@
       </p:sp>
       <p:sp>
         <p:nvSpPr>
-          <p:cNvPr id="225" name="" descr="{&quot;isTemplate&quot;:true,&quot;type&quot;:&quot;text&quot;}"/>
+          <p:cNvPr id="226" name="" descr="{&quot;isTemplate&quot;:true,&quot;type&quot;:&quot;text&quot;}"/>
           <p:cNvSpPr txBox="1"/>
           <p:nvPr/>
         </p:nvSpPr>
@@ -11325,7 +11360,7 @@
       </p:sp>
       <p:sp>
         <p:nvSpPr>
-          <p:cNvPr id="226" name="" descr="{&quot;isTemplate&quot;:true,&quot;type&quot;:&quot;text&quot;}"/>
+          <p:cNvPr id="227" name="" descr="{&quot;isTemplate&quot;:true,&quot;type&quot;:&quot;text&quot;}"/>
           <p:cNvSpPr txBox="1"/>
           <p:nvPr/>
         </p:nvSpPr>
@@ -11370,7 +11405,7 @@
       </p:sp>
       <p:sp>
         <p:nvSpPr>
-          <p:cNvPr id="227" name="" descr="{&quot;isTemplate&quot;:true,&quot;type&quot;:&quot;text&quot;}"/>
+          <p:cNvPr id="228" name="" descr="{&quot;isTemplate&quot;:true,&quot;type&quot;:&quot;text&quot;}"/>
           <p:cNvSpPr txBox="1"/>
           <p:nvPr/>
         </p:nvSpPr>
@@ -11405,7 +11440,7 @@
       </p:sp>
       <p:sp>
         <p:nvSpPr>
-          <p:cNvPr id="228" name="" descr="{&quot;isTemplate&quot;:true,&quot;type&quot;:&quot;text&quot;}"/>
+          <p:cNvPr id="229" name="" descr="{&quot;isTemplate&quot;:true,&quot;type&quot;:&quot;text&quot;}"/>
           <p:cNvSpPr txBox="1"/>
           <p:nvPr/>
         </p:nvSpPr>
@@ -11440,7 +11475,7 @@
       </p:sp>
       <p:sp>
         <p:nvSpPr>
-          <p:cNvPr id="229" name="" descr="{&quot;isTemplate&quot;:true,&quot;type&quot;:&quot;text&quot;}"/>
+          <p:cNvPr id="230" name="" descr="{&quot;isTemplate&quot;:true,&quot;type&quot;:&quot;text&quot;}"/>
           <p:cNvSpPr txBox="1"/>
           <p:nvPr/>
         </p:nvSpPr>
@@ -11515,7 +11550,7 @@
       </p:sp>
       <p:sp>
         <p:nvSpPr>
-          <p:cNvPr id="230" name="" descr="{&quot;isTemplate&quot;:true,&quot;type&quot;:&quot;text&quot;}"/>
+          <p:cNvPr id="231" name="" descr="{&quot;isTemplate&quot;:true,&quot;type&quot;:&quot;text&quot;}"/>
           <p:cNvSpPr txBox="1"/>
           <p:nvPr/>
         </p:nvSpPr>
@@ -11550,7 +11585,7 @@
       </p:sp>
       <p:sp>
         <p:nvSpPr>
-          <p:cNvPr id="231" name="" descr="{&quot;isTemplate&quot;:true,&quot;type&quot;:&quot;text&quot;}"/>
+          <p:cNvPr id="232" name="" descr="{&quot;isTemplate&quot;:true,&quot;type&quot;:&quot;text&quot;}"/>
           <p:cNvSpPr txBox="1"/>
           <p:nvPr/>
         </p:nvSpPr>
@@ -11585,7 +11620,7 @@
       </p:sp>
       <p:sp>
         <p:nvSpPr>
-          <p:cNvPr id="232" name="" descr="{&quot;isTemplate&quot;:true,&quot;type&quot;:&quot;text&quot;}"/>
+          <p:cNvPr id="233" name="" descr="{&quot;isTemplate&quot;:true,&quot;type&quot;:&quot;text&quot;}"/>
           <p:cNvSpPr txBox="1"/>
           <p:nvPr/>
         </p:nvSpPr>
@@ -11660,7 +11695,7 @@
       </p:sp>
       <p:sp>
         <p:nvSpPr>
-          <p:cNvPr id="233" name="" descr="{&quot;isTemplate&quot;:true,&quot;type&quot;:&quot;text&quot;}"/>
+          <p:cNvPr id="234" name="" descr="{&quot;isTemplate&quot;:true,&quot;type&quot;:&quot;text&quot;}"/>
           <p:cNvSpPr txBox="1"/>
           <p:nvPr/>
         </p:nvSpPr>
@@ -11695,7 +11730,7 @@
       </p:sp>
       <p:sp>
         <p:nvSpPr>
-          <p:cNvPr id="234" name="" descr="{&quot;isTemplate&quot;:true,&quot;type&quot;:&quot;text&quot;}"/>
+          <p:cNvPr id="235" name="" descr="{&quot;isTemplate&quot;:true,&quot;type&quot;:&quot;text&quot;}"/>
           <p:cNvSpPr txBox="1"/>
           <p:nvPr/>
         </p:nvSpPr>
@@ -11730,7 +11765,7 @@
       </p:sp>
       <p:sp>
         <p:nvSpPr>
-          <p:cNvPr id="235" name="" descr="{&quot;isTemplate&quot;:true,&quot;type&quot;:&quot;text&quot;}"/>
+          <p:cNvPr id="236" name="" descr="{&quot;isTemplate&quot;:true,&quot;type&quot;:&quot;text&quot;}"/>
           <p:cNvSpPr txBox="1"/>
           <p:nvPr/>
         </p:nvSpPr>
@@ -11805,7 +11840,7 @@
       </p:sp>
       <p:sp>
         <p:nvSpPr>
-          <p:cNvPr id="236" name="" descr="{&quot;isTemplate&quot;:true,&quot;type&quot;:&quot;text&quot;}"/>
+          <p:cNvPr id="237" name="" descr="{&quot;isTemplate&quot;:true,&quot;type&quot;:&quot;text&quot;}"/>
           <p:cNvSpPr txBox="1"/>
           <p:nvPr/>
         </p:nvSpPr>
@@ -11840,7 +11875,7 @@
       </p:sp>
       <p:sp>
         <p:nvSpPr>
-          <p:cNvPr id="237" name="" descr="{&quot;isTemplate&quot;:true,&quot;type&quot;:&quot;text&quot;}"/>
+          <p:cNvPr id="238" name="" descr="{&quot;isTemplate&quot;:true,&quot;type&quot;:&quot;text&quot;}"/>
           <p:cNvSpPr txBox="1"/>
           <p:nvPr/>
         </p:nvSpPr>
@@ -11875,7 +11910,7 @@
       </p:sp>
       <p:sp>
         <p:nvSpPr>
-          <p:cNvPr id="238" name="" descr="{&quot;isTemplate&quot;:true,&quot;type&quot;:&quot;text&quot;}"/>
+          <p:cNvPr id="239" name="" descr="{&quot;isTemplate&quot;:true,&quot;type&quot;:&quot;text&quot;}"/>
           <p:cNvSpPr txBox="1"/>
           <p:nvPr/>
         </p:nvSpPr>
@@ -11930,7 +11965,7 @@
       </p:sp>
       <p:sp>
         <p:nvSpPr>
-          <p:cNvPr id="239" name=""/>
+          <p:cNvPr id="240" name=""/>
           <p:cNvSpPr/>
           <p:nvPr/>
         </p:nvSpPr>
@@ -11961,7 +11996,7 @@
       </p:sp>
       <p:sp>
         <p:nvSpPr>
-          <p:cNvPr id="240" name="" descr="{&quot;isTemplate&quot;:true,&quot;type&quot;:&quot;text&quot;}"/>
+          <p:cNvPr id="241" name="" descr="{&quot;isTemplate&quot;:true,&quot;type&quot;:&quot;text&quot;}"/>
           <p:cNvSpPr txBox="1"/>
           <p:nvPr/>
         </p:nvSpPr>
@@ -11996,7 +12031,7 @@
       </p:sp>
       <p:sp>
         <p:nvSpPr>
-          <p:cNvPr id="241" name="" descr="{&quot;isTemplate&quot;:true,&quot;type&quot;:&quot;text&quot;}"/>
+          <p:cNvPr id="242" name="" descr="{&quot;isTemplate&quot;:true,&quot;type&quot;:&quot;text&quot;}"/>
           <p:cNvSpPr txBox="1"/>
           <p:nvPr/>
         </p:nvSpPr>
@@ -12031,7 +12066,7 @@
       </p:sp>
       <p:sp>
         <p:nvSpPr>
-          <p:cNvPr id="242" name="" descr="{&quot;isTemplate&quot;:true,&quot;type&quot;:&quot;text&quot;}"/>
+          <p:cNvPr id="243" name="" descr="{&quot;isTemplate&quot;:true,&quot;type&quot;:&quot;text&quot;}"/>
           <p:cNvSpPr txBox="1"/>
           <p:nvPr/>
         </p:nvSpPr>
@@ -12066,7 +12101,7 @@
       </p:sp>
       <p:sp>
         <p:nvSpPr>
-          <p:cNvPr id="243" name="" descr="{&quot;isTemplate&quot;:true,&quot;type&quot;:&quot;text&quot;}"/>
+          <p:cNvPr id="244" name="" descr="{&quot;isTemplate&quot;:true,&quot;type&quot;:&quot;text&quot;}"/>
           <p:cNvSpPr txBox="1"/>
           <p:nvPr/>
         </p:nvSpPr>
@@ -12101,7 +12136,7 @@
       </p:sp>
       <p:sp>
         <p:nvSpPr>
-          <p:cNvPr id="244" name="" descr="{&quot;isTemplate&quot;:true,&quot;type&quot;:&quot;text&quot;}"/>
+          <p:cNvPr id="245" name="" descr="{&quot;isTemplate&quot;:true,&quot;type&quot;:&quot;text&quot;}"/>
           <p:cNvSpPr txBox="1"/>
           <p:nvPr/>
         </p:nvSpPr>
@@ -12136,7 +12171,7 @@
       </p:sp>
       <p:sp>
         <p:nvSpPr>
-          <p:cNvPr id="245" name="" descr="{&quot;isTemplate&quot;:true,&quot;type&quot;:&quot;text&quot;}"/>
+          <p:cNvPr id="246" name="" descr="{&quot;isTemplate&quot;:true,&quot;type&quot;:&quot;text&quot;}"/>
           <p:cNvSpPr txBox="1"/>
           <p:nvPr/>
         </p:nvSpPr>
@@ -12171,7 +12206,7 @@
       </p:sp>
       <p:sp>
         <p:nvSpPr>
-          <p:cNvPr id="246" name="" descr="{&quot;isTemplate&quot;:true,&quot;type&quot;:&quot;text&quot;}"/>
+          <p:cNvPr id="247" name="" descr="{&quot;isTemplate&quot;:true,&quot;type&quot;:&quot;text&quot;}"/>
           <p:cNvSpPr txBox="1"/>
           <p:nvPr/>
         </p:nvSpPr>
@@ -12206,7 +12241,7 @@
       </p:sp>
       <p:sp>
         <p:nvSpPr>
-          <p:cNvPr id="247" name="" descr="{&quot;isTemplate&quot;:true,&quot;type&quot;:&quot;text&quot;}"/>
+          <p:cNvPr id="248" name="" descr="{&quot;isTemplate&quot;:true,&quot;type&quot;:&quot;text&quot;}"/>
           <p:cNvSpPr txBox="1"/>
           <p:nvPr/>
         </p:nvSpPr>
@@ -12241,7 +12276,7 @@
       </p:sp>
       <p:sp>
         <p:nvSpPr>
-          <p:cNvPr id="248" name="" descr="{&quot;isTemplate&quot;:true,&quot;type&quot;:&quot;text&quot;}"/>
+          <p:cNvPr id="249" name="" descr="{&quot;isTemplate&quot;:true,&quot;type&quot;:&quot;text&quot;}"/>
           <p:cNvSpPr txBox="1"/>
           <p:nvPr/>
         </p:nvSpPr>
@@ -12296,7 +12331,7 @@
       </p:sp>
       <p:sp>
         <p:nvSpPr>
-          <p:cNvPr id="249" name=""/>
+          <p:cNvPr id="250" name=""/>
           <p:cNvSpPr/>
           <p:nvPr/>
         </p:nvSpPr>
@@ -12336,7 +12371,7 @@
       </p:sp>
       <p:sp>
         <p:nvSpPr>
-          <p:cNvPr id="250" name=""/>
+          <p:cNvPr id="251" name=""/>
           <p:cNvSpPr/>
           <p:nvPr/>
         </p:nvSpPr>
@@ -12362,7 +12397,7 @@
       </p:sp>
       <p:sp>
         <p:nvSpPr>
-          <p:cNvPr id="251" name="" descr="{&quot;isTemplate&quot;:true,&quot;type&quot;:&quot;text&quot;}"/>
+          <p:cNvPr id="252" name="" descr="{&quot;isTemplate&quot;:true,&quot;type&quot;:&quot;text&quot;}"/>
           <p:cNvSpPr txBox="1"/>
           <p:nvPr/>
         </p:nvSpPr>
@@ -12415,7 +12450,7 @@
       </p:sp>
       <p:sp>
         <p:nvSpPr>
-          <p:cNvPr id="252" name="" descr="{&quot;isTemplate&quot;:true,&quot;type&quot;:&quot;text&quot;}"/>
+          <p:cNvPr id="253" name="" descr="{&quot;isTemplate&quot;:true,&quot;type&quot;:&quot;text&quot;}"/>
           <p:cNvSpPr txBox="1"/>
           <p:nvPr/>
         </p:nvSpPr>
@@ -12480,7 +12515,7 @@
       </p:sp>
       <p:sp>
         <p:nvSpPr>
-          <p:cNvPr id="253" name="" descr="{&quot;isTemplate&quot;:true,&quot;type&quot;:&quot;text&quot;}"/>
+          <p:cNvPr id="254" name="" descr="{&quot;isTemplate&quot;:true,&quot;type&quot;:&quot;text&quot;}"/>
           <p:cNvSpPr txBox="1"/>
           <p:nvPr/>
         </p:nvSpPr>
@@ -12523,7 +12558,7 @@
   <p:cSld>
     <p:spTree>
       <p:nvGrpSpPr>
-        <p:cNvPr id="254" name="" descr="&lt;Slide style={{ width: 1280, height: 720, background: '#0B0D14', padding: '56px 72px', flexDirection: 'column' }}&gt;&#13;&#10;  &lt;Box style={{ height: 96, flexDirection: 'row', justifyContent: 'space-between', alignItems: 'flex-start' }}&gt;&#13;&#10;    &lt;Box style={{ flexDirection: 'column', gap: 8 }}&gt;&#13;&#10;      &lt;Text style={{ fontSize: 34, fontWeight: 'bold', color: '#F2F4FF' }}&gt;AI 不会算错账，因为它不算账&lt;/Text&gt;&#13;&#10;      &lt;Text style={{ fontSize: 15, color: '#8A90A6' }}&gt;所有数字只有一个实现，模型只负责理解问题与组织语言&lt;/Text&gt;&#13;&#10;    &lt;/Box&gt;&#13;&#10;    &lt;Text style={{ fontSize: 13, color: '#4A5064', letterSpacing: 2 }}&gt;AI 掌柜&lt;/Text&gt;&#13;&#10;  &lt;/Box&gt;&#13;&#10;  &lt;Box style={{ flex: 1, paddingTop: 8 }}&gt;&#13;&#10;    &lt;Box style={{ flexDirection: 'row', gap: 28, alignItems: 'center' }}&gt;&#13;&#10;      &lt;Box style={{ flexDirection: 'column', width: 380 }}&gt;&#13;&#10;        &lt;Text style={{ fontSize: 13, color: '#8A90A6', letterSpacing: 1 }}&gt;昨日营收（元）&lt;/Text&gt;&#13;&#10;        &lt;Text style={{ fontSize: 68, fontWeight: 'bold', color: '#F2F4FF', letterSpacing: -2 }}&gt;6,029.65&lt;/Text&gt;&#13;&#10;        &lt;Text style={{ fontSize: 13, color: '#8A90A6', marginTop: 6 }}&gt;同星期基线 8,024.45 · 低 24.8%&lt;/Text&gt;&#13;&#10;      &lt;/Box&gt;&#13;&#10;      &lt;Box style={{ flex: 1, flexDirection: 'column', gap: 10 }}&gt;&#13;&#10;        &lt;Text style={{ fontSize: 13, color: '#8A90A6' }}&gt;这个数字出现在三个地方，必须完全相等&lt;/Text&gt;&#13;&#10;        &lt;Box style={{ flexDirection: 'row', gap: 12 }}&gt;&#13;&#10;          &lt;Box style={{ flex: 1, background: '#141826', border: '1px solid #242A3D', borderRadius: 10, padding: 16 }}&gt;&#13;&#10;            &lt;Text style={{ fontSize: 15, color: '#F2F4FF' }}&gt;AI 驾驶舱&lt;/Text&gt;&#13;&#10;            &lt;Text style={{ fontSize: 12, color: '#8A90A6', marginTop: 6 }}&gt;KPI 卡片&lt;/Text&gt;&#13;&#10;          &lt;/Box&gt;&#13;&#10;          &lt;Box style={{ flex: 1, background: '#141826', border: '1px solid #242A3D', borderRadius: 10, padding: 16 }}&gt;&#13;&#10;            &lt;Text style={{ fontSize: 15, color: '#F2F4FF' }}&gt;营收报表&lt;/Text&gt;&#13;&#10;            &lt;Text style={{ fontSize: 12, color: '#8A90A6', marginTop: 6 }}&gt;按日汇总&lt;/Text&gt;&#13;&#10;          &lt;/Box&gt;&#13;&#10;          &lt;Box style={{ flex: 1, background: '#141826', border: '1px solid #242A3D', borderRadius: 10, padding: 16 }}&gt;&#13;&#10;            &lt;Text style={{ fontSize: 15, color: '#F2F4FF' }}&gt;AI 问答&lt;/Text&gt;&#13;&#10;            &lt;Text style={{ fontSize: 12, color: '#8A90A6', marginTop: 6 }}&gt;SQL 结果&lt;/Text&gt;&#13;&#10;          &lt;/Box&gt;&#13;&#10;        &lt;/Box&gt;&#13;&#10;      &lt;/Box&gt;&#13;&#10;    &lt;/Box&gt;&#13;&#10;    &lt;Box style={{ marginTop: 26, background: '#12141F', border: '1px solid #242A3D', borderRadius: 12, padding: 22 }}&gt;&#13;&#10;      &lt;Text style={{ fontSize: 12, color: '#4A5064', letterSpacing: 1 }}&gt;analytics / metrics.py&lt;/Text&gt;&#13;&#10;      &lt;Text style={{ fontSize: 14, color: '#8A90A6', marginTop: 10, lineHeight: 1.9 }}&gt;&#13;&#10;        def q_kpi(conn, d1, d2):&amp;nbsp;&amp;nbsp;&lt;span style={{ color: '#6C6CF5' }}&gt;# 全系统唯一的营收口径&lt;/span&gt;&lt;br /&gt;&#13;&#10;        &amp;nbsp;&amp;nbsp;revenue = SUM(final_amount) WHERE status='settled'&lt;br /&gt;&#13;&#10;        &amp;nbsp;&amp;nbsp;return dict(revenue=money(revenue), margin_rate=...)&#13;&#10;      &lt;/Text&gt;&#13;&#10;    &lt;/Box&gt;&#13;&#10;    &lt;Text style={{ fontSize: 14, color: '#8A90A6', marginTop: 16 }}&gt;数字由 SQL 算出，模型只写解读；结论必须引用 evidence，点开能看到原始 SQL。&lt;/Text&gt;&#13;&#10;  &lt;/Box&gt;&#13;&#10;  &lt;Box style={{ height: 36, flexDirection: 'row', justifyContent: 'space-between', alignItems: 'flex-end' }}&gt;&#13;&#10;    &lt;Text style={{ fontSize: 12, color: '#4A5064' }}&gt;2026 武汉 1024 · 产业应用赛道&lt;/Text&gt;&#13;&#10;    &lt;Text style={{ fontSize: 12, color: '#4A5064' }}&gt;08 / 12&lt;/Text&gt;&#13;&#10;  &lt;/Box&gt;&#13;&#10;&lt;/Slide&gt;"/>
+        <p:cNvPr id="255" name="" descr="&lt;Slide style={{ width: 1280, height: 720, background: '#0B0D14', padding: '56px 72px', flexDirection: 'column' }}&gt;&#13;&#10;  &lt;Box style={{ height: 96, flexDirection: 'row', justifyContent: 'space-between', alignItems: 'flex-start' }}&gt;&#13;&#10;    &lt;Box style={{ flexDirection: 'column', gap: 8 }}&gt;&#13;&#10;      &lt;Text style={{ fontSize: 34, fontWeight: 'bold', color: '#F2F4FF' }}&gt;AI 不会算错账，因为它不算账&lt;/Text&gt;&#13;&#10;      &lt;Text style={{ fontSize: 15, color: '#8A90A6' }}&gt;所有数字只有一个实现，模型只负责理解问题与组织语言&lt;/Text&gt;&#13;&#10;    &lt;/Box&gt;&#13;&#10;    &lt;Text style={{ fontSize: 13, color: '#4A5064', letterSpacing: 2 }}&gt;AI 掌柜&lt;/Text&gt;&#13;&#10;  &lt;/Box&gt;&#13;&#10;  &lt;Box style={{ flex: 1, paddingTop: 8 }}&gt;&#13;&#10;    &lt;Box style={{ flexDirection: 'row', gap: 28, alignItems: 'center' }}&gt;&#13;&#10;      &lt;Box style={{ flexDirection: 'column', width: 380 }}&gt;&#13;&#10;        &lt;Text style={{ fontSize: 13, color: '#8A90A6', letterSpacing: 1 }}&gt;昨日营收（元）&lt;/Text&gt;&#13;&#10;        &lt;Text style={{ fontSize: 68, fontWeight: 'bold', color: '#F2F4FF', letterSpacing: -2 }}&gt;6,029.65&lt;/Text&gt;&#13;&#10;        &lt;Text style={{ fontSize: 13, color: '#8A90A6', marginTop: 6 }}&gt;同星期基线 8,024.45 · 低 24.8%&lt;/Text&gt;&#13;&#10;      &lt;/Box&gt;&#13;&#10;      &lt;Box style={{ flex: 1, flexDirection: 'column', gap: 10 }}&gt;&#13;&#10;        &lt;Text style={{ fontSize: 13, color: '#8A90A6' }}&gt;这个数字出现在三个地方，必须完全相等&lt;/Text&gt;&#13;&#10;        &lt;Box style={{ flexDirection: 'row', gap: 12 }}&gt;&#13;&#10;          &lt;Box style={{ flex: 1, background: '#141826', border: '1px solid #242A3D', borderRadius: 10, padding: 16 }}&gt;&#13;&#10;            &lt;Text style={{ fontSize: 15, color: '#F2F4FF' }}&gt;AI 驾驶舱&lt;/Text&gt;&#13;&#10;            &lt;Text style={{ fontSize: 12, color: '#8A90A6', marginTop: 6 }}&gt;KPI 卡片&lt;/Text&gt;&#13;&#10;          &lt;/Box&gt;&#13;&#10;          &lt;Box style={{ flex: 1, background: '#141826', border: '1px solid #242A3D', borderRadius: 10, padding: 16 }}&gt;&#13;&#10;            &lt;Text style={{ fontSize: 15, color: '#F2F4FF' }}&gt;营收报表&lt;/Text&gt;&#13;&#10;            &lt;Text style={{ fontSize: 12, color: '#8A90A6', marginTop: 6 }}&gt;按日汇总&lt;/Text&gt;&#13;&#10;          &lt;/Box&gt;&#13;&#10;          &lt;Box style={{ flex: 1, background: '#141826', border: '1px solid #242A3D', borderRadius: 10, padding: 16 }}&gt;&#13;&#10;            &lt;Text style={{ fontSize: 15, color: '#F2F4FF' }}&gt;AI 问答&lt;/Text&gt;&#13;&#10;            &lt;Text style={{ fontSize: 12, color: '#8A90A6', marginTop: 6 }}&gt;SQL 结果&lt;/Text&gt;&#13;&#10;          &lt;/Box&gt;&#13;&#10;        &lt;/Box&gt;&#13;&#10;      &lt;/Box&gt;&#13;&#10;    &lt;/Box&gt;&#13;&#10;    &lt;Box style={{ marginTop: 26, background: '#12141F', border: '1px solid #242A3D', borderRadius: 12, padding: 22 }}&gt;&#13;&#10;      &lt;Text style={{ fontSize: 12, color: '#4A5064', letterSpacing: 1 }}&gt;analytics / metrics.py&lt;/Text&gt;&#13;&#10;      &lt;Text style={{ fontSize: 14, color: '#8A90A6', marginTop: 10, lineHeight: 1.9 }}&gt;&#13;&#10;        def q_kpi(conn, d1, d2):&amp;nbsp;&amp;nbsp;&lt;span style={{ color: '#6C6CF5' }}&gt;# 全系统唯一的营收口径&lt;/span&gt;&lt;br /&gt;&#13;&#10;        &amp;nbsp;&amp;nbsp;revenue = SUM(final_amount) WHERE status='settled'&lt;br /&gt;&#13;&#10;        &amp;nbsp;&amp;nbsp;return dict(revenue=money(revenue), margin_rate=...)&#13;&#10;      &lt;/Text&gt;&#13;&#10;    &lt;/Box&gt;&#13;&#10;    &lt;Text style={{ fontSize: 14, color: '#8A90A6', marginTop: 16 }}&gt;数字由 SQL 算出，模型只写解读；结论必须引用 evidence，点开能看到原始 SQL。&lt;/Text&gt;&#13;&#10;  &lt;/Box&gt;&#13;&#10;  &lt;Box style={{ height: 36, flexDirection: 'row', justifyContent: 'space-between', alignItems: 'flex-end' }}&gt;&#13;&#10;    &lt;Text style={{ fontSize: 12, color: '#4A5064' }}&gt;2026 武汉 1024 · 产业应用赛道&lt;/Text&gt;&#13;&#10;    &lt;Text style={{ fontSize: 12, color: '#4A5064' }}&gt;08 / 12&lt;/Text&gt;&#13;&#10;  &lt;/Box&gt;&#13;&#10;&lt;/Slide&gt;"/>
         <p:cNvGrpSpPr/>
         <p:nvPr/>
       </p:nvGrpSpPr>
@@ -12537,7 +12572,7 @@
       </p:grpSpPr>
       <p:sp>
         <p:nvSpPr>
-          <p:cNvPr id="255" name=""/>
+          <p:cNvPr id="256" name=""/>
           <p:cNvSpPr/>
           <p:nvPr/>
         </p:nvSpPr>
@@ -12561,7 +12596,7 @@
       </p:sp>
       <p:sp>
         <p:nvSpPr>
-          <p:cNvPr id="256" name="" descr="{&quot;isTemplate&quot;:true,&quot;type&quot;:&quot;text&quot;}"/>
+          <p:cNvPr id="257" name="" descr="{&quot;isTemplate&quot;:true,&quot;type&quot;:&quot;text&quot;}"/>
           <p:cNvSpPr txBox="1"/>
           <p:nvPr/>
         </p:nvSpPr>
@@ -12606,7 +12641,7 @@
       </p:sp>
       <p:sp>
         <p:nvSpPr>
-          <p:cNvPr id="257" name="" descr="{&quot;isTemplate&quot;:true,&quot;type&quot;:&quot;text&quot;}"/>
+          <p:cNvPr id="258" name="" descr="{&quot;isTemplate&quot;:true,&quot;type&quot;:&quot;text&quot;}"/>
           <p:cNvSpPr txBox="1"/>
           <p:nvPr/>
         </p:nvSpPr>
@@ -12641,7 +12676,7 @@
       </p:sp>
       <p:sp>
         <p:nvSpPr>
-          <p:cNvPr id="258" name="" descr="{&quot;isTemplate&quot;:true,&quot;type&quot;:&quot;text&quot;}"/>
+          <p:cNvPr id="259" name="" descr="{&quot;isTemplate&quot;:true,&quot;type&quot;:&quot;text&quot;}"/>
           <p:cNvSpPr txBox="1"/>
           <p:nvPr/>
         </p:nvSpPr>
@@ -12686,7 +12721,7 @@
       </p:sp>
       <p:sp>
         <p:nvSpPr>
-          <p:cNvPr id="259" name="" descr="{&quot;isTemplate&quot;:true,&quot;type&quot;:&quot;text&quot;}"/>
+          <p:cNvPr id="260" name="" descr="{&quot;isTemplate&quot;:true,&quot;type&quot;:&quot;text&quot;}"/>
           <p:cNvSpPr txBox="1"/>
           <p:nvPr/>
         </p:nvSpPr>
@@ -12721,7 +12756,7 @@
       </p:sp>
       <p:sp>
         <p:nvSpPr>
-          <p:cNvPr id="260" name="" descr="{&quot;isTemplate&quot;:true,&quot;type&quot;:&quot;text&quot;}"/>
+          <p:cNvPr id="261" name="" descr="{&quot;isTemplate&quot;:true,&quot;type&quot;:&quot;text&quot;}"/>
           <p:cNvSpPr txBox="1"/>
           <p:nvPr/>
         </p:nvSpPr>
@@ -12756,7 +12791,7 @@
       </p:sp>
       <p:sp>
         <p:nvSpPr>
-          <p:cNvPr id="261" name="" descr="{&quot;isTemplate&quot;:true,&quot;type&quot;:&quot;text&quot;}"/>
+          <p:cNvPr id="262" name="" descr="{&quot;isTemplate&quot;:true,&quot;type&quot;:&quot;text&quot;}"/>
           <p:cNvSpPr txBox="1"/>
           <p:nvPr/>
         </p:nvSpPr>
@@ -12821,7 +12856,7 @@
       </p:sp>
       <p:sp>
         <p:nvSpPr>
-          <p:cNvPr id="262" name="" descr="{&quot;isTemplate&quot;:true,&quot;type&quot;:&quot;text&quot;}"/>
+          <p:cNvPr id="263" name="" descr="{&quot;isTemplate&quot;:true,&quot;type&quot;:&quot;text&quot;}"/>
           <p:cNvSpPr txBox="1"/>
           <p:nvPr/>
         </p:nvSpPr>
@@ -12856,7 +12891,7 @@
       </p:sp>
       <p:sp>
         <p:nvSpPr>
-          <p:cNvPr id="263" name=""/>
+          <p:cNvPr id="264" name=""/>
           <p:cNvSpPr/>
           <p:nvPr/>
         </p:nvSpPr>
@@ -12887,7 +12922,7 @@
       </p:sp>
       <p:sp>
         <p:nvSpPr>
-          <p:cNvPr id="264" name="" descr="{&quot;isTemplate&quot;:true,&quot;type&quot;:&quot;text&quot;}"/>
+          <p:cNvPr id="265" name="" descr="{&quot;isTemplate&quot;:true,&quot;type&quot;:&quot;text&quot;}"/>
           <p:cNvSpPr txBox="1"/>
           <p:nvPr/>
         </p:nvSpPr>
@@ -12932,7 +12967,7 @@
       </p:sp>
       <p:sp>
         <p:nvSpPr>
-          <p:cNvPr id="265" name="" descr="{&quot;isTemplate&quot;:true,&quot;type&quot;:&quot;text&quot;}"/>
+          <p:cNvPr id="266" name="" descr="{&quot;isTemplate&quot;:true,&quot;type&quot;:&quot;text&quot;}"/>
           <p:cNvSpPr txBox="1"/>
           <p:nvPr/>
         </p:nvSpPr>
@@ -12977,7 +13012,7 @@
       </p:sp>
       <p:sp>
         <p:nvSpPr>
-          <p:cNvPr id="266" name=""/>
+          <p:cNvPr id="267" name=""/>
           <p:cNvSpPr/>
           <p:nvPr/>
         </p:nvSpPr>
@@ -13008,7 +13043,7 @@
       </p:sp>
       <p:sp>
         <p:nvSpPr>
-          <p:cNvPr id="267" name="" descr="{&quot;isTemplate&quot;:true,&quot;type&quot;:&quot;text&quot;}"/>
+          <p:cNvPr id="268" name="" descr="{&quot;isTemplate&quot;:true,&quot;type&quot;:&quot;text&quot;}"/>
           <p:cNvSpPr txBox="1"/>
           <p:nvPr/>
         </p:nvSpPr>
@@ -13043,7 +13078,7 @@
       </p:sp>
       <p:sp>
         <p:nvSpPr>
-          <p:cNvPr id="268" name="" descr="{&quot;isTemplate&quot;:true,&quot;type&quot;:&quot;text&quot;}"/>
+          <p:cNvPr id="269" name="" descr="{&quot;isTemplate&quot;:true,&quot;type&quot;:&quot;text&quot;}"/>
           <p:cNvSpPr txBox="1"/>
           <p:nvPr/>
         </p:nvSpPr>
@@ -13078,7 +13113,7 @@
       </p:sp>
       <p:sp>
         <p:nvSpPr>
-          <p:cNvPr id="269" name=""/>
+          <p:cNvPr id="270" name=""/>
           <p:cNvSpPr/>
           <p:nvPr/>
         </p:nvSpPr>
@@ -13109,7 +13144,7 @@
       </p:sp>
       <p:sp>
         <p:nvSpPr>
-          <p:cNvPr id="270" name="" descr="{&quot;isTemplate&quot;:true,&quot;type&quot;:&quot;text&quot;}"/>
+          <p:cNvPr id="271" name="" descr="{&quot;isTemplate&quot;:true,&quot;type&quot;:&quot;text&quot;}"/>
           <p:cNvSpPr txBox="1"/>
           <p:nvPr/>
         </p:nvSpPr>
@@ -13154,7 +13189,7 @@
       </p:sp>
       <p:sp>
         <p:nvSpPr>
-          <p:cNvPr id="271" name="" descr="{&quot;isTemplate&quot;:true,&quot;type&quot;:&quot;text&quot;}"/>
+          <p:cNvPr id="272" name="" descr="{&quot;isTemplate&quot;:true,&quot;type&quot;:&quot;text&quot;}"/>
           <p:cNvSpPr txBox="1"/>
           <p:nvPr/>
         </p:nvSpPr>
@@ -13199,7 +13234,7 @@
       </p:sp>
       <p:sp>
         <p:nvSpPr>
-          <p:cNvPr id="272" name=""/>
+          <p:cNvPr id="273" name=""/>
           <p:cNvSpPr/>
           <p:nvPr/>
         </p:nvSpPr>
@@ -13230,7 +13265,7 @@
       </p:sp>
       <p:sp>
         <p:nvSpPr>
-          <p:cNvPr id="273" name="" descr="{&quot;isTemplate&quot;:true,&quot;type&quot;:&quot;text&quot;}"/>
+          <p:cNvPr id="274" name="" descr="{&quot;isTemplate&quot;:true,&quot;type&quot;:&quot;text&quot;}"/>
           <p:cNvSpPr txBox="1"/>
           <p:nvPr/>
         </p:nvSpPr>
@@ -13265,7 +13300,7 @@
       </p:sp>
       <p:sp>
         <p:nvSpPr>
-          <p:cNvPr id="274" name="" descr="{&quot;isTemplate&quot;:true,&quot;type&quot;:&quot;text&quot;}"/>
+          <p:cNvPr id="275" name="" descr="{&quot;isTemplate&quot;:true,&quot;type&quot;:&quot;text&quot;}"/>
           <p:cNvSpPr txBox="1"/>
           <p:nvPr/>
         </p:nvSpPr>
@@ -13356,7 +13391,7 @@
       </p:sp>
       <p:sp>
         <p:nvSpPr>
-          <p:cNvPr id="275" name="" descr="{&quot;isTemplate&quot;:true,&quot;type&quot;:&quot;text&quot;}"/>
+          <p:cNvPr id="276" name="" descr="{&quot;isTemplate&quot;:true,&quot;type&quot;:&quot;text&quot;}"/>
           <p:cNvSpPr txBox="1"/>
           <p:nvPr/>
         </p:nvSpPr>
@@ -13451,7 +13486,7 @@
       </p:sp>
       <p:sp>
         <p:nvSpPr>
-          <p:cNvPr id="276" name="" descr="{&quot;isTemplate&quot;:true,&quot;type&quot;:&quot;text&quot;}"/>
+          <p:cNvPr id="277" name="" descr="{&quot;isTemplate&quot;:true,&quot;type&quot;:&quot;text&quot;}"/>
           <p:cNvSpPr txBox="1"/>
           <p:nvPr/>
         </p:nvSpPr>
@@ -13516,7 +13551,7 @@
       </p:sp>
       <p:sp>
         <p:nvSpPr>
-          <p:cNvPr id="277" name="" descr="{&quot;isTemplate&quot;:true,&quot;type&quot;:&quot;text&quot;}"/>
+          <p:cNvPr id="278" name="" descr="{&quot;isTemplate&quot;:true,&quot;type&quot;:&quot;text&quot;}"/>
           <p:cNvSpPr txBox="1"/>
           <p:nvPr/>
         </p:nvSpPr>
@@ -13559,7 +13594,7 @@
   <p:cSld>
     <p:spTree>
       <p:nvGrpSpPr>
-        <p:cNvPr id="278" name="" descr="&lt;Slide style={{ width: 1280, height: 720, background: '#0B0D14', padding: '56px 72px', flexDirection: 'column' }}&gt;&#13;&#10;  &lt;Box style={{ height: 96, flexDirection: 'row', justifyContent: 'space-between', alignItems: 'flex-start' }}&gt;&#13;&#10;    &lt;Box style={{ flexDirection: 'column', gap: 8 }}&gt;&#13;&#10;      &lt;Text style={{ fontSize: 34, fontWeight: 'bold', color: '#F2F4FF' }}&gt;先算清代价，再谈智能&lt;/Text&gt;&#13;&#10;      &lt;Text style={{ fontSize: 15, color: '#8A90A6' }}&gt;左边是它在这套 180 天数据里真找出来的，右边是按建议执行后的测算&lt;/Text&gt;&#13;&#10;    &lt;/Box&gt;&#13;&#10;    &lt;Text style={{ fontSize: 13, color: '#4A5064', letterSpacing: 2 }}&gt;AI 掌柜&lt;/Text&gt;&#13;&#10;  &lt;/Box&gt;&#13;&#10;  &lt;Box style={{ flex: 1, paddingTop: 8 }}&gt;&#13;&#10;    &lt;Box style={{ flexDirection: 'row', gap: 24 }}&gt;&#13;&#10;      &lt;Box style={{ flex: 1.15, flexDirection: 'column' }}&gt;&#13;&#10;        &lt;Text style={{ fontSize: 13, color: '#8A90A6', letterSpacing: 1 }}&gt;实测 · 系统自己发现的五件事&lt;/Text&gt;&#13;&#10;        &lt;Box style={{ marginTop: 14, flexDirection: 'column', gap: 0 }}&gt;&#13;&#10;          &lt;Box style={{ paddingTop: 12, paddingBottom: 12, borderTop: '1px solid #242A3D', flexDirection: 'row', alignItems: 'baseline' }}&gt;&#13;&#10;            &lt;Text style={{ fontSize: 26, fontWeight: 'bold', color: '#6C6CF5', width: 96 }}&gt;11.1%&lt;/Text&gt;&#13;&#10;            &lt;Text style={{ fontSize: 14, color: '#F2F4FF' }}&gt;近 7 天折扣率，比前 30 天的 8.8% 高 2.3 个点&lt;/Text&gt;&#13;&#10;          &lt;/Box&gt;&#13;&#10;          &lt;Box style={{ paddingTop: 12, paddingBottom: 12, borderTop: '1px solid #242A3D', flexDirection: 'row', alignItems: 'baseline' }}&gt;&#13;&#10;            &lt;Text style={{ fontSize: 26, fontWeight: 'bold', color: '#6C6CF5', width: 96 }}&gt;1,899&lt;/Text&gt;&#13;&#10;            &lt;Text style={{ fontSize: 14, color: '#F2F4FF' }}&gt;元 · 按原折扣水平本可少让的金额&lt;/Text&gt;&#13;&#10;          &lt;/Box&gt;&#13;&#10;          &lt;Box style={{ paddingTop: 12, paddingBottom: 12, borderTop: '1px solid #242A3D', flexDirection: 'row', alignItems: 'baseline' }}&gt;&#13;&#10;            &lt;Text style={{ fontSize: 26, fontWeight: 'bold', color: '#6C6CF5', width: 96 }}&gt;19 道&lt;/Text&gt;&#13;&#10;            &lt;Text style={{ fontSize: 14, color: '#F2F4FF' }}&gt;菜连续 3 天 0 销量，占在售 9.2%&lt;/Text&gt;&#13;&#10;          &lt;/Box&gt;&#13;&#10;          &lt;Box style={{ paddingTop: 12, paddingBottom: 12, borderTop: '1px solid #242A3D', flexDirection: 'row', alignItems: 'baseline' }}&gt;&#13;&#10;            &lt;Text style={{ fontSize: 26, fontWeight: 'bold', color: '#6C6CF5', width: 96 }}&gt;5 种&lt;/Text&gt;&#13;&#10;            &lt;Text style={{ fontSize: 14, color: '#F2F4FF' }}&gt;食材可支撑不足 2 天（基围虾只剩 1.5 天）&lt;/Text&gt;&#13;&#10;          &lt;/Box&gt;&#13;&#10;          &lt;Box style={{ paddingTop: 12, paddingBottom: 12, borderTop: '1px solid #242A3D', borderBottom: '1px solid #242A3D', flexDirection: 'row', alignItems: 'baseline' }}&gt;&#13;&#10;            &lt;Text style={{ fontSize: 26, fontWeight: 'bold', color: '#6C6CF5', width: 96 }}&gt;57.6%&lt;/Text&gt;&#13;&#10;            &lt;Text style={{ fontSize: 14, color: '#F2F4FF' }}&gt;近 30 天毛利率，比目标低 2.4 个点&lt;/Text&gt;&#13;&#10;          &lt;/Box&gt;&#13;&#10;        &lt;/Box&gt;&#13;&#10;      &lt;/Box&gt;&#13;&#10;      &lt;Box style={{ flex: 1, background: '#171A2E', border: '1px solid #6C6CF5', borderRadius: 14, padding: 30, flexDirection: 'column', gap: 18, justifyContent: 'flex-start' }}&gt;&#13;&#10;        &lt;Box style={{ flexDirection: 'column', gap: 6 }}&gt;&#13;&#10;          &lt;Text style={{ fontSize: 13, color: '#6C6CF5', letterSpacing: 1 }}&gt;测算 · 补齐这 2.4 个点&lt;/Text&gt;&#13;&#10;          &lt;Text style={{ fontSize: 56, fontWeight: 'bold', color: '#F2F4FF', letterSpacing: -1 }}&gt;+9.4&lt;span style={{ fontSize: 22 }}&gt; 万/年&lt;/span&gt;&lt;/Text&gt;&#13;&#10;          &lt;Text style={{ fontSize: 13, color: '#8A90A6' }}&gt;近 30 天营收 32.5 万 × 2.4pt × 12 个月&lt;/Text&gt;&#13;&#10;        &lt;/Box&gt;&#13;&#10;        &lt;Box style={{ flexDirection: 'column', gap: 8, marginTop: 6, paddingTop: 16, borderTop: '1px solid #3A3F63' }}&gt;&#13;&#10;          &lt;Text style={{ fontSize: 13, color: '#F2F4FF' }}&gt;怎么补：&lt;/Text&gt;&#13;&#10;          &lt;Text style={{ fontSize: 13, color: '#8A90A6', lineHeight: 1.8 }}&gt;① 3 道瘦狗菜调价 5%~15%&lt;br /&gt;② 19 道滞销菜组套餐或下架&lt;br /&gt;③ 折扣收回 2 个点&lt;/Text&gt;&#13;&#10;        &lt;/Box&gt;&#13;&#10;        &lt;Text style={{ fontSize: 11, color: '#6B6F8A', lineHeight: 1.6, marginTop: 4 }}&gt;&#13;&#10;          左列全部由 SQL 从 180 天数据算出，脚本可复现；右侧为按当前规模的线性测算，不是承诺值。&#13;&#10;        &lt;/Text&gt;&#13;&#10;      &lt;/Box&gt;&#13;&#10;    &lt;/Box&gt;&#13;&#10;  &lt;/Box&gt;&#13;&#10;  &lt;Box style={{ height: 36, flexDirection: 'row', justifyContent: 'space-between', alignItems: 'flex-end' }}&gt;&#13;&#10;    &lt;Text style={{ fontSize: 12, color: '#4A5064' }}&gt;2026 武汉 1024 · 产业应用赛道&lt;/Text&gt;&#13;&#10;    &lt;Text style={{ fontSize: 12, color: '#4A5064' }}&gt;09 / 12&lt;/Text&gt;&#13;&#10;  &lt;/Box&gt;&#13;&#10;&lt;/Slide&gt;"/>
+        <p:cNvPr id="279" name="" descr="&lt;Slide style={{ width: 1280, height: 720, background: '#0B0D14', padding: '56px 72px', flexDirection: 'column' }}&gt;&#13;&#10;  &lt;Box style={{ height: 96, flexDirection: 'row', justifyContent: 'space-between', alignItems: 'flex-start' }}&gt;&#13;&#10;    &lt;Box style={{ flexDirection: 'column', gap: 8 }}&gt;&#13;&#10;      &lt;Text style={{ fontSize: 34, fontWeight: 'bold', color: '#F2F4FF' }}&gt;先算清代价，再谈智能&lt;/Text&gt;&#13;&#10;      &lt;Text style={{ fontSize: 15, color: '#8A90A6' }}&gt;左边是它在这套 180 天数据里真找出来的，右边是按建议执行后的测算&lt;/Text&gt;&#13;&#10;    &lt;/Box&gt;&#13;&#10;    &lt;Text style={{ fontSize: 13, color: '#4A5064', letterSpacing: 2 }}&gt;AI 掌柜&lt;/Text&gt;&#13;&#10;  &lt;/Box&gt;&#13;&#10;  &lt;Box style={{ flex: 1, paddingTop: 8 }}&gt;&#13;&#10;    &lt;Box style={{ flexDirection: 'row', gap: 24 }}&gt;&#13;&#10;      &lt;Box style={{ flex: 1.15, flexDirection: 'column' }}&gt;&#13;&#10;        &lt;Text style={{ fontSize: 13, color: '#8A90A6', letterSpacing: 1 }}&gt;实测 · 系统自己发现的五件事&lt;/Text&gt;&#13;&#10;        &lt;Box style={{ marginTop: 14, flexDirection: 'column', gap: 0 }}&gt;&#13;&#10;          &lt;Box style={{ paddingTop: 12, paddingBottom: 12, borderTop: '1px solid #242A3D', flexDirection: 'row', alignItems: 'baseline' }}&gt;&#13;&#10;            &lt;Text style={{ fontSize: 26, fontWeight: 'bold', color: '#6C6CF5', width: 96 }}&gt;11.1%&lt;/Text&gt;&#13;&#10;            &lt;Text style={{ fontSize: 14, color: '#F2F4FF' }}&gt;近 7 天折扣率，比前 30 天的 8.8% 高 2.3 个点&lt;/Text&gt;&#13;&#10;          &lt;/Box&gt;&#13;&#10;          &lt;Box style={{ paddingTop: 12, paddingBottom: 12, borderTop: '1px solid #242A3D', flexDirection: 'row', alignItems: 'baseline' }}&gt;&#13;&#10;            &lt;Text style={{ fontSize: 26, fontWeight: 'bold', color: '#6C6CF5', width: 96 }}&gt;1,899&lt;/Text&gt;&#13;&#10;            &lt;Text style={{ fontSize: 14, color: '#F2F4FF' }}&gt;元 · 按原折扣水平本可少让的金额&lt;/Text&gt;&#13;&#10;          &lt;/Box&gt;&#13;&#10;          &lt;Box style={{ paddingTop: 12, paddingBottom: 12, borderTop: '1px solid #242A3D', flexDirection: 'row', alignItems: 'baseline' }}&gt;&#13;&#10;            &lt;Text style={{ fontSize: 26, fontWeight: 'bold', color: '#6C6CF5', width: 96 }}&gt;19 道&lt;/Text&gt;&#13;&#10;            &lt;Text style={{ fontSize: 14, color: '#F2F4FF' }}&gt;菜连续 3 天 0 销量，占在售 9.2%&lt;/Text&gt;&#13;&#10;          &lt;/Box&gt;&#13;&#10;          &lt;Box style={{ paddingTop: 12, paddingBottom: 12, borderTop: '1px solid #242A3D', flexDirection: 'row', alignItems: 'baseline' }}&gt;&#13;&#10;            &lt;Text style={{ fontSize: 26, fontWeight: 'bold', color: '#6C6CF5', width: 96 }}&gt;5 种&lt;/Text&gt;&#13;&#10;            &lt;Text style={{ fontSize: 14, color: '#F2F4FF' }}&gt;食材可支撑不足 2 天（基围虾只剩 1.5 天）&lt;/Text&gt;&#13;&#10;          &lt;/Box&gt;&#13;&#10;          &lt;Box style={{ paddingTop: 12, paddingBottom: 12, borderTop: '1px solid #242A3D', borderBottom: '1px solid #242A3D', flexDirection: 'row', alignItems: 'baseline' }}&gt;&#13;&#10;            &lt;Text style={{ fontSize: 26, fontWeight: 'bold', color: '#6C6CF5', width: 96 }}&gt;57.6%&lt;/Text&gt;&#13;&#10;            &lt;Text style={{ fontSize: 14, color: '#F2F4FF' }}&gt;近 30 天毛利率，比目标低 2.4 个点&lt;/Text&gt;&#13;&#10;          &lt;/Box&gt;&#13;&#10;        &lt;/Box&gt;&#13;&#10;      &lt;/Box&gt;&#13;&#10;      &lt;Box style={{ flex: 1, background: '#171A2E', border: '1px solid #6C6CF5', borderRadius: 14, padding: 30, flexDirection: 'column', gap: 18, justifyContent: 'flex-start' }}&gt;&#13;&#10;        &lt;Box style={{ flexDirection: 'column', gap: 6 }}&gt;&#13;&#10;          &lt;Text style={{ fontSize: 13, color: '#6C6CF5', letterSpacing: 1 }}&gt;测算 · 补齐这 2.4 个点&lt;/Text&gt;&#13;&#10;          &lt;Text style={{ fontSize: 56, fontWeight: 'bold', color: '#F2F4FF', letterSpacing: -1 }}&gt;+9.4&lt;span style={{ fontSize: 22 }}&gt; 万/年&lt;/span&gt;&lt;/Text&gt;&#13;&#10;          &lt;Text style={{ fontSize: 13, color: '#8A90A6' }}&gt;近 30 天营收 32.5 万 × 2.4pt × 12 个月&lt;/Text&gt;&#13;&#10;        &lt;/Box&gt;&#13;&#10;        &lt;Box style={{ flexDirection: 'column', gap: 8, marginTop: 6, paddingTop: 16, borderTop: '1px solid #3A3F63' }}&gt;&#13;&#10;          &lt;Text style={{ fontSize: 13, color: '#F2F4FF' }}&gt;怎么补：&lt;/Text&gt;&#13;&#10;          &lt;Text style={{ fontSize: 13, color: '#8A90A6', lineHeight: 1.8 }}&gt;① 3 道瘦狗菜调价 5%~15%&lt;br /&gt;② 19 道滞销菜组套餐或下架&lt;br /&gt;③ 折扣收回 2 个点&lt;/Text&gt;&#13;&#10;        &lt;/Box&gt;&#13;&#10;        &lt;Text style={{ fontSize: 11, color: '#6B6F8A', lineHeight: 1.6, marginTop: 4 }}&gt;&#13;&#10;          左列全部由 SQL 从 180 天数据算出，脚本可复现；右侧为按当前规模的线性测算，不是承诺值。&#13;&#10;        &lt;/Text&gt;&#13;&#10;      &lt;/Box&gt;&#13;&#10;    &lt;/Box&gt;&#13;&#10;  &lt;/Box&gt;&#13;&#10;  &lt;Box style={{ height: 36, flexDirection: 'row', justifyContent: 'space-between', alignItems: 'flex-end' }}&gt;&#13;&#10;    &lt;Text style={{ fontSize: 12, color: '#4A5064' }}&gt;2026 武汉 1024 · 产业应用赛道&lt;/Text&gt;&#13;&#10;    &lt;Text style={{ fontSize: 12, color: '#4A5064' }}&gt;09 / 12&lt;/Text&gt;&#13;&#10;  &lt;/Box&gt;&#13;&#10;&lt;/Slide&gt;"/>
         <p:cNvGrpSpPr/>
         <p:nvPr/>
       </p:nvGrpSpPr>
@@ -13573,7 +13608,7 @@
       </p:grpSpPr>
       <p:sp>
         <p:nvSpPr>
-          <p:cNvPr id="279" name=""/>
+          <p:cNvPr id="280" name=""/>
           <p:cNvSpPr/>
           <p:nvPr/>
         </p:nvSpPr>
@@ -13597,7 +13632,7 @@
       </p:sp>
       <p:sp>
         <p:nvSpPr>
-          <p:cNvPr id="280" name="" descr="{&quot;isTemplate&quot;:true,&quot;type&quot;:&quot;text&quot;}"/>
+          <p:cNvPr id="281" name="" descr="{&quot;isTemplate&quot;:true,&quot;type&quot;:&quot;text&quot;}"/>
           <p:cNvSpPr txBox="1"/>
           <p:nvPr/>
         </p:nvSpPr>
@@ -13632,7 +13667,7 @@
       </p:sp>
       <p:sp>
         <p:nvSpPr>
-          <p:cNvPr id="281" name="" descr="{&quot;isTemplate&quot;:true,&quot;type&quot;:&quot;text&quot;}"/>
+          <p:cNvPr id="282" name="" descr="{&quot;isTemplate&quot;:true,&quot;type&quot;:&quot;text&quot;}"/>
           <p:cNvSpPr txBox="1"/>
           <p:nvPr/>
         </p:nvSpPr>
@@ -13687,7 +13722,7 @@
       </p:sp>
       <p:sp>
         <p:nvSpPr>
-          <p:cNvPr id="282" name="" descr="{&quot;isTemplate&quot;:true,&quot;type&quot;:&quot;text&quot;}"/>
+          <p:cNvPr id="283" name="" descr="{&quot;isTemplate&quot;:true,&quot;type&quot;:&quot;text&quot;}"/>
           <p:cNvSpPr txBox="1"/>
           <p:nvPr/>
         </p:nvSpPr>
@@ -13732,7 +13767,7 @@
       </p:sp>
       <p:sp>
         <p:nvSpPr>
-          <p:cNvPr id="283" name="" descr="{&quot;isTemplate&quot;:true,&quot;type&quot;:&quot;text&quot;}"/>
+          <p:cNvPr id="284" name="" descr="{&quot;isTemplate&quot;:true,&quot;type&quot;:&quot;text&quot;}"/>
           <p:cNvSpPr txBox="1"/>
           <p:nvPr/>
         </p:nvSpPr>
@@ -13787,7 +13822,7 @@
       </p:sp>
       <p:sp>
         <p:nvSpPr>
-          <p:cNvPr id="284" name=""/>
+          <p:cNvPr id="285" name=""/>
           <p:cNvSpPr/>
           <p:nvPr/>
         </p:nvSpPr>
@@ -13827,7 +13862,7 @@
       </p:sp>
       <p:sp>
         <p:nvSpPr>
-          <p:cNvPr id="285" name="" descr="{&quot;isTemplate&quot;:true,&quot;type&quot;:&quot;text&quot;}"/>
+          <p:cNvPr id="286" name="" descr="{&quot;isTemplate&quot;:true,&quot;type&quot;:&quot;text&quot;}"/>
           <p:cNvSpPr txBox="1"/>
           <p:nvPr/>
         </p:nvSpPr>
@@ -13862,7 +13897,7 @@
       </p:sp>
       <p:sp>
         <p:nvSpPr>
-          <p:cNvPr id="286" name="" descr="{&quot;isTemplate&quot;:true,&quot;type&quot;:&quot;text&quot;}"/>
+          <p:cNvPr id="287" name="" descr="{&quot;isTemplate&quot;:true,&quot;type&quot;:&quot;text&quot;}"/>
           <p:cNvSpPr txBox="1"/>
           <p:nvPr/>
         </p:nvSpPr>
@@ -13977,7 +14012,7 @@
       </p:sp>
       <p:sp>
         <p:nvSpPr>
-          <p:cNvPr id="287" name=""/>
+          <p:cNvPr id="288" name=""/>
           <p:cNvSpPr/>
           <p:nvPr/>
         </p:nvSpPr>
@@ -14017,7 +14052,7 @@
       </p:sp>
       <p:sp>
         <p:nvSpPr>
-          <p:cNvPr id="288" name="" descr="{&quot;isTemplate&quot;:true,&quot;type&quot;:&quot;text&quot;}"/>
+          <p:cNvPr id="289" name="" descr="{&quot;isTemplate&quot;:true,&quot;type&quot;:&quot;text&quot;}"/>
           <p:cNvSpPr txBox="1"/>
           <p:nvPr/>
         </p:nvSpPr>
@@ -14052,7 +14087,7 @@
       </p:sp>
       <p:sp>
         <p:nvSpPr>
-          <p:cNvPr id="289" name="" descr="{&quot;isTemplate&quot;:true,&quot;type&quot;:&quot;text&quot;}"/>
+          <p:cNvPr id="290" name="" descr="{&quot;isTemplate&quot;:true,&quot;type&quot;:&quot;text&quot;}"/>
           <p:cNvSpPr txBox="1"/>
           <p:nvPr/>
         </p:nvSpPr>
@@ -14107,7 +14142,7 @@
       </p:sp>
       <p:sp>
         <p:nvSpPr>
-          <p:cNvPr id="290" name=""/>
+          <p:cNvPr id="291" name=""/>
           <p:cNvSpPr/>
           <p:nvPr/>
         </p:nvSpPr>
@@ -14147,7 +14182,7 @@
       </p:sp>
       <p:sp>
         <p:nvSpPr>
-          <p:cNvPr id="291" name="" descr="{&quot;isTemplate&quot;:true,&quot;type&quot;:&quot;text&quot;}"/>
+          <p:cNvPr id="292" name="" descr="{&quot;isTemplate&quot;:true,&quot;type&quot;:&quot;text&quot;}"/>
           <p:cNvSpPr txBox="1"/>
           <p:nvPr/>
         </p:nvSpPr>
@@ -14192,7 +14227,7 @@
       </p:sp>
       <p:sp>
         <p:nvSpPr>
-          <p:cNvPr id="292" name="" descr="{&quot;isTemplate&quot;:true,&quot;type&quot;:&quot;text&quot;}"/>
+          <p:cNvPr id="293" name="" descr="{&quot;isTemplate&quot;:true,&quot;type&quot;:&quot;text&quot;}"/>
           <p:cNvSpPr txBox="1"/>
           <p:nvPr/>
         </p:nvSpPr>
@@ -14277,7 +14312,7 @@
       </p:sp>
       <p:sp>
         <p:nvSpPr>
-          <p:cNvPr id="293" name=""/>
+          <p:cNvPr id="294" name=""/>
           <p:cNvSpPr/>
           <p:nvPr/>
         </p:nvSpPr>
@@ -14317,7 +14352,7 @@
       </p:sp>
       <p:sp>
         <p:nvSpPr>
-          <p:cNvPr id="294" name="" descr="{&quot;isTemplate&quot;:true,&quot;type&quot;:&quot;text&quot;}"/>
+          <p:cNvPr id="295" name="" descr="{&quot;isTemplate&quot;:true,&quot;type&quot;:&quot;text&quot;}"/>
           <p:cNvSpPr txBox="1"/>
           <p:nvPr/>
         </p:nvSpPr>
@@ -14362,7 +14397,7 @@
       </p:sp>
       <p:sp>
         <p:nvSpPr>
-          <p:cNvPr id="295" name="" descr="{&quot;isTemplate&quot;:true,&quot;type&quot;:&quot;text&quot;}"/>
+          <p:cNvPr id="296" name="" descr="{&quot;isTemplate&quot;:true,&quot;type&quot;:&quot;text&quot;}"/>
           <p:cNvSpPr txBox="1"/>
           <p:nvPr/>
         </p:nvSpPr>
@@ -14437,7 +14472,7 @@
       </p:sp>
       <p:sp>
         <p:nvSpPr>
-          <p:cNvPr id="296" name=""/>
+          <p:cNvPr id="297" name=""/>
           <p:cNvSpPr/>
           <p:nvPr/>
         </p:nvSpPr>
@@ -14477,7 +14512,7 @@
       </p:sp>
       <p:sp>
         <p:nvSpPr>
-          <p:cNvPr id="297" name=""/>
+          <p:cNvPr id="298" name=""/>
           <p:cNvSpPr/>
           <p:nvPr/>
         </p:nvSpPr>
@@ -14517,7 +14552,7 @@
       </p:sp>
       <p:sp>
         <p:nvSpPr>
-          <p:cNvPr id="298" name="" descr="{&quot;isTemplate&quot;:true,&quot;type&quot;:&quot;text&quot;}"/>
+          <p:cNvPr id="299" name="" descr="{&quot;isTemplate&quot;:true,&quot;type&quot;:&quot;text&quot;}"/>
           <p:cNvSpPr txBox="1"/>
           <p:nvPr/>
         </p:nvSpPr>
@@ -14552,7 +14587,7 @@
       </p:sp>
       <p:sp>
         <p:nvSpPr>
-          <p:cNvPr id="299" name="" descr="{&quot;isTemplate&quot;:true,&quot;type&quot;:&quot;text&quot;}"/>
+          <p:cNvPr id="300" name="" descr="{&quot;isTemplate&quot;:true,&quot;type&quot;:&quot;text&quot;}"/>
           <p:cNvSpPr txBox="1"/>
           <p:nvPr/>
         </p:nvSpPr>
@@ -14627,7 +14662,7 @@
       </p:sp>
       <p:sp>
         <p:nvSpPr>
-          <p:cNvPr id="300" name=""/>
+          <p:cNvPr id="301" name=""/>
           <p:cNvSpPr/>
           <p:nvPr/>
         </p:nvSpPr>
@@ -14658,7 +14693,7 @@
       </p:sp>
       <p:sp>
         <p:nvSpPr>
-          <p:cNvPr id="301" name="" descr="{&quot;isTemplate&quot;:true,&quot;type&quot;:&quot;text&quot;}"/>
+          <p:cNvPr id="302" name="" descr="{&quot;isTemplate&quot;:true,&quot;type&quot;:&quot;text&quot;}"/>
           <p:cNvSpPr txBox="1"/>
           <p:nvPr/>
         </p:nvSpPr>
@@ -14733,7 +14768,7 @@
       </p:sp>
       <p:sp>
         <p:nvSpPr>
-          <p:cNvPr id="302" name="" descr="{&quot;isTemplate&quot;:true,&quot;type&quot;:&quot;text&quot;}"/>
+          <p:cNvPr id="303" name="" descr="{&quot;isTemplate&quot;:true,&quot;type&quot;:&quot;text&quot;}"/>
           <p:cNvSpPr txBox="1"/>
           <p:nvPr/>
         </p:nvSpPr>
@@ -14808,7 +14843,7 @@
       </p:sp>
       <p:sp>
         <p:nvSpPr>
-          <p:cNvPr id="303" name="" descr="{&quot;isTemplate&quot;:true,&quot;type&quot;:&quot;text&quot;}"/>
+          <p:cNvPr id="304" name="" descr="{&quot;isTemplate&quot;:true,&quot;type&quot;:&quot;text&quot;}"/>
           <p:cNvSpPr txBox="1"/>
           <p:nvPr/>
         </p:nvSpPr>
@@ -14903,7 +14938,7 @@
       </p:sp>
       <p:sp>
         <p:nvSpPr>
-          <p:cNvPr id="304" name=""/>
+          <p:cNvPr id="305" name=""/>
           <p:cNvSpPr/>
           <p:nvPr/>
         </p:nvSpPr>
@@ -14943,7 +14978,7 @@
       </p:sp>
       <p:sp>
         <p:nvSpPr>
-          <p:cNvPr id="305" name="" descr="{&quot;isTemplate&quot;:true,&quot;type&quot;:&quot;text&quot;}"/>
+          <p:cNvPr id="306" name="" descr="{&quot;isTemplate&quot;:true,&quot;type&quot;:&quot;text&quot;}"/>
           <p:cNvSpPr txBox="1"/>
           <p:nvPr/>
         </p:nvSpPr>
@@ -14978,7 +15013,7 @@
       </p:sp>
       <p:sp>
         <p:nvSpPr>
-          <p:cNvPr id="306" name="" descr="{&quot;isTemplate&quot;:true,&quot;type&quot;:&quot;text&quot;}"/>
+          <p:cNvPr id="307" name="" descr="{&quot;isTemplate&quot;:true,&quot;type&quot;:&quot;text&quot;}"/>
           <p:cNvSpPr txBox="1"/>
           <p:nvPr/>
         </p:nvSpPr>
@@ -15109,7 +15144,7 @@
       </p:sp>
       <p:sp>
         <p:nvSpPr>
-          <p:cNvPr id="307" name="" descr="{&quot;isTemplate&quot;:true,&quot;type&quot;:&quot;text&quot;}"/>
+          <p:cNvPr id="308" name="" descr="{&quot;isTemplate&quot;:true,&quot;type&quot;:&quot;text&quot;}"/>
           <p:cNvSpPr txBox="1"/>
           <p:nvPr/>
         </p:nvSpPr>
@@ -15186,7 +15221,7 @@
       </p:sp>
       <p:sp>
         <p:nvSpPr>
-          <p:cNvPr id="308" name="" descr="{&quot;isTemplate&quot;:true,&quot;type&quot;:&quot;text&quot;}"/>
+          <p:cNvPr id="309" name="" descr="{&quot;isTemplate&quot;:true,&quot;type&quot;:&quot;text&quot;}"/>
           <p:cNvSpPr txBox="1"/>
           <p:nvPr/>
         </p:nvSpPr>
@@ -15251,7 +15286,7 @@
       </p:sp>
       <p:sp>
         <p:nvSpPr>
-          <p:cNvPr id="309" name="" descr="{&quot;isTemplate&quot;:true,&quot;type&quot;:&quot;text&quot;}"/>
+          <p:cNvPr id="310" name="" descr="{&quot;isTemplate&quot;:true,&quot;type&quot;:&quot;text&quot;}"/>
           <p:cNvSpPr txBox="1"/>
           <p:nvPr/>
         </p:nvSpPr>

--- a/docs/AI掌柜-路演PPT/AI掌柜-路演PPT.pptx
+++ b/docs/AI掌柜-路演PPT/AI掌柜-路演PPT.pptx
@@ -6357,7 +6357,7 @@
   <p:cSld>
     <p:spTree>
       <p:nvGrpSpPr>
-        <p:cNvPr id="131" name="" descr="&lt;Slide style={{ width: 1280, height: 720, background: '#0B0D14', padding: '56px 72px', flexDirection: 'column' }}&gt;&#13;&#10;  &lt;Box style={{ height: 96, flexDirection: 'row', justifyContent: 'space-between', alignItems: 'flex-start' }}&gt;&#13;&#10;    &lt;Box style={{ flexDirection: 'column', gap: 8 }}&gt;&#13;&#10;      &lt;Text style={{ fontSize: 34, fontWeight: 'bold', color: '#F2F4FF' }}&gt;四块能力，缺一块都落不了地&lt;/Text&gt;&#13;&#10;      &lt;Text style={{ fontSize: 15, color: '#8A90A6' }}&gt;看得懂、算得准、动得了、说得清&lt;/Text&gt;&#13;&#10;    &lt;/Box&gt;&#13;&#10;    &lt;Text style={{ fontSize: 13, color: '#4A5064', letterSpacing: 2 }}&gt;AI 掌柜&lt;/Text&gt;&#13;&#10;  &lt;/Box&gt;&#13;&#10;  &lt;Box style={{ flex: 1, paddingTop: 8 }}&gt;&#13;&#10;    &lt;Box style={{ flexDirection: 'row', gap: 18, height: 250 }}&gt;&#13;&#10;      &lt;Box style={{ flex: 1, background: '#141826', border: '1px solid #242A3D', borderRadius: 14, padding: 24 }}&gt;&#13;&#10;        &lt;Text style={{ fontSize: 20, fontWeight: 'bold', color: '#6C6CF5' }}&gt;看得懂&lt;/Text&gt;&#13;&#10;        &lt;Text style={{ fontSize: 15, color: '#F2F4FF', marginTop: 12, lineHeight: 1.75 }}&gt;营收 · 客流 · 毛利&lt;br /&gt;时段 · 翻台 · 会员结构&lt;/Text&gt;&#13;&#10;        &lt;Text style={{ fontSize: 13, color: '#8A90A6', marginTop: 16 }}&gt;180 天 / 6,803 单&lt;/Text&gt;&#13;&#10;      &lt;/Box&gt;&#13;&#10;      &lt;Box style={{ flex: 1, background: '#141826', border: '1px solid #242A3D', borderRadius: 14, padding: 24 }}&gt;&#13;&#10;        &lt;Text style={{ fontSize: 20, fontWeight: 'bold', color: '#6C6CF5' }}&gt;算得准&lt;/Text&gt;&#13;&#10;        &lt;Text style={{ fontSize: 15, color: '#F2F4FF', marginTop: 12, lineHeight: 1.75 }}&gt;指标唯一口径&lt;br /&gt;BOM 成本 · 三层分解预测&lt;/Text&gt;&#13;&#10;        &lt;Text style={{ fontSize: 13, color: '#8A90A6', marginTop: 16 }}&gt;回测误差 22%（含异常周）&lt;/Text&gt;&#13;&#10;      &lt;/Box&gt;&#13;&#10;      &lt;Box style={{ flex: 1, background: '#141826', border: '1px solid #242A3D', borderRadius: 14, padding: 24 }}&gt;&#13;&#10;        &lt;Text style={{ fontSize: 20, fontWeight: 'bold', color: '#6C6CF5' }}&gt;动得了&lt;/Text&gt;&#13;&#10;        &lt;Text style={{ fontSize: 15, color: '#F2F4FF', marginTop: 12, lineHeight: 1.75 }}&gt;生成采购单 · 按毛利调价&lt;br /&gt;滞销菜设为主推&lt;/Text&gt;&#13;&#10;        &lt;Text style={{ fontSize: 13, color: '#8A90A6', marginTop: 16 }}&gt;3 类动作 · 全部可撤销&lt;/Text&gt;&#13;&#10;      &lt;/Box&gt;&#13;&#10;      &lt;Box style={{ flex: 1, background: '#141826', border: '1px solid #242A3D', borderRadius: 14, padding: 24 }}&gt;&#13;&#10;        &lt;Text style={{ fontSize: 20, fontWeight: 'bold', color: '#6C6CF5' }}&gt;说得清&lt;/Text&gt;&#13;&#10;        &lt;Text style={{ fontSize: 15, color: '#F2F4FF', marginTop: 12, lineHeight: 1.75 }}&gt;每条结论附证据 SQL&lt;br /&gt;操作留痕 · 一键回滚&lt;/Text&gt;&#13;&#10;        &lt;Text style={{ fontSize: 13, color: '#8A90A6', marginTop: 16 }}&gt;8 条越界语句 100% 拦截&lt;/Text&gt;&#13;&#10;      &lt;/Box&gt;&#13;&#10;    &lt;/Box&gt;&#13;&#10;    &lt;Box style={{ marginTop: 28, background: '#12141F', border: '1px solid #242A3D', borderRadius: 12, padding: '20px 24px', flexDirection: 'row', alignItems: 'center', gap: 18 }}&gt;&#13;&#10;      &lt;Text style={{ fontSize: 15, color: '#8A90A6', width: 110 }}&gt;串联起来&lt;/Text&gt;&#13;&#10;      &lt;Text style={{ fontSize: 17, color: '#F2F4FF' }}&gt;看到异常 → 算清原因 → 直接处理 → 留下证据，四步在同一屏里完成。&lt;/Text&gt;&#13;&#10;    &lt;/Box&gt;&#13;&#10;  &lt;/Box&gt;&#13;&#10;  &lt;Box style={{ height: 36, flexDirection: 'row', justifyContent: 'space-between', alignItems: 'flex-end' }}&gt;&#13;&#10;    &lt;Text style={{ fontSize: 12, color: '#4A5064' }}&gt;2026 武汉 1024 · 产业应用赛道&lt;/Text&gt;&#13;&#10;    &lt;Text style={{ fontSize: 12, color: '#4A5064' }}&gt;04 / 12&lt;/Text&gt;&#13;&#10;  &lt;/Box&gt;&#13;&#10;&lt;/Slide&gt;"/>
+        <p:cNvPr id="131" name="" descr="&lt;Slide style={{ width: 1280, height: 720, background: '#0B0D14', padding: '56px 72px', flexDirection: 'column' }}&gt;&#13;&#10;  &lt;Box style={{ height: 96, flexDirection: 'row', justifyContent: 'space-between', alignItems: 'flex-start' }}&gt;&#13;&#10;    &lt;Box style={{ flexDirection: 'column', gap: 8 }}&gt;&#13;&#10;      &lt;Text style={{ fontSize: 34, fontWeight: 'bold', color: '#F2F4FF' }}&gt;四块能力，缺一块都落不了地&lt;/Text&gt;&#13;&#10;      &lt;Text style={{ fontSize: 15, color: '#8A90A6' }}&gt;看得懂、算得准、动得了、说得清&lt;/Text&gt;&#13;&#10;    &lt;/Box&gt;&#13;&#10;    &lt;Text style={{ fontSize: 13, color: '#4A5064', letterSpacing: 2 }}&gt;AI 掌柜&lt;/Text&gt;&#13;&#10;  &lt;/Box&gt;&#13;&#10;  &lt;Box style={{ flex: 1, paddingTop: 8 }}&gt;&#13;&#10;    &lt;Box style={{ flexDirection: 'row', gap: 18, height: 250 }}&gt;&#13;&#10;      &lt;Box style={{ flex: 1, background: '#141826', border: '1px solid #242A3D', borderRadius: 14, padding: 24 }}&gt;&#13;&#10;        &lt;Text style={{ fontSize: 20, fontWeight: 'bold', color: '#6C6CF5' }}&gt;看得懂&lt;/Text&gt;&#13;&#10;        &lt;Text style={{ fontSize: 15, color: '#F2F4FF', marginTop: 12, lineHeight: 1.75 }}&gt;营收 · 客流 · 毛利&lt;br /&gt;时段 · 翻台 · 会员结构&lt;/Text&gt;&#13;&#10;        &lt;Text style={{ fontSize: 13, color: '#8A90A6', marginTop: 16 }}&gt;180 天 / 6,803 单&lt;/Text&gt;&#13;&#10;      &lt;/Box&gt;&#13;&#10;      &lt;Box style={{ flex: 1, background: '#141826', border: '1px solid #242A3D', borderRadius: 14, padding: 24 }}&gt;&#13;&#10;        &lt;Text style={{ fontSize: 20, fontWeight: 'bold', color: '#6C6CF5' }}&gt;算得准&lt;/Text&gt;&#13;&#10;        &lt;Text style={{ fontSize: 15, color: '#F2F4FF', marginTop: 12, lineHeight: 1.75 }}&gt;指标唯一口径&lt;br /&gt;BOM 成本 · 三层预测 · 经营推演&lt;/Text&gt;&#13;&#10;        &lt;Text style={{ fontSize: 13, color: '#8A90A6', marginTop: 16 }}&gt;回测误差 22%（含异常周）&lt;/Text&gt;&#13;&#10;      &lt;/Box&gt;&#13;&#10;      &lt;Box style={{ flex: 1, background: '#141826', border: '1px solid #242A3D', borderRadius: 14, padding: 24 }}&gt;&#13;&#10;        &lt;Text style={{ fontSize: 20, fontWeight: 'bold', color: '#6C6CF5' }}&gt;动得了&lt;/Text&gt;&#13;&#10;        &lt;Text style={{ fontSize: 15, color: '#F2F4FF', marginTop: 12, lineHeight: 1.75 }}&gt;生成采购单 · 按毛利调价&lt;br /&gt;滞销菜设为主推&lt;/Text&gt;&#13;&#10;        &lt;Text style={{ fontSize: 13, color: '#8A90A6', marginTop: 16 }}&gt;3 类动作 · 全部可撤销&lt;/Text&gt;&#13;&#10;      &lt;/Box&gt;&#13;&#10;      &lt;Box style={{ flex: 1, background: '#141826', border: '1px solid #242A3D', borderRadius: 14, padding: 24 }}&gt;&#13;&#10;        &lt;Text style={{ fontSize: 20, fontWeight: 'bold', color: '#6C6CF5' }}&gt;说得清&lt;/Text&gt;&#13;&#10;        &lt;Text style={{ fontSize: 15, color: '#F2F4FF', marginTop: 12, lineHeight: 1.75 }}&gt;每条结论附证据 SQL&lt;br /&gt;操作留痕 · 一键回滚&lt;/Text&gt;&#13;&#10;        &lt;Text style={{ fontSize: 13, color: '#8A90A6', marginTop: 16 }}&gt;8 条越界语句 100% 拦截&lt;/Text&gt;&#13;&#10;      &lt;/Box&gt;&#13;&#10;    &lt;/Box&gt;&#13;&#10;    &lt;Box style={{ marginTop: 28, background: '#12141F', border: '1px solid #242A3D', borderRadius: 12, padding: '20px 24px', flexDirection: 'row', alignItems: 'center', gap: 18 }}&gt;&#13;&#10;      &lt;Text style={{ fontSize: 15, color: '#8A90A6', width: 110 }}&gt;串联起来&lt;/Text&gt;&#13;&#10;      &lt;Text style={{ fontSize: 17, color: '#F2F4FF' }}&gt;看到异常 → 算清原因 → 直接处理 → 留下证据，四步在同一屏里完成。&lt;/Text&gt;&#13;&#10;    &lt;/Box&gt;&#13;&#10;  &lt;/Box&gt;&#13;&#10;  &lt;Box style={{ height: 36, flexDirection: 'row', justifyContent: 'space-between', alignItems: 'flex-end' }}&gt;&#13;&#10;    &lt;Text style={{ fontSize: 12, color: '#4A5064' }}&gt;2026 武汉 1024 · 产业应用赛道&lt;/Text&gt;&#13;&#10;    &lt;Text style={{ fontSize: 12, color: '#4A5064' }}&gt;04 / 12&lt;/Text&gt;&#13;&#10;  &lt;/Box&gt;&#13;&#10;&lt;/Slide&gt;"/>
         <p:cNvGrpSpPr/>
         <p:nvPr/>
       </p:nvGrpSpPr>
@@ -6915,7 +6915,27 @@
                 <a:latin typeface="Microsoft YaHei"/>
                 <a:ea typeface="Microsoft YaHei"/>
               </a:rPr>
-              <a:t>三层分解预测</a:t>
+              <a:t>三层预测</a:t>
+            </a:r>
+            <a:r>
+              <a:rPr lang="en-US" sz="1125">
+                <a:solidFill>
+                  <a:srgbClr val="F2F4FF"/>
+                </a:solidFill>
+                <a:latin typeface="Microsoft YaHei"/>
+                <a:ea typeface="Microsoft YaHei"/>
+              </a:rPr>
+              <a:t xml:space="preserve"> · </a:t>
+            </a:r>
+            <a:r>
+              <a:rPr lang="zh-CN" sz="1125">
+                <a:solidFill>
+                  <a:srgbClr val="F2F4FF"/>
+                </a:solidFill>
+                <a:latin typeface="Microsoft YaHei"/>
+                <a:ea typeface="Microsoft YaHei"/>
+              </a:rPr>
+              <a:t>经营推演</a:t>
             </a:r>
             <a:endParaRPr/>
           </a:p>

--- a/docs/AI掌柜-路演PPT/AI掌柜-路演PPT.pptx
+++ b/docs/AI掌柜-路演PPT/AI掌柜-路演PPT.pptx
@@ -3866,7 +3866,7 @@
         </p:nvPicPr>
         <p:blipFill>
           <a:blip r:embed="rId1"/>
-          <a:srcRect l="0" t="11904" r="0" b="11904"/>
+          <a:srcRect l="0" t="4285" r="0" b="4285"/>
           <a:stretch>
             <a:fillRect/>
           </a:stretch>

--- a/docs/AI掌柜-路演PPT/AI掌柜-路演PPT.pptx
+++ b/docs/AI掌柜-路演PPT/AI掌柜-路演PPT.pptx
@@ -3866,7 +3866,7 @@
         </p:nvPicPr>
         <p:blipFill>
           <a:blip r:embed="rId1"/>
-          <a:srcRect l="0" t="4285" r="0" b="4285"/>
+          <a:srcRect l="0" t="2979" r="0" b="2979"/>
           <a:stretch>
             <a:fillRect/>
           </a:stretch>

--- a/docs/AI掌柜-路演PPT/AI掌柜-路演PPT.pptx
+++ b/docs/AI掌柜-路演PPT/AI掌柜-路演PPT.pptx
@@ -556,7 +556,7 @@
   <p:cSld>
     <p:spTree>
       <p:nvGrpSpPr>
-        <p:cNvPr id="1" name="" descr="&lt;Slide style={{ width: 1280, height: 720, background: '#F6F8FD', padding: '56px 72px', flexDirection: 'column', justifyContent: 'space-between' }}&gt;&#13;&#10;  &lt;Box style={{ flexDirection: 'row', justifyContent: 'space-between', alignItems: 'center' }}&gt;&#13;&#10;    &lt;Text style={{ fontSize: 13, color: '#5C6780', letterSpacing: 1 }}&gt;2026 武汉 1024 · 人工智能创新应用黑客松&lt;/Text&gt;&#13;&#10;    &lt;Box style={{ flexDirection: 'row', alignItems: 'center', gap: 6, padding: '5px 12px', background: '#EEF1FE', border: '1px solid #DDE2F5', borderRadius: 999 }}&gt;&#13;&#10;      &lt;Box style={{ width: 6, height: 6, borderRadius: 3, background: '#4C4DDC' }} /&gt;&#13;&#10;      &lt;Text style={{ fontSize: 12, color: '#4C4DDC', fontWeight: 'bold', letterSpacing: 1 }}&gt;产业应用赛道&lt;/Text&gt;&#13;&#10;    &lt;/Box&gt;&#13;&#10;  &lt;/Box&gt;&#13;&#10;&#13;&#10;  &lt;Box style={{ flexDirection: 'row', alignItems: 'center', gap: 40 }}&gt;&#13;&#10;    &lt;Box style={{ flex: 1, flexDirection: 'column' }}&gt;&#13;&#10;      &lt;Text style={{ fontSize: 92, fontWeight: 'bold', color: '#0C1222', letterSpacing: -3 }}&gt;AI 掌柜&lt;/Text&gt;&#13;&#10;      &lt;Text style={{ fontSize: 28, color: '#3A4360', marginTop: 6 }}&gt;中小餐饮经营 Agent&lt;/Text&gt;&#13;&#10;      &lt;Box style={{ width: 88, height: 4, background: '#4C4DDC', borderRadius: 2, marginTop: 20, marginBottom: 20 }} /&gt;&#13;&#10;      &lt;Text style={{ fontSize: 20, color: '#5C6780', lineHeight: 1.75, width: 620 }}&gt;&#13;&#10;        不只告诉你哪里亏，还替你把账算平、把货备好、把菜单改对。&#13;&#10;      &lt;/Text&gt;&#13;&#10;    &lt;/Box&gt;&#13;&#10;&#13;&#10;    &lt;Box style={{ width: 360, background: '#EEF1FE', border: '1px solid #DDE2F5', borderRadius: 18, padding: 26, flexDirection: 'column', gap: 16 }}&gt;&#13;&#10;      &lt;Text style={{ fontSize: 11, color: '#4C4DDC', fontWeight: 'bold', letterSpacing: 2 }}&gt;DAILY LOOP&lt;/Text&gt;&#13;&#10;      &lt;Box style={{ flexDirection: 'row', alignItems: 'center', gap: 12 }}&gt;&#13;&#10;        &lt;Box style={{ width: 26, height: 26, borderRadius: 8, background: '#4C4DDC', alignItems: 'center', justifyContent: 'center' }}&gt;&#13;&#10;          &lt;Text style={{ fontSize: 12, color: '#FFFFFF', fontWeight: 'bold' }}&gt;1&lt;/Text&gt;&#13;&#10;        &lt;/Box&gt;&#13;&#10;        &lt;Text style={{ fontSize: 15, color: '#0C1222' }}&gt;发现异常 · 3 件事&lt;/Text&gt;&#13;&#10;      &lt;/Box&gt;&#13;&#10;      &lt;Box style={{ flexDirection: 'row', alignItems: 'center', gap: 12 }}&gt;&#13;&#10;        &lt;Box style={{ width: 26, height: 26, borderRadius: 8, background: '#4C4DDC', alignItems: 'center', justifyContent: 'center' }}&gt;&#13;&#10;          &lt;Text style={{ fontSize: 12, color: '#FFFFFF', fontWeight: 'bold' }}&gt;2&lt;/Text&gt;&#13;&#10;        &lt;/Box&gt;&#13;&#10;        &lt;Text style={{ fontSize: 15, color: '#0C1222' }}&gt;算清原因 · 客流 / 客单价&lt;/Text&gt;&#13;&#10;      &lt;/Box&gt;&#13;&#10;      &lt;Box style={{ flexDirection: 'row', alignItems: 'center', gap: 12 }}&gt;&#13;&#10;        &lt;Box style={{ width: 26, height: 26, borderRadius: 8, background: '#4C4DDC', alignItems: 'center', justifyContent: 'center' }}&gt;&#13;&#10;          &lt;Text style={{ fontSize: 12, color: '#FFFFFF', fontWeight: 'bold' }}&gt;3&lt;/Text&gt;&#13;&#10;        &lt;/Box&gt;&#13;&#10;        &lt;Text style={{ fontSize: 15, color: '#0C1222' }}&gt;动手执行 · 可撤销&lt;/Text&gt;&#13;&#10;      &lt;/Box&gt;&#13;&#10;      &lt;Box style={{ height: 1, background: '#D8DEF2', marginTop: 4 }} /&gt;&#13;&#10;      &lt;Text style={{ fontSize: 12, color: '#5C6780' }}&gt;180 天 · 6,803 单 · 断网可跑&lt;/Text&gt;&#13;&#10;    &lt;/Box&gt;&#13;&#10;  &lt;/Box&gt;&#13;&#10;&#13;&#10;  &lt;Box style={{ flexDirection: 'row', justifyContent: 'space-between', alignItems: 'flex-end' }}&gt;&#13;&#10;    &lt;Text style={{ fontSize: 14, color: '#5C6780' }}&gt;演示门店 · 春归燕茶餐厅&lt;/Text&gt;&#13;&#10;    &lt;Text style={{ fontSize: 13, color: '#8A93A8' }}&gt;01 / 12&lt;/Text&gt;&#13;&#10;  &lt;/Box&gt;&#13;&#10;&lt;/Slide&gt;&#13;&#10;"/>
+        <p:cNvPr id="1" name=""/>
         <p:cNvGrpSpPr/>
         <p:nvPr/>
       </p:nvGrpSpPr>
@@ -589,7 +589,10 @@
         </p:spPr>
         <p:txBody>
           <a:bodyPr/>
-          <a:p/>
+          <a:p>
+            <a:pPr/>
+            <a:endParaRPr/>
+          </a:p>
         </p:txBody>
       </p:sp>
       <p:sp>
@@ -685,7 +688,10 @@
         </p:spPr>
         <p:txBody>
           <a:bodyPr/>
-          <a:p/>
+          <a:p>
+            <a:pPr/>
+            <a:endParaRPr/>
+          </a:p>
         </p:txBody>
       </p:sp>
       <p:sp>
@@ -711,7 +717,10 @@
         </p:spPr>
         <p:txBody>
           <a:bodyPr/>
-          <a:p/>
+          <a:p>
+            <a:pPr/>
+            <a:endParaRPr/>
+          </a:p>
         </p:txBody>
       </p:sp>
       <p:sp>
@@ -862,7 +871,10 @@
         </p:spPr>
         <p:txBody>
           <a:bodyPr/>
-          <a:p/>
+          <a:p>
+            <a:pPr/>
+            <a:endParaRPr/>
+          </a:p>
         </p:txBody>
       </p:sp>
       <p:sp>
@@ -928,7 +940,10 @@
         </p:spPr>
         <p:txBody>
           <a:bodyPr/>
-          <a:p/>
+          <a:p>
+            <a:pPr/>
+            <a:endParaRPr/>
+          </a:p>
         </p:txBody>
       </p:sp>
       <p:sp>
@@ -989,7 +1004,10 @@
         </p:spPr>
         <p:txBody>
           <a:bodyPr/>
-          <a:p/>
+          <a:p>
+            <a:pPr/>
+            <a:endParaRPr/>
+          </a:p>
         </p:txBody>
       </p:sp>
       <p:sp>
@@ -1105,7 +1123,10 @@
         </p:spPr>
         <p:txBody>
           <a:bodyPr/>
-          <a:p/>
+          <a:p>
+            <a:pPr/>
+            <a:endParaRPr/>
+          </a:p>
         </p:txBody>
       </p:sp>
       <p:sp>
@@ -1241,7 +1262,10 @@
         </p:spPr>
         <p:txBody>
           <a:bodyPr/>
-          <a:p/>
+          <a:p>
+            <a:pPr/>
+            <a:endParaRPr/>
+          </a:p>
         </p:txBody>
       </p:sp>
       <p:sp>
@@ -1355,7 +1379,10 @@
         </p:spPr>
         <p:txBody>
           <a:bodyPr/>
-          <a:p/>
+          <a:p>
+            <a:pPr/>
+            <a:endParaRPr/>
+          </a:p>
         </p:txBody>
       </p:sp>
       <p:sp>
@@ -1543,7 +1570,7 @@
   <p:cSld>
     <p:spTree>
       <p:nvGrpSpPr>
-        <p:cNvPr id="26" name="" descr="&lt;Slide style={{ width: 1280, height: 720, background: '#F6F8FD', padding: '56px 72px', flexDirection: 'column' }}&gt;&#13;&#10;  &lt;Box style={{ height: 96, flexDirection: 'row', justifyContent: 'space-between', alignItems: 'flex-start' }}&gt;&#13;&#10;    &lt;Box style={{ flexDirection: 'column', gap: 8 }}&gt;&#13;&#10;      &lt;Text style={{ fontSize: 34, fontWeight: 'bold', color: '#0C1222' }}&gt;一家店跑通，才敢谈复制&lt;/Text&gt;&#13;&#10;      &lt;Text style={{ fontSize: 15, color: '#5C6780' }}&gt;单店 → 连锁 → 产业带，每一步都靠同一套指标与工具&lt;/Text&gt;&#13;&#10;    &lt;/Box&gt;&#13;&#10;    &lt;Box style={{ flexDirection: 'row', alignItems: 'center', gap: 6, padding: '5px 12px', background: '#EEF1FE', border: '1px solid #DDE2F5', borderRadius: 999 }}&gt;&#13;&#10;      &lt;Box style={{ width: 6, height: 6, borderRadius: 3, background: '#4C4DDC' }} /&gt;&#13;&#10;      &lt;Text style={{ fontSize: 12, color: '#4C4DDC', fontWeight: 'bold', letterSpacing: 1 }}&gt;AI 掌柜&lt;/Text&gt;&#13;&#10;    &lt;/Box&gt;&#13;&#10;  &lt;/Box&gt;&#13;&#10;  &lt;Box style={{ width: 72, height: 3, background: '#4C4DDC', borderRadius: 2, marginTop: 2, marginBottom: 12 }} /&gt;&#13;&#10;  &lt;Box style={{ flex: 1, paddingTop: 8 }}&gt;&#13;&#10;    &lt;Box style={{ flexDirection: 'row', gap: 16, height: 210 }}&gt;&#13;&#10;      &lt;Box style={{ flex: 1, background: '#EEF1FE', border: '1px solid #C9CDF6', borderRadius: 14, padding: 24 }}&gt;&#13;&#10;        &lt;Text style={{ fontSize: 12, color: '#4C4DDC', letterSpacing: 2 }}&gt;现在 · 单店&lt;/Text&gt;&#13;&#10;        &lt;Text style={{ fontSize: 22, fontWeight: 'bold', color: '#0C1222', marginTop: 10 }}&gt;跑通闭环&lt;/Text&gt;&#13;&#10;        &lt;Text style={{ fontSize: 14, color: '#5C6780', marginTop: 10, lineHeight: 1.75 }}&gt;180 天数据 · 6,803 单&lt;br /&gt;AI 建议 → 执行 → 效果回流&lt;/Text&gt;&#13;&#10;      &lt;/Box&gt;&#13;&#10;      &lt;Box style={{ flex: 1, background: '#FFFFFF', border: '1px solid #E3E8F5', borderRadius: 14, padding: 24 }}&gt;&#13;&#10;        &lt;Text style={{ fontSize: 12, color: '#5C6780', letterSpacing: 2 }}&gt;下一步 · 连锁&lt;/Text&gt;&#13;&#10;        &lt;Text style={{ fontSize: 22, fontWeight: 'bold', color: '#0C1222', marginTop: 10 }}&gt;门店对比&lt;/Text&gt;&#13;&#10;        &lt;Text style={{ fontSize: 14, color: '#5C6780', marginTop: 10, lineHeight: 1.75 }}&gt;同一指标跨店比较&lt;br /&gt;找出「哪家店哪道菜不对」&lt;/Text&gt;&#13;&#10;      &lt;/Box&gt;&#13;&#10;      &lt;Box style={{ flex: 1, background: '#FFFFFF', border: '1px solid #E3E8F5', borderRadius: 14, padding: 24 }}&gt;&#13;&#10;        &lt;Text style={{ fontSize: 12, color: '#5C6780', letterSpacing: 2 }}&gt;更远 · 产业带&lt;/Text&gt;&#13;&#10;        &lt;Text style={{ fontSize: 22, fontWeight: 'bold', color: '#0C1222', marginTop: 10 }}&gt;供应链协同&lt;/Text&gt;&#13;&#10;        &lt;Text style={{ fontSize: 14, color: '#5C6780', marginTop: 10, lineHeight: 1.75 }}&gt;聚合采购需求&lt;br /&gt;用数据换议价权&lt;/Text&gt;&#13;&#10;      &lt;/Box&gt;&#13;&#10;    &lt;/Box&gt;&#13;&#10;    &lt;Box style={{ marginTop: 26, background: '#FBFCFE', border: '1px solid #E3E8F5', borderRadius: 12, padding: '22px 26px', flexDirection: 'row', alignItems: 'center', gap: 18 }}&gt;&#13;&#10;      &lt;Text style={{ fontSize: 13, color: '#5C6780', width: 96 }}&gt;数据飞轮&lt;/Text&gt;&#13;&#10;      &lt;Text style={{ fontSize: 16, color: '#0C1222' }}&gt;更多门店 → 更多真实经营样本 → 预测与阈值更准 → 建议更敢执行 → 更多门店愿意接入&lt;/Text&gt;&#13;&#10;    &lt;/Box&gt;&#13;&#10;    &lt;Box style={{ marginTop: 16, flexDirection: 'row', gap: 24 }}&gt;&#13;&#10;      &lt;Text style={{ fontSize: 13, color: '#8A93A8' }}&gt;可复制性：换一套菜单与配方即可用于茶餐厅 / 快餐 / 火锅 / 烘焙，指标层与工具层不用改。&lt;/Text&gt;&#13;&#10;    &lt;/Box&gt;&#13;&#10;  &lt;/Box&gt;&#13;&#10;  &lt;Box style={{ height: 36, flexDirection: 'row', justifyContent: 'space-between', alignItems: 'flex-end' }}&gt;&#13;&#10;    &lt;Text style={{ fontSize: 12, color: '#8A93A8' }}&gt;2026 武汉 1024 · 产业应用赛道&lt;/Text&gt;&#13;&#10;    &lt;Text style={{ fontSize: 12, color: '#8A93A8' }}&gt;10 / 12&lt;/Text&gt;&#13;&#10;  &lt;/Box&gt;&#13;&#10;&lt;/Slide&gt;"/>
+        <p:cNvPr id="26" name=""/>
         <p:cNvGrpSpPr/>
         <p:nvPr/>
       </p:nvGrpSpPr>
@@ -1576,7 +1603,10 @@
         </p:spPr>
         <p:txBody>
           <a:bodyPr/>
-          <a:p/>
+          <a:p>
+            <a:pPr/>
+            <a:endParaRPr/>
+          </a:p>
         </p:txBody>
       </p:sp>
       <p:sp>
@@ -1717,7 +1747,10 @@
         </p:spPr>
         <p:txBody>
           <a:bodyPr/>
-          <a:p/>
+          <a:p>
+            <a:pPr/>
+            <a:endParaRPr/>
+          </a:p>
         </p:txBody>
       </p:sp>
       <p:sp>
@@ -1743,7 +1776,10 @@
         </p:spPr>
         <p:txBody>
           <a:bodyPr/>
-          <a:p/>
+          <a:p>
+            <a:pPr/>
+            <a:endParaRPr/>
+          </a:p>
         </p:txBody>
       </p:sp>
       <p:sp>
@@ -1814,7 +1850,10 @@
         </p:spPr>
         <p:txBody>
           <a:bodyPr/>
-          <a:p/>
+          <a:p>
+            <a:pPr/>
+            <a:endParaRPr/>
+          </a:p>
         </p:txBody>
       </p:sp>
       <p:sp>
@@ -1845,7 +1884,10 @@
         </p:spPr>
         <p:txBody>
           <a:bodyPr/>
-          <a:p/>
+          <a:p>
+            <a:pPr/>
+            <a:endParaRPr/>
+          </a:p>
         </p:txBody>
       </p:sp>
       <p:sp>
@@ -2099,7 +2141,10 @@
         </p:spPr>
         <p:txBody>
           <a:bodyPr/>
-          <a:p/>
+          <a:p>
+            <a:pPr/>
+            <a:endParaRPr/>
+          </a:p>
         </p:txBody>
       </p:sp>
       <p:sp>
@@ -2273,7 +2318,10 @@
         </p:spPr>
         <p:txBody>
           <a:bodyPr/>
-          <a:p/>
+          <a:p>
+            <a:pPr/>
+            <a:endParaRPr/>
+          </a:p>
         </p:txBody>
       </p:sp>
       <p:sp>
@@ -2447,7 +2495,10 @@
         </p:spPr>
         <p:txBody>
           <a:bodyPr/>
-          <a:p/>
+          <a:p>
+            <a:pPr/>
+            <a:endParaRPr/>
+          </a:p>
         </p:txBody>
       </p:sp>
       <p:sp>
@@ -2805,7 +2856,7 @@
   <p:cSld>
     <p:spTree>
       <p:nvGrpSpPr>
-        <p:cNvPr id="52" name="" descr="&lt;Slide style={{ width: 1280, height: 720, background: '#F6F8FD', padding: '56px 72px', flexDirection: 'column' }}&gt;&#13;&#10;  &lt;Box style={{ height: 96, flexDirection: 'row', justifyContent: 'space-between', alignItems: 'flex-start' }}&gt;&#13;&#10;    &lt;Box style={{ flexDirection: 'column', gap: 8 }}&gt;&#13;&#10;      &lt;Text style={{ fontSize: 34, fontWeight: 'bold', color: '#0C1222' }}&gt;主动说清楚：它现在还不能做什么&lt;/Text&gt;&#13;&#10;      &lt;Text style={{ fontSize: 15, color: '#5C6780' }}&gt;边界写得越清楚，越敢把店交给它&lt;/Text&gt;&#13;&#10;    &lt;/Box&gt;&#13;&#10;    &lt;Box style={{ flexDirection: 'row', alignItems: 'center', gap: 6, padding: '5px 12px', background: '#EEF1FE', border: '1px solid #DDE2F5', borderRadius: 999 }}&gt;&#13;&#10;      &lt;Box style={{ width: 6, height: 6, borderRadius: 3, background: '#4C4DDC' }} /&gt;&#13;&#10;      &lt;Text style={{ fontSize: 12, color: '#4C4DDC', fontWeight: 'bold', letterSpacing: 1 }}&gt;AI 掌柜&lt;/Text&gt;&#13;&#10;    &lt;/Box&gt;&#13;&#10;  &lt;/Box&gt;&#13;&#10;  &lt;Box style={{ width: 72, height: 3, background: '#4C4DDC', borderRadius: 2, marginTop: 2, marginBottom: 12 }} /&gt;&#13;&#10;  &lt;Box style={{ flex: 1, paddingTop: 8 }}&gt;&#13;&#10;    &lt;Box style={{ flexDirection: 'column', gap: 14 }}&gt;&#13;&#10;      &lt;Box style={{ flexDirection: 'row', gap: 16, alignItems: 'flex-start' }}&gt;&#13;&#10;        &lt;Text style={{ fontSize: 14, fontWeight: 'bold', color: '#4C4DDC', width: 30 }}&gt;01&lt;/Text&gt;&#13;&#10;        &lt;Box style={{ flexDirection: 'column', gap: 4 }}&gt;&#13;&#10;          &lt;Text style={{ fontSize: 18, color: '#0C1222' }}&gt;预测不是深度学习&lt;/Text&gt;&#13;&#10;          &lt;Text style={{ fontSize: 14, color: '#5C6780' }}&gt;单店 180 天数据撑不起模型，用「水平 × 星期因子 × 趋势」三层分解，给区间比给点值更诚实。&lt;/Text&gt;&#13;&#10;        &lt;/Box&gt;&#13;&#10;      &lt;/Box&gt;&#13;&#10;      &lt;Box style={{ height: 1, background: '#E3E8F5' }} /&gt;&#13;&#10;      &lt;Box style={{ flexDirection: 'row', gap: 16, alignItems: 'flex-start' }}&gt;&#13;&#10;        &lt;Text style={{ fontSize: 14, fontWeight: 'bold', color: '#4C4DDC', width: 30 }}&gt;02&lt;/Text&gt;&#13;&#10;        &lt;Box style={{ flexDirection: 'column', gap: 4 }}&gt;&#13;&#10;          &lt;Text style={{ fontSize: 18, color: '#0C1222' }}&gt;调价单次不超过 15%&lt;/Text&gt;&#13;&#10;          &lt;Text style={{ fontSize: 14, color: '#5C6780' }}&gt;成本加成算出来的价格往往卖不动；差额建议靠改配方或换供应商补，而不是一次涨到位。&lt;/Text&gt;&#13;&#10;        &lt;/Box&gt;&#13;&#10;      &lt;/Box&gt;&#13;&#10;      &lt;Box style={{ height: 1, background: '#E3E8F5' }} /&gt;&#13;&#10;      &lt;Box style={{ flexDirection: 'row', gap: 16, alignItems: 'flex-start' }}&gt;&#13;&#10;        &lt;Text style={{ fontSize: 14, fontWeight: 'bold', color: '#4C4DDC', width: 30 }}&gt;03&lt;/Text&gt;&#13;&#10;        &lt;Box style={{ flexDirection: 'column', gap: 4 }}&gt;&#13;&#10;          &lt;Text style={{ fontSize: 18, color: '#0C1222' }}&gt;采购建议未考虑起订量与在途&lt;/Text&gt;&#13;&#10;          &lt;Text style={{ fontSize: 14, color: '#5C6780' }}&gt;当前按近 14 天日均消耗外推，接入供应商报价单后再补这一层。&lt;/Text&gt;&#13;&#10;        &lt;/Box&gt;&#13;&#10;      &lt;/Box&gt;&#13;&#10;      &lt;Box style={{ height: 1, background: '#E3E8F5' }} /&gt;&#13;&#10;      &lt;Box style={{ flexDirection: 'row', gap: 16, alignItems: 'flex-start' }}&gt;&#13;&#10;        &lt;Text style={{ fontSize: 14, fontWeight: 'bold', color: '#4C4DDC', width: 30 }}&gt;04&lt;/Text&gt;&#13;&#10;        &lt;Box style={{ flexDirection: 'column', gap: 4 }}&gt;&#13;&#10;          &lt;Text style={{ fontSize: 18, color: '#0C1222' }}&gt;局域网 HTTP，不直连公网&lt;/Text&gt;&#13;&#10;          &lt;Text style={{ fontSize: 14, color: '#5C6780' }}&gt;面向店内使用；需要外网时前面加一层 HTTPS 反向代理，会员数据默认不出店。&lt;/Text&gt;&#13;&#10;        &lt;/Box&gt;&#13;&#10;      &lt;/Box&gt;&#13;&#10;    &lt;/Box&gt;&#13;&#10;    &lt;Box style={{ marginTop: 24, paddingTop: 20, borderTop: '1px solid #E3E8F5' }}&gt;&#13;&#10;      &lt;Text style={{ fontSize: 20, color: '#0C1222' }}&gt;知道自己不能做什么，才敢让你把&lt;Text style={{ fontSize: 20, fontWeight: 'bold', color: '#4C4DDC' }}&gt;钱&lt;/Text&gt;交给它。&lt;/Text&gt;&#13;&#10;    &lt;/Box&gt;&#13;&#10;  &lt;/Box&gt;&#13;&#10;  &lt;Box style={{ height: 36, flexDirection: 'row', justifyContent: 'space-between', alignItems: 'flex-end' }}&gt;&#13;&#10;    &lt;Text style={{ fontSize: 12, color: '#8A93A8' }}&gt;2026 武汉 1024 · 产业应用赛道&lt;/Text&gt;&#13;&#10;    &lt;Text style={{ fontSize: 12, color: '#8A93A8' }}&gt;11 / 12&lt;/Text&gt;&#13;&#10;  &lt;/Box&gt;&#13;&#10;&lt;/Slide&gt;"/>
+        <p:cNvPr id="52" name=""/>
         <p:cNvGrpSpPr/>
         <p:nvPr/>
       </p:nvGrpSpPr>
@@ -2838,7 +2889,10 @@
         </p:spPr>
         <p:txBody>
           <a:bodyPr/>
-          <a:p/>
+          <a:p>
+            <a:pPr/>
+            <a:endParaRPr/>
+          </a:p>
         </p:txBody>
       </p:sp>
       <p:sp>
@@ -2939,7 +2993,10 @@
         </p:spPr>
         <p:txBody>
           <a:bodyPr/>
-          <a:p/>
+          <a:p>
+            <a:pPr/>
+            <a:endParaRPr/>
+          </a:p>
         </p:txBody>
       </p:sp>
       <p:sp>
@@ -2965,7 +3022,10 @@
         </p:spPr>
         <p:txBody>
           <a:bodyPr/>
-          <a:p/>
+          <a:p>
+            <a:pPr/>
+            <a:endParaRPr/>
+          </a:p>
         </p:txBody>
       </p:sp>
       <p:sp>
@@ -3036,7 +3096,10 @@
         </p:spPr>
         <p:txBody>
           <a:bodyPr/>
-          <a:p/>
+          <a:p>
+            <a:pPr/>
+            <a:endParaRPr/>
+          </a:p>
         </p:txBody>
       </p:sp>
       <p:sp>
@@ -3225,7 +3288,10 @@
         </p:spPr>
         <p:txBody>
           <a:bodyPr/>
-          <a:p/>
+          <a:p>
+            <a:pPr/>
+            <a:endParaRPr/>
+          </a:p>
         </p:txBody>
       </p:sp>
       <p:sp>
@@ -3364,7 +3430,10 @@
         </p:spPr>
         <p:txBody>
           <a:bodyPr/>
-          <a:p/>
+          <a:p>
+            <a:pPr/>
+            <a:endParaRPr/>
+          </a:p>
         </p:txBody>
       </p:sp>
       <p:sp>
@@ -3513,7 +3582,10 @@
         </p:spPr>
         <p:txBody>
           <a:bodyPr/>
-          <a:p/>
+          <a:p>
+            <a:pPr/>
+            <a:endParaRPr/>
+          </a:p>
         </p:txBody>
       </p:sp>
       <p:sp>
@@ -3698,7 +3770,10 @@
         </p:spPr>
         <p:txBody>
           <a:bodyPr/>
-          <a:p/>
+          <a:p>
+            <a:pPr/>
+            <a:endParaRPr/>
+          </a:p>
         </p:txBody>
       </p:sp>
       <p:sp>
@@ -3866,7 +3941,7 @@
   <p:cSld>
     <p:spTree>
       <p:nvGrpSpPr>
-        <p:cNvPr id="79" name="" descr="&lt;Slide style={{ width: 1280, height: 720, background: '#F6F8FD', padding: '56px 72px', flexDirection: 'column', justifyContent: 'space-between' }}&gt;&#13;&#10;  &lt;Box style={{ flexDirection: 'row', justifyContent: 'space-between', alignItems: 'center' }}&gt;&#13;&#10;    &lt;Text style={{ fontSize: 13, color: '#5C6780', letterSpacing: 1 }}&gt;2026 武汉 1024 · 人工智能创新应用黑客松&lt;/Text&gt;&#13;&#10;    &lt;Text style={{ fontSize: 13, color: '#4C4DDC', fontWeight: 'bold', letterSpacing: 2 }}&gt;产业应用赛道&lt;/Text&gt;&#13;&#10;  &lt;/Box&gt;&#13;&#10;  &lt;Box style={{ flexDirection: 'column' }}&gt;&#13;&#10;    &lt;Text style={{ fontSize: 52, fontWeight: 'bold', color: '#0C1222', lineHeight: 1.35, width: 960 }}&gt;&#13;&#10;      让每个小店，&lt;br /&gt;都有一个不用发工资的掌柜。&#13;&#10;    &lt;/Text&gt;&#13;&#10;    &lt;Box style={{ width: 88, height: 4, background: '#4C4DDC', borderRadius: 2, marginTop: 26, marginBottom: 22 }} /&gt;&#13;&#10;    &lt;Text style={{ fontSize: 17, color: '#5C6780', lineHeight: 1.8 }}&gt;&#13;&#10;      可执行 · 可追溯 · 可撤销 · 断网可用&#13;&#10;    &lt;/Text&gt;&#13;&#10;  &lt;/Box&gt;&#13;&#10;  &lt;Box style={{ flexDirection: 'row', justifyContent: 'space-between', alignItems: 'flex-end' }}&gt;&#13;&#10;    &lt;Box style={{ flexDirection: 'column', gap: 5 }}&gt;&#13;&#10;      &lt;Text style={{ fontSize: 14, color: '#0C1222' }}&gt;AI 掌柜 · 中小餐饮经营 Agent&lt;/Text&gt;&#13;&#10;      &lt;Text style={{ fontSize: 13, color: '#4C4DDC', fontWeight: 'bold' }}&gt;github.com/wsj20011001/ai-zhanggui&lt;/Text&gt;&#13;&#10;      &lt;Text style={{ fontSize: 12, color: '#5C6780' }}&gt;管理端 admin / admin123 · 点餐端工号 1001 / 123456&lt;/Text&gt;&#13;&#10;    &lt;/Box&gt;&#13;&#10;    &lt;Text style={{ fontSize: 13, color: '#8A93A8' }}&gt;12 / 12&lt;/Text&gt;&#13;&#10;  &lt;/Box&gt;&#13;&#10;&lt;/Slide&gt;"/>
+        <p:cNvPr id="79" name=""/>
         <p:cNvGrpSpPr/>
         <p:nvPr/>
       </p:nvGrpSpPr>
@@ -3899,7 +3974,10 @@
         </p:spPr>
         <p:txBody>
           <a:bodyPr/>
-          <a:p/>
+          <a:p>
+            <a:pPr/>
+            <a:endParaRPr/>
+          </a:p>
         </p:txBody>
       </p:sp>
       <p:sp>
@@ -4078,7 +4156,10 @@
         </p:spPr>
         <p:txBody>
           <a:bodyPr/>
-          <a:p/>
+          <a:p>
+            <a:pPr/>
+            <a:endParaRPr/>
+          </a:p>
         </p:txBody>
       </p:sp>
       <p:sp>
@@ -4396,7 +4477,7 @@
   <p:cSld>
     <p:spTree>
       <p:nvGrpSpPr>
-        <p:cNvPr id="90" name="" descr="&lt;Slide style={{ width: 1280, height: 720, background: '#F6F8FD', padding: '56px 72px', flexDirection: 'column' }}&gt;&#13;&#10;  &lt;Box style={{ height: 96, flexDirection: 'row', justifyContent: 'space-between', alignItems: 'flex-start' }}&gt;&#13;&#10;    &lt;Box style={{ flexDirection: 'column', gap: 8 }}&gt;&#13;&#10;      &lt;Text style={{ fontSize: 34, fontWeight: 'bold', color: '#0C1222' }}&gt;附录 A · 界面实拍（无美化）&lt;/Text&gt;&#13;&#10;      &lt;Text style={{ fontSize: 15, color: '#5C6780' }}&gt;这是 1920 宽屏下直接截的图，不是设计稿&lt;/Text&gt;&#13;&#10;    &lt;/Box&gt;&#13;&#10;    &lt;Box style={{ flexDirection: 'row', alignItems: 'center', gap: 6, padding: '5px 12px', background: '#EEF1FE', border: '1px solid #DDE2F5', borderRadius: 999 }}&gt;&#13;&#10;      &lt;Box style={{ width: 6, height: 6, borderRadius: 3, background: '#4C4DDC' }} /&gt;&#13;&#10;      &lt;Text style={{ fontSize: 12, color: '#4C4DDC', fontWeight: 'bold', letterSpacing: 1 }}&gt;AI 掌柜&lt;/Text&gt;&#13;&#10;    &lt;/Box&gt;&#13;&#10;  &lt;/Box&gt;&#13;&#10;  &lt;Box style={{ flex: 1, paddingTop: 8, flexDirection: 'row', gap: 26 }}&gt;&#13;&#10;    &lt;Box style={{ flex: 1.75, background: '#FFFFFF', border: '1px solid #E3E8F5', borderRadius: 12, padding: 10, overflow: 'hidden' }}&gt;&#13;&#10;      &lt;Image src=&quot;assets/ui_dashboard.png&quot; style={{ width: '100%', height: '100%', objectFit: 'cover', objectPosition: 'left top', borderRadius: 8 }} /&gt;&#13;&#10;    &lt;/Box&gt;&#13;&#10;    &lt;Box style={{ flex: 1, flexDirection: 'column', gap: 18, paddingTop: 4 }}&gt;&#13;&#10;      &lt;Box style={{ flexDirection: 'column', gap: 6 }}&gt;&#13;&#10;        &lt;Text style={{ fontSize: 13, color: '#4C4DDC', letterSpacing: 1 }}&gt;01 首屏只有三件事&lt;/Text&gt;&#13;&#10;        &lt;Text style={{ fontSize: 14, color: '#5C6780', lineHeight: 1.7 }}&gt;按影响金额排序，不是按模块罗列。老板看完就知道先干哪件。&lt;/Text&gt;&#13;&#10;      &lt;/Box&gt;&#13;&#10;      &lt;Box style={{ flexDirection: 'column', gap: 6 }}&gt;&#13;&#10;        &lt;Text style={{ fontSize: 13, color: '#4C4DDC', letterSpacing: 1 }}&gt;02 每条都带证据&lt;/Text&gt;&#13;&#10;        &lt;Text style={{ fontSize: 14, color: '#5C6780', lineHeight: 1.7 }}&gt;灰底那行是指标、当前值、基线、阈值，机器可读，人也看得懂。&lt;/Text&gt;&#13;&#10;      &lt;/Box&gt;&#13;&#10;      &lt;Box style={{ flexDirection: 'column', gap: 6 }}&gt;&#13;&#10;        &lt;Text style={{ fontSize: 13, color: '#4C4DDC', letterSpacing: 1 }}&gt;03 右边是实时状态&lt;/Text&gt;&#13;&#10;        &lt;Text style={{ fontSize: 14, color: '#5C6780', lineHeight: 1.7 }}&gt;模型通道（本地/云端/规则）、7 天预测与回测误差、待处理动作。&lt;/Text&gt;&#13;&#10;      &lt;/Box&gt;&#13;&#10;      &lt;Box style={{ flexDirection: 'column', gap: 6 }}&gt;&#13;&#10;        &lt;Text style={{ fontSize: 13, color: '#4C4DDC', letterSpacing: 1 }}&gt;04 按钮就是动作&lt;/Text&gt;&#13;&#10;        &lt;Text style={{ fontSize: 14, color: '#5C6780', lineHeight: 1.7 }}&gt;「生成采购单」「执行调价」都不是跳转，点完当场改数据，可撤销。&lt;/Text&gt;&#13;&#10;      &lt;/Box&gt;&#13;&#10;    &lt;/Box&gt;&#13;&#10;  &lt;/Box&gt;&#13;&#10;  &lt;Box style={{ height: 36, flexDirection: 'row', justifyContent: 'space-between', alignItems: 'flex-end' }}&gt;&#13;&#10;    &lt;Text style={{ fontSize: 12, color: '#8A93A8' }}&gt;演示数据：180 天 / 6,803 单（seed_demo.py 生成）&lt;/Text&gt;&#13;&#10;    &lt;Text style={{ fontSize: 12, color: '#8A93A8' }}&gt;附录 A&lt;/Text&gt;&#13;&#10;  &lt;/Box&gt;&#13;&#10;&lt;/Slide&gt;&#13;&#10;"/>
+        <p:cNvPr id="90" name=""/>
         <p:cNvGrpSpPr/>
         <p:nvPr/>
       </p:nvGrpSpPr>
@@ -4429,7 +4510,10 @@
         </p:spPr>
         <p:txBody>
           <a:bodyPr/>
-          <a:p/>
+          <a:p>
+            <a:pPr/>
+            <a:endParaRPr/>
+          </a:p>
         </p:txBody>
       </p:sp>
       <p:sp>
@@ -4570,7 +4654,10 @@
         </p:spPr>
         <p:txBody>
           <a:bodyPr/>
-          <a:p/>
+          <a:p>
+            <a:pPr/>
+            <a:endParaRPr/>
+          </a:p>
         </p:txBody>
       </p:sp>
       <p:sp>
@@ -4596,7 +4683,10 @@
         </p:spPr>
         <p:txBody>
           <a:bodyPr/>
-          <a:p/>
+          <a:p>
+            <a:pPr/>
+            <a:endParaRPr/>
+          </a:p>
         </p:txBody>
       </p:sp>
       <p:sp>
@@ -4672,7 +4762,10 @@
         </p:spPr>
         <p:txBody>
           <a:bodyPr/>
-          <a:p/>
+          <a:p>
+            <a:pPr/>
+            <a:endParaRPr/>
+          </a:p>
         </p:txBody>
       </p:sp>
       <p:pic>
@@ -5239,7 +5332,7 @@
   <p:cSld>
     <p:spTree>
       <p:nvGrpSpPr>
-        <p:cNvPr id="109" name="" descr="&lt;Slide style={{ width: 1280, height: 720, background: '#F6F8FD', padding: '56px 72px', flexDirection: 'column' }}&gt;&#13;&#10;  &lt;Box style={{ height: 96, flexDirection: 'row', justifyContent: 'space-between', alignItems: 'flex-start' }}&gt;&#13;&#10;    &lt;Box style={{ flexDirection: 'column', gap: 8 }}&gt;&#13;&#10;      &lt;Text style={{ fontSize: 34, fontWeight: 'bold', color: '#0C1222' }}&gt;老板每天问的三个问题，现有工具一个都没回答&lt;/Text&gt;&#13;&#10;      &lt;Text style={{ fontSize: 15, color: '#5C6780' }}&gt;不是缺报表，是缺结论和动作&lt;/Text&gt;&#13;&#10;    &lt;/Box&gt;&#13;&#10;    &lt;Box style={{ flexDirection: 'row', alignItems: 'center', gap: 6, padding: '5px 12px', background: '#EEF1FE', border: '1px solid #DDE2F5', borderRadius: 999 }}&gt;&#13;&#10;      &lt;Box style={{ width: 6, height: 6, borderRadius: 3, background: '#4C4DDC' }} /&gt;&#13;&#10;      &lt;Text style={{ fontSize: 12, color: '#4C4DDC', fontWeight: 'bold', letterSpacing: 1 }}&gt;AI 掌柜&lt;/Text&gt;&#13;&#10;    &lt;/Box&gt;&#13;&#10;  &lt;/Box&gt;&#13;&#10;  &lt;Box style={{ width: 72, height: 3, background: '#4C4DDC', borderRadius: 2, marginTop: 2, marginBottom: 12 }} /&gt;&#13;&#10;  &lt;Box style={{ flex: 1, paddingTop: 8 }}&gt;&#13;&#10;    &lt;Box style={{ flexDirection: 'row', gap: 20, height: 300 }}&gt;&#13;&#10;      &lt;Box style={{ flex: 1, background: '#FFFFFF', border: '1px solid #E3E8F5', borderRadius: 14, padding: 26, flexDirection: 'column', justifyContent: 'space-between' }}&gt;&#13;&#10;        &lt;Text style={{ fontSize: 56, fontWeight: 'bold', color: '#4C4DDC' }}&gt;01&lt;/Text&gt;&#13;&#10;        &lt;Text style={{ fontSize: 22, fontWeight: 'bold', color: '#0C1222' }}&gt;今天到底赚没赚&lt;/Text&gt;&#13;&#10;        &lt;Text style={{ fontSize: 15, color: '#5C6780', lineHeight: 1.8 }}&gt;六张报表翻半小时，只知道跌了，&lt;br /&gt;不知道是人少了还是点便宜了。&lt;/Text&gt;&#13;&#10;      &lt;/Box&gt;&#13;&#10;      &lt;Box style={{ flex: 1, background: '#FFFFFF', border: '1px solid #E3E8F5', borderRadius: 14, padding: 26, flexDirection: 'column', justifyContent: 'space-between' }}&gt;&#13;&#10;        &lt;Text style={{ fontSize: 56, fontWeight: 'bold', color: '#4C4DDC' }}&gt;02&lt;/Text&gt;&#13;&#10;        &lt;Text style={{ fontSize: 22, fontWeight: 'bold', color: '#0C1222' }}&gt;明天该买多少&lt;/Text&gt;&#13;&#10;        &lt;Text style={{ fontSize: 15, color: '#5C6780', lineHeight: 1.8 }}&gt;采购靠经验：缺货和压货同时发生，&lt;br /&gt;这套数据里 5 种食材只够 2 天。&lt;/Text&gt;&#13;&#10;      &lt;/Box&gt;&#13;&#10;      &lt;Box style={{ flex: 1, background: '#FFFFFF', border: '1px solid #E3E8F5', borderRadius: 14, padding: 26, flexDirection: 'column', justifyContent: 'space-between' }}&gt;&#13;&#10;        &lt;Text style={{ fontSize: 56, fontWeight: 'bold', color: '#4C4DDC' }}&gt;03&lt;/Text&gt;&#13;&#10;        &lt;Text style={{ fontSize: 22, fontWeight: 'bold', color: '#0C1222' }}&gt;哪道菜在赔钱&lt;/Text&gt;&#13;&#10;        &lt;Text style={{ fontSize: 15, color: '#5C6780', lineHeight: 1.8 }}&gt;207 道菜只有 107 道算得清成本，&lt;br /&gt;卖得越多，可能亏得越多。&lt;/Text&gt;&#13;&#10;      &lt;/Box&gt;&#13;&#10;    &lt;/Box&gt;&#13;&#10;    &lt;Box style={{ marginTop: 34, paddingTop: 24, borderTop: '1px solid #E3E8F5', flexDirection: 'row', alignItems: 'center', gap: 16 }}&gt;&#13;&#10;      &lt;Box style={{ width: 6, height: 28, background: '#4C4DDC', borderRadius: 3 }} /&gt;&#13;&#10;      &lt;Text style={{ fontSize: 24, color: '#0C1222' }}&gt;中小餐饮不缺数据，缺一个&lt;Text style={{ fontSize: 24, fontWeight: 'bold', color: '#4C4DDC' }}&gt;能替他做决定&lt;/Text&gt;的角色。&lt;/Text&gt;&#13;&#10;    &lt;/Box&gt;&#13;&#10;  &lt;/Box&gt;&#13;&#10;  &lt;Box style={{ height: 36, flexDirection: 'row', justifyContent: 'space-between', alignItems: 'flex-end' }}&gt;&#13;&#10;    &lt;Text style={{ fontSize: 12, color: '#8A93A8' }}&gt;2026 武汉 1024 · 产业应用赛道&lt;/Text&gt;&#13;&#10;    &lt;Text style={{ fontSize: 12, color: '#8A93A8' }}&gt;02 / 12&lt;/Text&gt;&#13;&#10;  &lt;/Box&gt;&#13;&#10;&lt;/Slide&gt;"/>
+        <p:cNvPr id="109" name=""/>
         <p:cNvGrpSpPr/>
         <p:nvPr/>
       </p:nvGrpSpPr>
@@ -5272,7 +5365,10 @@
         </p:spPr>
         <p:txBody>
           <a:bodyPr/>
-          <a:p/>
+          <a:p>
+            <a:pPr/>
+            <a:endParaRPr/>
+          </a:p>
         </p:txBody>
       </p:sp>
       <p:sp>
@@ -5373,7 +5469,10 @@
         </p:spPr>
         <p:txBody>
           <a:bodyPr/>
-          <a:p/>
+          <a:p>
+            <a:pPr/>
+            <a:endParaRPr/>
+          </a:p>
         </p:txBody>
       </p:sp>
       <p:sp>
@@ -5399,7 +5498,10 @@
         </p:spPr>
         <p:txBody>
           <a:bodyPr/>
-          <a:p/>
+          <a:p>
+            <a:pPr/>
+            <a:endParaRPr/>
+          </a:p>
         </p:txBody>
       </p:sp>
       <p:sp>
@@ -5470,7 +5572,10 @@
         </p:spPr>
         <p:txBody>
           <a:bodyPr/>
-          <a:p/>
+          <a:p>
+            <a:pPr/>
+            <a:endParaRPr/>
+          </a:p>
         </p:txBody>
       </p:sp>
       <p:sp>
@@ -5501,7 +5606,10 @@
         </p:spPr>
         <p:txBody>
           <a:bodyPr/>
-          <a:p/>
+          <a:p>
+            <a:pPr/>
+            <a:endParaRPr/>
+          </a:p>
         </p:txBody>
       </p:sp>
       <p:sp>
@@ -5655,7 +5763,10 @@
         </p:spPr>
         <p:txBody>
           <a:bodyPr/>
-          <a:p/>
+          <a:p>
+            <a:pPr/>
+            <a:endParaRPr/>
+          </a:p>
         </p:txBody>
       </p:sp>
       <p:sp>
@@ -5849,7 +5960,10 @@
         </p:spPr>
         <p:txBody>
           <a:bodyPr/>
-          <a:p/>
+          <a:p>
+            <a:pPr/>
+            <a:endParaRPr/>
+          </a:p>
         </p:txBody>
       </p:sp>
       <p:sp>
@@ -6042,7 +6156,10 @@
         </p:spPr>
         <p:txBody>
           <a:bodyPr/>
-          <a:p/>
+          <a:p>
+            <a:pPr/>
+            <a:endParaRPr/>
+          </a:p>
         </p:txBody>
       </p:sp>
       <p:sp>
@@ -6068,7 +6185,10 @@
         </p:spPr>
         <p:txBody>
           <a:bodyPr/>
-          <a:p/>
+          <a:p>
+            <a:pPr/>
+            <a:endParaRPr/>
+          </a:p>
         </p:txBody>
       </p:sp>
       <p:sp>
@@ -6236,7 +6356,7 @@
   <p:cSld>
     <p:spTree>
       <p:nvGrpSpPr>
-        <p:cNvPr id="134" name="" descr="&lt;Slide style={{ width: 1280, height: 720, background: '#F6F8FD', padding: '56px 72px', flexDirection: 'column' }}&gt;&#13;&#10;  &lt;Box style={{ height: 96, flexDirection: 'row', justifyContent: 'space-between', alignItems: 'flex-start' }}&gt;&#13;&#10;    &lt;Box style={{ flexDirection: 'column', gap: 8 }}&gt;&#13;&#10;      &lt;Text style={{ fontSize: 34, fontWeight: 'bold', color: '#0C1222' }}&gt;分水岭不在图表，在「能不能动手」&lt;/Text&gt;&#13;&#10;      &lt;Text style={{ fontSize: 15, color: '#5C6780' }}&gt;同样一份营收下滑，两条完全不同的处理路径&lt;/Text&gt;&#13;&#10;    &lt;/Box&gt;&#13;&#10;    &lt;Box style={{ flexDirection: 'row', alignItems: 'center', gap: 6, padding: '5px 12px', background: '#EEF1FE', border: '1px solid #DDE2F5', borderRadius: 999 }}&gt;&#13;&#10;      &lt;Box style={{ width: 6, height: 6, borderRadius: 3, background: '#4C4DDC' }} /&gt;&#13;&#10;      &lt;Text style={{ fontSize: 12, color: '#4C4DDC', fontWeight: 'bold', letterSpacing: 1 }}&gt;AI 掌柜&lt;/Text&gt;&#13;&#10;    &lt;/Box&gt;&#13;&#10;  &lt;/Box&gt;&#13;&#10;  &lt;Box style={{ width: 72, height: 3, background: '#4C4DDC', borderRadius: 2, marginTop: 2, marginBottom: 12 }} /&gt;&#13;&#10;  &lt;Box style={{ flex: 1, paddingTop: 8 }}&gt;&#13;&#10;    &lt;Box style={{ flexDirection: 'row', gap: 24, height: 330 }}&gt;&#13;&#10;      &lt;Box style={{ flex: 1, background: '#FBFCFE', border: '1px solid #E3E8F5', borderRadius: 14, padding: 26 }}&gt;&#13;&#10;        &lt;Text style={{ fontSize: 13, color: '#8A93A8', letterSpacing: 2 }}&gt;传统 BI / 经营看板&lt;/Text&gt;&#13;&#10;        &lt;Text style={{ fontSize: 26, fontWeight: 'bold', color: '#5C6780', marginTop: 10 }}&gt;价值停在「知道」&lt;/Text&gt;&#13;&#10;        &lt;Box style={{ marginTop: 22, flexDirection: 'column', gap: 14 }}&gt;&#13;&#10;          &lt;Text style={{ fontSize: 16, color: '#5C6780' }}&gt;看板 → 发现跌了&lt;/Text&gt;&#13;&#10;          &lt;Text style={{ fontSize: 16, color: '#5C6780' }}&gt;→ 自己判断原因&lt;/Text&gt;&#13;&#10;          &lt;Text style={{ fontSize: 16, color: '#5C6780' }}&gt;→ 自己打电话订货&lt;/Text&gt;&#13;&#10;          &lt;Text style={{ fontSize: 16, color: '#5C6780' }}&gt;→ 一周后忘了复盘&lt;/Text&gt;&#13;&#10;        &lt;/Box&gt;&#13;&#10;      &lt;/Box&gt;&#13;&#10;      &lt;Box style={{ flex: 1, background: '#EEF1FE', border: '1px solid #C9CDF6', borderRadius: 14, padding: 26 }}&gt;&#13;&#10;        &lt;Text style={{ fontSize: 13, color: '#4C4DDC', letterSpacing: 2 }}&gt;AI 掌柜&lt;/Text&gt;&#13;&#10;        &lt;Text style={{ fontSize: 26, fontWeight: 'bold', color: '#0C1222', marginTop: 10 }}&gt;价值走到「改变」&lt;/Text&gt;&#13;&#10;        &lt;Box style={{ marginTop: 22, flexDirection: 'column', gap: 14 }}&gt;&#13;&#10;          &lt;Text style={{ fontSize: 16, color: '#0C1222' }}&gt;驾驶舱 → 3 件事 + 证据&lt;/Text&gt;&#13;&#10;          &lt;Text style={{ fontSize: 16, color: '#0C1222' }}&gt;→ 拆解成客流 / 客单价&lt;/Text&gt;&#13;&#10;          &lt;Text style={{ fontSize: 16, color: '#0C1222' }}&gt;→ 一键生成采购单并入库&lt;/Text&gt;&#13;&#10;          &lt;Text style={{ fontSize: 16, color: '#0C1222' }}&gt;→ 7 天后自动回填效果&lt;/Text&gt;&#13;&#10;        &lt;/Box&gt;&#13;&#10;      &lt;/Box&gt;&#13;&#10;    &lt;/Box&gt;&#13;&#10;    &lt;Box style={{ marginTop: 30, flexDirection: 'row', gap: 14 }}&gt;&#13;&#10;      &lt;Text style={{ fontSize: 15, color: '#5C6780' }}&gt;三个关键词&lt;/Text&gt;&#13;&#10;      &lt;Text style={{ fontSize: 15, color: '#4C4DDC', fontWeight: 'bold' }}&gt;可执行 · 可追溯 · 可撤销&lt;/Text&gt;&#13;&#10;    &lt;/Box&gt;&#13;&#10;  &lt;/Box&gt;&#13;&#10;  &lt;Box style={{ height: 36, flexDirection: 'row', justifyContent: 'space-between', alignItems: 'flex-end' }}&gt;&#13;&#10;    &lt;Text style={{ fontSize: 12, color: '#8A93A8' }}&gt;2026 武汉 1024 · 产业应用赛道&lt;/Text&gt;&#13;&#10;    &lt;Text style={{ fontSize: 12, color: '#8A93A8' }}&gt;03 / 12&lt;/Text&gt;&#13;&#10;  &lt;/Box&gt;&#13;&#10;&lt;/Slide&gt;"/>
+        <p:cNvPr id="134" name=""/>
         <p:cNvGrpSpPr/>
         <p:nvPr/>
       </p:nvGrpSpPr>
@@ -6269,7 +6389,10 @@
         </p:spPr>
         <p:txBody>
           <a:bodyPr/>
-          <a:p/>
+          <a:p>
+            <a:pPr/>
+            <a:endParaRPr/>
+          </a:p>
         </p:txBody>
       </p:sp>
       <p:sp>
@@ -6370,7 +6493,10 @@
         </p:spPr>
         <p:txBody>
           <a:bodyPr/>
-          <a:p/>
+          <a:p>
+            <a:pPr/>
+            <a:endParaRPr/>
+          </a:p>
         </p:txBody>
       </p:sp>
       <p:sp>
@@ -6396,7 +6522,10 @@
         </p:spPr>
         <p:txBody>
           <a:bodyPr/>
-          <a:p/>
+          <a:p>
+            <a:pPr/>
+            <a:endParaRPr/>
+          </a:p>
         </p:txBody>
       </p:sp>
       <p:sp>
@@ -6467,7 +6596,10 @@
         </p:spPr>
         <p:txBody>
           <a:bodyPr/>
-          <a:p/>
+          <a:p>
+            <a:pPr/>
+            <a:endParaRPr/>
+          </a:p>
         </p:txBody>
       </p:sp>
       <p:sp>
@@ -6498,7 +6630,10 @@
         </p:spPr>
         <p:txBody>
           <a:bodyPr/>
-          <a:p/>
+          <a:p>
+            <a:pPr/>
+            <a:endParaRPr/>
+          </a:p>
         </p:txBody>
       </p:sp>
       <p:sp>
@@ -6809,7 +6944,10 @@
         </p:spPr>
         <p:txBody>
           <a:bodyPr/>
-          <a:p/>
+          <a:p>
+            <a:pPr/>
+            <a:endParaRPr/>
+          </a:p>
         </p:txBody>
       </p:sp>
       <p:sp>
@@ -7342,7 +7480,7 @@
   <p:cSld>
     <p:spTree>
       <p:nvGrpSpPr>
-        <p:cNvPr id="160" name="" descr="&lt;Slide style={{ width: 1280, height: 720, background: '#F6F8FD', padding: '56px 72px', flexDirection: 'column' }}&gt;&#13;&#10;  &lt;Box style={{ height: 96, flexDirection: 'row', justifyContent: 'space-between', alignItems: 'flex-start' }}&gt;&#13;&#10;    &lt;Box style={{ flexDirection: 'column', gap: 8 }}&gt;&#13;&#10;      &lt;Text style={{ fontSize: 34, fontWeight: 'bold', color: '#0C1222' }}&gt;四块能力，缺一块都落不了地&lt;/Text&gt;&#13;&#10;      &lt;Text style={{ fontSize: 15, color: '#5C6780' }}&gt;看得懂、算得准、动得了、说得清&lt;/Text&gt;&#13;&#10;    &lt;/Box&gt;&#13;&#10;    &lt;Box style={{ flexDirection: 'row', alignItems: 'center', gap: 6, padding: '5px 12px', background: '#EEF1FE', border: '1px solid #DDE2F5', borderRadius: 999 }}&gt;&#13;&#10;      &lt;Box style={{ width: 6, height: 6, borderRadius: 3, background: '#4C4DDC' }} /&gt;&#13;&#10;      &lt;Text style={{ fontSize: 12, color: '#4C4DDC', fontWeight: 'bold', letterSpacing: 1 }}&gt;AI 掌柜&lt;/Text&gt;&#13;&#10;    &lt;/Box&gt;&#13;&#10;  &lt;/Box&gt;&#13;&#10;  &lt;Box style={{ width: 72, height: 3, background: '#4C4DDC', borderRadius: 2, marginTop: 2, marginBottom: 12 }} /&gt;&#13;&#10;  &lt;Box style={{ flex: 1, paddingTop: 8 }}&gt;&#13;&#10;    &lt;Box style={{ flexDirection: 'row', gap: 18, height: 250 }}&gt;&#13;&#10;      &lt;Box style={{ flex: 1, background: '#FFFFFF', border: '1px solid #E3E8F5', borderRadius: 14, padding: 24 }}&gt;&#13;&#10;        &lt;Text style={{ fontSize: 20, fontWeight: 'bold', color: '#4C4DDC' }}&gt;看得懂&lt;/Text&gt;&#13;&#10;        &lt;Text style={{ fontSize: 15, color: '#0C1222', marginTop: 12, lineHeight: 1.75 }}&gt;营收 · 客流 · 毛利&lt;br /&gt;时段 · 翻台 · 会员结构&lt;/Text&gt;&#13;&#10;        &lt;Text style={{ fontSize: 13, color: '#5C6780', marginTop: 16 }}&gt;180 天 / 6,803 单&lt;/Text&gt;&#13;&#10;      &lt;/Box&gt;&#13;&#10;      &lt;Box style={{ flex: 1, background: '#FFFFFF', border: '1px solid #E3E8F5', borderRadius: 14, padding: 24 }}&gt;&#13;&#10;        &lt;Text style={{ fontSize: 20, fontWeight: 'bold', color: '#4C4DDC' }}&gt;算得准&lt;/Text&gt;&#13;&#10;        &lt;Text style={{ fontSize: 15, color: '#0C1222', marginTop: 12, lineHeight: 1.75 }}&gt;指标唯一口径&lt;br /&gt;BOM 成本 · 三层预测 · 经营推演&lt;/Text&gt;&#13;&#10;        &lt;Text style={{ fontSize: 13, color: '#5C6780', marginTop: 16 }}&gt;回测误差 22%（含异常周）&lt;/Text&gt;&#13;&#10;      &lt;/Box&gt;&#13;&#10;      &lt;Box style={{ flex: 1, background: '#FFFFFF', border: '1px solid #E3E8F5', borderRadius: 14, padding: 24 }}&gt;&#13;&#10;        &lt;Text style={{ fontSize: 20, fontWeight: 'bold', color: '#4C4DDC' }}&gt;动得了&lt;/Text&gt;&#13;&#10;        &lt;Text style={{ fontSize: 15, color: '#0C1222', marginTop: 12, lineHeight: 1.75 }}&gt;生成采购单 · 按毛利调价&lt;br /&gt;滞销菜设为主推&lt;/Text&gt;&#13;&#10;        &lt;Text style={{ fontSize: 13, color: '#5C6780', marginTop: 16 }}&gt;3 类动作 · 全部可撤销&lt;/Text&gt;&#13;&#10;      &lt;/Box&gt;&#13;&#10;      &lt;Box style={{ flex: 1, background: '#FFFFFF', border: '1px solid #E3E8F5', borderRadius: 14, padding: 24 }}&gt;&#13;&#10;        &lt;Text style={{ fontSize: 20, fontWeight: 'bold', color: '#4C4DDC' }}&gt;说得清&lt;/Text&gt;&#13;&#10;        &lt;Text style={{ fontSize: 15, color: '#0C1222', marginTop: 12, lineHeight: 1.75 }}&gt;每条结论附证据 SQL&lt;br /&gt;操作留痕 · 一键回滚&lt;/Text&gt;&#13;&#10;        &lt;Text style={{ fontSize: 13, color: '#5C6780', marginTop: 16 }}&gt;8 条越界语句 100% 拦截&lt;/Text&gt;&#13;&#10;      &lt;/Box&gt;&#13;&#10;    &lt;/Box&gt;&#13;&#10;    &lt;Box style={{ marginTop: 28, background: '#FBFCFE', border: '1px solid #E3E8F5', borderRadius: 12, padding: '20px 24px', flexDirection: 'row', alignItems: 'center', gap: 18 }}&gt;&#13;&#10;      &lt;Text style={{ fontSize: 15, color: '#5C6780', width: 110 }}&gt;串联起来&lt;/Text&gt;&#13;&#10;      &lt;Text style={{ fontSize: 17, color: '#0C1222' }}&gt;看到异常 → 算清原因 → 直接处理 → 留下证据，四步在同一屏里完成。&lt;/Text&gt;&#13;&#10;    &lt;/Box&gt;&#13;&#10;  &lt;/Box&gt;&#13;&#10;  &lt;Box style={{ height: 36, flexDirection: 'row', justifyContent: 'space-between', alignItems: 'flex-end' }}&gt;&#13;&#10;    &lt;Text style={{ fontSize: 12, color: '#8A93A8' }}&gt;2026 武汉 1024 · 产业应用赛道&lt;/Text&gt;&#13;&#10;    &lt;Text style={{ fontSize: 12, color: '#8A93A8' }}&gt;04 / 12&lt;/Text&gt;&#13;&#10;  &lt;/Box&gt;&#13;&#10;&lt;/Slide&gt;"/>
+        <p:cNvPr id="160" name=""/>
         <p:cNvGrpSpPr/>
         <p:nvPr/>
       </p:nvGrpSpPr>
@@ -7375,7 +7513,10 @@
         </p:spPr>
         <p:txBody>
           <a:bodyPr/>
-          <a:p/>
+          <a:p>
+            <a:pPr/>
+            <a:endParaRPr/>
+          </a:p>
         </p:txBody>
       </p:sp>
       <p:sp>
@@ -7476,7 +7617,10 @@
         </p:spPr>
         <p:txBody>
           <a:bodyPr/>
-          <a:p/>
+          <a:p>
+            <a:pPr/>
+            <a:endParaRPr/>
+          </a:p>
         </p:txBody>
       </p:sp>
       <p:sp>
@@ -7502,7 +7646,10 @@
         </p:spPr>
         <p:txBody>
           <a:bodyPr/>
-          <a:p/>
+          <a:p>
+            <a:pPr/>
+            <a:endParaRPr/>
+          </a:p>
         </p:txBody>
       </p:sp>
       <p:sp>
@@ -7573,7 +7720,10 @@
         </p:spPr>
         <p:txBody>
           <a:bodyPr/>
-          <a:p/>
+          <a:p>
+            <a:pPr/>
+            <a:endParaRPr/>
+          </a:p>
         </p:txBody>
       </p:sp>
       <p:sp>
@@ -7604,7 +7754,10 @@
         </p:spPr>
         <p:txBody>
           <a:bodyPr/>
-          <a:p/>
+          <a:p>
+            <a:pPr/>
+            <a:endParaRPr/>
+          </a:p>
         </p:txBody>
       </p:sp>
       <p:sp>
@@ -7868,7 +8021,10 @@
         </p:spPr>
         <p:txBody>
           <a:bodyPr/>
-          <a:p/>
+          <a:p>
+            <a:pPr/>
+            <a:endParaRPr/>
+          </a:p>
         </p:txBody>
       </p:sp>
       <p:sp>
@@ -8092,7 +8248,10 @@
         </p:spPr>
         <p:txBody>
           <a:bodyPr/>
-          <a:p/>
+          <a:p>
+            <a:pPr/>
+            <a:endParaRPr/>
+          </a:p>
         </p:txBody>
       </p:sp>
       <p:sp>
@@ -8296,7 +8455,10 @@
         </p:spPr>
         <p:txBody>
           <a:bodyPr/>
-          <a:p/>
+          <a:p>
+            <a:pPr/>
+            <a:endParaRPr/>
+          </a:p>
         </p:txBody>
       </p:sp>
       <p:sp>
@@ -8510,7 +8672,10 @@
         </p:spPr>
         <p:txBody>
           <a:bodyPr/>
-          <a:p/>
+          <a:p>
+            <a:pPr/>
+            <a:endParaRPr/>
+          </a:p>
         </p:txBody>
       </p:sp>
       <p:sp>
@@ -8753,7 +8918,7 @@
   <p:cSld>
     <p:spTree>
       <p:nvGrpSpPr>
-        <p:cNvPr id="189" name="" descr="&lt;Slide style={{ width: 1280, height: 720, background: '#F6F8FD', padding: '56px 72px', flexDirection: 'column' }}&gt;&#13;&#10;  &lt;Box style={{ height: 96, flexDirection: 'row', justifyContent: 'space-between', alignItems: 'flex-start' }}&gt;&#13;&#10;    &lt;Box style={{ flexDirection: 'column', gap: 8 }}&gt;&#13;&#10;      &lt;Text style={{ fontSize: 34, fontWeight: 'bold', color: '#0C1222' }}&gt;现场三分钟，只走一条路径&lt;/Text&gt;&#13;&#10;      &lt;Text style={{ fontSize: 15, color: '#5C6780' }}&gt;上午 09:00，老板打开电脑后的真实操作顺序&lt;/Text&gt;&#13;&#10;    &lt;/Box&gt;&#13;&#10;    &lt;Box style={{ flexDirection: 'row', alignItems: 'center', gap: 6, padding: '5px 12px', background: '#EEF1FE', border: '1px solid #DDE2F5', borderRadius: 999 }}&gt;&#13;&#10;      &lt;Box style={{ width: 6, height: 6, borderRadius: 3, background: '#4C4DDC' }} /&gt;&#13;&#10;      &lt;Text style={{ fontSize: 12, color: '#4C4DDC', fontWeight: 'bold', letterSpacing: 1 }}&gt;AI 掌柜&lt;/Text&gt;&#13;&#10;    &lt;/Box&gt;&#13;&#10;  &lt;/Box&gt;&#13;&#10;  &lt;Box style={{ width: 72, height: 3, background: '#4C4DDC', borderRadius: 2, marginTop: 2, marginBottom: 12 }} /&gt;&#13;&#10;  &lt;Box style={{ flex: 1, paddingTop: 8 }}&gt;&#13;&#10;    &lt;Box style={{ flexDirection: 'row', gap: 16, height: 205 }}&gt;&#13;&#10;      &lt;Box style={{ flex: 1, background: '#FFFFFF', border: '1px solid #E3E8F5', borderRadius: 14, padding: 24, flexDirection: 'column', justifyContent: 'space-between' }}&gt;&#13;&#10;        &lt;Text style={{ fontSize: 12, color: '#4C4DDC', letterSpacing: 2 }}&gt;第 1 步 · 30 秒&lt;/Text&gt;&#13;&#10;        &lt;Text style={{ fontSize: 21, fontWeight: 'bold', color: '#0C1222', marginTop: 6 }}&gt;打开驾驶舱&lt;/Text&gt;&#13;&#10;        &lt;Text style={{ fontSize: 14, color: '#5C6780', lineHeight: 1.8 }}&gt;只有 3 件事：&lt;br /&gt;营收跌 20%、3 道菜滞销、&lt;br /&gt;牛腩只够 1.5 天。&lt;/Text&gt;&#13;&#10;      &lt;/Box&gt;&#13;&#10;      &lt;Box style={{ flex: 1, background: '#FFFFFF', border: '1px solid #E3E8F5', borderRadius: 14, padding: 24, flexDirection: 'column', justifyContent: 'space-between' }}&gt;&#13;&#10;        &lt;Text style={{ fontSize: 12, color: '#4C4DDC', letterSpacing: 2 }}&gt;第 2 步 · 60 秒&lt;/Text&gt;&#13;&#10;        &lt;Text style={{ fontSize: 21, fontWeight: 'bold', color: '#0C1222', marginTop: 6 }}&gt;点「营收下滑」&lt;/Text&gt;&#13;&#10;        &lt;Text style={{ fontSize: 14, color: '#5C6780', lineHeight: 1.8 }}&gt;拆成客流 −18%、客单价 −3%，&lt;br /&gt;结论：人少了，&lt;br /&gt;不是点便宜了。&lt;/Text&gt;&#13;&#10;      &lt;/Box&gt;&#13;&#10;      &lt;Box style={{ flex: 1, background: '#FFFFFF', border: '1px solid #E3E8F5', borderRadius: 14, padding: 24, flexDirection: 'column', justifyContent: 'space-between' }}&gt;&#13;&#10;        &lt;Text style={{ fontSize: 12, color: '#4C4DDC', letterSpacing: 2 }}&gt;第 3 步 · 60 秒&lt;/Text&gt;&#13;&#10;        &lt;Text style={{ fontSize: 21, fontWeight: 'bold', color: '#0C1222', marginTop: 6 }}&gt;点「缺货」&lt;/Text&gt;&#13;&#10;        &lt;Text style={{ fontSize: 14, color: '#5C6780', lineHeight: 1.8 }}&gt;按 7 天用量生成采购单&lt;br /&gt;→ 确认入库&lt;br /&gt;→ 库存与流水同步。&lt;/Text&gt;&#13;&#10;      &lt;/Box&gt;&#13;&#10;    &lt;/Box&gt;&#13;&#10;    &lt;Box style={{ marginTop: 20, background: '#EEF1FE', border: '1px solid #C9CDF6', borderRadius: 14, padding: '20px 24px', flexDirection: 'row', alignItems: 'center', gap: 24 }}&gt;&#13;&#10;      &lt;Text style={{ fontSize: 13, color: '#4C4DDC', letterSpacing: 2, width: 132 }}&gt;加演 · 一句话&lt;/Text&gt;&#13;&#10;      &lt;Box style={{ flexDirection: 'column', gap: 6 }}&gt;&#13;&#10;        &lt;Text style={{ fontSize: 19, fontWeight: 'bold', color: '#0C1222' }}&gt;「明天 8 人宴席，人均 150」&lt;/Text&gt;&#13;&#10;        &lt;Text style={{ fontSize: 13, color: '#5C6780' }}&gt;按中餐宴席结构排 10 道菜 → 一键成单 → 后厨立刻看到，可人工增减。&lt;/Text&gt;&#13;&#10;      &lt;/Box&gt;&#13;&#10;    &lt;/Box&gt;&#13;&#10;    &lt;Box style={{ marginTop: 20, paddingTop: 16, borderTop: '1px solid #E3E8F5', flexDirection: 'row', gap: 0 }}&gt;&#13;&#10;      &lt;Box style={{ flex: 1, flexDirection: 'column', gap: 3 }}&gt;&#13;&#10;        &lt;Text style={{ fontSize: 24, fontWeight: 'bold', color: '#0C1222' }}&gt;1 张&lt;/Text&gt;&#13;&#10;        &lt;Text style={{ fontSize: 12, color: '#5C6780' }}&gt;采购单（7 项 / 2,757 元）&lt;/Text&gt;&#13;&#10;      &lt;/Box&gt;&#13;&#10;      &lt;Box style={{ flex: 1, flexDirection: 'column', gap: 3 }}&gt;&#13;&#10;        &lt;Text style={{ fontSize: 24, fontWeight: 'bold', color: '#0C1222' }}&gt;7 种&lt;/Text&gt;&#13;&#10;        &lt;Text style={{ fontSize: 12, color: '#5C6780' }}&gt;食材库存与流水同步更新&lt;/Text&gt;&#13;&#10;      &lt;/Box&gt;&#13;&#10;      &lt;Box style={{ flex: 1, flexDirection: 'column', gap: 3 }}&gt;&#13;&#10;        &lt;Text style={{ fontSize: 24, fontWeight: 'bold', color: '#0C1222' }}&gt;3 条&lt;/Text&gt;&#13;&#10;        &lt;Text style={{ fontSize: 12, color: '#5C6780' }}&gt;操作留痕，任何一条可回滚&lt;/Text&gt;&#13;&#10;      &lt;/Box&gt;&#13;&#10;      &lt;Box style={{ flex: 1.2, flexDirection: 'column', gap: 3 }}&gt;&#13;&#10;        &lt;Text style={{ fontSize: 24, fontWeight: 'bold', color: '#4C4DDC' }}&gt;0 次&lt;/Text&gt;&#13;&#10;        &lt;Text style={{ fontSize: 12, color: '#5C6780' }}&gt;页面跳转 —— 决策与执行同屏&lt;/Text&gt;&#13;&#10;      &lt;/Box&gt;&#13;&#10;    &lt;/Box&gt;&#13;&#10;  &lt;/Box&gt;&#13;&#10;  &lt;Box style={{ height: 36, flexDirection: 'row', justifyContent: 'space-between', alignItems: 'flex-end' }}&gt;&#13;&#10;    &lt;Text style={{ fontSize: 12, color: '#8A93A8' }}&gt;2026 武汉 1024 · 产业应用赛道&lt;/Text&gt;&#13;&#10;    &lt;Text style={{ fontSize: 12, color: '#8A93A8' }}&gt;05 / 12&lt;/Text&gt;&#13;&#10;  &lt;/Box&gt;&#13;&#10;&lt;/Slide&gt;"/>
+        <p:cNvPr id="189" name="" descr="&lt;Slide style={{ width: 1280, height: 720, background: '#F6F8FD', padding: '56px 72px', flexDirection: 'column' }}&gt;&#13;&#10;  &lt;Box style={{ height: 96, flexDirection: 'row', justifyContent: 'space-between', alignItems: 'flex-start' }}&gt;&#13;&#10;    &lt;Box style={{ flexDirection: 'column', gap: 8 }}&gt;&#13;&#10;      &lt;Text style={{ fontSize: 34, fontWeight: 'bold', color: '#0C1222' }}&gt;现场三分钟，只走一条路径&lt;/Text&gt;&#13;&#10;      &lt;Text style={{ fontSize: 15, color: '#5C6780' }}&gt;上午 09:00，老板打开电脑后的真实操作顺序&lt;/Text&gt;&#13;&#10;    &lt;/Box&gt;&#13;&#10;    &lt;Box style={{ flexDirection: 'row', alignItems: 'center', gap: 6, padding: '5px 12px', background: '#EEF1FE', border: '1px solid #DDE2F5', borderRadius: 999 }}&gt;&#13;&#10;      &lt;Box style={{ width: 6, height: 6, borderRadius: 3, background: '#4C4DDC' }} /&gt;&#13;&#10;      &lt;Text style={{ fontSize: 12, color: '#4C4DDC', fontWeight: 'bold', letterSpacing: 1 }}&gt;AI 掌柜&lt;/Text&gt;&#13;&#10;    &lt;/Box&gt;&#13;&#10;  &lt;/Box&gt;&#13;&#10;  &lt;Box style={{ width: 72, height: 3, background: '#4C4DDC', borderRadius: 2, marginTop: 2, marginBottom: 12 }} /&gt;&#13;&#10;  &lt;Box style={{ flex: 1, paddingTop: 8 }}&gt;&#13;&#10;    &lt;Box style={{ flexDirection: 'row', gap: 16, height: 205 }}&gt;&#13;&#10;      &lt;Box style={{ flex: 1, background: '#FFFFFF', border: '1px solid #E3E8F5', borderRadius: 14, padding: 24, flexDirection: 'column', justifyContent: 'space-between' }}&gt;&#13;&#10;        &lt;Text style={{ fontSize: 12, color: '#4C4DDC', letterSpacing: 2 }}&gt;第 1 步 · 30 秒&lt;/Text&gt;&#13;&#10;        &lt;Text style={{ fontSize: 21, fontWeight: 'bold', color: '#0C1222', marginTop: 6 }}&gt;打开驾驶舱&lt;/Text&gt;&#13;&#10;        &lt;Text style={{ fontSize: 14, color: '#5C6780', lineHeight: 1.8 }}&gt;只有 3 件事：&lt;br /&gt;营收跌 20%、3 道菜滞销、&lt;br /&gt;牛腩只够 1.5 天。&lt;/Text&gt;&#13;&#10;      &lt;/Box&gt;&#13;&#10;      &lt;Box style={{ flex: 1, background: '#FFFFFF', border: '1px solid #E3E8F5', borderRadius: 14, padding: 24, flexDirection: 'column', justifyContent: 'space-between' }}&gt;&#13;&#10;        &lt;Text style={{ fontSize: 12, color: '#4C4DDC', letterSpacing: 2 }}&gt;第 2 步 · 60 秒&lt;/Text&gt;&#13;&#10;        &lt;Text style={{ fontSize: 21, fontWeight: 'bold', color: '#0C1222', marginTop: 6 }}&gt;点「营收下滑」&lt;/Text&gt;&#13;&#10;        &lt;Text style={{ fontSize: 14, color: '#5C6780', lineHeight: 1.8 }}&gt;拆成客流 −18%、客单价 −3%，&lt;br /&gt;结论：人少了，&lt;br /&gt;不是点便宜了。&lt;/Text&gt;&#13;&#10;      &lt;/Box&gt;&#13;&#10;      &lt;Box style={{ flex: 1, background: '#FFFFFF', border: '1px solid #E3E8F5', borderRadius: 14, padding: 24, flexDirection: 'column', justifyContent: 'space-between' }}&gt;&#13;&#10;        &lt;Text style={{ fontSize: 12, color: '#4C4DDC', letterSpacing: 2 }}&gt;第 3 步 · 60 秒&lt;/Text&gt;&#13;&#10;        &lt;Text style={{ fontSize: 21, fontWeight: 'bold', color: '#0C1222', marginTop: 6 }}&gt;点「缺货」&lt;/Text&gt;&#13;&#10;        &lt;Text style={{ fontSize: 14, color: '#5C6780', lineHeight: 1.8 }}&gt;按 7 天用量生成采购单&lt;br /&gt;→ 确认入库&lt;br /&gt;→ 库存与流水同步。&lt;/Text&gt;&#13;&#10;      &lt;/Box&gt;&#13;&#10;    &lt;/Box&gt;&#13;&#10;    &lt;Box style={{ marginTop: 20, background: '#EEF1FE', border: '1px solid #C9CDF6', borderRadius: 14, padding: '20px 24px', flexDirection: 'row', alignItems: 'center', gap: 24 }}&gt;&#13;&#10;      &lt;Text style={{ fontSize: 13, color: '#4C4DDC', letterSpacing: 2, width: 132 }}&gt;加演 · 宴席排菜&lt;/Text&gt;&#13;&#10;      &lt;Box style={{ flexDirection: 'column', gap: 6 }}&gt;&#13;&#10;        &lt;Text style={{ fontSize: 19, fontWeight: 'bold', color: '#0C1222' }}&gt;「8 人 / 人均 150」&lt;/Text&gt;&#13;&#10;        &lt;Text style={{ fontSize: 13, color: '#5C6780' }}&gt;按中餐宴席结构自动配一桌菜 → 一键成单 → 后厨立刻看到，可人工增减。&lt;/Text&gt;&#13;&#10;      &lt;/Box&gt;&#13;&#10;    &lt;/Box&gt;&#13;&#10;    &lt;Box style={{ marginTop: 20, paddingTop: 16, borderTop: '1px solid #E3E8F5', flexDirection: 'row', gap: 0 }}&gt;&#13;&#10;      &lt;Box style={{ flex: 1, flexDirection: 'column', gap: 3 }}&gt;&#13;&#10;        &lt;Text style={{ fontSize: 24, fontWeight: 'bold', color: '#0C1222' }}&gt;1 张&lt;/Text&gt;&#13;&#10;        &lt;Text style={{ fontSize: 12, color: '#5C6780' }}&gt;采购单，人工确认后才入库&lt;/Text&gt;&#13;&#10;      &lt;/Box&gt;&#13;&#10;      &lt;Box style={{ flex: 1, flexDirection: 'column', gap: 3 }}&gt;&#13;&#10;        &lt;Text style={{ fontSize: 24, fontWeight: 'bold', color: '#0C1222' }}&gt;7 种&lt;/Text&gt;&#13;&#10;        &lt;Text style={{ fontSize: 12, color: '#5C6780' }}&gt;食材库存与流水同步更新&lt;/Text&gt;&#13;&#10;      &lt;/Box&gt;&#13;&#10;      &lt;Box style={{ flex: 1, flexDirection: 'column', gap: 3 }}&gt;&#13;&#10;        &lt;Text style={{ fontSize: 24, fontWeight: 'bold', color: '#0C1222' }}&gt;3 条&lt;/Text&gt;&#13;&#10;        &lt;Text style={{ fontSize: 12, color: '#5C6780' }}&gt;操作留痕，调价与主推可回滚&lt;/Text&gt;&#13;&#10;      &lt;/Box&gt;&#13;&#10;      &lt;Box style={{ flex: 1.2, flexDirection: 'column', gap: 3 }}&gt;&#13;&#10;        &lt;Text style={{ fontSize: 24, fontWeight: 'bold', color: '#4C4DDC' }}&gt;0 次&lt;/Text&gt;&#13;&#10;        &lt;Text style={{ fontSize: 12, color: '#5C6780' }}&gt;页面跳转 —— 决策与执行同屏&lt;/Text&gt;&#13;&#10;      &lt;/Box&gt;&#13;&#10;    &lt;/Box&gt;&#13;&#10;  &lt;/Box&gt;&#13;&#10;  &lt;Box style={{ height: 36, flexDirection: 'row', justifyContent: 'space-between', alignItems: 'flex-end' }}&gt;&#13;&#10;    &lt;Text style={{ fontSize: 12, color: '#8A93A8' }}&gt;2026 武汉 1024 · 产业应用赛道&lt;/Text&gt;&#13;&#10;    &lt;Text style={{ fontSize: 12, color: '#8A93A8' }}&gt;05 / 12&lt;/Text&gt;&#13;&#10;  &lt;/Box&gt;&#13;&#10;&lt;/Slide&gt;"/>
         <p:cNvGrpSpPr/>
         <p:nvPr/>
       </p:nvGrpSpPr>
@@ -9883,7 +10048,7 @@
                 <a:latin typeface="Microsoft YaHei"/>
                 <a:ea typeface="Microsoft YaHei"/>
               </a:rPr>
-              <a:t>一句话</a:t>
+              <a:t>宴席排菜</a:t>
             </a:r>
             <a:endParaRPr/>
           </a:p>
@@ -9898,7 +10063,7 @@
         <p:spPr>
           <a:xfrm rot="0" flipH="0" flipV="0">
             <a:off x="2400300" y="4019550"/>
-            <a:ext cx="3962400" cy="219075"/>
+            <a:ext cx="4114800" cy="219075"/>
           </a:xfrm>
           <a:prstGeom prst="rect"/>
         </p:spPr>
@@ -9918,7 +10083,7 @@
                 <a:latin typeface="Microsoft YaHei"/>
                 <a:ea typeface="Microsoft YaHei"/>
               </a:rPr>
-              <a:t>「明天</a:t>
+              <a:t>「</a:t>
             </a:r>
             <a:r>
               <a:rPr lang="en-US" sz="1425" b="1">
@@ -9928,7 +10093,7 @@
                 <a:latin typeface="Microsoft YaHei"/>
                 <a:ea typeface="Microsoft YaHei"/>
               </a:rPr>
-              <a:t xml:space="preserve"> 8 </a:t>
+              <a:t xml:space="preserve">8 </a:t>
             </a:r>
             <a:r>
               <a:rPr lang="zh-CN" sz="1425" b="1">
@@ -9938,7 +10103,7 @@
                 <a:latin typeface="Microsoft YaHei"/>
                 <a:ea typeface="Microsoft YaHei"/>
               </a:rPr>
-              <a:t>人宴席，人均</a:t>
+              <a:t>人</a:t>
             </a:r>
             <a:r>
               <a:rPr lang="en-US" sz="1425" b="1">
@@ -9948,6 +10113,26 @@
                 <a:latin typeface="Microsoft YaHei"/>
                 <a:ea typeface="Microsoft YaHei"/>
               </a:rPr>
+              <a:t xml:space="preserve"> / </a:t>
+            </a:r>
+            <a:r>
+              <a:rPr lang="zh-CN" sz="1425" b="1">
+                <a:solidFill>
+                  <a:srgbClr val="0C1222"/>
+                </a:solidFill>
+                <a:latin typeface="Microsoft YaHei"/>
+                <a:ea typeface="Microsoft YaHei"/>
+              </a:rPr>
+              <a:t>人均</a:t>
+            </a:r>
+            <a:r>
+              <a:rPr lang="en-US" sz="1425" b="1">
+                <a:solidFill>
+                  <a:srgbClr val="0C1222"/>
+                </a:solidFill>
+                <a:latin typeface="Microsoft YaHei"/>
+                <a:ea typeface="Microsoft YaHei"/>
+              </a:rPr>
               <a:t xml:space="preserve"> 150</a:t>
             </a:r>
             <a:r>
@@ -9973,7 +10158,7 @@
         <p:spPr>
           <a:xfrm rot="0" flipH="0" flipV="0">
             <a:off x="2400300" y="4295775"/>
-            <a:ext cx="3962400" cy="152400"/>
+            <a:ext cx="4114800" cy="152400"/>
           </a:xfrm>
           <a:prstGeom prst="rect"/>
         </p:spPr>
@@ -9993,27 +10178,7 @@
                 <a:latin typeface="Microsoft YaHei"/>
                 <a:ea typeface="Microsoft YaHei"/>
               </a:rPr>
-              <a:t>按中餐宴席结构排</a:t>
-            </a:r>
-            <a:r>
-              <a:rPr lang="en-US" sz="975">
-                <a:solidFill>
-                  <a:srgbClr val="5C6780"/>
-                </a:solidFill>
-                <a:latin typeface="Microsoft YaHei"/>
-                <a:ea typeface="Microsoft YaHei"/>
-              </a:rPr>
-              <a:t xml:space="preserve"> 10 </a:t>
-            </a:r>
-            <a:r>
-              <a:rPr lang="zh-CN" sz="975">
-                <a:solidFill>
-                  <a:srgbClr val="5C6780"/>
-                </a:solidFill>
-                <a:latin typeface="Microsoft YaHei"/>
-                <a:ea typeface="Microsoft YaHei"/>
-              </a:rPr>
-              <a:t>道菜</a:t>
+              <a:t>按中餐宴席结构自动配一桌菜</a:t>
             </a:r>
             <a:r>
               <a:rPr lang="en-US" sz="975">
@@ -10173,47 +10338,7 @@
                 <a:latin typeface="Microsoft YaHei"/>
                 <a:ea typeface="Microsoft YaHei"/>
               </a:rPr>
-              <a:t>采购单（</a:t>
-            </a:r>
-            <a:r>
-              <a:rPr lang="en-US" sz="900">
-                <a:solidFill>
-                  <a:srgbClr val="5C6780"/>
-                </a:solidFill>
-                <a:latin typeface="Microsoft YaHei"/>
-                <a:ea typeface="Microsoft YaHei"/>
-              </a:rPr>
-              <a:t xml:space="preserve">7 </a:t>
-            </a:r>
-            <a:r>
-              <a:rPr lang="zh-CN" sz="900">
-                <a:solidFill>
-                  <a:srgbClr val="5C6780"/>
-                </a:solidFill>
-                <a:latin typeface="Microsoft YaHei"/>
-                <a:ea typeface="Microsoft YaHei"/>
-              </a:rPr>
-              <a:t>项</a:t>
-            </a:r>
-            <a:r>
-              <a:rPr lang="en-US" sz="900">
-                <a:solidFill>
-                  <a:srgbClr val="5C6780"/>
-                </a:solidFill>
-                <a:latin typeface="Microsoft YaHei"/>
-                <a:ea typeface="Microsoft YaHei"/>
-              </a:rPr>
-              <a:t xml:space="preserve"> / 2,757 </a:t>
-            </a:r>
-            <a:r>
-              <a:rPr lang="zh-CN" sz="900">
-                <a:solidFill>
-                  <a:srgbClr val="5C6780"/>
-                </a:solidFill>
-                <a:latin typeface="Microsoft YaHei"/>
-                <a:ea typeface="Microsoft YaHei"/>
-              </a:rPr>
-              <a:t>元）</a:t>
+              <a:t>采购单，人工确认后才入库</a:t>
             </a:r>
             <a:endParaRPr/>
           </a:p>
@@ -10373,7 +10498,7 @@
                 <a:latin typeface="Microsoft YaHei"/>
                 <a:ea typeface="Microsoft YaHei"/>
               </a:rPr>
-              <a:t>操作留痕，任何一条可回滚</a:t>
+              <a:t>操作留痕，调价与主推可回滚</a:t>
             </a:r>
             <a:endParaRPr/>
           </a:p>
@@ -10589,7 +10714,7 @@
   <p:cSld>
     <p:spTree>
       <p:nvGrpSpPr>
-        <p:cNvPr id="224" name="" descr="&lt;Slide style={{ width: 1280, height: 720, background: '#F6F8FD', padding: '56px 72px', flexDirection: 'column' }}&gt;&#13;&#10;  &lt;Box style={{ height: 96, flexDirection: 'row', justifyContent: 'space-between', alignItems: 'flex-start' }}&gt;&#13;&#10;    &lt;Box style={{ flexDirection: 'column', gap: 8 }}&gt;&#13;&#10;      &lt;Text style={{ fontSize: 34, fontWeight: 'bold', color: '#0C1222' }}&gt;四层架构：交易底座不动，决策层新建&lt;/Text&gt;&#13;&#10;      &lt;Text style={{ fontSize: 15, color: '#5C6780' }}&gt;原有 4,294 行代码、42 个模板、190 项测试，全部作为底座继续跑&lt;/Text&gt;&#13;&#10;    &lt;/Box&gt;&#13;&#10;    &lt;Box style={{ flexDirection: 'row', alignItems: 'center', gap: 6, padding: '5px 12px', background: '#EEF1FE', border: '1px solid #DDE2F5', borderRadius: 999 }}&gt;&#13;&#10;      &lt;Box style={{ width: 6, height: 6, borderRadius: 3, background: '#4C4DDC' }} /&gt;&#13;&#10;      &lt;Text style={{ fontSize: 12, color: '#4C4DDC', fontWeight: 'bold', letterSpacing: 1 }}&gt;AI 掌柜&lt;/Text&gt;&#13;&#10;    &lt;/Box&gt;&#13;&#10;  &lt;/Box&gt;&#13;&#10;  &lt;Box style={{ width: 72, height: 3, background: '#4C4DDC', borderRadius: 2, marginTop: 2, marginBottom: 12 }} /&gt;&#13;&#10;  &lt;Box style={{ flex: 1, paddingTop: 8 }}&gt;&#13;&#10;    &lt;Box style={{ flexDirection: 'column', gap: 14 }}&gt;&#13;&#10;      &lt;Box style={{ background: '#EEF1FE', border: '1px solid #C9CDF6', borderRadius: 10, padding: '22px 24px', flexDirection: 'row', alignItems: 'center' }}&gt;&#13;&#10;        &lt;Text style={{ fontSize: 13, color: '#4C4DDC', width: 100, letterSpacing: 1 }}&gt;决策界面&lt;/Text&gt;&#13;&#10;        &lt;Text style={{ fontSize: 16, color: '#0C1222' }}&gt;AI 驾驶舱 · 经营问答 · 洞察中心 · 采购单 · 四象限 · 预测备货&lt;/Text&gt;&#13;&#10;      &lt;/Box&gt;&#13;&#10;      &lt;Box style={{ background: '#FFFFFF', border: '1px solid #E3E8F5', borderRadius: 10, padding: '22px 24px', flexDirection: 'row', alignItems: 'center' }}&gt;&#13;&#10;        &lt;Text style={{ fontSize: 13, color: '#5C6780', width: 100, letterSpacing: 1 }}&gt;AI 引擎&lt;/Text&gt;&#13;&#10;        &lt;Text style={{ fontSize: 16, color: '#0C1222' }}&gt;受控 NL2SQL · 6 类规则检测 · 三层分解预测 · 可执行工具&lt;/Text&gt;&#13;&#10;      &lt;/Box&gt;&#13;&#10;      &lt;Box style={{ background: '#FFFFFF', border: '1px solid #E3E8F5', borderRadius: 10, padding: '22px 24px', flexDirection: 'row', alignItems: 'center' }}&gt;&#13;&#10;        &lt;Text style={{ fontSize: 13, color: '#5C6780', width: 100, letterSpacing: 1 }}&gt;指标层&lt;/Text&gt;&#13;&#10;        &lt;Text style={{ fontSize: 16, color: '#0C1222' }}&gt;唯一口径 metrics.py · 日粒度预聚合 ETL · 8 个只读语义视图&lt;/Text&gt;&#13;&#10;      &lt;/Box&gt;&#13;&#10;      &lt;Box style={{ background: '#FBFCFE', border: '1px solid #E3E8F5', borderRadius: 10, padding: '22px 24px', flexDirection: 'row', alignItems: 'center' }}&gt;&#13;&#10;        &lt;Text style={{ fontSize: 13, color: '#8A93A8', width: 100, letterSpacing: 1 }}&gt;交易底座&lt;/Text&gt;&#13;&#10;        &lt;Text style={{ fontSize: 16, color: '#5C6780' }}&gt;点单 · 收银 · 会员 · BOM 配方 · 库存流水 · 预订（Flask + SQLite）&lt;/Text&gt;&#13;&#10;      &lt;/Box&gt;&#13;&#10;    &lt;/Box&gt;&#13;&#10;    &lt;Box style={{ marginTop: 24, flexDirection: 'row', gap: 18 }}&gt;&#13;&#10;      &lt;Box style={{ flex: 1, paddingTop: 14, borderTop: '1px solid #E3E8F5' }}&gt;&#13;&#10;        &lt;Text style={{ fontSize: 30, fontWeight: 'bold', color: '#4C4DDC' }}&gt;0&lt;/Text&gt;&#13;&#10;        &lt;Text style={{ fontSize: 13, color: '#5C6780', marginTop: 4 }}&gt;新增第三方运行时依赖&lt;br /&gt;仅 Flask + waitress&lt;/Text&gt;&#13;&#10;      &lt;/Box&gt;&#13;&#10;      &lt;Box style={{ flex: 1, paddingTop: 14, borderTop: '1px solid #E3E8F5' }}&gt;&#13;&#10;        &lt;Text style={{ fontSize: 30, fontWeight: 'bold', color: '#4C4DDC' }}&gt;1.0s&lt;/Text&gt;&#13;&#10;        &lt;Text style={{ fontSize: 13, color: '#5C6780', marginTop: 4 }}&gt;看板首屏&lt;br /&gt;180 天预聚合&lt;/Text&gt;&#13;&#10;      &lt;/Box&gt;&#13;&#10;      &lt;Box style={{ flex: 1, paddingTop: 14, borderTop: '1px solid #E3E8F5' }}&gt;&#13;&#10;        &lt;Text style={{ fontSize: 30, fontWeight: 'bold', color: '#4C4DDC' }}&gt;离线&lt;/Text&gt;&#13;&#10;        &lt;Text style={{ fontSize: 13, color: '#5C6780', marginTop: 4 }}&gt;可跑：本地模型 / 规则降级&lt;br /&gt;不依赖 CDN 与外网&lt;/Text&gt;&#13;&#10;      &lt;/Box&gt;&#13;&#10;    &lt;/Box&gt;&#13;&#10;    &lt;Box style={{ marginTop: 20, paddingTop: 16, borderTop: '1px solid #E3E8F5', flexDirection: 'row', gap: 14 }}&gt;&#13;&#10;      &lt;Text style={{ fontSize: 13, color: '#4C4DDC', width: 76 }}&gt;选型取舍&lt;/Text&gt;&#13;&#10;      &lt;Text style={{ fontSize: 14, color: '#5C6780', lineHeight: 1.7, flex: 1 }}&gt;&#13;&#10;        不引入 numpy / pandas / torch：门店电脑不是服务器，打包体积与启动速度比模型炫技重要；&#13;&#10;        SQLite 开启 WAL 后足以支撑店内 20 路并发点餐。&#13;&#10;      &lt;/Text&gt;&#13;&#10;    &lt;/Box&gt;&#13;&#10;  &lt;/Box&gt;&#13;&#10;  &lt;Box style={{ height: 36, flexDirection: 'row', justifyContent: 'space-between', alignItems: 'flex-end' }}&gt;&#13;&#10;    &lt;Text style={{ fontSize: 12, color: '#8A93A8' }}&gt;2026 武汉 1024 · 产业应用赛道&lt;/Text&gt;&#13;&#10;    &lt;Text style={{ fontSize: 12, color: '#8A93A8' }}&gt;06 / 12&lt;/Text&gt;&#13;&#10;  &lt;/Box&gt;&#13;&#10;&lt;/Slide&gt;"/>
+        <p:cNvPr id="224" name=""/>
         <p:cNvGrpSpPr/>
         <p:nvPr/>
       </p:nvGrpSpPr>
@@ -10622,7 +10747,10 @@
         </p:spPr>
         <p:txBody>
           <a:bodyPr/>
-          <a:p/>
+          <a:p>
+            <a:pPr/>
+            <a:endParaRPr/>
+          </a:p>
         </p:txBody>
       </p:sp>
       <p:sp>
@@ -10783,7 +10911,10 @@
         </p:spPr>
         <p:txBody>
           <a:bodyPr/>
-          <a:p/>
+          <a:p>
+            <a:pPr/>
+            <a:endParaRPr/>
+          </a:p>
         </p:txBody>
       </p:sp>
       <p:sp>
@@ -10809,7 +10940,10 @@
         </p:spPr>
         <p:txBody>
           <a:bodyPr/>
-          <a:p/>
+          <a:p>
+            <a:pPr/>
+            <a:endParaRPr/>
+          </a:p>
         </p:txBody>
       </p:sp>
       <p:sp>
@@ -10880,7 +11014,10 @@
         </p:spPr>
         <p:txBody>
           <a:bodyPr/>
-          <a:p/>
+          <a:p>
+            <a:pPr/>
+            <a:endParaRPr/>
+          </a:p>
         </p:txBody>
       </p:sp>
       <p:sp>
@@ -10911,7 +11048,10 @@
         </p:spPr>
         <p:txBody>
           <a:bodyPr/>
-          <a:p/>
+          <a:p>
+            <a:pPr/>
+            <a:endParaRPr/>
+          </a:p>
         </p:txBody>
       </p:sp>
       <p:sp>
@@ -11122,7 +11262,10 @@
         </p:spPr>
         <p:txBody>
           <a:bodyPr/>
-          <a:p/>
+          <a:p>
+            <a:pPr/>
+            <a:endParaRPr/>
+          </a:p>
         </p:txBody>
       </p:sp>
       <p:sp>
@@ -11293,7 +11436,10 @@
         </p:spPr>
         <p:txBody>
           <a:bodyPr/>
-          <a:p/>
+          <a:p>
+            <a:pPr/>
+            <a:endParaRPr/>
+          </a:p>
         </p:txBody>
       </p:sp>
       <p:sp>
@@ -11434,7 +11580,10 @@
         </p:spPr>
         <p:txBody>
           <a:bodyPr/>
-          <a:p/>
+          <a:p>
+            <a:pPr/>
+            <a:endParaRPr/>
+          </a:p>
         </p:txBody>
       </p:sp>
       <p:sp>
@@ -11664,7 +11813,10 @@
         </p:spPr>
         <p:txBody>
           <a:bodyPr/>
-          <a:p/>
+          <a:p>
+            <a:pPr/>
+            <a:endParaRPr/>
+          </a:p>
         </p:txBody>
       </p:sp>
       <p:sp>
@@ -11802,7 +11954,10 @@
         </p:spPr>
         <p:txBody>
           <a:bodyPr/>
-          <a:p/>
+          <a:p>
+            <a:pPr/>
+            <a:endParaRPr/>
+          </a:p>
         </p:txBody>
       </p:sp>
       <p:sp>
@@ -11940,7 +12095,10 @@
         </p:spPr>
         <p:txBody>
           <a:bodyPr/>
-          <a:p/>
+          <a:p>
+            <a:pPr/>
+            <a:endParaRPr/>
+          </a:p>
         </p:txBody>
       </p:sp>
       <p:sp>
@@ -12108,7 +12266,10 @@
         </p:spPr>
         <p:txBody>
           <a:bodyPr/>
-          <a:p/>
+          <a:p>
+            <a:pPr/>
+            <a:endParaRPr/>
+          </a:p>
         </p:txBody>
       </p:sp>
       <p:sp>
@@ -12371,7 +12532,7 @@
   <p:cSld>
     <p:spTree>
       <p:nvGrpSpPr>
-        <p:cNvPr id="258" name="" descr="&lt;Slide style={{ width: 1280, height: 720, background: '#F6F8FD', padding: '56px 72px', flexDirection: 'column' }}&gt;&#13;&#10;  &lt;Box style={{ height: 96, flexDirection: 'row', justifyContent: 'space-between', alignItems: 'flex-start' }}&gt;&#13;&#10;    &lt;Box style={{ flexDirection: 'column', gap: 8 }}&gt;&#13;&#10;      &lt;Text style={{ fontSize: 34, fontWeight: 'bold', color: '#0C1222' }}&gt;敢让它查数，是因为它改不了数&lt;/Text&gt;&#13;&#10;      &lt;Text style={{ fontSize: 15, color: '#5C6780' }}&gt;自然语言查数的五道闸 —— 对应评审的「稳定性与合规性」&lt;/Text&gt;&#13;&#10;    &lt;/Box&gt;&#13;&#10;    &lt;Box style={{ flexDirection: 'row', alignItems: 'center', gap: 6, padding: '5px 12px', background: '#EEF1FE', border: '1px solid #DDE2F5', borderRadius: 999 }}&gt;&#13;&#10;      &lt;Box style={{ width: 6, height: 6, borderRadius: 3, background: '#4C4DDC' }} /&gt;&#13;&#10;      &lt;Text style={{ fontSize: 12, color: '#4C4DDC', fontWeight: 'bold', letterSpacing: 1 }}&gt;AI 掌柜&lt;/Text&gt;&#13;&#10;    &lt;/Box&gt;&#13;&#10;  &lt;/Box&gt;&#13;&#10;  &lt;Box style={{ width: 72, height: 3, background: '#4C4DDC', borderRadius: 2, marginTop: 2, marginBottom: 12 }} /&gt;&#13;&#10;  &lt;Box style={{ flex: 1, paddingTop: 8 }}&gt;&#13;&#10;    &lt;Box style={{ flexDirection: 'row', gap: 26 }}&gt;&#13;&#10;      &lt;Box style={{ flex: 1.3, flexDirection: 'column', gap: 18 }}&gt;&#13;&#10;        &lt;Box style={{ flexDirection: 'row', gap: 16, alignItems: 'flex-start' }}&gt;&#13;&#10;          &lt;Text style={{ fontSize: 16, fontWeight: 'bold', color: '#4C4DDC', width: 34 }}&gt;01&lt;/Text&gt;&#13;&#10;          &lt;Box style={{ flexDirection: 'column', gap: 4 }}&gt;&#13;&#10;            &lt;Text style={{ fontSize: 19, color: '#0C1222' }}&gt;只读连接&lt;/Text&gt;&#13;&#10;            &lt;Text style={{ fontSize: 14, color: '#5C6780' }}&gt;query_only=ON，数据库层面拒绝一切写操作&lt;/Text&gt;&#13;&#10;          &lt;/Box&gt;&#13;&#10;        &lt;/Box&gt;&#13;&#10;        &lt;Box style={{ flexDirection: 'row', gap: 16, alignItems: 'flex-start' }}&gt;&#13;&#10;          &lt;Text style={{ fontSize: 16, fontWeight: 'bold', color: '#4C4DDC', width: 34 }}&gt;02&lt;/Text&gt;&#13;&#10;          &lt;Box style={{ flexDirection: 'column', gap: 4 }}&gt;&#13;&#10;            &lt;Text style={{ fontSize: 19, color: '#0C1222' }}&gt;视图白名单&lt;/Text&gt;&#13;&#10;            &lt;Text style={{ fontSize: 14, color: '#5C6780' }}&gt;只认 8 个 v_* 语义视图，读不到会员手机号与设置表&lt;/Text&gt;&#13;&#10;          &lt;/Box&gt;&#13;&#10;        &lt;/Box&gt;&#13;&#10;        &lt;Box style={{ flexDirection: 'row', gap: 16, alignItems: 'flex-start' }}&gt;&#13;&#10;          &lt;Text style={{ fontSize: 16, fontWeight: 'bold', color: '#4C4DDC', width: 34 }}&gt;03&lt;/Text&gt;&#13;&#10;          &lt;Box style={{ flexDirection: 'column', gap: 4 }}&gt;&#13;&#10;            &lt;Text style={{ fontSize: 19, color: '#0C1222' }}&gt;语法校验&lt;/Text&gt;&#13;&#10;            &lt;Text style={{ fontSize: 14, color: '#5C6780' }}&gt;单条 SELECT；禁 DDL / DML / ATTACH / UNION / 系统表&lt;/Text&gt;&#13;&#10;          &lt;/Box&gt;&#13;&#10;        &lt;/Box&gt;&#13;&#10;        &lt;Box style={{ flexDirection: 'row', gap: 16, alignItems: 'flex-start' }}&gt;&#13;&#10;          &lt;Text style={{ fontSize: 16, fontWeight: 'bold', color: '#4C4DDC', width: 34 }}&gt;04&lt;/Text&gt;&#13;&#10;          &lt;Box style={{ flexDirection: 'column', gap: 4 }}&gt;&#13;&#10;            &lt;Text style={{ fontSize: 19, color: '#0C1222' }}&gt;强制约束&lt;/Text&gt;&#13;&#10;            &lt;Text style={{ fontSize: 14, color: '#5C6780' }}&gt;自动补 LIMIT 500，6 秒超时中断，慢查询拖不死库&lt;/Text&gt;&#13;&#10;          &lt;/Box&gt;&#13;&#10;        &lt;/Box&gt;&#13;&#10;        &lt;Box style={{ flexDirection: 'row', gap: 16, alignItems: 'flex-start' }}&gt;&#13;&#10;          &lt;Text style={{ fontSize: 16, fontWeight: 'bold', color: '#4C4DDC', width: 34 }}&gt;05&lt;/Text&gt;&#13;&#10;          &lt;Box style={{ flexDirection: 'column', gap: 4 }}&gt;&#13;&#10;            &lt;Text style={{ fontSize: 19, color: '#0C1222' }}&gt;结果上限&lt;/Text&gt;&#13;&#10;            &lt;Text style={{ fontSize: 14, color: '#5C6780' }}&gt;最多 500 行，不会把大结果集塞进模型上下文&lt;/Text&gt;&#13;&#10;          &lt;/Box&gt;&#13;&#10;        &lt;/Box&gt;&#13;&#10;      &lt;/Box&gt;&#13;&#10;      &lt;Box style={{ flex: 1, background: '#FFFFFF', border: '1px solid #E3E8F5', borderRadius: 14, padding: 26, flexDirection: 'column', justifyContent: 'space-between' }}&gt;&#13;&#10;        &lt;Box&gt;&#13;&#10;          &lt;Text style={{ fontSize: 13, color: '#5C6780', letterSpacing: 1 }}&gt;自动化验证&lt;/Text&gt;&#13;&#10;          &lt;Text style={{ fontSize: 62, fontWeight: 'bold', color: '#4C4DDC', marginTop: 6 }}&gt;8 / 8&lt;/Text&gt;&#13;&#10;          &lt;Text style={{ fontSize: 15, color: '#0C1222', marginTop: 4 }}&gt;越界语句全部拦截&lt;/Text&gt;&#13;&#10;        &lt;/Box&gt;&#13;&#10;        &lt;Box style={{ flexDirection: 'column', gap: 6 }}&gt;&#13;&#10;          &lt;Text style={{ fontSize: 12, color: '#5C6780' }}&gt;SELECT * FROM members&lt;/Text&gt;&#13;&#10;          &lt;Text style={{ fontSize: 12, color: '#5C6780' }}&gt;DROP TABLE orders&lt;/Text&gt;&#13;&#10;          &lt;Text style={{ fontSize: 12, color: '#5C6780' }}&gt;SELECT 1; DELETE FROM orders&lt;/Text&gt;&#13;&#10;          &lt;Text style={{ fontSize: 12, color: '#5C6780' }}&gt;... UNION SELECT * FROM settings&lt;/Text&gt;&#13;&#10;          &lt;Text style={{ fontSize: 12, color: '#5C6780' }}&gt;ATTACH / PRAGMA / sqlite_master&lt;/Text&gt;&#13;&#10;        &lt;/Box&gt;&#13;&#10;        &lt;Text style={{ fontSize: 12, color: '#4C4DDC' }}&gt;越界时先自动修复一轮 SQL，再失败才降级&lt;/Text&gt;&#13;&#10;      &lt;/Box&gt;&#13;&#10;    &lt;/Box&gt;&#13;&#10;    &lt;Box style={{ marginTop: 22, paddingTop: 18, borderTop: '1px solid #E3E8F5', flexDirection: 'row', gap: 16 }}&gt;&#13;&#10;      &lt;Box style={{ width: 5, height: 46, background: '#4C4DDC', borderRadius: 3 }} /&gt;&#13;&#10;      &lt;Text style={{ fontSize: 16, color: '#5C6780', lineHeight: 1.75, flex: 1 }}&gt;&#13;&#10;        黑名单永远会被绕过。真正的安全来自两层：数据库层面拒绝写、语义视图看不到敏感表；&lt;br /&gt;&#13;&#10;        其余三道闸只是把越界请求挡在更早的地方，顺便给出人能看懂的拒绝理由。&#13;&#10;      &lt;/Text&gt;&#13;&#10;    &lt;/Box&gt;&#13;&#10;  &lt;/Box&gt;&#13;&#10;  &lt;Box style={{ height: 36, flexDirection: 'row', justifyContent: 'space-between', alignItems: 'flex-end' }}&gt;&#13;&#10;    &lt;Text style={{ fontSize: 12, color: '#8A93A8' }}&gt;2026 武汉 1024 · 产业应用赛道&lt;/Text&gt;&#13;&#10;    &lt;Text style={{ fontSize: 12, color: '#8A93A8' }}&gt;07 / 12&lt;/Text&gt;&#13;&#10;  &lt;/Box&gt;&#13;&#10;&lt;/Slide&gt;"/>
+        <p:cNvPr id="258" name=""/>
         <p:cNvGrpSpPr/>
         <p:nvPr/>
       </p:nvGrpSpPr>
@@ -12404,7 +12565,10 @@
         </p:spPr>
         <p:txBody>
           <a:bodyPr/>
-          <a:p/>
+          <a:p>
+            <a:pPr/>
+            <a:endParaRPr/>
+          </a:p>
         </p:txBody>
       </p:sp>
       <p:sp>
@@ -12525,7 +12689,10 @@
         </p:spPr>
         <p:txBody>
           <a:bodyPr/>
-          <a:p/>
+          <a:p>
+            <a:pPr/>
+            <a:endParaRPr/>
+          </a:p>
         </p:txBody>
       </p:sp>
       <p:sp>
@@ -12551,7 +12718,10 @@
         </p:spPr>
         <p:txBody>
           <a:bodyPr/>
-          <a:p/>
+          <a:p>
+            <a:pPr/>
+            <a:endParaRPr/>
+          </a:p>
         </p:txBody>
       </p:sp>
       <p:sp>
@@ -12622,7 +12792,10 @@
         </p:spPr>
         <p:txBody>
           <a:bodyPr/>
-          <a:p/>
+          <a:p>
+            <a:pPr/>
+            <a:endParaRPr/>
+          </a:p>
         </p:txBody>
       </p:sp>
       <p:sp>
@@ -13328,7 +13501,10 @@
         </p:spPr>
         <p:txBody>
           <a:bodyPr/>
-          <a:p/>
+          <a:p>
+            <a:pPr/>
+            <a:endParaRPr/>
+          </a:p>
         </p:txBody>
       </p:sp>
       <p:sp>
@@ -13703,7 +13879,10 @@
         </p:spPr>
         <p:txBody>
           <a:bodyPr/>
-          <a:p/>
+          <a:p>
+            <a:pPr/>
+            <a:endParaRPr/>
+          </a:p>
         </p:txBody>
       </p:sp>
       <p:sp>
@@ -13729,7 +13908,10 @@
         </p:spPr>
         <p:txBody>
           <a:bodyPr/>
-          <a:p/>
+          <a:p>
+            <a:pPr/>
+            <a:endParaRPr/>
+          </a:p>
         </p:txBody>
       </p:sp>
       <p:sp>
@@ -13895,7 +14077,7 @@
   <p:cSld>
     <p:spTree>
       <p:nvGrpSpPr>
-        <p:cNvPr id="296" name="" descr="&lt;Slide style={{ width: 1280, height: 720, background: '#F6F8FD', padding: '56px 72px', flexDirection: 'column' }}&gt;&#13;&#10;  &lt;Box style={{ height: 96, flexDirection: 'row', justifyContent: 'space-between', alignItems: 'flex-start' }}&gt;&#13;&#10;    &lt;Box style={{ flexDirection: 'column', gap: 8 }}&gt;&#13;&#10;      &lt;Text style={{ fontSize: 34, fontWeight: 'bold', color: '#0C1222' }}&gt;AI 不会算错账，因为它不算账&lt;/Text&gt;&#13;&#10;      &lt;Text style={{ fontSize: 15, color: '#5C6780' }}&gt;所有数字只有一个实现，模型只负责理解问题与组织语言&lt;/Text&gt;&#13;&#10;    &lt;/Box&gt;&#13;&#10;    &lt;Box style={{ flexDirection: 'row', alignItems: 'center', gap: 6, padding: '5px 12px', background: '#EEF1FE', border: '1px solid #DDE2F5', borderRadius: 999 }}&gt;&#13;&#10;      &lt;Box style={{ width: 6, height: 6, borderRadius: 3, background: '#4C4DDC' }} /&gt;&#13;&#10;      &lt;Text style={{ fontSize: 12, color: '#4C4DDC', fontWeight: 'bold', letterSpacing: 1 }}&gt;AI 掌柜&lt;/Text&gt;&#13;&#10;    &lt;/Box&gt;&#13;&#10;  &lt;/Box&gt;&#13;&#10;  &lt;Box style={{ width: 72, height: 3, background: '#4C4DDC', borderRadius: 2, marginTop: 2, marginBottom: 12 }} /&gt;&#13;&#10;  &lt;Box style={{ flex: 1, paddingTop: 8 }}&gt;&#13;&#10;    &lt;Box style={{ flexDirection: 'row', gap: 28, alignItems: 'center' }}&gt;&#13;&#10;      &lt;Box style={{ flexDirection: 'column', width: 380 }}&gt;&#13;&#10;        &lt;Text style={{ fontSize: 13, color: '#5C6780', letterSpacing: 1 }}&gt;昨日营收（元）&lt;/Text&gt;&#13;&#10;        &lt;Text style={{ fontSize: 68, fontWeight: 'bold', color: '#0C1222', letterSpacing: -2 }}&gt;6,029.65&lt;/Text&gt;&#13;&#10;        &lt;Text style={{ fontSize: 13, color: '#5C6780', marginTop: 6 }}&gt;同星期基线 8,024.45 · 低 24.8%&lt;/Text&gt;&#13;&#10;      &lt;/Box&gt;&#13;&#10;      &lt;Box style={{ flex: 1, flexDirection: 'column', gap: 10 }}&gt;&#13;&#10;        &lt;Text style={{ fontSize: 13, color: '#5C6780' }}&gt;这个数字出现在三个地方，必须完全相等&lt;/Text&gt;&#13;&#10;        &lt;Box style={{ flexDirection: 'row', gap: 12 }}&gt;&#13;&#10;          &lt;Box style={{ flex: 1, background: '#FFFFFF', border: '1px solid #E3E8F5', borderRadius: 10, padding: 16 }}&gt;&#13;&#10;            &lt;Text style={{ fontSize: 15, color: '#0C1222' }}&gt;AI 驾驶舱&lt;/Text&gt;&#13;&#10;            &lt;Text style={{ fontSize: 12, color: '#5C6780', marginTop: 6 }}&gt;KPI 卡片&lt;/Text&gt;&#13;&#10;          &lt;/Box&gt;&#13;&#10;          &lt;Box style={{ flex: 1, background: '#FFFFFF', border: '1px solid #E3E8F5', borderRadius: 10, padding: 16 }}&gt;&#13;&#10;            &lt;Text style={{ fontSize: 15, color: '#0C1222' }}&gt;营收报表&lt;/Text&gt;&#13;&#10;            &lt;Text style={{ fontSize: 12, color: '#5C6780', marginTop: 6 }}&gt;按日汇总&lt;/Text&gt;&#13;&#10;          &lt;/Box&gt;&#13;&#10;          &lt;Box style={{ flex: 1, background: '#FFFFFF', border: '1px solid #E3E8F5', borderRadius: 10, padding: 16 }}&gt;&#13;&#10;            &lt;Text style={{ fontSize: 15, color: '#0C1222' }}&gt;AI 问答&lt;/Text&gt;&#13;&#10;            &lt;Text style={{ fontSize: 12, color: '#5C6780', marginTop: 6 }}&gt;SQL 结果&lt;/Text&gt;&#13;&#10;          &lt;/Box&gt;&#13;&#10;        &lt;/Box&gt;&#13;&#10;      &lt;/Box&gt;&#13;&#10;    &lt;/Box&gt;&#13;&#10;    &lt;Box style={{ marginTop: 26, background: '#FBFCFE', border: '1px solid #E3E8F5', borderRadius: 12, padding: 22 }}&gt;&#13;&#10;      &lt;Text style={{ fontSize: 12, color: '#8A93A8', letterSpacing: 1 }}&gt;analytics / metrics.py&lt;/Text&gt;&#13;&#10;      &lt;Text style={{ fontSize: 14, color: '#5C6780', marginTop: 10, lineHeight: 1.9 }}&gt;&#13;&#10;        def q_kpi(conn, d1, d2):&amp;nbsp;&amp;nbsp;&lt;span style={{ color: '#4C4DDC' }}&gt;# 全系统唯一的营收口径&lt;/span&gt;&lt;br /&gt;&#13;&#10;        &amp;nbsp;&amp;nbsp;revenue = SUM(final_amount) WHERE status='settled'&lt;br /&gt;&#13;&#10;        &amp;nbsp;&amp;nbsp;return dict(revenue=money(revenue), margin_rate=...)&#13;&#10;      &lt;/Text&gt;&#13;&#10;    &lt;/Box&gt;&#13;&#10;    &lt;Text style={{ fontSize: 14, color: '#5C6780', marginTop: 16 }}&gt;数字由 SQL 算出，模型只写解读；结论必须引用 evidence，点开能看到原始 SQL。&lt;/Text&gt;&#13;&#10;  &lt;/Box&gt;&#13;&#10;  &lt;Box style={{ height: 36, flexDirection: 'row', justifyContent: 'space-between', alignItems: 'flex-end' }}&gt;&#13;&#10;    &lt;Text style={{ fontSize: 12, color: '#8A93A8' }}&gt;2026 武汉 1024 · 产业应用赛道&lt;/Text&gt;&#13;&#10;    &lt;Text style={{ fontSize: 12, color: '#8A93A8' }}&gt;08 / 12&lt;/Text&gt;&#13;&#10;  &lt;/Box&gt;&#13;&#10;&lt;/Slide&gt;"/>
+        <p:cNvPr id="296" name=""/>
         <p:cNvGrpSpPr/>
         <p:nvPr/>
       </p:nvGrpSpPr>
@@ -13928,7 +14110,10 @@
         </p:spPr>
         <p:txBody>
           <a:bodyPr/>
-          <a:p/>
+          <a:p>
+            <a:pPr/>
+            <a:endParaRPr/>
+          </a:p>
         </p:txBody>
       </p:sp>
       <p:sp>
@@ -14039,7 +14224,10 @@
         </p:spPr>
         <p:txBody>
           <a:bodyPr/>
-          <a:p/>
+          <a:p>
+            <a:pPr/>
+            <a:endParaRPr/>
+          </a:p>
         </p:txBody>
       </p:sp>
       <p:sp>
@@ -14065,7 +14253,10 @@
         </p:spPr>
         <p:txBody>
           <a:bodyPr/>
-          <a:p/>
+          <a:p>
+            <a:pPr/>
+            <a:endParaRPr/>
+          </a:p>
         </p:txBody>
       </p:sp>
       <p:sp>
@@ -14136,7 +14327,10 @@
         </p:spPr>
         <p:txBody>
           <a:bodyPr/>
-          <a:p/>
+          <a:p>
+            <a:pPr/>
+            <a:endParaRPr/>
+          </a:p>
         </p:txBody>
       </p:sp>
       <p:sp>
@@ -14337,7 +14531,10 @@
         </p:spPr>
         <p:txBody>
           <a:bodyPr/>
-          <a:p/>
+          <a:p>
+            <a:pPr/>
+            <a:endParaRPr/>
+          </a:p>
         </p:txBody>
       </p:sp>
       <p:sp>
@@ -14458,7 +14655,10 @@
         </p:spPr>
         <p:txBody>
           <a:bodyPr/>
-          <a:p/>
+          <a:p>
+            <a:pPr/>
+            <a:endParaRPr/>
+          </a:p>
         </p:txBody>
       </p:sp>
       <p:sp>
@@ -14559,7 +14759,10 @@
         </p:spPr>
         <p:txBody>
           <a:bodyPr/>
-          <a:p/>
+          <a:p>
+            <a:pPr/>
+            <a:endParaRPr/>
+          </a:p>
         </p:txBody>
       </p:sp>
       <p:sp>
@@ -14680,7 +14883,10 @@
         </p:spPr>
         <p:txBody>
           <a:bodyPr/>
-          <a:p/>
+          <a:p>
+            <a:pPr/>
+            <a:endParaRPr/>
+          </a:p>
         </p:txBody>
       </p:sp>
       <p:sp>
@@ -15014,7 +15220,7 @@
   <p:cSld>
     <p:spTree>
       <p:nvGrpSpPr>
-        <p:cNvPr id="323" name="" descr="&lt;Slide style={{ width: 1280, height: 720, background: '#F6F8FD', padding: '56px 72px', flexDirection: 'column' }}&gt;&#13;&#10;  &lt;Box style={{ height: 96, flexDirection: 'row', justifyContent: 'space-between', alignItems: 'flex-start' }}&gt;&#13;&#10;    &lt;Box style={{ flexDirection: 'column', gap: 8 }}&gt;&#13;&#10;      &lt;Text style={{ fontSize: 34, fontWeight: 'bold', color: '#0C1222' }}&gt;先算清代价，再谈智能&lt;/Text&gt;&#13;&#10;      &lt;Text style={{ fontSize: 15, color: '#5C6780' }}&gt;左边是它在这套 180 天数据里真找出来的，右边是按建议执行后的测算&lt;/Text&gt;&#13;&#10;    &lt;/Box&gt;&#13;&#10;    &lt;Box style={{ flexDirection: 'row', alignItems: 'center', gap: 6, padding: '5px 12px', background: '#EEF1FE', border: '1px solid #DDE2F5', borderRadius: 999 }}&gt;&#13;&#10;      &lt;Box style={{ width: 6, height: 6, borderRadius: 3, background: '#4C4DDC' }} /&gt;&#13;&#10;      &lt;Text style={{ fontSize: 12, color: '#4C4DDC', fontWeight: 'bold', letterSpacing: 1 }}&gt;AI 掌柜&lt;/Text&gt;&#13;&#10;    &lt;/Box&gt;&#13;&#10;  &lt;/Box&gt;&#13;&#10;  &lt;Box style={{ width: 72, height: 3, background: '#4C4DDC', borderRadius: 2, marginTop: 2, marginBottom: 12 }} /&gt;&#13;&#10;  &lt;Box style={{ flex: 1, paddingTop: 8 }}&gt;&#13;&#10;    &lt;Box style={{ flexDirection: 'row', gap: 24 }}&gt;&#13;&#10;      &lt;Box style={{ flex: 1.15, flexDirection: 'column' }}&gt;&#13;&#10;        &lt;Text style={{ fontSize: 13, color: '#5C6780', letterSpacing: 1 }}&gt;实测 · 系统自己发现的五件事&lt;/Text&gt;&#13;&#10;        &lt;Box style={{ marginTop: 14, flexDirection: 'column', gap: 0 }}&gt;&#13;&#10;          &lt;Box style={{ paddingTop: 12, paddingBottom: 12, borderTop: '1px solid #E3E8F5', flexDirection: 'row', alignItems: 'baseline' }}&gt;&#13;&#10;            &lt;Text style={{ fontSize: 26, fontWeight: 'bold', color: '#4C4DDC', width: 96 }}&gt;11.1%&lt;/Text&gt;&#13;&#10;            &lt;Text style={{ fontSize: 14, color: '#0C1222' }}&gt;近 7 天折扣率，比前 30 天的 8.8% 高 2.3 个点&lt;/Text&gt;&#13;&#10;          &lt;/Box&gt;&#13;&#10;          &lt;Box style={{ paddingTop: 12, paddingBottom: 12, borderTop: '1px solid #E3E8F5', flexDirection: 'row', alignItems: 'baseline' }}&gt;&#13;&#10;            &lt;Text style={{ fontSize: 26, fontWeight: 'bold', color: '#4C4DDC', width: 96 }}&gt;1,899&lt;/Text&gt;&#13;&#10;            &lt;Text style={{ fontSize: 14, color: '#0C1222' }}&gt;元 · 按原折扣水平本可少让的金额&lt;/Text&gt;&#13;&#10;          &lt;/Box&gt;&#13;&#10;          &lt;Box style={{ paddingTop: 12, paddingBottom: 12, borderTop: '1px solid #E3E8F5', flexDirection: 'row', alignItems: 'baseline' }}&gt;&#13;&#10;            &lt;Text style={{ fontSize: 26, fontWeight: 'bold', color: '#4C4DDC', width: 96 }}&gt;19 道&lt;/Text&gt;&#13;&#10;            &lt;Text style={{ fontSize: 14, color: '#0C1222' }}&gt;菜连续 3 天 0 销量，占在售 9.2%&lt;/Text&gt;&#13;&#10;          &lt;/Box&gt;&#13;&#10;          &lt;Box style={{ paddingTop: 12, paddingBottom: 12, borderTop: '1px solid #E3E8F5', flexDirection: 'row', alignItems: 'baseline' }}&gt;&#13;&#10;            &lt;Text style={{ fontSize: 26, fontWeight: 'bold', color: '#4C4DDC', width: 96 }}&gt;5 种&lt;/Text&gt;&#13;&#10;            &lt;Text style={{ fontSize: 14, color: '#0C1222' }}&gt;食材可支撑不足 2 天（基围虾只剩 1.5 天）&lt;/Text&gt;&#13;&#10;          &lt;/Box&gt;&#13;&#10;          &lt;Box style={{ paddingTop: 12, paddingBottom: 12, borderTop: '1px solid #E3E8F5', borderBottom: '1px solid #E3E8F5', flexDirection: 'row', alignItems: 'baseline' }}&gt;&#13;&#10;            &lt;Text style={{ fontSize: 26, fontWeight: 'bold', color: '#4C4DDC', width: 96 }}&gt;57.6%&lt;/Text&gt;&#13;&#10;            &lt;Text style={{ fontSize: 14, color: '#0C1222' }}&gt;近 30 天毛利率，比目标低 2.4 个点&lt;/Text&gt;&#13;&#10;          &lt;/Box&gt;&#13;&#10;        &lt;/Box&gt;&#13;&#10;      &lt;/Box&gt;&#13;&#10;      &lt;Box style={{ flex: 1, background: '#EEF1FE', border: '1px solid #C9CDF6', borderRadius: 14, padding: 30, flexDirection: 'column', gap: 18, justifyContent: 'flex-start' }}&gt;&#13;&#10;        &lt;Box style={{ flexDirection: 'column', gap: 6 }}&gt;&#13;&#10;          &lt;Text style={{ fontSize: 13, color: '#4C4DDC', letterSpacing: 1 }}&gt;测算 · 补齐这 2.4 个点&lt;/Text&gt;&#13;&#10;          &lt;Text style={{ fontSize: 56, fontWeight: 'bold', color: '#0C1222', letterSpacing: -1 }}&gt;+9.4&lt;span style={{ fontSize: 22 }}&gt; 万/年&lt;/span&gt;&lt;/Text&gt;&#13;&#10;          &lt;Text style={{ fontSize: 13, color: '#5C6780' }}&gt;近 30 天营收 32.5 万 × 2.4pt × 12 个月&lt;/Text&gt;&#13;&#10;        &lt;/Box&gt;&#13;&#10;        &lt;Box style={{ flexDirection: 'column', gap: 8, marginTop: 6, paddingTop: 16, borderTop: '1px solid #3A3F63' }}&gt;&#13;&#10;          &lt;Text style={{ fontSize: 13, color: '#0C1222' }}&gt;怎么补：&lt;/Text&gt;&#13;&#10;          &lt;Text style={{ fontSize: 13, color: '#5C6780', lineHeight: 1.8 }}&gt;① 3 道瘦狗菜调价 5%~15%&lt;br /&gt;② 19 道滞销菜组套餐或下架&lt;br /&gt;③ 折扣收回 2 个点&lt;/Text&gt;&#13;&#10;        &lt;/Box&gt;&#13;&#10;        &lt;Text style={{ fontSize: 11, color: '#6B7490', lineHeight: 1.6, marginTop: 4 }}&gt;&#13;&#10;          左列全部由 SQL 从 180 天数据算出，脚本可复现；右侧为按当前规模的线性测算，不是承诺值。&#13;&#10;        &lt;/Text&gt;&#13;&#10;      &lt;/Box&gt;&#13;&#10;    &lt;/Box&gt;&#13;&#10;  &lt;/Box&gt;&#13;&#10;  &lt;Box style={{ height: 36, flexDirection: 'row', justifyContent: 'space-between', alignItems: 'flex-end' }}&gt;&#13;&#10;    &lt;Text style={{ fontSize: 12, color: '#8A93A8' }}&gt;2026 武汉 1024 · 产业应用赛道&lt;/Text&gt;&#13;&#10;    &lt;Text style={{ fontSize: 12, color: '#8A93A8' }}&gt;09 / 12&lt;/Text&gt;&#13;&#10;  &lt;/Box&gt;&#13;&#10;&lt;/Slide&gt;"/>
+        <p:cNvPr id="323" name=""/>
         <p:cNvGrpSpPr/>
         <p:nvPr/>
       </p:nvGrpSpPr>
@@ -15047,7 +15253,10 @@
         </p:spPr>
         <p:txBody>
           <a:bodyPr/>
-          <a:p/>
+          <a:p>
+            <a:pPr/>
+            <a:endParaRPr/>
+          </a:p>
         </p:txBody>
       </p:sp>
       <p:sp>
@@ -15168,7 +15377,10 @@
         </p:spPr>
         <p:txBody>
           <a:bodyPr/>
-          <a:p/>
+          <a:p>
+            <a:pPr/>
+            <a:endParaRPr/>
+          </a:p>
         </p:txBody>
       </p:sp>
       <p:sp>
@@ -15194,7 +15406,10 @@
         </p:spPr>
         <p:txBody>
           <a:bodyPr/>
-          <a:p/>
+          <a:p>
+            <a:pPr/>
+            <a:endParaRPr/>
+          </a:p>
         </p:txBody>
       </p:sp>
       <p:sp>
@@ -15265,7 +15480,10 @@
         </p:spPr>
         <p:txBody>
           <a:bodyPr/>
-          <a:p/>
+          <a:p>
+            <a:pPr/>
+            <a:endParaRPr/>
+          </a:p>
         </p:txBody>
       </p:sp>
       <p:sp>
@@ -15360,7 +15578,10 @@
         </p:spPr>
         <p:txBody>
           <a:bodyPr/>
-          <a:p/>
+          <a:p>
+            <a:pPr/>
+            <a:endParaRPr/>
+          </a:p>
         </p:txBody>
       </p:sp>
       <p:sp>
@@ -15550,7 +15771,10 @@
         </p:spPr>
         <p:txBody>
           <a:bodyPr/>
-          <a:p/>
+          <a:p>
+            <a:pPr/>
+            <a:endParaRPr/>
+          </a:p>
         </p:txBody>
       </p:sp>
       <p:sp>
@@ -15680,7 +15904,10 @@
         </p:spPr>
         <p:txBody>
           <a:bodyPr/>
-          <a:p/>
+          <a:p>
+            <a:pPr/>
+            <a:endParaRPr/>
+          </a:p>
         </p:txBody>
       </p:sp>
       <p:sp>
@@ -15850,7 +16077,10 @@
         </p:spPr>
         <p:txBody>
           <a:bodyPr/>
-          <a:p/>
+          <a:p>
+            <a:pPr/>
+            <a:endParaRPr/>
+          </a:p>
         </p:txBody>
       </p:sp>
       <p:sp>
@@ -16010,7 +16240,10 @@
         </p:spPr>
         <p:txBody>
           <a:bodyPr/>
-          <a:p/>
+          <a:p>
+            <a:pPr/>
+            <a:endParaRPr/>
+          </a:p>
         </p:txBody>
       </p:sp>
       <p:sp>
@@ -16050,7 +16283,10 @@
         </p:spPr>
         <p:txBody>
           <a:bodyPr/>
-          <a:p/>
+          <a:p>
+            <a:pPr/>
+            <a:endParaRPr/>
+          </a:p>
         </p:txBody>
       </p:sp>
       <p:sp>
@@ -16191,7 +16427,10 @@
         </p:spPr>
         <p:txBody>
           <a:bodyPr/>
-          <a:p/>
+          <a:p>
+            <a:pPr/>
+            <a:endParaRPr/>
+          </a:p>
         </p:txBody>
       </p:sp>
       <p:sp>
@@ -16476,7 +16715,10 @@
         </p:spPr>
         <p:txBody>
           <a:bodyPr/>
-          <a:p/>
+          <a:p>
+            <a:pPr/>
+            <a:endParaRPr/>
+          </a:p>
         </p:txBody>
       </p:sp>
       <p:sp>

--- a/docs/AI掌柜-路演PPT/AI掌柜-路演PPT.pptx
+++ b/docs/AI掌柜-路演PPT/AI掌柜-路演PPT.pptx
@@ -5332,7 +5332,7 @@
   <p:cSld>
     <p:spTree>
       <p:nvGrpSpPr>
-        <p:cNvPr id="109" name=""/>
+        <p:cNvPr id="109" name="" descr="&lt;Slide style={{ width: 1280, height: 720, background: '#F6F8FD', padding: '56px 72px', flexDirection: 'column' }}&gt;&#13;&#10;  &lt;Box style={{ height: 96, flexDirection: 'row', justifyContent: 'space-between', alignItems: 'flex-start' }}&gt;&#13;&#10;    &lt;Box style={{ flexDirection: 'column', gap: 8 }}&gt;&#13;&#10;      &lt;Text style={{ fontSize: 34, fontWeight: 'bold', color: '#0C1222' }}&gt;老板每天问的三个问题，现有工具一个都没回答&lt;/Text&gt;&#13;&#10;      &lt;Text style={{ fontSize: 15, color: '#5C6780' }}&gt;不是缺报表，是缺结论和动作&lt;/Text&gt;&#13;&#10;    &lt;/Box&gt;&#13;&#10;    &lt;Box style={{ flexDirection: 'row', alignItems: 'center', gap: 6, padding: '5px 12px', background: '#EEF1FE', border: '1px solid #DDE2F5', borderRadius: 999 }}&gt;&#13;&#10;      &lt;Box style={{ width: 6, height: 6, borderRadius: 3, background: '#4C4DDC' }} /&gt;&#13;&#10;      &lt;Text style={{ fontSize: 12, color: '#4C4DDC', fontWeight: 'bold', letterSpacing: 1 }}&gt;AI 掌柜&lt;/Text&gt;&#13;&#10;    &lt;/Box&gt;&#13;&#10;  &lt;/Box&gt;&#13;&#10;  &lt;Box style={{ width: 72, height: 3, background: '#4C4DDC', borderRadius: 2, marginTop: 2, marginBottom: 12 }} /&gt;&#13;&#10;  &lt;Box style={{ flex: 1, paddingTop: 8 }}&gt;&#13;&#10;    &lt;Box style={{ flexDirection: 'row', gap: 20, height: 300 }}&gt;&#13;&#10;      &lt;Box style={{ flex: 1, background: '#FFFFFF', border: '1px solid #E3E8F5', borderRadius: 14, padding: 26, flexDirection: 'column', justifyContent: 'space-between' }}&gt;&#13;&#10;        &lt;Text style={{ fontSize: 56, fontWeight: 'bold', color: '#4C4DDC' }}&gt;01&lt;/Text&gt;&#13;&#10;        &lt;Text style={{ fontSize: 22, fontWeight: 'bold', color: '#0C1222' }}&gt;今天到底赚没赚&lt;/Text&gt;&#13;&#10;        &lt;Text style={{ fontSize: 15, color: '#5C6780', lineHeight: 1.8 }}&gt;六张报表翻半小时，只知道跌了，&lt;br /&gt;不知道是人少了还是点便宜了。&lt;/Text&gt;&#13;&#10;      &lt;/Box&gt;&#13;&#10;      &lt;Box style={{ flex: 1, background: '#FFFFFF', border: '1px solid #E3E8F5', borderRadius: 14, padding: 26, flexDirection: 'column', justifyContent: 'space-between' }}&gt;&#13;&#10;        &lt;Text style={{ fontSize: 56, fontWeight: 'bold', color: '#4C4DDC' }}&gt;02&lt;/Text&gt;&#13;&#10;        &lt;Text style={{ fontSize: 22, fontWeight: 'bold', color: '#0C1222' }}&gt;明天该买多少&lt;/Text&gt;&#13;&#10;        &lt;Text style={{ fontSize: 15, color: '#5C6780', lineHeight: 1.8 }}&gt;采购靠经验：缺货和压货同时发生，&lt;br /&gt;这套数据里最紧的食材只够 1.5 天。&lt;/Text&gt;&#13;&#10;      &lt;/Box&gt;&#13;&#10;      &lt;Box style={{ flex: 1, background: '#FFFFFF', border: '1px solid #E3E8F5', borderRadius: 14, padding: 26, flexDirection: 'column', justifyContent: 'space-between' }}&gt;&#13;&#10;        &lt;Text style={{ fontSize: 56, fontWeight: 'bold', color: '#4C4DDC' }}&gt;03&lt;/Text&gt;&#13;&#10;        &lt;Text style={{ fontSize: 22, fontWeight: 'bold', color: '#0C1222' }}&gt;哪道菜在赔钱&lt;/Text&gt;&#13;&#10;        &lt;Text style={{ fontSize: 15, color: '#5C6780', lineHeight: 1.8 }}&gt;207 道菜只有 107 道算得清成本，&lt;br /&gt;卖得越多，可能亏得越多。&lt;/Text&gt;&#13;&#10;      &lt;/Box&gt;&#13;&#10;    &lt;/Box&gt;&#13;&#10;    &lt;Box style={{ marginTop: 34, paddingTop: 24, borderTop: '1px solid #E3E8F5', flexDirection: 'row', alignItems: 'center', gap: 16 }}&gt;&#13;&#10;      &lt;Box style={{ width: 6, height: 28, background: '#4C4DDC', borderRadius: 3 }} /&gt;&#13;&#10;      &lt;Text style={{ fontSize: 24, color: '#0C1222' }}&gt;中小餐饮不缺数据，缺一个&lt;Text style={{ fontSize: 24, fontWeight: 'bold', color: '#4C4DDC' }}&gt;能替他做决定&lt;/Text&gt;的角色。&lt;/Text&gt;&#13;&#10;    &lt;/Box&gt;&#13;&#10;  &lt;/Box&gt;&#13;&#10;  &lt;Box style={{ height: 36, flexDirection: 'row', justifyContent: 'space-between', alignItems: 'flex-end' }}&gt;&#13;&#10;    &lt;Text style={{ fontSize: 12, color: '#8A93A8' }}&gt;2026 武汉 1024 · 产业应用赛道&lt;/Text&gt;&#13;&#10;    &lt;Text style={{ fontSize: 12, color: '#8A93A8' }}&gt;02 / 12&lt;/Text&gt;&#13;&#10;  &lt;/Box&gt;&#13;&#10;&lt;/Slide&gt;"/>
         <p:cNvGrpSpPr/>
         <p:nvPr/>
       </p:nvGrpSpPr>
@@ -5365,10 +5365,7 @@
         </p:spPr>
         <p:txBody>
           <a:bodyPr/>
-          <a:p>
-            <a:pPr/>
-            <a:endParaRPr/>
-          </a:p>
+          <a:p/>
         </p:txBody>
       </p:sp>
       <p:sp>
@@ -5469,10 +5466,7 @@
         </p:spPr>
         <p:txBody>
           <a:bodyPr/>
-          <a:p>
-            <a:pPr/>
-            <a:endParaRPr/>
-          </a:p>
+          <a:p/>
         </p:txBody>
       </p:sp>
       <p:sp>
@@ -5498,10 +5492,7 @@
         </p:spPr>
         <p:txBody>
           <a:bodyPr/>
-          <a:p>
-            <a:pPr/>
-            <a:endParaRPr/>
-          </a:p>
+          <a:p/>
         </p:txBody>
       </p:sp>
       <p:sp>
@@ -5572,10 +5563,7 @@
         </p:spPr>
         <p:txBody>
           <a:bodyPr/>
-          <a:p>
-            <a:pPr/>
-            <a:endParaRPr/>
-          </a:p>
+          <a:p/>
         </p:txBody>
       </p:sp>
       <p:sp>
@@ -5606,10 +5594,7 @@
         </p:spPr>
         <p:txBody>
           <a:bodyPr/>
-          <a:p>
-            <a:pPr/>
-            <a:endParaRPr/>
-          </a:p>
+          <a:p/>
         </p:txBody>
       </p:sp>
       <p:sp>
@@ -5763,10 +5748,7 @@
         </p:spPr>
         <p:txBody>
           <a:bodyPr/>
-          <a:p>
-            <a:pPr/>
-            <a:endParaRPr/>
-          </a:p>
+          <a:p/>
         </p:txBody>
       </p:sp>
       <p:sp>
@@ -5886,7 +5868,7 @@
                 <a:latin typeface="Microsoft YaHei"/>
                 <a:ea typeface="Microsoft YaHei"/>
               </a:rPr>
-              <a:t>这套数据里</a:t>
+              <a:t>这套数据里最紧的食材只够</a:t>
             </a:r>
             <a:r>
               <a:rPr lang="en-US" sz="1125">
@@ -5896,27 +5878,7 @@
                 <a:latin typeface="Microsoft YaHei"/>
                 <a:ea typeface="Microsoft YaHei"/>
               </a:rPr>
-              <a:t xml:space="preserve"> 5 </a:t>
-            </a:r>
-            <a:r>
-              <a:rPr lang="zh-CN" sz="1125">
-                <a:solidFill>
-                  <a:srgbClr val="5C6780"/>
-                </a:solidFill>
-                <a:latin typeface="Microsoft YaHei"/>
-                <a:ea typeface="Microsoft YaHei"/>
-              </a:rPr>
-              <a:t>种食材只够</a:t>
-            </a:r>
-            <a:r>
-              <a:rPr lang="en-US" sz="1125">
-                <a:solidFill>
-                  <a:srgbClr val="5C6780"/>
-                </a:solidFill>
-                <a:latin typeface="Microsoft YaHei"/>
-                <a:ea typeface="Microsoft YaHei"/>
-              </a:rPr>
-              <a:t xml:space="preserve"> 2 </a:t>
+              <a:t xml:space="preserve"> 1.5 </a:t>
             </a:r>
             <a:r>
               <a:rPr lang="zh-CN" sz="1125">
@@ -5960,10 +5922,7 @@
         </p:spPr>
         <p:txBody>
           <a:bodyPr/>
-          <a:p>
-            <a:pPr/>
-            <a:endParaRPr/>
-          </a:p>
+          <a:p/>
         </p:txBody>
       </p:sp>
       <p:sp>
@@ -6156,10 +6115,7 @@
         </p:spPr>
         <p:txBody>
           <a:bodyPr/>
-          <a:p>
-            <a:pPr/>
-            <a:endParaRPr/>
-          </a:p>
+          <a:p/>
         </p:txBody>
       </p:sp>
       <p:sp>
@@ -6185,10 +6141,7 @@
         </p:spPr>
         <p:txBody>
           <a:bodyPr/>
-          <a:p>
-            <a:pPr/>
-            <a:endParaRPr/>
-          </a:p>
+          <a:p/>
         </p:txBody>
       </p:sp>
       <p:sp>
@@ -8918,7 +8871,7 @@
   <p:cSld>
     <p:spTree>
       <p:nvGrpSpPr>
-        <p:cNvPr id="189" name="" descr="&lt;Slide style={{ width: 1280, height: 720, background: '#F6F8FD', padding: '56px 72px', flexDirection: 'column' }}&gt;&#13;&#10;  &lt;Box style={{ height: 96, flexDirection: 'row', justifyContent: 'space-between', alignItems: 'flex-start' }}&gt;&#13;&#10;    &lt;Box style={{ flexDirection: 'column', gap: 8 }}&gt;&#13;&#10;      &lt;Text style={{ fontSize: 34, fontWeight: 'bold', color: '#0C1222' }}&gt;现场三分钟，只走一条路径&lt;/Text&gt;&#13;&#10;      &lt;Text style={{ fontSize: 15, color: '#5C6780' }}&gt;上午 09:00，老板打开电脑后的真实操作顺序&lt;/Text&gt;&#13;&#10;    &lt;/Box&gt;&#13;&#10;    &lt;Box style={{ flexDirection: 'row', alignItems: 'center', gap: 6, padding: '5px 12px', background: '#EEF1FE', border: '1px solid #DDE2F5', borderRadius: 999 }}&gt;&#13;&#10;      &lt;Box style={{ width: 6, height: 6, borderRadius: 3, background: '#4C4DDC' }} /&gt;&#13;&#10;      &lt;Text style={{ fontSize: 12, color: '#4C4DDC', fontWeight: 'bold', letterSpacing: 1 }}&gt;AI 掌柜&lt;/Text&gt;&#13;&#10;    &lt;/Box&gt;&#13;&#10;  &lt;/Box&gt;&#13;&#10;  &lt;Box style={{ width: 72, height: 3, background: '#4C4DDC', borderRadius: 2, marginTop: 2, marginBottom: 12 }} /&gt;&#13;&#10;  &lt;Box style={{ flex: 1, paddingTop: 8 }}&gt;&#13;&#10;    &lt;Box style={{ flexDirection: 'row', gap: 16, height: 205 }}&gt;&#13;&#10;      &lt;Box style={{ flex: 1, background: '#FFFFFF', border: '1px solid #E3E8F5', borderRadius: 14, padding: 24, flexDirection: 'column', justifyContent: 'space-between' }}&gt;&#13;&#10;        &lt;Text style={{ fontSize: 12, color: '#4C4DDC', letterSpacing: 2 }}&gt;第 1 步 · 30 秒&lt;/Text&gt;&#13;&#10;        &lt;Text style={{ fontSize: 21, fontWeight: 'bold', color: '#0C1222', marginTop: 6 }}&gt;打开驾驶舱&lt;/Text&gt;&#13;&#10;        &lt;Text style={{ fontSize: 14, color: '#5C6780', lineHeight: 1.8 }}&gt;只有 3 件事：&lt;br /&gt;营收跌 20%、3 道菜滞销、&lt;br /&gt;牛腩只够 1.5 天。&lt;/Text&gt;&#13;&#10;      &lt;/Box&gt;&#13;&#10;      &lt;Box style={{ flex: 1, background: '#FFFFFF', border: '1px solid #E3E8F5', borderRadius: 14, padding: 24, flexDirection: 'column', justifyContent: 'space-between' }}&gt;&#13;&#10;        &lt;Text style={{ fontSize: 12, color: '#4C4DDC', letterSpacing: 2 }}&gt;第 2 步 · 60 秒&lt;/Text&gt;&#13;&#10;        &lt;Text style={{ fontSize: 21, fontWeight: 'bold', color: '#0C1222', marginTop: 6 }}&gt;点「营收下滑」&lt;/Text&gt;&#13;&#10;        &lt;Text style={{ fontSize: 14, color: '#5C6780', lineHeight: 1.8 }}&gt;拆成客流 −18%、客单价 −3%，&lt;br /&gt;结论：人少了，&lt;br /&gt;不是点便宜了。&lt;/Text&gt;&#13;&#10;      &lt;/Box&gt;&#13;&#10;      &lt;Box style={{ flex: 1, background: '#FFFFFF', border: '1px solid #E3E8F5', borderRadius: 14, padding: 24, flexDirection: 'column', justifyContent: 'space-between' }}&gt;&#13;&#10;        &lt;Text style={{ fontSize: 12, color: '#4C4DDC', letterSpacing: 2 }}&gt;第 3 步 · 60 秒&lt;/Text&gt;&#13;&#10;        &lt;Text style={{ fontSize: 21, fontWeight: 'bold', color: '#0C1222', marginTop: 6 }}&gt;点「缺货」&lt;/Text&gt;&#13;&#10;        &lt;Text style={{ fontSize: 14, color: '#5C6780', lineHeight: 1.8 }}&gt;按 7 天用量生成采购单&lt;br /&gt;→ 确认入库&lt;br /&gt;→ 库存与流水同步。&lt;/Text&gt;&#13;&#10;      &lt;/Box&gt;&#13;&#10;    &lt;/Box&gt;&#13;&#10;    &lt;Box style={{ marginTop: 20, background: '#EEF1FE', border: '1px solid #C9CDF6', borderRadius: 14, padding: '20px 24px', flexDirection: 'row', alignItems: 'center', gap: 24 }}&gt;&#13;&#10;      &lt;Text style={{ fontSize: 13, color: '#4C4DDC', letterSpacing: 2, width: 132 }}&gt;加演 · 宴席排菜&lt;/Text&gt;&#13;&#10;      &lt;Box style={{ flexDirection: 'column', gap: 6 }}&gt;&#13;&#10;        &lt;Text style={{ fontSize: 19, fontWeight: 'bold', color: '#0C1222' }}&gt;「8 人 / 人均 150」&lt;/Text&gt;&#13;&#10;        &lt;Text style={{ fontSize: 13, color: '#5C6780' }}&gt;按中餐宴席结构自动配一桌菜 → 一键成单 → 后厨立刻看到，可人工增减。&lt;/Text&gt;&#13;&#10;      &lt;/Box&gt;&#13;&#10;    &lt;/Box&gt;&#13;&#10;    &lt;Box style={{ marginTop: 20, paddingTop: 16, borderTop: '1px solid #E3E8F5', flexDirection: 'row', gap: 0 }}&gt;&#13;&#10;      &lt;Box style={{ flex: 1, flexDirection: 'column', gap: 3 }}&gt;&#13;&#10;        &lt;Text style={{ fontSize: 24, fontWeight: 'bold', color: '#0C1222' }}&gt;1 张&lt;/Text&gt;&#13;&#10;        &lt;Text style={{ fontSize: 12, color: '#5C6780' }}&gt;采购单，人工确认后才入库&lt;/Text&gt;&#13;&#10;      &lt;/Box&gt;&#13;&#10;      &lt;Box style={{ flex: 1, flexDirection: 'column', gap: 3 }}&gt;&#13;&#10;        &lt;Text style={{ fontSize: 24, fontWeight: 'bold', color: '#0C1222' }}&gt;7 种&lt;/Text&gt;&#13;&#10;        &lt;Text style={{ fontSize: 12, color: '#5C6780' }}&gt;食材库存与流水同步更新&lt;/Text&gt;&#13;&#10;      &lt;/Box&gt;&#13;&#10;      &lt;Box style={{ flex: 1, flexDirection: 'column', gap: 3 }}&gt;&#13;&#10;        &lt;Text style={{ fontSize: 24, fontWeight: 'bold', color: '#0C1222' }}&gt;3 条&lt;/Text&gt;&#13;&#10;        &lt;Text style={{ fontSize: 12, color: '#5C6780' }}&gt;操作留痕，调价与主推可回滚&lt;/Text&gt;&#13;&#10;      &lt;/Box&gt;&#13;&#10;      &lt;Box style={{ flex: 1.2, flexDirection: 'column', gap: 3 }}&gt;&#13;&#10;        &lt;Text style={{ fontSize: 24, fontWeight: 'bold', color: '#4C4DDC' }}&gt;0 次&lt;/Text&gt;&#13;&#10;        &lt;Text style={{ fontSize: 12, color: '#5C6780' }}&gt;页面跳转 —— 决策与执行同屏&lt;/Text&gt;&#13;&#10;      &lt;/Box&gt;&#13;&#10;    &lt;/Box&gt;&#13;&#10;  &lt;/Box&gt;&#13;&#10;  &lt;Box style={{ height: 36, flexDirection: 'row', justifyContent: 'space-between', alignItems: 'flex-end' }}&gt;&#13;&#10;    &lt;Text style={{ fontSize: 12, color: '#8A93A8' }}&gt;2026 武汉 1024 · 产业应用赛道&lt;/Text&gt;&#13;&#10;    &lt;Text style={{ fontSize: 12, color: '#8A93A8' }}&gt;05 / 12&lt;/Text&gt;&#13;&#10;  &lt;/Box&gt;&#13;&#10;&lt;/Slide&gt;"/>
+        <p:cNvPr id="189" name=""/>
         <p:cNvGrpSpPr/>
         <p:nvPr/>
       </p:nvGrpSpPr>
@@ -8951,7 +8904,10 @@
         </p:spPr>
         <p:txBody>
           <a:bodyPr/>
-          <a:p/>
+          <a:p>
+            <a:pPr/>
+            <a:endParaRPr/>
+          </a:p>
         </p:txBody>
       </p:sp>
       <p:sp>
@@ -9072,7 +9028,10 @@
         </p:spPr>
         <p:txBody>
           <a:bodyPr/>
-          <a:p/>
+          <a:p>
+            <a:pPr/>
+            <a:endParaRPr/>
+          </a:p>
         </p:txBody>
       </p:sp>
       <p:sp>
@@ -9098,7 +9057,10 @@
         </p:spPr>
         <p:txBody>
           <a:bodyPr/>
-          <a:p/>
+          <a:p>
+            <a:pPr/>
+            <a:endParaRPr/>
+          </a:p>
         </p:txBody>
       </p:sp>
       <p:sp>
@@ -9169,7 +9131,10 @@
         </p:spPr>
         <p:txBody>
           <a:bodyPr/>
-          <a:p/>
+          <a:p>
+            <a:pPr/>
+            <a:endParaRPr/>
+          </a:p>
         </p:txBody>
       </p:sp>
       <p:sp>
@@ -9200,7 +9165,10 @@
         </p:spPr>
         <p:txBody>
           <a:bodyPr/>
-          <a:p/>
+          <a:p>
+            <a:pPr/>
+            <a:endParaRPr/>
+          </a:p>
         </p:txBody>
       </p:sp>
       <p:sp>
@@ -9492,7 +9460,10 @@
         </p:spPr>
         <p:txBody>
           <a:bodyPr/>
-          <a:p/>
+          <a:p>
+            <a:pPr/>
+            <a:endParaRPr/>
+          </a:p>
         </p:txBody>
       </p:sp>
       <p:sp>
@@ -9744,7 +9715,10 @@
         </p:spPr>
         <p:txBody>
           <a:bodyPr/>
-          <a:p/>
+          <a:p>
+            <a:pPr/>
+            <a:endParaRPr/>
+          </a:p>
         </p:txBody>
       </p:sp>
       <p:sp>
@@ -9996,7 +9970,10 @@
         </p:spPr>
         <p:txBody>
           <a:bodyPr/>
-          <a:p/>
+          <a:p>
+            <a:pPr/>
+            <a:endParaRPr/>
+          </a:p>
         </p:txBody>
       </p:sp>
       <p:sp>
@@ -10261,7 +10238,10 @@
         </p:spPr>
         <p:txBody>
           <a:bodyPr/>
-          <a:p/>
+          <a:p>
+            <a:pPr/>
+            <a:endParaRPr/>
+          </a:p>
         </p:txBody>
       </p:sp>
       <p:sp>
@@ -15220,7 +15200,7 @@
   <p:cSld>
     <p:spTree>
       <p:nvGrpSpPr>
-        <p:cNvPr id="323" name=""/>
+        <p:cNvPr id="323" name="" descr="&lt;Slide style={{ width: 1280, height: 720, background: '#F6F8FD', padding: '56px 72px', flexDirection: 'column' }}&gt;&#10;  &lt;Box style={{ height: 96, flexDirection: 'row', justifyContent: 'space-between', alignItems: 'flex-start' }}&gt;&#10;    &lt;Box style={{ flexDirection: 'column', gap: 8 }}&gt;&#10;      &lt;Text style={{ fontSize: 34, fontWeight: 'bold', color: '#0C1222' }}&gt;先算清代价，再谈智能&lt;/Text&gt;&#10;      &lt;Text style={{ fontSize: 15, color: '#5C6780' }}&gt;左边是它在这套 180 天数据里真找出来的，右边是按建议执行后的测算&lt;/Text&gt;&#10;    &lt;/Box&gt;&#10;    &lt;Box style={{ flexDirection: 'row', alignItems: 'center', gap: 6, padding: '5px 12px', background: '#EEF1FE', border: '1px solid #DDE2F5', borderRadius: 999 }}&gt;&#10;      &lt;Box style={{ width: 6, height: 6, borderRadius: 3, background: '#4C4DDC' }} /&gt;&#10;      &lt;Text style={{ fontSize: 12, color: '#4C4DDC', fontWeight: 'bold', letterSpacing: 1 }}&gt;AI 掌柜&lt;/Text&gt;&#10;    &lt;/Box&gt;&#10;  &lt;/Box&gt;&#10;  &lt;Box style={{ width: 72, height: 3, background: '#4C4DDC', borderRadius: 2, marginTop: 2, marginBottom: 12 }} /&gt;&#10;  &lt;Box style={{ flex: 1, paddingTop: 8 }}&gt;&#10;    &lt;Box style={{ flexDirection: 'row', gap: 24 }}&gt;&#10;      &lt;Box style={{ flex: 1.15, flexDirection: 'column' }}&gt;&#10;        &lt;Text style={{ fontSize: 13, color: '#5C6780', letterSpacing: 1 }}&gt;实测 · 系统自己发现的五件事&lt;/Text&gt;&#10;        &lt;Box style={{ marginTop: 14, flexDirection: 'column', gap: 0 }}&gt;&#10;          &lt;Box style={{ paddingTop: 12, paddingBottom: 12, borderTop: '1px solid #E3E8F5', flexDirection: 'row', alignItems: 'baseline' }}&gt;&#10;            &lt;Text style={{ fontSize: 26, fontWeight: 'bold', color: '#4C4DDC', width: 96 }}&gt;10.6%&lt;/Text&gt;&#10;            &lt;Text style={{ fontSize: 14, color: '#0C1222' }}&gt;近 7 天折扣率，比前 30 天的 8.4% 高 2.2 个点&lt;/Text&gt;&#10;          &lt;/Box&gt;&#10;          &lt;Box style={{ paddingTop: 12, paddingBottom: 12, borderTop: '1px solid #E3E8F5', flexDirection: 'row', alignItems: 'baseline' }}&gt;&#10;            &lt;Text style={{ fontSize: 26, fontWeight: 'bold', color: '#4C4DDC', width: 96 }}&gt;1,476&lt;/Text&gt;&#10;            &lt;Text style={{ fontSize: 14, color: '#0C1222' }}&gt;元 · 按原折扣水平本可少让的金额&lt;/Text&gt;&#10;          &lt;/Box&gt;&#10;          &lt;Box style={{ paddingTop: 12, paddingBottom: 12, borderTop: '1px solid #E3E8F5', flexDirection: 'row', alignItems: 'baseline' }}&gt;&#10;            &lt;Text style={{ fontSize: 26, fontWeight: 'bold', color: '#4C4DDC', width: 96 }}&gt;20 道&lt;/Text&gt;&#10;            &lt;Text style={{ fontSize: 14, color: '#0C1222' }}&gt;菜连续 3 天 0 销量，占在售 9.7%&lt;/Text&gt;&#10;          &lt;/Box&gt;&#10;          &lt;Box style={{ paddingTop: 12, paddingBottom: 12, borderTop: '1px solid #E3E8F5', flexDirection: 'row', alignItems: 'baseline' }}&gt;&#10;            &lt;Text style={{ fontSize: 26, fontWeight: 'bold', color: '#4C4DDC', width: 96 }}&gt;1 种&lt;/Text&gt;&#10;            &lt;Text style={{ fontSize: 14, color: '#0C1222' }}&gt;食材可支撑不足 2 天（基围虾只剩 1.5 天）&lt;/Text&gt;&#10;          &lt;/Box&gt;&#10;          &lt;Box style={{ paddingTop: 12, paddingBottom: 12, borderTop: '1px solid #E3E8F5', borderBottom: '1px solid #E3E8F5', flexDirection: 'row', alignItems: 'baseline' }}&gt;&#10;            &lt;Text style={{ fontSize: 26, fontWeight: 'bold', color: '#4C4DDC', width: 96 }}&gt;57.8%&lt;/Text&gt;&#10;            &lt;Text style={{ fontSize: 14, color: '#0C1222' }}&gt;近 30 天毛利率，比目标低 2.2 个点&lt;/Text&gt;&#10;          &lt;/Box&gt;&#10;        &lt;/Box&gt;&#10;      &lt;/Box&gt;&#10;      &lt;Box style={{ flex: 1, background: '#EEF1FE', border: '1px solid #C9CDF6', borderRadius: 14, padding: 30, flexDirection: 'column', gap: 18, justifyContent: 'flex-start' }}&gt;&#10;        &lt;Box style={{ flexDirection: 'column', gap: 6 }}&gt;&#10;          &lt;Text style={{ fontSize: 13, color: '#4C4DDC', letterSpacing: 1 }}&gt;测算 · 补齐这 2.2 个点&lt;/Text&gt;&#10;          &lt;Text style={{ fontSize: 56, fontWeight: 'bold', color: '#0C1222', letterSpacing: -1 }}&gt;+9.0&lt;span style={{ fontSize: 22 }}&gt; 万/年&lt;/span&gt;&lt;/Text&gt;&#10;          &lt;Text style={{ fontSize: 13, color: '#5C6780' }}&gt;近 30 天营收 33.1 万 × 2.2pt × 12 个月&lt;/Text&gt;&#10;        &lt;/Box&gt;&#10;        &lt;Box style={{ flexDirection: 'column', gap: 8, marginTop: 6, paddingTop: 16, borderTop: '1px solid #3A3F63' }}&gt;&#10;          &lt;Text style={{ fontSize: 13, color: '#0C1222' }}&gt;怎么补：&lt;/Text&gt;&#10;          &lt;Text style={{ fontSize: 13, color: '#5C6780', lineHeight: 1.8 }}&gt;① 3 道瘦狗菜调价 5%~15%&lt;br /&gt;② 20 道滞销菜组套餐或下架&lt;br /&gt;③ 折扣收回 2 个点&lt;/Text&gt;&#10;        &lt;/Box&gt;&#10;        &lt;Text style={{ fontSize: 11, color: '#6B7490', lineHeight: 1.6, marginTop: 4 }}&gt;&#10;          左列全部由 SQL 从 180 天数据算出，脚本可复现；右侧为按当前规模的线性测算，不是承诺值。&#10;        &lt;/Text&gt;&#10;      &lt;/Box&gt;&#10;    &lt;/Box&gt;&#10;  &lt;/Box&gt;&#10;  &lt;Box style={{ height: 36, flexDirection: 'row', justifyContent: 'space-between', alignItems: 'flex-end' }}&gt;&#10;    &lt;Text style={{ fontSize: 12, color: '#8A93A8' }}&gt;2026 武汉 1024 · 产业应用赛道&lt;/Text&gt;&#10;    &lt;Text style={{ fontSize: 12, color: '#8A93A8' }}&gt;09 / 12&lt;/Text&gt;&#10;  &lt;/Box&gt;&#10;&lt;/Slide&gt;"/>
         <p:cNvGrpSpPr/>
         <p:nvPr/>
       </p:nvGrpSpPr>
@@ -15253,10 +15233,7 @@
         </p:spPr>
         <p:txBody>
           <a:bodyPr/>
-          <a:p>
-            <a:pPr/>
-            <a:endParaRPr/>
-          </a:p>
+          <a:p/>
         </p:txBody>
       </p:sp>
       <p:sp>
@@ -15377,10 +15354,7 @@
         </p:spPr>
         <p:txBody>
           <a:bodyPr/>
-          <a:p>
-            <a:pPr/>
-            <a:endParaRPr/>
-          </a:p>
+          <a:p/>
         </p:txBody>
       </p:sp>
       <p:sp>
@@ -15406,10 +15380,7 @@
         </p:spPr>
         <p:txBody>
           <a:bodyPr/>
-          <a:p>
-            <a:pPr/>
-            <a:endParaRPr/>
-          </a:p>
+          <a:p/>
         </p:txBody>
       </p:sp>
       <p:sp>
@@ -15480,10 +15451,7 @@
         </p:spPr>
         <p:txBody>
           <a:bodyPr/>
-          <a:p>
-            <a:pPr/>
-            <a:endParaRPr/>
-          </a:p>
+          <a:p/>
         </p:txBody>
       </p:sp>
       <p:sp>
@@ -15578,10 +15546,7 @@
         </p:spPr>
         <p:txBody>
           <a:bodyPr/>
-          <a:p>
-            <a:pPr/>
-            <a:endParaRPr/>
-          </a:p>
+          <a:p/>
         </p:txBody>
       </p:sp>
       <p:sp>
@@ -15613,7 +15578,7 @@
                 <a:latin typeface="Microsoft YaHei"/>
                 <a:ea typeface="Microsoft YaHei"/>
               </a:rPr>
-              <a:t>11.1%</a:t>
+              <a:t>10.6%</a:t>
             </a:r>
             <a:endParaRPr/>
           </a:p>
@@ -15698,7 +15663,7 @@
                 <a:latin typeface="Microsoft YaHei"/>
                 <a:ea typeface="Microsoft YaHei"/>
               </a:rPr>
-              <a:t xml:space="preserve"> 8.8% </a:t>
+              <a:t xml:space="preserve"> 8.4% </a:t>
             </a:r>
             <a:r>
               <a:rPr lang="zh-CN" sz="1050">
@@ -15718,7 +15683,7 @@
                 <a:latin typeface="Microsoft YaHei"/>
                 <a:ea typeface="Microsoft YaHei"/>
               </a:rPr>
-              <a:t xml:space="preserve"> 2.3 </a:t>
+              <a:t xml:space="preserve"> 2.2 </a:t>
             </a:r>
             <a:r>
               <a:rPr lang="zh-CN" sz="1050">
@@ -15771,10 +15736,7 @@
         </p:spPr>
         <p:txBody>
           <a:bodyPr/>
-          <a:p>
-            <a:pPr/>
-            <a:endParaRPr/>
-          </a:p>
+          <a:p/>
         </p:txBody>
       </p:sp>
       <p:sp>
@@ -15806,7 +15768,7 @@
                 <a:latin typeface="Microsoft YaHei"/>
                 <a:ea typeface="Microsoft YaHei"/>
               </a:rPr>
-              <a:t>1,899</a:t>
+              <a:t>1,476</a:t>
             </a:r>
             <a:endParaRPr/>
           </a:p>
@@ -15904,10 +15866,7 @@
         </p:spPr>
         <p:txBody>
           <a:bodyPr/>
-          <a:p>
-            <a:pPr/>
-            <a:endParaRPr/>
-          </a:p>
+          <a:p/>
         </p:txBody>
       </p:sp>
       <p:sp>
@@ -15939,7 +15898,7 @@
                 <a:latin typeface="Microsoft YaHei"/>
                 <a:ea typeface="Microsoft YaHei"/>
               </a:rPr>
-              <a:t xml:space="preserve">19 </a:t>
+              <a:t xml:space="preserve">20 </a:t>
             </a:r>
             <a:r>
               <a:rPr lang="zh-CN" sz="1950" b="1">
@@ -16034,7 +15993,7 @@
                 <a:latin typeface="Microsoft YaHei"/>
                 <a:ea typeface="Microsoft YaHei"/>
               </a:rPr>
-              <a:t xml:space="preserve"> 9.2%</a:t>
+              <a:t xml:space="preserve"> 9.7%</a:t>
             </a:r>
             <a:endParaRPr/>
           </a:p>
@@ -16077,10 +16036,7 @@
         </p:spPr>
         <p:txBody>
           <a:bodyPr/>
-          <a:p>
-            <a:pPr/>
-            <a:endParaRPr/>
-          </a:p>
+          <a:p/>
         </p:txBody>
       </p:sp>
       <p:sp>
@@ -16112,7 +16068,7 @@
                 <a:latin typeface="Microsoft YaHei"/>
                 <a:ea typeface="Microsoft YaHei"/>
               </a:rPr>
-              <a:t xml:space="preserve">5 </a:t>
+              <a:t xml:space="preserve">1 </a:t>
             </a:r>
             <a:r>
               <a:rPr lang="zh-CN" sz="1950" b="1">
@@ -16240,10 +16196,7 @@
         </p:spPr>
         <p:txBody>
           <a:bodyPr/>
-          <a:p>
-            <a:pPr/>
-            <a:endParaRPr/>
-          </a:p>
+          <a:p/>
         </p:txBody>
       </p:sp>
       <p:sp>
@@ -16283,10 +16236,7 @@
         </p:spPr>
         <p:txBody>
           <a:bodyPr/>
-          <a:p>
-            <a:pPr/>
-            <a:endParaRPr/>
-          </a:p>
+          <a:p/>
         </p:txBody>
       </p:sp>
       <p:sp>
@@ -16318,7 +16268,7 @@
                 <a:latin typeface="Microsoft YaHei"/>
                 <a:ea typeface="Microsoft YaHei"/>
               </a:rPr>
-              <a:t>57.6%</a:t>
+              <a:t>57.8%</a:t>
             </a:r>
             <a:endParaRPr/>
           </a:p>
@@ -16383,7 +16333,7 @@
                 <a:latin typeface="Microsoft YaHei"/>
                 <a:ea typeface="Microsoft YaHei"/>
               </a:rPr>
-              <a:t xml:space="preserve"> 2.4 </a:t>
+              <a:t xml:space="preserve"> 2.2 </a:t>
             </a:r>
             <a:r>
               <a:rPr lang="zh-CN" sz="1050">
@@ -16427,10 +16377,7 @@
         </p:spPr>
         <p:txBody>
           <a:bodyPr/>
-          <a:p>
-            <a:pPr/>
-            <a:endParaRPr/>
-          </a:p>
+          <a:p/>
         </p:txBody>
       </p:sp>
       <p:sp>
@@ -16492,7 +16439,7 @@
                 <a:latin typeface="Microsoft YaHei"/>
                 <a:ea typeface="Microsoft YaHei"/>
               </a:rPr>
-              <a:t xml:space="preserve"> 2.4 </a:t>
+              <a:t xml:space="preserve"> 2.2 </a:t>
             </a:r>
             <a:r>
               <a:rPr lang="zh-CN" sz="975" spc="75">
@@ -16537,7 +16484,7 @@
                 <a:latin typeface="Microsoft YaHei"/>
                 <a:ea typeface="Microsoft YaHei"/>
               </a:rPr>
-              <a:t>+9.4</a:t>
+              <a:t>+9.0</a:t>
             </a:r>
             <a:r>
               <a:rPr lang="en-US" sz="1650" b="1" spc="-75">
@@ -16642,7 +16589,7 @@
                 <a:latin typeface="Microsoft YaHei"/>
                 <a:ea typeface="Microsoft YaHei"/>
               </a:rPr>
-              <a:t xml:space="preserve"> 32.5 </a:t>
+              <a:t xml:space="preserve"> 33.1 </a:t>
             </a:r>
             <a:r>
               <a:rPr lang="zh-CN" sz="975">
@@ -16662,7 +16609,7 @@
                 <a:latin typeface="Microsoft YaHei"/>
                 <a:ea typeface="Microsoft YaHei"/>
               </a:rPr>
-              <a:t xml:space="preserve"> × 2.4pt × 12 </a:t>
+              <a:t xml:space="preserve"> × 2.2pt × 12 </a:t>
             </a:r>
             <a:r>
               <a:rPr lang="zh-CN" sz="975">
@@ -16715,10 +16662,7 @@
         </p:spPr>
         <p:txBody>
           <a:bodyPr/>
-          <a:p>
-            <a:pPr/>
-            <a:endParaRPr/>
-          </a:p>
+          <a:p/>
         </p:txBody>
       </p:sp>
       <p:sp>
@@ -16823,7 +16767,7 @@
                 <a:latin typeface="Microsoft YaHei"/>
                 <a:ea typeface="Microsoft YaHei"/>
               </a:rPr>
-              <a:t xml:space="preserve">② 19 </a:t>
+              <a:t xml:space="preserve">② 20 </a:t>
             </a:r>
             <a:r>
               <a:rPr lang="zh-CN" sz="975">

--- a/docs/AI掌柜-路演PPT/AI掌柜-路演PPT.pptx
+++ b/docs/AI掌柜-路演PPT/AI掌柜-路演PPT.pptx
@@ -7433,7 +7433,7 @@
   <p:cSld>
     <p:spTree>
       <p:nvGrpSpPr>
-        <p:cNvPr id="160" name=""/>
+        <p:cNvPr id="160" name="" descr="&lt;Slide style={{ width: 1280, height: 720, background: '#F6F8FD', padding: '56px 72px', flexDirection: 'column' }}&gt;&#13;&#10;  &lt;Box style={{ height: 96, flexDirection: 'row', justifyContent: 'space-between', alignItems: 'flex-start' }}&gt;&#13;&#10;    &lt;Box style={{ flexDirection: 'column', gap: 8 }}&gt;&#13;&#10;      &lt;Text style={{ fontSize: 34, fontWeight: 'bold', color: '#0C1222' }}&gt;四块能力，缺一块都落不了地&lt;/Text&gt;&#13;&#10;      &lt;Text style={{ fontSize: 15, color: '#5C6780' }}&gt;看得懂、算得准、动得了、说得清&lt;/Text&gt;&#13;&#10;    &lt;/Box&gt;&#13;&#10;    &lt;Box style={{ flexDirection: 'row', alignItems: 'center', gap: 6, padding: '5px 12px', background: '#EEF1FE', border: '1px solid #DDE2F5', borderRadius: 999 }}&gt;&#13;&#10;      &lt;Box style={{ width: 6, height: 6, borderRadius: 3, background: '#4C4DDC' }} /&gt;&#13;&#10;      &lt;Text style={{ fontSize: 12, color: '#4C4DDC', fontWeight: 'bold', letterSpacing: 1 }}&gt;AI 掌柜&lt;/Text&gt;&#13;&#10;    &lt;/Box&gt;&#13;&#10;  &lt;/Box&gt;&#13;&#10;  &lt;Box style={{ width: 72, height: 3, background: '#4C4DDC', borderRadius: 2, marginTop: 2, marginBottom: 12 }} /&gt;&#13;&#10;  &lt;Box style={{ flex: 1, paddingTop: 8 }}&gt;&#13;&#10;    &lt;Box style={{ flexDirection: 'row', gap: 18, height: 250 }}&gt;&#13;&#10;      &lt;Box style={{ flex: 1, background: '#FFFFFF', border: '1px solid #E3E8F5', borderRadius: 14, padding: 24 }}&gt;&#13;&#10;        &lt;Text style={{ fontSize: 20, fontWeight: 'bold', color: '#4C4DDC' }}&gt;看得懂&lt;/Text&gt;&#13;&#10;        &lt;Text style={{ fontSize: 15, color: '#0C1222', marginTop: 12, lineHeight: 1.75 }}&gt;营收 · 客流 · 毛利&lt;br /&gt;时段 · 翻台 · 会员结构&lt;/Text&gt;&#13;&#10;        &lt;Text style={{ fontSize: 13, color: '#5C6780', marginTop: 16 }}&gt;180 天 / 6,803 单&lt;/Text&gt;&#13;&#10;      &lt;/Box&gt;&#13;&#10;      &lt;Box style={{ flex: 1, background: '#FFFFFF', border: '1px solid #E3E8F5', borderRadius: 14, padding: 24 }}&gt;&#13;&#10;        &lt;Text style={{ fontSize: 20, fontWeight: 'bold', color: '#4C4DDC' }}&gt;算得准&lt;/Text&gt;&#13;&#10;        &lt;Text style={{ fontSize: 15, color: '#0C1222', marginTop: 12, lineHeight: 1.75 }}&gt;指标唯一口径&lt;br /&gt;BOM 成本 · 三层预测 · 经营推演&lt;/Text&gt;&#13;&#10;        &lt;Text style={{ fontSize: 13, color: '#5C6780', marginTop: 16 }}&gt;回测误差约 30%（含异常周）&lt;/Text&gt;&#13;&#10;      &lt;/Box&gt;&#13;&#10;      &lt;Box style={{ flex: 1, background: '#FFFFFF', border: '1px solid #E3E8F5', borderRadius: 14, padding: 24 }}&gt;&#13;&#10;        &lt;Text style={{ fontSize: 20, fontWeight: 'bold', color: '#4C4DDC' }}&gt;动得了&lt;/Text&gt;&#13;&#10;        &lt;Text style={{ fontSize: 15, color: '#0C1222', marginTop: 12, lineHeight: 1.75 }}&gt;生成采购单 · 按毛利调价&lt;br /&gt;滞销菜设为主推&lt;/Text&gt;&#13;&#10;        &lt;Text style={{ fontSize: 13, color: '#5C6780', marginTop: 16 }}&gt;3 类动作 · 全部可撤销&lt;/Text&gt;&#13;&#10;      &lt;/Box&gt;&#13;&#10;      &lt;Box style={{ flex: 1, background: '#FFFFFF', border: '1px solid #E3E8F5', borderRadius: 14, padding: 24 }}&gt;&#13;&#10;        &lt;Text style={{ fontSize: 20, fontWeight: 'bold', color: '#4C4DDC' }}&gt;说得清&lt;/Text&gt;&#13;&#10;        &lt;Text style={{ fontSize: 15, color: '#0C1222', marginTop: 12, lineHeight: 1.75 }}&gt;每条结论附证据 SQL&lt;br /&gt;操作留痕 · 一键回滚&lt;/Text&gt;&#13;&#10;        &lt;Text style={{ fontSize: 13, color: '#5C6780', marginTop: 16 }}&gt;8 条越界语句 100% 拦截&lt;/Text&gt;&#13;&#10;      &lt;/Box&gt;&#13;&#10;    &lt;/Box&gt;&#13;&#10;    &lt;Box style={{ marginTop: 28, background: '#FBFCFE', border: '1px solid #E3E8F5', borderRadius: 12, padding: '20px 24px', flexDirection: 'row', alignItems: 'center', gap: 18 }}&gt;&#13;&#10;      &lt;Text style={{ fontSize: 15, color: '#5C6780', width: 110 }}&gt;串联起来&lt;/Text&gt;&#13;&#10;      &lt;Text style={{ fontSize: 17, color: '#0C1222' }}&gt;看到异常 → 算清原因 → 直接处理 → 留下证据，四步在同一屏里完成。&lt;/Text&gt;&#13;&#10;    &lt;/Box&gt;&#13;&#10;  &lt;/Box&gt;&#13;&#10;  &lt;Box style={{ height: 36, flexDirection: 'row', justifyContent: 'space-between', alignItems: 'flex-end' }}&gt;&#13;&#10;    &lt;Text style={{ fontSize: 12, color: '#8A93A8' }}&gt;2026 武汉 1024 · 产业应用赛道&lt;/Text&gt;&#13;&#10;    &lt;Text style={{ fontSize: 12, color: '#8A93A8' }}&gt;04 / 12&lt;/Text&gt;&#13;&#10;  &lt;/Box&gt;&#13;&#10;&lt;/Slide&gt;"/>
         <p:cNvGrpSpPr/>
         <p:nvPr/>
       </p:nvGrpSpPr>
@@ -7466,10 +7466,7 @@
         </p:spPr>
         <p:txBody>
           <a:bodyPr/>
-          <a:p>
-            <a:pPr/>
-            <a:endParaRPr/>
-          </a:p>
+          <a:p/>
         </p:txBody>
       </p:sp>
       <p:sp>
@@ -7570,10 +7567,7 @@
         </p:spPr>
         <p:txBody>
           <a:bodyPr/>
-          <a:p>
-            <a:pPr/>
-            <a:endParaRPr/>
-          </a:p>
+          <a:p/>
         </p:txBody>
       </p:sp>
       <p:sp>
@@ -7599,10 +7593,7 @@
         </p:spPr>
         <p:txBody>
           <a:bodyPr/>
-          <a:p>
-            <a:pPr/>
-            <a:endParaRPr/>
-          </a:p>
+          <a:p/>
         </p:txBody>
       </p:sp>
       <p:sp>
@@ -7673,10 +7664,7 @@
         </p:spPr>
         <p:txBody>
           <a:bodyPr/>
-          <a:p>
-            <a:pPr/>
-            <a:endParaRPr/>
-          </a:p>
+          <a:p/>
         </p:txBody>
       </p:sp>
       <p:sp>
@@ -7707,10 +7695,7 @@
         </p:spPr>
         <p:txBody>
           <a:bodyPr/>
-          <a:p>
-            <a:pPr/>
-            <a:endParaRPr/>
-          </a:p>
+          <a:p/>
         </p:txBody>
       </p:sp>
       <p:sp>
@@ -7974,10 +7959,7 @@
         </p:spPr>
         <p:txBody>
           <a:bodyPr/>
-          <a:p>
-            <a:pPr/>
-            <a:endParaRPr/>
-          </a:p>
+          <a:p/>
         </p:txBody>
       </p:sp>
       <p:sp>
@@ -8147,7 +8129,7 @@
                 <a:latin typeface="Microsoft YaHei"/>
                 <a:ea typeface="Microsoft YaHei"/>
               </a:rPr>
-              <a:t>回测误差</a:t>
+              <a:t>回测误差约</a:t>
             </a:r>
             <a:r>
               <a:rPr lang="en-US" sz="975">
@@ -8157,7 +8139,7 @@
                 <a:latin typeface="Microsoft YaHei"/>
                 <a:ea typeface="Microsoft YaHei"/>
               </a:rPr>
-              <a:t xml:space="preserve"> 22%</a:t>
+              <a:t xml:space="preserve"> 30%</a:t>
             </a:r>
             <a:r>
               <a:rPr lang="zh-CN" sz="975">
@@ -8201,10 +8183,7 @@
         </p:spPr>
         <p:txBody>
           <a:bodyPr/>
-          <a:p>
-            <a:pPr/>
-            <a:endParaRPr/>
-          </a:p>
+          <a:p/>
         </p:txBody>
       </p:sp>
       <p:sp>
@@ -8408,10 +8387,7 @@
         </p:spPr>
         <p:txBody>
           <a:bodyPr/>
-          <a:p>
-            <a:pPr/>
-            <a:endParaRPr/>
-          </a:p>
+          <a:p/>
         </p:txBody>
       </p:sp>
       <p:sp>
@@ -8625,10 +8601,7 @@
         </p:spPr>
         <p:txBody>
           <a:bodyPr/>
-          <a:p>
-            <a:pPr/>
-            <a:endParaRPr/>
-          </a:p>
+          <a:p/>
         </p:txBody>
       </p:sp>
       <p:sp>

--- a/docs/AI掌柜-路演PPT/AI掌柜-路演PPT.pptx
+++ b/docs/AI掌柜-路演PPT/AI掌柜-路演PPT.pptx
@@ -5,7 +5,7 @@
     <p:sldMasterId id="2147483648" r:id="rId0"/>
   </p:sldMasterIdLst>
   <p:notesMasterIdLst>
-    <p:notesMasterId r:id="rId14"/>
+    <p:notesMasterId r:id="rId15"/>
   </p:notesMasterIdLst>
   <p:sldIdLst>
     <p:sldId id="256" r:id="rId1"/>
@@ -21,6 +21,7 @@
     <p:sldId id="266" r:id="rId11"/>
     <p:sldId id="267" r:id="rId12"/>
     <p:sldId id="268" r:id="rId13"/>
+    <p:sldId id="269" r:id="rId14"/>
   </p:sldIdLst>
   <p:sldSz cx="12192000" cy="6858000"/>
   <p:notesSz cx="6858000" cy="12192000"/>
@@ -5327,12 +5328,12 @@
 </p:sld>
 </file>
 
-<file path=ppt/slides/slide2.xml><?xml version="1.0" encoding="utf-8"?>
+<file path=ppt/slides/slide14.xml><?xml version="1.0" encoding="utf-8"?>
 <p:sld xmlns:p="http://schemas.openxmlformats.org/presentationml/2006/main" xmlns:a="http://schemas.openxmlformats.org/drawingml/2006/main">
   <p:cSld>
     <p:spTree>
       <p:nvGrpSpPr>
-        <p:cNvPr id="109" name="" descr="&lt;Slide style={{ width: 1280, height: 720, background: '#F6F8FD', padding: '56px 72px', flexDirection: 'column' }}&gt;&#13;&#10;  &lt;Box style={{ height: 96, flexDirection: 'row', justifyContent: 'space-between', alignItems: 'flex-start' }}&gt;&#13;&#10;    &lt;Box style={{ flexDirection: 'column', gap: 8 }}&gt;&#13;&#10;      &lt;Text style={{ fontSize: 34, fontWeight: 'bold', color: '#0C1222' }}&gt;老板每天问的三个问题，现有工具一个都没回答&lt;/Text&gt;&#13;&#10;      &lt;Text style={{ fontSize: 15, color: '#5C6780' }}&gt;不是缺报表，是缺结论和动作&lt;/Text&gt;&#13;&#10;    &lt;/Box&gt;&#13;&#10;    &lt;Box style={{ flexDirection: 'row', alignItems: 'center', gap: 6, padding: '5px 12px', background: '#EEF1FE', border: '1px solid #DDE2F5', borderRadius: 999 }}&gt;&#13;&#10;      &lt;Box style={{ width: 6, height: 6, borderRadius: 3, background: '#4C4DDC' }} /&gt;&#13;&#10;      &lt;Text style={{ fontSize: 12, color: '#4C4DDC', fontWeight: 'bold', letterSpacing: 1 }}&gt;AI 掌柜&lt;/Text&gt;&#13;&#10;    &lt;/Box&gt;&#13;&#10;  &lt;/Box&gt;&#13;&#10;  &lt;Box style={{ width: 72, height: 3, background: '#4C4DDC', borderRadius: 2, marginTop: 2, marginBottom: 12 }} /&gt;&#13;&#10;  &lt;Box style={{ flex: 1, paddingTop: 8 }}&gt;&#13;&#10;    &lt;Box style={{ flexDirection: 'row', gap: 20, height: 300 }}&gt;&#13;&#10;      &lt;Box style={{ flex: 1, background: '#FFFFFF', border: '1px solid #E3E8F5', borderRadius: 14, padding: 26, flexDirection: 'column', justifyContent: 'space-between' }}&gt;&#13;&#10;        &lt;Text style={{ fontSize: 56, fontWeight: 'bold', color: '#4C4DDC' }}&gt;01&lt;/Text&gt;&#13;&#10;        &lt;Text style={{ fontSize: 22, fontWeight: 'bold', color: '#0C1222' }}&gt;今天到底赚没赚&lt;/Text&gt;&#13;&#10;        &lt;Text style={{ fontSize: 15, color: '#5C6780', lineHeight: 1.8 }}&gt;六张报表翻半小时，只知道跌了，&lt;br /&gt;不知道是人少了还是点便宜了。&lt;/Text&gt;&#13;&#10;      &lt;/Box&gt;&#13;&#10;      &lt;Box style={{ flex: 1, background: '#FFFFFF', border: '1px solid #E3E8F5', borderRadius: 14, padding: 26, flexDirection: 'column', justifyContent: 'space-between' }}&gt;&#13;&#10;        &lt;Text style={{ fontSize: 56, fontWeight: 'bold', color: '#4C4DDC' }}&gt;02&lt;/Text&gt;&#13;&#10;        &lt;Text style={{ fontSize: 22, fontWeight: 'bold', color: '#0C1222' }}&gt;明天该买多少&lt;/Text&gt;&#13;&#10;        &lt;Text style={{ fontSize: 15, color: '#5C6780', lineHeight: 1.8 }}&gt;采购靠经验：缺货和压货同时发生，&lt;br /&gt;这套数据里最紧的食材只够 1.5 天。&lt;/Text&gt;&#13;&#10;      &lt;/Box&gt;&#13;&#10;      &lt;Box style={{ flex: 1, background: '#FFFFFF', border: '1px solid #E3E8F5', borderRadius: 14, padding: 26, flexDirection: 'column', justifyContent: 'space-between' }}&gt;&#13;&#10;        &lt;Text style={{ fontSize: 56, fontWeight: 'bold', color: '#4C4DDC' }}&gt;03&lt;/Text&gt;&#13;&#10;        &lt;Text style={{ fontSize: 22, fontWeight: 'bold', color: '#0C1222' }}&gt;哪道菜在赔钱&lt;/Text&gt;&#13;&#10;        &lt;Text style={{ fontSize: 15, color: '#5C6780', lineHeight: 1.8 }}&gt;207 道菜只有 107 道算得清成本，&lt;br /&gt;卖得越多，可能亏得越多。&lt;/Text&gt;&#13;&#10;      &lt;/Box&gt;&#13;&#10;    &lt;/Box&gt;&#13;&#10;    &lt;Box style={{ marginTop: 34, paddingTop: 24, borderTop: '1px solid #E3E8F5', flexDirection: 'row', alignItems: 'center', gap: 16 }}&gt;&#13;&#10;      &lt;Box style={{ width: 6, height: 28, background: '#4C4DDC', borderRadius: 3 }} /&gt;&#13;&#10;      &lt;Text style={{ fontSize: 24, color: '#0C1222' }}&gt;中小餐饮不缺数据，缺一个&lt;Text style={{ fontSize: 24, fontWeight: 'bold', color: '#4C4DDC' }}&gt;能替他做决定&lt;/Text&gt;的角色。&lt;/Text&gt;&#13;&#10;    &lt;/Box&gt;&#13;&#10;  &lt;/Box&gt;&#13;&#10;  &lt;Box style={{ height: 36, flexDirection: 'row', justifyContent: 'space-between', alignItems: 'flex-end' }}&gt;&#13;&#10;    &lt;Text style={{ fontSize: 12, color: '#8A93A8' }}&gt;2026 武汉 1024 · 产业应用赛道&lt;/Text&gt;&#13;&#10;    &lt;Text style={{ fontSize: 12, color: '#8A93A8' }}&gt;02 / 12&lt;/Text&gt;&#13;&#10;  &lt;/Box&gt;&#13;&#10;&lt;/Slide&gt;"/>
+        <p:cNvPr id="109" name="" descr="&lt;Slide style={{ width: 1280, height: 720, background: '#F6F8FD', padding: '56px 72px', flexDirection: 'column' }}&gt;&#13;&#10;  &lt;Box style={{ height: 96, flexDirection: 'row', justifyContent: 'space-between', alignItems: 'flex-start' }}&gt;&#13;&#10;    &lt;Box style={{ flexDirection: 'column', gap: 8 }}&gt;&#13;&#10;      &lt;Text style={{ fontSize: 34, fontWeight: 'bold', color: '#0C1222' }}&gt;附录 B · 我们怎么证明它可靠&lt;/Text&gt;&#13;&#10;      &lt;Text style={{ fontSize: 15, color: '#5C6780' }}&gt;不是「能跑一遍」，而是固定题库、可重复测量的评测&lt;/Text&gt;&#13;&#10;    &lt;/Box&gt;&#13;&#10;    &lt;Box style={{ flexDirection: 'row', alignItems: 'center', gap: 6, padding: '5px 12px', background: '#EEF1FE', border: '1px solid #DDE2F5', borderRadius: 999 }}&gt;&#13;&#10;      &lt;Box style={{ width: 6, height: 6, borderRadius: 3, background: '#4C4DDC' }} /&gt;&#13;&#10;      &lt;Text style={{ fontSize: 12, color: '#4C4DDC', fontWeight: 'bold', letterSpacing: 1 }}&gt;AI 掌柜&lt;/Text&gt;&#13;&#10;    &lt;/Box&gt;&#13;&#10;  &lt;/Box&gt;&#13;&#10;  &lt;Box style={{ width: 72, height: 3, background: '#4C4DDC', borderRadius: 2, marginTop: 2, marginBottom: 12 }} /&gt;&#13;&#10;&#13;&#10;  &lt;Box style={{ flex: 1, flexDirection: 'column', gap: 14 }}&gt;&#13;&#10;    &lt;Box style={{ flexDirection: 'row', gap: 14, flex: 1 }}&gt;&#13;&#10;      &lt;Box style={{ flex: 1, background: '#FFFFFF', border: '1px solid #E3E8F5', borderRadius: 14, padding: 22, flexDirection: 'column', justifyContent: 'space-between' }}&gt;&#13;&#10;        &lt;Text style={{ fontSize: 40, fontWeight: 'bold', color: '#4C4DDC', letterSpacing: -1 }}&gt;8 / 8&lt;/Text&gt;&#13;&#10;        &lt;Text style={{ fontSize: 16, fontWeight: 'bold', color: '#0C1222' }}&gt;越界 SQL 全部拦截&lt;/Text&gt;&#13;&#10;        &lt;Text style={{ fontSize: 12, color: '#5C6780', lineHeight: 1.7 }}&gt;DROP · 多语句 · UNION 跨表&lt;br /&gt;系统表 · ATTACH · PRAGMA&lt;/Text&gt;&#13;&#10;      &lt;/Box&gt;&#13;&#10;      &lt;Box style={{ flex: 1, background: '#FFFFFF', border: '1px solid #E3E8F5', borderRadius: 14, padding: 22, flexDirection: 'column', justifyContent: 'space-between' }}&gt;&#13;&#10;        &lt;Text style={{ fontSize: 40, fontWeight: 'bold', color: '#4C4DDC', letterSpacing: -1 }}&gt;12 / 12&lt;/Text&gt;&#13;&#10;        &lt;Text style={{ fontSize: 16, fontWeight: 'bold', color: '#0C1222' }}&gt;问答评测集全通过&lt;/Text&gt;&#13;&#10;        &lt;Text style={{ fontSize: 12, color: '#5C6780', lineHeight: 1.7 }}&gt;SQL 可执行 12/12 · 结论一致 12/12&lt;br /&gt;平均 1.2 秒&lt;/Text&gt;&#13;&#10;      &lt;/Box&gt;&#13;&#10;    &lt;/Box&gt;&#13;&#10;    &lt;Box style={{ flexDirection: 'row', gap: 14, flex: 1 }}&gt;&#13;&#10;      &lt;Box style={{ flex: 1, background: '#FFFFFF', border: '1px solid #E3E8F5', borderRadius: 14, padding: 22, flexDirection: 'column', justifyContent: 'space-between' }}&gt;&#13;&#10;        &lt;Text style={{ fontSize: 40, fontWeight: 'bold', color: '#4C4DDC', letterSpacing: -1 }}&gt;5 处&lt;/Text&gt;&#13;&#10;        &lt;Text style={{ fontSize: 16, fontWeight: 'bold', color: '#0C1222' }}&gt;同一指标必须同值&lt;/Text&gt;&#13;&#10;        &lt;Text style={{ fontSize: 12, color: '#5C6780', lineHeight: 1.7 }}&gt;原始表 · 视图 · 事实表&lt;br /&gt;驾驶舱 · 报表 · AI 问答&lt;/Text&gt;&#13;&#10;      &lt;/Box&gt;&#13;&#10;      &lt;Box style={{ flex: 1, background: '#FFFFFF', border: '1px solid #E3E8F5', borderRadius: 14, padding: 22, flexDirection: 'column', justifyContent: 'space-between' }}&gt;&#13;&#10;        &lt;Text style={{ fontSize: 40, fontWeight: 'bold', color: '#4C4DDC', letterSpacing: -1 }}&gt;6 套件&lt;/Text&gt;&#13;&#10;        &lt;Text style={{ fontSize: 16, fontWeight: 'bold', color: '#0C1222' }}&gt;一键回归，12 秒跑完&lt;/Text&gt;&#13;&#10;        &lt;Text style={{ fontSize: 12, color: '#5C6780', lineHeight: 1.7 }}&gt;22 个页面 · 50 项单元测试&lt;br /&gt;CSV 导入 · Mock 模型链路&lt;/Text&gt;&#13;&#10;      &lt;/Box&gt;&#13;&#10;    &lt;/Box&gt;&#13;&#10;    &lt;Box style={{ background: '#EEF1FE', border: '1px solid #C9CDF6', borderRadius: 12, padding: '16px 22px', flexDirection: 'row', alignItems: 'center', gap: 18 }}&gt;&#13;&#10;      &lt;Text style={{ fontSize: 11, color: '#4C4DDC', fontWeight: 'bold', letterSpacing: 2, width: 96 }}&gt;真实案例&lt;/Text&gt;&#13;&#10;      &lt;Text style={{ fontSize: 14, color: '#0C1222', lineHeight: 1.7, flex: 1 }}&gt;&#13;&#10;        模型的结论写「共 &lt;span style={{ fontWeight: 'bold' }}&gt;6&lt;/span&gt; 种食材低于预警」，查询结果实际是 &lt;span style={{ fontWeight: 'bold' }}&gt;9&lt;/span&gt; 种；&#13;&#10;        「2.8 &lt;span style={{ fontWeight: 'bold' }}&gt;斤&lt;/span&gt;」被写成「3.2 kg」。服务端校验发现数字对不上，&#13;&#10;        &lt;span style={{ fontWeight: 'bold', color: '#4C4DDC' }}&gt;判定为编造 → 换成确定性摘要 → 让它看着真实结果重写&lt;/span&gt;。&#13;&#10;      &lt;/Text&gt;&#13;&#10;    &lt;/Box&gt;&#13;&#10;  &lt;/Box&gt;&#13;&#10;&#13;&#10;  &lt;Box style={{ height: 36, flexDirection: 'row', justifyContent: 'space-between', alignItems: 'flex-end' }}&gt;&#13;&#10;    &lt;Text style={{ fontSize: 12, color: '#8A93A8' }}&gt;命令：python run_tests.py · python tests/eval_nl2sql.py&lt;/Text&gt;&#13;&#10;    &lt;Text style={{ fontSize: 12, color: '#8A93A8' }}&gt;附录 B&lt;/Text&gt;&#13;&#10;  &lt;/Box&gt;&#13;&#10;&lt;/Slide&gt;&#13;&#10;"/>
         <p:cNvGrpSpPr/>
         <p:nvPr/>
       </p:nvGrpSpPr>
@@ -5377,7 +5378,7 @@
         <p:spPr>
           <a:xfrm rot="0" flipH="0" flipV="0">
             <a:off x="685800" y="533400"/>
-            <a:ext cx="6800850" cy="390525"/>
+            <a:ext cx="4219575" cy="390525"/>
           </a:xfrm>
           <a:prstGeom prst="rect"/>
         </p:spPr>
@@ -5397,7 +5398,27 @@
                 <a:latin typeface="Microsoft YaHei"/>
                 <a:ea typeface="Microsoft YaHei"/>
               </a:rPr>
-              <a:t>老板每天问的三个问题，现有工具一个都没回答</a:t>
+              <a:t>附录</a:t>
+            </a:r>
+            <a:r>
+              <a:rPr lang="en-US" sz="2550" b="1">
+                <a:solidFill>
+                  <a:srgbClr val="0C1222"/>
+                </a:solidFill>
+                <a:latin typeface="Microsoft YaHei"/>
+                <a:ea typeface="Microsoft YaHei"/>
+              </a:rPr>
+              <a:t xml:space="preserve"> B · </a:t>
+            </a:r>
+            <a:r>
+              <a:rPr lang="zh-CN" sz="2550" b="1">
+                <a:solidFill>
+                  <a:srgbClr val="0C1222"/>
+                </a:solidFill>
+                <a:latin typeface="Microsoft YaHei"/>
+                <a:ea typeface="Microsoft YaHei"/>
+              </a:rPr>
+              <a:t>我们怎么证明它可靠</a:t>
             </a:r>
             <a:endParaRPr/>
           </a:p>
@@ -5412,7 +5433,7 @@
         <p:spPr>
           <a:xfrm rot="0" flipH="0" flipV="0">
             <a:off x="685800" y="1000125"/>
-            <a:ext cx="6800850" cy="171450"/>
+            <a:ext cx="4219575" cy="171450"/>
           </a:xfrm>
           <a:prstGeom prst="rect"/>
         </p:spPr>
@@ -5432,7 +5453,7 @@
                 <a:latin typeface="Microsoft YaHei"/>
                 <a:ea typeface="Microsoft YaHei"/>
               </a:rPr>
-              <a:t>不是缺报表，是缺结论和动作</a:t>
+              <a:t>不是「能跑一遍」，而是固定题库、可重复测量的评测</a:t>
             </a:r>
             <a:endParaRPr/>
           </a:p>
@@ -5574,6 +5595,1569 @@
         </p:nvSpPr>
         <p:spPr>
           <a:xfrm rot="0" flipH="0" flipV="0">
+            <a:off x="685800" y="1609725"/>
+            <a:ext cx="5343525" cy="1628775"/>
+          </a:xfrm>
+          <a:prstGeom prst="roundRect">
+            <a:avLst>
+              <a:gd name="adj" fmla="val 8187"/>
+            </a:avLst>
+          </a:prstGeom>
+          <a:solidFill>
+            <a:srgbClr val="FFFFFF"/>
+          </a:solidFill>
+          <a:ln w="12700">
+            <a:solidFill>
+              <a:srgbClr val="E3E8F5"/>
+            </a:solidFill>
+            <a:prstDash val="solid"/>
+          </a:ln>
+        </p:spPr>
+        <p:txBody>
+          <a:bodyPr/>
+          <a:p/>
+        </p:txBody>
+      </p:sp>
+      <p:sp>
+        <p:nvSpPr>
+          <p:cNvPr id="118" name="" descr="{&quot;isTemplate&quot;:true,&quot;type&quot;:&quot;text&quot;}"/>
+          <p:cNvSpPr txBox="1"/>
+          <p:nvPr/>
+        </p:nvSpPr>
+        <p:spPr>
+          <a:xfrm rot="0" flipH="0" flipV="0">
+            <a:off x="895350" y="1819275"/>
+            <a:ext cx="4924425" cy="457200"/>
+          </a:xfrm>
+          <a:prstGeom prst="rect"/>
+        </p:spPr>
+        <p:txBody>
+          <a:bodyPr wrap="none" lIns="0" tIns="0" rIns="0" bIns="0"/>
+          <a:p>
+            <a:pPr>
+              <a:lnSpc>
+                <a:spcPct val="100000"/>
+              </a:lnSpc>
+            </a:pPr>
+            <a:r>
+              <a:rPr lang="en-US" sz="3000" b="1" spc="-75">
+                <a:solidFill>
+                  <a:srgbClr val="4C4DDC"/>
+                </a:solidFill>
+                <a:latin typeface="Microsoft YaHei"/>
+                <a:ea typeface="Microsoft YaHei"/>
+              </a:rPr>
+              <a:t>8 / 8</a:t>
+            </a:r>
+            <a:endParaRPr/>
+          </a:p>
+        </p:txBody>
+      </p:sp>
+      <p:sp>
+        <p:nvSpPr>
+          <p:cNvPr id="119" name="" descr="{&quot;isTemplate&quot;:true,&quot;type&quot;:&quot;text&quot;}"/>
+          <p:cNvSpPr txBox="1"/>
+          <p:nvPr/>
+        </p:nvSpPr>
+        <p:spPr>
+          <a:xfrm rot="0" flipH="0" flipV="0">
+            <a:off x="895350" y="2324100"/>
+            <a:ext cx="4924425" cy="190500"/>
+          </a:xfrm>
+          <a:prstGeom prst="rect"/>
+        </p:spPr>
+        <p:txBody>
+          <a:bodyPr wrap="none" lIns="0" tIns="0" rIns="0" bIns="0"/>
+          <a:p>
+            <a:pPr>
+              <a:lnSpc>
+                <a:spcPct val="100000"/>
+              </a:lnSpc>
+            </a:pPr>
+            <a:r>
+              <a:rPr lang="zh-CN" sz="1200" b="1">
+                <a:solidFill>
+                  <a:srgbClr val="0C1222"/>
+                </a:solidFill>
+                <a:latin typeface="Microsoft YaHei"/>
+                <a:ea typeface="Microsoft YaHei"/>
+              </a:rPr>
+              <a:t>越界</a:t>
+            </a:r>
+            <a:r>
+              <a:rPr lang="en-US" sz="1200" b="1">
+                <a:solidFill>
+                  <a:srgbClr val="0C1222"/>
+                </a:solidFill>
+                <a:latin typeface="Microsoft YaHei"/>
+                <a:ea typeface="Microsoft YaHei"/>
+              </a:rPr>
+              <a:t xml:space="preserve"> SQL </a:t>
+            </a:r>
+            <a:r>
+              <a:rPr lang="zh-CN" sz="1200" b="1">
+                <a:solidFill>
+                  <a:srgbClr val="0C1222"/>
+                </a:solidFill>
+                <a:latin typeface="Microsoft YaHei"/>
+                <a:ea typeface="Microsoft YaHei"/>
+              </a:rPr>
+              <a:t>全部拦截</a:t>
+            </a:r>
+            <a:endParaRPr/>
+          </a:p>
+        </p:txBody>
+      </p:sp>
+      <p:sp>
+        <p:nvSpPr>
+          <p:cNvPr id="120" name="" descr="{&quot;isTemplate&quot;:true,&quot;type&quot;:&quot;text&quot;}"/>
+          <p:cNvSpPr txBox="1"/>
+          <p:nvPr/>
+        </p:nvSpPr>
+        <p:spPr>
+          <a:xfrm rot="0" flipH="0" flipV="0">
+            <a:off x="895350" y="2562225"/>
+            <a:ext cx="4924425" cy="466725"/>
+          </a:xfrm>
+          <a:prstGeom prst="rect"/>
+        </p:spPr>
+        <p:txBody>
+          <a:bodyPr wrap="none" lIns="0" tIns="0" rIns="0" bIns="0"/>
+          <a:p>
+            <a:pPr>
+              <a:lnSpc>
+                <a:spcPct val="170000"/>
+              </a:lnSpc>
+            </a:pPr>
+            <a:r>
+              <a:rPr lang="en-US" sz="900">
+                <a:solidFill>
+                  <a:srgbClr val="5C6780"/>
+                </a:solidFill>
+                <a:latin typeface="Microsoft YaHei"/>
+                <a:ea typeface="Microsoft YaHei"/>
+              </a:rPr>
+              <a:t xml:space="preserve">DROP · </a:t>
+            </a:r>
+            <a:r>
+              <a:rPr lang="zh-CN" sz="900">
+                <a:solidFill>
+                  <a:srgbClr val="5C6780"/>
+                </a:solidFill>
+                <a:latin typeface="Microsoft YaHei"/>
+                <a:ea typeface="Microsoft YaHei"/>
+              </a:rPr>
+              <a:t>多语句</a:t>
+            </a:r>
+            <a:r>
+              <a:rPr lang="en-US" sz="900">
+                <a:solidFill>
+                  <a:srgbClr val="5C6780"/>
+                </a:solidFill>
+                <a:latin typeface="Microsoft YaHei"/>
+                <a:ea typeface="Microsoft YaHei"/>
+              </a:rPr>
+              <a:t xml:space="preserve"> · UNION </a:t>
+            </a:r>
+            <a:r>
+              <a:rPr lang="zh-CN" sz="900">
+                <a:solidFill>
+                  <a:srgbClr val="5C6780"/>
+                </a:solidFill>
+                <a:latin typeface="Microsoft YaHei"/>
+                <a:ea typeface="Microsoft YaHei"/>
+              </a:rPr>
+              <a:t>跨表</a:t>
+            </a:r>
+            <a:endParaRPr/>
+          </a:p>
+          <a:p>
+            <a:pPr>
+              <a:lnSpc>
+                <a:spcPct val="170000"/>
+              </a:lnSpc>
+            </a:pPr>
+            <a:r>
+              <a:rPr lang="zh-CN" sz="900">
+                <a:solidFill>
+                  <a:srgbClr val="5C6780"/>
+                </a:solidFill>
+                <a:latin typeface="Microsoft YaHei"/>
+                <a:ea typeface="Microsoft YaHei"/>
+              </a:rPr>
+              <a:t>系统表</a:t>
+            </a:r>
+            <a:r>
+              <a:rPr lang="en-US" sz="900">
+                <a:solidFill>
+                  <a:srgbClr val="5C6780"/>
+                </a:solidFill>
+                <a:latin typeface="Microsoft YaHei"/>
+                <a:ea typeface="Microsoft YaHei"/>
+              </a:rPr>
+              <a:t xml:space="preserve"> · ATTACH · PRAGMA</a:t>
+            </a:r>
+            <a:endParaRPr/>
+          </a:p>
+        </p:txBody>
+      </p:sp>
+      <p:sp>
+        <p:nvSpPr>
+          <p:cNvPr id="121" name=""/>
+          <p:cNvSpPr/>
+          <p:nvPr/>
+        </p:nvSpPr>
+        <p:spPr>
+          <a:xfrm rot="0" flipH="0" flipV="0">
+            <a:off x="6162675" y="1609725"/>
+            <a:ext cx="5343525" cy="1628775"/>
+          </a:xfrm>
+          <a:prstGeom prst="roundRect">
+            <a:avLst>
+              <a:gd name="adj" fmla="val 8187"/>
+            </a:avLst>
+          </a:prstGeom>
+          <a:solidFill>
+            <a:srgbClr val="FFFFFF"/>
+          </a:solidFill>
+          <a:ln w="12700">
+            <a:solidFill>
+              <a:srgbClr val="E3E8F5"/>
+            </a:solidFill>
+            <a:prstDash val="solid"/>
+          </a:ln>
+        </p:spPr>
+        <p:txBody>
+          <a:bodyPr/>
+          <a:p/>
+        </p:txBody>
+      </p:sp>
+      <p:sp>
+        <p:nvSpPr>
+          <p:cNvPr id="122" name="" descr="{&quot;isTemplate&quot;:true,&quot;type&quot;:&quot;text&quot;}"/>
+          <p:cNvSpPr txBox="1"/>
+          <p:nvPr/>
+        </p:nvSpPr>
+        <p:spPr>
+          <a:xfrm rot="0" flipH="0" flipV="0">
+            <a:off x="6372225" y="1819275"/>
+            <a:ext cx="4924425" cy="457200"/>
+          </a:xfrm>
+          <a:prstGeom prst="rect"/>
+        </p:spPr>
+        <p:txBody>
+          <a:bodyPr wrap="none" lIns="0" tIns="0" rIns="0" bIns="0"/>
+          <a:p>
+            <a:pPr>
+              <a:lnSpc>
+                <a:spcPct val="100000"/>
+              </a:lnSpc>
+            </a:pPr>
+            <a:r>
+              <a:rPr lang="en-US" sz="3000" b="1" spc="-75">
+                <a:solidFill>
+                  <a:srgbClr val="4C4DDC"/>
+                </a:solidFill>
+                <a:latin typeface="Microsoft YaHei"/>
+                <a:ea typeface="Microsoft YaHei"/>
+              </a:rPr>
+              <a:t>12 / 12</a:t>
+            </a:r>
+            <a:endParaRPr/>
+          </a:p>
+        </p:txBody>
+      </p:sp>
+      <p:sp>
+        <p:nvSpPr>
+          <p:cNvPr id="123" name="" descr="{&quot;isTemplate&quot;:true,&quot;type&quot;:&quot;text&quot;}"/>
+          <p:cNvSpPr txBox="1"/>
+          <p:nvPr/>
+        </p:nvSpPr>
+        <p:spPr>
+          <a:xfrm rot="0" flipH="0" flipV="0">
+            <a:off x="6372225" y="2324100"/>
+            <a:ext cx="4924425" cy="190500"/>
+          </a:xfrm>
+          <a:prstGeom prst="rect"/>
+        </p:spPr>
+        <p:txBody>
+          <a:bodyPr wrap="none" lIns="0" tIns="0" rIns="0" bIns="0"/>
+          <a:p>
+            <a:pPr>
+              <a:lnSpc>
+                <a:spcPct val="100000"/>
+              </a:lnSpc>
+            </a:pPr>
+            <a:r>
+              <a:rPr lang="zh-CN" sz="1200" b="1">
+                <a:solidFill>
+                  <a:srgbClr val="0C1222"/>
+                </a:solidFill>
+                <a:latin typeface="Microsoft YaHei"/>
+                <a:ea typeface="Microsoft YaHei"/>
+              </a:rPr>
+              <a:t>问答评测集全通过</a:t>
+            </a:r>
+            <a:endParaRPr/>
+          </a:p>
+        </p:txBody>
+      </p:sp>
+      <p:sp>
+        <p:nvSpPr>
+          <p:cNvPr id="124" name="" descr="{&quot;isTemplate&quot;:true,&quot;type&quot;:&quot;text&quot;}"/>
+          <p:cNvSpPr txBox="1"/>
+          <p:nvPr/>
+        </p:nvSpPr>
+        <p:spPr>
+          <a:xfrm rot="0" flipH="0" flipV="0">
+            <a:off x="6372225" y="2562225"/>
+            <a:ext cx="4924425" cy="466725"/>
+          </a:xfrm>
+          <a:prstGeom prst="rect"/>
+        </p:spPr>
+        <p:txBody>
+          <a:bodyPr wrap="none" lIns="0" tIns="0" rIns="0" bIns="0"/>
+          <a:p>
+            <a:pPr>
+              <a:lnSpc>
+                <a:spcPct val="170000"/>
+              </a:lnSpc>
+            </a:pPr>
+            <a:r>
+              <a:rPr lang="en-US" sz="900">
+                <a:solidFill>
+                  <a:srgbClr val="5C6780"/>
+                </a:solidFill>
+                <a:latin typeface="Microsoft YaHei"/>
+                <a:ea typeface="Microsoft YaHei"/>
+              </a:rPr>
+              <a:t xml:space="preserve">SQL </a:t>
+            </a:r>
+            <a:r>
+              <a:rPr lang="zh-CN" sz="900">
+                <a:solidFill>
+                  <a:srgbClr val="5C6780"/>
+                </a:solidFill>
+                <a:latin typeface="Microsoft YaHei"/>
+                <a:ea typeface="Microsoft YaHei"/>
+              </a:rPr>
+              <a:t>可执行</a:t>
+            </a:r>
+            <a:r>
+              <a:rPr lang="en-US" sz="900">
+                <a:solidFill>
+                  <a:srgbClr val="5C6780"/>
+                </a:solidFill>
+                <a:latin typeface="Microsoft YaHei"/>
+                <a:ea typeface="Microsoft YaHei"/>
+              </a:rPr>
+              <a:t xml:space="preserve"> 12/12 · </a:t>
+            </a:r>
+            <a:r>
+              <a:rPr lang="zh-CN" sz="900">
+                <a:solidFill>
+                  <a:srgbClr val="5C6780"/>
+                </a:solidFill>
+                <a:latin typeface="Microsoft YaHei"/>
+                <a:ea typeface="Microsoft YaHei"/>
+              </a:rPr>
+              <a:t>结论一致</a:t>
+            </a:r>
+            <a:r>
+              <a:rPr lang="en-US" sz="900">
+                <a:solidFill>
+                  <a:srgbClr val="5C6780"/>
+                </a:solidFill>
+                <a:latin typeface="Microsoft YaHei"/>
+                <a:ea typeface="Microsoft YaHei"/>
+              </a:rPr>
+              <a:t xml:space="preserve"> 12/12</a:t>
+            </a:r>
+            <a:endParaRPr/>
+          </a:p>
+          <a:p>
+            <a:pPr>
+              <a:lnSpc>
+                <a:spcPct val="170000"/>
+              </a:lnSpc>
+            </a:pPr>
+            <a:r>
+              <a:rPr lang="zh-CN" sz="900">
+                <a:solidFill>
+                  <a:srgbClr val="5C6780"/>
+                </a:solidFill>
+                <a:latin typeface="Microsoft YaHei"/>
+                <a:ea typeface="Microsoft YaHei"/>
+              </a:rPr>
+              <a:t>平均</a:t>
+            </a:r>
+            <a:r>
+              <a:rPr lang="en-US" sz="900">
+                <a:solidFill>
+                  <a:srgbClr val="5C6780"/>
+                </a:solidFill>
+                <a:latin typeface="Microsoft YaHei"/>
+                <a:ea typeface="Microsoft YaHei"/>
+              </a:rPr>
+              <a:t xml:space="preserve"> 1.2 </a:t>
+            </a:r>
+            <a:r>
+              <a:rPr lang="zh-CN" sz="900">
+                <a:solidFill>
+                  <a:srgbClr val="5C6780"/>
+                </a:solidFill>
+                <a:latin typeface="Microsoft YaHei"/>
+                <a:ea typeface="Microsoft YaHei"/>
+              </a:rPr>
+              <a:t>秒</a:t>
+            </a:r>
+            <a:endParaRPr/>
+          </a:p>
+        </p:txBody>
+      </p:sp>
+      <p:sp>
+        <p:nvSpPr>
+          <p:cNvPr id="125" name=""/>
+          <p:cNvSpPr/>
+          <p:nvPr/>
+        </p:nvSpPr>
+        <p:spPr>
+          <a:xfrm rot="0" flipH="0" flipV="0">
+            <a:off x="685800" y="3371850"/>
+            <a:ext cx="5343525" cy="1619250"/>
+          </a:xfrm>
+          <a:prstGeom prst="roundRect">
+            <a:avLst>
+              <a:gd name="adj" fmla="val 8235"/>
+            </a:avLst>
+          </a:prstGeom>
+          <a:solidFill>
+            <a:srgbClr val="FFFFFF"/>
+          </a:solidFill>
+          <a:ln w="12700">
+            <a:solidFill>
+              <a:srgbClr val="E3E8F5"/>
+            </a:solidFill>
+            <a:prstDash val="solid"/>
+          </a:ln>
+        </p:spPr>
+        <p:txBody>
+          <a:bodyPr/>
+          <a:p/>
+        </p:txBody>
+      </p:sp>
+      <p:sp>
+        <p:nvSpPr>
+          <p:cNvPr id="126" name="" descr="{&quot;isTemplate&quot;:true,&quot;type&quot;:&quot;text&quot;}"/>
+          <p:cNvSpPr txBox="1"/>
+          <p:nvPr/>
+        </p:nvSpPr>
+        <p:spPr>
+          <a:xfrm rot="0" flipH="0" flipV="0">
+            <a:off x="895350" y="3581400"/>
+            <a:ext cx="4924425" cy="457200"/>
+          </a:xfrm>
+          <a:prstGeom prst="rect"/>
+        </p:spPr>
+        <p:txBody>
+          <a:bodyPr wrap="none" lIns="0" tIns="0" rIns="0" bIns="0"/>
+          <a:p>
+            <a:pPr>
+              <a:lnSpc>
+                <a:spcPct val="100000"/>
+              </a:lnSpc>
+            </a:pPr>
+            <a:r>
+              <a:rPr lang="en-US" sz="3000" b="1" spc="-75">
+                <a:solidFill>
+                  <a:srgbClr val="4C4DDC"/>
+                </a:solidFill>
+                <a:latin typeface="Microsoft YaHei"/>
+                <a:ea typeface="Microsoft YaHei"/>
+              </a:rPr>
+              <a:t xml:space="preserve">5 </a:t>
+            </a:r>
+            <a:r>
+              <a:rPr lang="zh-CN" sz="3000" b="1" spc="-75">
+                <a:solidFill>
+                  <a:srgbClr val="4C4DDC"/>
+                </a:solidFill>
+                <a:latin typeface="Microsoft YaHei"/>
+                <a:ea typeface="Microsoft YaHei"/>
+              </a:rPr>
+              <a:t>处</a:t>
+            </a:r>
+            <a:endParaRPr/>
+          </a:p>
+        </p:txBody>
+      </p:sp>
+      <p:sp>
+        <p:nvSpPr>
+          <p:cNvPr id="127" name="" descr="{&quot;isTemplate&quot;:true,&quot;type&quot;:&quot;text&quot;}"/>
+          <p:cNvSpPr txBox="1"/>
+          <p:nvPr/>
+        </p:nvSpPr>
+        <p:spPr>
+          <a:xfrm rot="0" flipH="0" flipV="0">
+            <a:off x="895350" y="4086225"/>
+            <a:ext cx="4924425" cy="190500"/>
+          </a:xfrm>
+          <a:prstGeom prst="rect"/>
+        </p:spPr>
+        <p:txBody>
+          <a:bodyPr wrap="none" lIns="0" tIns="0" rIns="0" bIns="0"/>
+          <a:p>
+            <a:pPr>
+              <a:lnSpc>
+                <a:spcPct val="100000"/>
+              </a:lnSpc>
+            </a:pPr>
+            <a:r>
+              <a:rPr lang="zh-CN" sz="1200" b="1">
+                <a:solidFill>
+                  <a:srgbClr val="0C1222"/>
+                </a:solidFill>
+                <a:latin typeface="Microsoft YaHei"/>
+                <a:ea typeface="Microsoft YaHei"/>
+              </a:rPr>
+              <a:t>同一指标必须同值</a:t>
+            </a:r>
+            <a:endParaRPr/>
+          </a:p>
+        </p:txBody>
+      </p:sp>
+      <p:sp>
+        <p:nvSpPr>
+          <p:cNvPr id="128" name="" descr="{&quot;isTemplate&quot;:true,&quot;type&quot;:&quot;text&quot;}"/>
+          <p:cNvSpPr txBox="1"/>
+          <p:nvPr/>
+        </p:nvSpPr>
+        <p:spPr>
+          <a:xfrm rot="0" flipH="0" flipV="0">
+            <a:off x="895350" y="4314825"/>
+            <a:ext cx="4924425" cy="466725"/>
+          </a:xfrm>
+          <a:prstGeom prst="rect"/>
+        </p:spPr>
+        <p:txBody>
+          <a:bodyPr wrap="none" lIns="0" tIns="0" rIns="0" bIns="0"/>
+          <a:p>
+            <a:pPr>
+              <a:lnSpc>
+                <a:spcPct val="170000"/>
+              </a:lnSpc>
+            </a:pPr>
+            <a:r>
+              <a:rPr lang="zh-CN" sz="900">
+                <a:solidFill>
+                  <a:srgbClr val="5C6780"/>
+                </a:solidFill>
+                <a:latin typeface="Microsoft YaHei"/>
+                <a:ea typeface="Microsoft YaHei"/>
+              </a:rPr>
+              <a:t>原始表</a:t>
+            </a:r>
+            <a:r>
+              <a:rPr lang="en-US" sz="900">
+                <a:solidFill>
+                  <a:srgbClr val="5C6780"/>
+                </a:solidFill>
+                <a:latin typeface="Microsoft YaHei"/>
+                <a:ea typeface="Microsoft YaHei"/>
+              </a:rPr>
+              <a:t xml:space="preserve"> · </a:t>
+            </a:r>
+            <a:r>
+              <a:rPr lang="zh-CN" sz="900">
+                <a:solidFill>
+                  <a:srgbClr val="5C6780"/>
+                </a:solidFill>
+                <a:latin typeface="Microsoft YaHei"/>
+                <a:ea typeface="Microsoft YaHei"/>
+              </a:rPr>
+              <a:t>视图</a:t>
+            </a:r>
+            <a:r>
+              <a:rPr lang="en-US" sz="900">
+                <a:solidFill>
+                  <a:srgbClr val="5C6780"/>
+                </a:solidFill>
+                <a:latin typeface="Microsoft YaHei"/>
+                <a:ea typeface="Microsoft YaHei"/>
+              </a:rPr>
+              <a:t xml:space="preserve"> · </a:t>
+            </a:r>
+            <a:r>
+              <a:rPr lang="zh-CN" sz="900">
+                <a:solidFill>
+                  <a:srgbClr val="5C6780"/>
+                </a:solidFill>
+                <a:latin typeface="Microsoft YaHei"/>
+                <a:ea typeface="Microsoft YaHei"/>
+              </a:rPr>
+              <a:t>事实表</a:t>
+            </a:r>
+            <a:endParaRPr/>
+          </a:p>
+          <a:p>
+            <a:pPr>
+              <a:lnSpc>
+                <a:spcPct val="170000"/>
+              </a:lnSpc>
+            </a:pPr>
+            <a:r>
+              <a:rPr lang="zh-CN" sz="900">
+                <a:solidFill>
+                  <a:srgbClr val="5C6780"/>
+                </a:solidFill>
+                <a:latin typeface="Microsoft YaHei"/>
+                <a:ea typeface="Microsoft YaHei"/>
+              </a:rPr>
+              <a:t>驾驶舱</a:t>
+            </a:r>
+            <a:r>
+              <a:rPr lang="en-US" sz="900">
+                <a:solidFill>
+                  <a:srgbClr val="5C6780"/>
+                </a:solidFill>
+                <a:latin typeface="Microsoft YaHei"/>
+                <a:ea typeface="Microsoft YaHei"/>
+              </a:rPr>
+              <a:t xml:space="preserve"> · </a:t>
+            </a:r>
+            <a:r>
+              <a:rPr lang="zh-CN" sz="900">
+                <a:solidFill>
+                  <a:srgbClr val="5C6780"/>
+                </a:solidFill>
+                <a:latin typeface="Microsoft YaHei"/>
+                <a:ea typeface="Microsoft YaHei"/>
+              </a:rPr>
+              <a:t>报表</a:t>
+            </a:r>
+            <a:r>
+              <a:rPr lang="en-US" sz="900">
+                <a:solidFill>
+                  <a:srgbClr val="5C6780"/>
+                </a:solidFill>
+                <a:latin typeface="Microsoft YaHei"/>
+                <a:ea typeface="Microsoft YaHei"/>
+              </a:rPr>
+              <a:t xml:space="preserve"> · AI </a:t>
+            </a:r>
+            <a:r>
+              <a:rPr lang="zh-CN" sz="900">
+                <a:solidFill>
+                  <a:srgbClr val="5C6780"/>
+                </a:solidFill>
+                <a:latin typeface="Microsoft YaHei"/>
+                <a:ea typeface="Microsoft YaHei"/>
+              </a:rPr>
+              <a:t>问答</a:t>
+            </a:r>
+            <a:endParaRPr/>
+          </a:p>
+        </p:txBody>
+      </p:sp>
+      <p:sp>
+        <p:nvSpPr>
+          <p:cNvPr id="129" name=""/>
+          <p:cNvSpPr/>
+          <p:nvPr/>
+        </p:nvSpPr>
+        <p:spPr>
+          <a:xfrm rot="0" flipH="0" flipV="0">
+            <a:off x="6162675" y="3371850"/>
+            <a:ext cx="5343525" cy="1619250"/>
+          </a:xfrm>
+          <a:prstGeom prst="roundRect">
+            <a:avLst>
+              <a:gd name="adj" fmla="val 8235"/>
+            </a:avLst>
+          </a:prstGeom>
+          <a:solidFill>
+            <a:srgbClr val="FFFFFF"/>
+          </a:solidFill>
+          <a:ln w="12700">
+            <a:solidFill>
+              <a:srgbClr val="E3E8F5"/>
+            </a:solidFill>
+            <a:prstDash val="solid"/>
+          </a:ln>
+        </p:spPr>
+        <p:txBody>
+          <a:bodyPr/>
+          <a:p/>
+        </p:txBody>
+      </p:sp>
+      <p:sp>
+        <p:nvSpPr>
+          <p:cNvPr id="130" name="" descr="{&quot;isTemplate&quot;:true,&quot;type&quot;:&quot;text&quot;}"/>
+          <p:cNvSpPr txBox="1"/>
+          <p:nvPr/>
+        </p:nvSpPr>
+        <p:spPr>
+          <a:xfrm rot="0" flipH="0" flipV="0">
+            <a:off x="6372225" y="3581400"/>
+            <a:ext cx="4924425" cy="457200"/>
+          </a:xfrm>
+          <a:prstGeom prst="rect"/>
+        </p:spPr>
+        <p:txBody>
+          <a:bodyPr wrap="none" lIns="0" tIns="0" rIns="0" bIns="0"/>
+          <a:p>
+            <a:pPr>
+              <a:lnSpc>
+                <a:spcPct val="100000"/>
+              </a:lnSpc>
+            </a:pPr>
+            <a:r>
+              <a:rPr lang="en-US" sz="3000" b="1" spc="-75">
+                <a:solidFill>
+                  <a:srgbClr val="4C4DDC"/>
+                </a:solidFill>
+                <a:latin typeface="Microsoft YaHei"/>
+                <a:ea typeface="Microsoft YaHei"/>
+              </a:rPr>
+              <a:t xml:space="preserve">6 </a:t>
+            </a:r>
+            <a:r>
+              <a:rPr lang="zh-CN" sz="3000" b="1" spc="-75">
+                <a:solidFill>
+                  <a:srgbClr val="4C4DDC"/>
+                </a:solidFill>
+                <a:latin typeface="Microsoft YaHei"/>
+                <a:ea typeface="Microsoft YaHei"/>
+              </a:rPr>
+              <a:t>套件</a:t>
+            </a:r>
+            <a:endParaRPr/>
+          </a:p>
+        </p:txBody>
+      </p:sp>
+      <p:sp>
+        <p:nvSpPr>
+          <p:cNvPr id="131" name="" descr="{&quot;isTemplate&quot;:true,&quot;type&quot;:&quot;text&quot;}"/>
+          <p:cNvSpPr txBox="1"/>
+          <p:nvPr/>
+        </p:nvSpPr>
+        <p:spPr>
+          <a:xfrm rot="0" flipH="0" flipV="0">
+            <a:off x="6372225" y="4086225"/>
+            <a:ext cx="4924425" cy="190500"/>
+          </a:xfrm>
+          <a:prstGeom prst="rect"/>
+        </p:spPr>
+        <p:txBody>
+          <a:bodyPr wrap="none" lIns="0" tIns="0" rIns="0" bIns="0"/>
+          <a:p>
+            <a:pPr>
+              <a:lnSpc>
+                <a:spcPct val="100000"/>
+              </a:lnSpc>
+            </a:pPr>
+            <a:r>
+              <a:rPr lang="zh-CN" sz="1200" b="1">
+                <a:solidFill>
+                  <a:srgbClr val="0C1222"/>
+                </a:solidFill>
+                <a:latin typeface="Microsoft YaHei"/>
+                <a:ea typeface="Microsoft YaHei"/>
+              </a:rPr>
+              <a:t>一键回归，</a:t>
+            </a:r>
+            <a:r>
+              <a:rPr lang="en-US" sz="1200" b="1">
+                <a:solidFill>
+                  <a:srgbClr val="0C1222"/>
+                </a:solidFill>
+                <a:latin typeface="Microsoft YaHei"/>
+                <a:ea typeface="Microsoft YaHei"/>
+              </a:rPr>
+              <a:t xml:space="preserve">12 </a:t>
+            </a:r>
+            <a:r>
+              <a:rPr lang="zh-CN" sz="1200" b="1">
+                <a:solidFill>
+                  <a:srgbClr val="0C1222"/>
+                </a:solidFill>
+                <a:latin typeface="Microsoft YaHei"/>
+                <a:ea typeface="Microsoft YaHei"/>
+              </a:rPr>
+              <a:t>秒跑完</a:t>
+            </a:r>
+            <a:endParaRPr/>
+          </a:p>
+        </p:txBody>
+      </p:sp>
+      <p:sp>
+        <p:nvSpPr>
+          <p:cNvPr id="132" name="" descr="{&quot;isTemplate&quot;:true,&quot;type&quot;:&quot;text&quot;}"/>
+          <p:cNvSpPr txBox="1"/>
+          <p:nvPr/>
+        </p:nvSpPr>
+        <p:spPr>
+          <a:xfrm rot="0" flipH="0" flipV="0">
+            <a:off x="6372225" y="4314825"/>
+            <a:ext cx="4924425" cy="466725"/>
+          </a:xfrm>
+          <a:prstGeom prst="rect"/>
+        </p:spPr>
+        <p:txBody>
+          <a:bodyPr wrap="none" lIns="0" tIns="0" rIns="0" bIns="0"/>
+          <a:p>
+            <a:pPr>
+              <a:lnSpc>
+                <a:spcPct val="170000"/>
+              </a:lnSpc>
+            </a:pPr>
+            <a:r>
+              <a:rPr lang="en-US" sz="900">
+                <a:solidFill>
+                  <a:srgbClr val="5C6780"/>
+                </a:solidFill>
+                <a:latin typeface="Microsoft YaHei"/>
+                <a:ea typeface="Microsoft YaHei"/>
+              </a:rPr>
+              <a:t xml:space="preserve">22 </a:t>
+            </a:r>
+            <a:r>
+              <a:rPr lang="zh-CN" sz="900">
+                <a:solidFill>
+                  <a:srgbClr val="5C6780"/>
+                </a:solidFill>
+                <a:latin typeface="Microsoft YaHei"/>
+                <a:ea typeface="Microsoft YaHei"/>
+              </a:rPr>
+              <a:t>个页面</a:t>
+            </a:r>
+            <a:r>
+              <a:rPr lang="en-US" sz="900">
+                <a:solidFill>
+                  <a:srgbClr val="5C6780"/>
+                </a:solidFill>
+                <a:latin typeface="Microsoft YaHei"/>
+                <a:ea typeface="Microsoft YaHei"/>
+              </a:rPr>
+              <a:t xml:space="preserve"> · 50 </a:t>
+            </a:r>
+            <a:r>
+              <a:rPr lang="zh-CN" sz="900">
+                <a:solidFill>
+                  <a:srgbClr val="5C6780"/>
+                </a:solidFill>
+                <a:latin typeface="Microsoft YaHei"/>
+                <a:ea typeface="Microsoft YaHei"/>
+              </a:rPr>
+              <a:t>项单元测试</a:t>
+            </a:r>
+            <a:endParaRPr/>
+          </a:p>
+          <a:p>
+            <a:pPr>
+              <a:lnSpc>
+                <a:spcPct val="170000"/>
+              </a:lnSpc>
+            </a:pPr>
+            <a:r>
+              <a:rPr lang="en-US" sz="900">
+                <a:solidFill>
+                  <a:srgbClr val="5C6780"/>
+                </a:solidFill>
+                <a:latin typeface="Microsoft YaHei"/>
+                <a:ea typeface="Microsoft YaHei"/>
+              </a:rPr>
+              <a:t xml:space="preserve">CSV </a:t>
+            </a:r>
+            <a:r>
+              <a:rPr lang="zh-CN" sz="900">
+                <a:solidFill>
+                  <a:srgbClr val="5C6780"/>
+                </a:solidFill>
+                <a:latin typeface="Microsoft YaHei"/>
+                <a:ea typeface="Microsoft YaHei"/>
+              </a:rPr>
+              <a:t>导入</a:t>
+            </a:r>
+            <a:r>
+              <a:rPr lang="en-US" sz="900">
+                <a:solidFill>
+                  <a:srgbClr val="5C6780"/>
+                </a:solidFill>
+                <a:latin typeface="Microsoft YaHei"/>
+                <a:ea typeface="Microsoft YaHei"/>
+              </a:rPr>
+              <a:t xml:space="preserve"> · Mock </a:t>
+            </a:r>
+            <a:r>
+              <a:rPr lang="zh-CN" sz="900">
+                <a:solidFill>
+                  <a:srgbClr val="5C6780"/>
+                </a:solidFill>
+                <a:latin typeface="Microsoft YaHei"/>
+                <a:ea typeface="Microsoft YaHei"/>
+              </a:rPr>
+              <a:t>模型链路</a:t>
+            </a:r>
+            <a:endParaRPr/>
+          </a:p>
+        </p:txBody>
+      </p:sp>
+      <p:sp>
+        <p:nvSpPr>
+          <p:cNvPr id="133" name=""/>
+          <p:cNvSpPr/>
+          <p:nvPr/>
+        </p:nvSpPr>
+        <p:spPr>
+          <a:xfrm rot="0" flipH="0" flipV="0">
+            <a:off x="685800" y="5124450"/>
+            <a:ext cx="10820400" cy="857250"/>
+          </a:xfrm>
+          <a:prstGeom prst="roundRect">
+            <a:avLst>
+              <a:gd name="adj" fmla="val 13333"/>
+            </a:avLst>
+          </a:prstGeom>
+          <a:solidFill>
+            <a:srgbClr val="EEF1FE"/>
+          </a:solidFill>
+          <a:ln w="12700">
+            <a:solidFill>
+              <a:srgbClr val="C9CDF6"/>
+            </a:solidFill>
+            <a:prstDash val="solid"/>
+          </a:ln>
+        </p:spPr>
+        <p:txBody>
+          <a:bodyPr/>
+          <a:p/>
+        </p:txBody>
+      </p:sp>
+      <p:sp>
+        <p:nvSpPr>
+          <p:cNvPr id="134" name="" descr="{&quot;isTemplate&quot;:true,&quot;type&quot;:&quot;text&quot;}"/>
+          <p:cNvSpPr txBox="1"/>
+          <p:nvPr/>
+        </p:nvSpPr>
+        <p:spPr>
+          <a:xfrm rot="0" flipH="0" flipV="0">
+            <a:off x="895350" y="5486400"/>
+            <a:ext cx="914400" cy="133350"/>
+          </a:xfrm>
+          <a:prstGeom prst="rect"/>
+        </p:spPr>
+        <p:txBody>
+          <a:bodyPr wrap="none" lIns="0" tIns="0" rIns="0" bIns="0"/>
+          <a:p>
+            <a:pPr>
+              <a:lnSpc>
+                <a:spcPct val="100000"/>
+              </a:lnSpc>
+            </a:pPr>
+            <a:r>
+              <a:rPr lang="zh-CN" sz="825" b="1" spc="150">
+                <a:solidFill>
+                  <a:srgbClr val="4C4DDC"/>
+                </a:solidFill>
+                <a:latin typeface="Microsoft YaHei"/>
+                <a:ea typeface="Microsoft YaHei"/>
+              </a:rPr>
+              <a:t>真实案例</a:t>
+            </a:r>
+            <a:endParaRPr/>
+          </a:p>
+        </p:txBody>
+      </p:sp>
+      <p:sp>
+        <p:nvSpPr>
+          <p:cNvPr id="135" name="" descr="{&quot;isTemplate&quot;:true,&quot;type&quot;:&quot;text&quot;}"/>
+          <p:cNvSpPr txBox="1"/>
+          <p:nvPr/>
+        </p:nvSpPr>
+        <p:spPr>
+          <a:xfrm rot="0" flipH="0" flipV="0">
+            <a:off x="1981200" y="5276850"/>
+            <a:ext cx="9315450" cy="552450"/>
+          </a:xfrm>
+          <a:prstGeom prst="rect"/>
+        </p:spPr>
+        <p:txBody>
+          <a:bodyPr wrap="square" lIns="0" tIns="0" rIns="0" bIns="0">
+            <a:normAutofit/>
+          </a:bodyPr>
+          <a:p>
+            <a:pPr>
+              <a:lnSpc>
+                <a:spcPct val="170000"/>
+              </a:lnSpc>
+            </a:pPr>
+            <a:r>
+              <a:rPr lang="zh-CN" sz="1050">
+                <a:solidFill>
+                  <a:srgbClr val="0C1222"/>
+                </a:solidFill>
+                <a:latin typeface="Microsoft YaHei"/>
+                <a:ea typeface="Microsoft YaHei"/>
+              </a:rPr>
+              <a:t>模型的结论写「共</a:t>
+            </a:r>
+            <a:r>
+              <a:rPr lang="en-US" sz="1050">
+                <a:solidFill>
+                  <a:srgbClr val="0C1222"/>
+                </a:solidFill>
+                <a:latin typeface="Microsoft YaHei"/>
+                <a:ea typeface="Microsoft YaHei"/>
+              </a:rPr>
+              <a:t xml:space="preserve"> </a:t>
+            </a:r>
+            <a:r>
+              <a:rPr lang="en-US" sz="1050" b="1">
+                <a:solidFill>
+                  <a:srgbClr val="0C1222"/>
+                </a:solidFill>
+                <a:latin typeface="Microsoft YaHei"/>
+                <a:ea typeface="Microsoft YaHei"/>
+              </a:rPr>
+              <a:t>6</a:t>
+            </a:r>
+            <a:r>
+              <a:rPr lang="en-US" sz="1050">
+                <a:solidFill>
+                  <a:srgbClr val="0C1222"/>
+                </a:solidFill>
+                <a:latin typeface="Microsoft YaHei"/>
+                <a:ea typeface="Microsoft YaHei"/>
+              </a:rPr>
+              <a:t xml:space="preserve"> </a:t>
+            </a:r>
+            <a:r>
+              <a:rPr lang="zh-CN" sz="1050">
+                <a:solidFill>
+                  <a:srgbClr val="0C1222"/>
+                </a:solidFill>
+                <a:latin typeface="Microsoft YaHei"/>
+                <a:ea typeface="Microsoft YaHei"/>
+              </a:rPr>
+              <a:t>种食材低于预警」，查询结果实际是</a:t>
+            </a:r>
+            <a:r>
+              <a:rPr lang="en-US" sz="1050">
+                <a:solidFill>
+                  <a:srgbClr val="0C1222"/>
+                </a:solidFill>
+                <a:latin typeface="Microsoft YaHei"/>
+                <a:ea typeface="Microsoft YaHei"/>
+              </a:rPr>
+              <a:t xml:space="preserve"> </a:t>
+            </a:r>
+            <a:r>
+              <a:rPr lang="en-US" sz="1050" b="1">
+                <a:solidFill>
+                  <a:srgbClr val="0C1222"/>
+                </a:solidFill>
+                <a:latin typeface="Microsoft YaHei"/>
+                <a:ea typeface="Microsoft YaHei"/>
+              </a:rPr>
+              <a:t>9</a:t>
+            </a:r>
+            <a:r>
+              <a:rPr lang="en-US" sz="1050">
+                <a:solidFill>
+                  <a:srgbClr val="0C1222"/>
+                </a:solidFill>
+                <a:latin typeface="Microsoft YaHei"/>
+                <a:ea typeface="Microsoft YaHei"/>
+              </a:rPr>
+              <a:t xml:space="preserve"> </a:t>
+            </a:r>
+            <a:r>
+              <a:rPr lang="zh-CN" sz="1050">
+                <a:solidFill>
+                  <a:srgbClr val="0C1222"/>
+                </a:solidFill>
+                <a:latin typeface="Microsoft YaHei"/>
+                <a:ea typeface="Microsoft YaHei"/>
+              </a:rPr>
+              <a:t>种；</a:t>
+            </a:r>
+            <a:r>
+              <a:rPr lang="en-US" sz="1050">
+                <a:solidFill>
+                  <a:srgbClr val="0C1222"/>
+                </a:solidFill>
+                <a:latin typeface="Microsoft YaHei"/>
+                <a:ea typeface="Microsoft YaHei"/>
+              </a:rPr>
+              <a:t xml:space="preserve"> </a:t>
+            </a:r>
+            <a:r>
+              <a:rPr lang="zh-CN" sz="1050">
+                <a:solidFill>
+                  <a:srgbClr val="0C1222"/>
+                </a:solidFill>
+                <a:latin typeface="Microsoft YaHei"/>
+                <a:ea typeface="Microsoft YaHei"/>
+              </a:rPr>
+              <a:t>「</a:t>
+            </a:r>
+            <a:r>
+              <a:rPr lang="en-US" sz="1050">
+                <a:solidFill>
+                  <a:srgbClr val="0C1222"/>
+                </a:solidFill>
+                <a:latin typeface="Microsoft YaHei"/>
+                <a:ea typeface="Microsoft YaHei"/>
+              </a:rPr>
+              <a:t xml:space="preserve">2.8 </a:t>
+            </a:r>
+            <a:r>
+              <a:rPr lang="zh-CN" sz="1050" b="1">
+                <a:solidFill>
+                  <a:srgbClr val="0C1222"/>
+                </a:solidFill>
+                <a:latin typeface="Microsoft YaHei"/>
+                <a:ea typeface="Microsoft YaHei"/>
+              </a:rPr>
+              <a:t>斤</a:t>
+            </a:r>
+            <a:r>
+              <a:rPr lang="zh-CN" sz="1050">
+                <a:solidFill>
+                  <a:srgbClr val="0C1222"/>
+                </a:solidFill>
+                <a:latin typeface="Microsoft YaHei"/>
+                <a:ea typeface="Microsoft YaHei"/>
+              </a:rPr>
+              <a:t>」被写成「</a:t>
+            </a:r>
+            <a:r>
+              <a:rPr lang="en-US" sz="1050">
+                <a:solidFill>
+                  <a:srgbClr val="0C1222"/>
+                </a:solidFill>
+                <a:latin typeface="Microsoft YaHei"/>
+                <a:ea typeface="Microsoft YaHei"/>
+              </a:rPr>
+              <a:t>3.2 kg</a:t>
+            </a:r>
+            <a:r>
+              <a:rPr lang="zh-CN" sz="1050">
+                <a:solidFill>
+                  <a:srgbClr val="0C1222"/>
+                </a:solidFill>
+                <a:latin typeface="Microsoft YaHei"/>
+                <a:ea typeface="Microsoft YaHei"/>
+              </a:rPr>
+              <a:t>」。服务端校验发现数字对不上，</a:t>
+            </a:r>
+            <a:r>
+              <a:rPr lang="zh-CN" sz="1050" b="1">
+                <a:solidFill>
+                  <a:srgbClr val="4C4DDC"/>
+                </a:solidFill>
+                <a:latin typeface="Microsoft YaHei"/>
+                <a:ea typeface="Microsoft YaHei"/>
+              </a:rPr>
+              <a:t>判定为编造</a:t>
+            </a:r>
+            <a:r>
+              <a:rPr lang="en-US" sz="1050" b="1">
+                <a:solidFill>
+                  <a:srgbClr val="4C4DDC"/>
+                </a:solidFill>
+                <a:latin typeface="Microsoft YaHei"/>
+                <a:ea typeface="Microsoft YaHei"/>
+              </a:rPr>
+              <a:t xml:space="preserve"> → </a:t>
+            </a:r>
+            <a:r>
+              <a:rPr lang="zh-CN" sz="1050" b="1">
+                <a:solidFill>
+                  <a:srgbClr val="4C4DDC"/>
+                </a:solidFill>
+                <a:latin typeface="Microsoft YaHei"/>
+                <a:ea typeface="Microsoft YaHei"/>
+              </a:rPr>
+              <a:t>换成确定性摘要</a:t>
+            </a:r>
+            <a:r>
+              <a:rPr lang="en-US" sz="1050" b="1">
+                <a:solidFill>
+                  <a:srgbClr val="4C4DDC"/>
+                </a:solidFill>
+                <a:latin typeface="Microsoft YaHei"/>
+                <a:ea typeface="Microsoft YaHei"/>
+              </a:rPr>
+              <a:t xml:space="preserve"> → </a:t>
+            </a:r>
+            <a:r>
+              <a:rPr lang="zh-CN" sz="1050" b="1">
+                <a:solidFill>
+                  <a:srgbClr val="4C4DDC"/>
+                </a:solidFill>
+                <a:latin typeface="Microsoft YaHei"/>
+                <a:ea typeface="Microsoft YaHei"/>
+              </a:rPr>
+              <a:t>让它看着真实结果重写</a:t>
+            </a:r>
+            <a:r>
+              <a:rPr lang="zh-CN" sz="1050">
+                <a:solidFill>
+                  <a:srgbClr val="0C1222"/>
+                </a:solidFill>
+                <a:latin typeface="Microsoft YaHei"/>
+                <a:ea typeface="Microsoft YaHei"/>
+              </a:rPr>
+              <a:t>。</a:t>
+            </a:r>
+            <a:endParaRPr/>
+          </a:p>
+        </p:txBody>
+      </p:sp>
+      <p:sp>
+        <p:nvSpPr>
+          <p:cNvPr id="136" name="" descr="{&quot;isTemplate&quot;:true,&quot;type&quot;:&quot;text&quot;}"/>
+          <p:cNvSpPr txBox="1"/>
+          <p:nvPr/>
+        </p:nvSpPr>
+        <p:spPr>
+          <a:xfrm rot="0" flipH="0" flipV="0">
+            <a:off x="685800" y="6181725"/>
+            <a:ext cx="3000375" cy="142875"/>
+          </a:xfrm>
+          <a:prstGeom prst="rect"/>
+        </p:spPr>
+        <p:txBody>
+          <a:bodyPr wrap="none" lIns="0" tIns="0" rIns="0" bIns="0"/>
+          <a:p>
+            <a:pPr>
+              <a:lnSpc>
+                <a:spcPct val="100000"/>
+              </a:lnSpc>
+            </a:pPr>
+            <a:r>
+              <a:rPr lang="zh-CN" sz="900">
+                <a:solidFill>
+                  <a:srgbClr val="8A93A8"/>
+                </a:solidFill>
+                <a:latin typeface="Microsoft YaHei"/>
+                <a:ea typeface="Microsoft YaHei"/>
+              </a:rPr>
+              <a:t>命令：</a:t>
+            </a:r>
+            <a:r>
+              <a:rPr lang="en-US" sz="900">
+                <a:solidFill>
+                  <a:srgbClr val="8A93A8"/>
+                </a:solidFill>
+                <a:latin typeface="Microsoft YaHei"/>
+                <a:ea typeface="Microsoft YaHei"/>
+              </a:rPr>
+              <a:t>python run_tests.py · python tests/eval_nl2sql.py</a:t>
+            </a:r>
+            <a:endParaRPr/>
+          </a:p>
+        </p:txBody>
+      </p:sp>
+      <p:sp>
+        <p:nvSpPr>
+          <p:cNvPr id="137" name="" descr="{&quot;isTemplate&quot;:true,&quot;type&quot;:&quot;text&quot;}"/>
+          <p:cNvSpPr txBox="1"/>
+          <p:nvPr/>
+        </p:nvSpPr>
+        <p:spPr>
+          <a:xfrm rot="0" flipH="0" flipV="0">
+            <a:off x="11163300" y="6181725"/>
+            <a:ext cx="342900" cy="142875"/>
+          </a:xfrm>
+          <a:prstGeom prst="rect"/>
+        </p:spPr>
+        <p:txBody>
+          <a:bodyPr wrap="none" lIns="0" tIns="0" rIns="0" bIns="0"/>
+          <a:p>
+            <a:pPr>
+              <a:lnSpc>
+                <a:spcPct val="100000"/>
+              </a:lnSpc>
+            </a:pPr>
+            <a:r>
+              <a:rPr lang="zh-CN" sz="900">
+                <a:solidFill>
+                  <a:srgbClr val="8A93A8"/>
+                </a:solidFill>
+                <a:latin typeface="Microsoft YaHei"/>
+                <a:ea typeface="Microsoft YaHei"/>
+              </a:rPr>
+              <a:t>附录</a:t>
+            </a:r>
+            <a:r>
+              <a:rPr lang="en-US" sz="900">
+                <a:solidFill>
+                  <a:srgbClr val="8A93A8"/>
+                </a:solidFill>
+                <a:latin typeface="Microsoft YaHei"/>
+                <a:ea typeface="Microsoft YaHei"/>
+              </a:rPr>
+              <a:t xml:space="preserve"> B</a:t>
+            </a:r>
+            <a:endParaRPr/>
+          </a:p>
+        </p:txBody>
+      </p:sp>
+    </p:spTree>
+  </p:cSld>
+</p:sld>
+</file>
+
+<file path=ppt/slides/slide2.xml><?xml version="1.0" encoding="utf-8"?>
+<p:sld xmlns:p="http://schemas.openxmlformats.org/presentationml/2006/main" xmlns:a="http://schemas.openxmlformats.org/drawingml/2006/main">
+  <p:cSld>
+    <p:spTree>
+      <p:nvGrpSpPr>
+        <p:cNvPr id="138" name="" descr="&lt;Slide style={{ width: 1280, height: 720, background: '#F6F8FD', padding: '56px 72px', flexDirection: 'column' }}&gt;&#13;&#10;  &lt;Box style={{ height: 96, flexDirection: 'row', justifyContent: 'space-between', alignItems: 'flex-start' }}&gt;&#13;&#10;    &lt;Box style={{ flexDirection: 'column', gap: 8 }}&gt;&#13;&#10;      &lt;Text style={{ fontSize: 34, fontWeight: 'bold', color: '#0C1222' }}&gt;老板每天问的三个问题，现有工具一个都没回答&lt;/Text&gt;&#13;&#10;      &lt;Text style={{ fontSize: 15, color: '#5C6780' }}&gt;不是缺报表，是缺结论和动作&lt;/Text&gt;&#13;&#10;    &lt;/Box&gt;&#13;&#10;    &lt;Box style={{ flexDirection: 'row', alignItems: 'center', gap: 6, padding: '5px 12px', background: '#EEF1FE', border: '1px solid #DDE2F5', borderRadius: 999 }}&gt;&#13;&#10;      &lt;Box style={{ width: 6, height: 6, borderRadius: 3, background: '#4C4DDC' }} /&gt;&#13;&#10;      &lt;Text style={{ fontSize: 12, color: '#4C4DDC', fontWeight: 'bold', letterSpacing: 1 }}&gt;AI 掌柜&lt;/Text&gt;&#13;&#10;    &lt;/Box&gt;&#13;&#10;  &lt;/Box&gt;&#13;&#10;  &lt;Box style={{ width: 72, height: 3, background: '#4C4DDC', borderRadius: 2, marginTop: 2, marginBottom: 12 }} /&gt;&#13;&#10;  &lt;Box style={{ flex: 1, paddingTop: 8 }}&gt;&#13;&#10;    &lt;Box style={{ flexDirection: 'row', gap: 20, height: 300 }}&gt;&#13;&#10;      &lt;Box style={{ flex: 1, background: '#FFFFFF', border: '1px solid #E3E8F5', borderRadius: 14, padding: 26, flexDirection: 'column', justifyContent: 'space-between' }}&gt;&#13;&#10;        &lt;Text style={{ fontSize: 56, fontWeight: 'bold', color: '#4C4DDC' }}&gt;01&lt;/Text&gt;&#13;&#10;        &lt;Text style={{ fontSize: 22, fontWeight: 'bold', color: '#0C1222' }}&gt;今天到底赚没赚&lt;/Text&gt;&#13;&#10;        &lt;Text style={{ fontSize: 15, color: '#5C6780', lineHeight: 1.8 }}&gt;六张报表翻半小时，只知道跌了，&lt;br /&gt;不知道是人少了还是点便宜了。&lt;/Text&gt;&#13;&#10;      &lt;/Box&gt;&#13;&#10;      &lt;Box style={{ flex: 1, background: '#FFFFFF', border: '1px solid #E3E8F5', borderRadius: 14, padding: 26, flexDirection: 'column', justifyContent: 'space-between' }}&gt;&#13;&#10;        &lt;Text style={{ fontSize: 56, fontWeight: 'bold', color: '#4C4DDC' }}&gt;02&lt;/Text&gt;&#13;&#10;        &lt;Text style={{ fontSize: 22, fontWeight: 'bold', color: '#0C1222' }}&gt;明天该买多少&lt;/Text&gt;&#13;&#10;        &lt;Text style={{ fontSize: 15, color: '#5C6780', lineHeight: 1.8 }}&gt;采购靠经验：缺货和压货同时发生，&lt;br /&gt;这套数据里最紧的食材只够 1.5 天。&lt;/Text&gt;&#13;&#10;      &lt;/Box&gt;&#13;&#10;      &lt;Box style={{ flex: 1, background: '#FFFFFF', border: '1px solid #E3E8F5', borderRadius: 14, padding: 26, flexDirection: 'column', justifyContent: 'space-between' }}&gt;&#13;&#10;        &lt;Text style={{ fontSize: 56, fontWeight: 'bold', color: '#4C4DDC' }}&gt;03&lt;/Text&gt;&#13;&#10;        &lt;Text style={{ fontSize: 22, fontWeight: 'bold', color: '#0C1222' }}&gt;哪道菜在赔钱&lt;/Text&gt;&#13;&#10;        &lt;Text style={{ fontSize: 15, color: '#5C6780', lineHeight: 1.8 }}&gt;207 道菜只有 107 道算得清成本，&lt;br /&gt;卖得越多，可能亏得越多。&lt;/Text&gt;&#13;&#10;      &lt;/Box&gt;&#13;&#10;    &lt;/Box&gt;&#13;&#10;    &lt;Box style={{ marginTop: 34, paddingTop: 24, borderTop: '1px solid #E3E8F5', flexDirection: 'row', alignItems: 'center', gap: 16 }}&gt;&#13;&#10;      &lt;Box style={{ width: 6, height: 28, background: '#4C4DDC', borderRadius: 3 }} /&gt;&#13;&#10;      &lt;Text style={{ fontSize: 24, color: '#0C1222' }}&gt;中小餐饮不缺数据，缺一个&lt;Text style={{ fontSize: 24, fontWeight: 'bold', color: '#4C4DDC' }}&gt;能替他做决定&lt;/Text&gt;的角色。&lt;/Text&gt;&#13;&#10;    &lt;/Box&gt;&#13;&#10;  &lt;/Box&gt;&#13;&#10;  &lt;Box style={{ height: 36, flexDirection: 'row', justifyContent: 'space-between', alignItems: 'flex-end' }}&gt;&#13;&#10;    &lt;Text style={{ fontSize: 12, color: '#8A93A8' }}&gt;2026 武汉 1024 · 产业应用赛道&lt;/Text&gt;&#13;&#10;    &lt;Text style={{ fontSize: 12, color: '#8A93A8' }}&gt;02 / 12&lt;/Text&gt;&#13;&#10;  &lt;/Box&gt;&#13;&#10;&lt;/Slide&gt;"/>
+        <p:cNvGrpSpPr/>
+        <p:nvPr/>
+      </p:nvGrpSpPr>
+      <p:grpSpPr>
+        <a:xfrm>
+          <a:off x="0" y="0"/>
+          <a:ext cx="0" cy="0"/>
+          <a:chOff x="0" y="0"/>
+          <a:chExt cx="0" cy="0"/>
+        </a:xfrm>
+      </p:grpSpPr>
+      <p:sp>
+        <p:nvSpPr>
+          <p:cNvPr id="139" name=""/>
+          <p:cNvSpPr/>
+          <p:nvPr/>
+        </p:nvSpPr>
+        <p:spPr>
+          <a:xfrm rot="0" flipH="0" flipV="0">
+            <a:off x="0" y="0"/>
+            <a:ext cx="12192000" cy="6858000"/>
+          </a:xfrm>
+          <a:prstGeom prst="rect">
+            <a:avLst/>
+          </a:prstGeom>
+          <a:solidFill>
+            <a:srgbClr val="F6F8FD"/>
+          </a:solidFill>
+          <a:ln/>
+        </p:spPr>
+        <p:txBody>
+          <a:bodyPr/>
+          <a:p/>
+        </p:txBody>
+      </p:sp>
+      <p:sp>
+        <p:nvSpPr>
+          <p:cNvPr id="140" name="" descr="{&quot;isTemplate&quot;:true,&quot;type&quot;:&quot;text&quot;}"/>
+          <p:cNvSpPr txBox="1"/>
+          <p:nvPr/>
+        </p:nvSpPr>
+        <p:spPr>
+          <a:xfrm rot="0" flipH="0" flipV="0">
+            <a:off x="685800" y="533400"/>
+            <a:ext cx="6800850" cy="390525"/>
+          </a:xfrm>
+          <a:prstGeom prst="rect"/>
+        </p:spPr>
+        <p:txBody>
+          <a:bodyPr wrap="none" lIns="0" tIns="0" rIns="0" bIns="0"/>
+          <a:p>
+            <a:pPr>
+              <a:lnSpc>
+                <a:spcPct val="100000"/>
+              </a:lnSpc>
+            </a:pPr>
+            <a:r>
+              <a:rPr lang="zh-CN" sz="2550" b="1">
+                <a:solidFill>
+                  <a:srgbClr val="0C1222"/>
+                </a:solidFill>
+                <a:latin typeface="Microsoft YaHei"/>
+                <a:ea typeface="Microsoft YaHei"/>
+              </a:rPr>
+              <a:t>老板每天问的三个问题，现有工具一个都没回答</a:t>
+            </a:r>
+            <a:endParaRPr/>
+          </a:p>
+        </p:txBody>
+      </p:sp>
+      <p:sp>
+        <p:nvSpPr>
+          <p:cNvPr id="141" name="" descr="{&quot;isTemplate&quot;:true,&quot;type&quot;:&quot;text&quot;}"/>
+          <p:cNvSpPr txBox="1"/>
+          <p:nvPr/>
+        </p:nvSpPr>
+        <p:spPr>
+          <a:xfrm rot="0" flipH="0" flipV="0">
+            <a:off x="685800" y="1000125"/>
+            <a:ext cx="6800850" cy="171450"/>
+          </a:xfrm>
+          <a:prstGeom prst="rect"/>
+        </p:spPr>
+        <p:txBody>
+          <a:bodyPr wrap="none" lIns="0" tIns="0" rIns="0" bIns="0"/>
+          <a:p>
+            <a:pPr>
+              <a:lnSpc>
+                <a:spcPct val="100000"/>
+              </a:lnSpc>
+            </a:pPr>
+            <a:r>
+              <a:rPr lang="zh-CN" sz="1125">
+                <a:solidFill>
+                  <a:srgbClr val="5C6780"/>
+                </a:solidFill>
+                <a:latin typeface="Microsoft YaHei"/>
+                <a:ea typeface="Microsoft YaHei"/>
+              </a:rPr>
+              <a:t>不是缺报表，是缺结论和动作</a:t>
+            </a:r>
+            <a:endParaRPr/>
+          </a:p>
+        </p:txBody>
+      </p:sp>
+      <p:sp>
+        <p:nvSpPr>
+          <p:cNvPr id="142" name=""/>
+          <p:cNvSpPr/>
+          <p:nvPr/>
+        </p:nvSpPr>
+        <p:spPr>
+          <a:xfrm rot="0" flipH="0" flipV="0">
+            <a:off x="10725150" y="533400"/>
+            <a:ext cx="781050" cy="238125"/>
+          </a:xfrm>
+          <a:prstGeom prst="roundRect">
+            <a:avLst>
+              <a:gd name="adj" fmla="val 3996000"/>
+            </a:avLst>
+          </a:prstGeom>
+          <a:solidFill>
+            <a:srgbClr val="EEF1FE"/>
+          </a:solidFill>
+          <a:ln w="12700">
+            <a:solidFill>
+              <a:srgbClr val="DDE2F5"/>
+            </a:solidFill>
+            <a:prstDash val="solid"/>
+          </a:ln>
+        </p:spPr>
+        <p:txBody>
+          <a:bodyPr/>
+          <a:p/>
+        </p:txBody>
+      </p:sp>
+      <p:sp>
+        <p:nvSpPr>
+          <p:cNvPr id="143" name=""/>
+          <p:cNvSpPr/>
+          <p:nvPr/>
+        </p:nvSpPr>
+        <p:spPr>
+          <a:xfrm rot="0" flipH="0" flipV="0">
+            <a:off x="10839450" y="628650"/>
+            <a:ext cx="57150" cy="57150"/>
+          </a:xfrm>
+          <a:prstGeom prst="roundRect">
+            <a:avLst>
+              <a:gd name="adj" fmla="val 50000"/>
+            </a:avLst>
+          </a:prstGeom>
+          <a:solidFill>
+            <a:srgbClr val="4C4DDC"/>
+          </a:solidFill>
+          <a:ln/>
+        </p:spPr>
+        <p:txBody>
+          <a:bodyPr/>
+          <a:p/>
+        </p:txBody>
+      </p:sp>
+      <p:sp>
+        <p:nvSpPr>
+          <p:cNvPr id="144" name="" descr="{&quot;isTemplate&quot;:true,&quot;type&quot;:&quot;text&quot;}"/>
+          <p:cNvSpPr txBox="1"/>
+          <p:nvPr/>
+        </p:nvSpPr>
+        <p:spPr>
+          <a:xfrm rot="0" flipH="0" flipV="0">
+            <a:off x="10953750" y="581025"/>
+            <a:ext cx="438150" cy="142875"/>
+          </a:xfrm>
+          <a:prstGeom prst="rect"/>
+        </p:spPr>
+        <p:txBody>
+          <a:bodyPr wrap="none" lIns="0" tIns="0" rIns="0" bIns="0"/>
+          <a:p>
+            <a:pPr>
+              <a:lnSpc>
+                <a:spcPct val="100000"/>
+              </a:lnSpc>
+            </a:pPr>
+            <a:r>
+              <a:rPr lang="en-US" sz="900" b="1" spc="75">
+                <a:solidFill>
+                  <a:srgbClr val="4C4DDC"/>
+                </a:solidFill>
+                <a:latin typeface="Microsoft YaHei"/>
+                <a:ea typeface="Microsoft YaHei"/>
+              </a:rPr>
+              <a:t xml:space="preserve">AI </a:t>
+            </a:r>
+            <a:r>
+              <a:rPr lang="zh-CN" sz="900" b="1" spc="75">
+                <a:solidFill>
+                  <a:srgbClr val="4C4DDC"/>
+                </a:solidFill>
+                <a:latin typeface="Microsoft YaHei"/>
+                <a:ea typeface="Microsoft YaHei"/>
+              </a:rPr>
+              <a:t>掌柜</a:t>
+            </a:r>
+            <a:endParaRPr/>
+          </a:p>
+        </p:txBody>
+      </p:sp>
+      <p:sp>
+        <p:nvSpPr>
+          <p:cNvPr id="145" name=""/>
+          <p:cNvSpPr/>
+          <p:nvPr/>
+        </p:nvSpPr>
+        <p:spPr>
+          <a:xfrm rot="0" flipH="0" flipV="0">
+            <a:off x="685800" y="1466850"/>
+            <a:ext cx="685800" cy="28575"/>
+          </a:xfrm>
+          <a:prstGeom prst="roundRect">
+            <a:avLst>
+              <a:gd name="adj" fmla="val 66667"/>
+            </a:avLst>
+          </a:prstGeom>
+          <a:solidFill>
+            <a:srgbClr val="4C4DDC"/>
+          </a:solidFill>
+          <a:ln/>
+        </p:spPr>
+        <p:txBody>
+          <a:bodyPr/>
+          <a:p/>
+        </p:txBody>
+      </p:sp>
+      <p:sp>
+        <p:nvSpPr>
+          <p:cNvPr id="146" name=""/>
+          <p:cNvSpPr/>
+          <p:nvPr/>
+        </p:nvSpPr>
+        <p:spPr>
+          <a:xfrm rot="0" flipH="0" flipV="0">
             <a:off x="685800" y="1685925"/>
             <a:ext cx="3476625" cy="2857500"/>
           </a:xfrm>
@@ -5599,7 +7183,7 @@
       </p:sp>
       <p:sp>
         <p:nvSpPr>
-          <p:cNvPr id="118" name="" descr="{&quot;isTemplate&quot;:true,&quot;type&quot;:&quot;text&quot;}"/>
+          <p:cNvPr id="147" name="" descr="{&quot;isTemplate&quot;:true,&quot;type&quot;:&quot;text&quot;}"/>
           <p:cNvSpPr txBox="1"/>
           <p:nvPr/>
         </p:nvSpPr>
@@ -5634,7 +7218,7 @@
       </p:sp>
       <p:sp>
         <p:nvSpPr>
-          <p:cNvPr id="119" name="" descr="{&quot;isTemplate&quot;:true,&quot;type&quot;:&quot;text&quot;}"/>
+          <p:cNvPr id="148" name="" descr="{&quot;isTemplate&quot;:true,&quot;type&quot;:&quot;text&quot;}"/>
           <p:cNvSpPr txBox="1"/>
           <p:nvPr/>
         </p:nvSpPr>
@@ -5669,7 +7253,7 @@
       </p:sp>
       <p:sp>
         <p:nvSpPr>
-          <p:cNvPr id="120" name="" descr="{&quot;isTemplate&quot;:true,&quot;type&quot;:&quot;text&quot;}"/>
+          <p:cNvPr id="149" name="" descr="{&quot;isTemplate&quot;:true,&quot;type&quot;:&quot;text&quot;}"/>
           <p:cNvSpPr txBox="1"/>
           <p:nvPr/>
         </p:nvSpPr>
@@ -5722,7 +7306,7 @@
       </p:sp>
       <p:sp>
         <p:nvSpPr>
-          <p:cNvPr id="121" name=""/>
+          <p:cNvPr id="150" name=""/>
           <p:cNvSpPr/>
           <p:nvPr/>
         </p:nvSpPr>
@@ -5753,7 +7337,7 @@
       </p:sp>
       <p:sp>
         <p:nvSpPr>
-          <p:cNvPr id="122" name="" descr="{&quot;isTemplate&quot;:true,&quot;type&quot;:&quot;text&quot;}"/>
+          <p:cNvPr id="151" name="" descr="{&quot;isTemplate&quot;:true,&quot;type&quot;:&quot;text&quot;}"/>
           <p:cNvSpPr txBox="1"/>
           <p:nvPr/>
         </p:nvSpPr>
@@ -5788,7 +7372,7 @@
       </p:sp>
       <p:sp>
         <p:nvSpPr>
-          <p:cNvPr id="123" name="" descr="{&quot;isTemplate&quot;:true,&quot;type&quot;:&quot;text&quot;}"/>
+          <p:cNvPr id="152" name="" descr="{&quot;isTemplate&quot;:true,&quot;type&quot;:&quot;text&quot;}"/>
           <p:cNvSpPr txBox="1"/>
           <p:nvPr/>
         </p:nvSpPr>
@@ -5823,7 +7407,7 @@
       </p:sp>
       <p:sp>
         <p:nvSpPr>
-          <p:cNvPr id="124" name="" descr="{&quot;isTemplate&quot;:true,&quot;type&quot;:&quot;text&quot;}"/>
+          <p:cNvPr id="153" name="" descr="{&quot;isTemplate&quot;:true,&quot;type&quot;:&quot;text&quot;}"/>
           <p:cNvSpPr txBox="1"/>
           <p:nvPr/>
         </p:nvSpPr>
@@ -5896,7 +7480,7 @@
       </p:sp>
       <p:sp>
         <p:nvSpPr>
-          <p:cNvPr id="125" name=""/>
+          <p:cNvPr id="154" name=""/>
           <p:cNvSpPr/>
           <p:nvPr/>
         </p:nvSpPr>
@@ -5927,7 +7511,7 @@
       </p:sp>
       <p:sp>
         <p:nvSpPr>
-          <p:cNvPr id="126" name="" descr="{&quot;isTemplate&quot;:true,&quot;type&quot;:&quot;text&quot;}"/>
+          <p:cNvPr id="155" name="" descr="{&quot;isTemplate&quot;:true,&quot;type&quot;:&quot;text&quot;}"/>
           <p:cNvSpPr txBox="1"/>
           <p:nvPr/>
         </p:nvSpPr>
@@ -5962,7 +7546,7 @@
       </p:sp>
       <p:sp>
         <p:nvSpPr>
-          <p:cNvPr id="127" name="" descr="{&quot;isTemplate&quot;:true,&quot;type&quot;:&quot;text&quot;}"/>
+          <p:cNvPr id="156" name="" descr="{&quot;isTemplate&quot;:true,&quot;type&quot;:&quot;text&quot;}"/>
           <p:cNvSpPr txBox="1"/>
           <p:nvPr/>
         </p:nvSpPr>
@@ -5997,7 +7581,7 @@
       </p:sp>
       <p:sp>
         <p:nvSpPr>
-          <p:cNvPr id="128" name="" descr="{&quot;isTemplate&quot;:true,&quot;type&quot;:&quot;text&quot;}"/>
+          <p:cNvPr id="157" name="" descr="{&quot;isTemplate&quot;:true,&quot;type&quot;:&quot;text&quot;}"/>
           <p:cNvSpPr txBox="1"/>
           <p:nvPr/>
         </p:nvSpPr>
@@ -6080,7 +7664,7 @@
       </p:sp>
       <p:sp>
         <p:nvSpPr>
-          <p:cNvPr id="129" name=""/>
+          <p:cNvPr id="158" name=""/>
           <p:cNvSpPr/>
           <p:nvPr/>
         </p:nvSpPr>
@@ -6120,7 +7704,7 @@
       </p:sp>
       <p:sp>
         <p:nvSpPr>
-          <p:cNvPr id="130" name=""/>
+          <p:cNvPr id="159" name=""/>
           <p:cNvSpPr/>
           <p:nvPr/>
         </p:nvSpPr>
@@ -6146,7 +7730,7 @@
       </p:sp>
       <p:sp>
         <p:nvSpPr>
-          <p:cNvPr id="131" name="" descr="{&quot;isTemplate&quot;:true,&quot;type&quot;:&quot;text&quot;}"/>
+          <p:cNvPr id="160" name="" descr="{&quot;isTemplate&quot;:true,&quot;type&quot;:&quot;text&quot;}"/>
           <p:cNvSpPr txBox="1"/>
           <p:nvPr/>
         </p:nvSpPr>
@@ -6201,7 +7785,7 @@
       </p:sp>
       <p:sp>
         <p:nvSpPr>
-          <p:cNvPr id="132" name="" descr="{&quot;isTemplate&quot;:true,&quot;type&quot;:&quot;text&quot;}"/>
+          <p:cNvPr id="161" name="" descr="{&quot;isTemplate&quot;:true,&quot;type&quot;:&quot;text&quot;}"/>
           <p:cNvSpPr txBox="1"/>
           <p:nvPr/>
         </p:nvSpPr>
@@ -6266,7 +7850,7 @@
       </p:sp>
       <p:sp>
         <p:nvSpPr>
-          <p:cNvPr id="133" name="" descr="{&quot;isTemplate&quot;:true,&quot;type&quot;:&quot;text&quot;}"/>
+          <p:cNvPr id="162" name="" descr="{&quot;isTemplate&quot;:true,&quot;type&quot;:&quot;text&quot;}"/>
           <p:cNvSpPr txBox="1"/>
           <p:nvPr/>
         </p:nvSpPr>
@@ -6309,7 +7893,7 @@
   <p:cSld>
     <p:spTree>
       <p:nvGrpSpPr>
-        <p:cNvPr id="134" name=""/>
+        <p:cNvPr id="163" name=""/>
         <p:cNvGrpSpPr/>
         <p:nvPr/>
       </p:nvGrpSpPr>
@@ -6323,7 +7907,7 @@
       </p:grpSpPr>
       <p:sp>
         <p:nvSpPr>
-          <p:cNvPr id="135" name=""/>
+          <p:cNvPr id="164" name=""/>
           <p:cNvSpPr/>
           <p:nvPr/>
         </p:nvSpPr>
@@ -6350,7 +7934,7 @@
       </p:sp>
       <p:sp>
         <p:nvSpPr>
-          <p:cNvPr id="136" name="" descr="{&quot;isTemplate&quot;:true,&quot;type&quot;:&quot;text&quot;}"/>
+          <p:cNvPr id="165" name="" descr="{&quot;isTemplate&quot;:true,&quot;type&quot;:&quot;text&quot;}"/>
           <p:cNvSpPr txBox="1"/>
           <p:nvPr/>
         </p:nvSpPr>
@@ -6385,7 +7969,7 @@
       </p:sp>
       <p:sp>
         <p:nvSpPr>
-          <p:cNvPr id="137" name="" descr="{&quot;isTemplate&quot;:true,&quot;type&quot;:&quot;text&quot;}"/>
+          <p:cNvPr id="166" name="" descr="{&quot;isTemplate&quot;:true,&quot;type&quot;:&quot;text&quot;}"/>
           <p:cNvSpPr txBox="1"/>
           <p:nvPr/>
         </p:nvSpPr>
@@ -6420,7 +8004,7 @@
       </p:sp>
       <p:sp>
         <p:nvSpPr>
-          <p:cNvPr id="138" name=""/>
+          <p:cNvPr id="167" name=""/>
           <p:cNvSpPr/>
           <p:nvPr/>
         </p:nvSpPr>
@@ -6454,7 +8038,7 @@
       </p:sp>
       <p:sp>
         <p:nvSpPr>
-          <p:cNvPr id="139" name=""/>
+          <p:cNvPr id="168" name=""/>
           <p:cNvSpPr/>
           <p:nvPr/>
         </p:nvSpPr>
@@ -6483,7 +8067,7 @@
       </p:sp>
       <p:sp>
         <p:nvSpPr>
-          <p:cNvPr id="140" name="" descr="{&quot;isTemplate&quot;:true,&quot;type&quot;:&quot;text&quot;}"/>
+          <p:cNvPr id="169" name="" descr="{&quot;isTemplate&quot;:true,&quot;type&quot;:&quot;text&quot;}"/>
           <p:cNvSpPr txBox="1"/>
           <p:nvPr/>
         </p:nvSpPr>
@@ -6528,7 +8112,7 @@
       </p:sp>
       <p:sp>
         <p:nvSpPr>
-          <p:cNvPr id="141" name=""/>
+          <p:cNvPr id="170" name=""/>
           <p:cNvSpPr/>
           <p:nvPr/>
         </p:nvSpPr>
@@ -6557,7 +8141,7 @@
       </p:sp>
       <p:sp>
         <p:nvSpPr>
-          <p:cNvPr id="142" name=""/>
+          <p:cNvPr id="171" name=""/>
           <p:cNvSpPr/>
           <p:nvPr/>
         </p:nvSpPr>
@@ -6591,7 +8175,7 @@
       </p:sp>
       <p:sp>
         <p:nvSpPr>
-          <p:cNvPr id="143" name="" descr="{&quot;isTemplate&quot;:true,&quot;type&quot;:&quot;text&quot;}"/>
+          <p:cNvPr id="172" name="" descr="{&quot;isTemplate&quot;:true,&quot;type&quot;:&quot;text&quot;}"/>
           <p:cNvSpPr txBox="1"/>
           <p:nvPr/>
         </p:nvSpPr>
@@ -6646,7 +8230,7 @@
       </p:sp>
       <p:sp>
         <p:nvSpPr>
-          <p:cNvPr id="144" name="" descr="{&quot;isTemplate&quot;:true,&quot;type&quot;:&quot;text&quot;}"/>
+          <p:cNvPr id="173" name="" descr="{&quot;isTemplate&quot;:true,&quot;type&quot;:&quot;text&quot;}"/>
           <p:cNvSpPr txBox="1"/>
           <p:nvPr/>
         </p:nvSpPr>
@@ -6681,7 +8265,7 @@
       </p:sp>
       <p:sp>
         <p:nvSpPr>
-          <p:cNvPr id="145" name="" descr="{&quot;isTemplate&quot;:true,&quot;type&quot;:&quot;text&quot;}"/>
+          <p:cNvPr id="174" name="" descr="{&quot;isTemplate&quot;:true,&quot;type&quot;:&quot;text&quot;}"/>
           <p:cNvSpPr txBox="1"/>
           <p:nvPr/>
         </p:nvSpPr>
@@ -6736,7 +8320,7 @@
       </p:sp>
       <p:sp>
         <p:nvSpPr>
-          <p:cNvPr id="146" name="" descr="{&quot;isTemplate&quot;:true,&quot;type&quot;:&quot;text&quot;}"/>
+          <p:cNvPr id="175" name="" descr="{&quot;isTemplate&quot;:true,&quot;type&quot;:&quot;text&quot;}"/>
           <p:cNvSpPr txBox="1"/>
           <p:nvPr/>
         </p:nvSpPr>
@@ -6781,7 +8365,7 @@
       </p:sp>
       <p:sp>
         <p:nvSpPr>
-          <p:cNvPr id="147" name="" descr="{&quot;isTemplate&quot;:true,&quot;type&quot;:&quot;text&quot;}"/>
+          <p:cNvPr id="176" name="" descr="{&quot;isTemplate&quot;:true,&quot;type&quot;:&quot;text&quot;}"/>
           <p:cNvSpPr txBox="1"/>
           <p:nvPr/>
         </p:nvSpPr>
@@ -6826,7 +8410,7 @@
       </p:sp>
       <p:sp>
         <p:nvSpPr>
-          <p:cNvPr id="148" name="" descr="{&quot;isTemplate&quot;:true,&quot;type&quot;:&quot;text&quot;}"/>
+          <p:cNvPr id="177" name="" descr="{&quot;isTemplate&quot;:true,&quot;type&quot;:&quot;text&quot;}"/>
           <p:cNvSpPr txBox="1"/>
           <p:nvPr/>
         </p:nvSpPr>
@@ -6871,7 +8455,7 @@
       </p:sp>
       <p:sp>
         <p:nvSpPr>
-          <p:cNvPr id="149" name=""/>
+          <p:cNvPr id="178" name=""/>
           <p:cNvSpPr/>
           <p:nvPr/>
         </p:nvSpPr>
@@ -6905,7 +8489,7 @@
       </p:sp>
       <p:sp>
         <p:nvSpPr>
-          <p:cNvPr id="150" name="" descr="{&quot;isTemplate&quot;:true,&quot;type&quot;:&quot;text&quot;}"/>
+          <p:cNvPr id="179" name="" descr="{&quot;isTemplate&quot;:true,&quot;type&quot;:&quot;text&quot;}"/>
           <p:cNvSpPr txBox="1"/>
           <p:nvPr/>
         </p:nvSpPr>
@@ -6950,7 +8534,7 @@
       </p:sp>
       <p:sp>
         <p:nvSpPr>
-          <p:cNvPr id="151" name="" descr="{&quot;isTemplate&quot;:true,&quot;type&quot;:&quot;text&quot;}"/>
+          <p:cNvPr id="180" name="" descr="{&quot;isTemplate&quot;:true,&quot;type&quot;:&quot;text&quot;}"/>
           <p:cNvSpPr txBox="1"/>
           <p:nvPr/>
         </p:nvSpPr>
@@ -6985,7 +8569,7 @@
       </p:sp>
       <p:sp>
         <p:nvSpPr>
-          <p:cNvPr id="152" name="" descr="{&quot;isTemplate&quot;:true,&quot;type&quot;:&quot;text&quot;}"/>
+          <p:cNvPr id="181" name="" descr="{&quot;isTemplate&quot;:true,&quot;type&quot;:&quot;text&quot;}"/>
           <p:cNvSpPr txBox="1"/>
           <p:nvPr/>
         </p:nvSpPr>
@@ -7060,7 +8644,7 @@
       </p:sp>
       <p:sp>
         <p:nvSpPr>
-          <p:cNvPr id="153" name="" descr="{&quot;isTemplate&quot;:true,&quot;type&quot;:&quot;text&quot;}"/>
+          <p:cNvPr id="182" name="" descr="{&quot;isTemplate&quot;:true,&quot;type&quot;:&quot;text&quot;}"/>
           <p:cNvSpPr txBox="1"/>
           <p:nvPr/>
         </p:nvSpPr>
@@ -7125,7 +8709,7 @@
       </p:sp>
       <p:sp>
         <p:nvSpPr>
-          <p:cNvPr id="154" name="" descr="{&quot;isTemplate&quot;:true,&quot;type&quot;:&quot;text&quot;}"/>
+          <p:cNvPr id="183" name="" descr="{&quot;isTemplate&quot;:true,&quot;type&quot;:&quot;text&quot;}"/>
           <p:cNvSpPr txBox="1"/>
           <p:nvPr/>
         </p:nvSpPr>
@@ -7170,7 +8754,7 @@
       </p:sp>
       <p:sp>
         <p:nvSpPr>
-          <p:cNvPr id="155" name="" descr="{&quot;isTemplate&quot;:true,&quot;type&quot;:&quot;text&quot;}"/>
+          <p:cNvPr id="184" name="" descr="{&quot;isTemplate&quot;:true,&quot;type&quot;:&quot;text&quot;}"/>
           <p:cNvSpPr txBox="1"/>
           <p:nvPr/>
         </p:nvSpPr>
@@ -7215,7 +8799,7 @@
       </p:sp>
       <p:sp>
         <p:nvSpPr>
-          <p:cNvPr id="156" name="" descr="{&quot;isTemplate&quot;:true,&quot;type&quot;:&quot;text&quot;}"/>
+          <p:cNvPr id="185" name="" descr="{&quot;isTemplate&quot;:true,&quot;type&quot;:&quot;text&quot;}"/>
           <p:cNvSpPr txBox="1"/>
           <p:nvPr/>
         </p:nvSpPr>
@@ -7250,7 +8834,7 @@
       </p:sp>
       <p:sp>
         <p:nvSpPr>
-          <p:cNvPr id="157" name="" descr="{&quot;isTemplate&quot;:true,&quot;type&quot;:&quot;text&quot;}"/>
+          <p:cNvPr id="186" name="" descr="{&quot;isTemplate&quot;:true,&quot;type&quot;:&quot;text&quot;}"/>
           <p:cNvSpPr txBox="1"/>
           <p:nvPr/>
         </p:nvSpPr>
@@ -7325,7 +8909,7 @@
       </p:sp>
       <p:sp>
         <p:nvSpPr>
-          <p:cNvPr id="158" name="" descr="{&quot;isTemplate&quot;:true,&quot;type&quot;:&quot;text&quot;}"/>
+          <p:cNvPr id="187" name="" descr="{&quot;isTemplate&quot;:true,&quot;type&quot;:&quot;text&quot;}"/>
           <p:cNvSpPr txBox="1"/>
           <p:nvPr/>
         </p:nvSpPr>
@@ -7390,7 +8974,7 @@
       </p:sp>
       <p:sp>
         <p:nvSpPr>
-          <p:cNvPr id="159" name="" descr="{&quot;isTemplate&quot;:true,&quot;type&quot;:&quot;text&quot;}"/>
+          <p:cNvPr id="188" name="" descr="{&quot;isTemplate&quot;:true,&quot;type&quot;:&quot;text&quot;}"/>
           <p:cNvSpPr txBox="1"/>
           <p:nvPr/>
         </p:nvSpPr>
@@ -7433,7 +9017,7 @@
   <p:cSld>
     <p:spTree>
       <p:nvGrpSpPr>
-        <p:cNvPr id="160" name="" descr="&lt;Slide style={{ width: 1280, height: 720, background: '#F6F8FD', padding: '56px 72px', flexDirection: 'column' }}&gt;&#13;&#10;  &lt;Box style={{ height: 96, flexDirection: 'row', justifyContent: 'space-between', alignItems: 'flex-start' }}&gt;&#13;&#10;    &lt;Box style={{ flexDirection: 'column', gap: 8 }}&gt;&#13;&#10;      &lt;Text style={{ fontSize: 34, fontWeight: 'bold', color: '#0C1222' }}&gt;四块能力，缺一块都落不了地&lt;/Text&gt;&#13;&#10;      &lt;Text style={{ fontSize: 15, color: '#5C6780' }}&gt;看得懂、算得准、动得了、说得清&lt;/Text&gt;&#13;&#10;    &lt;/Box&gt;&#13;&#10;    &lt;Box style={{ flexDirection: 'row', alignItems: 'center', gap: 6, padding: '5px 12px', background: '#EEF1FE', border: '1px solid #DDE2F5', borderRadius: 999 }}&gt;&#13;&#10;      &lt;Box style={{ width: 6, height: 6, borderRadius: 3, background: '#4C4DDC' }} /&gt;&#13;&#10;      &lt;Text style={{ fontSize: 12, color: '#4C4DDC', fontWeight: 'bold', letterSpacing: 1 }}&gt;AI 掌柜&lt;/Text&gt;&#13;&#10;    &lt;/Box&gt;&#13;&#10;  &lt;/Box&gt;&#13;&#10;  &lt;Box style={{ width: 72, height: 3, background: '#4C4DDC', borderRadius: 2, marginTop: 2, marginBottom: 12 }} /&gt;&#13;&#10;  &lt;Box style={{ flex: 1, paddingTop: 8 }}&gt;&#13;&#10;    &lt;Box style={{ flexDirection: 'row', gap: 18, height: 250 }}&gt;&#13;&#10;      &lt;Box style={{ flex: 1, background: '#FFFFFF', border: '1px solid #E3E8F5', borderRadius: 14, padding: 24 }}&gt;&#13;&#10;        &lt;Text style={{ fontSize: 20, fontWeight: 'bold', color: '#4C4DDC' }}&gt;看得懂&lt;/Text&gt;&#13;&#10;        &lt;Text style={{ fontSize: 15, color: '#0C1222', marginTop: 12, lineHeight: 1.75 }}&gt;营收 · 客流 · 毛利&lt;br /&gt;时段 · 翻台 · 会员结构&lt;/Text&gt;&#13;&#10;        &lt;Text style={{ fontSize: 13, color: '#5C6780', marginTop: 16 }}&gt;180 天 / 6,803 单&lt;/Text&gt;&#13;&#10;      &lt;/Box&gt;&#13;&#10;      &lt;Box style={{ flex: 1, background: '#FFFFFF', border: '1px solid #E3E8F5', borderRadius: 14, padding: 24 }}&gt;&#13;&#10;        &lt;Text style={{ fontSize: 20, fontWeight: 'bold', color: '#4C4DDC' }}&gt;算得准&lt;/Text&gt;&#13;&#10;        &lt;Text style={{ fontSize: 15, color: '#0C1222', marginTop: 12, lineHeight: 1.75 }}&gt;指标唯一口径&lt;br /&gt;BOM 成本 · 三层预测 · 经营推演&lt;/Text&gt;&#13;&#10;        &lt;Text style={{ fontSize: 13, color: '#5C6780', marginTop: 16 }}&gt;回测误差约 30%（含异常周）&lt;/Text&gt;&#13;&#10;      &lt;/Box&gt;&#13;&#10;      &lt;Box style={{ flex: 1, background: '#FFFFFF', border: '1px solid #E3E8F5', borderRadius: 14, padding: 24 }}&gt;&#13;&#10;        &lt;Text style={{ fontSize: 20, fontWeight: 'bold', color: '#4C4DDC' }}&gt;动得了&lt;/Text&gt;&#13;&#10;        &lt;Text style={{ fontSize: 15, color: '#0C1222', marginTop: 12, lineHeight: 1.75 }}&gt;生成采购单 · 按毛利调价&lt;br /&gt;滞销菜设为主推&lt;/Text&gt;&#13;&#10;        &lt;Text style={{ fontSize: 13, color: '#5C6780', marginTop: 16 }}&gt;3 类动作 · 全部可撤销&lt;/Text&gt;&#13;&#10;      &lt;/Box&gt;&#13;&#10;      &lt;Box style={{ flex: 1, background: '#FFFFFF', border: '1px solid #E3E8F5', borderRadius: 14, padding: 24 }}&gt;&#13;&#10;        &lt;Text style={{ fontSize: 20, fontWeight: 'bold', color: '#4C4DDC' }}&gt;说得清&lt;/Text&gt;&#13;&#10;        &lt;Text style={{ fontSize: 15, color: '#0C1222', marginTop: 12, lineHeight: 1.75 }}&gt;每条结论附证据 SQL&lt;br /&gt;操作留痕 · 一键回滚&lt;/Text&gt;&#13;&#10;        &lt;Text style={{ fontSize: 13, color: '#5C6780', marginTop: 16 }}&gt;8 条越界语句 100% 拦截&lt;/Text&gt;&#13;&#10;      &lt;/Box&gt;&#13;&#10;    &lt;/Box&gt;&#13;&#10;    &lt;Box style={{ marginTop: 28, background: '#FBFCFE', border: '1px solid #E3E8F5', borderRadius: 12, padding: '20px 24px', flexDirection: 'row', alignItems: 'center', gap: 18 }}&gt;&#13;&#10;      &lt;Text style={{ fontSize: 15, color: '#5C6780', width: 110 }}&gt;串联起来&lt;/Text&gt;&#13;&#10;      &lt;Text style={{ fontSize: 17, color: '#0C1222' }}&gt;看到异常 → 算清原因 → 直接处理 → 留下证据，四步在同一屏里完成。&lt;/Text&gt;&#13;&#10;    &lt;/Box&gt;&#13;&#10;  &lt;/Box&gt;&#13;&#10;  &lt;Box style={{ height: 36, flexDirection: 'row', justifyContent: 'space-between', alignItems: 'flex-end' }}&gt;&#13;&#10;    &lt;Text style={{ fontSize: 12, color: '#8A93A8' }}&gt;2026 武汉 1024 · 产业应用赛道&lt;/Text&gt;&#13;&#10;    &lt;Text style={{ fontSize: 12, color: '#8A93A8' }}&gt;04 / 12&lt;/Text&gt;&#13;&#10;  &lt;/Box&gt;&#13;&#10;&lt;/Slide&gt;"/>
+        <p:cNvPr id="189" name="" descr="&lt;Slide style={{ width: 1280, height: 720, background: '#F6F8FD', padding: '56px 72px', flexDirection: 'column' }}&gt;&#13;&#10;  &lt;Box style={{ height: 96, flexDirection: 'row', justifyContent: 'space-between', alignItems: 'flex-start' }}&gt;&#13;&#10;    &lt;Box style={{ flexDirection: 'column', gap: 8 }}&gt;&#13;&#10;      &lt;Text style={{ fontSize: 34, fontWeight: 'bold', color: '#0C1222' }}&gt;四块能力，缺一块都落不了地&lt;/Text&gt;&#13;&#10;      &lt;Text style={{ fontSize: 15, color: '#5C6780' }}&gt;看得懂、算得准、动得了、说得清&lt;/Text&gt;&#13;&#10;    &lt;/Box&gt;&#13;&#10;    &lt;Box style={{ flexDirection: 'row', alignItems: 'center', gap: 6, padding: '5px 12px', background: '#EEF1FE', border: '1px solid #DDE2F5', borderRadius: 999 }}&gt;&#13;&#10;      &lt;Box style={{ width: 6, height: 6, borderRadius: 3, background: '#4C4DDC' }} /&gt;&#13;&#10;      &lt;Text style={{ fontSize: 12, color: '#4C4DDC', fontWeight: 'bold', letterSpacing: 1 }}&gt;AI 掌柜&lt;/Text&gt;&#13;&#10;    &lt;/Box&gt;&#13;&#10;  &lt;/Box&gt;&#13;&#10;  &lt;Box style={{ width: 72, height: 3, background: '#4C4DDC', borderRadius: 2, marginTop: 2, marginBottom: 12 }} /&gt;&#13;&#10;  &lt;Box style={{ flex: 1, paddingTop: 8 }}&gt;&#13;&#10;    &lt;Box style={{ flexDirection: 'row', gap: 18, height: 250 }}&gt;&#13;&#10;      &lt;Box style={{ flex: 1, background: '#FFFFFF', border: '1px solid #E3E8F5', borderRadius: 14, padding: 24 }}&gt;&#13;&#10;        &lt;Text style={{ fontSize: 20, fontWeight: 'bold', color: '#4C4DDC' }}&gt;看得懂&lt;/Text&gt;&#13;&#10;        &lt;Text style={{ fontSize: 15, color: '#0C1222', marginTop: 12, lineHeight: 1.75 }}&gt;营收 · 客流 · 毛利&lt;br /&gt;时段 · 翻台 · 会员结构&lt;/Text&gt;&#13;&#10;        &lt;Text style={{ fontSize: 13, color: '#5C6780', marginTop: 16 }}&gt;180 天 / 6,803 单&lt;/Text&gt;&#13;&#10;      &lt;/Box&gt;&#13;&#10;      &lt;Box style={{ flex: 1, background: '#FFFFFF', border: '1px solid #E3E8F5', borderRadius: 14, padding: 24 }}&gt;&#13;&#10;        &lt;Text style={{ fontSize: 20, fontWeight: 'bold', color: '#4C4DDC' }}&gt;算得准&lt;/Text&gt;&#13;&#10;        &lt;Text style={{ fontSize: 15, color: '#0C1222', marginTop: 12, lineHeight: 1.75 }}&gt;指标唯一口径&lt;br /&gt;BOM 成本 · 三层预测 · 经营推演&lt;/Text&gt;&#13;&#10;        &lt;Text style={{ fontSize: 13, color: '#5C6780', marginTop: 16 }}&gt;回测误差约 30%（含异常周）&lt;/Text&gt;&#13;&#10;      &lt;/Box&gt;&#13;&#10;      &lt;Box style={{ flex: 1, background: '#FFFFFF', border: '1px solid #E3E8F5', borderRadius: 14, padding: 24 }}&gt;&#13;&#10;        &lt;Text style={{ fontSize: 20, fontWeight: 'bold', color: '#4C4DDC' }}&gt;动得了&lt;/Text&gt;&#13;&#10;        &lt;Text style={{ fontSize: 15, color: '#0C1222', marginTop: 12, lineHeight: 1.75 }}&gt;生成采购单 · 按毛利调价&lt;br /&gt;滞销菜设为主推&lt;/Text&gt;&#13;&#10;        &lt;Text style={{ fontSize: 13, color: '#5C6780', marginTop: 16 }}&gt;3 类动作 · 全部可撤销&lt;/Text&gt;&#13;&#10;      &lt;/Box&gt;&#13;&#10;      &lt;Box style={{ flex: 1, background: '#FFFFFF', border: '1px solid #E3E8F5', borderRadius: 14, padding: 24 }}&gt;&#13;&#10;        &lt;Text style={{ fontSize: 20, fontWeight: 'bold', color: '#4C4DDC' }}&gt;说得清&lt;/Text&gt;&#13;&#10;        &lt;Text style={{ fontSize: 15, color: '#0C1222', marginTop: 12, lineHeight: 1.75 }}&gt;每条结论附证据 SQL&lt;br /&gt;操作留痕 · 一键回滚&lt;/Text&gt;&#13;&#10;        &lt;Text style={{ fontSize: 13, color: '#5C6780', marginTop: 16 }}&gt;8 条越界语句 100% 拦截&lt;/Text&gt;&#13;&#10;      &lt;/Box&gt;&#13;&#10;    &lt;/Box&gt;&#13;&#10;    &lt;Box style={{ marginTop: 28, background: '#FBFCFE', border: '1px solid #E3E8F5', borderRadius: 12, padding: '20px 24px', flexDirection: 'row', alignItems: 'center', gap: 18 }}&gt;&#13;&#10;      &lt;Text style={{ fontSize: 15, color: '#5C6780', width: 110 }}&gt;串联起来&lt;/Text&gt;&#13;&#10;      &lt;Text style={{ fontSize: 17, color: '#0C1222' }}&gt;看到异常 → 算清原因 → 直接处理 → 留下证据，四步在同一屏里完成。&lt;/Text&gt;&#13;&#10;    &lt;/Box&gt;&#13;&#10;  &lt;/Box&gt;&#13;&#10;  &lt;Box style={{ height: 36, flexDirection: 'row', justifyContent: 'space-between', alignItems: 'flex-end' }}&gt;&#13;&#10;    &lt;Text style={{ fontSize: 12, color: '#8A93A8' }}&gt;2026 武汉 1024 · 产业应用赛道&lt;/Text&gt;&#13;&#10;    &lt;Text style={{ fontSize: 12, color: '#8A93A8' }}&gt;04 / 12&lt;/Text&gt;&#13;&#10;  &lt;/Box&gt;&#13;&#10;&lt;/Slide&gt;"/>
         <p:cNvGrpSpPr/>
         <p:nvPr/>
       </p:nvGrpSpPr>
@@ -7447,7 +9031,7 @@
       </p:grpSpPr>
       <p:sp>
         <p:nvSpPr>
-          <p:cNvPr id="161" name=""/>
+          <p:cNvPr id="190" name=""/>
           <p:cNvSpPr/>
           <p:nvPr/>
         </p:nvSpPr>
@@ -7471,7 +9055,7 @@
       </p:sp>
       <p:sp>
         <p:nvSpPr>
-          <p:cNvPr id="162" name="" descr="{&quot;isTemplate&quot;:true,&quot;type&quot;:&quot;text&quot;}"/>
+          <p:cNvPr id="191" name="" descr="{&quot;isTemplate&quot;:true,&quot;type&quot;:&quot;text&quot;}"/>
           <p:cNvSpPr txBox="1"/>
           <p:nvPr/>
         </p:nvSpPr>
@@ -7506,7 +9090,7 @@
       </p:sp>
       <p:sp>
         <p:nvSpPr>
-          <p:cNvPr id="163" name="" descr="{&quot;isTemplate&quot;:true,&quot;type&quot;:&quot;text&quot;}"/>
+          <p:cNvPr id="192" name="" descr="{&quot;isTemplate&quot;:true,&quot;type&quot;:&quot;text&quot;}"/>
           <p:cNvSpPr txBox="1"/>
           <p:nvPr/>
         </p:nvSpPr>
@@ -7541,7 +9125,7 @@
       </p:sp>
       <p:sp>
         <p:nvSpPr>
-          <p:cNvPr id="164" name=""/>
+          <p:cNvPr id="193" name=""/>
           <p:cNvSpPr/>
           <p:nvPr/>
         </p:nvSpPr>
@@ -7572,7 +9156,7 @@
       </p:sp>
       <p:sp>
         <p:nvSpPr>
-          <p:cNvPr id="165" name=""/>
+          <p:cNvPr id="194" name=""/>
           <p:cNvSpPr/>
           <p:nvPr/>
         </p:nvSpPr>
@@ -7598,7 +9182,7 @@
       </p:sp>
       <p:sp>
         <p:nvSpPr>
-          <p:cNvPr id="166" name="" descr="{&quot;isTemplate&quot;:true,&quot;type&quot;:&quot;text&quot;}"/>
+          <p:cNvPr id="195" name="" descr="{&quot;isTemplate&quot;:true,&quot;type&quot;:&quot;text&quot;}"/>
           <p:cNvSpPr txBox="1"/>
           <p:nvPr/>
         </p:nvSpPr>
@@ -7643,7 +9227,7 @@
       </p:sp>
       <p:sp>
         <p:nvSpPr>
-          <p:cNvPr id="167" name=""/>
+          <p:cNvPr id="196" name=""/>
           <p:cNvSpPr/>
           <p:nvPr/>
         </p:nvSpPr>
@@ -7669,7 +9253,7 @@
       </p:sp>
       <p:sp>
         <p:nvSpPr>
-          <p:cNvPr id="168" name=""/>
+          <p:cNvPr id="197" name=""/>
           <p:cNvSpPr/>
           <p:nvPr/>
         </p:nvSpPr>
@@ -7700,7 +9284,7 @@
       </p:sp>
       <p:sp>
         <p:nvSpPr>
-          <p:cNvPr id="169" name="" descr="{&quot;isTemplate&quot;:true,&quot;type&quot;:&quot;text&quot;}"/>
+          <p:cNvPr id="198" name="" descr="{&quot;isTemplate&quot;:true,&quot;type&quot;:&quot;text&quot;}"/>
           <p:cNvSpPr txBox="1"/>
           <p:nvPr/>
         </p:nvSpPr>
@@ -7735,7 +9319,7 @@
       </p:sp>
       <p:sp>
         <p:nvSpPr>
-          <p:cNvPr id="170" name="" descr="{&quot;isTemplate&quot;:true,&quot;type&quot;:&quot;text&quot;}"/>
+          <p:cNvPr id="199" name="" descr="{&quot;isTemplate&quot;:true,&quot;type&quot;:&quot;text&quot;}"/>
           <p:cNvSpPr txBox="1"/>
           <p:nvPr/>
         </p:nvSpPr>
@@ -7868,7 +9452,7 @@
       </p:sp>
       <p:sp>
         <p:nvSpPr>
-          <p:cNvPr id="171" name="" descr="{&quot;isTemplate&quot;:true,&quot;type&quot;:&quot;text&quot;}"/>
+          <p:cNvPr id="200" name="" descr="{&quot;isTemplate&quot;:true,&quot;type&quot;:&quot;text&quot;}"/>
           <p:cNvSpPr txBox="1"/>
           <p:nvPr/>
         </p:nvSpPr>
@@ -7933,7 +9517,7 @@
       </p:sp>
       <p:sp>
         <p:nvSpPr>
-          <p:cNvPr id="172" name=""/>
+          <p:cNvPr id="201" name=""/>
           <p:cNvSpPr/>
           <p:nvPr/>
         </p:nvSpPr>
@@ -7964,7 +9548,7 @@
       </p:sp>
       <p:sp>
         <p:nvSpPr>
-          <p:cNvPr id="173" name="" descr="{&quot;isTemplate&quot;:true,&quot;type&quot;:&quot;text&quot;}"/>
+          <p:cNvPr id="202" name="" descr="{&quot;isTemplate&quot;:true,&quot;type&quot;:&quot;text&quot;}"/>
           <p:cNvSpPr txBox="1"/>
           <p:nvPr/>
         </p:nvSpPr>
@@ -7999,7 +9583,7 @@
       </p:sp>
       <p:sp>
         <p:nvSpPr>
-          <p:cNvPr id="174" name="" descr="{&quot;isTemplate&quot;:true,&quot;type&quot;:&quot;text&quot;}"/>
+          <p:cNvPr id="203" name="" descr="{&quot;isTemplate&quot;:true,&quot;type&quot;:&quot;text&quot;}"/>
           <p:cNvSpPr txBox="1"/>
           <p:nvPr/>
         </p:nvSpPr>
@@ -8102,7 +9686,7 @@
       </p:sp>
       <p:sp>
         <p:nvSpPr>
-          <p:cNvPr id="175" name="" descr="{&quot;isTemplate&quot;:true,&quot;type&quot;:&quot;text&quot;}"/>
+          <p:cNvPr id="204" name="" descr="{&quot;isTemplate&quot;:true,&quot;type&quot;:&quot;text&quot;}"/>
           <p:cNvSpPr txBox="1"/>
           <p:nvPr/>
         </p:nvSpPr>
@@ -8157,7 +9741,7 @@
       </p:sp>
       <p:sp>
         <p:nvSpPr>
-          <p:cNvPr id="176" name=""/>
+          <p:cNvPr id="205" name=""/>
           <p:cNvSpPr/>
           <p:nvPr/>
         </p:nvSpPr>
@@ -8188,7 +9772,7 @@
       </p:sp>
       <p:sp>
         <p:nvSpPr>
-          <p:cNvPr id="177" name="" descr="{&quot;isTemplate&quot;:true,&quot;type&quot;:&quot;text&quot;}"/>
+          <p:cNvPr id="206" name="" descr="{&quot;isTemplate&quot;:true,&quot;type&quot;:&quot;text&quot;}"/>
           <p:cNvSpPr txBox="1"/>
           <p:nvPr/>
         </p:nvSpPr>
@@ -8223,7 +9807,7 @@
       </p:sp>
       <p:sp>
         <p:nvSpPr>
-          <p:cNvPr id="178" name="" descr="{&quot;isTemplate&quot;:true,&quot;type&quot;:&quot;text&quot;}"/>
+          <p:cNvPr id="207" name="" descr="{&quot;isTemplate&quot;:true,&quot;type&quot;:&quot;text&quot;}"/>
           <p:cNvSpPr txBox="1"/>
           <p:nvPr/>
         </p:nvSpPr>
@@ -8296,7 +9880,7 @@
       </p:sp>
       <p:sp>
         <p:nvSpPr>
-          <p:cNvPr id="179" name="" descr="{&quot;isTemplate&quot;:true,&quot;type&quot;:&quot;text&quot;}"/>
+          <p:cNvPr id="208" name="" descr="{&quot;isTemplate&quot;:true,&quot;type&quot;:&quot;text&quot;}"/>
           <p:cNvSpPr txBox="1"/>
           <p:nvPr/>
         </p:nvSpPr>
@@ -8361,7 +9945,7 @@
       </p:sp>
       <p:sp>
         <p:nvSpPr>
-          <p:cNvPr id="180" name=""/>
+          <p:cNvPr id="209" name=""/>
           <p:cNvSpPr/>
           <p:nvPr/>
         </p:nvSpPr>
@@ -8392,7 +9976,7 @@
       </p:sp>
       <p:sp>
         <p:nvSpPr>
-          <p:cNvPr id="181" name="" descr="{&quot;isTemplate&quot;:true,&quot;type&quot;:&quot;text&quot;}"/>
+          <p:cNvPr id="210" name="" descr="{&quot;isTemplate&quot;:true,&quot;type&quot;:&quot;text&quot;}"/>
           <p:cNvSpPr txBox="1"/>
           <p:nvPr/>
         </p:nvSpPr>
@@ -8427,7 +10011,7 @@
       </p:sp>
       <p:sp>
         <p:nvSpPr>
-          <p:cNvPr id="182" name="" descr="{&quot;isTemplate&quot;:true,&quot;type&quot;:&quot;text&quot;}"/>
+          <p:cNvPr id="211" name="" descr="{&quot;isTemplate&quot;:true,&quot;type&quot;:&quot;text&quot;}"/>
           <p:cNvSpPr txBox="1"/>
           <p:nvPr/>
         </p:nvSpPr>
@@ -8510,7 +10094,7 @@
       </p:sp>
       <p:sp>
         <p:nvSpPr>
-          <p:cNvPr id="183" name="" descr="{&quot;isTemplate&quot;:true,&quot;type&quot;:&quot;text&quot;}"/>
+          <p:cNvPr id="212" name="" descr="{&quot;isTemplate&quot;:true,&quot;type&quot;:&quot;text&quot;}"/>
           <p:cNvSpPr txBox="1"/>
           <p:nvPr/>
         </p:nvSpPr>
@@ -8575,7 +10159,7 @@
       </p:sp>
       <p:sp>
         <p:nvSpPr>
-          <p:cNvPr id="184" name=""/>
+          <p:cNvPr id="213" name=""/>
           <p:cNvSpPr/>
           <p:nvPr/>
         </p:nvSpPr>
@@ -8606,7 +10190,7 @@
       </p:sp>
       <p:sp>
         <p:nvSpPr>
-          <p:cNvPr id="185" name="" descr="{&quot;isTemplate&quot;:true,&quot;type&quot;:&quot;text&quot;}"/>
+          <p:cNvPr id="214" name="" descr="{&quot;isTemplate&quot;:true,&quot;type&quot;:&quot;text&quot;}"/>
           <p:cNvSpPr txBox="1"/>
           <p:nvPr/>
         </p:nvSpPr>
@@ -8641,7 +10225,7 @@
       </p:sp>
       <p:sp>
         <p:nvSpPr>
-          <p:cNvPr id="186" name="" descr="{&quot;isTemplate&quot;:true,&quot;type&quot;:&quot;text&quot;}"/>
+          <p:cNvPr id="215" name="" descr="{&quot;isTemplate&quot;:true,&quot;type&quot;:&quot;text&quot;}"/>
           <p:cNvSpPr txBox="1"/>
           <p:nvPr/>
         </p:nvSpPr>
@@ -8736,7 +10320,7 @@
       </p:sp>
       <p:sp>
         <p:nvSpPr>
-          <p:cNvPr id="187" name="" descr="{&quot;isTemplate&quot;:true,&quot;type&quot;:&quot;text&quot;}"/>
+          <p:cNvPr id="216" name="" descr="{&quot;isTemplate&quot;:true,&quot;type&quot;:&quot;text&quot;}"/>
           <p:cNvSpPr txBox="1"/>
           <p:nvPr/>
         </p:nvSpPr>
@@ -8801,7 +10385,7 @@
       </p:sp>
       <p:sp>
         <p:nvSpPr>
-          <p:cNvPr id="188" name="" descr="{&quot;isTemplate&quot;:true,&quot;type&quot;:&quot;text&quot;}"/>
+          <p:cNvPr id="217" name="" descr="{&quot;isTemplate&quot;:true,&quot;type&quot;:&quot;text&quot;}"/>
           <p:cNvSpPr txBox="1"/>
           <p:nvPr/>
         </p:nvSpPr>
@@ -8844,7 +10428,7 @@
   <p:cSld>
     <p:spTree>
       <p:nvGrpSpPr>
-        <p:cNvPr id="189" name=""/>
+        <p:cNvPr id="218" name=""/>
         <p:cNvGrpSpPr/>
         <p:nvPr/>
       </p:nvGrpSpPr>
@@ -8858,7 +10442,7 @@
       </p:grpSpPr>
       <p:sp>
         <p:nvSpPr>
-          <p:cNvPr id="190" name=""/>
+          <p:cNvPr id="219" name=""/>
           <p:cNvSpPr/>
           <p:nvPr/>
         </p:nvSpPr>
@@ -8885,7 +10469,7 @@
       </p:sp>
       <p:sp>
         <p:nvSpPr>
-          <p:cNvPr id="191" name="" descr="{&quot;isTemplate&quot;:true,&quot;type&quot;:&quot;text&quot;}"/>
+          <p:cNvPr id="220" name="" descr="{&quot;isTemplate&quot;:true,&quot;type&quot;:&quot;text&quot;}"/>
           <p:cNvSpPr txBox="1"/>
           <p:nvPr/>
         </p:nvSpPr>
@@ -8920,7 +10504,7 @@
       </p:sp>
       <p:sp>
         <p:nvSpPr>
-          <p:cNvPr id="192" name="" descr="{&quot;isTemplate&quot;:true,&quot;type&quot;:&quot;text&quot;}"/>
+          <p:cNvPr id="221" name="" descr="{&quot;isTemplate&quot;:true,&quot;type&quot;:&quot;text&quot;}"/>
           <p:cNvSpPr txBox="1"/>
           <p:nvPr/>
         </p:nvSpPr>
@@ -8975,7 +10559,7 @@
       </p:sp>
       <p:sp>
         <p:nvSpPr>
-          <p:cNvPr id="193" name=""/>
+          <p:cNvPr id="222" name=""/>
           <p:cNvSpPr/>
           <p:nvPr/>
         </p:nvSpPr>
@@ -9009,7 +10593,7 @@
       </p:sp>
       <p:sp>
         <p:nvSpPr>
-          <p:cNvPr id="194" name=""/>
+          <p:cNvPr id="223" name=""/>
           <p:cNvSpPr/>
           <p:nvPr/>
         </p:nvSpPr>
@@ -9038,7 +10622,7 @@
       </p:sp>
       <p:sp>
         <p:nvSpPr>
-          <p:cNvPr id="195" name="" descr="{&quot;isTemplate&quot;:true,&quot;type&quot;:&quot;text&quot;}"/>
+          <p:cNvPr id="224" name="" descr="{&quot;isTemplate&quot;:true,&quot;type&quot;:&quot;text&quot;}"/>
           <p:cNvSpPr txBox="1"/>
           <p:nvPr/>
         </p:nvSpPr>
@@ -9083,7 +10667,7 @@
       </p:sp>
       <p:sp>
         <p:nvSpPr>
-          <p:cNvPr id="196" name=""/>
+          <p:cNvPr id="225" name=""/>
           <p:cNvSpPr/>
           <p:nvPr/>
         </p:nvSpPr>
@@ -9112,7 +10696,7 @@
       </p:sp>
       <p:sp>
         <p:nvSpPr>
-          <p:cNvPr id="197" name=""/>
+          <p:cNvPr id="226" name=""/>
           <p:cNvSpPr/>
           <p:nvPr/>
         </p:nvSpPr>
@@ -9146,7 +10730,7 @@
       </p:sp>
       <p:sp>
         <p:nvSpPr>
-          <p:cNvPr id="198" name="" descr="{&quot;isTemplate&quot;:true,&quot;type&quot;:&quot;text&quot;}"/>
+          <p:cNvPr id="227" name="" descr="{&quot;isTemplate&quot;:true,&quot;type&quot;:&quot;text&quot;}"/>
           <p:cNvSpPr txBox="1"/>
           <p:nvPr/>
         </p:nvSpPr>
@@ -9221,7 +10805,7 @@
       </p:sp>
       <p:sp>
         <p:nvSpPr>
-          <p:cNvPr id="199" name="" descr="{&quot;isTemplate&quot;:true,&quot;type&quot;:&quot;text&quot;}"/>
+          <p:cNvPr id="228" name="" descr="{&quot;isTemplate&quot;:true,&quot;type&quot;:&quot;text&quot;}"/>
           <p:cNvSpPr txBox="1"/>
           <p:nvPr/>
         </p:nvSpPr>
@@ -9256,7 +10840,7 @@
       </p:sp>
       <p:sp>
         <p:nvSpPr>
-          <p:cNvPr id="200" name="" descr="{&quot;isTemplate&quot;:true,&quot;type&quot;:&quot;text&quot;}"/>
+          <p:cNvPr id="229" name="" descr="{&quot;isTemplate&quot;:true,&quot;type&quot;:&quot;text&quot;}"/>
           <p:cNvSpPr txBox="1"/>
           <p:nvPr/>
         </p:nvSpPr>
@@ -9407,7 +10991,7 @@
       </p:sp>
       <p:sp>
         <p:nvSpPr>
-          <p:cNvPr id="201" name=""/>
+          <p:cNvPr id="230" name=""/>
           <p:cNvSpPr/>
           <p:nvPr/>
         </p:nvSpPr>
@@ -9441,7 +11025,7 @@
       </p:sp>
       <p:sp>
         <p:nvSpPr>
-          <p:cNvPr id="202" name="" descr="{&quot;isTemplate&quot;:true,&quot;type&quot;:&quot;text&quot;}"/>
+          <p:cNvPr id="231" name="" descr="{&quot;isTemplate&quot;:true,&quot;type&quot;:&quot;text&quot;}"/>
           <p:cNvSpPr txBox="1"/>
           <p:nvPr/>
         </p:nvSpPr>
@@ -9516,7 +11100,7 @@
       </p:sp>
       <p:sp>
         <p:nvSpPr>
-          <p:cNvPr id="203" name="" descr="{&quot;isTemplate&quot;:true,&quot;type&quot;:&quot;text&quot;}"/>
+          <p:cNvPr id="232" name="" descr="{&quot;isTemplate&quot;:true,&quot;type&quot;:&quot;text&quot;}"/>
           <p:cNvSpPr txBox="1"/>
           <p:nvPr/>
         </p:nvSpPr>
@@ -9551,7 +11135,7 @@
       </p:sp>
       <p:sp>
         <p:nvSpPr>
-          <p:cNvPr id="204" name="" descr="{&quot;isTemplate&quot;:true,&quot;type&quot;:&quot;text&quot;}"/>
+          <p:cNvPr id="233" name="" descr="{&quot;isTemplate&quot;:true,&quot;type&quot;:&quot;text&quot;}"/>
           <p:cNvSpPr txBox="1"/>
           <p:nvPr/>
         </p:nvSpPr>
@@ -9662,7 +11246,7 @@
       </p:sp>
       <p:sp>
         <p:nvSpPr>
-          <p:cNvPr id="205" name=""/>
+          <p:cNvPr id="234" name=""/>
           <p:cNvSpPr/>
           <p:nvPr/>
         </p:nvSpPr>
@@ -9696,7 +11280,7 @@
       </p:sp>
       <p:sp>
         <p:nvSpPr>
-          <p:cNvPr id="206" name="" descr="{&quot;isTemplate&quot;:true,&quot;type&quot;:&quot;text&quot;}"/>
+          <p:cNvPr id="235" name="" descr="{&quot;isTemplate&quot;:true,&quot;type&quot;:&quot;text&quot;}"/>
           <p:cNvSpPr txBox="1"/>
           <p:nvPr/>
         </p:nvSpPr>
@@ -9771,7 +11355,7 @@
       </p:sp>
       <p:sp>
         <p:nvSpPr>
-          <p:cNvPr id="207" name="" descr="{&quot;isTemplate&quot;:true,&quot;type&quot;:&quot;text&quot;}"/>
+          <p:cNvPr id="236" name="" descr="{&quot;isTemplate&quot;:true,&quot;type&quot;:&quot;text&quot;}"/>
           <p:cNvSpPr txBox="1"/>
           <p:nvPr/>
         </p:nvSpPr>
@@ -9806,7 +11390,7 @@
       </p:sp>
       <p:sp>
         <p:nvSpPr>
-          <p:cNvPr id="208" name="" descr="{&quot;isTemplate&quot;:true,&quot;type&quot;:&quot;text&quot;}"/>
+          <p:cNvPr id="237" name="" descr="{&quot;isTemplate&quot;:true,&quot;type&quot;:&quot;text&quot;}"/>
           <p:cNvSpPr txBox="1"/>
           <p:nvPr/>
         </p:nvSpPr>
@@ -9917,7 +11501,7 @@
       </p:sp>
       <p:sp>
         <p:nvSpPr>
-          <p:cNvPr id="209" name=""/>
+          <p:cNvPr id="238" name=""/>
           <p:cNvSpPr/>
           <p:nvPr/>
         </p:nvSpPr>
@@ -9951,7 +11535,7 @@
       </p:sp>
       <p:sp>
         <p:nvSpPr>
-          <p:cNvPr id="210" name="" descr="{&quot;isTemplate&quot;:true,&quot;type&quot;:&quot;text&quot;}"/>
+          <p:cNvPr id="239" name="" descr="{&quot;isTemplate&quot;:true,&quot;type&quot;:&quot;text&quot;}"/>
           <p:cNvSpPr txBox="1"/>
           <p:nvPr/>
         </p:nvSpPr>
@@ -10006,7 +11590,7 @@
       </p:sp>
       <p:sp>
         <p:nvSpPr>
-          <p:cNvPr id="211" name="" descr="{&quot;isTemplate&quot;:true,&quot;type&quot;:&quot;text&quot;}"/>
+          <p:cNvPr id="240" name="" descr="{&quot;isTemplate&quot;:true,&quot;type&quot;:&quot;text&quot;}"/>
           <p:cNvSpPr txBox="1"/>
           <p:nvPr/>
         </p:nvSpPr>
@@ -10101,7 +11685,7 @@
       </p:sp>
       <p:sp>
         <p:nvSpPr>
-          <p:cNvPr id="212" name="" descr="{&quot;isTemplate&quot;:true,&quot;type&quot;:&quot;text&quot;}"/>
+          <p:cNvPr id="241" name="" descr="{&quot;isTemplate&quot;:true,&quot;type&quot;:&quot;text&quot;}"/>
           <p:cNvSpPr txBox="1"/>
           <p:nvPr/>
         </p:nvSpPr>
@@ -10176,7 +11760,7 @@
       </p:sp>
       <p:sp>
         <p:nvSpPr>
-          <p:cNvPr id="213" name=""/>
+          <p:cNvPr id="242" name=""/>
           <p:cNvSpPr/>
           <p:nvPr/>
         </p:nvSpPr>
@@ -10219,7 +11803,7 @@
       </p:sp>
       <p:sp>
         <p:nvSpPr>
-          <p:cNvPr id="214" name="" descr="{&quot;isTemplate&quot;:true,&quot;type&quot;:&quot;text&quot;}"/>
+          <p:cNvPr id="243" name="" descr="{&quot;isTemplate&quot;:true,&quot;type&quot;:&quot;text&quot;}"/>
           <p:cNvSpPr txBox="1"/>
           <p:nvPr/>
         </p:nvSpPr>
@@ -10264,7 +11848,7 @@
       </p:sp>
       <p:sp>
         <p:nvSpPr>
-          <p:cNvPr id="215" name="" descr="{&quot;isTemplate&quot;:true,&quot;type&quot;:&quot;text&quot;}"/>
+          <p:cNvPr id="244" name="" descr="{&quot;isTemplate&quot;:true,&quot;type&quot;:&quot;text&quot;}"/>
           <p:cNvSpPr txBox="1"/>
           <p:nvPr/>
         </p:nvSpPr>
@@ -10299,7 +11883,7 @@
       </p:sp>
       <p:sp>
         <p:nvSpPr>
-          <p:cNvPr id="216" name="" descr="{&quot;isTemplate&quot;:true,&quot;type&quot;:&quot;text&quot;}"/>
+          <p:cNvPr id="245" name="" descr="{&quot;isTemplate&quot;:true,&quot;type&quot;:&quot;text&quot;}"/>
           <p:cNvSpPr txBox="1"/>
           <p:nvPr/>
         </p:nvSpPr>
@@ -10344,7 +11928,7 @@
       </p:sp>
       <p:sp>
         <p:nvSpPr>
-          <p:cNvPr id="217" name="" descr="{&quot;isTemplate&quot;:true,&quot;type&quot;:&quot;text&quot;}"/>
+          <p:cNvPr id="246" name="" descr="{&quot;isTemplate&quot;:true,&quot;type&quot;:&quot;text&quot;}"/>
           <p:cNvSpPr txBox="1"/>
           <p:nvPr/>
         </p:nvSpPr>
@@ -10379,7 +11963,7 @@
       </p:sp>
       <p:sp>
         <p:nvSpPr>
-          <p:cNvPr id="218" name="" descr="{&quot;isTemplate&quot;:true,&quot;type&quot;:&quot;text&quot;}"/>
+          <p:cNvPr id="247" name="" descr="{&quot;isTemplate&quot;:true,&quot;type&quot;:&quot;text&quot;}"/>
           <p:cNvSpPr txBox="1"/>
           <p:nvPr/>
         </p:nvSpPr>
@@ -10424,7 +12008,7 @@
       </p:sp>
       <p:sp>
         <p:nvSpPr>
-          <p:cNvPr id="219" name="" descr="{&quot;isTemplate&quot;:true,&quot;type&quot;:&quot;text&quot;}"/>
+          <p:cNvPr id="248" name="" descr="{&quot;isTemplate&quot;:true,&quot;type&quot;:&quot;text&quot;}"/>
           <p:cNvSpPr txBox="1"/>
           <p:nvPr/>
         </p:nvSpPr>
@@ -10459,7 +12043,7 @@
       </p:sp>
       <p:sp>
         <p:nvSpPr>
-          <p:cNvPr id="220" name="" descr="{&quot;isTemplate&quot;:true,&quot;type&quot;:&quot;text&quot;}"/>
+          <p:cNvPr id="249" name="" descr="{&quot;isTemplate&quot;:true,&quot;type&quot;:&quot;text&quot;}"/>
           <p:cNvSpPr txBox="1"/>
           <p:nvPr/>
         </p:nvSpPr>
@@ -10504,7 +12088,7 @@
       </p:sp>
       <p:sp>
         <p:nvSpPr>
-          <p:cNvPr id="221" name="" descr="{&quot;isTemplate&quot;:true,&quot;type&quot;:&quot;text&quot;}"/>
+          <p:cNvPr id="250" name="" descr="{&quot;isTemplate&quot;:true,&quot;type&quot;:&quot;text&quot;}"/>
           <p:cNvSpPr txBox="1"/>
           <p:nvPr/>
         </p:nvSpPr>
@@ -10559,7 +12143,7 @@
       </p:sp>
       <p:sp>
         <p:nvSpPr>
-          <p:cNvPr id="222" name="" descr="{&quot;isTemplate&quot;:true,&quot;type&quot;:&quot;text&quot;}"/>
+          <p:cNvPr id="251" name="" descr="{&quot;isTemplate&quot;:true,&quot;type&quot;:&quot;text&quot;}"/>
           <p:cNvSpPr txBox="1"/>
           <p:nvPr/>
         </p:nvSpPr>
@@ -10624,7 +12208,7 @@
       </p:sp>
       <p:sp>
         <p:nvSpPr>
-          <p:cNvPr id="223" name="" descr="{&quot;isTemplate&quot;:true,&quot;type&quot;:&quot;text&quot;}"/>
+          <p:cNvPr id="252" name="" descr="{&quot;isTemplate&quot;:true,&quot;type&quot;:&quot;text&quot;}"/>
           <p:cNvSpPr txBox="1"/>
           <p:nvPr/>
         </p:nvSpPr>
@@ -10667,7 +12251,7 @@
   <p:cSld>
     <p:spTree>
       <p:nvGrpSpPr>
-        <p:cNvPr id="224" name=""/>
+        <p:cNvPr id="253" name=""/>
         <p:cNvGrpSpPr/>
         <p:nvPr/>
       </p:nvGrpSpPr>
@@ -10681,7 +12265,7 @@
       </p:grpSpPr>
       <p:sp>
         <p:nvSpPr>
-          <p:cNvPr id="225" name=""/>
+          <p:cNvPr id="254" name=""/>
           <p:cNvSpPr/>
           <p:nvPr/>
         </p:nvSpPr>
@@ -10708,7 +12292,7 @@
       </p:sp>
       <p:sp>
         <p:nvSpPr>
-          <p:cNvPr id="226" name="" descr="{&quot;isTemplate&quot;:true,&quot;type&quot;:&quot;text&quot;}"/>
+          <p:cNvPr id="255" name="" descr="{&quot;isTemplate&quot;:true,&quot;type&quot;:&quot;text&quot;}"/>
           <p:cNvSpPr txBox="1"/>
           <p:nvPr/>
         </p:nvSpPr>
@@ -10743,7 +12327,7 @@
       </p:sp>
       <p:sp>
         <p:nvSpPr>
-          <p:cNvPr id="227" name="" descr="{&quot;isTemplate&quot;:true,&quot;type&quot;:&quot;text&quot;}"/>
+          <p:cNvPr id="256" name="" descr="{&quot;isTemplate&quot;:true,&quot;type&quot;:&quot;text&quot;}"/>
           <p:cNvSpPr txBox="1"/>
           <p:nvPr/>
         </p:nvSpPr>
@@ -10838,7 +12422,7 @@
       </p:sp>
       <p:sp>
         <p:nvSpPr>
-          <p:cNvPr id="228" name=""/>
+          <p:cNvPr id="257" name=""/>
           <p:cNvSpPr/>
           <p:nvPr/>
         </p:nvSpPr>
@@ -10872,7 +12456,7 @@
       </p:sp>
       <p:sp>
         <p:nvSpPr>
-          <p:cNvPr id="229" name=""/>
+          <p:cNvPr id="258" name=""/>
           <p:cNvSpPr/>
           <p:nvPr/>
         </p:nvSpPr>
@@ -10901,7 +12485,7 @@
       </p:sp>
       <p:sp>
         <p:nvSpPr>
-          <p:cNvPr id="230" name="" descr="{&quot;isTemplate&quot;:true,&quot;type&quot;:&quot;text&quot;}"/>
+          <p:cNvPr id="259" name="" descr="{&quot;isTemplate&quot;:true,&quot;type&quot;:&quot;text&quot;}"/>
           <p:cNvSpPr txBox="1"/>
           <p:nvPr/>
         </p:nvSpPr>
@@ -10946,7 +12530,7 @@
       </p:sp>
       <p:sp>
         <p:nvSpPr>
-          <p:cNvPr id="231" name=""/>
+          <p:cNvPr id="260" name=""/>
           <p:cNvSpPr/>
           <p:nvPr/>
         </p:nvSpPr>
@@ -10975,7 +12559,7 @@
       </p:sp>
       <p:sp>
         <p:nvSpPr>
-          <p:cNvPr id="232" name=""/>
+          <p:cNvPr id="261" name=""/>
           <p:cNvSpPr/>
           <p:nvPr/>
         </p:nvSpPr>
@@ -11009,7 +12593,7 @@
       </p:sp>
       <p:sp>
         <p:nvSpPr>
-          <p:cNvPr id="233" name="" descr="{&quot;isTemplate&quot;:true,&quot;type&quot;:&quot;text&quot;}"/>
+          <p:cNvPr id="262" name="" descr="{&quot;isTemplate&quot;:true,&quot;type&quot;:&quot;text&quot;}"/>
           <p:cNvSpPr txBox="1"/>
           <p:nvPr/>
         </p:nvSpPr>
@@ -11044,7 +12628,7 @@
       </p:sp>
       <p:sp>
         <p:nvSpPr>
-          <p:cNvPr id="234" name="" descr="{&quot;isTemplate&quot;:true,&quot;type&quot;:&quot;text&quot;}"/>
+          <p:cNvPr id="263" name="" descr="{&quot;isTemplate&quot;:true,&quot;type&quot;:&quot;text&quot;}"/>
           <p:cNvSpPr txBox="1"/>
           <p:nvPr/>
         </p:nvSpPr>
@@ -11189,7 +12773,7 @@
       </p:sp>
       <p:sp>
         <p:nvSpPr>
-          <p:cNvPr id="235" name=""/>
+          <p:cNvPr id="264" name=""/>
           <p:cNvSpPr/>
           <p:nvPr/>
         </p:nvSpPr>
@@ -11223,7 +12807,7 @@
       </p:sp>
       <p:sp>
         <p:nvSpPr>
-          <p:cNvPr id="236" name="" descr="{&quot;isTemplate&quot;:true,&quot;type&quot;:&quot;text&quot;}"/>
+          <p:cNvPr id="265" name="" descr="{&quot;isTemplate&quot;:true,&quot;type&quot;:&quot;text&quot;}"/>
           <p:cNvSpPr txBox="1"/>
           <p:nvPr/>
         </p:nvSpPr>
@@ -11268,7 +12852,7 @@
       </p:sp>
       <p:sp>
         <p:nvSpPr>
-          <p:cNvPr id="237" name="" descr="{&quot;isTemplate&quot;:true,&quot;type&quot;:&quot;text&quot;}"/>
+          <p:cNvPr id="266" name="" descr="{&quot;isTemplate&quot;:true,&quot;type&quot;:&quot;text&quot;}"/>
           <p:cNvSpPr txBox="1"/>
           <p:nvPr/>
         </p:nvSpPr>
@@ -11363,7 +12947,7 @@
       </p:sp>
       <p:sp>
         <p:nvSpPr>
-          <p:cNvPr id="238" name=""/>
+          <p:cNvPr id="267" name=""/>
           <p:cNvSpPr/>
           <p:nvPr/>
         </p:nvSpPr>
@@ -11397,7 +12981,7 @@
       </p:sp>
       <p:sp>
         <p:nvSpPr>
-          <p:cNvPr id="239" name="" descr="{&quot;isTemplate&quot;:true,&quot;type&quot;:&quot;text&quot;}"/>
+          <p:cNvPr id="268" name="" descr="{&quot;isTemplate&quot;:true,&quot;type&quot;:&quot;text&quot;}"/>
           <p:cNvSpPr txBox="1"/>
           <p:nvPr/>
         </p:nvSpPr>
@@ -11432,7 +13016,7 @@
       </p:sp>
       <p:sp>
         <p:nvSpPr>
-          <p:cNvPr id="240" name="" descr="{&quot;isTemplate&quot;:true,&quot;type&quot;:&quot;text&quot;}"/>
+          <p:cNvPr id="269" name="" descr="{&quot;isTemplate&quot;:true,&quot;type&quot;:&quot;text&quot;}"/>
           <p:cNvSpPr txBox="1"/>
           <p:nvPr/>
         </p:nvSpPr>
@@ -11507,7 +13091,7 @@
       </p:sp>
       <p:sp>
         <p:nvSpPr>
-          <p:cNvPr id="241" name=""/>
+          <p:cNvPr id="270" name=""/>
           <p:cNvSpPr/>
           <p:nvPr/>
         </p:nvSpPr>
@@ -11541,7 +13125,7 @@
       </p:sp>
       <p:sp>
         <p:nvSpPr>
-          <p:cNvPr id="242" name="" descr="{&quot;isTemplate&quot;:true,&quot;type&quot;:&quot;text&quot;}"/>
+          <p:cNvPr id="271" name="" descr="{&quot;isTemplate&quot;:true,&quot;type&quot;:&quot;text&quot;}"/>
           <p:cNvSpPr txBox="1"/>
           <p:nvPr/>
         </p:nvSpPr>
@@ -11576,7 +13160,7 @@
       </p:sp>
       <p:sp>
         <p:nvSpPr>
-          <p:cNvPr id="243" name="" descr="{&quot;isTemplate&quot;:true,&quot;type&quot;:&quot;text&quot;}"/>
+          <p:cNvPr id="272" name="" descr="{&quot;isTemplate&quot;:true,&quot;type&quot;:&quot;text&quot;}"/>
           <p:cNvSpPr txBox="1"/>
           <p:nvPr/>
         </p:nvSpPr>
@@ -11731,7 +13315,7 @@
       </p:sp>
       <p:sp>
         <p:nvSpPr>
-          <p:cNvPr id="244" name=""/>
+          <p:cNvPr id="273" name=""/>
           <p:cNvSpPr/>
           <p:nvPr/>
         </p:nvSpPr>
@@ -11774,7 +13358,7 @@
       </p:sp>
       <p:sp>
         <p:nvSpPr>
-          <p:cNvPr id="245" name="" descr="{&quot;isTemplate&quot;:true,&quot;type&quot;:&quot;text&quot;}"/>
+          <p:cNvPr id="274" name="" descr="{&quot;isTemplate&quot;:true,&quot;type&quot;:&quot;text&quot;}"/>
           <p:cNvSpPr txBox="1"/>
           <p:nvPr/>
         </p:nvSpPr>
@@ -11809,7 +13393,7 @@
       </p:sp>
       <p:sp>
         <p:nvSpPr>
-          <p:cNvPr id="246" name="" descr="{&quot;isTemplate&quot;:true,&quot;type&quot;:&quot;text&quot;}"/>
+          <p:cNvPr id="275" name="" descr="{&quot;isTemplate&quot;:true,&quot;type&quot;:&quot;text&quot;}"/>
           <p:cNvSpPr txBox="1"/>
           <p:nvPr/>
         </p:nvSpPr>
@@ -11872,7 +13456,7 @@
       </p:sp>
       <p:sp>
         <p:nvSpPr>
-          <p:cNvPr id="247" name=""/>
+          <p:cNvPr id="276" name=""/>
           <p:cNvSpPr/>
           <p:nvPr/>
         </p:nvSpPr>
@@ -11915,7 +13499,7 @@
       </p:sp>
       <p:sp>
         <p:nvSpPr>
-          <p:cNvPr id="248" name="" descr="{&quot;isTemplate&quot;:true,&quot;type&quot;:&quot;text&quot;}"/>
+          <p:cNvPr id="277" name="" descr="{&quot;isTemplate&quot;:true,&quot;type&quot;:&quot;text&quot;}"/>
           <p:cNvSpPr txBox="1"/>
           <p:nvPr/>
         </p:nvSpPr>
@@ -11950,7 +13534,7 @@
       </p:sp>
       <p:sp>
         <p:nvSpPr>
-          <p:cNvPr id="249" name="" descr="{&quot;isTemplate&quot;:true,&quot;type&quot;:&quot;text&quot;}"/>
+          <p:cNvPr id="278" name="" descr="{&quot;isTemplate&quot;:true,&quot;type&quot;:&quot;text&quot;}"/>
           <p:cNvSpPr txBox="1"/>
           <p:nvPr/>
         </p:nvSpPr>
@@ -12013,7 +13597,7 @@
       </p:sp>
       <p:sp>
         <p:nvSpPr>
-          <p:cNvPr id="250" name=""/>
+          <p:cNvPr id="279" name=""/>
           <p:cNvSpPr/>
           <p:nvPr/>
         </p:nvSpPr>
@@ -12056,7 +13640,7 @@
       </p:sp>
       <p:sp>
         <p:nvSpPr>
-          <p:cNvPr id="251" name="" descr="{&quot;isTemplate&quot;:true,&quot;type&quot;:&quot;text&quot;}"/>
+          <p:cNvPr id="280" name="" descr="{&quot;isTemplate&quot;:true,&quot;type&quot;:&quot;text&quot;}"/>
           <p:cNvSpPr txBox="1"/>
           <p:nvPr/>
         </p:nvSpPr>
@@ -12091,7 +13675,7 @@
       </p:sp>
       <p:sp>
         <p:nvSpPr>
-          <p:cNvPr id="252" name="" descr="{&quot;isTemplate&quot;:true,&quot;type&quot;:&quot;text&quot;}"/>
+          <p:cNvPr id="281" name="" descr="{&quot;isTemplate&quot;:true,&quot;type&quot;:&quot;text&quot;}"/>
           <p:cNvSpPr txBox="1"/>
           <p:nvPr/>
         </p:nvSpPr>
@@ -12184,7 +13768,7 @@
       </p:sp>
       <p:sp>
         <p:nvSpPr>
-          <p:cNvPr id="253" name=""/>
+          <p:cNvPr id="282" name=""/>
           <p:cNvSpPr/>
           <p:nvPr/>
         </p:nvSpPr>
@@ -12227,7 +13811,7 @@
       </p:sp>
       <p:sp>
         <p:nvSpPr>
-          <p:cNvPr id="254" name="" descr="{&quot;isTemplate&quot;:true,&quot;type&quot;:&quot;text&quot;}"/>
+          <p:cNvPr id="283" name="" descr="{&quot;isTemplate&quot;:true,&quot;type&quot;:&quot;text&quot;}"/>
           <p:cNvSpPr txBox="1"/>
           <p:nvPr/>
         </p:nvSpPr>
@@ -12262,7 +13846,7 @@
       </p:sp>
       <p:sp>
         <p:nvSpPr>
-          <p:cNvPr id="255" name="" descr="{&quot;isTemplate&quot;:true,&quot;type&quot;:&quot;text&quot;}"/>
+          <p:cNvPr id="284" name="" descr="{&quot;isTemplate&quot;:true,&quot;type&quot;:&quot;text&quot;}"/>
           <p:cNvSpPr txBox="1"/>
           <p:nvPr/>
         </p:nvSpPr>
@@ -12377,7 +13961,7 @@
       </p:sp>
       <p:sp>
         <p:nvSpPr>
-          <p:cNvPr id="256" name="" descr="{&quot;isTemplate&quot;:true,&quot;type&quot;:&quot;text&quot;}"/>
+          <p:cNvPr id="285" name="" descr="{&quot;isTemplate&quot;:true,&quot;type&quot;:&quot;text&quot;}"/>
           <p:cNvSpPr txBox="1"/>
           <p:nvPr/>
         </p:nvSpPr>
@@ -12442,7 +14026,7 @@
       </p:sp>
       <p:sp>
         <p:nvSpPr>
-          <p:cNvPr id="257" name="" descr="{&quot;isTemplate&quot;:true,&quot;type&quot;:&quot;text&quot;}"/>
+          <p:cNvPr id="286" name="" descr="{&quot;isTemplate&quot;:true,&quot;type&quot;:&quot;text&quot;}"/>
           <p:cNvSpPr txBox="1"/>
           <p:nvPr/>
         </p:nvSpPr>
@@ -12485,7 +14069,7 @@
   <p:cSld>
     <p:spTree>
       <p:nvGrpSpPr>
-        <p:cNvPr id="258" name=""/>
+        <p:cNvPr id="287" name=""/>
         <p:cNvGrpSpPr/>
         <p:nvPr/>
       </p:nvGrpSpPr>
@@ -12499,7 +14083,7 @@
       </p:grpSpPr>
       <p:sp>
         <p:nvSpPr>
-          <p:cNvPr id="259" name=""/>
+          <p:cNvPr id="288" name=""/>
           <p:cNvSpPr/>
           <p:nvPr/>
         </p:nvSpPr>
@@ -12526,7 +14110,7 @@
       </p:sp>
       <p:sp>
         <p:nvSpPr>
-          <p:cNvPr id="260" name="" descr="{&quot;isTemplate&quot;:true,&quot;type&quot;:&quot;text&quot;}"/>
+          <p:cNvPr id="289" name="" descr="{&quot;isTemplate&quot;:true,&quot;type&quot;:&quot;text&quot;}"/>
           <p:cNvSpPr txBox="1"/>
           <p:nvPr/>
         </p:nvSpPr>
@@ -12561,7 +14145,7 @@
       </p:sp>
       <p:sp>
         <p:nvSpPr>
-          <p:cNvPr id="261" name="" descr="{&quot;isTemplate&quot;:true,&quot;type&quot;:&quot;text&quot;}"/>
+          <p:cNvPr id="290" name="" descr="{&quot;isTemplate&quot;:true,&quot;type&quot;:&quot;text&quot;}"/>
           <p:cNvSpPr txBox="1"/>
           <p:nvPr/>
         </p:nvSpPr>
@@ -12616,7 +14200,7 @@
       </p:sp>
       <p:sp>
         <p:nvSpPr>
-          <p:cNvPr id="262" name=""/>
+          <p:cNvPr id="291" name=""/>
           <p:cNvSpPr/>
           <p:nvPr/>
         </p:nvSpPr>
@@ -12650,7 +14234,7 @@
       </p:sp>
       <p:sp>
         <p:nvSpPr>
-          <p:cNvPr id="263" name=""/>
+          <p:cNvPr id="292" name=""/>
           <p:cNvSpPr/>
           <p:nvPr/>
         </p:nvSpPr>
@@ -12679,7 +14263,7 @@
       </p:sp>
       <p:sp>
         <p:nvSpPr>
-          <p:cNvPr id="264" name="" descr="{&quot;isTemplate&quot;:true,&quot;type&quot;:&quot;text&quot;}"/>
+          <p:cNvPr id="293" name="" descr="{&quot;isTemplate&quot;:true,&quot;type&quot;:&quot;text&quot;}"/>
           <p:cNvSpPr txBox="1"/>
           <p:nvPr/>
         </p:nvSpPr>
@@ -12724,7 +14308,7 @@
       </p:sp>
       <p:sp>
         <p:nvSpPr>
-          <p:cNvPr id="265" name=""/>
+          <p:cNvPr id="294" name=""/>
           <p:cNvSpPr/>
           <p:nvPr/>
         </p:nvSpPr>
@@ -12753,7 +14337,7 @@
       </p:sp>
       <p:sp>
         <p:nvSpPr>
-          <p:cNvPr id="266" name="" descr="{&quot;isTemplate&quot;:true,&quot;type&quot;:&quot;text&quot;}"/>
+          <p:cNvPr id="295" name="" descr="{&quot;isTemplate&quot;:true,&quot;type&quot;:&quot;text&quot;}"/>
           <p:cNvSpPr txBox="1"/>
           <p:nvPr/>
         </p:nvSpPr>
@@ -12788,7 +14372,7 @@
       </p:sp>
       <p:sp>
         <p:nvSpPr>
-          <p:cNvPr id="267" name="" descr="{&quot;isTemplate&quot;:true,&quot;type&quot;:&quot;text&quot;}"/>
+          <p:cNvPr id="296" name="" descr="{&quot;isTemplate&quot;:true,&quot;type&quot;:&quot;text&quot;}"/>
           <p:cNvSpPr txBox="1"/>
           <p:nvPr/>
         </p:nvSpPr>
@@ -12823,7 +14407,7 @@
       </p:sp>
       <p:sp>
         <p:nvSpPr>
-          <p:cNvPr id="268" name="" descr="{&quot;isTemplate&quot;:true,&quot;type&quot;:&quot;text&quot;}"/>
+          <p:cNvPr id="297" name="" descr="{&quot;isTemplate&quot;:true,&quot;type&quot;:&quot;text&quot;}"/>
           <p:cNvSpPr txBox="1"/>
           <p:nvPr/>
         </p:nvSpPr>
@@ -12868,7 +14452,7 @@
       </p:sp>
       <p:sp>
         <p:nvSpPr>
-          <p:cNvPr id="269" name="" descr="{&quot;isTemplate&quot;:true,&quot;type&quot;:&quot;text&quot;}"/>
+          <p:cNvPr id="298" name="" descr="{&quot;isTemplate&quot;:true,&quot;type&quot;:&quot;text&quot;}"/>
           <p:cNvSpPr txBox="1"/>
           <p:nvPr/>
         </p:nvSpPr>
@@ -12903,7 +14487,7 @@
       </p:sp>
       <p:sp>
         <p:nvSpPr>
-          <p:cNvPr id="270" name="" descr="{&quot;isTemplate&quot;:true,&quot;type&quot;:&quot;text&quot;}"/>
+          <p:cNvPr id="299" name="" descr="{&quot;isTemplate&quot;:true,&quot;type&quot;:&quot;text&quot;}"/>
           <p:cNvSpPr txBox="1"/>
           <p:nvPr/>
         </p:nvSpPr>
@@ -12938,7 +14522,7 @@
       </p:sp>
       <p:sp>
         <p:nvSpPr>
-          <p:cNvPr id="271" name="" descr="{&quot;isTemplate&quot;:true,&quot;type&quot;:&quot;text&quot;}"/>
+          <p:cNvPr id="300" name="" descr="{&quot;isTemplate&quot;:true,&quot;type&quot;:&quot;text&quot;}"/>
           <p:cNvSpPr txBox="1"/>
           <p:nvPr/>
         </p:nvSpPr>
@@ -13013,7 +14597,7 @@
       </p:sp>
       <p:sp>
         <p:nvSpPr>
-          <p:cNvPr id="272" name="" descr="{&quot;isTemplate&quot;:true,&quot;type&quot;:&quot;text&quot;}"/>
+          <p:cNvPr id="301" name="" descr="{&quot;isTemplate&quot;:true,&quot;type&quot;:&quot;text&quot;}"/>
           <p:cNvSpPr txBox="1"/>
           <p:nvPr/>
         </p:nvSpPr>
@@ -13048,7 +14632,7 @@
       </p:sp>
       <p:sp>
         <p:nvSpPr>
-          <p:cNvPr id="273" name="" descr="{&quot;isTemplate&quot;:true,&quot;type&quot;:&quot;text&quot;}"/>
+          <p:cNvPr id="302" name="" descr="{&quot;isTemplate&quot;:true,&quot;type&quot;:&quot;text&quot;}"/>
           <p:cNvSpPr txBox="1"/>
           <p:nvPr/>
         </p:nvSpPr>
@@ -13083,7 +14667,7 @@
       </p:sp>
       <p:sp>
         <p:nvSpPr>
-          <p:cNvPr id="274" name="" descr="{&quot;isTemplate&quot;:true,&quot;type&quot;:&quot;text&quot;}"/>
+          <p:cNvPr id="303" name="" descr="{&quot;isTemplate&quot;:true,&quot;type&quot;:&quot;text&quot;}"/>
           <p:cNvSpPr txBox="1"/>
           <p:nvPr/>
         </p:nvSpPr>
@@ -13158,7 +14742,7 @@
       </p:sp>
       <p:sp>
         <p:nvSpPr>
-          <p:cNvPr id="275" name="" descr="{&quot;isTemplate&quot;:true,&quot;type&quot;:&quot;text&quot;}"/>
+          <p:cNvPr id="304" name="" descr="{&quot;isTemplate&quot;:true,&quot;type&quot;:&quot;text&quot;}"/>
           <p:cNvSpPr txBox="1"/>
           <p:nvPr/>
         </p:nvSpPr>
@@ -13193,7 +14777,7 @@
       </p:sp>
       <p:sp>
         <p:nvSpPr>
-          <p:cNvPr id="276" name="" descr="{&quot;isTemplate&quot;:true,&quot;type&quot;:&quot;text&quot;}"/>
+          <p:cNvPr id="305" name="" descr="{&quot;isTemplate&quot;:true,&quot;type&quot;:&quot;text&quot;}"/>
           <p:cNvSpPr txBox="1"/>
           <p:nvPr/>
         </p:nvSpPr>
@@ -13228,7 +14812,7 @@
       </p:sp>
       <p:sp>
         <p:nvSpPr>
-          <p:cNvPr id="277" name="" descr="{&quot;isTemplate&quot;:true,&quot;type&quot;:&quot;text&quot;}"/>
+          <p:cNvPr id="306" name="" descr="{&quot;isTemplate&quot;:true,&quot;type&quot;:&quot;text&quot;}"/>
           <p:cNvSpPr txBox="1"/>
           <p:nvPr/>
         </p:nvSpPr>
@@ -13303,7 +14887,7 @@
       </p:sp>
       <p:sp>
         <p:nvSpPr>
-          <p:cNvPr id="278" name="" descr="{&quot;isTemplate&quot;:true,&quot;type&quot;:&quot;text&quot;}"/>
+          <p:cNvPr id="307" name="" descr="{&quot;isTemplate&quot;:true,&quot;type&quot;:&quot;text&quot;}"/>
           <p:cNvSpPr txBox="1"/>
           <p:nvPr/>
         </p:nvSpPr>
@@ -13338,7 +14922,7 @@
       </p:sp>
       <p:sp>
         <p:nvSpPr>
-          <p:cNvPr id="279" name="" descr="{&quot;isTemplate&quot;:true,&quot;type&quot;:&quot;text&quot;}"/>
+          <p:cNvPr id="308" name="" descr="{&quot;isTemplate&quot;:true,&quot;type&quot;:&quot;text&quot;}"/>
           <p:cNvSpPr txBox="1"/>
           <p:nvPr/>
         </p:nvSpPr>
@@ -13373,7 +14957,7 @@
       </p:sp>
       <p:sp>
         <p:nvSpPr>
-          <p:cNvPr id="280" name="" descr="{&quot;isTemplate&quot;:true,&quot;type&quot;:&quot;text&quot;}"/>
+          <p:cNvPr id="309" name="" descr="{&quot;isTemplate&quot;:true,&quot;type&quot;:&quot;text&quot;}"/>
           <p:cNvSpPr txBox="1"/>
           <p:nvPr/>
         </p:nvSpPr>
@@ -13428,7 +15012,7 @@
       </p:sp>
       <p:sp>
         <p:nvSpPr>
-          <p:cNvPr id="281" name=""/>
+          <p:cNvPr id="310" name=""/>
           <p:cNvSpPr/>
           <p:nvPr/>
         </p:nvSpPr>
@@ -13462,7 +15046,7 @@
       </p:sp>
       <p:sp>
         <p:nvSpPr>
-          <p:cNvPr id="282" name="" descr="{&quot;isTemplate&quot;:true,&quot;type&quot;:&quot;text&quot;}"/>
+          <p:cNvPr id="311" name="" descr="{&quot;isTemplate&quot;:true,&quot;type&quot;:&quot;text&quot;}"/>
           <p:cNvSpPr txBox="1"/>
           <p:nvPr/>
         </p:nvSpPr>
@@ -13497,7 +15081,7 @@
       </p:sp>
       <p:sp>
         <p:nvSpPr>
-          <p:cNvPr id="283" name="" descr="{&quot;isTemplate&quot;:true,&quot;type&quot;:&quot;text&quot;}"/>
+          <p:cNvPr id="312" name="" descr="{&quot;isTemplate&quot;:true,&quot;type&quot;:&quot;text&quot;}"/>
           <p:cNvSpPr txBox="1"/>
           <p:nvPr/>
         </p:nvSpPr>
@@ -13532,7 +15116,7 @@
       </p:sp>
       <p:sp>
         <p:nvSpPr>
-          <p:cNvPr id="284" name="" descr="{&quot;isTemplate&quot;:true,&quot;type&quot;:&quot;text&quot;}"/>
+          <p:cNvPr id="313" name="" descr="{&quot;isTemplate&quot;:true,&quot;type&quot;:&quot;text&quot;}"/>
           <p:cNvSpPr txBox="1"/>
           <p:nvPr/>
         </p:nvSpPr>
@@ -13567,7 +15151,7 @@
       </p:sp>
       <p:sp>
         <p:nvSpPr>
-          <p:cNvPr id="285" name="" descr="{&quot;isTemplate&quot;:true,&quot;type&quot;:&quot;text&quot;}"/>
+          <p:cNvPr id="314" name="" descr="{&quot;isTemplate&quot;:true,&quot;type&quot;:&quot;text&quot;}"/>
           <p:cNvSpPr txBox="1"/>
           <p:nvPr/>
         </p:nvSpPr>
@@ -13602,7 +15186,7 @@
       </p:sp>
       <p:sp>
         <p:nvSpPr>
-          <p:cNvPr id="286" name="" descr="{&quot;isTemplate&quot;:true,&quot;type&quot;:&quot;text&quot;}"/>
+          <p:cNvPr id="315" name="" descr="{&quot;isTemplate&quot;:true,&quot;type&quot;:&quot;text&quot;}"/>
           <p:cNvSpPr txBox="1"/>
           <p:nvPr/>
         </p:nvSpPr>
@@ -13637,7 +15221,7 @@
       </p:sp>
       <p:sp>
         <p:nvSpPr>
-          <p:cNvPr id="287" name="" descr="{&quot;isTemplate&quot;:true,&quot;type&quot;:&quot;text&quot;}"/>
+          <p:cNvPr id="316" name="" descr="{&quot;isTemplate&quot;:true,&quot;type&quot;:&quot;text&quot;}"/>
           <p:cNvSpPr txBox="1"/>
           <p:nvPr/>
         </p:nvSpPr>
@@ -13672,7 +15256,7 @@
       </p:sp>
       <p:sp>
         <p:nvSpPr>
-          <p:cNvPr id="288" name="" descr="{&quot;isTemplate&quot;:true,&quot;type&quot;:&quot;text&quot;}"/>
+          <p:cNvPr id="317" name="" descr="{&quot;isTemplate&quot;:true,&quot;type&quot;:&quot;text&quot;}"/>
           <p:cNvSpPr txBox="1"/>
           <p:nvPr/>
         </p:nvSpPr>
@@ -13707,7 +15291,7 @@
       </p:sp>
       <p:sp>
         <p:nvSpPr>
-          <p:cNvPr id="289" name="" descr="{&quot;isTemplate&quot;:true,&quot;type&quot;:&quot;text&quot;}"/>
+          <p:cNvPr id="318" name="" descr="{&quot;isTemplate&quot;:true,&quot;type&quot;:&quot;text&quot;}"/>
           <p:cNvSpPr txBox="1"/>
           <p:nvPr/>
         </p:nvSpPr>
@@ -13742,7 +15326,7 @@
       </p:sp>
       <p:sp>
         <p:nvSpPr>
-          <p:cNvPr id="290" name="" descr="{&quot;isTemplate&quot;:true,&quot;type&quot;:&quot;text&quot;}"/>
+          <p:cNvPr id="319" name="" descr="{&quot;isTemplate&quot;:true,&quot;type&quot;:&quot;text&quot;}"/>
           <p:cNvSpPr txBox="1"/>
           <p:nvPr/>
         </p:nvSpPr>
@@ -13797,7 +15381,7 @@
       </p:sp>
       <p:sp>
         <p:nvSpPr>
-          <p:cNvPr id="291" name=""/>
+          <p:cNvPr id="320" name=""/>
           <p:cNvSpPr/>
           <p:nvPr/>
         </p:nvSpPr>
@@ -13840,7 +15424,7 @@
       </p:sp>
       <p:sp>
         <p:nvSpPr>
-          <p:cNvPr id="292" name=""/>
+          <p:cNvPr id="321" name=""/>
           <p:cNvSpPr/>
           <p:nvPr/>
         </p:nvSpPr>
@@ -13869,7 +15453,7 @@
       </p:sp>
       <p:sp>
         <p:nvSpPr>
-          <p:cNvPr id="293" name="" descr="{&quot;isTemplate&quot;:true,&quot;type&quot;:&quot;text&quot;}"/>
+          <p:cNvPr id="322" name="" descr="{&quot;isTemplate&quot;:true,&quot;type&quot;:&quot;text&quot;}"/>
           <p:cNvSpPr txBox="1"/>
           <p:nvPr/>
         </p:nvSpPr>
@@ -13922,7 +15506,7 @@
       </p:sp>
       <p:sp>
         <p:nvSpPr>
-          <p:cNvPr id="294" name="" descr="{&quot;isTemplate&quot;:true,&quot;type&quot;:&quot;text&quot;}"/>
+          <p:cNvPr id="323" name="" descr="{&quot;isTemplate&quot;:true,&quot;type&quot;:&quot;text&quot;}"/>
           <p:cNvSpPr txBox="1"/>
           <p:nvPr/>
         </p:nvSpPr>
@@ -13987,7 +15571,7 @@
       </p:sp>
       <p:sp>
         <p:nvSpPr>
-          <p:cNvPr id="295" name="" descr="{&quot;isTemplate&quot;:true,&quot;type&quot;:&quot;text&quot;}"/>
+          <p:cNvPr id="324" name="" descr="{&quot;isTemplate&quot;:true,&quot;type&quot;:&quot;text&quot;}"/>
           <p:cNvSpPr txBox="1"/>
           <p:nvPr/>
         </p:nvSpPr>
@@ -14030,7 +15614,7 @@
   <p:cSld>
     <p:spTree>
       <p:nvGrpSpPr>
-        <p:cNvPr id="296" name=""/>
+        <p:cNvPr id="325" name=""/>
         <p:cNvGrpSpPr/>
         <p:nvPr/>
       </p:nvGrpSpPr>
@@ -14044,7 +15628,7 @@
       </p:grpSpPr>
       <p:sp>
         <p:nvSpPr>
-          <p:cNvPr id="297" name=""/>
+          <p:cNvPr id="326" name=""/>
           <p:cNvSpPr/>
           <p:nvPr/>
         </p:nvSpPr>
@@ -14071,7 +15655,7 @@
       </p:sp>
       <p:sp>
         <p:nvSpPr>
-          <p:cNvPr id="298" name="" descr="{&quot;isTemplate&quot;:true,&quot;type&quot;:&quot;text&quot;}"/>
+          <p:cNvPr id="327" name="" descr="{&quot;isTemplate&quot;:true,&quot;type&quot;:&quot;text&quot;}"/>
           <p:cNvSpPr txBox="1"/>
           <p:nvPr/>
         </p:nvSpPr>
@@ -14116,7 +15700,7 @@
       </p:sp>
       <p:sp>
         <p:nvSpPr>
-          <p:cNvPr id="299" name="" descr="{&quot;isTemplate&quot;:true,&quot;type&quot;:&quot;text&quot;}"/>
+          <p:cNvPr id="328" name="" descr="{&quot;isTemplate&quot;:true,&quot;type&quot;:&quot;text&quot;}"/>
           <p:cNvSpPr txBox="1"/>
           <p:nvPr/>
         </p:nvSpPr>
@@ -14151,7 +15735,7 @@
       </p:sp>
       <p:sp>
         <p:nvSpPr>
-          <p:cNvPr id="300" name=""/>
+          <p:cNvPr id="329" name=""/>
           <p:cNvSpPr/>
           <p:nvPr/>
         </p:nvSpPr>
@@ -14185,7 +15769,7 @@
       </p:sp>
       <p:sp>
         <p:nvSpPr>
-          <p:cNvPr id="301" name=""/>
+          <p:cNvPr id="330" name=""/>
           <p:cNvSpPr/>
           <p:nvPr/>
         </p:nvSpPr>
@@ -14214,7 +15798,7 @@
       </p:sp>
       <p:sp>
         <p:nvSpPr>
-          <p:cNvPr id="302" name="" descr="{&quot;isTemplate&quot;:true,&quot;type&quot;:&quot;text&quot;}"/>
+          <p:cNvPr id="331" name="" descr="{&quot;isTemplate&quot;:true,&quot;type&quot;:&quot;text&quot;}"/>
           <p:cNvSpPr txBox="1"/>
           <p:nvPr/>
         </p:nvSpPr>
@@ -14259,7 +15843,7 @@
       </p:sp>
       <p:sp>
         <p:nvSpPr>
-          <p:cNvPr id="303" name=""/>
+          <p:cNvPr id="332" name=""/>
           <p:cNvSpPr/>
           <p:nvPr/>
         </p:nvSpPr>
@@ -14288,7 +15872,7 @@
       </p:sp>
       <p:sp>
         <p:nvSpPr>
-          <p:cNvPr id="304" name="" descr="{&quot;isTemplate&quot;:true,&quot;type&quot;:&quot;text&quot;}"/>
+          <p:cNvPr id="333" name="" descr="{&quot;isTemplate&quot;:true,&quot;type&quot;:&quot;text&quot;}"/>
           <p:cNvSpPr txBox="1"/>
           <p:nvPr/>
         </p:nvSpPr>
@@ -14323,7 +15907,7 @@
       </p:sp>
       <p:sp>
         <p:nvSpPr>
-          <p:cNvPr id="305" name="" descr="{&quot;isTemplate&quot;:true,&quot;type&quot;:&quot;text&quot;}"/>
+          <p:cNvPr id="334" name="" descr="{&quot;isTemplate&quot;:true,&quot;type&quot;:&quot;text&quot;}"/>
           <p:cNvSpPr txBox="1"/>
           <p:nvPr/>
         </p:nvSpPr>
@@ -14358,7 +15942,7 @@
       </p:sp>
       <p:sp>
         <p:nvSpPr>
-          <p:cNvPr id="306" name="" descr="{&quot;isTemplate&quot;:true,&quot;type&quot;:&quot;text&quot;}"/>
+          <p:cNvPr id="335" name="" descr="{&quot;isTemplate&quot;:true,&quot;type&quot;:&quot;text&quot;}"/>
           <p:cNvSpPr txBox="1"/>
           <p:nvPr/>
         </p:nvSpPr>
@@ -14423,7 +16007,7 @@
       </p:sp>
       <p:sp>
         <p:nvSpPr>
-          <p:cNvPr id="307" name="" descr="{&quot;isTemplate&quot;:true,&quot;type&quot;:&quot;text&quot;}"/>
+          <p:cNvPr id="336" name="" descr="{&quot;isTemplate&quot;:true,&quot;type&quot;:&quot;text&quot;}"/>
           <p:cNvSpPr txBox="1"/>
           <p:nvPr/>
         </p:nvSpPr>
@@ -14458,7 +16042,7 @@
       </p:sp>
       <p:sp>
         <p:nvSpPr>
-          <p:cNvPr id="308" name=""/>
+          <p:cNvPr id="337" name=""/>
           <p:cNvSpPr/>
           <p:nvPr/>
         </p:nvSpPr>
@@ -14492,7 +16076,7 @@
       </p:sp>
       <p:sp>
         <p:nvSpPr>
-          <p:cNvPr id="309" name="" descr="{&quot;isTemplate&quot;:true,&quot;type&quot;:&quot;text&quot;}"/>
+          <p:cNvPr id="338" name="" descr="{&quot;isTemplate&quot;:true,&quot;type&quot;:&quot;text&quot;}"/>
           <p:cNvSpPr txBox="1"/>
           <p:nvPr/>
         </p:nvSpPr>
@@ -14537,7 +16121,7 @@
       </p:sp>
       <p:sp>
         <p:nvSpPr>
-          <p:cNvPr id="310" name="" descr="{&quot;isTemplate&quot;:true,&quot;type&quot;:&quot;text&quot;}"/>
+          <p:cNvPr id="339" name="" descr="{&quot;isTemplate&quot;:true,&quot;type&quot;:&quot;text&quot;}"/>
           <p:cNvSpPr txBox="1"/>
           <p:nvPr/>
         </p:nvSpPr>
@@ -14582,7 +16166,7 @@
       </p:sp>
       <p:sp>
         <p:nvSpPr>
-          <p:cNvPr id="311" name=""/>
+          <p:cNvPr id="340" name=""/>
           <p:cNvSpPr/>
           <p:nvPr/>
         </p:nvSpPr>
@@ -14616,7 +16200,7 @@
       </p:sp>
       <p:sp>
         <p:nvSpPr>
-          <p:cNvPr id="312" name="" descr="{&quot;isTemplate&quot;:true,&quot;type&quot;:&quot;text&quot;}"/>
+          <p:cNvPr id="341" name="" descr="{&quot;isTemplate&quot;:true,&quot;type&quot;:&quot;text&quot;}"/>
           <p:cNvSpPr txBox="1"/>
           <p:nvPr/>
         </p:nvSpPr>
@@ -14651,7 +16235,7 @@
       </p:sp>
       <p:sp>
         <p:nvSpPr>
-          <p:cNvPr id="313" name="" descr="{&quot;isTemplate&quot;:true,&quot;type&quot;:&quot;text&quot;}"/>
+          <p:cNvPr id="342" name="" descr="{&quot;isTemplate&quot;:true,&quot;type&quot;:&quot;text&quot;}"/>
           <p:cNvSpPr txBox="1"/>
           <p:nvPr/>
         </p:nvSpPr>
@@ -14686,7 +16270,7 @@
       </p:sp>
       <p:sp>
         <p:nvSpPr>
-          <p:cNvPr id="314" name=""/>
+          <p:cNvPr id="343" name=""/>
           <p:cNvSpPr/>
           <p:nvPr/>
         </p:nvSpPr>
@@ -14720,7 +16304,7 @@
       </p:sp>
       <p:sp>
         <p:nvSpPr>
-          <p:cNvPr id="315" name="" descr="{&quot;isTemplate&quot;:true,&quot;type&quot;:&quot;text&quot;}"/>
+          <p:cNvPr id="344" name="" descr="{&quot;isTemplate&quot;:true,&quot;type&quot;:&quot;text&quot;}"/>
           <p:cNvSpPr txBox="1"/>
           <p:nvPr/>
         </p:nvSpPr>
@@ -14765,7 +16349,7 @@
       </p:sp>
       <p:sp>
         <p:nvSpPr>
-          <p:cNvPr id="316" name="" descr="{&quot;isTemplate&quot;:true,&quot;type&quot;:&quot;text&quot;}"/>
+          <p:cNvPr id="345" name="" descr="{&quot;isTemplate&quot;:true,&quot;type&quot;:&quot;text&quot;}"/>
           <p:cNvSpPr txBox="1"/>
           <p:nvPr/>
         </p:nvSpPr>
@@ -14810,7 +16394,7 @@
       </p:sp>
       <p:sp>
         <p:nvSpPr>
-          <p:cNvPr id="317" name=""/>
+          <p:cNvPr id="346" name=""/>
           <p:cNvSpPr/>
           <p:nvPr/>
         </p:nvSpPr>
@@ -14844,7 +16428,7 @@
       </p:sp>
       <p:sp>
         <p:nvSpPr>
-          <p:cNvPr id="318" name="" descr="{&quot;isTemplate&quot;:true,&quot;type&quot;:&quot;text&quot;}"/>
+          <p:cNvPr id="347" name="" descr="{&quot;isTemplate&quot;:true,&quot;type&quot;:&quot;text&quot;}"/>
           <p:cNvSpPr txBox="1"/>
           <p:nvPr/>
         </p:nvSpPr>
@@ -14879,7 +16463,7 @@
       </p:sp>
       <p:sp>
         <p:nvSpPr>
-          <p:cNvPr id="319" name="" descr="{&quot;isTemplate&quot;:true,&quot;type&quot;:&quot;text&quot;}"/>
+          <p:cNvPr id="348" name="" descr="{&quot;isTemplate&quot;:true,&quot;type&quot;:&quot;text&quot;}"/>
           <p:cNvSpPr txBox="1"/>
           <p:nvPr/>
         </p:nvSpPr>
@@ -14970,7 +16554,7 @@
       </p:sp>
       <p:sp>
         <p:nvSpPr>
-          <p:cNvPr id="320" name="" descr="{&quot;isTemplate&quot;:true,&quot;type&quot;:&quot;text&quot;}"/>
+          <p:cNvPr id="349" name="" descr="{&quot;isTemplate&quot;:true,&quot;type&quot;:&quot;text&quot;}"/>
           <p:cNvSpPr txBox="1"/>
           <p:nvPr/>
         </p:nvSpPr>
@@ -15065,7 +16649,7 @@
       </p:sp>
       <p:sp>
         <p:nvSpPr>
-          <p:cNvPr id="321" name="" descr="{&quot;isTemplate&quot;:true,&quot;type&quot;:&quot;text&quot;}"/>
+          <p:cNvPr id="350" name="" descr="{&quot;isTemplate&quot;:true,&quot;type&quot;:&quot;text&quot;}"/>
           <p:cNvSpPr txBox="1"/>
           <p:nvPr/>
         </p:nvSpPr>
@@ -15130,7 +16714,7 @@
       </p:sp>
       <p:sp>
         <p:nvSpPr>
-          <p:cNvPr id="322" name="" descr="{&quot;isTemplate&quot;:true,&quot;type&quot;:&quot;text&quot;}"/>
+          <p:cNvPr id="351" name="" descr="{&quot;isTemplate&quot;:true,&quot;type&quot;:&quot;text&quot;}"/>
           <p:cNvSpPr txBox="1"/>
           <p:nvPr/>
         </p:nvSpPr>
@@ -15173,7 +16757,7 @@
   <p:cSld>
     <p:spTree>
       <p:nvGrpSpPr>
-        <p:cNvPr id="323" name="" descr="&lt;Slide style={{ width: 1280, height: 720, background: '#F6F8FD', padding: '56px 72px', flexDirection: 'column' }}&gt;&#10;  &lt;Box style={{ height: 96, flexDirection: 'row', justifyContent: 'space-between', alignItems: 'flex-start' }}&gt;&#10;    &lt;Box style={{ flexDirection: 'column', gap: 8 }}&gt;&#10;      &lt;Text style={{ fontSize: 34, fontWeight: 'bold', color: '#0C1222' }}&gt;先算清代价，再谈智能&lt;/Text&gt;&#10;      &lt;Text style={{ fontSize: 15, color: '#5C6780' }}&gt;左边是它在这套 180 天数据里真找出来的，右边是按建议执行后的测算&lt;/Text&gt;&#10;    &lt;/Box&gt;&#10;    &lt;Box style={{ flexDirection: 'row', alignItems: 'center', gap: 6, padding: '5px 12px', background: '#EEF1FE', border: '1px solid #DDE2F5', borderRadius: 999 }}&gt;&#10;      &lt;Box style={{ width: 6, height: 6, borderRadius: 3, background: '#4C4DDC' }} /&gt;&#10;      &lt;Text style={{ fontSize: 12, color: '#4C4DDC', fontWeight: 'bold', letterSpacing: 1 }}&gt;AI 掌柜&lt;/Text&gt;&#10;    &lt;/Box&gt;&#10;  &lt;/Box&gt;&#10;  &lt;Box style={{ width: 72, height: 3, background: '#4C4DDC', borderRadius: 2, marginTop: 2, marginBottom: 12 }} /&gt;&#10;  &lt;Box style={{ flex: 1, paddingTop: 8 }}&gt;&#10;    &lt;Box style={{ flexDirection: 'row', gap: 24 }}&gt;&#10;      &lt;Box style={{ flex: 1.15, flexDirection: 'column' }}&gt;&#10;        &lt;Text style={{ fontSize: 13, color: '#5C6780', letterSpacing: 1 }}&gt;实测 · 系统自己发现的五件事&lt;/Text&gt;&#10;        &lt;Box style={{ marginTop: 14, flexDirection: 'column', gap: 0 }}&gt;&#10;          &lt;Box style={{ paddingTop: 12, paddingBottom: 12, borderTop: '1px solid #E3E8F5', flexDirection: 'row', alignItems: 'baseline' }}&gt;&#10;            &lt;Text style={{ fontSize: 26, fontWeight: 'bold', color: '#4C4DDC', width: 96 }}&gt;10.6%&lt;/Text&gt;&#10;            &lt;Text style={{ fontSize: 14, color: '#0C1222' }}&gt;近 7 天折扣率，比前 30 天的 8.4% 高 2.2 个点&lt;/Text&gt;&#10;          &lt;/Box&gt;&#10;          &lt;Box style={{ paddingTop: 12, paddingBottom: 12, borderTop: '1px solid #E3E8F5', flexDirection: 'row', alignItems: 'baseline' }}&gt;&#10;            &lt;Text style={{ fontSize: 26, fontWeight: 'bold', color: '#4C4DDC', width: 96 }}&gt;1,476&lt;/Text&gt;&#10;            &lt;Text style={{ fontSize: 14, color: '#0C1222' }}&gt;元 · 按原折扣水平本可少让的金额&lt;/Text&gt;&#10;          &lt;/Box&gt;&#10;          &lt;Box style={{ paddingTop: 12, paddingBottom: 12, borderTop: '1px solid #E3E8F5', flexDirection: 'row', alignItems: 'baseline' }}&gt;&#10;            &lt;Text style={{ fontSize: 26, fontWeight: 'bold', color: '#4C4DDC', width: 96 }}&gt;20 道&lt;/Text&gt;&#10;            &lt;Text style={{ fontSize: 14, color: '#0C1222' }}&gt;菜连续 3 天 0 销量，占在售 9.7%&lt;/Text&gt;&#10;          &lt;/Box&gt;&#10;          &lt;Box style={{ paddingTop: 12, paddingBottom: 12, borderTop: '1px solid #E3E8F5', flexDirection: 'row', alignItems: 'baseline' }}&gt;&#10;            &lt;Text style={{ fontSize: 26, fontWeight: 'bold', color: '#4C4DDC', width: 96 }}&gt;1 种&lt;/Text&gt;&#10;            &lt;Text style={{ fontSize: 14, color: '#0C1222' }}&gt;食材可支撑不足 2 天（基围虾只剩 1.5 天）&lt;/Text&gt;&#10;          &lt;/Box&gt;&#10;          &lt;Box style={{ paddingTop: 12, paddingBottom: 12, borderTop: '1px solid #E3E8F5', borderBottom: '1px solid #E3E8F5', flexDirection: 'row', alignItems: 'baseline' }}&gt;&#10;            &lt;Text style={{ fontSize: 26, fontWeight: 'bold', color: '#4C4DDC', width: 96 }}&gt;57.8%&lt;/Text&gt;&#10;            &lt;Text style={{ fontSize: 14, color: '#0C1222' }}&gt;近 30 天毛利率，比目标低 2.2 个点&lt;/Text&gt;&#10;          &lt;/Box&gt;&#10;        &lt;/Box&gt;&#10;      &lt;/Box&gt;&#10;      &lt;Box style={{ flex: 1, background: '#EEF1FE', border: '1px solid #C9CDF6', borderRadius: 14, padding: 30, flexDirection: 'column', gap: 18, justifyContent: 'flex-start' }}&gt;&#10;        &lt;Box style={{ flexDirection: 'column', gap: 6 }}&gt;&#10;          &lt;Text style={{ fontSize: 13, color: '#4C4DDC', letterSpacing: 1 }}&gt;测算 · 补齐这 2.2 个点&lt;/Text&gt;&#10;          &lt;Text style={{ fontSize: 56, fontWeight: 'bold', color: '#0C1222', letterSpacing: -1 }}&gt;+9.0&lt;span style={{ fontSize: 22 }}&gt; 万/年&lt;/span&gt;&lt;/Text&gt;&#10;          &lt;Text style={{ fontSize: 13, color: '#5C6780' }}&gt;近 30 天营收 33.1 万 × 2.2pt × 12 个月&lt;/Text&gt;&#10;        &lt;/Box&gt;&#10;        &lt;Box style={{ flexDirection: 'column', gap: 8, marginTop: 6, paddingTop: 16, borderTop: '1px solid #3A3F63' }}&gt;&#10;          &lt;Text style={{ fontSize: 13, color: '#0C1222' }}&gt;怎么补：&lt;/Text&gt;&#10;          &lt;Text style={{ fontSize: 13, color: '#5C6780', lineHeight: 1.8 }}&gt;① 3 道瘦狗菜调价 5%~15%&lt;br /&gt;② 20 道滞销菜组套餐或下架&lt;br /&gt;③ 折扣收回 2 个点&lt;/Text&gt;&#10;        &lt;/Box&gt;&#10;        &lt;Text style={{ fontSize: 11, color: '#6B7490', lineHeight: 1.6, marginTop: 4 }}&gt;&#10;          左列全部由 SQL 从 180 天数据算出，脚本可复现；右侧为按当前规模的线性测算，不是承诺值。&#10;        &lt;/Text&gt;&#10;      &lt;/Box&gt;&#10;    &lt;/Box&gt;&#10;  &lt;/Box&gt;&#10;  &lt;Box style={{ height: 36, flexDirection: 'row', justifyContent: 'space-between', alignItems: 'flex-end' }}&gt;&#10;    &lt;Text style={{ fontSize: 12, color: '#8A93A8' }}&gt;2026 武汉 1024 · 产业应用赛道&lt;/Text&gt;&#10;    &lt;Text style={{ fontSize: 12, color: '#8A93A8' }}&gt;09 / 12&lt;/Text&gt;&#10;  &lt;/Box&gt;&#10;&lt;/Slide&gt;"/>
+        <p:cNvPr id="352" name="" descr="&lt;Slide style={{ width: 1280, height: 720, background: '#F6F8FD', padding: '56px 72px', flexDirection: 'column' }}&gt;&#10;  &lt;Box style={{ height: 96, flexDirection: 'row', justifyContent: 'space-between', alignItems: 'flex-start' }}&gt;&#10;    &lt;Box style={{ flexDirection: 'column', gap: 8 }}&gt;&#10;      &lt;Text style={{ fontSize: 34, fontWeight: 'bold', color: '#0C1222' }}&gt;先算清代价，再谈智能&lt;/Text&gt;&#10;      &lt;Text style={{ fontSize: 15, color: '#5C6780' }}&gt;左边是它在这套 180 天数据里真找出来的，右边是按建议执行后的测算&lt;/Text&gt;&#10;    &lt;/Box&gt;&#10;    &lt;Box style={{ flexDirection: 'row', alignItems: 'center', gap: 6, padding: '5px 12px', background: '#EEF1FE', border: '1px solid #DDE2F5', borderRadius: 999 }}&gt;&#10;      &lt;Box style={{ width: 6, height: 6, borderRadius: 3, background: '#4C4DDC' }} /&gt;&#10;      &lt;Text style={{ fontSize: 12, color: '#4C4DDC', fontWeight: 'bold', letterSpacing: 1 }}&gt;AI 掌柜&lt;/Text&gt;&#10;    &lt;/Box&gt;&#10;  &lt;/Box&gt;&#10;  &lt;Box style={{ width: 72, height: 3, background: '#4C4DDC', borderRadius: 2, marginTop: 2, marginBottom: 12 }} /&gt;&#10;  &lt;Box style={{ flex: 1, paddingTop: 8 }}&gt;&#10;    &lt;Box style={{ flexDirection: 'row', gap: 24 }}&gt;&#10;      &lt;Box style={{ flex: 1.15, flexDirection: 'column' }}&gt;&#10;        &lt;Text style={{ fontSize: 13, color: '#5C6780', letterSpacing: 1 }}&gt;实测 · 系统自己发现的五件事&lt;/Text&gt;&#10;        &lt;Box style={{ marginTop: 14, flexDirection: 'column', gap: 0 }}&gt;&#10;          &lt;Box style={{ paddingTop: 12, paddingBottom: 12, borderTop: '1px solid #E3E8F5', flexDirection: 'row', alignItems: 'baseline' }}&gt;&#10;            &lt;Text style={{ fontSize: 26, fontWeight: 'bold', color: '#4C4DDC', width: 96 }}&gt;10.6%&lt;/Text&gt;&#10;            &lt;Text style={{ fontSize: 14, color: '#0C1222' }}&gt;近 7 天折扣率，比前 30 天的 8.4% 高 2.2 个点&lt;/Text&gt;&#10;          &lt;/Box&gt;&#10;          &lt;Box style={{ paddingTop: 12, paddingBottom: 12, borderTop: '1px solid #E3E8F5', flexDirection: 'row', alignItems: 'baseline' }}&gt;&#10;            &lt;Text style={{ fontSize: 26, fontWeight: 'bold', color: '#4C4DDC', width: 96 }}&gt;1,476&lt;/Text&gt;&#10;            &lt;Text style={{ fontSize: 14, color: '#0C1222' }}&gt;元 · 按原折扣水平本可少让的金额&lt;/Text&gt;&#10;          &lt;/Box&gt;&#10;          &lt;Box style={{ paddingTop: 12, paddingBottom: 12, borderTop: '1px solid #E3E8F5', flexDirection: 'row', alignItems: 'baseline' }}&gt;&#10;            &lt;Text style={{ fontSize: 26, fontWeight: 'bold', color: '#4C4DDC', width: 96 }}&gt;20 道&lt;/Text&gt;&#10;            &lt;Text style={{ fontSize: 14, color: '#0C1222' }}&gt;菜连续 3 天 0 销量，占在售 9.7%&lt;/Text&gt;&#10;          &lt;/Box&gt;&#10;          &lt;Box style={{ paddingTop: 12, paddingBottom: 12, borderTop: '1px solid #E3E8F5', flexDirection: 'row', alignItems: 'baseline' }}&gt;&#10;            &lt;Text style={{ fontSize: 26, fontWeight: 'bold', color: '#4C4DDC', width: 96 }}&gt;1 种&lt;/Text&gt;&#10;            &lt;Text style={{ fontSize: 14, color: '#0C1222' }}&gt;食材可支撑不足 2 天（基围虾只剩 1.5 天）&lt;/Text&gt;&#10;          &lt;/Box&gt;&#10;          &lt;Box style={{ paddingTop: 12, paddingBottom: 12, borderTop: '1px solid #E3E8F5', borderBottom: '1px solid #E3E8F5', flexDirection: 'row', alignItems: 'baseline' }}&gt;&#10;            &lt;Text style={{ fontSize: 26, fontWeight: 'bold', color: '#4C4DDC', width: 96 }}&gt;57.8%&lt;/Text&gt;&#10;            &lt;Text style={{ fontSize: 14, color: '#0C1222' }}&gt;近 30 天毛利率，比目标低 2.2 个点&lt;/Text&gt;&#10;          &lt;/Box&gt;&#10;        &lt;/Box&gt;&#10;      &lt;/Box&gt;&#10;      &lt;Box style={{ flex: 1, background: '#EEF1FE', border: '1px solid #C9CDF6', borderRadius: 14, padding: 30, flexDirection: 'column', gap: 18, justifyContent: 'flex-start' }}&gt;&#10;        &lt;Box style={{ flexDirection: 'column', gap: 6 }}&gt;&#10;          &lt;Text style={{ fontSize: 13, color: '#4C4DDC', letterSpacing: 1 }}&gt;测算 · 补齐这 2.2 个点&lt;/Text&gt;&#10;          &lt;Text style={{ fontSize: 56, fontWeight: 'bold', color: '#0C1222', letterSpacing: -1 }}&gt;+9.0&lt;span style={{ fontSize: 22 }}&gt; 万/年&lt;/span&gt;&lt;/Text&gt;&#10;          &lt;Text style={{ fontSize: 13, color: '#5C6780' }}&gt;近 30 天营收 33.1 万 × 2.2pt × 12 个月&lt;/Text&gt;&#10;        &lt;/Box&gt;&#10;        &lt;Box style={{ flexDirection: 'column', gap: 8, marginTop: 6, paddingTop: 16, borderTop: '1px solid #3A3F63' }}&gt;&#10;          &lt;Text style={{ fontSize: 13, color: '#0C1222' }}&gt;怎么补：&lt;/Text&gt;&#10;          &lt;Text style={{ fontSize: 13, color: '#5C6780', lineHeight: 1.8 }}&gt;① 3 道瘦狗菜调价 5%~15%&lt;br /&gt;② 20 道滞销菜组套餐或下架&lt;br /&gt;③ 折扣收回 2 个点&lt;/Text&gt;&#10;        &lt;/Box&gt;&#10;        &lt;Text style={{ fontSize: 11, color: '#6B7490', lineHeight: 1.6, marginTop: 4 }}&gt;&#10;          左列全部由 SQL 从 180 天数据算出，脚本可复现；右侧为按当前规模的线性测算，不是承诺值。&#10;        &lt;/Text&gt;&#10;      &lt;/Box&gt;&#10;    &lt;/Box&gt;&#10;  &lt;/Box&gt;&#10;  &lt;Box style={{ height: 36, flexDirection: 'row', justifyContent: 'space-between', alignItems: 'flex-end' }}&gt;&#10;    &lt;Text style={{ fontSize: 12, color: '#8A93A8' }}&gt;2026 武汉 1024 · 产业应用赛道&lt;/Text&gt;&#10;    &lt;Text style={{ fontSize: 12, color: '#8A93A8' }}&gt;09 / 12&lt;/Text&gt;&#10;  &lt;/Box&gt;&#10;&lt;/Slide&gt;"/>
         <p:cNvGrpSpPr/>
         <p:nvPr/>
       </p:nvGrpSpPr>
@@ -15187,7 +16771,7 @@
       </p:grpSpPr>
       <p:sp>
         <p:nvSpPr>
-          <p:cNvPr id="324" name=""/>
+          <p:cNvPr id="353" name=""/>
           <p:cNvSpPr/>
           <p:nvPr/>
         </p:nvSpPr>
@@ -15211,7 +16795,7 @@
       </p:sp>
       <p:sp>
         <p:nvSpPr>
-          <p:cNvPr id="325" name="" descr="{&quot;isTemplate&quot;:true,&quot;type&quot;:&quot;text&quot;}"/>
+          <p:cNvPr id="354" name="" descr="{&quot;isTemplate&quot;:true,&quot;type&quot;:&quot;text&quot;}"/>
           <p:cNvSpPr txBox="1"/>
           <p:nvPr/>
         </p:nvSpPr>
@@ -15246,7 +16830,7 @@
       </p:sp>
       <p:sp>
         <p:nvSpPr>
-          <p:cNvPr id="326" name="" descr="{&quot;isTemplate&quot;:true,&quot;type&quot;:&quot;text&quot;}"/>
+          <p:cNvPr id="355" name="" descr="{&quot;isTemplate&quot;:true,&quot;type&quot;:&quot;text&quot;}"/>
           <p:cNvSpPr txBox="1"/>
           <p:nvPr/>
         </p:nvSpPr>
@@ -15301,7 +16885,7 @@
       </p:sp>
       <p:sp>
         <p:nvSpPr>
-          <p:cNvPr id="327" name=""/>
+          <p:cNvPr id="356" name=""/>
           <p:cNvSpPr/>
           <p:nvPr/>
         </p:nvSpPr>
@@ -15332,7 +16916,7 @@
       </p:sp>
       <p:sp>
         <p:nvSpPr>
-          <p:cNvPr id="328" name=""/>
+          <p:cNvPr id="357" name=""/>
           <p:cNvSpPr/>
           <p:nvPr/>
         </p:nvSpPr>
@@ -15358,7 +16942,7 @@
       </p:sp>
       <p:sp>
         <p:nvSpPr>
-          <p:cNvPr id="329" name="" descr="{&quot;isTemplate&quot;:true,&quot;type&quot;:&quot;text&quot;}"/>
+          <p:cNvPr id="358" name="" descr="{&quot;isTemplate&quot;:true,&quot;type&quot;:&quot;text&quot;}"/>
           <p:cNvSpPr txBox="1"/>
           <p:nvPr/>
         </p:nvSpPr>
@@ -15403,7 +16987,7 @@
       </p:sp>
       <p:sp>
         <p:nvSpPr>
-          <p:cNvPr id="330" name=""/>
+          <p:cNvPr id="359" name=""/>
           <p:cNvSpPr/>
           <p:nvPr/>
         </p:nvSpPr>
@@ -15429,7 +17013,7 @@
       </p:sp>
       <p:sp>
         <p:nvSpPr>
-          <p:cNvPr id="331" name="" descr="{&quot;isTemplate&quot;:true,&quot;type&quot;:&quot;text&quot;}"/>
+          <p:cNvPr id="360" name="" descr="{&quot;isTemplate&quot;:true,&quot;type&quot;:&quot;text&quot;}"/>
           <p:cNvSpPr txBox="1"/>
           <p:nvPr/>
         </p:nvSpPr>
@@ -15484,7 +17068,7 @@
       </p:sp>
       <p:sp>
         <p:nvSpPr>
-          <p:cNvPr id="332" name=""/>
+          <p:cNvPr id="361" name=""/>
           <p:cNvSpPr/>
           <p:nvPr/>
         </p:nvSpPr>
@@ -15524,7 +17108,7 @@
       </p:sp>
       <p:sp>
         <p:nvSpPr>
-          <p:cNvPr id="333" name="" descr="{&quot;isTemplate&quot;:true,&quot;type&quot;:&quot;text&quot;}"/>
+          <p:cNvPr id="362" name="" descr="{&quot;isTemplate&quot;:true,&quot;type&quot;:&quot;text&quot;}"/>
           <p:cNvSpPr txBox="1"/>
           <p:nvPr/>
         </p:nvSpPr>
@@ -15559,7 +17143,7 @@
       </p:sp>
       <p:sp>
         <p:nvSpPr>
-          <p:cNvPr id="334" name="" descr="{&quot;isTemplate&quot;:true,&quot;type&quot;:&quot;text&quot;}"/>
+          <p:cNvPr id="363" name="" descr="{&quot;isTemplate&quot;:true,&quot;type&quot;:&quot;text&quot;}"/>
           <p:cNvSpPr txBox="1"/>
           <p:nvPr/>
         </p:nvSpPr>
@@ -15674,7 +17258,7 @@
       </p:sp>
       <p:sp>
         <p:nvSpPr>
-          <p:cNvPr id="335" name=""/>
+          <p:cNvPr id="364" name=""/>
           <p:cNvSpPr/>
           <p:nvPr/>
         </p:nvSpPr>
@@ -15714,7 +17298,7 @@
       </p:sp>
       <p:sp>
         <p:nvSpPr>
-          <p:cNvPr id="336" name="" descr="{&quot;isTemplate&quot;:true,&quot;type&quot;:&quot;text&quot;}"/>
+          <p:cNvPr id="365" name="" descr="{&quot;isTemplate&quot;:true,&quot;type&quot;:&quot;text&quot;}"/>
           <p:cNvSpPr txBox="1"/>
           <p:nvPr/>
         </p:nvSpPr>
@@ -15749,7 +17333,7 @@
       </p:sp>
       <p:sp>
         <p:nvSpPr>
-          <p:cNvPr id="337" name="" descr="{&quot;isTemplate&quot;:true,&quot;type&quot;:&quot;text&quot;}"/>
+          <p:cNvPr id="366" name="" descr="{&quot;isTemplate&quot;:true,&quot;type&quot;:&quot;text&quot;}"/>
           <p:cNvSpPr txBox="1"/>
           <p:nvPr/>
         </p:nvSpPr>
@@ -15804,7 +17388,7 @@
       </p:sp>
       <p:sp>
         <p:nvSpPr>
-          <p:cNvPr id="338" name=""/>
+          <p:cNvPr id="367" name=""/>
           <p:cNvSpPr/>
           <p:nvPr/>
         </p:nvSpPr>
@@ -15844,7 +17428,7 @@
       </p:sp>
       <p:sp>
         <p:nvSpPr>
-          <p:cNvPr id="339" name="" descr="{&quot;isTemplate&quot;:true,&quot;type&quot;:&quot;text&quot;}"/>
+          <p:cNvPr id="368" name="" descr="{&quot;isTemplate&quot;:true,&quot;type&quot;:&quot;text&quot;}"/>
           <p:cNvSpPr txBox="1"/>
           <p:nvPr/>
         </p:nvSpPr>
@@ -15889,7 +17473,7 @@
       </p:sp>
       <p:sp>
         <p:nvSpPr>
-          <p:cNvPr id="340" name="" descr="{&quot;isTemplate&quot;:true,&quot;type&quot;:&quot;text&quot;}"/>
+          <p:cNvPr id="369" name="" descr="{&quot;isTemplate&quot;:true,&quot;type&quot;:&quot;text&quot;}"/>
           <p:cNvSpPr txBox="1"/>
           <p:nvPr/>
         </p:nvSpPr>
@@ -15974,7 +17558,7 @@
       </p:sp>
       <p:sp>
         <p:nvSpPr>
-          <p:cNvPr id="341" name=""/>
+          <p:cNvPr id="370" name=""/>
           <p:cNvSpPr/>
           <p:nvPr/>
         </p:nvSpPr>
@@ -16014,7 +17598,7 @@
       </p:sp>
       <p:sp>
         <p:nvSpPr>
-          <p:cNvPr id="342" name="" descr="{&quot;isTemplate&quot;:true,&quot;type&quot;:&quot;text&quot;}"/>
+          <p:cNvPr id="371" name="" descr="{&quot;isTemplate&quot;:true,&quot;type&quot;:&quot;text&quot;}"/>
           <p:cNvSpPr txBox="1"/>
           <p:nvPr/>
         </p:nvSpPr>
@@ -16059,7 +17643,7 @@
       </p:sp>
       <p:sp>
         <p:nvSpPr>
-          <p:cNvPr id="343" name="" descr="{&quot;isTemplate&quot;:true,&quot;type&quot;:&quot;text&quot;}"/>
+          <p:cNvPr id="372" name="" descr="{&quot;isTemplate&quot;:true,&quot;type&quot;:&quot;text&quot;}"/>
           <p:cNvSpPr txBox="1"/>
           <p:nvPr/>
         </p:nvSpPr>
@@ -16134,7 +17718,7 @@
       </p:sp>
       <p:sp>
         <p:nvSpPr>
-          <p:cNvPr id="344" name=""/>
+          <p:cNvPr id="373" name=""/>
           <p:cNvSpPr/>
           <p:nvPr/>
         </p:nvSpPr>
@@ -16174,7 +17758,7 @@
       </p:sp>
       <p:sp>
         <p:nvSpPr>
-          <p:cNvPr id="345" name=""/>
+          <p:cNvPr id="374" name=""/>
           <p:cNvSpPr/>
           <p:nvPr/>
         </p:nvSpPr>
@@ -16214,7 +17798,7 @@
       </p:sp>
       <p:sp>
         <p:nvSpPr>
-          <p:cNvPr id="346" name="" descr="{&quot;isTemplate&quot;:true,&quot;type&quot;:&quot;text&quot;}"/>
+          <p:cNvPr id="375" name="" descr="{&quot;isTemplate&quot;:true,&quot;type&quot;:&quot;text&quot;}"/>
           <p:cNvSpPr txBox="1"/>
           <p:nvPr/>
         </p:nvSpPr>
@@ -16249,7 +17833,7 @@
       </p:sp>
       <p:sp>
         <p:nvSpPr>
-          <p:cNvPr id="347" name="" descr="{&quot;isTemplate&quot;:true,&quot;type&quot;:&quot;text&quot;}"/>
+          <p:cNvPr id="376" name="" descr="{&quot;isTemplate&quot;:true,&quot;type&quot;:&quot;text&quot;}"/>
           <p:cNvSpPr txBox="1"/>
           <p:nvPr/>
         </p:nvSpPr>
@@ -16324,7 +17908,7 @@
       </p:sp>
       <p:sp>
         <p:nvSpPr>
-          <p:cNvPr id="348" name=""/>
+          <p:cNvPr id="377" name=""/>
           <p:cNvSpPr/>
           <p:nvPr/>
         </p:nvSpPr>
@@ -16355,7 +17939,7 @@
       </p:sp>
       <p:sp>
         <p:nvSpPr>
-          <p:cNvPr id="349" name="" descr="{&quot;isTemplate&quot;:true,&quot;type&quot;:&quot;text&quot;}"/>
+          <p:cNvPr id="378" name="" descr="{&quot;isTemplate&quot;:true,&quot;type&quot;:&quot;text&quot;}"/>
           <p:cNvSpPr txBox="1"/>
           <p:nvPr/>
         </p:nvSpPr>
@@ -16430,7 +18014,7 @@
       </p:sp>
       <p:sp>
         <p:nvSpPr>
-          <p:cNvPr id="350" name="" descr="{&quot;isTemplate&quot;:true,&quot;type&quot;:&quot;text&quot;}"/>
+          <p:cNvPr id="379" name="" descr="{&quot;isTemplate&quot;:true,&quot;type&quot;:&quot;text&quot;}"/>
           <p:cNvSpPr txBox="1"/>
           <p:nvPr/>
         </p:nvSpPr>
@@ -16505,7 +18089,7 @@
       </p:sp>
       <p:sp>
         <p:nvSpPr>
-          <p:cNvPr id="351" name="" descr="{&quot;isTemplate&quot;:true,&quot;type&quot;:&quot;text&quot;}"/>
+          <p:cNvPr id="380" name="" descr="{&quot;isTemplate&quot;:true,&quot;type&quot;:&quot;text&quot;}"/>
           <p:cNvSpPr txBox="1"/>
           <p:nvPr/>
         </p:nvSpPr>
@@ -16600,7 +18184,7 @@
       </p:sp>
       <p:sp>
         <p:nvSpPr>
-          <p:cNvPr id="352" name=""/>
+          <p:cNvPr id="381" name=""/>
           <p:cNvSpPr/>
           <p:nvPr/>
         </p:nvSpPr>
@@ -16640,7 +18224,7 @@
       </p:sp>
       <p:sp>
         <p:nvSpPr>
-          <p:cNvPr id="353" name="" descr="{&quot;isTemplate&quot;:true,&quot;type&quot;:&quot;text&quot;}"/>
+          <p:cNvPr id="382" name="" descr="{&quot;isTemplate&quot;:true,&quot;type&quot;:&quot;text&quot;}"/>
           <p:cNvSpPr txBox="1"/>
           <p:nvPr/>
         </p:nvSpPr>
@@ -16675,7 +18259,7 @@
       </p:sp>
       <p:sp>
         <p:nvSpPr>
-          <p:cNvPr id="354" name="" descr="{&quot;isTemplate&quot;:true,&quot;type&quot;:&quot;text&quot;}"/>
+          <p:cNvPr id="383" name="" descr="{&quot;isTemplate&quot;:true,&quot;type&quot;:&quot;text&quot;}"/>
           <p:cNvSpPr txBox="1"/>
           <p:nvPr/>
         </p:nvSpPr>
@@ -16806,7 +18390,7 @@
       </p:sp>
       <p:sp>
         <p:nvSpPr>
-          <p:cNvPr id="355" name="" descr="{&quot;isTemplate&quot;:true,&quot;type&quot;:&quot;text&quot;}"/>
+          <p:cNvPr id="384" name="" descr="{&quot;isTemplate&quot;:true,&quot;type&quot;:&quot;text&quot;}"/>
           <p:cNvSpPr txBox="1"/>
           <p:nvPr/>
         </p:nvSpPr>
@@ -16883,7 +18467,7 @@
       </p:sp>
       <p:sp>
         <p:nvSpPr>
-          <p:cNvPr id="356" name="" descr="{&quot;isTemplate&quot;:true,&quot;type&quot;:&quot;text&quot;}"/>
+          <p:cNvPr id="385" name="" descr="{&quot;isTemplate&quot;:true,&quot;type&quot;:&quot;text&quot;}"/>
           <p:cNvSpPr txBox="1"/>
           <p:nvPr/>
         </p:nvSpPr>
@@ -16948,7 +18532,7 @@
       </p:sp>
       <p:sp>
         <p:nvSpPr>
-          <p:cNvPr id="357" name="" descr="{&quot;isTemplate&quot;:true,&quot;type&quot;:&quot;text&quot;}"/>
+          <p:cNvPr id="386" name="" descr="{&quot;isTemplate&quot;:true,&quot;type&quot;:&quot;text&quot;}"/>
           <p:cNvSpPr txBox="1"/>
           <p:nvPr/>
         </p:nvSpPr>

--- a/docs/AI掌柜-路演PPT/AI掌柜-路演PPT.pptx
+++ b/docs/AI掌柜-路演PPT/AI掌柜-路演PPT.pptx
@@ -7893,7 +7893,7 @@
   <p:cSld>
     <p:spTree>
       <p:nvGrpSpPr>
-        <p:cNvPr id="163" name=""/>
+        <p:cNvPr id="163" name="" descr="&lt;Slide style={{ width: 1280, height: 720, background: '#F6F8FD', padding: '56px 72px', flexDirection: 'column' }}&gt;&#13;&#10;  &lt;Box style={{ height: 96, flexDirection: 'row', justifyContent: 'space-between', alignItems: 'flex-start' }}&gt;&#13;&#10;    &lt;Box style={{ flexDirection: 'column', gap: 8 }}&gt;&#13;&#10;      &lt;Text style={{ fontSize: 34, fontWeight: 'bold', color: '#0C1222' }}&gt;分水岭不在图表，在「能不能动手」&lt;/Text&gt;&#13;&#10;      &lt;Text style={{ fontSize: 15, color: '#5C6780' }}&gt;同样一份营收下滑，两条完全不同的处理路径&lt;/Text&gt;&#13;&#10;    &lt;/Box&gt;&#13;&#10;    &lt;Box style={{ flexDirection: 'row', alignItems: 'center', gap: 6, padding: '5px 12px', background: '#EEF1FE', border: '1px solid #DDE2F5', borderRadius: 999 }}&gt;&#13;&#10;      &lt;Box style={{ width: 6, height: 6, borderRadius: 3, background: '#4C4DDC' }} /&gt;&#13;&#10;      &lt;Text style={{ fontSize: 12, color: '#4C4DDC', fontWeight: 'bold', letterSpacing: 1 }}&gt;AI 掌柜&lt;/Text&gt;&#13;&#10;    &lt;/Box&gt;&#13;&#10;  &lt;/Box&gt;&#13;&#10;  &lt;Box style={{ width: 72, height: 3, background: '#4C4DDC', borderRadius: 2, marginTop: 2, marginBottom: 12 }} /&gt;&#13;&#10;  &lt;Box style={{ flex: 1, paddingTop: 8 }}&gt;&#13;&#10;    &lt;Box style={{ flexDirection: 'row', gap: 24, height: 330 }}&gt;&#13;&#10;      &lt;Box style={{ flex: 1, background: '#FBFCFE', border: '1px solid #E3E8F5', borderRadius: 14, padding: 26 }}&gt;&#13;&#10;        &lt;Text style={{ fontSize: 13, color: '#8A93A8', letterSpacing: 2 }}&gt;传统 BI / 经营看板&lt;/Text&gt;&#13;&#10;        &lt;Text style={{ fontSize: 26, fontWeight: 'bold', color: '#5C6780', marginTop: 10 }}&gt;价值停在「知道」&lt;/Text&gt;&#13;&#10;        &lt;Box style={{ marginTop: 22, flexDirection: 'column', gap: 14 }}&gt;&#13;&#10;          &lt;Text style={{ fontSize: 16, color: '#5C6780' }}&gt;看板 → 发现跌了&lt;/Text&gt;&#13;&#10;          &lt;Text style={{ fontSize: 16, color: '#5C6780' }}&gt;→ 自己判断原因&lt;/Text&gt;&#13;&#10;          &lt;Text style={{ fontSize: 16, color: '#5C6780' }}&gt;→ 自己打电话订货&lt;/Text&gt;&#13;&#10;          &lt;Text style={{ fontSize: 16, color: '#5C6780' }}&gt;→ 一周后忘了复盘&lt;/Text&gt;&#13;&#10;        &lt;/Box&gt;&#13;&#10;      &lt;/Box&gt;&#13;&#10;      &lt;Box style={{ flex: 1, background: '#EEF1FE', border: '1px solid #C9CDF6', borderRadius: 14, padding: 26 }}&gt;&#13;&#10;        &lt;Text style={{ fontSize: 13, color: '#4C4DDC', letterSpacing: 2 }}&gt;AI 掌柜&lt;/Text&gt;&#13;&#10;        &lt;Text style={{ fontSize: 26, fontWeight: 'bold', color: '#0C1222', marginTop: 10 }}&gt;价值走到「改变」&lt;/Text&gt;&#13;&#10;        &lt;Box style={{ marginTop: 22, flexDirection: 'column', gap: 14 }}&gt;&#13;&#10;          &lt;Text style={{ fontSize: 16, color: '#0C1222' }}&gt;驾驶舱 → 3 件事 + 证据&lt;/Text&gt;&#13;&#10;          &lt;Text style={{ fontSize: 16, color: '#0C1222' }}&gt;→ 拆解成客流 / 客单价&lt;/Text&gt;&#13;&#10;          &lt;Text style={{ fontSize: 16, color: '#0C1222' }}&gt;→ 一键生成采购单并入库&lt;/Text&gt;&#13;&#10;          &lt;Text style={{ fontSize: 16, color: '#0C1222' }}&gt;→ 7 天后自动回填效果&lt;/Text&gt;&#13;&#10;        &lt;/Box&gt;&#13;&#10;      &lt;/Box&gt;&#13;&#10;    &lt;/Box&gt;&#13;&#10;    &lt;Box style={{ marginTop: 28, background: '#EEF1FE', border: '1px solid #C9CDF6', borderRadius: 12, padding: '18px 24px', flexDirection: 'row', alignItems: 'center', gap: 12 }}&gt;&#13;&#10;      &lt;Text style={{ fontSize: 11, color: '#4C4DDC', fontWeight: 'bold', letterSpacing: 2, width: 96 }}&gt;同一条链路&lt;/Text&gt;&#13;&#10;      &lt;Text style={{ fontSize: 15, color: '#0C1222' }}&gt;发现异常&lt;/Text&gt;&#13;&#10;      &lt;Text style={{ fontSize: 15, color: '#9AA3BE' }}&gt;→&lt;/Text&gt;&#13;&#10;      &lt;Text style={{ fontSize: 15, color: '#0C1222' }}&gt;算清原因&lt;/Text&gt;&#13;&#10;      &lt;Text style={{ fontSize: 15, color: '#9AA3BE' }}&gt;→&lt;/Text&gt;&#13;&#10;      &lt;Text style={{ fontSize: 15, color: '#0C1222' }}&gt;动手执行&lt;/Text&gt;&#13;&#10;      &lt;Text style={{ fontSize: 15, color: '#9AA3BE' }}&gt;→&lt;/Text&gt;&#13;&#10;      &lt;Text style={{ fontSize: 15, color: '#0C1222' }}&gt;7 天后复核&lt;/Text&gt;&#13;&#10;      &lt;Text style={{ fontSize: 12, color: '#5C6780', marginLeft: 8 }}&gt;四步不换页面&lt;/Text&gt;&#13;&#10;    &lt;/Box&gt;&#13;&#10;    &lt;Box style={{ marginTop: 22, flexDirection: 'row', gap: 14 }}&gt;&#13;&#10;      &lt;Text style={{ fontSize: 15, color: '#5C6780' }}&gt;三个关键词&lt;/Text&gt;&#13;&#10;      &lt;Text style={{ fontSize: 15, color: '#4C4DDC', fontWeight: 'bold' }}&gt;可执行 · 可追溯 · 可撤销&lt;/Text&gt;&#13;&#10;    &lt;/Box&gt;&#13;&#10;  &lt;/Box&gt;&#13;&#10;  &lt;Box style={{ height: 36, flexDirection: 'row', justifyContent: 'space-between', alignItems: 'flex-end' }}&gt;&#13;&#10;    &lt;Text style={{ fontSize: 12, color: '#8A93A8' }}&gt;2026 武汉 1024 · 产业应用赛道&lt;/Text&gt;&#13;&#10;    &lt;Text style={{ fontSize: 12, color: '#8A93A8' }}&gt;03 / 12&lt;/Text&gt;&#13;&#10;  &lt;/Box&gt;&#13;&#10;&lt;/Slide&gt;"/>
         <p:cNvGrpSpPr/>
         <p:nvPr/>
       </p:nvGrpSpPr>
@@ -7926,10 +7926,7 @@
         </p:spPr>
         <p:txBody>
           <a:bodyPr/>
-          <a:p>
-            <a:pPr/>
-            <a:endParaRPr/>
-          </a:p>
+          <a:p/>
         </p:txBody>
       </p:sp>
       <p:sp>
@@ -8030,10 +8027,7 @@
         </p:spPr>
         <p:txBody>
           <a:bodyPr/>
-          <a:p>
-            <a:pPr/>
-            <a:endParaRPr/>
-          </a:p>
+          <a:p/>
         </p:txBody>
       </p:sp>
       <p:sp>
@@ -8059,10 +8053,7 @@
         </p:spPr>
         <p:txBody>
           <a:bodyPr/>
-          <a:p>
-            <a:pPr/>
-            <a:endParaRPr/>
-          </a:p>
+          <a:p/>
         </p:txBody>
       </p:sp>
       <p:sp>
@@ -8133,10 +8124,7 @@
         </p:spPr>
         <p:txBody>
           <a:bodyPr/>
-          <a:p>
-            <a:pPr/>
-            <a:endParaRPr/>
-          </a:p>
+          <a:p/>
         </p:txBody>
       </p:sp>
       <p:sp>
@@ -8167,10 +8155,7 @@
         </p:spPr>
         <p:txBody>
           <a:bodyPr/>
-          <a:p>
-            <a:pPr/>
-            <a:endParaRPr/>
-          </a:p>
+          <a:p/>
         </p:txBody>
       </p:sp>
       <p:sp>
@@ -8481,10 +8466,7 @@
         </p:spPr>
         <p:txBody>
           <a:bodyPr/>
-          <a:p>
-            <a:pPr/>
-            <a:endParaRPr/>
-          </a:p>
+          <a:p/>
         </p:txBody>
       </p:sp>
       <p:sp>
@@ -8799,13 +8781,369 @@
       </p:sp>
       <p:sp>
         <p:nvSpPr>
-          <p:cNvPr id="185" name="" descr="{&quot;isTemplate&quot;:true,&quot;type&quot;:&quot;text&quot;}"/>
-          <p:cNvSpPr txBox="1"/>
-          <p:nvPr/>
-        </p:nvSpPr>
-        <p:spPr>
-          <a:xfrm rot="0" flipH="0" flipV="0">
-            <a:off x="685800" y="5114925"/>
+          <p:cNvPr id="185" name=""/>
+          <p:cNvSpPr/>
+          <p:nvPr/>
+        </p:nvSpPr>
+        <p:spPr>
+          <a:xfrm rot="0" flipH="0" flipV="0">
+            <a:off x="685800" y="5095875"/>
+            <a:ext cx="10820400" cy="514350"/>
+          </a:xfrm>
+          <a:prstGeom prst="roundRect">
+            <a:avLst>
+              <a:gd name="adj" fmla="val 22222"/>
+            </a:avLst>
+          </a:prstGeom>
+          <a:solidFill>
+            <a:srgbClr val="EEF1FE"/>
+          </a:solidFill>
+          <a:ln w="12700">
+            <a:solidFill>
+              <a:srgbClr val="C9CDF6"/>
+            </a:solidFill>
+            <a:prstDash val="solid"/>
+          </a:ln>
+        </p:spPr>
+        <p:txBody>
+          <a:bodyPr/>
+          <a:p/>
+        </p:txBody>
+      </p:sp>
+      <p:sp>
+        <p:nvSpPr>
+          <p:cNvPr id="186" name="" descr="{&quot;isTemplate&quot;:true,&quot;type&quot;:&quot;text&quot;}"/>
+          <p:cNvSpPr txBox="1"/>
+          <p:nvPr/>
+        </p:nvSpPr>
+        <p:spPr>
+          <a:xfrm rot="0" flipH="0" flipV="0">
+            <a:off x="914400" y="5286375"/>
+            <a:ext cx="914400" cy="133350"/>
+          </a:xfrm>
+          <a:prstGeom prst="rect"/>
+        </p:spPr>
+        <p:txBody>
+          <a:bodyPr wrap="none" lIns="0" tIns="0" rIns="0" bIns="0"/>
+          <a:p>
+            <a:pPr>
+              <a:lnSpc>
+                <a:spcPct val="100000"/>
+              </a:lnSpc>
+            </a:pPr>
+            <a:r>
+              <a:rPr lang="zh-CN" sz="825" b="1" spc="150">
+                <a:solidFill>
+                  <a:srgbClr val="4C4DDC"/>
+                </a:solidFill>
+                <a:latin typeface="Microsoft YaHei"/>
+                <a:ea typeface="Microsoft YaHei"/>
+              </a:rPr>
+              <a:t>同一条链路</a:t>
+            </a:r>
+            <a:endParaRPr/>
+          </a:p>
+        </p:txBody>
+      </p:sp>
+      <p:sp>
+        <p:nvSpPr>
+          <p:cNvPr id="187" name="" descr="{&quot;isTemplate&quot;:true,&quot;type&quot;:&quot;text&quot;}"/>
+          <p:cNvSpPr txBox="1"/>
+          <p:nvPr/>
+        </p:nvSpPr>
+        <p:spPr>
+          <a:xfrm rot="0" flipH="0" flipV="0">
+            <a:off x="1943100" y="5267325"/>
+            <a:ext cx="571500" cy="171450"/>
+          </a:xfrm>
+          <a:prstGeom prst="rect"/>
+        </p:spPr>
+        <p:txBody>
+          <a:bodyPr wrap="none" lIns="0" tIns="0" rIns="0" bIns="0"/>
+          <a:p>
+            <a:pPr>
+              <a:lnSpc>
+                <a:spcPct val="100000"/>
+              </a:lnSpc>
+            </a:pPr>
+            <a:r>
+              <a:rPr lang="zh-CN" sz="1125">
+                <a:solidFill>
+                  <a:srgbClr val="0C1222"/>
+                </a:solidFill>
+                <a:latin typeface="Microsoft YaHei"/>
+                <a:ea typeface="Microsoft YaHei"/>
+              </a:rPr>
+              <a:t>发现异常</a:t>
+            </a:r>
+            <a:endParaRPr/>
+          </a:p>
+        </p:txBody>
+      </p:sp>
+      <p:sp>
+        <p:nvSpPr>
+          <p:cNvPr id="188" name="" descr="{&quot;isTemplate&quot;:true,&quot;type&quot;:&quot;text&quot;}"/>
+          <p:cNvSpPr txBox="1"/>
+          <p:nvPr/>
+        </p:nvSpPr>
+        <p:spPr>
+          <a:xfrm rot="0" flipH="0" flipV="0">
+            <a:off x="2628900" y="5267325"/>
+            <a:ext cx="142875" cy="171450"/>
+          </a:xfrm>
+          <a:prstGeom prst="rect"/>
+        </p:spPr>
+        <p:txBody>
+          <a:bodyPr wrap="none" lIns="0" tIns="0" rIns="0" bIns="0"/>
+          <a:p>
+            <a:pPr>
+              <a:lnSpc>
+                <a:spcPct val="100000"/>
+              </a:lnSpc>
+            </a:pPr>
+            <a:r>
+              <a:rPr sz="1125">
+                <a:solidFill>
+                  <a:srgbClr val="9AA3BE"/>
+                </a:solidFill>
+                <a:latin typeface="Microsoft YaHei"/>
+                <a:ea typeface="Microsoft YaHei"/>
+              </a:rPr>
+              <a:t>→</a:t>
+            </a:r>
+            <a:endParaRPr/>
+          </a:p>
+        </p:txBody>
+      </p:sp>
+      <p:sp>
+        <p:nvSpPr>
+          <p:cNvPr id="189" name="" descr="{&quot;isTemplate&quot;:true,&quot;type&quot;:&quot;text&quot;}"/>
+          <p:cNvSpPr txBox="1"/>
+          <p:nvPr/>
+        </p:nvSpPr>
+        <p:spPr>
+          <a:xfrm rot="0" flipH="0" flipV="0">
+            <a:off x="2886075" y="5267325"/>
+            <a:ext cx="571500" cy="171450"/>
+          </a:xfrm>
+          <a:prstGeom prst="rect"/>
+        </p:spPr>
+        <p:txBody>
+          <a:bodyPr wrap="none" lIns="0" tIns="0" rIns="0" bIns="0"/>
+          <a:p>
+            <a:pPr>
+              <a:lnSpc>
+                <a:spcPct val="100000"/>
+              </a:lnSpc>
+            </a:pPr>
+            <a:r>
+              <a:rPr lang="zh-CN" sz="1125">
+                <a:solidFill>
+                  <a:srgbClr val="0C1222"/>
+                </a:solidFill>
+                <a:latin typeface="Microsoft YaHei"/>
+                <a:ea typeface="Microsoft YaHei"/>
+              </a:rPr>
+              <a:t>算清原因</a:t>
+            </a:r>
+            <a:endParaRPr/>
+          </a:p>
+        </p:txBody>
+      </p:sp>
+      <p:sp>
+        <p:nvSpPr>
+          <p:cNvPr id="190" name="" descr="{&quot;isTemplate&quot;:true,&quot;type&quot;:&quot;text&quot;}"/>
+          <p:cNvSpPr txBox="1"/>
+          <p:nvPr/>
+        </p:nvSpPr>
+        <p:spPr>
+          <a:xfrm rot="0" flipH="0" flipV="0">
+            <a:off x="3571875" y="5267325"/>
+            <a:ext cx="142875" cy="171450"/>
+          </a:xfrm>
+          <a:prstGeom prst="rect"/>
+        </p:spPr>
+        <p:txBody>
+          <a:bodyPr wrap="none" lIns="0" tIns="0" rIns="0" bIns="0"/>
+          <a:p>
+            <a:pPr>
+              <a:lnSpc>
+                <a:spcPct val="100000"/>
+              </a:lnSpc>
+            </a:pPr>
+            <a:r>
+              <a:rPr sz="1125">
+                <a:solidFill>
+                  <a:srgbClr val="9AA3BE"/>
+                </a:solidFill>
+                <a:latin typeface="Microsoft YaHei"/>
+                <a:ea typeface="Microsoft YaHei"/>
+              </a:rPr>
+              <a:t>→</a:t>
+            </a:r>
+            <a:endParaRPr/>
+          </a:p>
+        </p:txBody>
+      </p:sp>
+      <p:sp>
+        <p:nvSpPr>
+          <p:cNvPr id="191" name="" descr="{&quot;isTemplate&quot;:true,&quot;type&quot;:&quot;text&quot;}"/>
+          <p:cNvSpPr txBox="1"/>
+          <p:nvPr/>
+        </p:nvSpPr>
+        <p:spPr>
+          <a:xfrm rot="0" flipH="0" flipV="0">
+            <a:off x="3829050" y="5267325"/>
+            <a:ext cx="571500" cy="171450"/>
+          </a:xfrm>
+          <a:prstGeom prst="rect"/>
+        </p:spPr>
+        <p:txBody>
+          <a:bodyPr wrap="none" lIns="0" tIns="0" rIns="0" bIns="0"/>
+          <a:p>
+            <a:pPr>
+              <a:lnSpc>
+                <a:spcPct val="100000"/>
+              </a:lnSpc>
+            </a:pPr>
+            <a:r>
+              <a:rPr lang="zh-CN" sz="1125">
+                <a:solidFill>
+                  <a:srgbClr val="0C1222"/>
+                </a:solidFill>
+                <a:latin typeface="Microsoft YaHei"/>
+                <a:ea typeface="Microsoft YaHei"/>
+              </a:rPr>
+              <a:t>动手执行</a:t>
+            </a:r>
+            <a:endParaRPr/>
+          </a:p>
+        </p:txBody>
+      </p:sp>
+      <p:sp>
+        <p:nvSpPr>
+          <p:cNvPr id="192" name="" descr="{&quot;isTemplate&quot;:true,&quot;type&quot;:&quot;text&quot;}"/>
+          <p:cNvSpPr txBox="1"/>
+          <p:nvPr/>
+        </p:nvSpPr>
+        <p:spPr>
+          <a:xfrm rot="0" flipH="0" flipV="0">
+            <a:off x="4514850" y="5267325"/>
+            <a:ext cx="142875" cy="171450"/>
+          </a:xfrm>
+          <a:prstGeom prst="rect"/>
+        </p:spPr>
+        <p:txBody>
+          <a:bodyPr wrap="none" lIns="0" tIns="0" rIns="0" bIns="0"/>
+          <a:p>
+            <a:pPr>
+              <a:lnSpc>
+                <a:spcPct val="100000"/>
+              </a:lnSpc>
+            </a:pPr>
+            <a:r>
+              <a:rPr sz="1125">
+                <a:solidFill>
+                  <a:srgbClr val="9AA3BE"/>
+                </a:solidFill>
+                <a:latin typeface="Microsoft YaHei"/>
+                <a:ea typeface="Microsoft YaHei"/>
+              </a:rPr>
+              <a:t>→</a:t>
+            </a:r>
+            <a:endParaRPr/>
+          </a:p>
+        </p:txBody>
+      </p:sp>
+      <p:sp>
+        <p:nvSpPr>
+          <p:cNvPr id="193" name="" descr="{&quot;isTemplate&quot;:true,&quot;type&quot;:&quot;text&quot;}"/>
+          <p:cNvSpPr txBox="1"/>
+          <p:nvPr/>
+        </p:nvSpPr>
+        <p:spPr>
+          <a:xfrm rot="0" flipH="0" flipV="0">
+            <a:off x="4772025" y="5267325"/>
+            <a:ext cx="704850" cy="171450"/>
+          </a:xfrm>
+          <a:prstGeom prst="rect"/>
+        </p:spPr>
+        <p:txBody>
+          <a:bodyPr wrap="none" lIns="0" tIns="0" rIns="0" bIns="0"/>
+          <a:p>
+            <a:pPr>
+              <a:lnSpc>
+                <a:spcPct val="100000"/>
+              </a:lnSpc>
+            </a:pPr>
+            <a:r>
+              <a:rPr lang="en-US" sz="1125">
+                <a:solidFill>
+                  <a:srgbClr val="0C1222"/>
+                </a:solidFill>
+                <a:latin typeface="Microsoft YaHei"/>
+                <a:ea typeface="Microsoft YaHei"/>
+              </a:rPr>
+              <a:t xml:space="preserve">7 </a:t>
+            </a:r>
+            <a:r>
+              <a:rPr lang="zh-CN" sz="1125">
+                <a:solidFill>
+                  <a:srgbClr val="0C1222"/>
+                </a:solidFill>
+                <a:latin typeface="Microsoft YaHei"/>
+                <a:ea typeface="Microsoft YaHei"/>
+              </a:rPr>
+              <a:t>天后复核</a:t>
+            </a:r>
+            <a:endParaRPr/>
+          </a:p>
+        </p:txBody>
+      </p:sp>
+      <p:sp>
+        <p:nvSpPr>
+          <p:cNvPr id="194" name="" descr="{&quot;isTemplate&quot;:true,&quot;type&quot;:&quot;text&quot;}"/>
+          <p:cNvSpPr txBox="1"/>
+          <p:nvPr/>
+        </p:nvSpPr>
+        <p:spPr>
+          <a:xfrm rot="0" flipH="0" flipV="0">
+            <a:off x="5667375" y="5286375"/>
+            <a:ext cx="685800" cy="142875"/>
+          </a:xfrm>
+          <a:prstGeom prst="rect"/>
+        </p:spPr>
+        <p:txBody>
+          <a:bodyPr wrap="none" lIns="0" tIns="0" rIns="0" bIns="0"/>
+          <a:p>
+            <a:pPr>
+              <a:lnSpc>
+                <a:spcPct val="100000"/>
+              </a:lnSpc>
+            </a:pPr>
+            <a:r>
+              <a:rPr lang="zh-CN" sz="900">
+                <a:solidFill>
+                  <a:srgbClr val="5C6780"/>
+                </a:solidFill>
+                <a:latin typeface="Microsoft YaHei"/>
+                <a:ea typeface="Microsoft YaHei"/>
+              </a:rPr>
+              <a:t>四步不换页面</a:t>
+            </a:r>
+            <a:endParaRPr/>
+          </a:p>
+        </p:txBody>
+      </p:sp>
+      <p:sp>
+        <p:nvSpPr>
+          <p:cNvPr id="195" name="" descr="{&quot;isTemplate&quot;:true,&quot;type&quot;:&quot;text&quot;}"/>
+          <p:cNvSpPr txBox="1"/>
+          <p:nvPr/>
+        </p:nvSpPr>
+        <p:spPr>
+          <a:xfrm rot="0" flipH="0" flipV="0">
+            <a:off x="685800" y="5819775"/>
             <a:ext cx="714375" cy="171450"/>
           </a:xfrm>
           <a:prstGeom prst="rect"/>
@@ -8834,13 +9172,13 @@
       </p:sp>
       <p:sp>
         <p:nvSpPr>
-          <p:cNvPr id="186" name="" descr="{&quot;isTemplate&quot;:true,&quot;type&quot;:&quot;text&quot;}"/>
-          <p:cNvSpPr txBox="1"/>
-          <p:nvPr/>
-        </p:nvSpPr>
-        <p:spPr>
-          <a:xfrm rot="0" flipH="0" flipV="0">
-            <a:off x="1533525" y="5114925"/>
+          <p:cNvPr id="196" name="" descr="{&quot;isTemplate&quot;:true,&quot;type&quot;:&quot;text&quot;}"/>
+          <p:cNvSpPr txBox="1"/>
+          <p:nvPr/>
+        </p:nvSpPr>
+        <p:spPr>
+          <a:xfrm rot="0" flipH="0" flipV="0">
+            <a:off x="1533525" y="5819775"/>
             <a:ext cx="1590675" cy="171450"/>
           </a:xfrm>
           <a:prstGeom prst="rect"/>
@@ -8909,13 +9247,13 @@
       </p:sp>
       <p:sp>
         <p:nvSpPr>
-          <p:cNvPr id="187" name="" descr="{&quot;isTemplate&quot;:true,&quot;type&quot;:&quot;text&quot;}"/>
-          <p:cNvSpPr txBox="1"/>
-          <p:nvPr/>
-        </p:nvSpPr>
-        <p:spPr>
-          <a:xfrm rot="0" flipH="0" flipV="0">
-            <a:off x="685800" y="6181725"/>
+          <p:cNvPr id="197" name="" descr="{&quot;isTemplate&quot;:true,&quot;type&quot;:&quot;text&quot;}"/>
+          <p:cNvSpPr txBox="1"/>
+          <p:nvPr/>
+        </p:nvSpPr>
+        <p:spPr>
+          <a:xfrm rot="0" flipH="0" flipV="0">
+            <a:off x="685800" y="6191250"/>
             <a:ext cx="1619250" cy="142875"/>
           </a:xfrm>
           <a:prstGeom prst="rect"/>
@@ -8974,13 +9312,13 @@
       </p:sp>
       <p:sp>
         <p:nvSpPr>
-          <p:cNvPr id="188" name="" descr="{&quot;isTemplate&quot;:true,&quot;type&quot;:&quot;text&quot;}"/>
-          <p:cNvSpPr txBox="1"/>
-          <p:nvPr/>
-        </p:nvSpPr>
-        <p:spPr>
-          <a:xfrm rot="0" flipH="0" flipV="0">
-            <a:off x="11115675" y="6181725"/>
+          <p:cNvPr id="198" name="" descr="{&quot;isTemplate&quot;:true,&quot;type&quot;:&quot;text&quot;}"/>
+          <p:cNvSpPr txBox="1"/>
+          <p:nvPr/>
+        </p:nvSpPr>
+        <p:spPr>
+          <a:xfrm rot="0" flipH="0" flipV="0">
+            <a:off x="11115675" y="6191250"/>
             <a:ext cx="390525" cy="142875"/>
           </a:xfrm>
           <a:prstGeom prst="rect"/>
@@ -9017,7 +9355,7 @@
   <p:cSld>
     <p:spTree>
       <p:nvGrpSpPr>
-        <p:cNvPr id="189" name="" descr="&lt;Slide style={{ width: 1280, height: 720, background: '#F6F8FD', padding: '56px 72px', flexDirection: 'column' }}&gt;&#13;&#10;  &lt;Box style={{ height: 96, flexDirection: 'row', justifyContent: 'space-between', alignItems: 'flex-start' }}&gt;&#13;&#10;    &lt;Box style={{ flexDirection: 'column', gap: 8 }}&gt;&#13;&#10;      &lt;Text style={{ fontSize: 34, fontWeight: 'bold', color: '#0C1222' }}&gt;四块能力，缺一块都落不了地&lt;/Text&gt;&#13;&#10;      &lt;Text style={{ fontSize: 15, color: '#5C6780' }}&gt;看得懂、算得准、动得了、说得清&lt;/Text&gt;&#13;&#10;    &lt;/Box&gt;&#13;&#10;    &lt;Box style={{ flexDirection: 'row', alignItems: 'center', gap: 6, padding: '5px 12px', background: '#EEF1FE', border: '1px solid #DDE2F5', borderRadius: 999 }}&gt;&#13;&#10;      &lt;Box style={{ width: 6, height: 6, borderRadius: 3, background: '#4C4DDC' }} /&gt;&#13;&#10;      &lt;Text style={{ fontSize: 12, color: '#4C4DDC', fontWeight: 'bold', letterSpacing: 1 }}&gt;AI 掌柜&lt;/Text&gt;&#13;&#10;    &lt;/Box&gt;&#13;&#10;  &lt;/Box&gt;&#13;&#10;  &lt;Box style={{ width: 72, height: 3, background: '#4C4DDC', borderRadius: 2, marginTop: 2, marginBottom: 12 }} /&gt;&#13;&#10;  &lt;Box style={{ flex: 1, paddingTop: 8 }}&gt;&#13;&#10;    &lt;Box style={{ flexDirection: 'row', gap: 18, height: 250 }}&gt;&#13;&#10;      &lt;Box style={{ flex: 1, background: '#FFFFFF', border: '1px solid #E3E8F5', borderRadius: 14, padding: 24 }}&gt;&#13;&#10;        &lt;Text style={{ fontSize: 20, fontWeight: 'bold', color: '#4C4DDC' }}&gt;看得懂&lt;/Text&gt;&#13;&#10;        &lt;Text style={{ fontSize: 15, color: '#0C1222', marginTop: 12, lineHeight: 1.75 }}&gt;营收 · 客流 · 毛利&lt;br /&gt;时段 · 翻台 · 会员结构&lt;/Text&gt;&#13;&#10;        &lt;Text style={{ fontSize: 13, color: '#5C6780', marginTop: 16 }}&gt;180 天 / 6,803 单&lt;/Text&gt;&#13;&#10;      &lt;/Box&gt;&#13;&#10;      &lt;Box style={{ flex: 1, background: '#FFFFFF', border: '1px solid #E3E8F5', borderRadius: 14, padding: 24 }}&gt;&#13;&#10;        &lt;Text style={{ fontSize: 20, fontWeight: 'bold', color: '#4C4DDC' }}&gt;算得准&lt;/Text&gt;&#13;&#10;        &lt;Text style={{ fontSize: 15, color: '#0C1222', marginTop: 12, lineHeight: 1.75 }}&gt;指标唯一口径&lt;br /&gt;BOM 成本 · 三层预测 · 经营推演&lt;/Text&gt;&#13;&#10;        &lt;Text style={{ fontSize: 13, color: '#5C6780', marginTop: 16 }}&gt;回测误差约 30%（含异常周）&lt;/Text&gt;&#13;&#10;      &lt;/Box&gt;&#13;&#10;      &lt;Box style={{ flex: 1, background: '#FFFFFF', border: '1px solid #E3E8F5', borderRadius: 14, padding: 24 }}&gt;&#13;&#10;        &lt;Text style={{ fontSize: 20, fontWeight: 'bold', color: '#4C4DDC' }}&gt;动得了&lt;/Text&gt;&#13;&#10;        &lt;Text style={{ fontSize: 15, color: '#0C1222', marginTop: 12, lineHeight: 1.75 }}&gt;生成采购单 · 按毛利调价&lt;br /&gt;滞销菜设为主推&lt;/Text&gt;&#13;&#10;        &lt;Text style={{ fontSize: 13, color: '#5C6780', marginTop: 16 }}&gt;3 类动作 · 全部可撤销&lt;/Text&gt;&#13;&#10;      &lt;/Box&gt;&#13;&#10;      &lt;Box style={{ flex: 1, background: '#FFFFFF', border: '1px solid #E3E8F5', borderRadius: 14, padding: 24 }}&gt;&#13;&#10;        &lt;Text style={{ fontSize: 20, fontWeight: 'bold', color: '#4C4DDC' }}&gt;说得清&lt;/Text&gt;&#13;&#10;        &lt;Text style={{ fontSize: 15, color: '#0C1222', marginTop: 12, lineHeight: 1.75 }}&gt;每条结论附证据 SQL&lt;br /&gt;操作留痕 · 一键回滚&lt;/Text&gt;&#13;&#10;        &lt;Text style={{ fontSize: 13, color: '#5C6780', marginTop: 16 }}&gt;8 条越界语句 100% 拦截&lt;/Text&gt;&#13;&#10;      &lt;/Box&gt;&#13;&#10;    &lt;/Box&gt;&#13;&#10;    &lt;Box style={{ marginTop: 28, background: '#FBFCFE', border: '1px solid #E3E8F5', borderRadius: 12, padding: '20px 24px', flexDirection: 'row', alignItems: 'center', gap: 18 }}&gt;&#13;&#10;      &lt;Text style={{ fontSize: 15, color: '#5C6780', width: 110 }}&gt;串联起来&lt;/Text&gt;&#13;&#10;      &lt;Text style={{ fontSize: 17, color: '#0C1222' }}&gt;看到异常 → 算清原因 → 直接处理 → 留下证据，四步在同一屏里完成。&lt;/Text&gt;&#13;&#10;    &lt;/Box&gt;&#13;&#10;  &lt;/Box&gt;&#13;&#10;  &lt;Box style={{ height: 36, flexDirection: 'row', justifyContent: 'space-between', alignItems: 'flex-end' }}&gt;&#13;&#10;    &lt;Text style={{ fontSize: 12, color: '#8A93A8' }}&gt;2026 武汉 1024 · 产业应用赛道&lt;/Text&gt;&#13;&#10;    &lt;Text style={{ fontSize: 12, color: '#8A93A8' }}&gt;04 / 12&lt;/Text&gt;&#13;&#10;  &lt;/Box&gt;&#13;&#10;&lt;/Slide&gt;"/>
+        <p:cNvPr id="199" name="" descr="&lt;Slide style={{ width: 1280, height: 720, background: '#F6F8FD', padding: '56px 72px', flexDirection: 'column' }}&gt;&#13;&#10;  &lt;Box style={{ height: 96, flexDirection: 'row', justifyContent: 'space-between', alignItems: 'flex-start' }}&gt;&#13;&#10;    &lt;Box style={{ flexDirection: 'column', gap: 8 }}&gt;&#13;&#10;      &lt;Text style={{ fontSize: 34, fontWeight: 'bold', color: '#0C1222' }}&gt;四块能力，缺一块都落不了地&lt;/Text&gt;&#13;&#10;      &lt;Text style={{ fontSize: 15, color: '#5C6780' }}&gt;看得懂、算得准、动得了、说得清&lt;/Text&gt;&#13;&#10;    &lt;/Box&gt;&#13;&#10;    &lt;Box style={{ flexDirection: 'row', alignItems: 'center', gap: 6, padding: '5px 12px', background: '#EEF1FE', border: '1px solid #DDE2F5', borderRadius: 999 }}&gt;&#13;&#10;      &lt;Box style={{ width: 6, height: 6, borderRadius: 3, background: '#4C4DDC' }} /&gt;&#13;&#10;      &lt;Text style={{ fontSize: 12, color: '#4C4DDC', fontWeight: 'bold', letterSpacing: 1 }}&gt;AI 掌柜&lt;/Text&gt;&#13;&#10;    &lt;/Box&gt;&#13;&#10;  &lt;/Box&gt;&#13;&#10;  &lt;Box style={{ width: 72, height: 3, background: '#4C4DDC', borderRadius: 2, marginTop: 2, marginBottom: 12 }} /&gt;&#13;&#10;  &lt;Box style={{ flex: 1, paddingTop: 8 }}&gt;&#13;&#10;    &lt;Box style={{ flexDirection: 'row', gap: 18, height: 250 }}&gt;&#13;&#10;      &lt;Box style={{ flex: 1, background: '#FFFFFF', border: '1px solid #E3E8F5', borderRadius: 14, padding: 24 }}&gt;&#13;&#10;        &lt;Text style={{ fontSize: 20, fontWeight: 'bold', color: '#4C4DDC' }}&gt;看得懂&lt;/Text&gt;&#13;&#10;        &lt;Text style={{ fontSize: 15, color: '#0C1222', marginTop: 12, lineHeight: 1.75 }}&gt;营收 · 客流 · 毛利&lt;br /&gt;时段 · 翻台 · 会员结构&lt;/Text&gt;&#13;&#10;        &lt;Text style={{ fontSize: 13, color: '#5C6780', marginTop: 16 }}&gt;180 天 / 6,803 单&lt;/Text&gt;&#13;&#10;      &lt;/Box&gt;&#13;&#10;      &lt;Box style={{ flex: 1, background: '#FFFFFF', border: '1px solid #E3E8F5', borderRadius: 14, padding: 24 }}&gt;&#13;&#10;        &lt;Text style={{ fontSize: 20, fontWeight: 'bold', color: '#4C4DDC' }}&gt;算得准&lt;/Text&gt;&#13;&#10;        &lt;Text style={{ fontSize: 15, color: '#0C1222', marginTop: 12, lineHeight: 1.75 }}&gt;指标唯一口径&lt;br /&gt;BOM 成本 · 三层预测 · 经营推演&lt;/Text&gt;&#13;&#10;        &lt;Text style={{ fontSize: 13, color: '#5C6780', marginTop: 16 }}&gt;回测误差约 30%（含异常周）&lt;/Text&gt;&#13;&#10;      &lt;/Box&gt;&#13;&#10;      &lt;Box style={{ flex: 1, background: '#FFFFFF', border: '1px solid #E3E8F5', borderRadius: 14, padding: 24 }}&gt;&#13;&#10;        &lt;Text style={{ fontSize: 20, fontWeight: 'bold', color: '#4C4DDC' }}&gt;动得了&lt;/Text&gt;&#13;&#10;        &lt;Text style={{ fontSize: 15, color: '#0C1222', marginTop: 12, lineHeight: 1.75 }}&gt;生成采购单 · 按毛利调价&lt;br /&gt;滞销菜设为主推&lt;/Text&gt;&#13;&#10;        &lt;Text style={{ fontSize: 13, color: '#5C6780', marginTop: 16 }}&gt;3 类动作 · 全部可撤销&lt;/Text&gt;&#13;&#10;      &lt;/Box&gt;&#13;&#10;      &lt;Box style={{ flex: 1, background: '#FFFFFF', border: '1px solid #E3E8F5', borderRadius: 14, padding: 24 }}&gt;&#13;&#10;        &lt;Text style={{ fontSize: 20, fontWeight: 'bold', color: '#4C4DDC' }}&gt;说得清&lt;/Text&gt;&#13;&#10;        &lt;Text style={{ fontSize: 15, color: '#0C1222', marginTop: 12, lineHeight: 1.75 }}&gt;每条结论附证据 SQL&lt;br /&gt;操作留痕 · 一键回滚&lt;/Text&gt;&#13;&#10;        &lt;Text style={{ fontSize: 13, color: '#5C6780', marginTop: 16 }}&gt;8 条越界语句 100% 拦截&lt;/Text&gt;&#13;&#10;      &lt;/Box&gt;&#13;&#10;    &lt;/Box&gt;&#13;&#10;    &lt;Box style={{ marginTop: 28, background: '#FBFCFE', border: '1px solid #E3E8F5', borderRadius: 12, padding: '20px 24px', flexDirection: 'row', alignItems: 'center', gap: 18 }}&gt;&#13;&#10;      &lt;Text style={{ fontSize: 15, color: '#5C6780', width: 110 }}&gt;串联起来&lt;/Text&gt;&#13;&#10;      &lt;Text style={{ fontSize: 17, color: '#0C1222' }}&gt;看到异常 → 算清原因 → 直接处理 → 留下证据，四步在同一屏里完成。&lt;/Text&gt;&#13;&#10;    &lt;/Box&gt;&#13;&#10;  &lt;/Box&gt;&#13;&#10;  &lt;Box style={{ height: 36, flexDirection: 'row', justifyContent: 'space-between', alignItems: 'flex-end' }}&gt;&#13;&#10;    &lt;Text style={{ fontSize: 12, color: '#8A93A8' }}&gt;2026 武汉 1024 · 产业应用赛道&lt;/Text&gt;&#13;&#10;    &lt;Text style={{ fontSize: 12, color: '#8A93A8' }}&gt;04 / 12&lt;/Text&gt;&#13;&#10;  &lt;/Box&gt;&#13;&#10;&lt;/Slide&gt;"/>
         <p:cNvGrpSpPr/>
         <p:nvPr/>
       </p:nvGrpSpPr>
@@ -9031,7 +9369,7 @@
       </p:grpSpPr>
       <p:sp>
         <p:nvSpPr>
-          <p:cNvPr id="190" name=""/>
+          <p:cNvPr id="200" name=""/>
           <p:cNvSpPr/>
           <p:nvPr/>
         </p:nvSpPr>
@@ -9055,7 +9393,7 @@
       </p:sp>
       <p:sp>
         <p:nvSpPr>
-          <p:cNvPr id="191" name="" descr="{&quot;isTemplate&quot;:true,&quot;type&quot;:&quot;text&quot;}"/>
+          <p:cNvPr id="201" name="" descr="{&quot;isTemplate&quot;:true,&quot;type&quot;:&quot;text&quot;}"/>
           <p:cNvSpPr txBox="1"/>
           <p:nvPr/>
         </p:nvSpPr>
@@ -9090,7 +9428,7 @@
       </p:sp>
       <p:sp>
         <p:nvSpPr>
-          <p:cNvPr id="192" name="" descr="{&quot;isTemplate&quot;:true,&quot;type&quot;:&quot;text&quot;}"/>
+          <p:cNvPr id="202" name="" descr="{&quot;isTemplate&quot;:true,&quot;type&quot;:&quot;text&quot;}"/>
           <p:cNvSpPr txBox="1"/>
           <p:nvPr/>
         </p:nvSpPr>
@@ -9125,7 +9463,7 @@
       </p:sp>
       <p:sp>
         <p:nvSpPr>
-          <p:cNvPr id="193" name=""/>
+          <p:cNvPr id="203" name=""/>
           <p:cNvSpPr/>
           <p:nvPr/>
         </p:nvSpPr>
@@ -9156,7 +9494,7 @@
       </p:sp>
       <p:sp>
         <p:nvSpPr>
-          <p:cNvPr id="194" name=""/>
+          <p:cNvPr id="204" name=""/>
           <p:cNvSpPr/>
           <p:nvPr/>
         </p:nvSpPr>
@@ -9182,7 +9520,7 @@
       </p:sp>
       <p:sp>
         <p:nvSpPr>
-          <p:cNvPr id="195" name="" descr="{&quot;isTemplate&quot;:true,&quot;type&quot;:&quot;text&quot;}"/>
+          <p:cNvPr id="205" name="" descr="{&quot;isTemplate&quot;:true,&quot;type&quot;:&quot;text&quot;}"/>
           <p:cNvSpPr txBox="1"/>
           <p:nvPr/>
         </p:nvSpPr>
@@ -9227,7 +9565,7 @@
       </p:sp>
       <p:sp>
         <p:nvSpPr>
-          <p:cNvPr id="196" name=""/>
+          <p:cNvPr id="206" name=""/>
           <p:cNvSpPr/>
           <p:nvPr/>
         </p:nvSpPr>
@@ -9253,7 +9591,7 @@
       </p:sp>
       <p:sp>
         <p:nvSpPr>
-          <p:cNvPr id="197" name=""/>
+          <p:cNvPr id="207" name=""/>
           <p:cNvSpPr/>
           <p:nvPr/>
         </p:nvSpPr>
@@ -9284,7 +9622,7 @@
       </p:sp>
       <p:sp>
         <p:nvSpPr>
-          <p:cNvPr id="198" name="" descr="{&quot;isTemplate&quot;:true,&quot;type&quot;:&quot;text&quot;}"/>
+          <p:cNvPr id="208" name="" descr="{&quot;isTemplate&quot;:true,&quot;type&quot;:&quot;text&quot;}"/>
           <p:cNvSpPr txBox="1"/>
           <p:nvPr/>
         </p:nvSpPr>
@@ -9319,7 +9657,7 @@
       </p:sp>
       <p:sp>
         <p:nvSpPr>
-          <p:cNvPr id="199" name="" descr="{&quot;isTemplate&quot;:true,&quot;type&quot;:&quot;text&quot;}"/>
+          <p:cNvPr id="209" name="" descr="{&quot;isTemplate&quot;:true,&quot;type&quot;:&quot;text&quot;}"/>
           <p:cNvSpPr txBox="1"/>
           <p:nvPr/>
         </p:nvSpPr>
@@ -9452,7 +9790,7 @@
       </p:sp>
       <p:sp>
         <p:nvSpPr>
-          <p:cNvPr id="200" name="" descr="{&quot;isTemplate&quot;:true,&quot;type&quot;:&quot;text&quot;}"/>
+          <p:cNvPr id="210" name="" descr="{&quot;isTemplate&quot;:true,&quot;type&quot;:&quot;text&quot;}"/>
           <p:cNvSpPr txBox="1"/>
           <p:nvPr/>
         </p:nvSpPr>
@@ -9517,7 +9855,7 @@
       </p:sp>
       <p:sp>
         <p:nvSpPr>
-          <p:cNvPr id="201" name=""/>
+          <p:cNvPr id="211" name=""/>
           <p:cNvSpPr/>
           <p:nvPr/>
         </p:nvSpPr>
@@ -9548,7 +9886,7 @@
       </p:sp>
       <p:sp>
         <p:nvSpPr>
-          <p:cNvPr id="202" name="" descr="{&quot;isTemplate&quot;:true,&quot;type&quot;:&quot;text&quot;}"/>
+          <p:cNvPr id="212" name="" descr="{&quot;isTemplate&quot;:true,&quot;type&quot;:&quot;text&quot;}"/>
           <p:cNvSpPr txBox="1"/>
           <p:nvPr/>
         </p:nvSpPr>
@@ -9583,7 +9921,7 @@
       </p:sp>
       <p:sp>
         <p:nvSpPr>
-          <p:cNvPr id="203" name="" descr="{&quot;isTemplate&quot;:true,&quot;type&quot;:&quot;text&quot;}"/>
+          <p:cNvPr id="213" name="" descr="{&quot;isTemplate&quot;:true,&quot;type&quot;:&quot;text&quot;}"/>
           <p:cNvSpPr txBox="1"/>
           <p:nvPr/>
         </p:nvSpPr>
@@ -9686,7 +10024,7 @@
       </p:sp>
       <p:sp>
         <p:nvSpPr>
-          <p:cNvPr id="204" name="" descr="{&quot;isTemplate&quot;:true,&quot;type&quot;:&quot;text&quot;}"/>
+          <p:cNvPr id="214" name="" descr="{&quot;isTemplate&quot;:true,&quot;type&quot;:&quot;text&quot;}"/>
           <p:cNvSpPr txBox="1"/>
           <p:nvPr/>
         </p:nvSpPr>
@@ -9741,7 +10079,7 @@
       </p:sp>
       <p:sp>
         <p:nvSpPr>
-          <p:cNvPr id="205" name=""/>
+          <p:cNvPr id="215" name=""/>
           <p:cNvSpPr/>
           <p:nvPr/>
         </p:nvSpPr>
@@ -9772,7 +10110,7 @@
       </p:sp>
       <p:sp>
         <p:nvSpPr>
-          <p:cNvPr id="206" name="" descr="{&quot;isTemplate&quot;:true,&quot;type&quot;:&quot;text&quot;}"/>
+          <p:cNvPr id="216" name="" descr="{&quot;isTemplate&quot;:true,&quot;type&quot;:&quot;text&quot;}"/>
           <p:cNvSpPr txBox="1"/>
           <p:nvPr/>
         </p:nvSpPr>
@@ -9807,7 +10145,7 @@
       </p:sp>
       <p:sp>
         <p:nvSpPr>
-          <p:cNvPr id="207" name="" descr="{&quot;isTemplate&quot;:true,&quot;type&quot;:&quot;text&quot;}"/>
+          <p:cNvPr id="217" name="" descr="{&quot;isTemplate&quot;:true,&quot;type&quot;:&quot;text&quot;}"/>
           <p:cNvSpPr txBox="1"/>
           <p:nvPr/>
         </p:nvSpPr>
@@ -9880,7 +10218,7 @@
       </p:sp>
       <p:sp>
         <p:nvSpPr>
-          <p:cNvPr id="208" name="" descr="{&quot;isTemplate&quot;:true,&quot;type&quot;:&quot;text&quot;}"/>
+          <p:cNvPr id="218" name="" descr="{&quot;isTemplate&quot;:true,&quot;type&quot;:&quot;text&quot;}"/>
           <p:cNvSpPr txBox="1"/>
           <p:nvPr/>
         </p:nvSpPr>
@@ -9945,7 +10283,7 @@
       </p:sp>
       <p:sp>
         <p:nvSpPr>
-          <p:cNvPr id="209" name=""/>
+          <p:cNvPr id="219" name=""/>
           <p:cNvSpPr/>
           <p:nvPr/>
         </p:nvSpPr>
@@ -9976,7 +10314,7 @@
       </p:sp>
       <p:sp>
         <p:nvSpPr>
-          <p:cNvPr id="210" name="" descr="{&quot;isTemplate&quot;:true,&quot;type&quot;:&quot;text&quot;}"/>
+          <p:cNvPr id="220" name="" descr="{&quot;isTemplate&quot;:true,&quot;type&quot;:&quot;text&quot;}"/>
           <p:cNvSpPr txBox="1"/>
           <p:nvPr/>
         </p:nvSpPr>
@@ -10011,7 +10349,7 @@
       </p:sp>
       <p:sp>
         <p:nvSpPr>
-          <p:cNvPr id="211" name="" descr="{&quot;isTemplate&quot;:true,&quot;type&quot;:&quot;text&quot;}"/>
+          <p:cNvPr id="221" name="" descr="{&quot;isTemplate&quot;:true,&quot;type&quot;:&quot;text&quot;}"/>
           <p:cNvSpPr txBox="1"/>
           <p:nvPr/>
         </p:nvSpPr>
@@ -10094,7 +10432,7 @@
       </p:sp>
       <p:sp>
         <p:nvSpPr>
-          <p:cNvPr id="212" name="" descr="{&quot;isTemplate&quot;:true,&quot;type&quot;:&quot;text&quot;}"/>
+          <p:cNvPr id="222" name="" descr="{&quot;isTemplate&quot;:true,&quot;type&quot;:&quot;text&quot;}"/>
           <p:cNvSpPr txBox="1"/>
           <p:nvPr/>
         </p:nvSpPr>
@@ -10159,7 +10497,7 @@
       </p:sp>
       <p:sp>
         <p:nvSpPr>
-          <p:cNvPr id="213" name=""/>
+          <p:cNvPr id="223" name=""/>
           <p:cNvSpPr/>
           <p:nvPr/>
         </p:nvSpPr>
@@ -10190,7 +10528,7 @@
       </p:sp>
       <p:sp>
         <p:nvSpPr>
-          <p:cNvPr id="214" name="" descr="{&quot;isTemplate&quot;:true,&quot;type&quot;:&quot;text&quot;}"/>
+          <p:cNvPr id="224" name="" descr="{&quot;isTemplate&quot;:true,&quot;type&quot;:&quot;text&quot;}"/>
           <p:cNvSpPr txBox="1"/>
           <p:nvPr/>
         </p:nvSpPr>
@@ -10225,7 +10563,7 @@
       </p:sp>
       <p:sp>
         <p:nvSpPr>
-          <p:cNvPr id="215" name="" descr="{&quot;isTemplate&quot;:true,&quot;type&quot;:&quot;text&quot;}"/>
+          <p:cNvPr id="225" name="" descr="{&quot;isTemplate&quot;:true,&quot;type&quot;:&quot;text&quot;}"/>
           <p:cNvSpPr txBox="1"/>
           <p:nvPr/>
         </p:nvSpPr>
@@ -10320,7 +10658,7 @@
       </p:sp>
       <p:sp>
         <p:nvSpPr>
-          <p:cNvPr id="216" name="" descr="{&quot;isTemplate&quot;:true,&quot;type&quot;:&quot;text&quot;}"/>
+          <p:cNvPr id="226" name="" descr="{&quot;isTemplate&quot;:true,&quot;type&quot;:&quot;text&quot;}"/>
           <p:cNvSpPr txBox="1"/>
           <p:nvPr/>
         </p:nvSpPr>
@@ -10385,7 +10723,7 @@
       </p:sp>
       <p:sp>
         <p:nvSpPr>
-          <p:cNvPr id="217" name="" descr="{&quot;isTemplate&quot;:true,&quot;type&quot;:&quot;text&quot;}"/>
+          <p:cNvPr id="227" name="" descr="{&quot;isTemplate&quot;:true,&quot;type&quot;:&quot;text&quot;}"/>
           <p:cNvSpPr txBox="1"/>
           <p:nvPr/>
         </p:nvSpPr>
@@ -10428,7 +10766,7 @@
   <p:cSld>
     <p:spTree>
       <p:nvGrpSpPr>
-        <p:cNvPr id="218" name=""/>
+        <p:cNvPr id="228" name=""/>
         <p:cNvGrpSpPr/>
         <p:nvPr/>
       </p:nvGrpSpPr>
@@ -10442,7 +10780,7 @@
       </p:grpSpPr>
       <p:sp>
         <p:nvSpPr>
-          <p:cNvPr id="219" name=""/>
+          <p:cNvPr id="229" name=""/>
           <p:cNvSpPr/>
           <p:nvPr/>
         </p:nvSpPr>
@@ -10469,7 +10807,7 @@
       </p:sp>
       <p:sp>
         <p:nvSpPr>
-          <p:cNvPr id="220" name="" descr="{&quot;isTemplate&quot;:true,&quot;type&quot;:&quot;text&quot;}"/>
+          <p:cNvPr id="230" name="" descr="{&quot;isTemplate&quot;:true,&quot;type&quot;:&quot;text&quot;}"/>
           <p:cNvSpPr txBox="1"/>
           <p:nvPr/>
         </p:nvSpPr>
@@ -10504,7 +10842,7 @@
       </p:sp>
       <p:sp>
         <p:nvSpPr>
-          <p:cNvPr id="221" name="" descr="{&quot;isTemplate&quot;:true,&quot;type&quot;:&quot;text&quot;}"/>
+          <p:cNvPr id="231" name="" descr="{&quot;isTemplate&quot;:true,&quot;type&quot;:&quot;text&quot;}"/>
           <p:cNvSpPr txBox="1"/>
           <p:nvPr/>
         </p:nvSpPr>
@@ -10559,7 +10897,7 @@
       </p:sp>
       <p:sp>
         <p:nvSpPr>
-          <p:cNvPr id="222" name=""/>
+          <p:cNvPr id="232" name=""/>
           <p:cNvSpPr/>
           <p:nvPr/>
         </p:nvSpPr>
@@ -10593,7 +10931,7 @@
       </p:sp>
       <p:sp>
         <p:nvSpPr>
-          <p:cNvPr id="223" name=""/>
+          <p:cNvPr id="233" name=""/>
           <p:cNvSpPr/>
           <p:nvPr/>
         </p:nvSpPr>
@@ -10622,7 +10960,7 @@
       </p:sp>
       <p:sp>
         <p:nvSpPr>
-          <p:cNvPr id="224" name="" descr="{&quot;isTemplate&quot;:true,&quot;type&quot;:&quot;text&quot;}"/>
+          <p:cNvPr id="234" name="" descr="{&quot;isTemplate&quot;:true,&quot;type&quot;:&quot;text&quot;}"/>
           <p:cNvSpPr txBox="1"/>
           <p:nvPr/>
         </p:nvSpPr>
@@ -10667,7 +11005,7 @@
       </p:sp>
       <p:sp>
         <p:nvSpPr>
-          <p:cNvPr id="225" name=""/>
+          <p:cNvPr id="235" name=""/>
           <p:cNvSpPr/>
           <p:nvPr/>
         </p:nvSpPr>
@@ -10696,7 +11034,7 @@
       </p:sp>
       <p:sp>
         <p:nvSpPr>
-          <p:cNvPr id="226" name=""/>
+          <p:cNvPr id="236" name=""/>
           <p:cNvSpPr/>
           <p:nvPr/>
         </p:nvSpPr>
@@ -10730,7 +11068,7 @@
       </p:sp>
       <p:sp>
         <p:nvSpPr>
-          <p:cNvPr id="227" name="" descr="{&quot;isTemplate&quot;:true,&quot;type&quot;:&quot;text&quot;}"/>
+          <p:cNvPr id="237" name="" descr="{&quot;isTemplate&quot;:true,&quot;type&quot;:&quot;text&quot;}"/>
           <p:cNvSpPr txBox="1"/>
           <p:nvPr/>
         </p:nvSpPr>
@@ -10805,7 +11143,7 @@
       </p:sp>
       <p:sp>
         <p:nvSpPr>
-          <p:cNvPr id="228" name="" descr="{&quot;isTemplate&quot;:true,&quot;type&quot;:&quot;text&quot;}"/>
+          <p:cNvPr id="238" name="" descr="{&quot;isTemplate&quot;:true,&quot;type&quot;:&quot;text&quot;}"/>
           <p:cNvSpPr txBox="1"/>
           <p:nvPr/>
         </p:nvSpPr>
@@ -10840,7 +11178,7 @@
       </p:sp>
       <p:sp>
         <p:nvSpPr>
-          <p:cNvPr id="229" name="" descr="{&quot;isTemplate&quot;:true,&quot;type&quot;:&quot;text&quot;}"/>
+          <p:cNvPr id="239" name="" descr="{&quot;isTemplate&quot;:true,&quot;type&quot;:&quot;text&quot;}"/>
           <p:cNvSpPr txBox="1"/>
           <p:nvPr/>
         </p:nvSpPr>
@@ -10991,7 +11329,7 @@
       </p:sp>
       <p:sp>
         <p:nvSpPr>
-          <p:cNvPr id="230" name=""/>
+          <p:cNvPr id="240" name=""/>
           <p:cNvSpPr/>
           <p:nvPr/>
         </p:nvSpPr>
@@ -11025,7 +11363,7 @@
       </p:sp>
       <p:sp>
         <p:nvSpPr>
-          <p:cNvPr id="231" name="" descr="{&quot;isTemplate&quot;:true,&quot;type&quot;:&quot;text&quot;}"/>
+          <p:cNvPr id="241" name="" descr="{&quot;isTemplate&quot;:true,&quot;type&quot;:&quot;text&quot;}"/>
           <p:cNvSpPr txBox="1"/>
           <p:nvPr/>
         </p:nvSpPr>
@@ -11100,7 +11438,7 @@
       </p:sp>
       <p:sp>
         <p:nvSpPr>
-          <p:cNvPr id="232" name="" descr="{&quot;isTemplate&quot;:true,&quot;type&quot;:&quot;text&quot;}"/>
+          <p:cNvPr id="242" name="" descr="{&quot;isTemplate&quot;:true,&quot;type&quot;:&quot;text&quot;}"/>
           <p:cNvSpPr txBox="1"/>
           <p:nvPr/>
         </p:nvSpPr>
@@ -11135,7 +11473,7 @@
       </p:sp>
       <p:sp>
         <p:nvSpPr>
-          <p:cNvPr id="233" name="" descr="{&quot;isTemplate&quot;:true,&quot;type&quot;:&quot;text&quot;}"/>
+          <p:cNvPr id="243" name="" descr="{&quot;isTemplate&quot;:true,&quot;type&quot;:&quot;text&quot;}"/>
           <p:cNvSpPr txBox="1"/>
           <p:nvPr/>
         </p:nvSpPr>
@@ -11246,7 +11584,7 @@
       </p:sp>
       <p:sp>
         <p:nvSpPr>
-          <p:cNvPr id="234" name=""/>
+          <p:cNvPr id="244" name=""/>
           <p:cNvSpPr/>
           <p:nvPr/>
         </p:nvSpPr>
@@ -11280,7 +11618,7 @@
       </p:sp>
       <p:sp>
         <p:nvSpPr>
-          <p:cNvPr id="235" name="" descr="{&quot;isTemplate&quot;:true,&quot;type&quot;:&quot;text&quot;}"/>
+          <p:cNvPr id="245" name="" descr="{&quot;isTemplate&quot;:true,&quot;type&quot;:&quot;text&quot;}"/>
           <p:cNvSpPr txBox="1"/>
           <p:nvPr/>
         </p:nvSpPr>
@@ -11355,7 +11693,7 @@
       </p:sp>
       <p:sp>
         <p:nvSpPr>
-          <p:cNvPr id="236" name="" descr="{&quot;isTemplate&quot;:true,&quot;type&quot;:&quot;text&quot;}"/>
+          <p:cNvPr id="246" name="" descr="{&quot;isTemplate&quot;:true,&quot;type&quot;:&quot;text&quot;}"/>
           <p:cNvSpPr txBox="1"/>
           <p:nvPr/>
         </p:nvSpPr>
@@ -11390,7 +11728,7 @@
       </p:sp>
       <p:sp>
         <p:nvSpPr>
-          <p:cNvPr id="237" name="" descr="{&quot;isTemplate&quot;:true,&quot;type&quot;:&quot;text&quot;}"/>
+          <p:cNvPr id="247" name="" descr="{&quot;isTemplate&quot;:true,&quot;type&quot;:&quot;text&quot;}"/>
           <p:cNvSpPr txBox="1"/>
           <p:nvPr/>
         </p:nvSpPr>
@@ -11501,7 +11839,7 @@
       </p:sp>
       <p:sp>
         <p:nvSpPr>
-          <p:cNvPr id="238" name=""/>
+          <p:cNvPr id="248" name=""/>
           <p:cNvSpPr/>
           <p:nvPr/>
         </p:nvSpPr>
@@ -11535,7 +11873,7 @@
       </p:sp>
       <p:sp>
         <p:nvSpPr>
-          <p:cNvPr id="239" name="" descr="{&quot;isTemplate&quot;:true,&quot;type&quot;:&quot;text&quot;}"/>
+          <p:cNvPr id="249" name="" descr="{&quot;isTemplate&quot;:true,&quot;type&quot;:&quot;text&quot;}"/>
           <p:cNvSpPr txBox="1"/>
           <p:nvPr/>
         </p:nvSpPr>
@@ -11590,7 +11928,7 @@
       </p:sp>
       <p:sp>
         <p:nvSpPr>
-          <p:cNvPr id="240" name="" descr="{&quot;isTemplate&quot;:true,&quot;type&quot;:&quot;text&quot;}"/>
+          <p:cNvPr id="250" name="" descr="{&quot;isTemplate&quot;:true,&quot;type&quot;:&quot;text&quot;}"/>
           <p:cNvSpPr txBox="1"/>
           <p:nvPr/>
         </p:nvSpPr>
@@ -11685,7 +12023,7 @@
       </p:sp>
       <p:sp>
         <p:nvSpPr>
-          <p:cNvPr id="241" name="" descr="{&quot;isTemplate&quot;:true,&quot;type&quot;:&quot;text&quot;}"/>
+          <p:cNvPr id="251" name="" descr="{&quot;isTemplate&quot;:true,&quot;type&quot;:&quot;text&quot;}"/>
           <p:cNvSpPr txBox="1"/>
           <p:nvPr/>
         </p:nvSpPr>
@@ -11760,7 +12098,7 @@
       </p:sp>
       <p:sp>
         <p:nvSpPr>
-          <p:cNvPr id="242" name=""/>
+          <p:cNvPr id="252" name=""/>
           <p:cNvSpPr/>
           <p:nvPr/>
         </p:nvSpPr>
@@ -11803,7 +12141,7 @@
       </p:sp>
       <p:sp>
         <p:nvSpPr>
-          <p:cNvPr id="243" name="" descr="{&quot;isTemplate&quot;:true,&quot;type&quot;:&quot;text&quot;}"/>
+          <p:cNvPr id="253" name="" descr="{&quot;isTemplate&quot;:true,&quot;type&quot;:&quot;text&quot;}"/>
           <p:cNvSpPr txBox="1"/>
           <p:nvPr/>
         </p:nvSpPr>
@@ -11848,7 +12186,7 @@
       </p:sp>
       <p:sp>
         <p:nvSpPr>
-          <p:cNvPr id="244" name="" descr="{&quot;isTemplate&quot;:true,&quot;type&quot;:&quot;text&quot;}"/>
+          <p:cNvPr id="254" name="" descr="{&quot;isTemplate&quot;:true,&quot;type&quot;:&quot;text&quot;}"/>
           <p:cNvSpPr txBox="1"/>
           <p:nvPr/>
         </p:nvSpPr>
@@ -11883,7 +12221,7 @@
       </p:sp>
       <p:sp>
         <p:nvSpPr>
-          <p:cNvPr id="245" name="" descr="{&quot;isTemplate&quot;:true,&quot;type&quot;:&quot;text&quot;}"/>
+          <p:cNvPr id="255" name="" descr="{&quot;isTemplate&quot;:true,&quot;type&quot;:&quot;text&quot;}"/>
           <p:cNvSpPr txBox="1"/>
           <p:nvPr/>
         </p:nvSpPr>
@@ -11928,7 +12266,7 @@
       </p:sp>
       <p:sp>
         <p:nvSpPr>
-          <p:cNvPr id="246" name="" descr="{&quot;isTemplate&quot;:true,&quot;type&quot;:&quot;text&quot;}"/>
+          <p:cNvPr id="256" name="" descr="{&quot;isTemplate&quot;:true,&quot;type&quot;:&quot;text&quot;}"/>
           <p:cNvSpPr txBox="1"/>
           <p:nvPr/>
         </p:nvSpPr>
@@ -11963,7 +12301,7 @@
       </p:sp>
       <p:sp>
         <p:nvSpPr>
-          <p:cNvPr id="247" name="" descr="{&quot;isTemplate&quot;:true,&quot;type&quot;:&quot;text&quot;}"/>
+          <p:cNvPr id="257" name="" descr="{&quot;isTemplate&quot;:true,&quot;type&quot;:&quot;text&quot;}"/>
           <p:cNvSpPr txBox="1"/>
           <p:nvPr/>
         </p:nvSpPr>
@@ -12008,7 +12346,7 @@
       </p:sp>
       <p:sp>
         <p:nvSpPr>
-          <p:cNvPr id="248" name="" descr="{&quot;isTemplate&quot;:true,&quot;type&quot;:&quot;text&quot;}"/>
+          <p:cNvPr id="258" name="" descr="{&quot;isTemplate&quot;:true,&quot;type&quot;:&quot;text&quot;}"/>
           <p:cNvSpPr txBox="1"/>
           <p:nvPr/>
         </p:nvSpPr>
@@ -12043,7 +12381,7 @@
       </p:sp>
       <p:sp>
         <p:nvSpPr>
-          <p:cNvPr id="249" name="" descr="{&quot;isTemplate&quot;:true,&quot;type&quot;:&quot;text&quot;}"/>
+          <p:cNvPr id="259" name="" descr="{&quot;isTemplate&quot;:true,&quot;type&quot;:&quot;text&quot;}"/>
           <p:cNvSpPr txBox="1"/>
           <p:nvPr/>
         </p:nvSpPr>
@@ -12088,7 +12426,7 @@
       </p:sp>
       <p:sp>
         <p:nvSpPr>
-          <p:cNvPr id="250" name="" descr="{&quot;isTemplate&quot;:true,&quot;type&quot;:&quot;text&quot;}"/>
+          <p:cNvPr id="260" name="" descr="{&quot;isTemplate&quot;:true,&quot;type&quot;:&quot;text&quot;}"/>
           <p:cNvSpPr txBox="1"/>
           <p:nvPr/>
         </p:nvSpPr>
@@ -12143,7 +12481,7 @@
       </p:sp>
       <p:sp>
         <p:nvSpPr>
-          <p:cNvPr id="251" name="" descr="{&quot;isTemplate&quot;:true,&quot;type&quot;:&quot;text&quot;}"/>
+          <p:cNvPr id="261" name="" descr="{&quot;isTemplate&quot;:true,&quot;type&quot;:&quot;text&quot;}"/>
           <p:cNvSpPr txBox="1"/>
           <p:nvPr/>
         </p:nvSpPr>
@@ -12208,7 +12546,7 @@
       </p:sp>
       <p:sp>
         <p:nvSpPr>
-          <p:cNvPr id="252" name="" descr="{&quot;isTemplate&quot;:true,&quot;type&quot;:&quot;text&quot;}"/>
+          <p:cNvPr id="262" name="" descr="{&quot;isTemplate&quot;:true,&quot;type&quot;:&quot;text&quot;}"/>
           <p:cNvSpPr txBox="1"/>
           <p:nvPr/>
         </p:nvSpPr>
@@ -12251,7 +12589,7 @@
   <p:cSld>
     <p:spTree>
       <p:nvGrpSpPr>
-        <p:cNvPr id="253" name=""/>
+        <p:cNvPr id="263" name="" descr="&lt;Slide style={{ width: 1280, height: 720, background: '#F6F8FD', padding: '56px 72px', flexDirection: 'column' }}&gt;&#13;&#10;  &lt;Box style={{ height: 96, flexDirection: 'row', justifyContent: 'space-between', alignItems: 'flex-start' }}&gt;&#13;&#10;    &lt;Box style={{ flexDirection: 'column', gap: 8 }}&gt;&#13;&#10;      &lt;Text style={{ fontSize: 34, fontWeight: 'bold', color: '#0C1222' }}&gt;四层架构：交易底座不动，决策层新建&lt;/Text&gt;&#13;&#10;      &lt;Text style={{ fontSize: 15, color: '#5C6780' }}&gt;原有 4,294 行代码、42 个模板、190 项测试，全部作为底座继续跑&lt;/Text&gt;&#13;&#10;    &lt;/Box&gt;&#13;&#10;    &lt;Box style={{ flexDirection: 'row', alignItems: 'center', gap: 6, padding: '5px 12px', background: '#EEF1FE', border: '1px solid #DDE2F5', borderRadius: 999 }}&gt;&#13;&#10;      &lt;Box style={{ width: 6, height: 6, borderRadius: 3, background: '#4C4DDC' }} /&gt;&#13;&#10;      &lt;Text style={{ fontSize: 12, color: '#4C4DDC', fontWeight: 'bold', letterSpacing: 1 }}&gt;AI 掌柜&lt;/Text&gt;&#13;&#10;    &lt;/Box&gt;&#13;&#10;  &lt;/Box&gt;&#13;&#10;  &lt;Box style={{ width: 72, height: 3, background: '#4C4DDC', borderRadius: 2, marginTop: 2, marginBottom: 12 }} /&gt;&#13;&#10;  &lt;Box style={{ flex: 1, paddingTop: 8 }}&gt;&#13;&#10;    &lt;Box style={{ flexDirection: 'column', gap: 14 }}&gt;&#13;&#10;      &lt;Box style={{ background: '#EEF1FE', border: '1px solid #C9CDF6', borderRadius: 10, padding: '22px 24px', flexDirection: 'row', alignItems: 'center' }}&gt;&#13;&#10;        &lt;Text style={{ fontSize: 13, color: '#4C4DDC', width: 100, letterSpacing: 1 }}&gt;决策界面&lt;/Text&gt;&#13;&#10;        &lt;Text style={{ fontSize: 16, color: '#0C1222' }}&gt;AI 驾驶舱 · 经营问答 · 洞察中心 · 采购单 · 四象限 · 预测备货&lt;/Text&gt;&#13;&#10;      &lt;/Box&gt;&#13;&#10;      &lt;Box style={{ background: '#FFFFFF', border: '1px solid #E3E8F5', borderRadius: 10, padding: '22px 24px', flexDirection: 'row', alignItems: 'center' }}&gt;&#13;&#10;        &lt;Text style={{ fontSize: 13, color: '#5C6780', width: 100, letterSpacing: 1 }}&gt;AI 引擎&lt;/Text&gt;&#13;&#10;        &lt;Text style={{ fontSize: 16, color: '#0C1222' }}&gt;受控 NL2SQL · 6 类规则检测 · 三层分解预测 · 可执行工具&lt;/Text&gt;&#13;&#10;      &lt;/Box&gt;&#13;&#10;      &lt;Box style={{ background: '#FFFFFF', border: '1px solid #E3E8F5', borderRadius: 10, padding: '22px 24px', flexDirection: 'row', alignItems: 'center' }}&gt;&#13;&#10;        &lt;Text style={{ fontSize: 13, color: '#5C6780', width: 100, letterSpacing: 1 }}&gt;指标层&lt;/Text&gt;&#13;&#10;        &lt;Text style={{ fontSize: 16, color: '#0C1222' }}&gt;唯一口径 metrics.py · 日粒度预聚合 ETL · 8 个只读语义视图&lt;/Text&gt;&#13;&#10;      &lt;/Box&gt;&#13;&#10;      &lt;Box style={{ background: '#FBFCFE', border: '1px solid #E3E8F5', borderRadius: 10, padding: '22px 24px', flexDirection: 'row', alignItems: 'center' }}&gt;&#13;&#10;        &lt;Text style={{ fontSize: 13, color: '#8A93A8', width: 100, letterSpacing: 1 }}&gt;交易底座&lt;/Text&gt;&#13;&#10;        &lt;Text style={{ fontSize: 16, color: '#5C6780' }}&gt;点单 · 收银 · 会员 · BOM 配方 · 库存流水 · 预订（Flask + SQLite）&lt;/Text&gt;&#13;&#10;      &lt;/Box&gt;&#13;&#10;    &lt;/Box&gt;&#13;&#10;    &lt;Box style={{ marginTop: 24, flexDirection: 'row', gap: 18 }}&gt;&#13;&#10;      &lt;Box style={{ flex: 1, paddingTop: 14, borderTop: '1px solid #E3E8F5' }}&gt;&#13;&#10;        &lt;Text style={{ fontSize: 30, fontWeight: 'bold', color: '#4C4DDC' }}&gt;0&lt;/Text&gt;&#13;&#10;        &lt;Text style={{ fontSize: 13, color: '#5C6780', marginTop: 4 }}&gt;新增第三方运行时依赖&lt;br /&gt;仅 Flask + waitress&lt;/Text&gt;&#13;&#10;      &lt;/Box&gt;&#13;&#10;      &lt;Box style={{ flex: 1, paddingTop: 14, borderTop: '1px solid #E3E8F5' }}&gt;&#13;&#10;        &lt;Text style={{ fontSize: 30, fontWeight: 'bold', color: '#4C4DDC' }}&gt;1.0s&lt;/Text&gt;&#13;&#10;        &lt;Text style={{ fontSize: 13, color: '#5C6780', marginTop: 4 }}&gt;看板首屏&lt;br /&gt;180 天预聚合&lt;/Text&gt;&#13;&#10;      &lt;/Box&gt;&#13;&#10;      &lt;Box style={{ flex: 1, paddingTop: 14, borderTop: '1px solid #E3E8F5' }}&gt;&#13;&#10;        &lt;Text style={{ fontSize: 30, fontWeight: 'bold', color: '#4C4DDC' }}&gt;离线&lt;/Text&gt;&#13;&#10;        &lt;Text style={{ fontSize: 13, color: '#5C6780', marginTop: 4 }}&gt;可跑：本地模型 / 规则降级&lt;br /&gt;不依赖 CDN 与外网&lt;/Text&gt;&#13;&#10;      &lt;/Box&gt;&#13;&#10;    &lt;/Box&gt;&#13;&#10;    &lt;Box style={{ marginTop: 20, paddingTop: 16, borderTop: '1px solid #E3E8F5', flexDirection: 'row', gap: 14 }}&gt;&#13;&#10;      &lt;Text style={{ fontSize: 13, color: '#4C4DDC', width: 76 }}&gt;选型取舍&lt;/Text&gt;&#13;&#10;      &lt;Text style={{ fontSize: 14, color: '#5C6780', lineHeight: 1.7, flex: 1 }}&gt;&#13;&#10;        不引入 numpy / pandas / torch：门店电脑不是服务器，启动速度比模型炫技重要；SQLite 开 WAL 足够 20 路并发。&#13;&#10;        模型双通道：云端 1.2 秒 / 本地 3B 断网可用，切换不重启服务。&#13;&#10;      &lt;/Text&gt;&#13;&#10;    &lt;/Box&gt;&#13;&#10;  &lt;/Box&gt;&#13;&#10;  &lt;Box style={{ height: 36, flexDirection: 'row', justifyContent: 'space-between', alignItems: 'flex-end' }}&gt;&#13;&#10;    &lt;Text style={{ fontSize: 12, color: '#8A93A8' }}&gt;2026 武汉 1024 · 产业应用赛道&lt;/Text&gt;&#13;&#10;    &lt;Text style={{ fontSize: 12, color: '#8A93A8' }}&gt;06 / 12&lt;/Text&gt;&#13;&#10;  &lt;/Box&gt;&#13;&#10;&lt;/Slide&gt;"/>
         <p:cNvGrpSpPr/>
         <p:nvPr/>
       </p:nvGrpSpPr>
@@ -12265,7 +12603,7 @@
       </p:grpSpPr>
       <p:sp>
         <p:nvSpPr>
-          <p:cNvPr id="254" name=""/>
+          <p:cNvPr id="264" name=""/>
           <p:cNvSpPr/>
           <p:nvPr/>
         </p:nvSpPr>
@@ -12284,15 +12622,12 @@
         </p:spPr>
         <p:txBody>
           <a:bodyPr/>
-          <a:p>
-            <a:pPr/>
-            <a:endParaRPr/>
-          </a:p>
-        </p:txBody>
-      </p:sp>
-      <p:sp>
-        <p:nvSpPr>
-          <p:cNvPr id="255" name="" descr="{&quot;isTemplate&quot;:true,&quot;type&quot;:&quot;text&quot;}"/>
+          <a:p/>
+        </p:txBody>
+      </p:sp>
+      <p:sp>
+        <p:nvSpPr>
+          <p:cNvPr id="265" name="" descr="{&quot;isTemplate&quot;:true,&quot;type&quot;:&quot;text&quot;}"/>
           <p:cNvSpPr txBox="1"/>
           <p:nvPr/>
         </p:nvSpPr>
@@ -12327,7 +12662,7 @@
       </p:sp>
       <p:sp>
         <p:nvSpPr>
-          <p:cNvPr id="256" name="" descr="{&quot;isTemplate&quot;:true,&quot;type&quot;:&quot;text&quot;}"/>
+          <p:cNvPr id="266" name="" descr="{&quot;isTemplate&quot;:true,&quot;type&quot;:&quot;text&quot;}"/>
           <p:cNvSpPr txBox="1"/>
           <p:nvPr/>
         </p:nvSpPr>
@@ -12422,7 +12757,7 @@
       </p:sp>
       <p:sp>
         <p:nvSpPr>
-          <p:cNvPr id="257" name=""/>
+          <p:cNvPr id="267" name=""/>
           <p:cNvSpPr/>
           <p:nvPr/>
         </p:nvSpPr>
@@ -12448,15 +12783,12 @@
         </p:spPr>
         <p:txBody>
           <a:bodyPr/>
-          <a:p>
-            <a:pPr/>
-            <a:endParaRPr/>
-          </a:p>
-        </p:txBody>
-      </p:sp>
-      <p:sp>
-        <p:nvSpPr>
-          <p:cNvPr id="258" name=""/>
+          <a:p/>
+        </p:txBody>
+      </p:sp>
+      <p:sp>
+        <p:nvSpPr>
+          <p:cNvPr id="268" name=""/>
           <p:cNvSpPr/>
           <p:nvPr/>
         </p:nvSpPr>
@@ -12477,15 +12809,12 @@
         </p:spPr>
         <p:txBody>
           <a:bodyPr/>
-          <a:p>
-            <a:pPr/>
-            <a:endParaRPr/>
-          </a:p>
-        </p:txBody>
-      </p:sp>
-      <p:sp>
-        <p:nvSpPr>
-          <p:cNvPr id="259" name="" descr="{&quot;isTemplate&quot;:true,&quot;type&quot;:&quot;text&quot;}"/>
+          <a:p/>
+        </p:txBody>
+      </p:sp>
+      <p:sp>
+        <p:nvSpPr>
+          <p:cNvPr id="269" name="" descr="{&quot;isTemplate&quot;:true,&quot;type&quot;:&quot;text&quot;}"/>
           <p:cNvSpPr txBox="1"/>
           <p:nvPr/>
         </p:nvSpPr>
@@ -12530,7 +12859,7 @@
       </p:sp>
       <p:sp>
         <p:nvSpPr>
-          <p:cNvPr id="260" name=""/>
+          <p:cNvPr id="270" name=""/>
           <p:cNvSpPr/>
           <p:nvPr/>
         </p:nvSpPr>
@@ -12551,15 +12880,12 @@
         </p:spPr>
         <p:txBody>
           <a:bodyPr/>
-          <a:p>
-            <a:pPr/>
-            <a:endParaRPr/>
-          </a:p>
-        </p:txBody>
-      </p:sp>
-      <p:sp>
-        <p:nvSpPr>
-          <p:cNvPr id="261" name=""/>
+          <a:p/>
+        </p:txBody>
+      </p:sp>
+      <p:sp>
+        <p:nvSpPr>
+          <p:cNvPr id="271" name=""/>
           <p:cNvSpPr/>
           <p:nvPr/>
         </p:nvSpPr>
@@ -12585,15 +12911,12 @@
         </p:spPr>
         <p:txBody>
           <a:bodyPr/>
-          <a:p>
-            <a:pPr/>
-            <a:endParaRPr/>
-          </a:p>
-        </p:txBody>
-      </p:sp>
-      <p:sp>
-        <p:nvSpPr>
-          <p:cNvPr id="262" name="" descr="{&quot;isTemplate&quot;:true,&quot;type&quot;:&quot;text&quot;}"/>
+          <a:p/>
+        </p:txBody>
+      </p:sp>
+      <p:sp>
+        <p:nvSpPr>
+          <p:cNvPr id="272" name="" descr="{&quot;isTemplate&quot;:true,&quot;type&quot;:&quot;text&quot;}"/>
           <p:cNvSpPr txBox="1"/>
           <p:nvPr/>
         </p:nvSpPr>
@@ -12628,7 +12951,7 @@
       </p:sp>
       <p:sp>
         <p:nvSpPr>
-          <p:cNvPr id="263" name="" descr="{&quot;isTemplate&quot;:true,&quot;type&quot;:&quot;text&quot;}"/>
+          <p:cNvPr id="273" name="" descr="{&quot;isTemplate&quot;:true,&quot;type&quot;:&quot;text&quot;}"/>
           <p:cNvSpPr txBox="1"/>
           <p:nvPr/>
         </p:nvSpPr>
@@ -12773,7 +13096,7 @@
       </p:sp>
       <p:sp>
         <p:nvSpPr>
-          <p:cNvPr id="264" name=""/>
+          <p:cNvPr id="274" name=""/>
           <p:cNvSpPr/>
           <p:nvPr/>
         </p:nvSpPr>
@@ -12799,15 +13122,12 @@
         </p:spPr>
         <p:txBody>
           <a:bodyPr/>
-          <a:p>
-            <a:pPr/>
-            <a:endParaRPr/>
-          </a:p>
-        </p:txBody>
-      </p:sp>
-      <p:sp>
-        <p:nvSpPr>
-          <p:cNvPr id="265" name="" descr="{&quot;isTemplate&quot;:true,&quot;type&quot;:&quot;text&quot;}"/>
+          <a:p/>
+        </p:txBody>
+      </p:sp>
+      <p:sp>
+        <p:nvSpPr>
+          <p:cNvPr id="275" name="" descr="{&quot;isTemplate&quot;:true,&quot;type&quot;:&quot;text&quot;}"/>
           <p:cNvSpPr txBox="1"/>
           <p:nvPr/>
         </p:nvSpPr>
@@ -12852,7 +13172,7 @@
       </p:sp>
       <p:sp>
         <p:nvSpPr>
-          <p:cNvPr id="266" name="" descr="{&quot;isTemplate&quot;:true,&quot;type&quot;:&quot;text&quot;}"/>
+          <p:cNvPr id="276" name="" descr="{&quot;isTemplate&quot;:true,&quot;type&quot;:&quot;text&quot;}"/>
           <p:cNvSpPr txBox="1"/>
           <p:nvPr/>
         </p:nvSpPr>
@@ -12947,7 +13267,7 @@
       </p:sp>
       <p:sp>
         <p:nvSpPr>
-          <p:cNvPr id="267" name=""/>
+          <p:cNvPr id="277" name=""/>
           <p:cNvSpPr/>
           <p:nvPr/>
         </p:nvSpPr>
@@ -12973,15 +13293,12 @@
         </p:spPr>
         <p:txBody>
           <a:bodyPr/>
-          <a:p>
-            <a:pPr/>
-            <a:endParaRPr/>
-          </a:p>
-        </p:txBody>
-      </p:sp>
-      <p:sp>
-        <p:nvSpPr>
-          <p:cNvPr id="268" name="" descr="{&quot;isTemplate&quot;:true,&quot;type&quot;:&quot;text&quot;}"/>
+          <a:p/>
+        </p:txBody>
+      </p:sp>
+      <p:sp>
+        <p:nvSpPr>
+          <p:cNvPr id="278" name="" descr="{&quot;isTemplate&quot;:true,&quot;type&quot;:&quot;text&quot;}"/>
           <p:cNvSpPr txBox="1"/>
           <p:nvPr/>
         </p:nvSpPr>
@@ -13016,7 +13333,7 @@
       </p:sp>
       <p:sp>
         <p:nvSpPr>
-          <p:cNvPr id="269" name="" descr="{&quot;isTemplate&quot;:true,&quot;type&quot;:&quot;text&quot;}"/>
+          <p:cNvPr id="279" name="" descr="{&quot;isTemplate&quot;:true,&quot;type&quot;:&quot;text&quot;}"/>
           <p:cNvSpPr txBox="1"/>
           <p:nvPr/>
         </p:nvSpPr>
@@ -13091,7 +13408,7 @@
       </p:sp>
       <p:sp>
         <p:nvSpPr>
-          <p:cNvPr id="270" name=""/>
+          <p:cNvPr id="280" name=""/>
           <p:cNvSpPr/>
           <p:nvPr/>
         </p:nvSpPr>
@@ -13117,15 +13434,12 @@
         </p:spPr>
         <p:txBody>
           <a:bodyPr/>
-          <a:p>
-            <a:pPr/>
-            <a:endParaRPr/>
-          </a:p>
-        </p:txBody>
-      </p:sp>
-      <p:sp>
-        <p:nvSpPr>
-          <p:cNvPr id="271" name="" descr="{&quot;isTemplate&quot;:true,&quot;type&quot;:&quot;text&quot;}"/>
+          <a:p/>
+        </p:txBody>
+      </p:sp>
+      <p:sp>
+        <p:nvSpPr>
+          <p:cNvPr id="281" name="" descr="{&quot;isTemplate&quot;:true,&quot;type&quot;:&quot;text&quot;}"/>
           <p:cNvSpPr txBox="1"/>
           <p:nvPr/>
         </p:nvSpPr>
@@ -13160,7 +13474,7 @@
       </p:sp>
       <p:sp>
         <p:nvSpPr>
-          <p:cNvPr id="272" name="" descr="{&quot;isTemplate&quot;:true,&quot;type&quot;:&quot;text&quot;}"/>
+          <p:cNvPr id="282" name="" descr="{&quot;isTemplate&quot;:true,&quot;type&quot;:&quot;text&quot;}"/>
           <p:cNvSpPr txBox="1"/>
           <p:nvPr/>
         </p:nvSpPr>
@@ -13315,7 +13629,7 @@
       </p:sp>
       <p:sp>
         <p:nvSpPr>
-          <p:cNvPr id="273" name=""/>
+          <p:cNvPr id="283" name=""/>
           <p:cNvSpPr/>
           <p:nvPr/>
         </p:nvSpPr>
@@ -13350,15 +13664,12 @@
         </p:spPr>
         <p:txBody>
           <a:bodyPr/>
-          <a:p>
-            <a:pPr/>
-            <a:endParaRPr/>
-          </a:p>
-        </p:txBody>
-      </p:sp>
-      <p:sp>
-        <p:nvSpPr>
-          <p:cNvPr id="274" name="" descr="{&quot;isTemplate&quot;:true,&quot;type&quot;:&quot;text&quot;}"/>
+          <a:p/>
+        </p:txBody>
+      </p:sp>
+      <p:sp>
+        <p:nvSpPr>
+          <p:cNvPr id="284" name="" descr="{&quot;isTemplate&quot;:true,&quot;type&quot;:&quot;text&quot;}"/>
           <p:cNvSpPr txBox="1"/>
           <p:nvPr/>
         </p:nvSpPr>
@@ -13393,7 +13704,7 @@
       </p:sp>
       <p:sp>
         <p:nvSpPr>
-          <p:cNvPr id="275" name="" descr="{&quot;isTemplate&quot;:true,&quot;type&quot;:&quot;text&quot;}"/>
+          <p:cNvPr id="285" name="" descr="{&quot;isTemplate&quot;:true,&quot;type&quot;:&quot;text&quot;}"/>
           <p:cNvSpPr txBox="1"/>
           <p:nvPr/>
         </p:nvSpPr>
@@ -13456,7 +13767,7 @@
       </p:sp>
       <p:sp>
         <p:nvSpPr>
-          <p:cNvPr id="276" name=""/>
+          <p:cNvPr id="286" name=""/>
           <p:cNvSpPr/>
           <p:nvPr/>
         </p:nvSpPr>
@@ -13491,15 +13802,12 @@
         </p:spPr>
         <p:txBody>
           <a:bodyPr/>
-          <a:p>
-            <a:pPr/>
-            <a:endParaRPr/>
-          </a:p>
-        </p:txBody>
-      </p:sp>
-      <p:sp>
-        <p:nvSpPr>
-          <p:cNvPr id="277" name="" descr="{&quot;isTemplate&quot;:true,&quot;type&quot;:&quot;text&quot;}"/>
+          <a:p/>
+        </p:txBody>
+      </p:sp>
+      <p:sp>
+        <p:nvSpPr>
+          <p:cNvPr id="287" name="" descr="{&quot;isTemplate&quot;:true,&quot;type&quot;:&quot;text&quot;}"/>
           <p:cNvSpPr txBox="1"/>
           <p:nvPr/>
         </p:nvSpPr>
@@ -13534,7 +13842,7 @@
       </p:sp>
       <p:sp>
         <p:nvSpPr>
-          <p:cNvPr id="278" name="" descr="{&quot;isTemplate&quot;:true,&quot;type&quot;:&quot;text&quot;}"/>
+          <p:cNvPr id="288" name="" descr="{&quot;isTemplate&quot;:true,&quot;type&quot;:&quot;text&quot;}"/>
           <p:cNvSpPr txBox="1"/>
           <p:nvPr/>
         </p:nvSpPr>
@@ -13597,7 +13905,7 @@
       </p:sp>
       <p:sp>
         <p:nvSpPr>
-          <p:cNvPr id="279" name=""/>
+          <p:cNvPr id="289" name=""/>
           <p:cNvSpPr/>
           <p:nvPr/>
         </p:nvSpPr>
@@ -13632,15 +13940,12 @@
         </p:spPr>
         <p:txBody>
           <a:bodyPr/>
-          <a:p>
-            <a:pPr/>
-            <a:endParaRPr/>
-          </a:p>
-        </p:txBody>
-      </p:sp>
-      <p:sp>
-        <p:nvSpPr>
-          <p:cNvPr id="280" name="" descr="{&quot;isTemplate&quot;:true,&quot;type&quot;:&quot;text&quot;}"/>
+          <a:p/>
+        </p:txBody>
+      </p:sp>
+      <p:sp>
+        <p:nvSpPr>
+          <p:cNvPr id="290" name="" descr="{&quot;isTemplate&quot;:true,&quot;type&quot;:&quot;text&quot;}"/>
           <p:cNvSpPr txBox="1"/>
           <p:nvPr/>
         </p:nvSpPr>
@@ -13675,7 +13980,7 @@
       </p:sp>
       <p:sp>
         <p:nvSpPr>
-          <p:cNvPr id="281" name="" descr="{&quot;isTemplate&quot;:true,&quot;type&quot;:&quot;text&quot;}"/>
+          <p:cNvPr id="291" name="" descr="{&quot;isTemplate&quot;:true,&quot;type&quot;:&quot;text&quot;}"/>
           <p:cNvSpPr txBox="1"/>
           <p:nvPr/>
         </p:nvSpPr>
@@ -13768,18 +14073,18 @@
       </p:sp>
       <p:sp>
         <p:nvSpPr>
-          <p:cNvPr id="282" name=""/>
+          <p:cNvPr id="292" name=""/>
           <p:cNvSpPr/>
           <p:nvPr/>
         </p:nvSpPr>
         <p:spPr>
           <a:xfrm rot="0" flipH="0" flipV="0">
             <a:off x="685800" y="5772150"/>
-            <a:ext cx="10820400" cy="447675"/>
+            <a:ext cx="10820400" cy="723900"/>
           </a:xfrm>
           <a:custGeom>
             <a:pathLst>
-              <a:path w="1136" h="47">
+              <a:path w="1136" h="76">
                 <a:moveTo>
                   <a:pt x="0" y="0"/>
                 </a:moveTo>
@@ -13803,22 +14108,19 @@
         </p:spPr>
         <p:txBody>
           <a:bodyPr/>
-          <a:p>
-            <a:pPr/>
-            <a:endParaRPr/>
-          </a:p>
-        </p:txBody>
-      </p:sp>
-      <p:sp>
-        <p:nvSpPr>
-          <p:cNvPr id="283" name="" descr="{&quot;isTemplate&quot;:true,&quot;type&quot;:&quot;text&quot;}"/>
+          <a:p/>
+        </p:txBody>
+      </p:sp>
+      <p:sp>
+        <p:nvSpPr>
+          <p:cNvPr id="293" name="" descr="{&quot;isTemplate&quot;:true,&quot;type&quot;:&quot;text&quot;}"/>
           <p:cNvSpPr txBox="1"/>
           <p:nvPr/>
         </p:nvSpPr>
         <p:spPr>
           <a:xfrm rot="0" flipH="0" flipV="0">
             <a:off x="685800" y="5934075"/>
-            <a:ext cx="723900" cy="276225"/>
+            <a:ext cx="723900" cy="552450"/>
           </a:xfrm>
           <a:prstGeom prst="rect"/>
         </p:spPr>
@@ -13846,19 +14148,21 @@
       </p:sp>
       <p:sp>
         <p:nvSpPr>
-          <p:cNvPr id="284" name="" descr="{&quot;isTemplate&quot;:true,&quot;type&quot;:&quot;text&quot;}"/>
+          <p:cNvPr id="294" name="" descr="{&quot;isTemplate&quot;:true,&quot;type&quot;:&quot;text&quot;}"/>
           <p:cNvSpPr txBox="1"/>
           <p:nvPr/>
         </p:nvSpPr>
         <p:spPr>
           <a:xfrm rot="0" flipH="0" flipV="0">
             <a:off x="1543050" y="5934075"/>
-            <a:ext cx="9963150" cy="276225"/>
-          </a:xfrm>
-          <a:prstGeom prst="rect"/>
-        </p:spPr>
-        <p:txBody>
-          <a:bodyPr wrap="none" lIns="0" tIns="0" rIns="0" bIns="0"/>
+            <a:ext cx="9963150" cy="552450"/>
+          </a:xfrm>
+          <a:prstGeom prst="rect"/>
+        </p:spPr>
+        <p:txBody>
+          <a:bodyPr wrap="square" lIns="0" tIns="0" rIns="0" bIns="0">
+            <a:normAutofit/>
+          </a:bodyPr>
           <a:p>
             <a:pPr>
               <a:lnSpc>
@@ -13893,7 +14197,7 @@
                 <a:latin typeface="Microsoft YaHei"/>
                 <a:ea typeface="Microsoft YaHei"/>
               </a:rPr>
-              <a:t>：门店电脑不是服务器，打包体积与启动速度比模型炫技重要；</a:t>
+              <a:t>：门店电脑不是服务器，启动速度比模型炫技重要；</a:t>
             </a:r>
             <a:r>
               <a:rPr lang="en-US" sz="1050">
@@ -13903,7 +14207,7 @@
                 <a:latin typeface="Microsoft YaHei"/>
                 <a:ea typeface="Microsoft YaHei"/>
               </a:rPr>
-              <a:t xml:space="preserve"> SQLite </a:t>
+              <a:t xml:space="preserve">SQLite </a:t>
             </a:r>
             <a:r>
               <a:rPr lang="zh-CN" sz="1050">
@@ -13913,7 +14217,7 @@
                 <a:latin typeface="Microsoft YaHei"/>
                 <a:ea typeface="Microsoft YaHei"/>
               </a:rPr>
-              <a:t>开启</a:t>
+              <a:t>开</a:t>
             </a:r>
             <a:r>
               <a:rPr lang="en-US" sz="1050">
@@ -13933,7 +14237,7 @@
                 <a:latin typeface="Microsoft YaHei"/>
                 <a:ea typeface="Microsoft YaHei"/>
               </a:rPr>
-              <a:t>后足以支撑店内</a:t>
+              <a:t>足够</a:t>
             </a:r>
             <a:r>
               <a:rPr lang="en-US" sz="1050">
@@ -13953,21 +14257,101 @@
                 <a:latin typeface="Microsoft YaHei"/>
                 <a:ea typeface="Microsoft YaHei"/>
               </a:rPr>
-              <a:t>路并发点餐。</a:t>
-            </a:r>
-            <a:endParaRPr/>
-          </a:p>
-        </p:txBody>
-      </p:sp>
-      <p:sp>
-        <p:nvSpPr>
-          <p:cNvPr id="285" name="" descr="{&quot;isTemplate&quot;:true,&quot;type&quot;:&quot;text&quot;}"/>
-          <p:cNvSpPr txBox="1"/>
-          <p:nvPr/>
-        </p:nvSpPr>
-        <p:spPr>
-          <a:xfrm rot="0" flipH="0" flipV="0">
-            <a:off x="685800" y="6410325"/>
+              <a:t>路并发。</a:t>
+            </a:r>
+            <a:r>
+              <a:rPr lang="en-US" sz="1050">
+                <a:solidFill>
+                  <a:srgbClr val="5C6780"/>
+                </a:solidFill>
+                <a:latin typeface="Microsoft YaHei"/>
+                <a:ea typeface="Microsoft YaHei"/>
+              </a:rPr>
+              <a:t xml:space="preserve"> </a:t>
+            </a:r>
+            <a:r>
+              <a:rPr lang="zh-CN" sz="1050">
+                <a:solidFill>
+                  <a:srgbClr val="5C6780"/>
+                </a:solidFill>
+                <a:latin typeface="Microsoft YaHei"/>
+                <a:ea typeface="Microsoft YaHei"/>
+              </a:rPr>
+              <a:t>模型双通道：云端</a:t>
+            </a:r>
+            <a:r>
+              <a:rPr lang="en-US" sz="1050">
+                <a:solidFill>
+                  <a:srgbClr val="5C6780"/>
+                </a:solidFill>
+                <a:latin typeface="Microsoft YaHei"/>
+                <a:ea typeface="Microsoft YaHei"/>
+              </a:rPr>
+              <a:t xml:space="preserve"> 1.2 </a:t>
+            </a:r>
+            <a:r>
+              <a:rPr lang="zh-CN" sz="1050">
+                <a:solidFill>
+                  <a:srgbClr val="5C6780"/>
+                </a:solidFill>
+                <a:latin typeface="Microsoft YaHei"/>
+                <a:ea typeface="Microsoft YaHei"/>
+              </a:rPr>
+              <a:t>秒</a:t>
+            </a:r>
+            <a:r>
+              <a:rPr lang="en-US" sz="1050">
+                <a:solidFill>
+                  <a:srgbClr val="5C6780"/>
+                </a:solidFill>
+                <a:latin typeface="Microsoft YaHei"/>
+                <a:ea typeface="Microsoft YaHei"/>
+              </a:rPr>
+              <a:t xml:space="preserve"> / </a:t>
+            </a:r>
+            <a:r>
+              <a:rPr lang="zh-CN" sz="1050">
+                <a:solidFill>
+                  <a:srgbClr val="5C6780"/>
+                </a:solidFill>
+                <a:latin typeface="Microsoft YaHei"/>
+                <a:ea typeface="Microsoft YaHei"/>
+              </a:rPr>
+              <a:t>本地</a:t>
+            </a:r>
+            <a:r>
+              <a:rPr lang="en-US" sz="1050">
+                <a:solidFill>
+                  <a:srgbClr val="5C6780"/>
+                </a:solidFill>
+                <a:latin typeface="Microsoft YaHei"/>
+                <a:ea typeface="Microsoft YaHei"/>
+              </a:rPr>
+              <a:t xml:space="preserve"> 3B </a:t>
+            </a:r>
+            <a:r>
+              <a:rPr lang="zh-CN" sz="1050">
+                <a:solidFill>
+                  <a:srgbClr val="5C6780"/>
+                </a:solidFill>
+                <a:latin typeface="Microsoft YaHei"/>
+                <a:ea typeface="Microsoft YaHei"/>
+              </a:rPr>
+              <a:t>断网可用，切换不重启服务。</a:t>
+            </a:r>
+            <a:endParaRPr/>
+          </a:p>
+        </p:txBody>
+      </p:sp>
+      <p:sp>
+        <p:nvSpPr>
+          <p:cNvPr id="295" name="" descr="{&quot;isTemplate&quot;:true,&quot;type&quot;:&quot;text&quot;}"/>
+          <p:cNvSpPr txBox="1"/>
+          <p:nvPr/>
+        </p:nvSpPr>
+        <p:spPr>
+          <a:xfrm rot="0" flipH="0" flipV="0">
+            <a:off x="685800" y="6686550"/>
             <a:ext cx="1619250" cy="142875"/>
           </a:xfrm>
           <a:prstGeom prst="rect"/>
@@ -14026,13 +14410,13 @@
       </p:sp>
       <p:sp>
         <p:nvSpPr>
-          <p:cNvPr id="286" name="" descr="{&quot;isTemplate&quot;:true,&quot;type&quot;:&quot;text&quot;}"/>
-          <p:cNvSpPr txBox="1"/>
-          <p:nvPr/>
-        </p:nvSpPr>
-        <p:spPr>
-          <a:xfrm rot="0" flipH="0" flipV="0">
-            <a:off x="11115675" y="6410325"/>
+          <p:cNvPr id="296" name="" descr="{&quot;isTemplate&quot;:true,&quot;type&quot;:&quot;text&quot;}"/>
+          <p:cNvSpPr txBox="1"/>
+          <p:nvPr/>
+        </p:nvSpPr>
+        <p:spPr>
+          <a:xfrm rot="0" flipH="0" flipV="0">
+            <a:off x="11115675" y="6686550"/>
             <a:ext cx="390525" cy="142875"/>
           </a:xfrm>
           <a:prstGeom prst="rect"/>
@@ -14069,7 +14453,7 @@
   <p:cSld>
     <p:spTree>
       <p:nvGrpSpPr>
-        <p:cNvPr id="287" name=""/>
+        <p:cNvPr id="297" name=""/>
         <p:cNvGrpSpPr/>
         <p:nvPr/>
       </p:nvGrpSpPr>
@@ -14083,7 +14467,7 @@
       </p:grpSpPr>
       <p:sp>
         <p:nvSpPr>
-          <p:cNvPr id="288" name=""/>
+          <p:cNvPr id="298" name=""/>
           <p:cNvSpPr/>
           <p:nvPr/>
         </p:nvSpPr>
@@ -14110,7 +14494,7 @@
       </p:sp>
       <p:sp>
         <p:nvSpPr>
-          <p:cNvPr id="289" name="" descr="{&quot;isTemplate&quot;:true,&quot;type&quot;:&quot;text&quot;}"/>
+          <p:cNvPr id="299" name="" descr="{&quot;isTemplate&quot;:true,&quot;type&quot;:&quot;text&quot;}"/>
           <p:cNvSpPr txBox="1"/>
           <p:nvPr/>
         </p:nvSpPr>
@@ -14145,7 +14529,7 @@
       </p:sp>
       <p:sp>
         <p:nvSpPr>
-          <p:cNvPr id="290" name="" descr="{&quot;isTemplate&quot;:true,&quot;type&quot;:&quot;text&quot;}"/>
+          <p:cNvPr id="300" name="" descr="{&quot;isTemplate&quot;:true,&quot;type&quot;:&quot;text&quot;}"/>
           <p:cNvSpPr txBox="1"/>
           <p:nvPr/>
         </p:nvSpPr>
@@ -14200,7 +14584,7 @@
       </p:sp>
       <p:sp>
         <p:nvSpPr>
-          <p:cNvPr id="291" name=""/>
+          <p:cNvPr id="301" name=""/>
           <p:cNvSpPr/>
           <p:nvPr/>
         </p:nvSpPr>
@@ -14234,7 +14618,7 @@
       </p:sp>
       <p:sp>
         <p:nvSpPr>
-          <p:cNvPr id="292" name=""/>
+          <p:cNvPr id="302" name=""/>
           <p:cNvSpPr/>
           <p:nvPr/>
         </p:nvSpPr>
@@ -14263,7 +14647,7 @@
       </p:sp>
       <p:sp>
         <p:nvSpPr>
-          <p:cNvPr id="293" name="" descr="{&quot;isTemplate&quot;:true,&quot;type&quot;:&quot;text&quot;}"/>
+          <p:cNvPr id="303" name="" descr="{&quot;isTemplate&quot;:true,&quot;type&quot;:&quot;text&quot;}"/>
           <p:cNvSpPr txBox="1"/>
           <p:nvPr/>
         </p:nvSpPr>
@@ -14308,7 +14692,7 @@
       </p:sp>
       <p:sp>
         <p:nvSpPr>
-          <p:cNvPr id="294" name=""/>
+          <p:cNvPr id="304" name=""/>
           <p:cNvSpPr/>
           <p:nvPr/>
         </p:nvSpPr>
@@ -14337,7 +14721,7 @@
       </p:sp>
       <p:sp>
         <p:nvSpPr>
-          <p:cNvPr id="295" name="" descr="{&quot;isTemplate&quot;:true,&quot;type&quot;:&quot;text&quot;}"/>
+          <p:cNvPr id="305" name="" descr="{&quot;isTemplate&quot;:true,&quot;type&quot;:&quot;text&quot;}"/>
           <p:cNvSpPr txBox="1"/>
           <p:nvPr/>
         </p:nvSpPr>
@@ -14372,7 +14756,7 @@
       </p:sp>
       <p:sp>
         <p:nvSpPr>
-          <p:cNvPr id="296" name="" descr="{&quot;isTemplate&quot;:true,&quot;type&quot;:&quot;text&quot;}"/>
+          <p:cNvPr id="306" name="" descr="{&quot;isTemplate&quot;:true,&quot;type&quot;:&quot;text&quot;}"/>
           <p:cNvSpPr txBox="1"/>
           <p:nvPr/>
         </p:nvSpPr>
@@ -14407,7 +14791,7 @@
       </p:sp>
       <p:sp>
         <p:nvSpPr>
-          <p:cNvPr id="297" name="" descr="{&quot;isTemplate&quot;:true,&quot;type&quot;:&quot;text&quot;}"/>
+          <p:cNvPr id="307" name="" descr="{&quot;isTemplate&quot;:true,&quot;type&quot;:&quot;text&quot;}"/>
           <p:cNvSpPr txBox="1"/>
           <p:nvPr/>
         </p:nvSpPr>
@@ -14452,7 +14836,7 @@
       </p:sp>
       <p:sp>
         <p:nvSpPr>
-          <p:cNvPr id="298" name="" descr="{&quot;isTemplate&quot;:true,&quot;type&quot;:&quot;text&quot;}"/>
+          <p:cNvPr id="308" name="" descr="{&quot;isTemplate&quot;:true,&quot;type&quot;:&quot;text&quot;}"/>
           <p:cNvSpPr txBox="1"/>
           <p:nvPr/>
         </p:nvSpPr>
@@ -14487,7 +14871,7 @@
       </p:sp>
       <p:sp>
         <p:nvSpPr>
-          <p:cNvPr id="299" name="" descr="{&quot;isTemplate&quot;:true,&quot;type&quot;:&quot;text&quot;}"/>
+          <p:cNvPr id="309" name="" descr="{&quot;isTemplate&quot;:true,&quot;type&quot;:&quot;text&quot;}"/>
           <p:cNvSpPr txBox="1"/>
           <p:nvPr/>
         </p:nvSpPr>
@@ -14522,7 +14906,7 @@
       </p:sp>
       <p:sp>
         <p:nvSpPr>
-          <p:cNvPr id="300" name="" descr="{&quot;isTemplate&quot;:true,&quot;type&quot;:&quot;text&quot;}"/>
+          <p:cNvPr id="310" name="" descr="{&quot;isTemplate&quot;:true,&quot;type&quot;:&quot;text&quot;}"/>
           <p:cNvSpPr txBox="1"/>
           <p:nvPr/>
         </p:nvSpPr>
@@ -14597,7 +14981,7 @@
       </p:sp>
       <p:sp>
         <p:nvSpPr>
-          <p:cNvPr id="301" name="" descr="{&quot;isTemplate&quot;:true,&quot;type&quot;:&quot;text&quot;}"/>
+          <p:cNvPr id="311" name="" descr="{&quot;isTemplate&quot;:true,&quot;type&quot;:&quot;text&quot;}"/>
           <p:cNvSpPr txBox="1"/>
           <p:nvPr/>
         </p:nvSpPr>
@@ -14632,7 +15016,7 @@
       </p:sp>
       <p:sp>
         <p:nvSpPr>
-          <p:cNvPr id="302" name="" descr="{&quot;isTemplate&quot;:true,&quot;type&quot;:&quot;text&quot;}"/>
+          <p:cNvPr id="312" name="" descr="{&quot;isTemplate&quot;:true,&quot;type&quot;:&quot;text&quot;}"/>
           <p:cNvSpPr txBox="1"/>
           <p:nvPr/>
         </p:nvSpPr>
@@ -14667,7 +15051,7 @@
       </p:sp>
       <p:sp>
         <p:nvSpPr>
-          <p:cNvPr id="303" name="" descr="{&quot;isTemplate&quot;:true,&quot;type&quot;:&quot;text&quot;}"/>
+          <p:cNvPr id="313" name="" descr="{&quot;isTemplate&quot;:true,&quot;type&quot;:&quot;text&quot;}"/>
           <p:cNvSpPr txBox="1"/>
           <p:nvPr/>
         </p:nvSpPr>
@@ -14742,7 +15126,7 @@
       </p:sp>
       <p:sp>
         <p:nvSpPr>
-          <p:cNvPr id="304" name="" descr="{&quot;isTemplate&quot;:true,&quot;type&quot;:&quot;text&quot;}"/>
+          <p:cNvPr id="314" name="" descr="{&quot;isTemplate&quot;:true,&quot;type&quot;:&quot;text&quot;}"/>
           <p:cNvSpPr txBox="1"/>
           <p:nvPr/>
         </p:nvSpPr>
@@ -14777,7 +15161,7 @@
       </p:sp>
       <p:sp>
         <p:nvSpPr>
-          <p:cNvPr id="305" name="" descr="{&quot;isTemplate&quot;:true,&quot;type&quot;:&quot;text&quot;}"/>
+          <p:cNvPr id="315" name="" descr="{&quot;isTemplate&quot;:true,&quot;type&quot;:&quot;text&quot;}"/>
           <p:cNvSpPr txBox="1"/>
           <p:nvPr/>
         </p:nvSpPr>
@@ -14812,7 +15196,7 @@
       </p:sp>
       <p:sp>
         <p:nvSpPr>
-          <p:cNvPr id="306" name="" descr="{&quot;isTemplate&quot;:true,&quot;type&quot;:&quot;text&quot;}"/>
+          <p:cNvPr id="316" name="" descr="{&quot;isTemplate&quot;:true,&quot;type&quot;:&quot;text&quot;}"/>
           <p:cNvSpPr txBox="1"/>
           <p:nvPr/>
         </p:nvSpPr>
@@ -14887,7 +15271,7 @@
       </p:sp>
       <p:sp>
         <p:nvSpPr>
-          <p:cNvPr id="307" name="" descr="{&quot;isTemplate&quot;:true,&quot;type&quot;:&quot;text&quot;}"/>
+          <p:cNvPr id="317" name="" descr="{&quot;isTemplate&quot;:true,&quot;type&quot;:&quot;text&quot;}"/>
           <p:cNvSpPr txBox="1"/>
           <p:nvPr/>
         </p:nvSpPr>
@@ -14922,7 +15306,7 @@
       </p:sp>
       <p:sp>
         <p:nvSpPr>
-          <p:cNvPr id="308" name="" descr="{&quot;isTemplate&quot;:true,&quot;type&quot;:&quot;text&quot;}"/>
+          <p:cNvPr id="318" name="" descr="{&quot;isTemplate&quot;:true,&quot;type&quot;:&quot;text&quot;}"/>
           <p:cNvSpPr txBox="1"/>
           <p:nvPr/>
         </p:nvSpPr>
@@ -14957,7 +15341,7 @@
       </p:sp>
       <p:sp>
         <p:nvSpPr>
-          <p:cNvPr id="309" name="" descr="{&quot;isTemplate&quot;:true,&quot;type&quot;:&quot;text&quot;}"/>
+          <p:cNvPr id="319" name="" descr="{&quot;isTemplate&quot;:true,&quot;type&quot;:&quot;text&quot;}"/>
           <p:cNvSpPr txBox="1"/>
           <p:nvPr/>
         </p:nvSpPr>
@@ -15012,7 +15396,7 @@
       </p:sp>
       <p:sp>
         <p:nvSpPr>
-          <p:cNvPr id="310" name=""/>
+          <p:cNvPr id="320" name=""/>
           <p:cNvSpPr/>
           <p:nvPr/>
         </p:nvSpPr>
@@ -15046,7 +15430,7 @@
       </p:sp>
       <p:sp>
         <p:nvSpPr>
-          <p:cNvPr id="311" name="" descr="{&quot;isTemplate&quot;:true,&quot;type&quot;:&quot;text&quot;}"/>
+          <p:cNvPr id="321" name="" descr="{&quot;isTemplate&quot;:true,&quot;type&quot;:&quot;text&quot;}"/>
           <p:cNvSpPr txBox="1"/>
           <p:nvPr/>
         </p:nvSpPr>
@@ -15081,7 +15465,7 @@
       </p:sp>
       <p:sp>
         <p:nvSpPr>
-          <p:cNvPr id="312" name="" descr="{&quot;isTemplate&quot;:true,&quot;type&quot;:&quot;text&quot;}"/>
+          <p:cNvPr id="322" name="" descr="{&quot;isTemplate&quot;:true,&quot;type&quot;:&quot;text&quot;}"/>
           <p:cNvSpPr txBox="1"/>
           <p:nvPr/>
         </p:nvSpPr>
@@ -15116,7 +15500,7 @@
       </p:sp>
       <p:sp>
         <p:nvSpPr>
-          <p:cNvPr id="313" name="" descr="{&quot;isTemplate&quot;:true,&quot;type&quot;:&quot;text&quot;}"/>
+          <p:cNvPr id="323" name="" descr="{&quot;isTemplate&quot;:true,&quot;type&quot;:&quot;text&quot;}"/>
           <p:cNvSpPr txBox="1"/>
           <p:nvPr/>
         </p:nvSpPr>
@@ -15151,7 +15535,7 @@
       </p:sp>
       <p:sp>
         <p:nvSpPr>
-          <p:cNvPr id="314" name="" descr="{&quot;isTemplate&quot;:true,&quot;type&quot;:&quot;text&quot;}"/>
+          <p:cNvPr id="324" name="" descr="{&quot;isTemplate&quot;:true,&quot;type&quot;:&quot;text&quot;}"/>
           <p:cNvSpPr txBox="1"/>
           <p:nvPr/>
         </p:nvSpPr>
@@ -15186,7 +15570,7 @@
       </p:sp>
       <p:sp>
         <p:nvSpPr>
-          <p:cNvPr id="315" name="" descr="{&quot;isTemplate&quot;:true,&quot;type&quot;:&quot;text&quot;}"/>
+          <p:cNvPr id="325" name="" descr="{&quot;isTemplate&quot;:true,&quot;type&quot;:&quot;text&quot;}"/>
           <p:cNvSpPr txBox="1"/>
           <p:nvPr/>
         </p:nvSpPr>
@@ -15221,7 +15605,7 @@
       </p:sp>
       <p:sp>
         <p:nvSpPr>
-          <p:cNvPr id="316" name="" descr="{&quot;isTemplate&quot;:true,&quot;type&quot;:&quot;text&quot;}"/>
+          <p:cNvPr id="326" name="" descr="{&quot;isTemplate&quot;:true,&quot;type&quot;:&quot;text&quot;}"/>
           <p:cNvSpPr txBox="1"/>
           <p:nvPr/>
         </p:nvSpPr>
@@ -15256,7 +15640,7 @@
       </p:sp>
       <p:sp>
         <p:nvSpPr>
-          <p:cNvPr id="317" name="" descr="{&quot;isTemplate&quot;:true,&quot;type&quot;:&quot;text&quot;}"/>
+          <p:cNvPr id="327" name="" descr="{&quot;isTemplate&quot;:true,&quot;type&quot;:&quot;text&quot;}"/>
           <p:cNvSpPr txBox="1"/>
           <p:nvPr/>
         </p:nvSpPr>
@@ -15291,7 +15675,7 @@
       </p:sp>
       <p:sp>
         <p:nvSpPr>
-          <p:cNvPr id="318" name="" descr="{&quot;isTemplate&quot;:true,&quot;type&quot;:&quot;text&quot;}"/>
+          <p:cNvPr id="328" name="" descr="{&quot;isTemplate&quot;:true,&quot;type&quot;:&quot;text&quot;}"/>
           <p:cNvSpPr txBox="1"/>
           <p:nvPr/>
         </p:nvSpPr>
@@ -15326,7 +15710,7 @@
       </p:sp>
       <p:sp>
         <p:nvSpPr>
-          <p:cNvPr id="319" name="" descr="{&quot;isTemplate&quot;:true,&quot;type&quot;:&quot;text&quot;}"/>
+          <p:cNvPr id="329" name="" descr="{&quot;isTemplate&quot;:true,&quot;type&quot;:&quot;text&quot;}"/>
           <p:cNvSpPr txBox="1"/>
           <p:nvPr/>
         </p:nvSpPr>
@@ -15381,7 +15765,7 @@
       </p:sp>
       <p:sp>
         <p:nvSpPr>
-          <p:cNvPr id="320" name=""/>
+          <p:cNvPr id="330" name=""/>
           <p:cNvSpPr/>
           <p:nvPr/>
         </p:nvSpPr>
@@ -15424,7 +15808,7 @@
       </p:sp>
       <p:sp>
         <p:nvSpPr>
-          <p:cNvPr id="321" name=""/>
+          <p:cNvPr id="331" name=""/>
           <p:cNvSpPr/>
           <p:nvPr/>
         </p:nvSpPr>
@@ -15453,7 +15837,7 @@
       </p:sp>
       <p:sp>
         <p:nvSpPr>
-          <p:cNvPr id="322" name="" descr="{&quot;isTemplate&quot;:true,&quot;type&quot;:&quot;text&quot;}"/>
+          <p:cNvPr id="332" name="" descr="{&quot;isTemplate&quot;:true,&quot;type&quot;:&quot;text&quot;}"/>
           <p:cNvSpPr txBox="1"/>
           <p:nvPr/>
         </p:nvSpPr>
@@ -15506,7 +15890,7 @@
       </p:sp>
       <p:sp>
         <p:nvSpPr>
-          <p:cNvPr id="323" name="" descr="{&quot;isTemplate&quot;:true,&quot;type&quot;:&quot;text&quot;}"/>
+          <p:cNvPr id="333" name="" descr="{&quot;isTemplate&quot;:true,&quot;type&quot;:&quot;text&quot;}"/>
           <p:cNvSpPr txBox="1"/>
           <p:nvPr/>
         </p:nvSpPr>
@@ -15571,7 +15955,7 @@
       </p:sp>
       <p:sp>
         <p:nvSpPr>
-          <p:cNvPr id="324" name="" descr="{&quot;isTemplate&quot;:true,&quot;type&quot;:&quot;text&quot;}"/>
+          <p:cNvPr id="334" name="" descr="{&quot;isTemplate&quot;:true,&quot;type&quot;:&quot;text&quot;}"/>
           <p:cNvSpPr txBox="1"/>
           <p:nvPr/>
         </p:nvSpPr>
@@ -15614,7 +15998,7 @@
   <p:cSld>
     <p:spTree>
       <p:nvGrpSpPr>
-        <p:cNvPr id="325" name=""/>
+        <p:cNvPr id="335" name="" descr="&lt;Slide style={{ width: 1280, height: 720, background: '#F6F8FD', padding: '56px 72px', flexDirection: 'column' }}&gt;&#13;&#10;  &lt;Box style={{ height: 96, flexDirection: 'row', justifyContent: 'space-between', alignItems: 'flex-start' }}&gt;&#13;&#10;    &lt;Box style={{ flexDirection: 'column', gap: 8 }}&gt;&#13;&#10;      &lt;Text style={{ fontSize: 34, fontWeight: 'bold', color: '#0C1222' }}&gt;AI 不会算错账，因为它不算账&lt;/Text&gt;&#13;&#10;      &lt;Text style={{ fontSize: 15, color: '#5C6780' }}&gt;所有数字只有一个实现，模型只负责理解问题与组织语言&lt;/Text&gt;&#13;&#10;    &lt;/Box&gt;&#13;&#10;    &lt;Box style={{ flexDirection: 'row', alignItems: 'center', gap: 6, padding: '5px 12px', background: '#EEF1FE', border: '1px solid #DDE2F5', borderRadius: 999 }}&gt;&#13;&#10;      &lt;Box style={{ width: 6, height: 6, borderRadius: 3, background: '#4C4DDC' }} /&gt;&#13;&#10;      &lt;Text style={{ fontSize: 12, color: '#4C4DDC', fontWeight: 'bold', letterSpacing: 1 }}&gt;AI 掌柜&lt;/Text&gt;&#13;&#10;    &lt;/Box&gt;&#13;&#10;  &lt;/Box&gt;&#13;&#10;  &lt;Box style={{ width: 72, height: 3, background: '#4C4DDC', borderRadius: 2, marginTop: 2, marginBottom: 12 }} /&gt;&#13;&#10;  &lt;Box style={{ flex: 1, paddingTop: 8 }}&gt;&#13;&#10;    &lt;Box style={{ flexDirection: 'row', gap: 28, alignItems: 'center' }}&gt;&#13;&#10;      &lt;Box style={{ flexDirection: 'column', width: 380 }}&gt;&#13;&#10;        &lt;Text style={{ fontSize: 13, color: '#5C6780', letterSpacing: 1 }}&gt;昨日营收（元）&lt;/Text&gt;&#13;&#10;        &lt;Text style={{ fontSize: 68, fontWeight: 'bold', color: '#0C1222', letterSpacing: -2 }}&gt;7,507.80&lt;/Text&gt;&#13;&#10;        &lt;Text style={{ fontSize: 13, color: '#5C6780', marginTop: 6 }}&gt;同星期基线 10,898.00 · 低 31.1%&lt;/Text&gt;&#13;&#10;      &lt;/Box&gt;&#13;&#10;      &lt;Box style={{ flex: 1, flexDirection: 'column', gap: 10 }}&gt;&#13;&#10;        &lt;Text style={{ fontSize: 13, color: '#5C6780' }}&gt;这个数字出现在三个地方，必须完全相等&lt;/Text&gt;&#13;&#10;        &lt;Box style={{ flexDirection: 'row', gap: 12 }}&gt;&#13;&#10;          &lt;Box style={{ flex: 1, background: '#FFFFFF', border: '1px solid #E3E8F5', borderRadius: 10, padding: 16 }}&gt;&#13;&#10;            &lt;Text style={{ fontSize: 15, color: '#0C1222' }}&gt;AI 驾驶舱&lt;/Text&gt;&#13;&#10;            &lt;Text style={{ fontSize: 12, color: '#5C6780', marginTop: 6 }}&gt;KPI 卡片&lt;/Text&gt;&#13;&#10;          &lt;/Box&gt;&#13;&#10;          &lt;Box style={{ flex: 1, background: '#FFFFFF', border: '1px solid #E3E8F5', borderRadius: 10, padding: 16 }}&gt;&#13;&#10;            &lt;Text style={{ fontSize: 15, color: '#0C1222' }}&gt;营收报表&lt;/Text&gt;&#13;&#10;            &lt;Text style={{ fontSize: 12, color: '#5C6780', marginTop: 6 }}&gt;按日汇总&lt;/Text&gt;&#13;&#10;          &lt;/Box&gt;&#13;&#10;          &lt;Box style={{ flex: 1, background: '#FFFFFF', border: '1px solid #E3E8F5', borderRadius: 10, padding: 16 }}&gt;&#13;&#10;            &lt;Text style={{ fontSize: 15, color: '#0C1222' }}&gt;AI 问答&lt;/Text&gt;&#13;&#10;            &lt;Text style={{ fontSize: 12, color: '#5C6780', marginTop: 6 }}&gt;SQL 结果&lt;/Text&gt;&#13;&#10;          &lt;/Box&gt;&#13;&#10;        &lt;/Box&gt;&#13;&#10;      &lt;/Box&gt;&#13;&#10;    &lt;/Box&gt;&#13;&#10;    &lt;Box style={{ marginTop: 26, background: '#FBFCFE', border: '1px solid #E3E8F5', borderRadius: 12, padding: 22 }}&gt;&#13;&#10;      &lt;Text style={{ fontSize: 12, color: '#8A93A8', letterSpacing: 1 }}&gt;analytics / metrics.py&lt;/Text&gt;&#13;&#10;      &lt;Text style={{ fontSize: 14, color: '#5C6780', marginTop: 10, lineHeight: 1.9 }}&gt;&#13;&#10;        def q_kpi(conn, d1, d2):&amp;nbsp;&amp;nbsp;&lt;span style={{ color: '#4C4DDC' }}&gt;# 全系统唯一的营收口径&lt;/span&gt;&lt;br /&gt;&#13;&#10;        &amp;nbsp;&amp;nbsp;revenue = SUM(final_amount) WHERE status='settled'&lt;br /&gt;&#13;&#10;        &amp;nbsp;&amp;nbsp;return dict(revenue=money(revenue), margin_rate=...)&#13;&#10;      &lt;/Text&gt;&#13;&#10;    &lt;/Box&gt;&#13;&#10;    &lt;Text style={{ fontSize: 14, color: '#5C6780', marginTop: 16 }}&gt;数字由 SQL 算出，模型只写解读；结论必须引用 evidence，点开能看到原始 SQL。&lt;/Text&gt;&#13;&#10;  &lt;/Box&gt;&#13;&#10;  &lt;Box style={{ height: 36, flexDirection: 'row', justifyContent: 'space-between', alignItems: 'flex-end' }}&gt;&#13;&#10;    &lt;Text style={{ fontSize: 12, color: '#8A93A8' }}&gt;2026 武汉 1024 · 产业应用赛道&lt;/Text&gt;&#13;&#10;    &lt;Text style={{ fontSize: 12, color: '#8A93A8' }}&gt;08 / 12&lt;/Text&gt;&#13;&#10;  &lt;/Box&gt;&#13;&#10;&lt;/Slide&gt;"/>
         <p:cNvGrpSpPr/>
         <p:nvPr/>
       </p:nvGrpSpPr>
@@ -15628,7 +16012,7 @@
       </p:grpSpPr>
       <p:sp>
         <p:nvSpPr>
-          <p:cNvPr id="326" name=""/>
+          <p:cNvPr id="336" name=""/>
           <p:cNvSpPr/>
           <p:nvPr/>
         </p:nvSpPr>
@@ -15647,15 +16031,12 @@
         </p:spPr>
         <p:txBody>
           <a:bodyPr/>
-          <a:p>
-            <a:pPr/>
-            <a:endParaRPr/>
-          </a:p>
-        </p:txBody>
-      </p:sp>
-      <p:sp>
-        <p:nvSpPr>
-          <p:cNvPr id="327" name="" descr="{&quot;isTemplate&quot;:true,&quot;type&quot;:&quot;text&quot;}"/>
+          <a:p/>
+        </p:txBody>
+      </p:sp>
+      <p:sp>
+        <p:nvSpPr>
+          <p:cNvPr id="337" name="" descr="{&quot;isTemplate&quot;:true,&quot;type&quot;:&quot;text&quot;}"/>
           <p:cNvSpPr txBox="1"/>
           <p:nvPr/>
         </p:nvSpPr>
@@ -15700,7 +16081,7 @@
       </p:sp>
       <p:sp>
         <p:nvSpPr>
-          <p:cNvPr id="328" name="" descr="{&quot;isTemplate&quot;:true,&quot;type&quot;:&quot;text&quot;}"/>
+          <p:cNvPr id="338" name="" descr="{&quot;isTemplate&quot;:true,&quot;type&quot;:&quot;text&quot;}"/>
           <p:cNvSpPr txBox="1"/>
           <p:nvPr/>
         </p:nvSpPr>
@@ -15735,7 +16116,7 @@
       </p:sp>
       <p:sp>
         <p:nvSpPr>
-          <p:cNvPr id="329" name=""/>
+          <p:cNvPr id="339" name=""/>
           <p:cNvSpPr/>
           <p:nvPr/>
         </p:nvSpPr>
@@ -15761,15 +16142,12 @@
         </p:spPr>
         <p:txBody>
           <a:bodyPr/>
-          <a:p>
-            <a:pPr/>
-            <a:endParaRPr/>
-          </a:p>
-        </p:txBody>
-      </p:sp>
-      <p:sp>
-        <p:nvSpPr>
-          <p:cNvPr id="330" name=""/>
+          <a:p/>
+        </p:txBody>
+      </p:sp>
+      <p:sp>
+        <p:nvSpPr>
+          <p:cNvPr id="340" name=""/>
           <p:cNvSpPr/>
           <p:nvPr/>
         </p:nvSpPr>
@@ -15790,15 +16168,12 @@
         </p:spPr>
         <p:txBody>
           <a:bodyPr/>
-          <a:p>
-            <a:pPr/>
-            <a:endParaRPr/>
-          </a:p>
-        </p:txBody>
-      </p:sp>
-      <p:sp>
-        <p:nvSpPr>
-          <p:cNvPr id="331" name="" descr="{&quot;isTemplate&quot;:true,&quot;type&quot;:&quot;text&quot;}"/>
+          <a:p/>
+        </p:txBody>
+      </p:sp>
+      <p:sp>
+        <p:nvSpPr>
+          <p:cNvPr id="341" name="" descr="{&quot;isTemplate&quot;:true,&quot;type&quot;:&quot;text&quot;}"/>
           <p:cNvSpPr txBox="1"/>
           <p:nvPr/>
         </p:nvSpPr>
@@ -15843,7 +16218,7 @@
       </p:sp>
       <p:sp>
         <p:nvSpPr>
-          <p:cNvPr id="332" name=""/>
+          <p:cNvPr id="342" name=""/>
           <p:cNvSpPr/>
           <p:nvPr/>
         </p:nvSpPr>
@@ -15864,15 +16239,12 @@
         </p:spPr>
         <p:txBody>
           <a:bodyPr/>
-          <a:p>
-            <a:pPr/>
-            <a:endParaRPr/>
-          </a:p>
-        </p:txBody>
-      </p:sp>
-      <p:sp>
-        <p:nvSpPr>
-          <p:cNvPr id="333" name="" descr="{&quot;isTemplate&quot;:true,&quot;type&quot;:&quot;text&quot;}"/>
+          <a:p/>
+        </p:txBody>
+      </p:sp>
+      <p:sp>
+        <p:nvSpPr>
+          <p:cNvPr id="343" name="" descr="{&quot;isTemplate&quot;:true,&quot;type&quot;:&quot;text&quot;}"/>
           <p:cNvSpPr txBox="1"/>
           <p:nvPr/>
         </p:nvSpPr>
@@ -15907,7 +16279,7 @@
       </p:sp>
       <p:sp>
         <p:nvSpPr>
-          <p:cNvPr id="334" name="" descr="{&quot;isTemplate&quot;:true,&quot;type&quot;:&quot;text&quot;}"/>
+          <p:cNvPr id="344" name="" descr="{&quot;isTemplate&quot;:true,&quot;type&quot;:&quot;text&quot;}"/>
           <p:cNvSpPr txBox="1"/>
           <p:nvPr/>
         </p:nvSpPr>
@@ -15934,15 +16306,15 @@
                 <a:latin typeface="Microsoft YaHei"/>
                 <a:ea typeface="Microsoft YaHei"/>
               </a:rPr>
-              <a:t>6,029.65</a:t>
-            </a:r>
-            <a:endParaRPr/>
-          </a:p>
-        </p:txBody>
-      </p:sp>
-      <p:sp>
-        <p:nvSpPr>
-          <p:cNvPr id="335" name="" descr="{&quot;isTemplate&quot;:true,&quot;type&quot;:&quot;text&quot;}"/>
+              <a:t>7,507.80</a:t>
+            </a:r>
+            <a:endParaRPr/>
+          </a:p>
+        </p:txBody>
+      </p:sp>
+      <p:sp>
+        <p:nvSpPr>
+          <p:cNvPr id="345" name="" descr="{&quot;isTemplate&quot;:true,&quot;type&quot;:&quot;text&quot;}"/>
           <p:cNvSpPr txBox="1"/>
           <p:nvPr/>
         </p:nvSpPr>
@@ -15979,7 +16351,7 @@
                 <a:latin typeface="Microsoft YaHei"/>
                 <a:ea typeface="Microsoft YaHei"/>
               </a:rPr>
-              <a:t xml:space="preserve"> 8,024.45 · </a:t>
+              <a:t xml:space="preserve"> 10,898.00 · </a:t>
             </a:r>
             <a:r>
               <a:rPr lang="zh-CN" sz="975">
@@ -15999,15 +16371,15 @@
                 <a:latin typeface="Microsoft YaHei"/>
                 <a:ea typeface="Microsoft YaHei"/>
               </a:rPr>
-              <a:t xml:space="preserve"> 24.8%</a:t>
-            </a:r>
-            <a:endParaRPr/>
-          </a:p>
-        </p:txBody>
-      </p:sp>
-      <p:sp>
-        <p:nvSpPr>
-          <p:cNvPr id="336" name="" descr="{&quot;isTemplate&quot;:true,&quot;type&quot;:&quot;text&quot;}"/>
+              <a:t xml:space="preserve"> 31.1%</a:t>
+            </a:r>
+            <a:endParaRPr/>
+          </a:p>
+        </p:txBody>
+      </p:sp>
+      <p:sp>
+        <p:nvSpPr>
+          <p:cNvPr id="346" name="" descr="{&quot;isTemplate&quot;:true,&quot;type&quot;:&quot;text&quot;}"/>
           <p:cNvSpPr txBox="1"/>
           <p:nvPr/>
         </p:nvSpPr>
@@ -16042,7 +16414,7 @@
       </p:sp>
       <p:sp>
         <p:nvSpPr>
-          <p:cNvPr id="337" name=""/>
+          <p:cNvPr id="347" name=""/>
           <p:cNvSpPr/>
           <p:nvPr/>
         </p:nvSpPr>
@@ -16068,15 +16440,12 @@
         </p:spPr>
         <p:txBody>
           <a:bodyPr/>
-          <a:p>
-            <a:pPr/>
-            <a:endParaRPr/>
-          </a:p>
-        </p:txBody>
-      </p:sp>
-      <p:sp>
-        <p:nvSpPr>
-          <p:cNvPr id="338" name="" descr="{&quot;isTemplate&quot;:true,&quot;type&quot;:&quot;text&quot;}"/>
+          <a:p/>
+        </p:txBody>
+      </p:sp>
+      <p:sp>
+        <p:nvSpPr>
+          <p:cNvPr id="348" name="" descr="{&quot;isTemplate&quot;:true,&quot;type&quot;:&quot;text&quot;}"/>
           <p:cNvSpPr txBox="1"/>
           <p:nvPr/>
         </p:nvSpPr>
@@ -16121,7 +16490,7 @@
       </p:sp>
       <p:sp>
         <p:nvSpPr>
-          <p:cNvPr id="339" name="" descr="{&quot;isTemplate&quot;:true,&quot;type&quot;:&quot;text&quot;}"/>
+          <p:cNvPr id="349" name="" descr="{&quot;isTemplate&quot;:true,&quot;type&quot;:&quot;text&quot;}"/>
           <p:cNvSpPr txBox="1"/>
           <p:nvPr/>
         </p:nvSpPr>
@@ -16166,7 +16535,7 @@
       </p:sp>
       <p:sp>
         <p:nvSpPr>
-          <p:cNvPr id="340" name=""/>
+          <p:cNvPr id="350" name=""/>
           <p:cNvSpPr/>
           <p:nvPr/>
         </p:nvSpPr>
@@ -16192,15 +16561,12 @@
         </p:spPr>
         <p:txBody>
           <a:bodyPr/>
-          <a:p>
-            <a:pPr/>
-            <a:endParaRPr/>
-          </a:p>
-        </p:txBody>
-      </p:sp>
-      <p:sp>
-        <p:nvSpPr>
-          <p:cNvPr id="341" name="" descr="{&quot;isTemplate&quot;:true,&quot;type&quot;:&quot;text&quot;}"/>
+          <a:p/>
+        </p:txBody>
+      </p:sp>
+      <p:sp>
+        <p:nvSpPr>
+          <p:cNvPr id="351" name="" descr="{&quot;isTemplate&quot;:true,&quot;type&quot;:&quot;text&quot;}"/>
           <p:cNvSpPr txBox="1"/>
           <p:nvPr/>
         </p:nvSpPr>
@@ -16235,7 +16601,7 @@
       </p:sp>
       <p:sp>
         <p:nvSpPr>
-          <p:cNvPr id="342" name="" descr="{&quot;isTemplate&quot;:true,&quot;type&quot;:&quot;text&quot;}"/>
+          <p:cNvPr id="352" name="" descr="{&quot;isTemplate&quot;:true,&quot;type&quot;:&quot;text&quot;}"/>
           <p:cNvSpPr txBox="1"/>
           <p:nvPr/>
         </p:nvSpPr>
@@ -16270,7 +16636,7 @@
       </p:sp>
       <p:sp>
         <p:nvSpPr>
-          <p:cNvPr id="343" name=""/>
+          <p:cNvPr id="353" name=""/>
           <p:cNvSpPr/>
           <p:nvPr/>
         </p:nvSpPr>
@@ -16296,15 +16662,12 @@
         </p:spPr>
         <p:txBody>
           <a:bodyPr/>
-          <a:p>
-            <a:pPr/>
-            <a:endParaRPr/>
-          </a:p>
-        </p:txBody>
-      </p:sp>
-      <p:sp>
-        <p:nvSpPr>
-          <p:cNvPr id="344" name="" descr="{&quot;isTemplate&quot;:true,&quot;type&quot;:&quot;text&quot;}"/>
+          <a:p/>
+        </p:txBody>
+      </p:sp>
+      <p:sp>
+        <p:nvSpPr>
+          <p:cNvPr id="354" name="" descr="{&quot;isTemplate&quot;:true,&quot;type&quot;:&quot;text&quot;}"/>
           <p:cNvSpPr txBox="1"/>
           <p:nvPr/>
         </p:nvSpPr>
@@ -16349,7 +16712,7 @@
       </p:sp>
       <p:sp>
         <p:nvSpPr>
-          <p:cNvPr id="345" name="" descr="{&quot;isTemplate&quot;:true,&quot;type&quot;:&quot;text&quot;}"/>
+          <p:cNvPr id="355" name="" descr="{&quot;isTemplate&quot;:true,&quot;type&quot;:&quot;text&quot;}"/>
           <p:cNvSpPr txBox="1"/>
           <p:nvPr/>
         </p:nvSpPr>
@@ -16394,7 +16757,7 @@
       </p:sp>
       <p:sp>
         <p:nvSpPr>
-          <p:cNvPr id="346" name=""/>
+          <p:cNvPr id="356" name=""/>
           <p:cNvSpPr/>
           <p:nvPr/>
         </p:nvSpPr>
@@ -16420,15 +16783,12 @@
         </p:spPr>
         <p:txBody>
           <a:bodyPr/>
-          <a:p>
-            <a:pPr/>
-            <a:endParaRPr/>
-          </a:p>
-        </p:txBody>
-      </p:sp>
-      <p:sp>
-        <p:nvSpPr>
-          <p:cNvPr id="347" name="" descr="{&quot;isTemplate&quot;:true,&quot;type&quot;:&quot;text&quot;}"/>
+          <a:p/>
+        </p:txBody>
+      </p:sp>
+      <p:sp>
+        <p:nvSpPr>
+          <p:cNvPr id="357" name="" descr="{&quot;isTemplate&quot;:true,&quot;type&quot;:&quot;text&quot;}"/>
           <p:cNvSpPr txBox="1"/>
           <p:nvPr/>
         </p:nvSpPr>
@@ -16463,7 +16823,7 @@
       </p:sp>
       <p:sp>
         <p:nvSpPr>
-          <p:cNvPr id="348" name="" descr="{&quot;isTemplate&quot;:true,&quot;type&quot;:&quot;text&quot;}"/>
+          <p:cNvPr id="358" name="" descr="{&quot;isTemplate&quot;:true,&quot;type&quot;:&quot;text&quot;}"/>
           <p:cNvSpPr txBox="1"/>
           <p:nvPr/>
         </p:nvSpPr>
@@ -16554,7 +16914,7 @@
       </p:sp>
       <p:sp>
         <p:nvSpPr>
-          <p:cNvPr id="349" name="" descr="{&quot;isTemplate&quot;:true,&quot;type&quot;:&quot;text&quot;}"/>
+          <p:cNvPr id="359" name="" descr="{&quot;isTemplate&quot;:true,&quot;type&quot;:&quot;text&quot;}"/>
           <p:cNvSpPr txBox="1"/>
           <p:nvPr/>
         </p:nvSpPr>
@@ -16649,7 +17009,7 @@
       </p:sp>
       <p:sp>
         <p:nvSpPr>
-          <p:cNvPr id="350" name="" descr="{&quot;isTemplate&quot;:true,&quot;type&quot;:&quot;text&quot;}"/>
+          <p:cNvPr id="360" name="" descr="{&quot;isTemplate&quot;:true,&quot;type&quot;:&quot;text&quot;}"/>
           <p:cNvSpPr txBox="1"/>
           <p:nvPr/>
         </p:nvSpPr>
@@ -16714,7 +17074,7 @@
       </p:sp>
       <p:sp>
         <p:nvSpPr>
-          <p:cNvPr id="351" name="" descr="{&quot;isTemplate&quot;:true,&quot;type&quot;:&quot;text&quot;}"/>
+          <p:cNvPr id="361" name="" descr="{&quot;isTemplate&quot;:true,&quot;type&quot;:&quot;text&quot;}"/>
           <p:cNvSpPr txBox="1"/>
           <p:nvPr/>
         </p:nvSpPr>
@@ -16757,7 +17117,7 @@
   <p:cSld>
     <p:spTree>
       <p:nvGrpSpPr>
-        <p:cNvPr id="352" name="" descr="&lt;Slide style={{ width: 1280, height: 720, background: '#F6F8FD', padding: '56px 72px', flexDirection: 'column' }}&gt;&#10;  &lt;Box style={{ height: 96, flexDirection: 'row', justifyContent: 'space-between', alignItems: 'flex-start' }}&gt;&#10;    &lt;Box style={{ flexDirection: 'column', gap: 8 }}&gt;&#10;      &lt;Text style={{ fontSize: 34, fontWeight: 'bold', color: '#0C1222' }}&gt;先算清代价，再谈智能&lt;/Text&gt;&#10;      &lt;Text style={{ fontSize: 15, color: '#5C6780' }}&gt;左边是它在这套 180 天数据里真找出来的，右边是按建议执行后的测算&lt;/Text&gt;&#10;    &lt;/Box&gt;&#10;    &lt;Box style={{ flexDirection: 'row', alignItems: 'center', gap: 6, padding: '5px 12px', background: '#EEF1FE', border: '1px solid #DDE2F5', borderRadius: 999 }}&gt;&#10;      &lt;Box style={{ width: 6, height: 6, borderRadius: 3, background: '#4C4DDC' }} /&gt;&#10;      &lt;Text style={{ fontSize: 12, color: '#4C4DDC', fontWeight: 'bold', letterSpacing: 1 }}&gt;AI 掌柜&lt;/Text&gt;&#10;    &lt;/Box&gt;&#10;  &lt;/Box&gt;&#10;  &lt;Box style={{ width: 72, height: 3, background: '#4C4DDC', borderRadius: 2, marginTop: 2, marginBottom: 12 }} /&gt;&#10;  &lt;Box style={{ flex: 1, paddingTop: 8 }}&gt;&#10;    &lt;Box style={{ flexDirection: 'row', gap: 24 }}&gt;&#10;      &lt;Box style={{ flex: 1.15, flexDirection: 'column' }}&gt;&#10;        &lt;Text style={{ fontSize: 13, color: '#5C6780', letterSpacing: 1 }}&gt;实测 · 系统自己发现的五件事&lt;/Text&gt;&#10;        &lt;Box style={{ marginTop: 14, flexDirection: 'column', gap: 0 }}&gt;&#10;          &lt;Box style={{ paddingTop: 12, paddingBottom: 12, borderTop: '1px solid #E3E8F5', flexDirection: 'row', alignItems: 'baseline' }}&gt;&#10;            &lt;Text style={{ fontSize: 26, fontWeight: 'bold', color: '#4C4DDC', width: 96 }}&gt;10.6%&lt;/Text&gt;&#10;            &lt;Text style={{ fontSize: 14, color: '#0C1222' }}&gt;近 7 天折扣率，比前 30 天的 8.4% 高 2.2 个点&lt;/Text&gt;&#10;          &lt;/Box&gt;&#10;          &lt;Box style={{ paddingTop: 12, paddingBottom: 12, borderTop: '1px solid #E3E8F5', flexDirection: 'row', alignItems: 'baseline' }}&gt;&#10;            &lt;Text style={{ fontSize: 26, fontWeight: 'bold', color: '#4C4DDC', width: 96 }}&gt;1,476&lt;/Text&gt;&#10;            &lt;Text style={{ fontSize: 14, color: '#0C1222' }}&gt;元 · 按原折扣水平本可少让的金额&lt;/Text&gt;&#10;          &lt;/Box&gt;&#10;          &lt;Box style={{ paddingTop: 12, paddingBottom: 12, borderTop: '1px solid #E3E8F5', flexDirection: 'row', alignItems: 'baseline' }}&gt;&#10;            &lt;Text style={{ fontSize: 26, fontWeight: 'bold', color: '#4C4DDC', width: 96 }}&gt;20 道&lt;/Text&gt;&#10;            &lt;Text style={{ fontSize: 14, color: '#0C1222' }}&gt;菜连续 3 天 0 销量，占在售 9.7%&lt;/Text&gt;&#10;          &lt;/Box&gt;&#10;          &lt;Box style={{ paddingTop: 12, paddingBottom: 12, borderTop: '1px solid #E3E8F5', flexDirection: 'row', alignItems: 'baseline' }}&gt;&#10;            &lt;Text style={{ fontSize: 26, fontWeight: 'bold', color: '#4C4DDC', width: 96 }}&gt;1 种&lt;/Text&gt;&#10;            &lt;Text style={{ fontSize: 14, color: '#0C1222' }}&gt;食材可支撑不足 2 天（基围虾只剩 1.5 天）&lt;/Text&gt;&#10;          &lt;/Box&gt;&#10;          &lt;Box style={{ paddingTop: 12, paddingBottom: 12, borderTop: '1px solid #E3E8F5', borderBottom: '1px solid #E3E8F5', flexDirection: 'row', alignItems: 'baseline' }}&gt;&#10;            &lt;Text style={{ fontSize: 26, fontWeight: 'bold', color: '#4C4DDC', width: 96 }}&gt;57.8%&lt;/Text&gt;&#10;            &lt;Text style={{ fontSize: 14, color: '#0C1222' }}&gt;近 30 天毛利率，比目标低 2.2 个点&lt;/Text&gt;&#10;          &lt;/Box&gt;&#10;        &lt;/Box&gt;&#10;      &lt;/Box&gt;&#10;      &lt;Box style={{ flex: 1, background: '#EEF1FE', border: '1px solid #C9CDF6', borderRadius: 14, padding: 30, flexDirection: 'column', gap: 18, justifyContent: 'flex-start' }}&gt;&#10;        &lt;Box style={{ flexDirection: 'column', gap: 6 }}&gt;&#10;          &lt;Text style={{ fontSize: 13, color: '#4C4DDC', letterSpacing: 1 }}&gt;测算 · 补齐这 2.2 个点&lt;/Text&gt;&#10;          &lt;Text style={{ fontSize: 56, fontWeight: 'bold', color: '#0C1222', letterSpacing: -1 }}&gt;+9.0&lt;span style={{ fontSize: 22 }}&gt; 万/年&lt;/span&gt;&lt;/Text&gt;&#10;          &lt;Text style={{ fontSize: 13, color: '#5C6780' }}&gt;近 30 天营收 33.1 万 × 2.2pt × 12 个月&lt;/Text&gt;&#10;        &lt;/Box&gt;&#10;        &lt;Box style={{ flexDirection: 'column', gap: 8, marginTop: 6, paddingTop: 16, borderTop: '1px solid #3A3F63' }}&gt;&#10;          &lt;Text style={{ fontSize: 13, color: '#0C1222' }}&gt;怎么补：&lt;/Text&gt;&#10;          &lt;Text style={{ fontSize: 13, color: '#5C6780', lineHeight: 1.8 }}&gt;① 3 道瘦狗菜调价 5%~15%&lt;br /&gt;② 20 道滞销菜组套餐或下架&lt;br /&gt;③ 折扣收回 2 个点&lt;/Text&gt;&#10;        &lt;/Box&gt;&#10;        &lt;Text style={{ fontSize: 11, color: '#6B7490', lineHeight: 1.6, marginTop: 4 }}&gt;&#10;          左列全部由 SQL 从 180 天数据算出，脚本可复现；右侧为按当前规模的线性测算，不是承诺值。&#10;        &lt;/Text&gt;&#10;      &lt;/Box&gt;&#10;    &lt;/Box&gt;&#10;  &lt;/Box&gt;&#10;  &lt;Box style={{ height: 36, flexDirection: 'row', justifyContent: 'space-between', alignItems: 'flex-end' }}&gt;&#10;    &lt;Text style={{ fontSize: 12, color: '#8A93A8' }}&gt;2026 武汉 1024 · 产业应用赛道&lt;/Text&gt;&#10;    &lt;Text style={{ fontSize: 12, color: '#8A93A8' }}&gt;09 / 12&lt;/Text&gt;&#10;  &lt;/Box&gt;&#10;&lt;/Slide&gt;"/>
+        <p:cNvPr id="362" name="" descr="&lt;Slide style={{ width: 1280, height: 720, background: '#F6F8FD', padding: '56px 72px', flexDirection: 'column' }}&gt;&#10;  &lt;Box style={{ height: 96, flexDirection: 'row', justifyContent: 'space-between', alignItems: 'flex-start' }}&gt;&#10;    &lt;Box style={{ flexDirection: 'column', gap: 8 }}&gt;&#10;      &lt;Text style={{ fontSize: 34, fontWeight: 'bold', color: '#0C1222' }}&gt;先算清代价，再谈智能&lt;/Text&gt;&#10;      &lt;Text style={{ fontSize: 15, color: '#5C6780' }}&gt;左边是它在这套 180 天数据里真找出来的，右边是按建议执行后的测算&lt;/Text&gt;&#10;    &lt;/Box&gt;&#10;    &lt;Box style={{ flexDirection: 'row', alignItems: 'center', gap: 6, padding: '5px 12px', background: '#EEF1FE', border: '1px solid #DDE2F5', borderRadius: 999 }}&gt;&#10;      &lt;Box style={{ width: 6, height: 6, borderRadius: 3, background: '#4C4DDC' }} /&gt;&#10;      &lt;Text style={{ fontSize: 12, color: '#4C4DDC', fontWeight: 'bold', letterSpacing: 1 }}&gt;AI 掌柜&lt;/Text&gt;&#10;    &lt;/Box&gt;&#10;  &lt;/Box&gt;&#10;  &lt;Box style={{ width: 72, height: 3, background: '#4C4DDC', borderRadius: 2, marginTop: 2, marginBottom: 12 }} /&gt;&#10;  &lt;Box style={{ flex: 1, paddingTop: 8 }}&gt;&#10;    &lt;Box style={{ flexDirection: 'row', gap: 24 }}&gt;&#10;      &lt;Box style={{ flex: 1.15, flexDirection: 'column' }}&gt;&#10;        &lt;Text style={{ fontSize: 13, color: '#5C6780', letterSpacing: 1 }}&gt;实测 · 系统自己发现的五件事&lt;/Text&gt;&#10;        &lt;Box style={{ marginTop: 14, flexDirection: 'column', gap: 0 }}&gt;&#10;          &lt;Box style={{ paddingTop: 12, paddingBottom: 12, borderTop: '1px solid #E3E8F5', flexDirection: 'row', alignItems: 'baseline' }}&gt;&#10;            &lt;Text style={{ fontSize: 26, fontWeight: 'bold', color: '#4C4DDC', width: 96 }}&gt;10.6%&lt;/Text&gt;&#10;            &lt;Text style={{ fontSize: 14, color: '#0C1222' }}&gt;近 7 天折扣率，比前 30 天的 8.4% 高 2.2 个点&lt;/Text&gt;&#10;          &lt;/Box&gt;&#10;          &lt;Box style={{ paddingTop: 12, paddingBottom: 12, borderTop: '1px solid #E3E8F5', flexDirection: 'row', alignItems: 'baseline' }}&gt;&#10;            &lt;Text style={{ fontSize: 26, fontWeight: 'bold', color: '#4C4DDC', width: 96 }}&gt;1,476&lt;/Text&gt;&#10;            &lt;Text style={{ fontSize: 14, color: '#0C1222' }}&gt;元 · 按原折扣水平本可少让的金额&lt;/Text&gt;&#10;          &lt;/Box&gt;&#10;          &lt;Box style={{ paddingTop: 12, paddingBottom: 12, borderTop: '1px solid #E3E8F5', flexDirection: 'row', alignItems: 'baseline' }}&gt;&#10;            &lt;Text style={{ fontSize: 26, fontWeight: 'bold', color: '#4C4DDC', width: 96 }}&gt;20 道&lt;/Text&gt;&#10;            &lt;Text style={{ fontSize: 14, color: '#0C1222' }}&gt;菜连续 3 天 0 销量，占在售 9.7%&lt;/Text&gt;&#10;          &lt;/Box&gt;&#10;          &lt;Box style={{ paddingTop: 12, paddingBottom: 12, borderTop: '1px solid #E3E8F5', flexDirection: 'row', alignItems: 'baseline' }}&gt;&#10;            &lt;Text style={{ fontSize: 26, fontWeight: 'bold', color: '#4C4DDC', width: 96 }}&gt;1 种&lt;/Text&gt;&#10;            &lt;Text style={{ fontSize: 14, color: '#0C1222' }}&gt;食材可支撑不足 2 天（基围虾只剩 1.5 天）&lt;/Text&gt;&#10;          &lt;/Box&gt;&#10;          &lt;Box style={{ paddingTop: 12, paddingBottom: 12, borderTop: '1px solid #E3E8F5', borderBottom: '1px solid #E3E8F5', flexDirection: 'row', alignItems: 'baseline' }}&gt;&#10;            &lt;Text style={{ fontSize: 26, fontWeight: 'bold', color: '#4C4DDC', width: 96 }}&gt;57.8%&lt;/Text&gt;&#10;            &lt;Text style={{ fontSize: 14, color: '#0C1222' }}&gt;近 30 天毛利率，比目标低 2.2 个点&lt;/Text&gt;&#10;          &lt;/Box&gt;&#10;        &lt;/Box&gt;&#10;      &lt;/Box&gt;&#10;      &lt;Box style={{ flex: 1, background: '#EEF1FE', border: '1px solid #C9CDF6', borderRadius: 14, padding: 30, flexDirection: 'column', gap: 18, justifyContent: 'flex-start' }}&gt;&#10;        &lt;Box style={{ flexDirection: 'column', gap: 6 }}&gt;&#10;          &lt;Text style={{ fontSize: 13, color: '#4C4DDC', letterSpacing: 1 }}&gt;测算 · 补齐这 2.2 个点&lt;/Text&gt;&#10;          &lt;Text style={{ fontSize: 56, fontWeight: 'bold', color: '#0C1222', letterSpacing: -1 }}&gt;+9.0&lt;span style={{ fontSize: 22 }}&gt; 万/年&lt;/span&gt;&lt;/Text&gt;&#10;          &lt;Text style={{ fontSize: 13, color: '#5C6780' }}&gt;近 30 天营收 33.1 万 × 2.2pt × 12 个月&lt;/Text&gt;&#10;        &lt;/Box&gt;&#10;        &lt;Box style={{ flexDirection: 'column', gap: 8, marginTop: 6, paddingTop: 16, borderTop: '1px solid #3A3F63' }}&gt;&#10;          &lt;Text style={{ fontSize: 13, color: '#0C1222' }}&gt;怎么补：&lt;/Text&gt;&#10;          &lt;Text style={{ fontSize: 13, color: '#5C6780', lineHeight: 1.8 }}&gt;① 3 道瘦狗菜调价 5%~15%&lt;br /&gt;② 20 道滞销菜组套餐或下架&lt;br /&gt;③ 折扣收回 2 个点&lt;/Text&gt;&#10;        &lt;/Box&gt;&#10;        &lt;Text style={{ fontSize: 11, color: '#6B7490', lineHeight: 1.6, marginTop: 4 }}&gt;&#10;          左列全部由 SQL 从 180 天数据算出，脚本可复现；右侧为按当前规模的线性测算，不是承诺值。&#10;        &lt;/Text&gt;&#10;      &lt;/Box&gt;&#10;    &lt;/Box&gt;&#10;  &lt;/Box&gt;&#10;  &lt;Box style={{ height: 36, flexDirection: 'row', justifyContent: 'space-between', alignItems: 'flex-end' }}&gt;&#10;    &lt;Text style={{ fontSize: 12, color: '#8A93A8' }}&gt;2026 武汉 1024 · 产业应用赛道&lt;/Text&gt;&#10;    &lt;Text style={{ fontSize: 12, color: '#8A93A8' }}&gt;09 / 12&lt;/Text&gt;&#10;  &lt;/Box&gt;&#10;&lt;/Slide&gt;"/>
         <p:cNvGrpSpPr/>
         <p:nvPr/>
       </p:nvGrpSpPr>
@@ -16771,7 +17131,7 @@
       </p:grpSpPr>
       <p:sp>
         <p:nvSpPr>
-          <p:cNvPr id="353" name=""/>
+          <p:cNvPr id="363" name=""/>
           <p:cNvSpPr/>
           <p:nvPr/>
         </p:nvSpPr>
@@ -16795,7 +17155,7 @@
       </p:sp>
       <p:sp>
         <p:nvSpPr>
-          <p:cNvPr id="354" name="" descr="{&quot;isTemplate&quot;:true,&quot;type&quot;:&quot;text&quot;}"/>
+          <p:cNvPr id="364" name="" descr="{&quot;isTemplate&quot;:true,&quot;type&quot;:&quot;text&quot;}"/>
           <p:cNvSpPr txBox="1"/>
           <p:nvPr/>
         </p:nvSpPr>
@@ -16830,7 +17190,7 @@
       </p:sp>
       <p:sp>
         <p:nvSpPr>
-          <p:cNvPr id="355" name="" descr="{&quot;isTemplate&quot;:true,&quot;type&quot;:&quot;text&quot;}"/>
+          <p:cNvPr id="365" name="" descr="{&quot;isTemplate&quot;:true,&quot;type&quot;:&quot;text&quot;}"/>
           <p:cNvSpPr txBox="1"/>
           <p:nvPr/>
         </p:nvSpPr>
@@ -16885,7 +17245,7 @@
       </p:sp>
       <p:sp>
         <p:nvSpPr>
-          <p:cNvPr id="356" name=""/>
+          <p:cNvPr id="366" name=""/>
           <p:cNvSpPr/>
           <p:nvPr/>
         </p:nvSpPr>
@@ -16916,7 +17276,7 @@
       </p:sp>
       <p:sp>
         <p:nvSpPr>
-          <p:cNvPr id="357" name=""/>
+          <p:cNvPr id="367" name=""/>
           <p:cNvSpPr/>
           <p:nvPr/>
         </p:nvSpPr>
@@ -16942,7 +17302,7 @@
       </p:sp>
       <p:sp>
         <p:nvSpPr>
-          <p:cNvPr id="358" name="" descr="{&quot;isTemplate&quot;:true,&quot;type&quot;:&quot;text&quot;}"/>
+          <p:cNvPr id="368" name="" descr="{&quot;isTemplate&quot;:true,&quot;type&quot;:&quot;text&quot;}"/>
           <p:cNvSpPr txBox="1"/>
           <p:nvPr/>
         </p:nvSpPr>
@@ -16987,7 +17347,7 @@
       </p:sp>
       <p:sp>
         <p:nvSpPr>
-          <p:cNvPr id="359" name=""/>
+          <p:cNvPr id="369" name=""/>
           <p:cNvSpPr/>
           <p:nvPr/>
         </p:nvSpPr>
@@ -17013,7 +17373,7 @@
       </p:sp>
       <p:sp>
         <p:nvSpPr>
-          <p:cNvPr id="360" name="" descr="{&quot;isTemplate&quot;:true,&quot;type&quot;:&quot;text&quot;}"/>
+          <p:cNvPr id="370" name="" descr="{&quot;isTemplate&quot;:true,&quot;type&quot;:&quot;text&quot;}"/>
           <p:cNvSpPr txBox="1"/>
           <p:nvPr/>
         </p:nvSpPr>
@@ -17068,7 +17428,7 @@
       </p:sp>
       <p:sp>
         <p:nvSpPr>
-          <p:cNvPr id="361" name=""/>
+          <p:cNvPr id="371" name=""/>
           <p:cNvSpPr/>
           <p:nvPr/>
         </p:nvSpPr>
@@ -17108,7 +17468,7 @@
       </p:sp>
       <p:sp>
         <p:nvSpPr>
-          <p:cNvPr id="362" name="" descr="{&quot;isTemplate&quot;:true,&quot;type&quot;:&quot;text&quot;}"/>
+          <p:cNvPr id="372" name="" descr="{&quot;isTemplate&quot;:true,&quot;type&quot;:&quot;text&quot;}"/>
           <p:cNvSpPr txBox="1"/>
           <p:nvPr/>
         </p:nvSpPr>
@@ -17143,7 +17503,7 @@
       </p:sp>
       <p:sp>
         <p:nvSpPr>
-          <p:cNvPr id="363" name="" descr="{&quot;isTemplate&quot;:true,&quot;type&quot;:&quot;text&quot;}"/>
+          <p:cNvPr id="373" name="" descr="{&quot;isTemplate&quot;:true,&quot;type&quot;:&quot;text&quot;}"/>
           <p:cNvSpPr txBox="1"/>
           <p:nvPr/>
         </p:nvSpPr>
@@ -17258,7 +17618,7 @@
       </p:sp>
       <p:sp>
         <p:nvSpPr>
-          <p:cNvPr id="364" name=""/>
+          <p:cNvPr id="374" name=""/>
           <p:cNvSpPr/>
           <p:nvPr/>
         </p:nvSpPr>
@@ -17298,7 +17658,7 @@
       </p:sp>
       <p:sp>
         <p:nvSpPr>
-          <p:cNvPr id="365" name="" descr="{&quot;isTemplate&quot;:true,&quot;type&quot;:&quot;text&quot;}"/>
+          <p:cNvPr id="375" name="" descr="{&quot;isTemplate&quot;:true,&quot;type&quot;:&quot;text&quot;}"/>
           <p:cNvSpPr txBox="1"/>
           <p:nvPr/>
         </p:nvSpPr>
@@ -17333,7 +17693,7 @@
       </p:sp>
       <p:sp>
         <p:nvSpPr>
-          <p:cNvPr id="366" name="" descr="{&quot;isTemplate&quot;:true,&quot;type&quot;:&quot;text&quot;}"/>
+          <p:cNvPr id="376" name="" descr="{&quot;isTemplate&quot;:true,&quot;type&quot;:&quot;text&quot;}"/>
           <p:cNvSpPr txBox="1"/>
           <p:nvPr/>
         </p:nvSpPr>
@@ -17388,7 +17748,7 @@
       </p:sp>
       <p:sp>
         <p:nvSpPr>
-          <p:cNvPr id="367" name=""/>
+          <p:cNvPr id="377" name=""/>
           <p:cNvSpPr/>
           <p:nvPr/>
         </p:nvSpPr>
@@ -17428,7 +17788,7 @@
       </p:sp>
       <p:sp>
         <p:nvSpPr>
-          <p:cNvPr id="368" name="" descr="{&quot;isTemplate&quot;:true,&quot;type&quot;:&quot;text&quot;}"/>
+          <p:cNvPr id="378" name="" descr="{&quot;isTemplate&quot;:true,&quot;type&quot;:&quot;text&quot;}"/>
           <p:cNvSpPr txBox="1"/>
           <p:nvPr/>
         </p:nvSpPr>
@@ -17473,7 +17833,7 @@
       </p:sp>
       <p:sp>
         <p:nvSpPr>
-          <p:cNvPr id="369" name="" descr="{&quot;isTemplate&quot;:true,&quot;type&quot;:&quot;text&quot;}"/>
+          <p:cNvPr id="379" name="" descr="{&quot;isTemplate&quot;:true,&quot;type&quot;:&quot;text&quot;}"/>
           <p:cNvSpPr txBox="1"/>
           <p:nvPr/>
         </p:nvSpPr>
@@ -17558,7 +17918,7 @@
       </p:sp>
       <p:sp>
         <p:nvSpPr>
-          <p:cNvPr id="370" name=""/>
+          <p:cNvPr id="380" name=""/>
           <p:cNvSpPr/>
           <p:nvPr/>
         </p:nvSpPr>
@@ -17598,7 +17958,7 @@
       </p:sp>
       <p:sp>
         <p:nvSpPr>
-          <p:cNvPr id="371" name="" descr="{&quot;isTemplate&quot;:true,&quot;type&quot;:&quot;text&quot;}"/>
+          <p:cNvPr id="381" name="" descr="{&quot;isTemplate&quot;:true,&quot;type&quot;:&quot;text&quot;}"/>
           <p:cNvSpPr txBox="1"/>
           <p:nvPr/>
         </p:nvSpPr>
@@ -17643,7 +18003,7 @@
       </p:sp>
       <p:sp>
         <p:nvSpPr>
-          <p:cNvPr id="372" name="" descr="{&quot;isTemplate&quot;:true,&quot;type&quot;:&quot;text&quot;}"/>
+          <p:cNvPr id="382" name="" descr="{&quot;isTemplate&quot;:true,&quot;type&quot;:&quot;text&quot;}"/>
           <p:cNvSpPr txBox="1"/>
           <p:nvPr/>
         </p:nvSpPr>
@@ -17718,7 +18078,7 @@
       </p:sp>
       <p:sp>
         <p:nvSpPr>
-          <p:cNvPr id="373" name=""/>
+          <p:cNvPr id="383" name=""/>
           <p:cNvSpPr/>
           <p:nvPr/>
         </p:nvSpPr>
@@ -17758,7 +18118,7 @@
       </p:sp>
       <p:sp>
         <p:nvSpPr>
-          <p:cNvPr id="374" name=""/>
+          <p:cNvPr id="384" name=""/>
           <p:cNvSpPr/>
           <p:nvPr/>
         </p:nvSpPr>
@@ -17798,7 +18158,7 @@
       </p:sp>
       <p:sp>
         <p:nvSpPr>
-          <p:cNvPr id="375" name="" descr="{&quot;isTemplate&quot;:true,&quot;type&quot;:&quot;text&quot;}"/>
+          <p:cNvPr id="385" name="" descr="{&quot;isTemplate&quot;:true,&quot;type&quot;:&quot;text&quot;}"/>
           <p:cNvSpPr txBox="1"/>
           <p:nvPr/>
         </p:nvSpPr>
@@ -17833,7 +18193,7 @@
       </p:sp>
       <p:sp>
         <p:nvSpPr>
-          <p:cNvPr id="376" name="" descr="{&quot;isTemplate&quot;:true,&quot;type&quot;:&quot;text&quot;}"/>
+          <p:cNvPr id="386" name="" descr="{&quot;isTemplate&quot;:true,&quot;type&quot;:&quot;text&quot;}"/>
           <p:cNvSpPr txBox="1"/>
           <p:nvPr/>
         </p:nvSpPr>
@@ -17908,7 +18268,7 @@
       </p:sp>
       <p:sp>
         <p:nvSpPr>
-          <p:cNvPr id="377" name=""/>
+          <p:cNvPr id="387" name=""/>
           <p:cNvSpPr/>
           <p:nvPr/>
         </p:nvSpPr>
@@ -17939,7 +18299,7 @@
       </p:sp>
       <p:sp>
         <p:nvSpPr>
-          <p:cNvPr id="378" name="" descr="{&quot;isTemplate&quot;:true,&quot;type&quot;:&quot;text&quot;}"/>
+          <p:cNvPr id="388" name="" descr="{&quot;isTemplate&quot;:true,&quot;type&quot;:&quot;text&quot;}"/>
           <p:cNvSpPr txBox="1"/>
           <p:nvPr/>
         </p:nvSpPr>
@@ -18014,7 +18374,7 @@
       </p:sp>
       <p:sp>
         <p:nvSpPr>
-          <p:cNvPr id="379" name="" descr="{&quot;isTemplate&quot;:true,&quot;type&quot;:&quot;text&quot;}"/>
+          <p:cNvPr id="389" name="" descr="{&quot;isTemplate&quot;:true,&quot;type&quot;:&quot;text&quot;}"/>
           <p:cNvSpPr txBox="1"/>
           <p:nvPr/>
         </p:nvSpPr>
@@ -18089,7 +18449,7 @@
       </p:sp>
       <p:sp>
         <p:nvSpPr>
-          <p:cNvPr id="380" name="" descr="{&quot;isTemplate&quot;:true,&quot;type&quot;:&quot;text&quot;}"/>
+          <p:cNvPr id="390" name="" descr="{&quot;isTemplate&quot;:true,&quot;type&quot;:&quot;text&quot;}"/>
           <p:cNvSpPr txBox="1"/>
           <p:nvPr/>
         </p:nvSpPr>
@@ -18184,7 +18544,7 @@
       </p:sp>
       <p:sp>
         <p:nvSpPr>
-          <p:cNvPr id="381" name=""/>
+          <p:cNvPr id="391" name=""/>
           <p:cNvSpPr/>
           <p:nvPr/>
         </p:nvSpPr>
@@ -18224,7 +18584,7 @@
       </p:sp>
       <p:sp>
         <p:nvSpPr>
-          <p:cNvPr id="382" name="" descr="{&quot;isTemplate&quot;:true,&quot;type&quot;:&quot;text&quot;}"/>
+          <p:cNvPr id="392" name="" descr="{&quot;isTemplate&quot;:true,&quot;type&quot;:&quot;text&quot;}"/>
           <p:cNvSpPr txBox="1"/>
           <p:nvPr/>
         </p:nvSpPr>
@@ -18259,7 +18619,7 @@
       </p:sp>
       <p:sp>
         <p:nvSpPr>
-          <p:cNvPr id="383" name="" descr="{&quot;isTemplate&quot;:true,&quot;type&quot;:&quot;text&quot;}"/>
+          <p:cNvPr id="393" name="" descr="{&quot;isTemplate&quot;:true,&quot;type&quot;:&quot;text&quot;}"/>
           <p:cNvSpPr txBox="1"/>
           <p:nvPr/>
         </p:nvSpPr>
@@ -18390,7 +18750,7 @@
       </p:sp>
       <p:sp>
         <p:nvSpPr>
-          <p:cNvPr id="384" name="" descr="{&quot;isTemplate&quot;:true,&quot;type&quot;:&quot;text&quot;}"/>
+          <p:cNvPr id="394" name="" descr="{&quot;isTemplate&quot;:true,&quot;type&quot;:&quot;text&quot;}"/>
           <p:cNvSpPr txBox="1"/>
           <p:nvPr/>
         </p:nvSpPr>
@@ -18467,7 +18827,7 @@
       </p:sp>
       <p:sp>
         <p:nvSpPr>
-          <p:cNvPr id="385" name="" descr="{&quot;isTemplate&quot;:true,&quot;type&quot;:&quot;text&quot;}"/>
+          <p:cNvPr id="395" name="" descr="{&quot;isTemplate&quot;:true,&quot;type&quot;:&quot;text&quot;}"/>
           <p:cNvSpPr txBox="1"/>
           <p:nvPr/>
         </p:nvSpPr>
@@ -18532,7 +18892,7 @@
       </p:sp>
       <p:sp>
         <p:nvSpPr>
-          <p:cNvPr id="386" name="" descr="{&quot;isTemplate&quot;:true,&quot;type&quot;:&quot;text&quot;}"/>
+          <p:cNvPr id="396" name="" descr="{&quot;isTemplate&quot;:true,&quot;type&quot;:&quot;text&quot;}"/>
           <p:cNvSpPr txBox="1"/>
           <p:nvPr/>
         </p:nvSpPr>

--- a/docs/AI掌柜-路演PPT/AI掌柜-路演PPT.pptx
+++ b/docs/AI掌柜-路演PPT/AI掌柜-路演PPT.pptx
@@ -4478,7 +4478,7 @@
   <p:cSld>
     <p:spTree>
       <p:nvGrpSpPr>
-        <p:cNvPr id="90" name=""/>
+        <p:cNvPr id="90" name="" descr="&lt;Slide style={{ width: 1280, height: 720, background: '#F6F8FD', padding: '56px 72px', flexDirection: 'column' }}&gt;&#13;&#10;  &lt;Box style={{ height: 96, flexDirection: 'row', justifyContent: 'space-between', alignItems: 'flex-start' }}&gt;&#13;&#10;    &lt;Box style={{ flexDirection: 'column', gap: 8 }}&gt;&#13;&#10;      &lt;Text style={{ fontSize: 34, fontWeight: 'bold', color: '#0C1222' }}&gt;附录 A · 界面实拍（无美化）&lt;/Text&gt;&#13;&#10;      &lt;Text style={{ fontSize: 15, color: '#5C6780' }}&gt;左边是老板每天看到的，右边是模型与数据的状态页&lt;/Text&gt;&#13;&#10;    &lt;/Box&gt;&#13;&#10;    &lt;Box style={{ flexDirection: 'row', alignItems: 'center', gap: 6, padding: '5px 12px', background: '#EEF1FE', border: '1px solid #DDE2F5', borderRadius: 999 }}&gt;&#13;&#10;      &lt;Box style={{ width: 6, height: 6, borderRadius: 3, background: '#4C4DDC' }} /&gt;&#13;&#10;      &lt;Text style={{ fontSize: 12, color: '#4C4DDC', fontWeight: 'bold', letterSpacing: 1 }}&gt;AI 掌柜&lt;/Text&gt;&#13;&#10;    &lt;/Box&gt;&#13;&#10;  &lt;/Box&gt;&#13;&#10;  &lt;Box style={{ width: 72, height: 3, background: '#4C4DDC', borderRadius: 2, marginTop: 2, marginBottom: 12 }} /&gt;&#13;&#10;&#13;&#10;  &lt;Box style={{ flex: 1, flexDirection: 'row', gap: 22 }}&gt;&#13;&#10;    &lt;Box style={{ flex: 1.62, background: '#FFFFFF', border: '1px solid #E3E8F5', borderRadius: 12, padding: 10, overflow: 'hidden' }}&gt;&#13;&#10;      &lt;Image src=&quot;assets/ui_dashboard.png&quot; style={{ width: '100%', height: '100%', objectFit: 'cover', objectPosition: 'left top', borderRadius: 8 }} /&gt;&#13;&#10;    &lt;/Box&gt;&#13;&#10;&#13;&#10;    &lt;Box style={{ flex: 1, flexDirection: 'column', gap: 12 }}&gt;&#13;&#10;      &lt;Box style={{ background: '#FFFFFF', border: '1px solid #E3E8F5', borderRadius: 12, padding: 8, height: 188, overflow: 'hidden' }}&gt;&#13;&#10;        &lt;Image src=&quot;assets/ui_settings.png&quot; style={{ width: '100%', height: '100%', objectFit: 'contain', borderRadius: 6 }} /&gt;&#13;&#10;      &lt;/Box&gt;&#13;&#10;      &lt;Text style={{ fontSize: 12, color: '#5C6780' }}&gt;设置页实拍：本地 3B 已连接（2.0GB）＋ 云端 Key 可用&lt;/Text&gt;&#13;&#10;&#13;&#10;      &lt;Box style={{ flexDirection: 'column', gap: 5, marginTop: 2 }}&gt;&#13;&#10;        &lt;Text style={{ fontSize: 13, color: '#4C4DDC', letterSpacing: 1 }}&gt;01 首屏只有三件事&lt;/Text&gt;&#13;&#10;        &lt;Text style={{ fontSize: 13, color: '#5C6780', lineHeight: 1.6 }}&gt;按影响金额排序，不是按模块罗列。&lt;/Text&gt;&#13;&#10;      &lt;/Box&gt;&#13;&#10;      &lt;Box style={{ flexDirection: 'column', gap: 5 }}&gt;&#13;&#10;        &lt;Text style={{ fontSize: 13, color: '#4C4DDC', letterSpacing: 1 }}&gt;02 每条都带证据&lt;/Text&gt;&#13;&#10;        &lt;Text style={{ fontSize: 13, color: '#5C6780', lineHeight: 1.6 }}&gt;灰底那行是指标、当前值、基线、阈值。&lt;/Text&gt;&#13;&#10;      &lt;/Box&gt;&#13;&#10;      &lt;Box style={{ flexDirection: 'column', gap: 5 }}&gt;&#13;&#10;        &lt;Text style={{ fontSize: 13, color: '#4C4DDC', letterSpacing: 1 }}&gt;03 按钮就是动作&lt;/Text&gt;&#13;&#10;        &lt;Text style={{ fontSize: 13, color: '#5C6780', lineHeight: 1.6 }}&gt;生成采购单、执行调价都是当场改数据。&lt;/Text&gt;&#13;&#10;      &lt;/Box&gt;&#13;&#10;    &lt;/Box&gt;&#13;&#10;  &lt;/Box&gt;&#13;&#10;&#13;&#10;  &lt;Box style={{ height: 36, flexDirection: 'row', justifyContent: 'space-between', alignItems: 'flex-end' }}&gt;&#13;&#10;    &lt;Text style={{ fontSize: 12, color: '#8A93A8' }}&gt;演示数据：180 天 / 6,808 单（seed_demo.py 生成）&lt;/Text&gt;&#13;&#10;    &lt;Text style={{ fontSize: 12, color: '#8A93A8' }}&gt;附录 A&lt;/Text&gt;&#13;&#10;  &lt;/Box&gt;&#13;&#10;&lt;/Slide&gt;&#13;&#10;"/>
         <p:cNvGrpSpPr/>
         <p:nvPr/>
       </p:nvGrpSpPr>
@@ -4511,10 +4511,7 @@
         </p:spPr>
         <p:txBody>
           <a:bodyPr/>
-          <a:p>
-            <a:pPr/>
-            <a:endParaRPr/>
-          </a:p>
+          <a:p/>
         </p:txBody>
       </p:sp>
       <p:sp>
@@ -4601,27 +4598,7 @@
                 <a:latin typeface="Microsoft YaHei"/>
                 <a:ea typeface="Microsoft YaHei"/>
               </a:rPr>
-              <a:t>这是</a:t>
-            </a:r>
-            <a:r>
-              <a:rPr lang="en-US" sz="1125">
-                <a:solidFill>
-                  <a:srgbClr val="5C6780"/>
-                </a:solidFill>
-                <a:latin typeface="Microsoft YaHei"/>
-                <a:ea typeface="Microsoft YaHei"/>
-              </a:rPr>
-              <a:t xml:space="preserve"> 1920 </a:t>
-            </a:r>
-            <a:r>
-              <a:rPr lang="zh-CN" sz="1125">
-                <a:solidFill>
-                  <a:srgbClr val="5C6780"/>
-                </a:solidFill>
-                <a:latin typeface="Microsoft YaHei"/>
-                <a:ea typeface="Microsoft YaHei"/>
-              </a:rPr>
-              <a:t>宽屏下直接截的图，不是设计稿</a:t>
+              <a:t>左边是老板每天看到的，右边是模型与数据的状态页</a:t>
             </a:r>
             <a:endParaRPr/>
           </a:p>
@@ -4655,10 +4632,7 @@
         </p:spPr>
         <p:txBody>
           <a:bodyPr/>
-          <a:p>
-            <a:pPr/>
-            <a:endParaRPr/>
-          </a:p>
+          <a:p/>
         </p:txBody>
       </p:sp>
       <p:sp>
@@ -4684,10 +4658,7 @@
         </p:spPr>
         <p:txBody>
           <a:bodyPr/>
-          <a:p>
-            <a:pPr/>
-            <a:endParaRPr/>
-          </a:p>
+          <a:p/>
         </p:txBody>
       </p:sp>
       <p:sp>
@@ -4743,12 +4714,38 @@
         </p:nvSpPr>
         <p:spPr>
           <a:xfrm rot="0" flipH="0" flipV="0">
-            <a:off x="685800" y="1524000"/>
-            <a:ext cx="6724650" cy="4457700"/>
+            <a:off x="685800" y="1466850"/>
+            <a:ext cx="685800" cy="28575"/>
           </a:xfrm>
           <a:prstGeom prst="roundRect">
             <a:avLst>
-              <a:gd name="adj" fmla="val 2564"/>
+              <a:gd name="adj" fmla="val 66667"/>
+            </a:avLst>
+          </a:prstGeom>
+          <a:solidFill>
+            <a:srgbClr val="4C4DDC"/>
+          </a:solidFill>
+          <a:ln/>
+        </p:spPr>
+        <p:txBody>
+          <a:bodyPr/>
+          <a:p/>
+        </p:txBody>
+      </p:sp>
+      <p:sp>
+        <p:nvSpPr>
+          <p:cNvPr id="98" name=""/>
+          <p:cNvSpPr/>
+          <p:nvPr/>
+        </p:nvSpPr>
+        <p:spPr>
+          <a:xfrm rot="0" flipH="0" flipV="0">
+            <a:off x="685800" y="1609725"/>
+            <a:ext cx="6562725" cy="4371975"/>
+          </a:xfrm>
+          <a:prstGeom prst="roundRect">
+            <a:avLst>
+              <a:gd name="adj" fmla="val 2614"/>
             </a:avLst>
           </a:prstGeom>
           <a:solidFill>
@@ -4763,15 +4760,12 @@
         </p:spPr>
         <p:txBody>
           <a:bodyPr/>
-          <a:p>
-            <a:pPr/>
-            <a:endParaRPr/>
-          </a:p>
+          <a:p/>
         </p:txBody>
       </p:sp>
       <p:pic>
         <p:nvPicPr>
-          <p:cNvPr id="98" name=""/>
+          <p:cNvPr id="99" name=""/>
           <p:cNvPicPr>
             <a:picLocks noChangeAspect="1"/>
           </p:cNvPicPr>
@@ -4779,19 +4773,19 @@
         </p:nvPicPr>
         <p:blipFill>
           <a:blip r:embed="rId1"/>
-          <a:srcRect l="0" t="2979" r="0" b="2979"/>
+          <a:srcRect l="0" t="2753" r="0" b="2753"/>
           <a:stretch>
             <a:fillRect/>
           </a:stretch>
         </p:blipFill>
         <p:spPr>
           <a:xfrm rot="0" flipH="0" flipV="0">
-            <a:off x="781050" y="1619250"/>
-            <a:ext cx="6534150" cy="4267200"/>
+            <a:off x="781050" y="1704975"/>
+            <a:ext cx="6372225" cy="4181475"/>
           </a:xfrm>
           <a:prstGeom prst="roundRect">
             <a:avLst>
-              <a:gd name="adj" fmla="val 1786"/>
+              <a:gd name="adj" fmla="val 1822"/>
             </a:avLst>
           </a:prstGeom>
           <a:ln/>
@@ -4799,14 +4793,188 @@
       </p:pic>
       <p:sp>
         <p:nvSpPr>
-          <p:cNvPr id="99" name="" descr="{&quot;isTemplate&quot;:true,&quot;type&quot;:&quot;text&quot;}"/>
-          <p:cNvSpPr txBox="1"/>
-          <p:nvPr/>
-        </p:nvSpPr>
-        <p:spPr>
-          <a:xfrm rot="0" flipH="0" flipV="0">
-            <a:off x="7658100" y="1562100"/>
-            <a:ext cx="3848100" cy="152400"/>
+          <p:cNvPr id="100" name=""/>
+          <p:cNvSpPr/>
+          <p:nvPr/>
+        </p:nvSpPr>
+        <p:spPr>
+          <a:xfrm rot="0" flipH="0" flipV="0">
+            <a:off x="7458075" y="1609725"/>
+            <a:ext cx="4048125" cy="1790700"/>
+          </a:xfrm>
+          <a:prstGeom prst="roundRect">
+            <a:avLst>
+              <a:gd name="adj" fmla="val 6383"/>
+            </a:avLst>
+          </a:prstGeom>
+          <a:solidFill>
+            <a:srgbClr val="FFFFFF"/>
+          </a:solidFill>
+          <a:ln w="12700">
+            <a:solidFill>
+              <a:srgbClr val="E3E8F5"/>
+            </a:solidFill>
+            <a:prstDash val="solid"/>
+          </a:ln>
+        </p:spPr>
+        <p:txBody>
+          <a:bodyPr/>
+          <a:p/>
+        </p:txBody>
+      </p:sp>
+      <p:pic>
+        <p:nvPicPr>
+          <p:cNvPr id="101" name=""/>
+          <p:cNvPicPr>
+            <a:picLocks noChangeAspect="1"/>
+          </p:cNvPicPr>
+          <p:nvPr/>
+        </p:nvPicPr>
+        <p:blipFill>
+          <a:blip r:embed="rId2"/>
+          <a:srcRect l="0" t="7946" r="0" b="7946"/>
+          <a:stretch>
+            <a:fillRect/>
+          </a:stretch>
+        </p:blipFill>
+        <p:spPr>
+          <a:xfrm rot="0" flipH="0" flipV="0">
+            <a:off x="7534275" y="1685925"/>
+            <a:ext cx="3895725" cy="1638300"/>
+          </a:xfrm>
+          <a:prstGeom prst="roundRect">
+            <a:avLst>
+              <a:gd name="adj" fmla="val 3488"/>
+            </a:avLst>
+          </a:prstGeom>
+          <a:ln/>
+        </p:spPr>
+      </p:pic>
+      <p:sp>
+        <p:nvSpPr>
+          <p:cNvPr id="102" name="" descr="{&quot;isTemplate&quot;:true,&quot;type&quot;:&quot;text&quot;}"/>
+          <p:cNvSpPr txBox="1"/>
+          <p:nvPr/>
+        </p:nvSpPr>
+        <p:spPr>
+          <a:xfrm rot="0" flipH="0" flipV="0">
+            <a:off x="7458075" y="3514725"/>
+            <a:ext cx="4048125" cy="142875"/>
+          </a:xfrm>
+          <a:prstGeom prst="rect"/>
+        </p:spPr>
+        <p:txBody>
+          <a:bodyPr wrap="none" lIns="0" tIns="0" rIns="0" bIns="0"/>
+          <a:p>
+            <a:pPr>
+              <a:lnSpc>
+                <a:spcPct val="100000"/>
+              </a:lnSpc>
+            </a:pPr>
+            <a:r>
+              <a:rPr lang="zh-CN" sz="900">
+                <a:solidFill>
+                  <a:srgbClr val="5C6780"/>
+                </a:solidFill>
+                <a:latin typeface="Microsoft YaHei"/>
+                <a:ea typeface="Microsoft YaHei"/>
+              </a:rPr>
+              <a:t>设置页实拍：本地</a:t>
+            </a:r>
+            <a:r>
+              <a:rPr lang="en-US" sz="900">
+                <a:solidFill>
+                  <a:srgbClr val="5C6780"/>
+                </a:solidFill>
+                <a:latin typeface="Microsoft YaHei"/>
+                <a:ea typeface="Microsoft YaHei"/>
+              </a:rPr>
+              <a:t xml:space="preserve"> 3B </a:t>
+            </a:r>
+            <a:r>
+              <a:rPr lang="zh-CN" sz="900">
+                <a:solidFill>
+                  <a:srgbClr val="5C6780"/>
+                </a:solidFill>
+                <a:latin typeface="Microsoft YaHei"/>
+                <a:ea typeface="Microsoft YaHei"/>
+              </a:rPr>
+              <a:t>已连接（</a:t>
+            </a:r>
+            <a:r>
+              <a:rPr lang="en-US" sz="900">
+                <a:solidFill>
+                  <a:srgbClr val="5C6780"/>
+                </a:solidFill>
+                <a:latin typeface="Microsoft YaHei"/>
+                <a:ea typeface="Microsoft YaHei"/>
+              </a:rPr>
+              <a:t>2.0GB</a:t>
+            </a:r>
+            <a:r>
+              <a:rPr lang="zh-CN" sz="900">
+                <a:solidFill>
+                  <a:srgbClr val="5C6780"/>
+                </a:solidFill>
+                <a:latin typeface="Microsoft YaHei"/>
+                <a:ea typeface="Microsoft YaHei"/>
+              </a:rPr>
+              <a:t>）＋</a:t>
+            </a:r>
+            <a:r>
+              <a:rPr lang="en-US" sz="900">
+                <a:solidFill>
+                  <a:srgbClr val="5C6780"/>
+                </a:solidFill>
+                <a:latin typeface="Microsoft YaHei"/>
+                <a:ea typeface="Microsoft YaHei"/>
+              </a:rPr>
+              <a:t xml:space="preserve"> </a:t>
+            </a:r>
+            <a:r>
+              <a:rPr lang="zh-CN" sz="900">
+                <a:solidFill>
+                  <a:srgbClr val="5C6780"/>
+                </a:solidFill>
+                <a:latin typeface="Microsoft YaHei"/>
+                <a:ea typeface="Microsoft YaHei"/>
+              </a:rPr>
+              <a:t>云端</a:t>
+            </a:r>
+            <a:r>
+              <a:rPr lang="en-US" sz="900">
+                <a:solidFill>
+                  <a:srgbClr val="5C6780"/>
+                </a:solidFill>
+                <a:latin typeface="Microsoft YaHei"/>
+                <a:ea typeface="Microsoft YaHei"/>
+              </a:rPr>
+              <a:t xml:space="preserve"> Key </a:t>
+            </a:r>
+            <a:r>
+              <a:rPr lang="zh-CN" sz="900">
+                <a:solidFill>
+                  <a:srgbClr val="5C6780"/>
+                </a:solidFill>
+                <a:latin typeface="Microsoft YaHei"/>
+                <a:ea typeface="Microsoft YaHei"/>
+              </a:rPr>
+              <a:t>可用</a:t>
+            </a:r>
+            <a:endParaRPr/>
+          </a:p>
+        </p:txBody>
+      </p:sp>
+      <p:sp>
+        <p:nvSpPr>
+          <p:cNvPr id="103" name="" descr="{&quot;isTemplate&quot;:true,&quot;type&quot;:&quot;text&quot;}"/>
+          <p:cNvSpPr txBox="1"/>
+          <p:nvPr/>
+        </p:nvSpPr>
+        <p:spPr>
+          <a:xfrm rot="0" flipH="0" flipV="0">
+            <a:off x="7458075" y="3790950"/>
+            <a:ext cx="4048125" cy="152400"/>
           </a:xfrm>
           <a:prstGeom prst="rect"/>
         </p:spPr>
@@ -4844,49 +5012,49 @@
       </p:sp>
       <p:sp>
         <p:nvSpPr>
-          <p:cNvPr id="100" name="" descr="{&quot;isTemplate&quot;:true,&quot;type&quot;:&quot;text&quot;}"/>
-          <p:cNvSpPr txBox="1"/>
-          <p:nvPr/>
-        </p:nvSpPr>
-        <p:spPr>
-          <a:xfrm rot="0" flipH="0" flipV="0">
-            <a:off x="7658100" y="1771650"/>
-            <a:ext cx="3848100" cy="276225"/>
-          </a:xfrm>
-          <a:prstGeom prst="rect"/>
-        </p:spPr>
-        <p:txBody>
-          <a:bodyPr wrap="none" lIns="0" tIns="0" rIns="0" bIns="0"/>
-          <a:p>
-            <a:pPr>
-              <a:lnSpc>
-                <a:spcPct val="170000"/>
-              </a:lnSpc>
-            </a:pPr>
-            <a:r>
-              <a:rPr lang="zh-CN" sz="1050">
-                <a:solidFill>
-                  <a:srgbClr val="5C6780"/>
-                </a:solidFill>
-                <a:latin typeface="Microsoft YaHei"/>
-                <a:ea typeface="Microsoft YaHei"/>
-              </a:rPr>
-              <a:t>按影响金额排序，不是按模块罗列。老板看完就知道先干哪件。</a:t>
-            </a:r>
-            <a:endParaRPr/>
-          </a:p>
-        </p:txBody>
-      </p:sp>
-      <p:sp>
-        <p:nvSpPr>
-          <p:cNvPr id="101" name="" descr="{&quot;isTemplate&quot;:true,&quot;type&quot;:&quot;text&quot;}"/>
-          <p:cNvSpPr txBox="1"/>
-          <p:nvPr/>
-        </p:nvSpPr>
-        <p:spPr>
-          <a:xfrm rot="0" flipH="0" flipV="0">
-            <a:off x="7658100" y="2219325"/>
-            <a:ext cx="3848100" cy="152400"/>
+          <p:cNvPr id="104" name="" descr="{&quot;isTemplate&quot;:true,&quot;type&quot;:&quot;text&quot;}"/>
+          <p:cNvSpPr txBox="1"/>
+          <p:nvPr/>
+        </p:nvSpPr>
+        <p:spPr>
+          <a:xfrm rot="0" flipH="0" flipV="0">
+            <a:off x="7458075" y="3990975"/>
+            <a:ext cx="4048125" cy="238125"/>
+          </a:xfrm>
+          <a:prstGeom prst="rect"/>
+        </p:spPr>
+        <p:txBody>
+          <a:bodyPr wrap="none" lIns="0" tIns="0" rIns="0" bIns="0"/>
+          <a:p>
+            <a:pPr>
+              <a:lnSpc>
+                <a:spcPct val="160000"/>
+              </a:lnSpc>
+            </a:pPr>
+            <a:r>
+              <a:rPr lang="zh-CN" sz="975">
+                <a:solidFill>
+                  <a:srgbClr val="5C6780"/>
+                </a:solidFill>
+                <a:latin typeface="Microsoft YaHei"/>
+                <a:ea typeface="Microsoft YaHei"/>
+              </a:rPr>
+              <a:t>按影响金额排序，不是按模块罗列。</a:t>
+            </a:r>
+            <a:endParaRPr/>
+          </a:p>
+        </p:txBody>
+      </p:sp>
+      <p:sp>
+        <p:nvSpPr>
+          <p:cNvPr id="105" name="" descr="{&quot;isTemplate&quot;:true,&quot;type&quot;:&quot;text&quot;}"/>
+          <p:cNvSpPr txBox="1"/>
+          <p:nvPr/>
+        </p:nvSpPr>
+        <p:spPr>
+          <a:xfrm rot="0" flipH="0" flipV="0">
+            <a:off x="7458075" y="4343400"/>
+            <a:ext cx="4048125" cy="152400"/>
           </a:xfrm>
           <a:prstGeom prst="rect"/>
         </p:spPr>
@@ -4924,51 +5092,49 @@
       </p:sp>
       <p:sp>
         <p:nvSpPr>
-          <p:cNvPr id="102" name="" descr="{&quot;isTemplate&quot;:true,&quot;type&quot;:&quot;text&quot;}"/>
-          <p:cNvSpPr txBox="1"/>
-          <p:nvPr/>
-        </p:nvSpPr>
-        <p:spPr>
-          <a:xfrm rot="0" flipH="0" flipV="0">
-            <a:off x="7658100" y="2428875"/>
-            <a:ext cx="3848100" cy="552450"/>
-          </a:xfrm>
-          <a:prstGeom prst="rect"/>
-        </p:spPr>
-        <p:txBody>
-          <a:bodyPr wrap="square" lIns="0" tIns="0" rIns="0" bIns="0">
-            <a:normAutofit/>
-          </a:bodyPr>
-          <a:p>
-            <a:pPr>
-              <a:lnSpc>
-                <a:spcPct val="170000"/>
-              </a:lnSpc>
-            </a:pPr>
-            <a:r>
-              <a:rPr lang="zh-CN" sz="1050">
-                <a:solidFill>
-                  <a:srgbClr val="5C6780"/>
-                </a:solidFill>
-                <a:latin typeface="Microsoft YaHei"/>
-                <a:ea typeface="Microsoft YaHei"/>
-              </a:rPr>
-              <a:t>灰底那行是指标、当前值、基线、阈值，机器可读，人也看得懂。</a:t>
-            </a:r>
-            <a:endParaRPr/>
-          </a:p>
-        </p:txBody>
-      </p:sp>
-      <p:sp>
-        <p:nvSpPr>
-          <p:cNvPr id="103" name="" descr="{&quot;isTemplate&quot;:true,&quot;type&quot;:&quot;text&quot;}"/>
-          <p:cNvSpPr txBox="1"/>
-          <p:nvPr/>
-        </p:nvSpPr>
-        <p:spPr>
-          <a:xfrm rot="0" flipH="0" flipV="0">
-            <a:off x="7658100" y="3152775"/>
-            <a:ext cx="3848100" cy="152400"/>
+          <p:cNvPr id="106" name="" descr="{&quot;isTemplate&quot;:true,&quot;type&quot;:&quot;text&quot;}"/>
+          <p:cNvSpPr txBox="1"/>
+          <p:nvPr/>
+        </p:nvSpPr>
+        <p:spPr>
+          <a:xfrm rot="0" flipH="0" flipV="0">
+            <a:off x="7458075" y="4543425"/>
+            <a:ext cx="4048125" cy="238125"/>
+          </a:xfrm>
+          <a:prstGeom prst="rect"/>
+        </p:spPr>
+        <p:txBody>
+          <a:bodyPr wrap="none" lIns="0" tIns="0" rIns="0" bIns="0"/>
+          <a:p>
+            <a:pPr>
+              <a:lnSpc>
+                <a:spcPct val="160000"/>
+              </a:lnSpc>
+            </a:pPr>
+            <a:r>
+              <a:rPr lang="zh-CN" sz="975">
+                <a:solidFill>
+                  <a:srgbClr val="5C6780"/>
+                </a:solidFill>
+                <a:latin typeface="Microsoft YaHei"/>
+                <a:ea typeface="Microsoft YaHei"/>
+              </a:rPr>
+              <a:t>灰底那行是指标、当前值、基线、阈值。</a:t>
+            </a:r>
+            <a:endParaRPr/>
+          </a:p>
+        </p:txBody>
+      </p:sp>
+      <p:sp>
+        <p:nvSpPr>
+          <p:cNvPr id="107" name="" descr="{&quot;isTemplate&quot;:true,&quot;type&quot;:&quot;text&quot;}"/>
+          <p:cNvSpPr txBox="1"/>
+          <p:nvPr/>
+        </p:nvSpPr>
+        <p:spPr>
+          <a:xfrm rot="0" flipH="0" flipV="0">
+            <a:off x="7458075" y="4895850"/>
+            <a:ext cx="4048125" cy="152400"/>
           </a:xfrm>
           <a:prstGeom prst="rect"/>
         </p:spPr>
@@ -4998,148 +5164,6 @@
                 <a:latin typeface="Microsoft YaHei"/>
                 <a:ea typeface="Microsoft YaHei"/>
               </a:rPr>
-              <a:t>右边是实时状态</a:t>
-            </a:r>
-            <a:endParaRPr/>
-          </a:p>
-        </p:txBody>
-      </p:sp>
-      <p:sp>
-        <p:nvSpPr>
-          <p:cNvPr id="104" name="" descr="{&quot;isTemplate&quot;:true,&quot;type&quot;:&quot;text&quot;}"/>
-          <p:cNvSpPr txBox="1"/>
-          <p:nvPr/>
-        </p:nvSpPr>
-        <p:spPr>
-          <a:xfrm rot="0" flipH="0" flipV="0">
-            <a:off x="7658100" y="3362325"/>
-            <a:ext cx="3848100" cy="552450"/>
-          </a:xfrm>
-          <a:prstGeom prst="rect"/>
-        </p:spPr>
-        <p:txBody>
-          <a:bodyPr wrap="square" lIns="0" tIns="0" rIns="0" bIns="0">
-            <a:normAutofit/>
-          </a:bodyPr>
-          <a:p>
-            <a:pPr>
-              <a:lnSpc>
-                <a:spcPct val="170000"/>
-              </a:lnSpc>
-            </a:pPr>
-            <a:r>
-              <a:rPr lang="zh-CN" sz="1050">
-                <a:solidFill>
-                  <a:srgbClr val="5C6780"/>
-                </a:solidFill>
-                <a:latin typeface="Microsoft YaHei"/>
-                <a:ea typeface="Microsoft YaHei"/>
-              </a:rPr>
-              <a:t>模型通道（本地</a:t>
-            </a:r>
-            <a:r>
-              <a:rPr lang="en-US" sz="1050">
-                <a:solidFill>
-                  <a:srgbClr val="5C6780"/>
-                </a:solidFill>
-                <a:latin typeface="Microsoft YaHei"/>
-                <a:ea typeface="Microsoft YaHei"/>
-              </a:rPr>
-              <a:t>/</a:t>
-            </a:r>
-            <a:r>
-              <a:rPr lang="zh-CN" sz="1050">
-                <a:solidFill>
-                  <a:srgbClr val="5C6780"/>
-                </a:solidFill>
-                <a:latin typeface="Microsoft YaHei"/>
-                <a:ea typeface="Microsoft YaHei"/>
-              </a:rPr>
-              <a:t>云端</a:t>
-            </a:r>
-            <a:r>
-              <a:rPr lang="en-US" sz="1050">
-                <a:solidFill>
-                  <a:srgbClr val="5C6780"/>
-                </a:solidFill>
-                <a:latin typeface="Microsoft YaHei"/>
-                <a:ea typeface="Microsoft YaHei"/>
-              </a:rPr>
-              <a:t>/</a:t>
-            </a:r>
-            <a:r>
-              <a:rPr lang="zh-CN" sz="1050">
-                <a:solidFill>
-                  <a:srgbClr val="5C6780"/>
-                </a:solidFill>
-                <a:latin typeface="Microsoft YaHei"/>
-                <a:ea typeface="Microsoft YaHei"/>
-              </a:rPr>
-              <a:t>规则）、</a:t>
-            </a:r>
-            <a:r>
-              <a:rPr lang="en-US" sz="1050">
-                <a:solidFill>
-                  <a:srgbClr val="5C6780"/>
-                </a:solidFill>
-                <a:latin typeface="Microsoft YaHei"/>
-                <a:ea typeface="Microsoft YaHei"/>
-              </a:rPr>
-              <a:t xml:space="preserve">7 </a:t>
-            </a:r>
-            <a:r>
-              <a:rPr lang="zh-CN" sz="1050">
-                <a:solidFill>
-                  <a:srgbClr val="5C6780"/>
-                </a:solidFill>
-                <a:latin typeface="Microsoft YaHei"/>
-                <a:ea typeface="Microsoft YaHei"/>
-              </a:rPr>
-              <a:t>天预测与回测误差、待处理动作。</a:t>
-            </a:r>
-            <a:endParaRPr/>
-          </a:p>
-        </p:txBody>
-      </p:sp>
-      <p:sp>
-        <p:nvSpPr>
-          <p:cNvPr id="105" name="" descr="{&quot;isTemplate&quot;:true,&quot;type&quot;:&quot;text&quot;}"/>
-          <p:cNvSpPr txBox="1"/>
-          <p:nvPr/>
-        </p:nvSpPr>
-        <p:spPr>
-          <a:xfrm rot="0" flipH="0" flipV="0">
-            <a:off x="7658100" y="4086225"/>
-            <a:ext cx="3848100" cy="152400"/>
-          </a:xfrm>
-          <a:prstGeom prst="rect"/>
-        </p:spPr>
-        <p:txBody>
-          <a:bodyPr wrap="none" lIns="0" tIns="0" rIns="0" bIns="0"/>
-          <a:p>
-            <a:pPr>
-              <a:lnSpc>
-                <a:spcPct val="100000"/>
-              </a:lnSpc>
-            </a:pPr>
-            <a:r>
-              <a:rPr lang="en-US" sz="975" spc="75">
-                <a:solidFill>
-                  <a:srgbClr val="4C4DDC"/>
-                </a:solidFill>
-                <a:latin typeface="Microsoft YaHei"/>
-                <a:ea typeface="Microsoft YaHei"/>
-              </a:rPr>
-              <a:t xml:space="preserve">04 </a:t>
-            </a:r>
-            <a:r>
-              <a:rPr lang="zh-CN" sz="975" spc="75">
-                <a:solidFill>
-                  <a:srgbClr val="4C4DDC"/>
-                </a:solidFill>
-                <a:latin typeface="Microsoft YaHei"/>
-                <a:ea typeface="Microsoft YaHei"/>
-              </a:rPr>
               <a:t>按钮就是动作</a:t>
             </a:r>
             <a:endParaRPr/>
@@ -5148,44 +5172,42 @@
       </p:sp>
       <p:sp>
         <p:nvSpPr>
-          <p:cNvPr id="106" name="" descr="{&quot;isTemplate&quot;:true,&quot;type&quot;:&quot;text&quot;}"/>
-          <p:cNvSpPr txBox="1"/>
-          <p:nvPr/>
-        </p:nvSpPr>
-        <p:spPr>
-          <a:xfrm rot="0" flipH="0" flipV="0">
-            <a:off x="7658100" y="4295775"/>
-            <a:ext cx="3848100" cy="552450"/>
-          </a:xfrm>
-          <a:prstGeom prst="rect"/>
-        </p:spPr>
-        <p:txBody>
-          <a:bodyPr wrap="square" lIns="0" tIns="0" rIns="0" bIns="0">
-            <a:normAutofit/>
-          </a:bodyPr>
-          <a:p>
-            <a:pPr>
-              <a:lnSpc>
-                <a:spcPct val="170000"/>
-              </a:lnSpc>
-            </a:pPr>
-            <a:r>
-              <a:rPr lang="zh-CN" sz="1050">
-                <a:solidFill>
-                  <a:srgbClr val="5C6780"/>
-                </a:solidFill>
-                <a:latin typeface="Microsoft YaHei"/>
-                <a:ea typeface="Microsoft YaHei"/>
-              </a:rPr>
-              <a:t>「生成采购单」「执行调价」都不是跳转，点完当场改数据，可撤销。</a:t>
-            </a:r>
-            <a:endParaRPr/>
-          </a:p>
-        </p:txBody>
-      </p:sp>
-      <p:sp>
-        <p:nvSpPr>
-          <p:cNvPr id="107" name="" descr="{&quot;isTemplate&quot;:true,&quot;type&quot;:&quot;text&quot;}"/>
+          <p:cNvPr id="108" name="" descr="{&quot;isTemplate&quot;:true,&quot;type&quot;:&quot;text&quot;}"/>
+          <p:cNvSpPr txBox="1"/>
+          <p:nvPr/>
+        </p:nvSpPr>
+        <p:spPr>
+          <a:xfrm rot="0" flipH="0" flipV="0">
+            <a:off x="7458075" y="5095875"/>
+            <a:ext cx="4048125" cy="238125"/>
+          </a:xfrm>
+          <a:prstGeom prst="rect"/>
+        </p:spPr>
+        <p:txBody>
+          <a:bodyPr wrap="none" lIns="0" tIns="0" rIns="0" bIns="0"/>
+          <a:p>
+            <a:pPr>
+              <a:lnSpc>
+                <a:spcPct val="160000"/>
+              </a:lnSpc>
+            </a:pPr>
+            <a:r>
+              <a:rPr lang="zh-CN" sz="975">
+                <a:solidFill>
+                  <a:srgbClr val="5C6780"/>
+                </a:solidFill>
+                <a:latin typeface="Microsoft YaHei"/>
+                <a:ea typeface="Microsoft YaHei"/>
+              </a:rPr>
+              <a:t>生成采购单、执行调价都是当场改数据。</a:t>
+            </a:r>
+            <a:endParaRPr/>
+          </a:p>
+        </p:txBody>
+      </p:sp>
+      <p:sp>
+        <p:nvSpPr>
+          <p:cNvPr id="109" name="" descr="{&quot;isTemplate&quot;:true,&quot;type&quot;:&quot;text&quot;}"/>
           <p:cNvSpPr txBox="1"/>
           <p:nvPr/>
         </p:nvSpPr>
@@ -5242,7 +5264,7 @@
                 <a:latin typeface="Microsoft YaHei"/>
                 <a:ea typeface="Microsoft YaHei"/>
               </a:rPr>
-              <a:t xml:space="preserve"> / 6,803 </a:t>
+              <a:t xml:space="preserve"> / 6,808 </a:t>
             </a:r>
             <a:r>
               <a:rPr lang="zh-CN" sz="900">
@@ -5280,7 +5302,7 @@
       </p:sp>
       <p:sp>
         <p:nvSpPr>
-          <p:cNvPr id="108" name="" descr="{&quot;isTemplate&quot;:true,&quot;type&quot;:&quot;text&quot;}"/>
+          <p:cNvPr id="110" name="" descr="{&quot;isTemplate&quot;:true,&quot;type&quot;:&quot;text&quot;}"/>
           <p:cNvSpPr txBox="1"/>
           <p:nvPr/>
         </p:nvSpPr>
@@ -5333,7 +5355,7 @@
   <p:cSld>
     <p:spTree>
       <p:nvGrpSpPr>
-        <p:cNvPr id="109" name="" descr="&lt;Slide style={{ width: 1280, height: 720, background: '#F6F8FD', padding: '56px 72px', flexDirection: 'column' }}&gt;&#13;&#10;  &lt;Box style={{ height: 96, flexDirection: 'row', justifyContent: 'space-between', alignItems: 'flex-start' }}&gt;&#13;&#10;    &lt;Box style={{ flexDirection: 'column', gap: 8 }}&gt;&#13;&#10;      &lt;Text style={{ fontSize: 34, fontWeight: 'bold', color: '#0C1222' }}&gt;附录 B · 我们怎么证明它可靠&lt;/Text&gt;&#13;&#10;      &lt;Text style={{ fontSize: 15, color: '#5C6780' }}&gt;不是「能跑一遍」，而是固定题库、可重复测量的评测&lt;/Text&gt;&#13;&#10;    &lt;/Box&gt;&#13;&#10;    &lt;Box style={{ flexDirection: 'row', alignItems: 'center', gap: 6, padding: '5px 12px', background: '#EEF1FE', border: '1px solid #DDE2F5', borderRadius: 999 }}&gt;&#13;&#10;      &lt;Box style={{ width: 6, height: 6, borderRadius: 3, background: '#4C4DDC' }} /&gt;&#13;&#10;      &lt;Text style={{ fontSize: 12, color: '#4C4DDC', fontWeight: 'bold', letterSpacing: 1 }}&gt;AI 掌柜&lt;/Text&gt;&#13;&#10;    &lt;/Box&gt;&#13;&#10;  &lt;/Box&gt;&#13;&#10;  &lt;Box style={{ width: 72, height: 3, background: '#4C4DDC', borderRadius: 2, marginTop: 2, marginBottom: 12 }} /&gt;&#13;&#10;&#13;&#10;  &lt;Box style={{ flex: 1, flexDirection: 'column', gap: 14 }}&gt;&#13;&#10;    &lt;Box style={{ flexDirection: 'row', gap: 14, flex: 1 }}&gt;&#13;&#10;      &lt;Box style={{ flex: 1, background: '#FFFFFF', border: '1px solid #E3E8F5', borderRadius: 14, padding: 22, flexDirection: 'column', justifyContent: 'space-between' }}&gt;&#13;&#10;        &lt;Text style={{ fontSize: 40, fontWeight: 'bold', color: '#4C4DDC', letterSpacing: -1 }}&gt;8 / 8&lt;/Text&gt;&#13;&#10;        &lt;Text style={{ fontSize: 16, fontWeight: 'bold', color: '#0C1222' }}&gt;越界 SQL 全部拦截&lt;/Text&gt;&#13;&#10;        &lt;Text style={{ fontSize: 12, color: '#5C6780', lineHeight: 1.7 }}&gt;DROP · 多语句 · UNION 跨表&lt;br /&gt;系统表 · ATTACH · PRAGMA&lt;/Text&gt;&#13;&#10;      &lt;/Box&gt;&#13;&#10;      &lt;Box style={{ flex: 1, background: '#FFFFFF', border: '1px solid #E3E8F5', borderRadius: 14, padding: 22, flexDirection: 'column', justifyContent: 'space-between' }}&gt;&#13;&#10;        &lt;Text style={{ fontSize: 40, fontWeight: 'bold', color: '#4C4DDC', letterSpacing: -1 }}&gt;12 / 12&lt;/Text&gt;&#13;&#10;        &lt;Text style={{ fontSize: 16, fontWeight: 'bold', color: '#0C1222' }}&gt;问答评测集全通过&lt;/Text&gt;&#13;&#10;        &lt;Text style={{ fontSize: 12, color: '#5C6780', lineHeight: 1.7 }}&gt;SQL 可执行 12/12 · 结论一致 12/12&lt;br /&gt;平均 1.2 秒&lt;/Text&gt;&#13;&#10;      &lt;/Box&gt;&#13;&#10;    &lt;/Box&gt;&#13;&#10;    &lt;Box style={{ flexDirection: 'row', gap: 14, flex: 1 }}&gt;&#13;&#10;      &lt;Box style={{ flex: 1, background: '#FFFFFF', border: '1px solid #E3E8F5', borderRadius: 14, padding: 22, flexDirection: 'column', justifyContent: 'space-between' }}&gt;&#13;&#10;        &lt;Text style={{ fontSize: 40, fontWeight: 'bold', color: '#4C4DDC', letterSpacing: -1 }}&gt;5 处&lt;/Text&gt;&#13;&#10;        &lt;Text style={{ fontSize: 16, fontWeight: 'bold', color: '#0C1222' }}&gt;同一指标必须同值&lt;/Text&gt;&#13;&#10;        &lt;Text style={{ fontSize: 12, color: '#5C6780', lineHeight: 1.7 }}&gt;原始表 · 视图 · 事实表&lt;br /&gt;驾驶舱 · 报表 · AI 问答&lt;/Text&gt;&#13;&#10;      &lt;/Box&gt;&#13;&#10;      &lt;Box style={{ flex: 1, background: '#FFFFFF', border: '1px solid #E3E8F5', borderRadius: 14, padding: 22, flexDirection: 'column', justifyContent: 'space-between' }}&gt;&#13;&#10;        &lt;Text style={{ fontSize: 40, fontWeight: 'bold', color: '#4C4DDC', letterSpacing: -1 }}&gt;6 套件&lt;/Text&gt;&#13;&#10;        &lt;Text style={{ fontSize: 16, fontWeight: 'bold', color: '#0C1222' }}&gt;一键回归，12 秒跑完&lt;/Text&gt;&#13;&#10;        &lt;Text style={{ fontSize: 12, color: '#5C6780', lineHeight: 1.7 }}&gt;22 个页面 · 50 项单元测试&lt;br /&gt;CSV 导入 · Mock 模型链路&lt;/Text&gt;&#13;&#10;      &lt;/Box&gt;&#13;&#10;    &lt;/Box&gt;&#13;&#10;    &lt;Box style={{ background: '#EEF1FE', border: '1px solid #C9CDF6', borderRadius: 12, padding: '16px 22px', flexDirection: 'row', alignItems: 'center', gap: 18 }}&gt;&#13;&#10;      &lt;Text style={{ fontSize: 11, color: '#4C4DDC', fontWeight: 'bold', letterSpacing: 2, width: 96 }}&gt;真实案例&lt;/Text&gt;&#13;&#10;      &lt;Text style={{ fontSize: 14, color: '#0C1222', lineHeight: 1.7, flex: 1 }}&gt;&#13;&#10;        模型的结论写「共 &lt;span style={{ fontWeight: 'bold' }}&gt;6&lt;/span&gt; 种食材低于预警」，查询结果实际是 &lt;span style={{ fontWeight: 'bold' }}&gt;9&lt;/span&gt; 种；&#13;&#10;        「2.8 &lt;span style={{ fontWeight: 'bold' }}&gt;斤&lt;/span&gt;」被写成「3.2 kg」。服务端校验发现数字对不上，&#13;&#10;        &lt;span style={{ fontWeight: 'bold', color: '#4C4DDC' }}&gt;判定为编造 → 换成确定性摘要 → 让它看着真实结果重写&lt;/span&gt;。&#13;&#10;      &lt;/Text&gt;&#13;&#10;    &lt;/Box&gt;&#13;&#10;  &lt;/Box&gt;&#13;&#10;&#13;&#10;  &lt;Box style={{ height: 36, flexDirection: 'row', justifyContent: 'space-between', alignItems: 'flex-end' }}&gt;&#13;&#10;    &lt;Text style={{ fontSize: 12, color: '#8A93A8' }}&gt;命令：python run_tests.py · python tests/eval_nl2sql.py&lt;/Text&gt;&#13;&#10;    &lt;Text style={{ fontSize: 12, color: '#8A93A8' }}&gt;附录 B&lt;/Text&gt;&#13;&#10;  &lt;/Box&gt;&#13;&#10;&lt;/Slide&gt;&#13;&#10;"/>
+        <p:cNvPr id="111" name=""/>
         <p:cNvGrpSpPr/>
         <p:nvPr/>
       </p:nvGrpSpPr>
@@ -5347,7 +5369,7 @@
       </p:grpSpPr>
       <p:sp>
         <p:nvSpPr>
-          <p:cNvPr id="110" name=""/>
+          <p:cNvPr id="112" name=""/>
           <p:cNvSpPr/>
           <p:nvPr/>
         </p:nvSpPr>
@@ -5366,12 +5388,15 @@
         </p:spPr>
         <p:txBody>
           <a:bodyPr/>
-          <a:p/>
-        </p:txBody>
-      </p:sp>
-      <p:sp>
-        <p:nvSpPr>
-          <p:cNvPr id="111" name="" descr="{&quot;isTemplate&quot;:true,&quot;type&quot;:&quot;text&quot;}"/>
+          <a:p>
+            <a:pPr/>
+            <a:endParaRPr/>
+          </a:p>
+        </p:txBody>
+      </p:sp>
+      <p:sp>
+        <p:nvSpPr>
+          <p:cNvPr id="113" name="" descr="{&quot;isTemplate&quot;:true,&quot;type&quot;:&quot;text&quot;}"/>
           <p:cNvSpPr txBox="1"/>
           <p:nvPr/>
         </p:nvSpPr>
@@ -5426,7 +5451,7 @@
       </p:sp>
       <p:sp>
         <p:nvSpPr>
-          <p:cNvPr id="112" name="" descr="{&quot;isTemplate&quot;:true,&quot;type&quot;:&quot;text&quot;}"/>
+          <p:cNvPr id="114" name="" descr="{&quot;isTemplate&quot;:true,&quot;type&quot;:&quot;text&quot;}"/>
           <p:cNvSpPr txBox="1"/>
           <p:nvPr/>
         </p:nvSpPr>
@@ -5461,7 +5486,7 @@
       </p:sp>
       <p:sp>
         <p:nvSpPr>
-          <p:cNvPr id="113" name=""/>
+          <p:cNvPr id="115" name=""/>
           <p:cNvSpPr/>
           <p:nvPr/>
         </p:nvSpPr>
@@ -5487,12 +5512,15 @@
         </p:spPr>
         <p:txBody>
           <a:bodyPr/>
-          <a:p/>
-        </p:txBody>
-      </p:sp>
-      <p:sp>
-        <p:nvSpPr>
-          <p:cNvPr id="114" name=""/>
+          <a:p>
+            <a:pPr/>
+            <a:endParaRPr/>
+          </a:p>
+        </p:txBody>
+      </p:sp>
+      <p:sp>
+        <p:nvSpPr>
+          <p:cNvPr id="116" name=""/>
           <p:cNvSpPr/>
           <p:nvPr/>
         </p:nvSpPr>
@@ -5513,12 +5541,15 @@
         </p:spPr>
         <p:txBody>
           <a:bodyPr/>
-          <a:p/>
-        </p:txBody>
-      </p:sp>
-      <p:sp>
-        <p:nvSpPr>
-          <p:cNvPr id="115" name="" descr="{&quot;isTemplate&quot;:true,&quot;type&quot;:&quot;text&quot;}"/>
+          <a:p>
+            <a:pPr/>
+            <a:endParaRPr/>
+          </a:p>
+        </p:txBody>
+      </p:sp>
+      <p:sp>
+        <p:nvSpPr>
+          <p:cNvPr id="117" name="" descr="{&quot;isTemplate&quot;:true,&quot;type&quot;:&quot;text&quot;}"/>
           <p:cNvSpPr txBox="1"/>
           <p:nvPr/>
         </p:nvSpPr>
@@ -5563,7 +5594,7 @@
       </p:sp>
       <p:sp>
         <p:nvSpPr>
-          <p:cNvPr id="116" name=""/>
+          <p:cNvPr id="118" name=""/>
           <p:cNvSpPr/>
           <p:nvPr/>
         </p:nvSpPr>
@@ -5584,12 +5615,15 @@
         </p:spPr>
         <p:txBody>
           <a:bodyPr/>
-          <a:p/>
-        </p:txBody>
-      </p:sp>
-      <p:sp>
-        <p:nvSpPr>
-          <p:cNvPr id="117" name=""/>
+          <a:p>
+            <a:pPr/>
+            <a:endParaRPr/>
+          </a:p>
+        </p:txBody>
+      </p:sp>
+      <p:sp>
+        <p:nvSpPr>
+          <p:cNvPr id="119" name=""/>
           <p:cNvSpPr/>
           <p:nvPr/>
         </p:nvSpPr>
@@ -5615,12 +5649,15 @@
         </p:spPr>
         <p:txBody>
           <a:bodyPr/>
-          <a:p/>
-        </p:txBody>
-      </p:sp>
-      <p:sp>
-        <p:nvSpPr>
-          <p:cNvPr id="118" name="" descr="{&quot;isTemplate&quot;:true,&quot;type&quot;:&quot;text&quot;}"/>
+          <a:p>
+            <a:pPr/>
+            <a:endParaRPr/>
+          </a:p>
+        </p:txBody>
+      </p:sp>
+      <p:sp>
+        <p:nvSpPr>
+          <p:cNvPr id="120" name="" descr="{&quot;isTemplate&quot;:true,&quot;type&quot;:&quot;text&quot;}"/>
           <p:cNvSpPr txBox="1"/>
           <p:nvPr/>
         </p:nvSpPr>
@@ -5655,7 +5692,7 @@
       </p:sp>
       <p:sp>
         <p:nvSpPr>
-          <p:cNvPr id="119" name="" descr="{&quot;isTemplate&quot;:true,&quot;type&quot;:&quot;text&quot;}"/>
+          <p:cNvPr id="121" name="" descr="{&quot;isTemplate&quot;:true,&quot;type&quot;:&quot;text&quot;}"/>
           <p:cNvSpPr txBox="1"/>
           <p:nvPr/>
         </p:nvSpPr>
@@ -5710,7 +5747,7 @@
       </p:sp>
       <p:sp>
         <p:nvSpPr>
-          <p:cNvPr id="120" name="" descr="{&quot;isTemplate&quot;:true,&quot;type&quot;:&quot;text&quot;}"/>
+          <p:cNvPr id="122" name="" descr="{&quot;isTemplate&quot;:true,&quot;type&quot;:&quot;text&quot;}"/>
           <p:cNvSpPr txBox="1"/>
           <p:nvPr/>
         </p:nvSpPr>
@@ -5803,7 +5840,7 @@
       </p:sp>
       <p:sp>
         <p:nvSpPr>
-          <p:cNvPr id="121" name=""/>
+          <p:cNvPr id="123" name=""/>
           <p:cNvSpPr/>
           <p:nvPr/>
         </p:nvSpPr>
@@ -5829,12 +5866,15 @@
         </p:spPr>
         <p:txBody>
           <a:bodyPr/>
-          <a:p/>
-        </p:txBody>
-      </p:sp>
-      <p:sp>
-        <p:nvSpPr>
-          <p:cNvPr id="122" name="" descr="{&quot;isTemplate&quot;:true,&quot;type&quot;:&quot;text&quot;}"/>
+          <a:p>
+            <a:pPr/>
+            <a:endParaRPr/>
+          </a:p>
+        </p:txBody>
+      </p:sp>
+      <p:sp>
+        <p:nvSpPr>
+          <p:cNvPr id="124" name="" descr="{&quot;isTemplate&quot;:true,&quot;type&quot;:&quot;text&quot;}"/>
           <p:cNvSpPr txBox="1"/>
           <p:nvPr/>
         </p:nvSpPr>
@@ -5869,7 +5909,7 @@
       </p:sp>
       <p:sp>
         <p:nvSpPr>
-          <p:cNvPr id="123" name="" descr="{&quot;isTemplate&quot;:true,&quot;type&quot;:&quot;text&quot;}"/>
+          <p:cNvPr id="125" name="" descr="{&quot;isTemplate&quot;:true,&quot;type&quot;:&quot;text&quot;}"/>
           <p:cNvSpPr txBox="1"/>
           <p:nvPr/>
         </p:nvSpPr>
@@ -5904,7 +5944,7 @@
       </p:sp>
       <p:sp>
         <p:nvSpPr>
-          <p:cNvPr id="124" name="" descr="{&quot;isTemplate&quot;:true,&quot;type&quot;:&quot;text&quot;}"/>
+          <p:cNvPr id="126" name="" descr="{&quot;isTemplate&quot;:true,&quot;type&quot;:&quot;text&quot;}"/>
           <p:cNvSpPr txBox="1"/>
           <p:nvPr/>
         </p:nvSpPr>
@@ -6017,7 +6057,7 @@
       </p:sp>
       <p:sp>
         <p:nvSpPr>
-          <p:cNvPr id="125" name=""/>
+          <p:cNvPr id="127" name=""/>
           <p:cNvSpPr/>
           <p:nvPr/>
         </p:nvSpPr>
@@ -6043,12 +6083,15 @@
         </p:spPr>
         <p:txBody>
           <a:bodyPr/>
-          <a:p/>
-        </p:txBody>
-      </p:sp>
-      <p:sp>
-        <p:nvSpPr>
-          <p:cNvPr id="126" name="" descr="{&quot;isTemplate&quot;:true,&quot;type&quot;:&quot;text&quot;}"/>
+          <a:p>
+            <a:pPr/>
+            <a:endParaRPr/>
+          </a:p>
+        </p:txBody>
+      </p:sp>
+      <p:sp>
+        <p:nvSpPr>
+          <p:cNvPr id="128" name="" descr="{&quot;isTemplate&quot;:true,&quot;type&quot;:&quot;text&quot;}"/>
           <p:cNvSpPr txBox="1"/>
           <p:nvPr/>
         </p:nvSpPr>
@@ -6093,7 +6136,7 @@
       </p:sp>
       <p:sp>
         <p:nvSpPr>
-          <p:cNvPr id="127" name="" descr="{&quot;isTemplate&quot;:true,&quot;type&quot;:&quot;text&quot;}"/>
+          <p:cNvPr id="129" name="" descr="{&quot;isTemplate&quot;:true,&quot;type&quot;:&quot;text&quot;}"/>
           <p:cNvSpPr txBox="1"/>
           <p:nvPr/>
         </p:nvSpPr>
@@ -6128,7 +6171,7 @@
       </p:sp>
       <p:sp>
         <p:nvSpPr>
-          <p:cNvPr id="128" name="" descr="{&quot;isTemplate&quot;:true,&quot;type&quot;:&quot;text&quot;}"/>
+          <p:cNvPr id="130" name="" descr="{&quot;isTemplate&quot;:true,&quot;type&quot;:&quot;text&quot;}"/>
           <p:cNvSpPr txBox="1"/>
           <p:nvPr/>
         </p:nvSpPr>
@@ -6261,7 +6304,7 @@
       </p:sp>
       <p:sp>
         <p:nvSpPr>
-          <p:cNvPr id="129" name=""/>
+          <p:cNvPr id="131" name=""/>
           <p:cNvSpPr/>
           <p:nvPr/>
         </p:nvSpPr>
@@ -6287,12 +6330,15 @@
         </p:spPr>
         <p:txBody>
           <a:bodyPr/>
-          <a:p/>
-        </p:txBody>
-      </p:sp>
-      <p:sp>
-        <p:nvSpPr>
-          <p:cNvPr id="130" name="" descr="{&quot;isTemplate&quot;:true,&quot;type&quot;:&quot;text&quot;}"/>
+          <a:p>
+            <a:pPr/>
+            <a:endParaRPr/>
+          </a:p>
+        </p:txBody>
+      </p:sp>
+      <p:sp>
+        <p:nvSpPr>
+          <p:cNvPr id="132" name="" descr="{&quot;isTemplate&quot;:true,&quot;type&quot;:&quot;text&quot;}"/>
           <p:cNvSpPr txBox="1"/>
           <p:nvPr/>
         </p:nvSpPr>
@@ -6337,7 +6383,7 @@
       </p:sp>
       <p:sp>
         <p:nvSpPr>
-          <p:cNvPr id="131" name="" descr="{&quot;isTemplate&quot;:true,&quot;type&quot;:&quot;text&quot;}"/>
+          <p:cNvPr id="133" name="" descr="{&quot;isTemplate&quot;:true,&quot;type&quot;:&quot;text&quot;}"/>
           <p:cNvSpPr txBox="1"/>
           <p:nvPr/>
         </p:nvSpPr>
@@ -6392,7 +6438,7 @@
       </p:sp>
       <p:sp>
         <p:nvSpPr>
-          <p:cNvPr id="132" name="" descr="{&quot;isTemplate&quot;:true,&quot;type&quot;:&quot;text&quot;}"/>
+          <p:cNvPr id="134" name="" descr="{&quot;isTemplate&quot;:true,&quot;type&quot;:&quot;text&quot;}"/>
           <p:cNvSpPr txBox="1"/>
           <p:nvPr/>
         </p:nvSpPr>
@@ -6505,7 +6551,7 @@
       </p:sp>
       <p:sp>
         <p:nvSpPr>
-          <p:cNvPr id="133" name=""/>
+          <p:cNvPr id="135" name=""/>
           <p:cNvSpPr/>
           <p:nvPr/>
         </p:nvSpPr>
@@ -6531,12 +6577,15 @@
         </p:spPr>
         <p:txBody>
           <a:bodyPr/>
-          <a:p/>
-        </p:txBody>
-      </p:sp>
-      <p:sp>
-        <p:nvSpPr>
-          <p:cNvPr id="134" name="" descr="{&quot;isTemplate&quot;:true,&quot;type&quot;:&quot;text&quot;}"/>
+          <a:p>
+            <a:pPr/>
+            <a:endParaRPr/>
+          </a:p>
+        </p:txBody>
+      </p:sp>
+      <p:sp>
+        <p:nvSpPr>
+          <p:cNvPr id="136" name="" descr="{&quot;isTemplate&quot;:true,&quot;type&quot;:&quot;text&quot;}"/>
           <p:cNvSpPr txBox="1"/>
           <p:nvPr/>
         </p:nvSpPr>
@@ -6571,7 +6620,7 @@
       </p:sp>
       <p:sp>
         <p:nvSpPr>
-          <p:cNvPr id="135" name="" descr="{&quot;isTemplate&quot;:true,&quot;type&quot;:&quot;text&quot;}"/>
+          <p:cNvPr id="137" name="" descr="{&quot;isTemplate&quot;:true,&quot;type&quot;:&quot;text&quot;}"/>
           <p:cNvSpPr txBox="1"/>
           <p:nvPr/>
         </p:nvSpPr>
@@ -6818,7 +6867,7 @@
       </p:sp>
       <p:sp>
         <p:nvSpPr>
-          <p:cNvPr id="136" name="" descr="{&quot;isTemplate&quot;:true,&quot;type&quot;:&quot;text&quot;}"/>
+          <p:cNvPr id="138" name="" descr="{&quot;isTemplate&quot;:true,&quot;type&quot;:&quot;text&quot;}"/>
           <p:cNvSpPr txBox="1"/>
           <p:nvPr/>
         </p:nvSpPr>
@@ -6863,7 +6912,7 @@
       </p:sp>
       <p:sp>
         <p:nvSpPr>
-          <p:cNvPr id="137" name="" descr="{&quot;isTemplate&quot;:true,&quot;type&quot;:&quot;text&quot;}"/>
+          <p:cNvPr id="139" name="" descr="{&quot;isTemplate&quot;:true,&quot;type&quot;:&quot;text&quot;}"/>
           <p:cNvSpPr txBox="1"/>
           <p:nvPr/>
         </p:nvSpPr>
@@ -6916,7 +6965,7 @@
   <p:cSld>
     <p:spTree>
       <p:nvGrpSpPr>
-        <p:cNvPr id="138" name="" descr="&lt;Slide style={{ width: 1280, height: 720, background: '#F6F8FD', padding: '56px 72px', flexDirection: 'column' }}&gt;&#13;&#10;  &lt;Box style={{ height: 96, flexDirection: 'row', justifyContent: 'space-between', alignItems: 'flex-start' }}&gt;&#13;&#10;    &lt;Box style={{ flexDirection: 'column', gap: 8 }}&gt;&#13;&#10;      &lt;Text style={{ fontSize: 34, fontWeight: 'bold', color: '#0C1222' }}&gt;老板每天问的三个问题，现有工具一个都没回答&lt;/Text&gt;&#13;&#10;      &lt;Text style={{ fontSize: 15, color: '#5C6780' }}&gt;不是缺报表，是缺结论和动作&lt;/Text&gt;&#13;&#10;    &lt;/Box&gt;&#13;&#10;    &lt;Box style={{ flexDirection: 'row', alignItems: 'center', gap: 6, padding: '5px 12px', background: '#EEF1FE', border: '1px solid #DDE2F5', borderRadius: 999 }}&gt;&#13;&#10;      &lt;Box style={{ width: 6, height: 6, borderRadius: 3, background: '#4C4DDC' }} /&gt;&#13;&#10;      &lt;Text style={{ fontSize: 12, color: '#4C4DDC', fontWeight: 'bold', letterSpacing: 1 }}&gt;AI 掌柜&lt;/Text&gt;&#13;&#10;    &lt;/Box&gt;&#13;&#10;  &lt;/Box&gt;&#13;&#10;  &lt;Box style={{ width: 72, height: 3, background: '#4C4DDC', borderRadius: 2, marginTop: 2, marginBottom: 12 }} /&gt;&#13;&#10;  &lt;Box style={{ flex: 1, paddingTop: 8 }}&gt;&#13;&#10;    &lt;Box style={{ flexDirection: 'row', gap: 20, height: 300 }}&gt;&#13;&#10;      &lt;Box style={{ flex: 1, background: '#FFFFFF', border: '1px solid #E3E8F5', borderRadius: 14, padding: 26, flexDirection: 'column', justifyContent: 'space-between' }}&gt;&#13;&#10;        &lt;Text style={{ fontSize: 56, fontWeight: 'bold', color: '#4C4DDC' }}&gt;01&lt;/Text&gt;&#13;&#10;        &lt;Text style={{ fontSize: 22, fontWeight: 'bold', color: '#0C1222' }}&gt;今天到底赚没赚&lt;/Text&gt;&#13;&#10;        &lt;Text style={{ fontSize: 15, color: '#5C6780', lineHeight: 1.8 }}&gt;六张报表翻半小时，只知道跌了，&lt;br /&gt;不知道是人少了还是点便宜了。&lt;/Text&gt;&#13;&#10;      &lt;/Box&gt;&#13;&#10;      &lt;Box style={{ flex: 1, background: '#FFFFFF', border: '1px solid #E3E8F5', borderRadius: 14, padding: 26, flexDirection: 'column', justifyContent: 'space-between' }}&gt;&#13;&#10;        &lt;Text style={{ fontSize: 56, fontWeight: 'bold', color: '#4C4DDC' }}&gt;02&lt;/Text&gt;&#13;&#10;        &lt;Text style={{ fontSize: 22, fontWeight: 'bold', color: '#0C1222' }}&gt;明天该买多少&lt;/Text&gt;&#13;&#10;        &lt;Text style={{ fontSize: 15, color: '#5C6780', lineHeight: 1.8 }}&gt;采购靠经验：缺货和压货同时发生，&lt;br /&gt;这套数据里最紧的食材只够 1.5 天。&lt;/Text&gt;&#13;&#10;      &lt;/Box&gt;&#13;&#10;      &lt;Box style={{ flex: 1, background: '#FFFFFF', border: '1px solid #E3E8F5', borderRadius: 14, padding: 26, flexDirection: 'column', justifyContent: 'space-between' }}&gt;&#13;&#10;        &lt;Text style={{ fontSize: 56, fontWeight: 'bold', color: '#4C4DDC' }}&gt;03&lt;/Text&gt;&#13;&#10;        &lt;Text style={{ fontSize: 22, fontWeight: 'bold', color: '#0C1222' }}&gt;哪道菜在赔钱&lt;/Text&gt;&#13;&#10;        &lt;Text style={{ fontSize: 15, color: '#5C6780', lineHeight: 1.8 }}&gt;207 道菜只有 107 道算得清成本，&lt;br /&gt;卖得越多，可能亏得越多。&lt;/Text&gt;&#13;&#10;      &lt;/Box&gt;&#13;&#10;    &lt;/Box&gt;&#13;&#10;    &lt;Box style={{ marginTop: 34, paddingTop: 24, borderTop: '1px solid #E3E8F5', flexDirection: 'row', alignItems: 'center', gap: 16 }}&gt;&#13;&#10;      &lt;Box style={{ width: 6, height: 28, background: '#4C4DDC', borderRadius: 3 }} /&gt;&#13;&#10;      &lt;Text style={{ fontSize: 24, color: '#0C1222' }}&gt;中小餐饮不缺数据，缺一个&lt;Text style={{ fontSize: 24, fontWeight: 'bold', color: '#4C4DDC' }}&gt;能替他做决定&lt;/Text&gt;的角色。&lt;/Text&gt;&#13;&#10;    &lt;/Box&gt;&#13;&#10;  &lt;/Box&gt;&#13;&#10;  &lt;Box style={{ height: 36, flexDirection: 'row', justifyContent: 'space-between', alignItems: 'flex-end' }}&gt;&#13;&#10;    &lt;Text style={{ fontSize: 12, color: '#8A93A8' }}&gt;2026 武汉 1024 · 产业应用赛道&lt;/Text&gt;&#13;&#10;    &lt;Text style={{ fontSize: 12, color: '#8A93A8' }}&gt;02 / 12&lt;/Text&gt;&#13;&#10;  &lt;/Box&gt;&#13;&#10;&lt;/Slide&gt;"/>
+        <p:cNvPr id="140" name=""/>
         <p:cNvGrpSpPr/>
         <p:nvPr/>
       </p:nvGrpSpPr>
@@ -6930,7 +6979,7 @@
       </p:grpSpPr>
       <p:sp>
         <p:nvSpPr>
-          <p:cNvPr id="139" name=""/>
+          <p:cNvPr id="141" name=""/>
           <p:cNvSpPr/>
           <p:nvPr/>
         </p:nvSpPr>
@@ -6949,12 +6998,15 @@
         </p:spPr>
         <p:txBody>
           <a:bodyPr/>
-          <a:p/>
-        </p:txBody>
-      </p:sp>
-      <p:sp>
-        <p:nvSpPr>
-          <p:cNvPr id="140" name="" descr="{&quot;isTemplate&quot;:true,&quot;type&quot;:&quot;text&quot;}"/>
+          <a:p>
+            <a:pPr/>
+            <a:endParaRPr/>
+          </a:p>
+        </p:txBody>
+      </p:sp>
+      <p:sp>
+        <p:nvSpPr>
+          <p:cNvPr id="142" name="" descr="{&quot;isTemplate&quot;:true,&quot;type&quot;:&quot;text&quot;}"/>
           <p:cNvSpPr txBox="1"/>
           <p:nvPr/>
         </p:nvSpPr>
@@ -6989,7 +7041,7 @@
       </p:sp>
       <p:sp>
         <p:nvSpPr>
-          <p:cNvPr id="141" name="" descr="{&quot;isTemplate&quot;:true,&quot;type&quot;:&quot;text&quot;}"/>
+          <p:cNvPr id="143" name="" descr="{&quot;isTemplate&quot;:true,&quot;type&quot;:&quot;text&quot;}"/>
           <p:cNvSpPr txBox="1"/>
           <p:nvPr/>
         </p:nvSpPr>
@@ -7024,7 +7076,7 @@
       </p:sp>
       <p:sp>
         <p:nvSpPr>
-          <p:cNvPr id="142" name=""/>
+          <p:cNvPr id="144" name=""/>
           <p:cNvSpPr/>
           <p:nvPr/>
         </p:nvSpPr>
@@ -7050,12 +7102,15 @@
         </p:spPr>
         <p:txBody>
           <a:bodyPr/>
-          <a:p/>
-        </p:txBody>
-      </p:sp>
-      <p:sp>
-        <p:nvSpPr>
-          <p:cNvPr id="143" name=""/>
+          <a:p>
+            <a:pPr/>
+            <a:endParaRPr/>
+          </a:p>
+        </p:txBody>
+      </p:sp>
+      <p:sp>
+        <p:nvSpPr>
+          <p:cNvPr id="145" name=""/>
           <p:cNvSpPr/>
           <p:nvPr/>
         </p:nvSpPr>
@@ -7076,12 +7131,15 @@
         </p:spPr>
         <p:txBody>
           <a:bodyPr/>
-          <a:p/>
-        </p:txBody>
-      </p:sp>
-      <p:sp>
-        <p:nvSpPr>
-          <p:cNvPr id="144" name="" descr="{&quot;isTemplate&quot;:true,&quot;type&quot;:&quot;text&quot;}"/>
+          <a:p>
+            <a:pPr/>
+            <a:endParaRPr/>
+          </a:p>
+        </p:txBody>
+      </p:sp>
+      <p:sp>
+        <p:nvSpPr>
+          <p:cNvPr id="146" name="" descr="{&quot;isTemplate&quot;:true,&quot;type&quot;:&quot;text&quot;}"/>
           <p:cNvSpPr txBox="1"/>
           <p:nvPr/>
         </p:nvSpPr>
@@ -7126,7 +7184,7 @@
       </p:sp>
       <p:sp>
         <p:nvSpPr>
-          <p:cNvPr id="145" name=""/>
+          <p:cNvPr id="147" name=""/>
           <p:cNvSpPr/>
           <p:nvPr/>
         </p:nvSpPr>
@@ -7147,12 +7205,15 @@
         </p:spPr>
         <p:txBody>
           <a:bodyPr/>
-          <a:p/>
-        </p:txBody>
-      </p:sp>
-      <p:sp>
-        <p:nvSpPr>
-          <p:cNvPr id="146" name=""/>
+          <a:p>
+            <a:pPr/>
+            <a:endParaRPr/>
+          </a:p>
+        </p:txBody>
+      </p:sp>
+      <p:sp>
+        <p:nvSpPr>
+          <p:cNvPr id="148" name=""/>
           <p:cNvSpPr/>
           <p:nvPr/>
         </p:nvSpPr>
@@ -7178,12 +7239,15 @@
         </p:spPr>
         <p:txBody>
           <a:bodyPr/>
-          <a:p/>
-        </p:txBody>
-      </p:sp>
-      <p:sp>
-        <p:nvSpPr>
-          <p:cNvPr id="147" name="" descr="{&quot;isTemplate&quot;:true,&quot;type&quot;:&quot;text&quot;}"/>
+          <a:p>
+            <a:pPr/>
+            <a:endParaRPr/>
+          </a:p>
+        </p:txBody>
+      </p:sp>
+      <p:sp>
+        <p:nvSpPr>
+          <p:cNvPr id="149" name="" descr="{&quot;isTemplate&quot;:true,&quot;type&quot;:&quot;text&quot;}"/>
           <p:cNvSpPr txBox="1"/>
           <p:nvPr/>
         </p:nvSpPr>
@@ -7218,7 +7282,7 @@
       </p:sp>
       <p:sp>
         <p:nvSpPr>
-          <p:cNvPr id="148" name="" descr="{&quot;isTemplate&quot;:true,&quot;type&quot;:&quot;text&quot;}"/>
+          <p:cNvPr id="150" name="" descr="{&quot;isTemplate&quot;:true,&quot;type&quot;:&quot;text&quot;}"/>
           <p:cNvSpPr txBox="1"/>
           <p:nvPr/>
         </p:nvSpPr>
@@ -7253,7 +7317,7 @@
       </p:sp>
       <p:sp>
         <p:nvSpPr>
-          <p:cNvPr id="149" name="" descr="{&quot;isTemplate&quot;:true,&quot;type&quot;:&quot;text&quot;}"/>
+          <p:cNvPr id="151" name="" descr="{&quot;isTemplate&quot;:true,&quot;type&quot;:&quot;text&quot;}"/>
           <p:cNvSpPr txBox="1"/>
           <p:nvPr/>
         </p:nvSpPr>
@@ -7306,7 +7370,7 @@
       </p:sp>
       <p:sp>
         <p:nvSpPr>
-          <p:cNvPr id="150" name=""/>
+          <p:cNvPr id="152" name=""/>
           <p:cNvSpPr/>
           <p:nvPr/>
         </p:nvSpPr>
@@ -7332,12 +7396,15 @@
         </p:spPr>
         <p:txBody>
           <a:bodyPr/>
-          <a:p/>
-        </p:txBody>
-      </p:sp>
-      <p:sp>
-        <p:nvSpPr>
-          <p:cNvPr id="151" name="" descr="{&quot;isTemplate&quot;:true,&quot;type&quot;:&quot;text&quot;}"/>
+          <a:p>
+            <a:pPr/>
+            <a:endParaRPr/>
+          </a:p>
+        </p:txBody>
+      </p:sp>
+      <p:sp>
+        <p:nvSpPr>
+          <p:cNvPr id="153" name="" descr="{&quot;isTemplate&quot;:true,&quot;type&quot;:&quot;text&quot;}"/>
           <p:cNvSpPr txBox="1"/>
           <p:nvPr/>
         </p:nvSpPr>
@@ -7372,7 +7439,7 @@
       </p:sp>
       <p:sp>
         <p:nvSpPr>
-          <p:cNvPr id="152" name="" descr="{&quot;isTemplate&quot;:true,&quot;type&quot;:&quot;text&quot;}"/>
+          <p:cNvPr id="154" name="" descr="{&quot;isTemplate&quot;:true,&quot;type&quot;:&quot;text&quot;}"/>
           <p:cNvSpPr txBox="1"/>
           <p:nvPr/>
         </p:nvSpPr>
@@ -7407,7 +7474,7 @@
       </p:sp>
       <p:sp>
         <p:nvSpPr>
-          <p:cNvPr id="153" name="" descr="{&quot;isTemplate&quot;:true,&quot;type&quot;:&quot;text&quot;}"/>
+          <p:cNvPr id="155" name="" descr="{&quot;isTemplate&quot;:true,&quot;type&quot;:&quot;text&quot;}"/>
           <p:cNvSpPr txBox="1"/>
           <p:nvPr/>
         </p:nvSpPr>
@@ -7480,7 +7547,7 @@
       </p:sp>
       <p:sp>
         <p:nvSpPr>
-          <p:cNvPr id="154" name=""/>
+          <p:cNvPr id="156" name=""/>
           <p:cNvSpPr/>
           <p:nvPr/>
         </p:nvSpPr>
@@ -7506,12 +7573,15 @@
         </p:spPr>
         <p:txBody>
           <a:bodyPr/>
-          <a:p/>
-        </p:txBody>
-      </p:sp>
-      <p:sp>
-        <p:nvSpPr>
-          <p:cNvPr id="155" name="" descr="{&quot;isTemplate&quot;:true,&quot;type&quot;:&quot;text&quot;}"/>
+          <a:p>
+            <a:pPr/>
+            <a:endParaRPr/>
+          </a:p>
+        </p:txBody>
+      </p:sp>
+      <p:sp>
+        <p:nvSpPr>
+          <p:cNvPr id="157" name="" descr="{&quot;isTemplate&quot;:true,&quot;type&quot;:&quot;text&quot;}"/>
           <p:cNvSpPr txBox="1"/>
           <p:nvPr/>
         </p:nvSpPr>
@@ -7546,7 +7616,7 @@
       </p:sp>
       <p:sp>
         <p:nvSpPr>
-          <p:cNvPr id="156" name="" descr="{&quot;isTemplate&quot;:true,&quot;type&quot;:&quot;text&quot;}"/>
+          <p:cNvPr id="158" name="" descr="{&quot;isTemplate&quot;:true,&quot;type&quot;:&quot;text&quot;}"/>
           <p:cNvSpPr txBox="1"/>
           <p:nvPr/>
         </p:nvSpPr>
@@ -7581,7 +7651,7 @@
       </p:sp>
       <p:sp>
         <p:nvSpPr>
-          <p:cNvPr id="157" name="" descr="{&quot;isTemplate&quot;:true,&quot;type&quot;:&quot;text&quot;}"/>
+          <p:cNvPr id="159" name="" descr="{&quot;isTemplate&quot;:true,&quot;type&quot;:&quot;text&quot;}"/>
           <p:cNvSpPr txBox="1"/>
           <p:nvPr/>
         </p:nvSpPr>
@@ -7664,7 +7734,7 @@
       </p:sp>
       <p:sp>
         <p:nvSpPr>
-          <p:cNvPr id="158" name=""/>
+          <p:cNvPr id="160" name=""/>
           <p:cNvSpPr/>
           <p:nvPr/>
         </p:nvSpPr>
@@ -7699,12 +7769,15 @@
         </p:spPr>
         <p:txBody>
           <a:bodyPr/>
-          <a:p/>
-        </p:txBody>
-      </p:sp>
-      <p:sp>
-        <p:nvSpPr>
-          <p:cNvPr id="159" name=""/>
+          <a:p>
+            <a:pPr/>
+            <a:endParaRPr/>
+          </a:p>
+        </p:txBody>
+      </p:sp>
+      <p:sp>
+        <p:nvSpPr>
+          <p:cNvPr id="161" name=""/>
           <p:cNvSpPr/>
           <p:nvPr/>
         </p:nvSpPr>
@@ -7725,12 +7798,15 @@
         </p:spPr>
         <p:txBody>
           <a:bodyPr/>
-          <a:p/>
-        </p:txBody>
-      </p:sp>
-      <p:sp>
-        <p:nvSpPr>
-          <p:cNvPr id="160" name="" descr="{&quot;isTemplate&quot;:true,&quot;type&quot;:&quot;text&quot;}"/>
+          <a:p>
+            <a:pPr/>
+            <a:endParaRPr/>
+          </a:p>
+        </p:txBody>
+      </p:sp>
+      <p:sp>
+        <p:nvSpPr>
+          <p:cNvPr id="162" name="" descr="{&quot;isTemplate&quot;:true,&quot;type&quot;:&quot;text&quot;}"/>
           <p:cNvSpPr txBox="1"/>
           <p:nvPr/>
         </p:nvSpPr>
@@ -7785,7 +7861,7 @@
       </p:sp>
       <p:sp>
         <p:nvSpPr>
-          <p:cNvPr id="161" name="" descr="{&quot;isTemplate&quot;:true,&quot;type&quot;:&quot;text&quot;}"/>
+          <p:cNvPr id="163" name="" descr="{&quot;isTemplate&quot;:true,&quot;type&quot;:&quot;text&quot;}"/>
           <p:cNvSpPr txBox="1"/>
           <p:nvPr/>
         </p:nvSpPr>
@@ -7850,7 +7926,7 @@
       </p:sp>
       <p:sp>
         <p:nvSpPr>
-          <p:cNvPr id="162" name="" descr="{&quot;isTemplate&quot;:true,&quot;type&quot;:&quot;text&quot;}"/>
+          <p:cNvPr id="164" name="" descr="{&quot;isTemplate&quot;:true,&quot;type&quot;:&quot;text&quot;}"/>
           <p:cNvSpPr txBox="1"/>
           <p:nvPr/>
         </p:nvSpPr>
@@ -7893,7 +7969,7 @@
   <p:cSld>
     <p:spTree>
       <p:nvGrpSpPr>
-        <p:cNvPr id="163" name="" descr="&lt;Slide style={{ width: 1280, height: 720, background: '#F6F8FD', padding: '56px 72px', flexDirection: 'column' }}&gt;&#13;&#10;  &lt;Box style={{ height: 96, flexDirection: 'row', justifyContent: 'space-between', alignItems: 'flex-start' }}&gt;&#13;&#10;    &lt;Box style={{ flexDirection: 'column', gap: 8 }}&gt;&#13;&#10;      &lt;Text style={{ fontSize: 34, fontWeight: 'bold', color: '#0C1222' }}&gt;分水岭不在图表，在「能不能动手」&lt;/Text&gt;&#13;&#10;      &lt;Text style={{ fontSize: 15, color: '#5C6780' }}&gt;同样一份营收下滑，两条完全不同的处理路径&lt;/Text&gt;&#13;&#10;    &lt;/Box&gt;&#13;&#10;    &lt;Box style={{ flexDirection: 'row', alignItems: 'center', gap: 6, padding: '5px 12px', background: '#EEF1FE', border: '1px solid #DDE2F5', borderRadius: 999 }}&gt;&#13;&#10;      &lt;Box style={{ width: 6, height: 6, borderRadius: 3, background: '#4C4DDC' }} /&gt;&#13;&#10;      &lt;Text style={{ fontSize: 12, color: '#4C4DDC', fontWeight: 'bold', letterSpacing: 1 }}&gt;AI 掌柜&lt;/Text&gt;&#13;&#10;    &lt;/Box&gt;&#13;&#10;  &lt;/Box&gt;&#13;&#10;  &lt;Box style={{ width: 72, height: 3, background: '#4C4DDC', borderRadius: 2, marginTop: 2, marginBottom: 12 }} /&gt;&#13;&#10;  &lt;Box style={{ flex: 1, paddingTop: 8 }}&gt;&#13;&#10;    &lt;Box style={{ flexDirection: 'row', gap: 24, height: 330 }}&gt;&#13;&#10;      &lt;Box style={{ flex: 1, background: '#FBFCFE', border: '1px solid #E3E8F5', borderRadius: 14, padding: 26 }}&gt;&#13;&#10;        &lt;Text style={{ fontSize: 13, color: '#8A93A8', letterSpacing: 2 }}&gt;传统 BI / 经营看板&lt;/Text&gt;&#13;&#10;        &lt;Text style={{ fontSize: 26, fontWeight: 'bold', color: '#5C6780', marginTop: 10 }}&gt;价值停在「知道」&lt;/Text&gt;&#13;&#10;        &lt;Box style={{ marginTop: 22, flexDirection: 'column', gap: 14 }}&gt;&#13;&#10;          &lt;Text style={{ fontSize: 16, color: '#5C6780' }}&gt;看板 → 发现跌了&lt;/Text&gt;&#13;&#10;          &lt;Text style={{ fontSize: 16, color: '#5C6780' }}&gt;→ 自己判断原因&lt;/Text&gt;&#13;&#10;          &lt;Text style={{ fontSize: 16, color: '#5C6780' }}&gt;→ 自己打电话订货&lt;/Text&gt;&#13;&#10;          &lt;Text style={{ fontSize: 16, color: '#5C6780' }}&gt;→ 一周后忘了复盘&lt;/Text&gt;&#13;&#10;        &lt;/Box&gt;&#13;&#10;      &lt;/Box&gt;&#13;&#10;      &lt;Box style={{ flex: 1, background: '#EEF1FE', border: '1px solid #C9CDF6', borderRadius: 14, padding: 26 }}&gt;&#13;&#10;        &lt;Text style={{ fontSize: 13, color: '#4C4DDC', letterSpacing: 2 }}&gt;AI 掌柜&lt;/Text&gt;&#13;&#10;        &lt;Text style={{ fontSize: 26, fontWeight: 'bold', color: '#0C1222', marginTop: 10 }}&gt;价值走到「改变」&lt;/Text&gt;&#13;&#10;        &lt;Box style={{ marginTop: 22, flexDirection: 'column', gap: 14 }}&gt;&#13;&#10;          &lt;Text style={{ fontSize: 16, color: '#0C1222' }}&gt;驾驶舱 → 3 件事 + 证据&lt;/Text&gt;&#13;&#10;          &lt;Text style={{ fontSize: 16, color: '#0C1222' }}&gt;→ 拆解成客流 / 客单价&lt;/Text&gt;&#13;&#10;          &lt;Text style={{ fontSize: 16, color: '#0C1222' }}&gt;→ 一键生成采购单并入库&lt;/Text&gt;&#13;&#10;          &lt;Text style={{ fontSize: 16, color: '#0C1222' }}&gt;→ 7 天后自动回填效果&lt;/Text&gt;&#13;&#10;        &lt;/Box&gt;&#13;&#10;      &lt;/Box&gt;&#13;&#10;    &lt;/Box&gt;&#13;&#10;    &lt;Box style={{ marginTop: 28, background: '#EEF1FE', border: '1px solid #C9CDF6', borderRadius: 12, padding: '18px 24px', flexDirection: 'row', alignItems: 'center', gap: 12 }}&gt;&#13;&#10;      &lt;Text style={{ fontSize: 11, color: '#4C4DDC', fontWeight: 'bold', letterSpacing: 2, width: 96 }}&gt;同一条链路&lt;/Text&gt;&#13;&#10;      &lt;Text style={{ fontSize: 15, color: '#0C1222' }}&gt;发现异常&lt;/Text&gt;&#13;&#10;      &lt;Text style={{ fontSize: 15, color: '#9AA3BE' }}&gt;→&lt;/Text&gt;&#13;&#10;      &lt;Text style={{ fontSize: 15, color: '#0C1222' }}&gt;算清原因&lt;/Text&gt;&#13;&#10;      &lt;Text style={{ fontSize: 15, color: '#9AA3BE' }}&gt;→&lt;/Text&gt;&#13;&#10;      &lt;Text style={{ fontSize: 15, color: '#0C1222' }}&gt;动手执行&lt;/Text&gt;&#13;&#10;      &lt;Text style={{ fontSize: 15, color: '#9AA3BE' }}&gt;→&lt;/Text&gt;&#13;&#10;      &lt;Text style={{ fontSize: 15, color: '#0C1222' }}&gt;7 天后复核&lt;/Text&gt;&#13;&#10;      &lt;Text style={{ fontSize: 12, color: '#5C6780', marginLeft: 8 }}&gt;四步不换页面&lt;/Text&gt;&#13;&#10;    &lt;/Box&gt;&#13;&#10;    &lt;Box style={{ marginTop: 22, flexDirection: 'row', gap: 14 }}&gt;&#13;&#10;      &lt;Text style={{ fontSize: 15, color: '#5C6780' }}&gt;三个关键词&lt;/Text&gt;&#13;&#10;      &lt;Text style={{ fontSize: 15, color: '#4C4DDC', fontWeight: 'bold' }}&gt;可执行 · 可追溯 · 可撤销&lt;/Text&gt;&#13;&#10;    &lt;/Box&gt;&#13;&#10;  &lt;/Box&gt;&#13;&#10;  &lt;Box style={{ height: 36, flexDirection: 'row', justifyContent: 'space-between', alignItems: 'flex-end' }}&gt;&#13;&#10;    &lt;Text style={{ fontSize: 12, color: '#8A93A8' }}&gt;2026 武汉 1024 · 产业应用赛道&lt;/Text&gt;&#13;&#10;    &lt;Text style={{ fontSize: 12, color: '#8A93A8' }}&gt;03 / 12&lt;/Text&gt;&#13;&#10;  &lt;/Box&gt;&#13;&#10;&lt;/Slide&gt;"/>
+        <p:cNvPr id="165" name=""/>
         <p:cNvGrpSpPr/>
         <p:nvPr/>
       </p:nvGrpSpPr>
@@ -7907,7 +7983,7 @@
       </p:grpSpPr>
       <p:sp>
         <p:nvSpPr>
-          <p:cNvPr id="164" name=""/>
+          <p:cNvPr id="166" name=""/>
           <p:cNvSpPr/>
           <p:nvPr/>
         </p:nvSpPr>
@@ -7926,12 +8002,15 @@
         </p:spPr>
         <p:txBody>
           <a:bodyPr/>
-          <a:p/>
-        </p:txBody>
-      </p:sp>
-      <p:sp>
-        <p:nvSpPr>
-          <p:cNvPr id="165" name="" descr="{&quot;isTemplate&quot;:true,&quot;type&quot;:&quot;text&quot;}"/>
+          <a:p>
+            <a:pPr/>
+            <a:endParaRPr/>
+          </a:p>
+        </p:txBody>
+      </p:sp>
+      <p:sp>
+        <p:nvSpPr>
+          <p:cNvPr id="167" name="" descr="{&quot;isTemplate&quot;:true,&quot;type&quot;:&quot;text&quot;}"/>
           <p:cNvSpPr txBox="1"/>
           <p:nvPr/>
         </p:nvSpPr>
@@ -7966,7 +8045,7 @@
       </p:sp>
       <p:sp>
         <p:nvSpPr>
-          <p:cNvPr id="166" name="" descr="{&quot;isTemplate&quot;:true,&quot;type&quot;:&quot;text&quot;}"/>
+          <p:cNvPr id="168" name="" descr="{&quot;isTemplate&quot;:true,&quot;type&quot;:&quot;text&quot;}"/>
           <p:cNvSpPr txBox="1"/>
           <p:nvPr/>
         </p:nvSpPr>
@@ -8001,7 +8080,7 @@
       </p:sp>
       <p:sp>
         <p:nvSpPr>
-          <p:cNvPr id="167" name=""/>
+          <p:cNvPr id="169" name=""/>
           <p:cNvSpPr/>
           <p:nvPr/>
         </p:nvSpPr>
@@ -8027,12 +8106,15 @@
         </p:spPr>
         <p:txBody>
           <a:bodyPr/>
-          <a:p/>
-        </p:txBody>
-      </p:sp>
-      <p:sp>
-        <p:nvSpPr>
-          <p:cNvPr id="168" name=""/>
+          <a:p>
+            <a:pPr/>
+            <a:endParaRPr/>
+          </a:p>
+        </p:txBody>
+      </p:sp>
+      <p:sp>
+        <p:nvSpPr>
+          <p:cNvPr id="170" name=""/>
           <p:cNvSpPr/>
           <p:nvPr/>
         </p:nvSpPr>
@@ -8053,12 +8135,15 @@
         </p:spPr>
         <p:txBody>
           <a:bodyPr/>
-          <a:p/>
-        </p:txBody>
-      </p:sp>
-      <p:sp>
-        <p:nvSpPr>
-          <p:cNvPr id="169" name="" descr="{&quot;isTemplate&quot;:true,&quot;type&quot;:&quot;text&quot;}"/>
+          <a:p>
+            <a:pPr/>
+            <a:endParaRPr/>
+          </a:p>
+        </p:txBody>
+      </p:sp>
+      <p:sp>
+        <p:nvSpPr>
+          <p:cNvPr id="171" name="" descr="{&quot;isTemplate&quot;:true,&quot;type&quot;:&quot;text&quot;}"/>
           <p:cNvSpPr txBox="1"/>
           <p:nvPr/>
         </p:nvSpPr>
@@ -8103,7 +8188,7 @@
       </p:sp>
       <p:sp>
         <p:nvSpPr>
-          <p:cNvPr id="170" name=""/>
+          <p:cNvPr id="172" name=""/>
           <p:cNvSpPr/>
           <p:nvPr/>
         </p:nvSpPr>
@@ -8124,12 +8209,15 @@
         </p:spPr>
         <p:txBody>
           <a:bodyPr/>
-          <a:p/>
-        </p:txBody>
-      </p:sp>
-      <p:sp>
-        <p:nvSpPr>
-          <p:cNvPr id="171" name=""/>
+          <a:p>
+            <a:pPr/>
+            <a:endParaRPr/>
+          </a:p>
+        </p:txBody>
+      </p:sp>
+      <p:sp>
+        <p:nvSpPr>
+          <p:cNvPr id="173" name=""/>
           <p:cNvSpPr/>
           <p:nvPr/>
         </p:nvSpPr>
@@ -8155,12 +8243,15 @@
         </p:spPr>
         <p:txBody>
           <a:bodyPr/>
-          <a:p/>
-        </p:txBody>
-      </p:sp>
-      <p:sp>
-        <p:nvSpPr>
-          <p:cNvPr id="172" name="" descr="{&quot;isTemplate&quot;:true,&quot;type&quot;:&quot;text&quot;}"/>
+          <a:p>
+            <a:pPr/>
+            <a:endParaRPr/>
+          </a:p>
+        </p:txBody>
+      </p:sp>
+      <p:sp>
+        <p:nvSpPr>
+          <p:cNvPr id="174" name="" descr="{&quot;isTemplate&quot;:true,&quot;type&quot;:&quot;text&quot;}"/>
           <p:cNvSpPr txBox="1"/>
           <p:nvPr/>
         </p:nvSpPr>
@@ -8215,7 +8306,7 @@
       </p:sp>
       <p:sp>
         <p:nvSpPr>
-          <p:cNvPr id="173" name="" descr="{&quot;isTemplate&quot;:true,&quot;type&quot;:&quot;text&quot;}"/>
+          <p:cNvPr id="175" name="" descr="{&quot;isTemplate&quot;:true,&quot;type&quot;:&quot;text&quot;}"/>
           <p:cNvSpPr txBox="1"/>
           <p:nvPr/>
         </p:nvSpPr>
@@ -8250,7 +8341,7 @@
       </p:sp>
       <p:sp>
         <p:nvSpPr>
-          <p:cNvPr id="174" name="" descr="{&quot;isTemplate&quot;:true,&quot;type&quot;:&quot;text&quot;}"/>
+          <p:cNvPr id="176" name="" descr="{&quot;isTemplate&quot;:true,&quot;type&quot;:&quot;text&quot;}"/>
           <p:cNvSpPr txBox="1"/>
           <p:nvPr/>
         </p:nvSpPr>
@@ -8305,7 +8396,7 @@
       </p:sp>
       <p:sp>
         <p:nvSpPr>
-          <p:cNvPr id="175" name="" descr="{&quot;isTemplate&quot;:true,&quot;type&quot;:&quot;text&quot;}"/>
+          <p:cNvPr id="177" name="" descr="{&quot;isTemplate&quot;:true,&quot;type&quot;:&quot;text&quot;}"/>
           <p:cNvSpPr txBox="1"/>
           <p:nvPr/>
         </p:nvSpPr>
@@ -8350,7 +8441,7 @@
       </p:sp>
       <p:sp>
         <p:nvSpPr>
-          <p:cNvPr id="176" name="" descr="{&quot;isTemplate&quot;:true,&quot;type&quot;:&quot;text&quot;}"/>
+          <p:cNvPr id="178" name="" descr="{&quot;isTemplate&quot;:true,&quot;type&quot;:&quot;text&quot;}"/>
           <p:cNvSpPr txBox="1"/>
           <p:nvPr/>
         </p:nvSpPr>
@@ -8395,7 +8486,7 @@
       </p:sp>
       <p:sp>
         <p:nvSpPr>
-          <p:cNvPr id="177" name="" descr="{&quot;isTemplate&quot;:true,&quot;type&quot;:&quot;text&quot;}"/>
+          <p:cNvPr id="179" name="" descr="{&quot;isTemplate&quot;:true,&quot;type&quot;:&quot;text&quot;}"/>
           <p:cNvSpPr txBox="1"/>
           <p:nvPr/>
         </p:nvSpPr>
@@ -8440,7 +8531,7 @@
       </p:sp>
       <p:sp>
         <p:nvSpPr>
-          <p:cNvPr id="178" name=""/>
+          <p:cNvPr id="180" name=""/>
           <p:cNvSpPr/>
           <p:nvPr/>
         </p:nvSpPr>
@@ -8466,12 +8557,15 @@
         </p:spPr>
         <p:txBody>
           <a:bodyPr/>
-          <a:p/>
-        </p:txBody>
-      </p:sp>
-      <p:sp>
-        <p:nvSpPr>
-          <p:cNvPr id="179" name="" descr="{&quot;isTemplate&quot;:true,&quot;type&quot;:&quot;text&quot;}"/>
+          <a:p>
+            <a:pPr/>
+            <a:endParaRPr/>
+          </a:p>
+        </p:txBody>
+      </p:sp>
+      <p:sp>
+        <p:nvSpPr>
+          <p:cNvPr id="181" name="" descr="{&quot;isTemplate&quot;:true,&quot;type&quot;:&quot;text&quot;}"/>
           <p:cNvSpPr txBox="1"/>
           <p:nvPr/>
         </p:nvSpPr>
@@ -8516,7 +8610,7 @@
       </p:sp>
       <p:sp>
         <p:nvSpPr>
-          <p:cNvPr id="180" name="" descr="{&quot;isTemplate&quot;:true,&quot;type&quot;:&quot;text&quot;}"/>
+          <p:cNvPr id="182" name="" descr="{&quot;isTemplate&quot;:true,&quot;type&quot;:&quot;text&quot;}"/>
           <p:cNvSpPr txBox="1"/>
           <p:nvPr/>
         </p:nvSpPr>
@@ -8551,7 +8645,7 @@
       </p:sp>
       <p:sp>
         <p:nvSpPr>
-          <p:cNvPr id="181" name="" descr="{&quot;isTemplate&quot;:true,&quot;type&quot;:&quot;text&quot;}"/>
+          <p:cNvPr id="183" name="" descr="{&quot;isTemplate&quot;:true,&quot;type&quot;:&quot;text&quot;}"/>
           <p:cNvSpPr txBox="1"/>
           <p:nvPr/>
         </p:nvSpPr>
@@ -8626,7 +8720,7 @@
       </p:sp>
       <p:sp>
         <p:nvSpPr>
-          <p:cNvPr id="182" name="" descr="{&quot;isTemplate&quot;:true,&quot;type&quot;:&quot;text&quot;}"/>
+          <p:cNvPr id="184" name="" descr="{&quot;isTemplate&quot;:true,&quot;type&quot;:&quot;text&quot;}"/>
           <p:cNvSpPr txBox="1"/>
           <p:nvPr/>
         </p:nvSpPr>
@@ -8691,7 +8785,7 @@
       </p:sp>
       <p:sp>
         <p:nvSpPr>
-          <p:cNvPr id="183" name="" descr="{&quot;isTemplate&quot;:true,&quot;type&quot;:&quot;text&quot;}"/>
+          <p:cNvPr id="185" name="" descr="{&quot;isTemplate&quot;:true,&quot;type&quot;:&quot;text&quot;}"/>
           <p:cNvSpPr txBox="1"/>
           <p:nvPr/>
         </p:nvSpPr>
@@ -8736,7 +8830,7 @@
       </p:sp>
       <p:sp>
         <p:nvSpPr>
-          <p:cNvPr id="184" name="" descr="{&quot;isTemplate&quot;:true,&quot;type&quot;:&quot;text&quot;}"/>
+          <p:cNvPr id="186" name="" descr="{&quot;isTemplate&quot;:true,&quot;type&quot;:&quot;text&quot;}"/>
           <p:cNvSpPr txBox="1"/>
           <p:nvPr/>
         </p:nvSpPr>
@@ -8781,7 +8875,7 @@
       </p:sp>
       <p:sp>
         <p:nvSpPr>
-          <p:cNvPr id="185" name=""/>
+          <p:cNvPr id="187" name=""/>
           <p:cNvSpPr/>
           <p:nvPr/>
         </p:nvSpPr>
@@ -8807,12 +8901,15 @@
         </p:spPr>
         <p:txBody>
           <a:bodyPr/>
-          <a:p/>
-        </p:txBody>
-      </p:sp>
-      <p:sp>
-        <p:nvSpPr>
-          <p:cNvPr id="186" name="" descr="{&quot;isTemplate&quot;:true,&quot;type&quot;:&quot;text&quot;}"/>
+          <a:p>
+            <a:pPr/>
+            <a:endParaRPr/>
+          </a:p>
+        </p:txBody>
+      </p:sp>
+      <p:sp>
+        <p:nvSpPr>
+          <p:cNvPr id="188" name="" descr="{&quot;isTemplate&quot;:true,&quot;type&quot;:&quot;text&quot;}"/>
           <p:cNvSpPr txBox="1"/>
           <p:nvPr/>
         </p:nvSpPr>
@@ -8847,7 +8944,7 @@
       </p:sp>
       <p:sp>
         <p:nvSpPr>
-          <p:cNvPr id="187" name="" descr="{&quot;isTemplate&quot;:true,&quot;type&quot;:&quot;text&quot;}"/>
+          <p:cNvPr id="189" name="" descr="{&quot;isTemplate&quot;:true,&quot;type&quot;:&quot;text&quot;}"/>
           <p:cNvSpPr txBox="1"/>
           <p:nvPr/>
         </p:nvSpPr>
@@ -8882,7 +8979,7 @@
       </p:sp>
       <p:sp>
         <p:nvSpPr>
-          <p:cNvPr id="188" name="" descr="{&quot;isTemplate&quot;:true,&quot;type&quot;:&quot;text&quot;}"/>
+          <p:cNvPr id="190" name="" descr="{&quot;isTemplate&quot;:true,&quot;type&quot;:&quot;text&quot;}"/>
           <p:cNvSpPr txBox="1"/>
           <p:nvPr/>
         </p:nvSpPr>
@@ -8917,7 +9014,7 @@
       </p:sp>
       <p:sp>
         <p:nvSpPr>
-          <p:cNvPr id="189" name="" descr="{&quot;isTemplate&quot;:true,&quot;type&quot;:&quot;text&quot;}"/>
+          <p:cNvPr id="191" name="" descr="{&quot;isTemplate&quot;:true,&quot;type&quot;:&quot;text&quot;}"/>
           <p:cNvSpPr txBox="1"/>
           <p:nvPr/>
         </p:nvSpPr>
@@ -8952,7 +9049,7 @@
       </p:sp>
       <p:sp>
         <p:nvSpPr>
-          <p:cNvPr id="190" name="" descr="{&quot;isTemplate&quot;:true,&quot;type&quot;:&quot;text&quot;}"/>
+          <p:cNvPr id="192" name="" descr="{&quot;isTemplate&quot;:true,&quot;type&quot;:&quot;text&quot;}"/>
           <p:cNvSpPr txBox="1"/>
           <p:nvPr/>
         </p:nvSpPr>
@@ -8987,7 +9084,7 @@
       </p:sp>
       <p:sp>
         <p:nvSpPr>
-          <p:cNvPr id="191" name="" descr="{&quot;isTemplate&quot;:true,&quot;type&quot;:&quot;text&quot;}"/>
+          <p:cNvPr id="193" name="" descr="{&quot;isTemplate&quot;:true,&quot;type&quot;:&quot;text&quot;}"/>
           <p:cNvSpPr txBox="1"/>
           <p:nvPr/>
         </p:nvSpPr>
@@ -9022,7 +9119,7 @@
       </p:sp>
       <p:sp>
         <p:nvSpPr>
-          <p:cNvPr id="192" name="" descr="{&quot;isTemplate&quot;:true,&quot;type&quot;:&quot;text&quot;}"/>
+          <p:cNvPr id="194" name="" descr="{&quot;isTemplate&quot;:true,&quot;type&quot;:&quot;text&quot;}"/>
           <p:cNvSpPr txBox="1"/>
           <p:nvPr/>
         </p:nvSpPr>
@@ -9057,7 +9154,7 @@
       </p:sp>
       <p:sp>
         <p:nvSpPr>
-          <p:cNvPr id="193" name="" descr="{&quot;isTemplate&quot;:true,&quot;type&quot;:&quot;text&quot;}"/>
+          <p:cNvPr id="195" name="" descr="{&quot;isTemplate&quot;:true,&quot;type&quot;:&quot;text&quot;}"/>
           <p:cNvSpPr txBox="1"/>
           <p:nvPr/>
         </p:nvSpPr>
@@ -9102,7 +9199,7 @@
       </p:sp>
       <p:sp>
         <p:nvSpPr>
-          <p:cNvPr id="194" name="" descr="{&quot;isTemplate&quot;:true,&quot;type&quot;:&quot;text&quot;}"/>
+          <p:cNvPr id="196" name="" descr="{&quot;isTemplate&quot;:true,&quot;type&quot;:&quot;text&quot;}"/>
           <p:cNvSpPr txBox="1"/>
           <p:nvPr/>
         </p:nvSpPr>
@@ -9137,7 +9234,7 @@
       </p:sp>
       <p:sp>
         <p:nvSpPr>
-          <p:cNvPr id="195" name="" descr="{&quot;isTemplate&quot;:true,&quot;type&quot;:&quot;text&quot;}"/>
+          <p:cNvPr id="197" name="" descr="{&quot;isTemplate&quot;:true,&quot;type&quot;:&quot;text&quot;}"/>
           <p:cNvSpPr txBox="1"/>
           <p:nvPr/>
         </p:nvSpPr>
@@ -9172,7 +9269,7 @@
       </p:sp>
       <p:sp>
         <p:nvSpPr>
-          <p:cNvPr id="196" name="" descr="{&quot;isTemplate&quot;:true,&quot;type&quot;:&quot;text&quot;}"/>
+          <p:cNvPr id="198" name="" descr="{&quot;isTemplate&quot;:true,&quot;type&quot;:&quot;text&quot;}"/>
           <p:cNvSpPr txBox="1"/>
           <p:nvPr/>
         </p:nvSpPr>
@@ -9247,7 +9344,7 @@
       </p:sp>
       <p:sp>
         <p:nvSpPr>
-          <p:cNvPr id="197" name="" descr="{&quot;isTemplate&quot;:true,&quot;type&quot;:&quot;text&quot;}"/>
+          <p:cNvPr id="199" name="" descr="{&quot;isTemplate&quot;:true,&quot;type&quot;:&quot;text&quot;}"/>
           <p:cNvSpPr txBox="1"/>
           <p:nvPr/>
         </p:nvSpPr>
@@ -9312,7 +9409,7 @@
       </p:sp>
       <p:sp>
         <p:nvSpPr>
-          <p:cNvPr id="198" name="" descr="{&quot;isTemplate&quot;:true,&quot;type&quot;:&quot;text&quot;}"/>
+          <p:cNvPr id="200" name="" descr="{&quot;isTemplate&quot;:true,&quot;type&quot;:&quot;text&quot;}"/>
           <p:cNvSpPr txBox="1"/>
           <p:nvPr/>
         </p:nvSpPr>
@@ -9355,7 +9452,7 @@
   <p:cSld>
     <p:spTree>
       <p:nvGrpSpPr>
-        <p:cNvPr id="199" name="" descr="&lt;Slide style={{ width: 1280, height: 720, background: '#F6F8FD', padding: '56px 72px', flexDirection: 'column' }}&gt;&#13;&#10;  &lt;Box style={{ height: 96, flexDirection: 'row', justifyContent: 'space-between', alignItems: 'flex-start' }}&gt;&#13;&#10;    &lt;Box style={{ flexDirection: 'column', gap: 8 }}&gt;&#13;&#10;      &lt;Text style={{ fontSize: 34, fontWeight: 'bold', color: '#0C1222' }}&gt;四块能力，缺一块都落不了地&lt;/Text&gt;&#13;&#10;      &lt;Text style={{ fontSize: 15, color: '#5C6780' }}&gt;看得懂、算得准、动得了、说得清&lt;/Text&gt;&#13;&#10;    &lt;/Box&gt;&#13;&#10;    &lt;Box style={{ flexDirection: 'row', alignItems: 'center', gap: 6, padding: '5px 12px', background: '#EEF1FE', border: '1px solid #DDE2F5', borderRadius: 999 }}&gt;&#13;&#10;      &lt;Box style={{ width: 6, height: 6, borderRadius: 3, background: '#4C4DDC' }} /&gt;&#13;&#10;      &lt;Text style={{ fontSize: 12, color: '#4C4DDC', fontWeight: 'bold', letterSpacing: 1 }}&gt;AI 掌柜&lt;/Text&gt;&#13;&#10;    &lt;/Box&gt;&#13;&#10;  &lt;/Box&gt;&#13;&#10;  &lt;Box style={{ width: 72, height: 3, background: '#4C4DDC', borderRadius: 2, marginTop: 2, marginBottom: 12 }} /&gt;&#13;&#10;  &lt;Box style={{ flex: 1, paddingTop: 8 }}&gt;&#13;&#10;    &lt;Box style={{ flexDirection: 'row', gap: 18, height: 250 }}&gt;&#13;&#10;      &lt;Box style={{ flex: 1, background: '#FFFFFF', border: '1px solid #E3E8F5', borderRadius: 14, padding: 24 }}&gt;&#13;&#10;        &lt;Text style={{ fontSize: 20, fontWeight: 'bold', color: '#4C4DDC' }}&gt;看得懂&lt;/Text&gt;&#13;&#10;        &lt;Text style={{ fontSize: 15, color: '#0C1222', marginTop: 12, lineHeight: 1.75 }}&gt;营收 · 客流 · 毛利&lt;br /&gt;时段 · 翻台 · 会员结构&lt;/Text&gt;&#13;&#10;        &lt;Text style={{ fontSize: 13, color: '#5C6780', marginTop: 16 }}&gt;180 天 / 6,803 单&lt;/Text&gt;&#13;&#10;      &lt;/Box&gt;&#13;&#10;      &lt;Box style={{ flex: 1, background: '#FFFFFF', border: '1px solid #E3E8F5', borderRadius: 14, padding: 24 }}&gt;&#13;&#10;        &lt;Text style={{ fontSize: 20, fontWeight: 'bold', color: '#4C4DDC' }}&gt;算得准&lt;/Text&gt;&#13;&#10;        &lt;Text style={{ fontSize: 15, color: '#0C1222', marginTop: 12, lineHeight: 1.75 }}&gt;指标唯一口径&lt;br /&gt;BOM 成本 · 三层预测 · 经营推演&lt;/Text&gt;&#13;&#10;        &lt;Text style={{ fontSize: 13, color: '#5C6780', marginTop: 16 }}&gt;回测误差约 30%（含异常周）&lt;/Text&gt;&#13;&#10;      &lt;/Box&gt;&#13;&#10;      &lt;Box style={{ flex: 1, background: '#FFFFFF', border: '1px solid #E3E8F5', borderRadius: 14, padding: 24 }}&gt;&#13;&#10;        &lt;Text style={{ fontSize: 20, fontWeight: 'bold', color: '#4C4DDC' }}&gt;动得了&lt;/Text&gt;&#13;&#10;        &lt;Text style={{ fontSize: 15, color: '#0C1222', marginTop: 12, lineHeight: 1.75 }}&gt;生成采购单 · 按毛利调价&lt;br /&gt;滞销菜设为主推&lt;/Text&gt;&#13;&#10;        &lt;Text style={{ fontSize: 13, color: '#5C6780', marginTop: 16 }}&gt;3 类动作 · 全部可撤销&lt;/Text&gt;&#13;&#10;      &lt;/Box&gt;&#13;&#10;      &lt;Box style={{ flex: 1, background: '#FFFFFF', border: '1px solid #E3E8F5', borderRadius: 14, padding: 24 }}&gt;&#13;&#10;        &lt;Text style={{ fontSize: 20, fontWeight: 'bold', color: '#4C4DDC' }}&gt;说得清&lt;/Text&gt;&#13;&#10;        &lt;Text style={{ fontSize: 15, color: '#0C1222', marginTop: 12, lineHeight: 1.75 }}&gt;每条结论附证据 SQL&lt;br /&gt;操作留痕 · 一键回滚&lt;/Text&gt;&#13;&#10;        &lt;Text style={{ fontSize: 13, color: '#5C6780', marginTop: 16 }}&gt;8 条越界语句 100% 拦截&lt;/Text&gt;&#13;&#10;      &lt;/Box&gt;&#13;&#10;    &lt;/Box&gt;&#13;&#10;    &lt;Box style={{ marginTop: 28, background: '#FBFCFE', border: '1px solid #E3E8F5', borderRadius: 12, padding: '20px 24px', flexDirection: 'row', alignItems: 'center', gap: 18 }}&gt;&#13;&#10;      &lt;Text style={{ fontSize: 15, color: '#5C6780', width: 110 }}&gt;串联起来&lt;/Text&gt;&#13;&#10;      &lt;Text style={{ fontSize: 17, color: '#0C1222' }}&gt;看到异常 → 算清原因 → 直接处理 → 留下证据，四步在同一屏里完成。&lt;/Text&gt;&#13;&#10;    &lt;/Box&gt;&#13;&#10;  &lt;/Box&gt;&#13;&#10;  &lt;Box style={{ height: 36, flexDirection: 'row', justifyContent: 'space-between', alignItems: 'flex-end' }}&gt;&#13;&#10;    &lt;Text style={{ fontSize: 12, color: '#8A93A8' }}&gt;2026 武汉 1024 · 产业应用赛道&lt;/Text&gt;&#13;&#10;    &lt;Text style={{ fontSize: 12, color: '#8A93A8' }}&gt;04 / 12&lt;/Text&gt;&#13;&#10;  &lt;/Box&gt;&#13;&#10;&lt;/Slide&gt;"/>
+        <p:cNvPr id="201" name=""/>
         <p:cNvGrpSpPr/>
         <p:nvPr/>
       </p:nvGrpSpPr>
@@ -9369,7 +9466,7 @@
       </p:grpSpPr>
       <p:sp>
         <p:nvSpPr>
-          <p:cNvPr id="200" name=""/>
+          <p:cNvPr id="202" name=""/>
           <p:cNvSpPr/>
           <p:nvPr/>
         </p:nvSpPr>
@@ -9388,12 +9485,15 @@
         </p:spPr>
         <p:txBody>
           <a:bodyPr/>
-          <a:p/>
-        </p:txBody>
-      </p:sp>
-      <p:sp>
-        <p:nvSpPr>
-          <p:cNvPr id="201" name="" descr="{&quot;isTemplate&quot;:true,&quot;type&quot;:&quot;text&quot;}"/>
+          <a:p>
+            <a:pPr/>
+            <a:endParaRPr/>
+          </a:p>
+        </p:txBody>
+      </p:sp>
+      <p:sp>
+        <p:nvSpPr>
+          <p:cNvPr id="203" name="" descr="{&quot;isTemplate&quot;:true,&quot;type&quot;:&quot;text&quot;}"/>
           <p:cNvSpPr txBox="1"/>
           <p:nvPr/>
         </p:nvSpPr>
@@ -9428,7 +9528,7 @@
       </p:sp>
       <p:sp>
         <p:nvSpPr>
-          <p:cNvPr id="202" name="" descr="{&quot;isTemplate&quot;:true,&quot;type&quot;:&quot;text&quot;}"/>
+          <p:cNvPr id="204" name="" descr="{&quot;isTemplate&quot;:true,&quot;type&quot;:&quot;text&quot;}"/>
           <p:cNvSpPr txBox="1"/>
           <p:nvPr/>
         </p:nvSpPr>
@@ -9463,7 +9563,7 @@
       </p:sp>
       <p:sp>
         <p:nvSpPr>
-          <p:cNvPr id="203" name=""/>
+          <p:cNvPr id="205" name=""/>
           <p:cNvSpPr/>
           <p:nvPr/>
         </p:nvSpPr>
@@ -9489,12 +9589,15 @@
         </p:spPr>
         <p:txBody>
           <a:bodyPr/>
-          <a:p/>
-        </p:txBody>
-      </p:sp>
-      <p:sp>
-        <p:nvSpPr>
-          <p:cNvPr id="204" name=""/>
+          <a:p>
+            <a:pPr/>
+            <a:endParaRPr/>
+          </a:p>
+        </p:txBody>
+      </p:sp>
+      <p:sp>
+        <p:nvSpPr>
+          <p:cNvPr id="206" name=""/>
           <p:cNvSpPr/>
           <p:nvPr/>
         </p:nvSpPr>
@@ -9515,12 +9618,15 @@
         </p:spPr>
         <p:txBody>
           <a:bodyPr/>
-          <a:p/>
-        </p:txBody>
-      </p:sp>
-      <p:sp>
-        <p:nvSpPr>
-          <p:cNvPr id="205" name="" descr="{&quot;isTemplate&quot;:true,&quot;type&quot;:&quot;text&quot;}"/>
+          <a:p>
+            <a:pPr/>
+            <a:endParaRPr/>
+          </a:p>
+        </p:txBody>
+      </p:sp>
+      <p:sp>
+        <p:nvSpPr>
+          <p:cNvPr id="207" name="" descr="{&quot;isTemplate&quot;:true,&quot;type&quot;:&quot;text&quot;}"/>
           <p:cNvSpPr txBox="1"/>
           <p:nvPr/>
         </p:nvSpPr>
@@ -9565,7 +9671,7 @@
       </p:sp>
       <p:sp>
         <p:nvSpPr>
-          <p:cNvPr id="206" name=""/>
+          <p:cNvPr id="208" name=""/>
           <p:cNvSpPr/>
           <p:nvPr/>
         </p:nvSpPr>
@@ -9586,12 +9692,15 @@
         </p:spPr>
         <p:txBody>
           <a:bodyPr/>
-          <a:p/>
-        </p:txBody>
-      </p:sp>
-      <p:sp>
-        <p:nvSpPr>
-          <p:cNvPr id="207" name=""/>
+          <a:p>
+            <a:pPr/>
+            <a:endParaRPr/>
+          </a:p>
+        </p:txBody>
+      </p:sp>
+      <p:sp>
+        <p:nvSpPr>
+          <p:cNvPr id="209" name=""/>
           <p:cNvSpPr/>
           <p:nvPr/>
         </p:nvSpPr>
@@ -9617,12 +9726,15 @@
         </p:spPr>
         <p:txBody>
           <a:bodyPr/>
-          <a:p/>
-        </p:txBody>
-      </p:sp>
-      <p:sp>
-        <p:nvSpPr>
-          <p:cNvPr id="208" name="" descr="{&quot;isTemplate&quot;:true,&quot;type&quot;:&quot;text&quot;}"/>
+          <a:p>
+            <a:pPr/>
+            <a:endParaRPr/>
+          </a:p>
+        </p:txBody>
+      </p:sp>
+      <p:sp>
+        <p:nvSpPr>
+          <p:cNvPr id="210" name="" descr="{&quot;isTemplate&quot;:true,&quot;type&quot;:&quot;text&quot;}"/>
           <p:cNvSpPr txBox="1"/>
           <p:nvPr/>
         </p:nvSpPr>
@@ -9657,7 +9769,7 @@
       </p:sp>
       <p:sp>
         <p:nvSpPr>
-          <p:cNvPr id="209" name="" descr="{&quot;isTemplate&quot;:true,&quot;type&quot;:&quot;text&quot;}"/>
+          <p:cNvPr id="211" name="" descr="{&quot;isTemplate&quot;:true,&quot;type&quot;:&quot;text&quot;}"/>
           <p:cNvSpPr txBox="1"/>
           <p:nvPr/>
         </p:nvSpPr>
@@ -9790,7 +9902,7 @@
       </p:sp>
       <p:sp>
         <p:nvSpPr>
-          <p:cNvPr id="210" name="" descr="{&quot;isTemplate&quot;:true,&quot;type&quot;:&quot;text&quot;}"/>
+          <p:cNvPr id="212" name="" descr="{&quot;isTemplate&quot;:true,&quot;type&quot;:&quot;text&quot;}"/>
           <p:cNvSpPr txBox="1"/>
           <p:nvPr/>
         </p:nvSpPr>
@@ -9855,7 +9967,7 @@
       </p:sp>
       <p:sp>
         <p:nvSpPr>
-          <p:cNvPr id="211" name=""/>
+          <p:cNvPr id="213" name=""/>
           <p:cNvSpPr/>
           <p:nvPr/>
         </p:nvSpPr>
@@ -9881,12 +9993,15 @@
         </p:spPr>
         <p:txBody>
           <a:bodyPr/>
-          <a:p/>
-        </p:txBody>
-      </p:sp>
-      <p:sp>
-        <p:nvSpPr>
-          <p:cNvPr id="212" name="" descr="{&quot;isTemplate&quot;:true,&quot;type&quot;:&quot;text&quot;}"/>
+          <a:p>
+            <a:pPr/>
+            <a:endParaRPr/>
+          </a:p>
+        </p:txBody>
+      </p:sp>
+      <p:sp>
+        <p:nvSpPr>
+          <p:cNvPr id="214" name="" descr="{&quot;isTemplate&quot;:true,&quot;type&quot;:&quot;text&quot;}"/>
           <p:cNvSpPr txBox="1"/>
           <p:nvPr/>
         </p:nvSpPr>
@@ -9921,7 +10036,7 @@
       </p:sp>
       <p:sp>
         <p:nvSpPr>
-          <p:cNvPr id="213" name="" descr="{&quot;isTemplate&quot;:true,&quot;type&quot;:&quot;text&quot;}"/>
+          <p:cNvPr id="215" name="" descr="{&quot;isTemplate&quot;:true,&quot;type&quot;:&quot;text&quot;}"/>
           <p:cNvSpPr txBox="1"/>
           <p:nvPr/>
         </p:nvSpPr>
@@ -10024,7 +10139,7 @@
       </p:sp>
       <p:sp>
         <p:nvSpPr>
-          <p:cNvPr id="214" name="" descr="{&quot;isTemplate&quot;:true,&quot;type&quot;:&quot;text&quot;}"/>
+          <p:cNvPr id="216" name="" descr="{&quot;isTemplate&quot;:true,&quot;type&quot;:&quot;text&quot;}"/>
           <p:cNvSpPr txBox="1"/>
           <p:nvPr/>
         </p:nvSpPr>
@@ -10079,7 +10194,7 @@
       </p:sp>
       <p:sp>
         <p:nvSpPr>
-          <p:cNvPr id="215" name=""/>
+          <p:cNvPr id="217" name=""/>
           <p:cNvSpPr/>
           <p:nvPr/>
         </p:nvSpPr>
@@ -10105,12 +10220,15 @@
         </p:spPr>
         <p:txBody>
           <a:bodyPr/>
-          <a:p/>
-        </p:txBody>
-      </p:sp>
-      <p:sp>
-        <p:nvSpPr>
-          <p:cNvPr id="216" name="" descr="{&quot;isTemplate&quot;:true,&quot;type&quot;:&quot;text&quot;}"/>
+          <a:p>
+            <a:pPr/>
+            <a:endParaRPr/>
+          </a:p>
+        </p:txBody>
+      </p:sp>
+      <p:sp>
+        <p:nvSpPr>
+          <p:cNvPr id="218" name="" descr="{&quot;isTemplate&quot;:true,&quot;type&quot;:&quot;text&quot;}"/>
           <p:cNvSpPr txBox="1"/>
           <p:nvPr/>
         </p:nvSpPr>
@@ -10145,7 +10263,7 @@
       </p:sp>
       <p:sp>
         <p:nvSpPr>
-          <p:cNvPr id="217" name="" descr="{&quot;isTemplate&quot;:true,&quot;type&quot;:&quot;text&quot;}"/>
+          <p:cNvPr id="219" name="" descr="{&quot;isTemplate&quot;:true,&quot;type&quot;:&quot;text&quot;}"/>
           <p:cNvSpPr txBox="1"/>
           <p:nvPr/>
         </p:nvSpPr>
@@ -10218,7 +10336,7 @@
       </p:sp>
       <p:sp>
         <p:nvSpPr>
-          <p:cNvPr id="218" name="" descr="{&quot;isTemplate&quot;:true,&quot;type&quot;:&quot;text&quot;}"/>
+          <p:cNvPr id="220" name="" descr="{&quot;isTemplate&quot;:true,&quot;type&quot;:&quot;text&quot;}"/>
           <p:cNvSpPr txBox="1"/>
           <p:nvPr/>
         </p:nvSpPr>
@@ -10283,7 +10401,7 @@
       </p:sp>
       <p:sp>
         <p:nvSpPr>
-          <p:cNvPr id="219" name=""/>
+          <p:cNvPr id="221" name=""/>
           <p:cNvSpPr/>
           <p:nvPr/>
         </p:nvSpPr>
@@ -10309,12 +10427,15 @@
         </p:spPr>
         <p:txBody>
           <a:bodyPr/>
-          <a:p/>
-        </p:txBody>
-      </p:sp>
-      <p:sp>
-        <p:nvSpPr>
-          <p:cNvPr id="220" name="" descr="{&quot;isTemplate&quot;:true,&quot;type&quot;:&quot;text&quot;}"/>
+          <a:p>
+            <a:pPr/>
+            <a:endParaRPr/>
+          </a:p>
+        </p:txBody>
+      </p:sp>
+      <p:sp>
+        <p:nvSpPr>
+          <p:cNvPr id="222" name="" descr="{&quot;isTemplate&quot;:true,&quot;type&quot;:&quot;text&quot;}"/>
           <p:cNvSpPr txBox="1"/>
           <p:nvPr/>
         </p:nvSpPr>
@@ -10349,7 +10470,7 @@
       </p:sp>
       <p:sp>
         <p:nvSpPr>
-          <p:cNvPr id="221" name="" descr="{&quot;isTemplate&quot;:true,&quot;type&quot;:&quot;text&quot;}"/>
+          <p:cNvPr id="223" name="" descr="{&quot;isTemplate&quot;:true,&quot;type&quot;:&quot;text&quot;}"/>
           <p:cNvSpPr txBox="1"/>
           <p:nvPr/>
         </p:nvSpPr>
@@ -10432,7 +10553,7 @@
       </p:sp>
       <p:sp>
         <p:nvSpPr>
-          <p:cNvPr id="222" name="" descr="{&quot;isTemplate&quot;:true,&quot;type&quot;:&quot;text&quot;}"/>
+          <p:cNvPr id="224" name="" descr="{&quot;isTemplate&quot;:true,&quot;type&quot;:&quot;text&quot;}"/>
           <p:cNvSpPr txBox="1"/>
           <p:nvPr/>
         </p:nvSpPr>
@@ -10497,7 +10618,7 @@
       </p:sp>
       <p:sp>
         <p:nvSpPr>
-          <p:cNvPr id="223" name=""/>
+          <p:cNvPr id="225" name=""/>
           <p:cNvSpPr/>
           <p:nvPr/>
         </p:nvSpPr>
@@ -10523,12 +10644,15 @@
         </p:spPr>
         <p:txBody>
           <a:bodyPr/>
-          <a:p/>
-        </p:txBody>
-      </p:sp>
-      <p:sp>
-        <p:nvSpPr>
-          <p:cNvPr id="224" name="" descr="{&quot;isTemplate&quot;:true,&quot;type&quot;:&quot;text&quot;}"/>
+          <a:p>
+            <a:pPr/>
+            <a:endParaRPr/>
+          </a:p>
+        </p:txBody>
+      </p:sp>
+      <p:sp>
+        <p:nvSpPr>
+          <p:cNvPr id="226" name="" descr="{&quot;isTemplate&quot;:true,&quot;type&quot;:&quot;text&quot;}"/>
           <p:cNvSpPr txBox="1"/>
           <p:nvPr/>
         </p:nvSpPr>
@@ -10563,7 +10687,7 @@
       </p:sp>
       <p:sp>
         <p:nvSpPr>
-          <p:cNvPr id="225" name="" descr="{&quot;isTemplate&quot;:true,&quot;type&quot;:&quot;text&quot;}"/>
+          <p:cNvPr id="227" name="" descr="{&quot;isTemplate&quot;:true,&quot;type&quot;:&quot;text&quot;}"/>
           <p:cNvSpPr txBox="1"/>
           <p:nvPr/>
         </p:nvSpPr>
@@ -10658,7 +10782,7 @@
       </p:sp>
       <p:sp>
         <p:nvSpPr>
-          <p:cNvPr id="226" name="" descr="{&quot;isTemplate&quot;:true,&quot;type&quot;:&quot;text&quot;}"/>
+          <p:cNvPr id="228" name="" descr="{&quot;isTemplate&quot;:true,&quot;type&quot;:&quot;text&quot;}"/>
           <p:cNvSpPr txBox="1"/>
           <p:nvPr/>
         </p:nvSpPr>
@@ -10723,7 +10847,7 @@
       </p:sp>
       <p:sp>
         <p:nvSpPr>
-          <p:cNvPr id="227" name="" descr="{&quot;isTemplate&quot;:true,&quot;type&quot;:&quot;text&quot;}"/>
+          <p:cNvPr id="229" name="" descr="{&quot;isTemplate&quot;:true,&quot;type&quot;:&quot;text&quot;}"/>
           <p:cNvSpPr txBox="1"/>
           <p:nvPr/>
         </p:nvSpPr>
@@ -10766,7 +10890,7 @@
   <p:cSld>
     <p:spTree>
       <p:nvGrpSpPr>
-        <p:cNvPr id="228" name=""/>
+        <p:cNvPr id="230" name=""/>
         <p:cNvGrpSpPr/>
         <p:nvPr/>
       </p:nvGrpSpPr>
@@ -10780,7 +10904,7 @@
       </p:grpSpPr>
       <p:sp>
         <p:nvSpPr>
-          <p:cNvPr id="229" name=""/>
+          <p:cNvPr id="231" name=""/>
           <p:cNvSpPr/>
           <p:nvPr/>
         </p:nvSpPr>
@@ -10807,7 +10931,7 @@
       </p:sp>
       <p:sp>
         <p:nvSpPr>
-          <p:cNvPr id="230" name="" descr="{&quot;isTemplate&quot;:true,&quot;type&quot;:&quot;text&quot;}"/>
+          <p:cNvPr id="232" name="" descr="{&quot;isTemplate&quot;:true,&quot;type&quot;:&quot;text&quot;}"/>
           <p:cNvSpPr txBox="1"/>
           <p:nvPr/>
         </p:nvSpPr>
@@ -10842,7 +10966,7 @@
       </p:sp>
       <p:sp>
         <p:nvSpPr>
-          <p:cNvPr id="231" name="" descr="{&quot;isTemplate&quot;:true,&quot;type&quot;:&quot;text&quot;}"/>
+          <p:cNvPr id="233" name="" descr="{&quot;isTemplate&quot;:true,&quot;type&quot;:&quot;text&quot;}"/>
           <p:cNvSpPr txBox="1"/>
           <p:nvPr/>
         </p:nvSpPr>
@@ -10897,7 +11021,7 @@
       </p:sp>
       <p:sp>
         <p:nvSpPr>
-          <p:cNvPr id="232" name=""/>
+          <p:cNvPr id="234" name=""/>
           <p:cNvSpPr/>
           <p:nvPr/>
         </p:nvSpPr>
@@ -10931,7 +11055,7 @@
       </p:sp>
       <p:sp>
         <p:nvSpPr>
-          <p:cNvPr id="233" name=""/>
+          <p:cNvPr id="235" name=""/>
           <p:cNvSpPr/>
           <p:nvPr/>
         </p:nvSpPr>
@@ -10960,7 +11084,7 @@
       </p:sp>
       <p:sp>
         <p:nvSpPr>
-          <p:cNvPr id="234" name="" descr="{&quot;isTemplate&quot;:true,&quot;type&quot;:&quot;text&quot;}"/>
+          <p:cNvPr id="236" name="" descr="{&quot;isTemplate&quot;:true,&quot;type&quot;:&quot;text&quot;}"/>
           <p:cNvSpPr txBox="1"/>
           <p:nvPr/>
         </p:nvSpPr>
@@ -11005,7 +11129,7 @@
       </p:sp>
       <p:sp>
         <p:nvSpPr>
-          <p:cNvPr id="235" name=""/>
+          <p:cNvPr id="237" name=""/>
           <p:cNvSpPr/>
           <p:nvPr/>
         </p:nvSpPr>
@@ -11034,7 +11158,7 @@
       </p:sp>
       <p:sp>
         <p:nvSpPr>
-          <p:cNvPr id="236" name=""/>
+          <p:cNvPr id="238" name=""/>
           <p:cNvSpPr/>
           <p:nvPr/>
         </p:nvSpPr>
@@ -11068,7 +11192,7 @@
       </p:sp>
       <p:sp>
         <p:nvSpPr>
-          <p:cNvPr id="237" name="" descr="{&quot;isTemplate&quot;:true,&quot;type&quot;:&quot;text&quot;}"/>
+          <p:cNvPr id="239" name="" descr="{&quot;isTemplate&quot;:true,&quot;type&quot;:&quot;text&quot;}"/>
           <p:cNvSpPr txBox="1"/>
           <p:nvPr/>
         </p:nvSpPr>
@@ -11143,7 +11267,7 @@
       </p:sp>
       <p:sp>
         <p:nvSpPr>
-          <p:cNvPr id="238" name="" descr="{&quot;isTemplate&quot;:true,&quot;type&quot;:&quot;text&quot;}"/>
+          <p:cNvPr id="240" name="" descr="{&quot;isTemplate&quot;:true,&quot;type&quot;:&quot;text&quot;}"/>
           <p:cNvSpPr txBox="1"/>
           <p:nvPr/>
         </p:nvSpPr>
@@ -11178,7 +11302,7 @@
       </p:sp>
       <p:sp>
         <p:nvSpPr>
-          <p:cNvPr id="239" name="" descr="{&quot;isTemplate&quot;:true,&quot;type&quot;:&quot;text&quot;}"/>
+          <p:cNvPr id="241" name="" descr="{&quot;isTemplate&quot;:true,&quot;type&quot;:&quot;text&quot;}"/>
           <p:cNvSpPr txBox="1"/>
           <p:nvPr/>
         </p:nvSpPr>
@@ -11329,7 +11453,7 @@
       </p:sp>
       <p:sp>
         <p:nvSpPr>
-          <p:cNvPr id="240" name=""/>
+          <p:cNvPr id="242" name=""/>
           <p:cNvSpPr/>
           <p:nvPr/>
         </p:nvSpPr>
@@ -11363,7 +11487,7 @@
       </p:sp>
       <p:sp>
         <p:nvSpPr>
-          <p:cNvPr id="241" name="" descr="{&quot;isTemplate&quot;:true,&quot;type&quot;:&quot;text&quot;}"/>
+          <p:cNvPr id="243" name="" descr="{&quot;isTemplate&quot;:true,&quot;type&quot;:&quot;text&quot;}"/>
           <p:cNvSpPr txBox="1"/>
           <p:nvPr/>
         </p:nvSpPr>
@@ -11438,7 +11562,7 @@
       </p:sp>
       <p:sp>
         <p:nvSpPr>
-          <p:cNvPr id="242" name="" descr="{&quot;isTemplate&quot;:true,&quot;type&quot;:&quot;text&quot;}"/>
+          <p:cNvPr id="244" name="" descr="{&quot;isTemplate&quot;:true,&quot;type&quot;:&quot;text&quot;}"/>
           <p:cNvSpPr txBox="1"/>
           <p:nvPr/>
         </p:nvSpPr>
@@ -11473,7 +11597,7 @@
       </p:sp>
       <p:sp>
         <p:nvSpPr>
-          <p:cNvPr id="243" name="" descr="{&quot;isTemplate&quot;:true,&quot;type&quot;:&quot;text&quot;}"/>
+          <p:cNvPr id="245" name="" descr="{&quot;isTemplate&quot;:true,&quot;type&quot;:&quot;text&quot;}"/>
           <p:cNvSpPr txBox="1"/>
           <p:nvPr/>
         </p:nvSpPr>
@@ -11584,7 +11708,7 @@
       </p:sp>
       <p:sp>
         <p:nvSpPr>
-          <p:cNvPr id="244" name=""/>
+          <p:cNvPr id="246" name=""/>
           <p:cNvSpPr/>
           <p:nvPr/>
         </p:nvSpPr>
@@ -11618,7 +11742,7 @@
       </p:sp>
       <p:sp>
         <p:nvSpPr>
-          <p:cNvPr id="245" name="" descr="{&quot;isTemplate&quot;:true,&quot;type&quot;:&quot;text&quot;}"/>
+          <p:cNvPr id="247" name="" descr="{&quot;isTemplate&quot;:true,&quot;type&quot;:&quot;text&quot;}"/>
           <p:cNvSpPr txBox="1"/>
           <p:nvPr/>
         </p:nvSpPr>
@@ -11693,7 +11817,7 @@
       </p:sp>
       <p:sp>
         <p:nvSpPr>
-          <p:cNvPr id="246" name="" descr="{&quot;isTemplate&quot;:true,&quot;type&quot;:&quot;text&quot;}"/>
+          <p:cNvPr id="248" name="" descr="{&quot;isTemplate&quot;:true,&quot;type&quot;:&quot;text&quot;}"/>
           <p:cNvSpPr txBox="1"/>
           <p:nvPr/>
         </p:nvSpPr>
@@ -11728,7 +11852,7 @@
       </p:sp>
       <p:sp>
         <p:nvSpPr>
-          <p:cNvPr id="247" name="" descr="{&quot;isTemplate&quot;:true,&quot;type&quot;:&quot;text&quot;}"/>
+          <p:cNvPr id="249" name="" descr="{&quot;isTemplate&quot;:true,&quot;type&quot;:&quot;text&quot;}"/>
           <p:cNvSpPr txBox="1"/>
           <p:nvPr/>
         </p:nvSpPr>
@@ -11839,7 +11963,7 @@
       </p:sp>
       <p:sp>
         <p:nvSpPr>
-          <p:cNvPr id="248" name=""/>
+          <p:cNvPr id="250" name=""/>
           <p:cNvSpPr/>
           <p:nvPr/>
         </p:nvSpPr>
@@ -11873,7 +11997,7 @@
       </p:sp>
       <p:sp>
         <p:nvSpPr>
-          <p:cNvPr id="249" name="" descr="{&quot;isTemplate&quot;:true,&quot;type&quot;:&quot;text&quot;}"/>
+          <p:cNvPr id="251" name="" descr="{&quot;isTemplate&quot;:true,&quot;type&quot;:&quot;text&quot;}"/>
           <p:cNvSpPr txBox="1"/>
           <p:nvPr/>
         </p:nvSpPr>
@@ -11928,7 +12052,7 @@
       </p:sp>
       <p:sp>
         <p:nvSpPr>
-          <p:cNvPr id="250" name="" descr="{&quot;isTemplate&quot;:true,&quot;type&quot;:&quot;text&quot;}"/>
+          <p:cNvPr id="252" name="" descr="{&quot;isTemplate&quot;:true,&quot;type&quot;:&quot;text&quot;}"/>
           <p:cNvSpPr txBox="1"/>
           <p:nvPr/>
         </p:nvSpPr>
@@ -12023,7 +12147,7 @@
       </p:sp>
       <p:sp>
         <p:nvSpPr>
-          <p:cNvPr id="251" name="" descr="{&quot;isTemplate&quot;:true,&quot;type&quot;:&quot;text&quot;}"/>
+          <p:cNvPr id="253" name="" descr="{&quot;isTemplate&quot;:true,&quot;type&quot;:&quot;text&quot;}"/>
           <p:cNvSpPr txBox="1"/>
           <p:nvPr/>
         </p:nvSpPr>
@@ -12098,7 +12222,7 @@
       </p:sp>
       <p:sp>
         <p:nvSpPr>
-          <p:cNvPr id="252" name=""/>
+          <p:cNvPr id="254" name=""/>
           <p:cNvSpPr/>
           <p:nvPr/>
         </p:nvSpPr>
@@ -12141,7 +12265,7 @@
       </p:sp>
       <p:sp>
         <p:nvSpPr>
-          <p:cNvPr id="253" name="" descr="{&quot;isTemplate&quot;:true,&quot;type&quot;:&quot;text&quot;}"/>
+          <p:cNvPr id="255" name="" descr="{&quot;isTemplate&quot;:true,&quot;type&quot;:&quot;text&quot;}"/>
           <p:cNvSpPr txBox="1"/>
           <p:nvPr/>
         </p:nvSpPr>
@@ -12186,7 +12310,7 @@
       </p:sp>
       <p:sp>
         <p:nvSpPr>
-          <p:cNvPr id="254" name="" descr="{&quot;isTemplate&quot;:true,&quot;type&quot;:&quot;text&quot;}"/>
+          <p:cNvPr id="256" name="" descr="{&quot;isTemplate&quot;:true,&quot;type&quot;:&quot;text&quot;}"/>
           <p:cNvSpPr txBox="1"/>
           <p:nvPr/>
         </p:nvSpPr>
@@ -12221,7 +12345,7 @@
       </p:sp>
       <p:sp>
         <p:nvSpPr>
-          <p:cNvPr id="255" name="" descr="{&quot;isTemplate&quot;:true,&quot;type&quot;:&quot;text&quot;}"/>
+          <p:cNvPr id="257" name="" descr="{&quot;isTemplate&quot;:true,&quot;type&quot;:&quot;text&quot;}"/>
           <p:cNvSpPr txBox="1"/>
           <p:nvPr/>
         </p:nvSpPr>
@@ -12266,7 +12390,7 @@
       </p:sp>
       <p:sp>
         <p:nvSpPr>
-          <p:cNvPr id="256" name="" descr="{&quot;isTemplate&quot;:true,&quot;type&quot;:&quot;text&quot;}"/>
+          <p:cNvPr id="258" name="" descr="{&quot;isTemplate&quot;:true,&quot;type&quot;:&quot;text&quot;}"/>
           <p:cNvSpPr txBox="1"/>
           <p:nvPr/>
         </p:nvSpPr>
@@ -12301,7 +12425,7 @@
       </p:sp>
       <p:sp>
         <p:nvSpPr>
-          <p:cNvPr id="257" name="" descr="{&quot;isTemplate&quot;:true,&quot;type&quot;:&quot;text&quot;}"/>
+          <p:cNvPr id="259" name="" descr="{&quot;isTemplate&quot;:true,&quot;type&quot;:&quot;text&quot;}"/>
           <p:cNvSpPr txBox="1"/>
           <p:nvPr/>
         </p:nvSpPr>
@@ -12346,7 +12470,7 @@
       </p:sp>
       <p:sp>
         <p:nvSpPr>
-          <p:cNvPr id="258" name="" descr="{&quot;isTemplate&quot;:true,&quot;type&quot;:&quot;text&quot;}"/>
+          <p:cNvPr id="260" name="" descr="{&quot;isTemplate&quot;:true,&quot;type&quot;:&quot;text&quot;}"/>
           <p:cNvSpPr txBox="1"/>
           <p:nvPr/>
         </p:nvSpPr>
@@ -12381,7 +12505,7 @@
       </p:sp>
       <p:sp>
         <p:nvSpPr>
-          <p:cNvPr id="259" name="" descr="{&quot;isTemplate&quot;:true,&quot;type&quot;:&quot;text&quot;}"/>
+          <p:cNvPr id="261" name="" descr="{&quot;isTemplate&quot;:true,&quot;type&quot;:&quot;text&quot;}"/>
           <p:cNvSpPr txBox="1"/>
           <p:nvPr/>
         </p:nvSpPr>
@@ -12426,7 +12550,7 @@
       </p:sp>
       <p:sp>
         <p:nvSpPr>
-          <p:cNvPr id="260" name="" descr="{&quot;isTemplate&quot;:true,&quot;type&quot;:&quot;text&quot;}"/>
+          <p:cNvPr id="262" name="" descr="{&quot;isTemplate&quot;:true,&quot;type&quot;:&quot;text&quot;}"/>
           <p:cNvSpPr txBox="1"/>
           <p:nvPr/>
         </p:nvSpPr>
@@ -12481,7 +12605,7 @@
       </p:sp>
       <p:sp>
         <p:nvSpPr>
-          <p:cNvPr id="261" name="" descr="{&quot;isTemplate&quot;:true,&quot;type&quot;:&quot;text&quot;}"/>
+          <p:cNvPr id="263" name="" descr="{&quot;isTemplate&quot;:true,&quot;type&quot;:&quot;text&quot;}"/>
           <p:cNvSpPr txBox="1"/>
           <p:nvPr/>
         </p:nvSpPr>
@@ -12546,7 +12670,7 @@
       </p:sp>
       <p:sp>
         <p:nvSpPr>
-          <p:cNvPr id="262" name="" descr="{&quot;isTemplate&quot;:true,&quot;type&quot;:&quot;text&quot;}"/>
+          <p:cNvPr id="264" name="" descr="{&quot;isTemplate&quot;:true,&quot;type&quot;:&quot;text&quot;}"/>
           <p:cNvSpPr txBox="1"/>
           <p:nvPr/>
         </p:nvSpPr>
@@ -12589,7 +12713,7 @@
   <p:cSld>
     <p:spTree>
       <p:nvGrpSpPr>
-        <p:cNvPr id="263" name="" descr="&lt;Slide style={{ width: 1280, height: 720, background: '#F6F8FD', padding: '56px 72px', flexDirection: 'column' }}&gt;&#13;&#10;  &lt;Box style={{ height: 96, flexDirection: 'row', justifyContent: 'space-between', alignItems: 'flex-start' }}&gt;&#13;&#10;    &lt;Box style={{ flexDirection: 'column', gap: 8 }}&gt;&#13;&#10;      &lt;Text style={{ fontSize: 34, fontWeight: 'bold', color: '#0C1222' }}&gt;四层架构：交易底座不动，决策层新建&lt;/Text&gt;&#13;&#10;      &lt;Text style={{ fontSize: 15, color: '#5C6780' }}&gt;原有 4,294 行代码、42 个模板、190 项测试，全部作为底座继续跑&lt;/Text&gt;&#13;&#10;    &lt;/Box&gt;&#13;&#10;    &lt;Box style={{ flexDirection: 'row', alignItems: 'center', gap: 6, padding: '5px 12px', background: '#EEF1FE', border: '1px solid #DDE2F5', borderRadius: 999 }}&gt;&#13;&#10;      &lt;Box style={{ width: 6, height: 6, borderRadius: 3, background: '#4C4DDC' }} /&gt;&#13;&#10;      &lt;Text style={{ fontSize: 12, color: '#4C4DDC', fontWeight: 'bold', letterSpacing: 1 }}&gt;AI 掌柜&lt;/Text&gt;&#13;&#10;    &lt;/Box&gt;&#13;&#10;  &lt;/Box&gt;&#13;&#10;  &lt;Box style={{ width: 72, height: 3, background: '#4C4DDC', borderRadius: 2, marginTop: 2, marginBottom: 12 }} /&gt;&#13;&#10;  &lt;Box style={{ flex: 1, paddingTop: 8 }}&gt;&#13;&#10;    &lt;Box style={{ flexDirection: 'column', gap: 14 }}&gt;&#13;&#10;      &lt;Box style={{ background: '#EEF1FE', border: '1px solid #C9CDF6', borderRadius: 10, padding: '22px 24px', flexDirection: 'row', alignItems: 'center' }}&gt;&#13;&#10;        &lt;Text style={{ fontSize: 13, color: '#4C4DDC', width: 100, letterSpacing: 1 }}&gt;决策界面&lt;/Text&gt;&#13;&#10;        &lt;Text style={{ fontSize: 16, color: '#0C1222' }}&gt;AI 驾驶舱 · 经营问答 · 洞察中心 · 采购单 · 四象限 · 预测备货&lt;/Text&gt;&#13;&#10;      &lt;/Box&gt;&#13;&#10;      &lt;Box style={{ background: '#FFFFFF', border: '1px solid #E3E8F5', borderRadius: 10, padding: '22px 24px', flexDirection: 'row', alignItems: 'center' }}&gt;&#13;&#10;        &lt;Text style={{ fontSize: 13, color: '#5C6780', width: 100, letterSpacing: 1 }}&gt;AI 引擎&lt;/Text&gt;&#13;&#10;        &lt;Text style={{ fontSize: 16, color: '#0C1222' }}&gt;受控 NL2SQL · 6 类规则检测 · 三层分解预测 · 可执行工具&lt;/Text&gt;&#13;&#10;      &lt;/Box&gt;&#13;&#10;      &lt;Box style={{ background: '#FFFFFF', border: '1px solid #E3E8F5', borderRadius: 10, padding: '22px 24px', flexDirection: 'row', alignItems: 'center' }}&gt;&#13;&#10;        &lt;Text style={{ fontSize: 13, color: '#5C6780', width: 100, letterSpacing: 1 }}&gt;指标层&lt;/Text&gt;&#13;&#10;        &lt;Text style={{ fontSize: 16, color: '#0C1222' }}&gt;唯一口径 metrics.py · 日粒度预聚合 ETL · 8 个只读语义视图&lt;/Text&gt;&#13;&#10;      &lt;/Box&gt;&#13;&#10;      &lt;Box style={{ background: '#FBFCFE', border: '1px solid #E3E8F5', borderRadius: 10, padding: '22px 24px', flexDirection: 'row', alignItems: 'center' }}&gt;&#13;&#10;        &lt;Text style={{ fontSize: 13, color: '#8A93A8', width: 100, letterSpacing: 1 }}&gt;交易底座&lt;/Text&gt;&#13;&#10;        &lt;Text style={{ fontSize: 16, color: '#5C6780' }}&gt;点单 · 收银 · 会员 · BOM 配方 · 库存流水 · 预订（Flask + SQLite）&lt;/Text&gt;&#13;&#10;      &lt;/Box&gt;&#13;&#10;    &lt;/Box&gt;&#13;&#10;    &lt;Box style={{ marginTop: 24, flexDirection: 'row', gap: 18 }}&gt;&#13;&#10;      &lt;Box style={{ flex: 1, paddingTop: 14, borderTop: '1px solid #E3E8F5' }}&gt;&#13;&#10;        &lt;Text style={{ fontSize: 30, fontWeight: 'bold', color: '#4C4DDC' }}&gt;0&lt;/Text&gt;&#13;&#10;        &lt;Text style={{ fontSize: 13, color: '#5C6780', marginTop: 4 }}&gt;新增第三方运行时依赖&lt;br /&gt;仅 Flask + waitress&lt;/Text&gt;&#13;&#10;      &lt;/Box&gt;&#13;&#10;      &lt;Box style={{ flex: 1, paddingTop: 14, borderTop: '1px solid #E3E8F5' }}&gt;&#13;&#10;        &lt;Text style={{ fontSize: 30, fontWeight: 'bold', color: '#4C4DDC' }}&gt;1.0s&lt;/Text&gt;&#13;&#10;        &lt;Text style={{ fontSize: 13, color: '#5C6780', marginTop: 4 }}&gt;看板首屏&lt;br /&gt;180 天预聚合&lt;/Text&gt;&#13;&#10;      &lt;/Box&gt;&#13;&#10;      &lt;Box style={{ flex: 1, paddingTop: 14, borderTop: '1px solid #E3E8F5' }}&gt;&#13;&#10;        &lt;Text style={{ fontSize: 30, fontWeight: 'bold', color: '#4C4DDC' }}&gt;离线&lt;/Text&gt;&#13;&#10;        &lt;Text style={{ fontSize: 13, color: '#5C6780', marginTop: 4 }}&gt;可跑：本地模型 / 规则降级&lt;br /&gt;不依赖 CDN 与外网&lt;/Text&gt;&#13;&#10;      &lt;/Box&gt;&#13;&#10;    &lt;/Box&gt;&#13;&#10;    &lt;Box style={{ marginTop: 20, paddingTop: 16, borderTop: '1px solid #E3E8F5', flexDirection: 'row', gap: 14 }}&gt;&#13;&#10;      &lt;Text style={{ fontSize: 13, color: '#4C4DDC', width: 76 }}&gt;选型取舍&lt;/Text&gt;&#13;&#10;      &lt;Text style={{ fontSize: 14, color: '#5C6780', lineHeight: 1.7, flex: 1 }}&gt;&#13;&#10;        不引入 numpy / pandas / torch：门店电脑不是服务器，启动速度比模型炫技重要；SQLite 开 WAL 足够 20 路并发。&#13;&#10;        模型双通道：云端 1.2 秒 / 本地 3B 断网可用，切换不重启服务。&#13;&#10;      &lt;/Text&gt;&#13;&#10;    &lt;/Box&gt;&#13;&#10;  &lt;/Box&gt;&#13;&#10;  &lt;Box style={{ height: 36, flexDirection: 'row', justifyContent: 'space-between', alignItems: 'flex-end' }}&gt;&#13;&#10;    &lt;Text style={{ fontSize: 12, color: '#8A93A8' }}&gt;2026 武汉 1024 · 产业应用赛道&lt;/Text&gt;&#13;&#10;    &lt;Text style={{ fontSize: 12, color: '#8A93A8' }}&gt;06 / 12&lt;/Text&gt;&#13;&#10;  &lt;/Box&gt;&#13;&#10;&lt;/Slide&gt;"/>
+        <p:cNvPr id="265" name=""/>
         <p:cNvGrpSpPr/>
         <p:nvPr/>
       </p:nvGrpSpPr>
@@ -12603,7 +12727,7 @@
       </p:grpSpPr>
       <p:sp>
         <p:nvSpPr>
-          <p:cNvPr id="264" name=""/>
+          <p:cNvPr id="266" name=""/>
           <p:cNvSpPr/>
           <p:nvPr/>
         </p:nvSpPr>
@@ -12622,12 +12746,15 @@
         </p:spPr>
         <p:txBody>
           <a:bodyPr/>
-          <a:p/>
-        </p:txBody>
-      </p:sp>
-      <p:sp>
-        <p:nvSpPr>
-          <p:cNvPr id="265" name="" descr="{&quot;isTemplate&quot;:true,&quot;type&quot;:&quot;text&quot;}"/>
+          <a:p>
+            <a:pPr/>
+            <a:endParaRPr/>
+          </a:p>
+        </p:txBody>
+      </p:sp>
+      <p:sp>
+        <p:nvSpPr>
+          <p:cNvPr id="267" name="" descr="{&quot;isTemplate&quot;:true,&quot;type&quot;:&quot;text&quot;}"/>
           <p:cNvSpPr txBox="1"/>
           <p:nvPr/>
         </p:nvSpPr>
@@ -12662,7 +12789,7 @@
       </p:sp>
       <p:sp>
         <p:nvSpPr>
-          <p:cNvPr id="266" name="" descr="{&quot;isTemplate&quot;:true,&quot;type&quot;:&quot;text&quot;}"/>
+          <p:cNvPr id="268" name="" descr="{&quot;isTemplate&quot;:true,&quot;type&quot;:&quot;text&quot;}"/>
           <p:cNvSpPr txBox="1"/>
           <p:nvPr/>
         </p:nvSpPr>
@@ -12757,7 +12884,7 @@
       </p:sp>
       <p:sp>
         <p:nvSpPr>
-          <p:cNvPr id="267" name=""/>
+          <p:cNvPr id="269" name=""/>
           <p:cNvSpPr/>
           <p:nvPr/>
         </p:nvSpPr>
@@ -12783,12 +12910,15 @@
         </p:spPr>
         <p:txBody>
           <a:bodyPr/>
-          <a:p/>
-        </p:txBody>
-      </p:sp>
-      <p:sp>
-        <p:nvSpPr>
-          <p:cNvPr id="268" name=""/>
+          <a:p>
+            <a:pPr/>
+            <a:endParaRPr/>
+          </a:p>
+        </p:txBody>
+      </p:sp>
+      <p:sp>
+        <p:nvSpPr>
+          <p:cNvPr id="270" name=""/>
           <p:cNvSpPr/>
           <p:nvPr/>
         </p:nvSpPr>
@@ -12809,12 +12939,15 @@
         </p:spPr>
         <p:txBody>
           <a:bodyPr/>
-          <a:p/>
-        </p:txBody>
-      </p:sp>
-      <p:sp>
-        <p:nvSpPr>
-          <p:cNvPr id="269" name="" descr="{&quot;isTemplate&quot;:true,&quot;type&quot;:&quot;text&quot;}"/>
+          <a:p>
+            <a:pPr/>
+            <a:endParaRPr/>
+          </a:p>
+        </p:txBody>
+      </p:sp>
+      <p:sp>
+        <p:nvSpPr>
+          <p:cNvPr id="271" name="" descr="{&quot;isTemplate&quot;:true,&quot;type&quot;:&quot;text&quot;}"/>
           <p:cNvSpPr txBox="1"/>
           <p:nvPr/>
         </p:nvSpPr>
@@ -12859,7 +12992,7 @@
       </p:sp>
       <p:sp>
         <p:nvSpPr>
-          <p:cNvPr id="270" name=""/>
+          <p:cNvPr id="272" name=""/>
           <p:cNvSpPr/>
           <p:nvPr/>
         </p:nvSpPr>
@@ -12880,12 +13013,15 @@
         </p:spPr>
         <p:txBody>
           <a:bodyPr/>
-          <a:p/>
-        </p:txBody>
-      </p:sp>
-      <p:sp>
-        <p:nvSpPr>
-          <p:cNvPr id="271" name=""/>
+          <a:p>
+            <a:pPr/>
+            <a:endParaRPr/>
+          </a:p>
+        </p:txBody>
+      </p:sp>
+      <p:sp>
+        <p:nvSpPr>
+          <p:cNvPr id="273" name=""/>
           <p:cNvSpPr/>
           <p:nvPr/>
         </p:nvSpPr>
@@ -12911,12 +13047,15 @@
         </p:spPr>
         <p:txBody>
           <a:bodyPr/>
-          <a:p/>
-        </p:txBody>
-      </p:sp>
-      <p:sp>
-        <p:nvSpPr>
-          <p:cNvPr id="272" name="" descr="{&quot;isTemplate&quot;:true,&quot;type&quot;:&quot;text&quot;}"/>
+          <a:p>
+            <a:pPr/>
+            <a:endParaRPr/>
+          </a:p>
+        </p:txBody>
+      </p:sp>
+      <p:sp>
+        <p:nvSpPr>
+          <p:cNvPr id="274" name="" descr="{&quot;isTemplate&quot;:true,&quot;type&quot;:&quot;text&quot;}"/>
           <p:cNvSpPr txBox="1"/>
           <p:nvPr/>
         </p:nvSpPr>
@@ -12951,7 +13090,7 @@
       </p:sp>
       <p:sp>
         <p:nvSpPr>
-          <p:cNvPr id="273" name="" descr="{&quot;isTemplate&quot;:true,&quot;type&quot;:&quot;text&quot;}"/>
+          <p:cNvPr id="275" name="" descr="{&quot;isTemplate&quot;:true,&quot;type&quot;:&quot;text&quot;}"/>
           <p:cNvSpPr txBox="1"/>
           <p:nvPr/>
         </p:nvSpPr>
@@ -13096,7 +13235,7 @@
       </p:sp>
       <p:sp>
         <p:nvSpPr>
-          <p:cNvPr id="274" name=""/>
+          <p:cNvPr id="276" name=""/>
           <p:cNvSpPr/>
           <p:nvPr/>
         </p:nvSpPr>
@@ -13122,12 +13261,15 @@
         </p:spPr>
         <p:txBody>
           <a:bodyPr/>
-          <a:p/>
-        </p:txBody>
-      </p:sp>
-      <p:sp>
-        <p:nvSpPr>
-          <p:cNvPr id="275" name="" descr="{&quot;isTemplate&quot;:true,&quot;type&quot;:&quot;text&quot;}"/>
+          <a:p>
+            <a:pPr/>
+            <a:endParaRPr/>
+          </a:p>
+        </p:txBody>
+      </p:sp>
+      <p:sp>
+        <p:nvSpPr>
+          <p:cNvPr id="277" name="" descr="{&quot;isTemplate&quot;:true,&quot;type&quot;:&quot;text&quot;}"/>
           <p:cNvSpPr txBox="1"/>
           <p:nvPr/>
         </p:nvSpPr>
@@ -13172,7 +13314,7 @@
       </p:sp>
       <p:sp>
         <p:nvSpPr>
-          <p:cNvPr id="276" name="" descr="{&quot;isTemplate&quot;:true,&quot;type&quot;:&quot;text&quot;}"/>
+          <p:cNvPr id="278" name="" descr="{&quot;isTemplate&quot;:true,&quot;type&quot;:&quot;text&quot;}"/>
           <p:cNvSpPr txBox="1"/>
           <p:nvPr/>
         </p:nvSpPr>
@@ -13267,7 +13409,7 @@
       </p:sp>
       <p:sp>
         <p:nvSpPr>
-          <p:cNvPr id="277" name=""/>
+          <p:cNvPr id="279" name=""/>
           <p:cNvSpPr/>
           <p:nvPr/>
         </p:nvSpPr>
@@ -13293,12 +13435,15 @@
         </p:spPr>
         <p:txBody>
           <a:bodyPr/>
-          <a:p/>
-        </p:txBody>
-      </p:sp>
-      <p:sp>
-        <p:nvSpPr>
-          <p:cNvPr id="278" name="" descr="{&quot;isTemplate&quot;:true,&quot;type&quot;:&quot;text&quot;}"/>
+          <a:p>
+            <a:pPr/>
+            <a:endParaRPr/>
+          </a:p>
+        </p:txBody>
+      </p:sp>
+      <p:sp>
+        <p:nvSpPr>
+          <p:cNvPr id="280" name="" descr="{&quot;isTemplate&quot;:true,&quot;type&quot;:&quot;text&quot;}"/>
           <p:cNvSpPr txBox="1"/>
           <p:nvPr/>
         </p:nvSpPr>
@@ -13333,7 +13478,7 @@
       </p:sp>
       <p:sp>
         <p:nvSpPr>
-          <p:cNvPr id="279" name="" descr="{&quot;isTemplate&quot;:true,&quot;type&quot;:&quot;text&quot;}"/>
+          <p:cNvPr id="281" name="" descr="{&quot;isTemplate&quot;:true,&quot;type&quot;:&quot;text&quot;}"/>
           <p:cNvSpPr txBox="1"/>
           <p:nvPr/>
         </p:nvSpPr>
@@ -13408,7 +13553,7 @@
       </p:sp>
       <p:sp>
         <p:nvSpPr>
-          <p:cNvPr id="280" name=""/>
+          <p:cNvPr id="282" name=""/>
           <p:cNvSpPr/>
           <p:nvPr/>
         </p:nvSpPr>
@@ -13434,12 +13579,15 @@
         </p:spPr>
         <p:txBody>
           <a:bodyPr/>
-          <a:p/>
-        </p:txBody>
-      </p:sp>
-      <p:sp>
-        <p:nvSpPr>
-          <p:cNvPr id="281" name="" descr="{&quot;isTemplate&quot;:true,&quot;type&quot;:&quot;text&quot;}"/>
+          <a:p>
+            <a:pPr/>
+            <a:endParaRPr/>
+          </a:p>
+        </p:txBody>
+      </p:sp>
+      <p:sp>
+        <p:nvSpPr>
+          <p:cNvPr id="283" name="" descr="{&quot;isTemplate&quot;:true,&quot;type&quot;:&quot;text&quot;}"/>
           <p:cNvSpPr txBox="1"/>
           <p:nvPr/>
         </p:nvSpPr>
@@ -13474,7 +13622,7 @@
       </p:sp>
       <p:sp>
         <p:nvSpPr>
-          <p:cNvPr id="282" name="" descr="{&quot;isTemplate&quot;:true,&quot;type&quot;:&quot;text&quot;}"/>
+          <p:cNvPr id="284" name="" descr="{&quot;isTemplate&quot;:true,&quot;type&quot;:&quot;text&quot;}"/>
           <p:cNvSpPr txBox="1"/>
           <p:nvPr/>
         </p:nvSpPr>
@@ -13629,7 +13777,7 @@
       </p:sp>
       <p:sp>
         <p:nvSpPr>
-          <p:cNvPr id="283" name=""/>
+          <p:cNvPr id="285" name=""/>
           <p:cNvSpPr/>
           <p:nvPr/>
         </p:nvSpPr>
@@ -13664,12 +13812,15 @@
         </p:spPr>
         <p:txBody>
           <a:bodyPr/>
-          <a:p/>
-        </p:txBody>
-      </p:sp>
-      <p:sp>
-        <p:nvSpPr>
-          <p:cNvPr id="284" name="" descr="{&quot;isTemplate&quot;:true,&quot;type&quot;:&quot;text&quot;}"/>
+          <a:p>
+            <a:pPr/>
+            <a:endParaRPr/>
+          </a:p>
+        </p:txBody>
+      </p:sp>
+      <p:sp>
+        <p:nvSpPr>
+          <p:cNvPr id="286" name="" descr="{&quot;isTemplate&quot;:true,&quot;type&quot;:&quot;text&quot;}"/>
           <p:cNvSpPr txBox="1"/>
           <p:nvPr/>
         </p:nvSpPr>
@@ -13704,7 +13855,7 @@
       </p:sp>
       <p:sp>
         <p:nvSpPr>
-          <p:cNvPr id="285" name="" descr="{&quot;isTemplate&quot;:true,&quot;type&quot;:&quot;text&quot;}"/>
+          <p:cNvPr id="287" name="" descr="{&quot;isTemplate&quot;:true,&quot;type&quot;:&quot;text&quot;}"/>
           <p:cNvSpPr txBox="1"/>
           <p:nvPr/>
         </p:nvSpPr>
@@ -13767,7 +13918,7 @@
       </p:sp>
       <p:sp>
         <p:nvSpPr>
-          <p:cNvPr id="286" name=""/>
+          <p:cNvPr id="288" name=""/>
           <p:cNvSpPr/>
           <p:nvPr/>
         </p:nvSpPr>
@@ -13802,12 +13953,15 @@
         </p:spPr>
         <p:txBody>
           <a:bodyPr/>
-          <a:p/>
-        </p:txBody>
-      </p:sp>
-      <p:sp>
-        <p:nvSpPr>
-          <p:cNvPr id="287" name="" descr="{&quot;isTemplate&quot;:true,&quot;type&quot;:&quot;text&quot;}"/>
+          <a:p>
+            <a:pPr/>
+            <a:endParaRPr/>
+          </a:p>
+        </p:txBody>
+      </p:sp>
+      <p:sp>
+        <p:nvSpPr>
+          <p:cNvPr id="289" name="" descr="{&quot;isTemplate&quot;:true,&quot;type&quot;:&quot;text&quot;}"/>
           <p:cNvSpPr txBox="1"/>
           <p:nvPr/>
         </p:nvSpPr>
@@ -13842,7 +13996,7 @@
       </p:sp>
       <p:sp>
         <p:nvSpPr>
-          <p:cNvPr id="288" name="" descr="{&quot;isTemplate&quot;:true,&quot;type&quot;:&quot;text&quot;}"/>
+          <p:cNvPr id="290" name="" descr="{&quot;isTemplate&quot;:true,&quot;type&quot;:&quot;text&quot;}"/>
           <p:cNvSpPr txBox="1"/>
           <p:nvPr/>
         </p:nvSpPr>
@@ -13905,7 +14059,7 @@
       </p:sp>
       <p:sp>
         <p:nvSpPr>
-          <p:cNvPr id="289" name=""/>
+          <p:cNvPr id="291" name=""/>
           <p:cNvSpPr/>
           <p:nvPr/>
         </p:nvSpPr>
@@ -13940,12 +14094,15 @@
         </p:spPr>
         <p:txBody>
           <a:bodyPr/>
-          <a:p/>
-        </p:txBody>
-      </p:sp>
-      <p:sp>
-        <p:nvSpPr>
-          <p:cNvPr id="290" name="" descr="{&quot;isTemplate&quot;:true,&quot;type&quot;:&quot;text&quot;}"/>
+          <a:p>
+            <a:pPr/>
+            <a:endParaRPr/>
+          </a:p>
+        </p:txBody>
+      </p:sp>
+      <p:sp>
+        <p:nvSpPr>
+          <p:cNvPr id="292" name="" descr="{&quot;isTemplate&quot;:true,&quot;type&quot;:&quot;text&quot;}"/>
           <p:cNvSpPr txBox="1"/>
           <p:nvPr/>
         </p:nvSpPr>
@@ -13980,7 +14137,7 @@
       </p:sp>
       <p:sp>
         <p:nvSpPr>
-          <p:cNvPr id="291" name="" descr="{&quot;isTemplate&quot;:true,&quot;type&quot;:&quot;text&quot;}"/>
+          <p:cNvPr id="293" name="" descr="{&quot;isTemplate&quot;:true,&quot;type&quot;:&quot;text&quot;}"/>
           <p:cNvSpPr txBox="1"/>
           <p:nvPr/>
         </p:nvSpPr>
@@ -14073,7 +14230,7 @@
       </p:sp>
       <p:sp>
         <p:nvSpPr>
-          <p:cNvPr id="292" name=""/>
+          <p:cNvPr id="294" name=""/>
           <p:cNvSpPr/>
           <p:nvPr/>
         </p:nvSpPr>
@@ -14108,12 +14265,15 @@
         </p:spPr>
         <p:txBody>
           <a:bodyPr/>
-          <a:p/>
-        </p:txBody>
-      </p:sp>
-      <p:sp>
-        <p:nvSpPr>
-          <p:cNvPr id="293" name="" descr="{&quot;isTemplate&quot;:true,&quot;type&quot;:&quot;text&quot;}"/>
+          <a:p>
+            <a:pPr/>
+            <a:endParaRPr/>
+          </a:p>
+        </p:txBody>
+      </p:sp>
+      <p:sp>
+        <p:nvSpPr>
+          <p:cNvPr id="295" name="" descr="{&quot;isTemplate&quot;:true,&quot;type&quot;:&quot;text&quot;}"/>
           <p:cNvSpPr txBox="1"/>
           <p:nvPr/>
         </p:nvSpPr>
@@ -14148,7 +14308,7 @@
       </p:sp>
       <p:sp>
         <p:nvSpPr>
-          <p:cNvPr id="294" name="" descr="{&quot;isTemplate&quot;:true,&quot;type&quot;:&quot;text&quot;}"/>
+          <p:cNvPr id="296" name="" descr="{&quot;isTemplate&quot;:true,&quot;type&quot;:&quot;text&quot;}"/>
           <p:cNvSpPr txBox="1"/>
           <p:nvPr/>
         </p:nvSpPr>
@@ -14345,7 +14505,7 @@
       </p:sp>
       <p:sp>
         <p:nvSpPr>
-          <p:cNvPr id="295" name="" descr="{&quot;isTemplate&quot;:true,&quot;type&quot;:&quot;text&quot;}"/>
+          <p:cNvPr id="297" name="" descr="{&quot;isTemplate&quot;:true,&quot;type&quot;:&quot;text&quot;}"/>
           <p:cNvSpPr txBox="1"/>
           <p:nvPr/>
         </p:nvSpPr>
@@ -14410,7 +14570,7 @@
       </p:sp>
       <p:sp>
         <p:nvSpPr>
-          <p:cNvPr id="296" name="" descr="{&quot;isTemplate&quot;:true,&quot;type&quot;:&quot;text&quot;}"/>
+          <p:cNvPr id="298" name="" descr="{&quot;isTemplate&quot;:true,&quot;type&quot;:&quot;text&quot;}"/>
           <p:cNvSpPr txBox="1"/>
           <p:nvPr/>
         </p:nvSpPr>
@@ -14453,7 +14613,7 @@
   <p:cSld>
     <p:spTree>
       <p:nvGrpSpPr>
-        <p:cNvPr id="297" name=""/>
+        <p:cNvPr id="299" name=""/>
         <p:cNvGrpSpPr/>
         <p:nvPr/>
       </p:nvGrpSpPr>
@@ -14467,7 +14627,7 @@
       </p:grpSpPr>
       <p:sp>
         <p:nvSpPr>
-          <p:cNvPr id="298" name=""/>
+          <p:cNvPr id="300" name=""/>
           <p:cNvSpPr/>
           <p:nvPr/>
         </p:nvSpPr>
@@ -14494,7 +14654,7 @@
       </p:sp>
       <p:sp>
         <p:nvSpPr>
-          <p:cNvPr id="299" name="" descr="{&quot;isTemplate&quot;:true,&quot;type&quot;:&quot;text&quot;}"/>
+          <p:cNvPr id="301" name="" descr="{&quot;isTemplate&quot;:true,&quot;type&quot;:&quot;text&quot;}"/>
           <p:cNvSpPr txBox="1"/>
           <p:nvPr/>
         </p:nvSpPr>
@@ -14529,7 +14689,7 @@
       </p:sp>
       <p:sp>
         <p:nvSpPr>
-          <p:cNvPr id="300" name="" descr="{&quot;isTemplate&quot;:true,&quot;type&quot;:&quot;text&quot;}"/>
+          <p:cNvPr id="302" name="" descr="{&quot;isTemplate&quot;:true,&quot;type&quot;:&quot;text&quot;}"/>
           <p:cNvSpPr txBox="1"/>
           <p:nvPr/>
         </p:nvSpPr>
@@ -14584,7 +14744,7 @@
       </p:sp>
       <p:sp>
         <p:nvSpPr>
-          <p:cNvPr id="301" name=""/>
+          <p:cNvPr id="303" name=""/>
           <p:cNvSpPr/>
           <p:nvPr/>
         </p:nvSpPr>
@@ -14618,7 +14778,7 @@
       </p:sp>
       <p:sp>
         <p:nvSpPr>
-          <p:cNvPr id="302" name=""/>
+          <p:cNvPr id="304" name=""/>
           <p:cNvSpPr/>
           <p:nvPr/>
         </p:nvSpPr>
@@ -14647,7 +14807,7 @@
       </p:sp>
       <p:sp>
         <p:nvSpPr>
-          <p:cNvPr id="303" name="" descr="{&quot;isTemplate&quot;:true,&quot;type&quot;:&quot;text&quot;}"/>
+          <p:cNvPr id="305" name="" descr="{&quot;isTemplate&quot;:true,&quot;type&quot;:&quot;text&quot;}"/>
           <p:cNvSpPr txBox="1"/>
           <p:nvPr/>
         </p:nvSpPr>
@@ -14692,7 +14852,7 @@
       </p:sp>
       <p:sp>
         <p:nvSpPr>
-          <p:cNvPr id="304" name=""/>
+          <p:cNvPr id="306" name=""/>
           <p:cNvSpPr/>
           <p:nvPr/>
         </p:nvSpPr>
@@ -14721,7 +14881,7 @@
       </p:sp>
       <p:sp>
         <p:nvSpPr>
-          <p:cNvPr id="305" name="" descr="{&quot;isTemplate&quot;:true,&quot;type&quot;:&quot;text&quot;}"/>
+          <p:cNvPr id="307" name="" descr="{&quot;isTemplate&quot;:true,&quot;type&quot;:&quot;text&quot;}"/>
           <p:cNvSpPr txBox="1"/>
           <p:nvPr/>
         </p:nvSpPr>
@@ -14756,7 +14916,7 @@
       </p:sp>
       <p:sp>
         <p:nvSpPr>
-          <p:cNvPr id="306" name="" descr="{&quot;isTemplate&quot;:true,&quot;type&quot;:&quot;text&quot;}"/>
+          <p:cNvPr id="308" name="" descr="{&quot;isTemplate&quot;:true,&quot;type&quot;:&quot;text&quot;}"/>
           <p:cNvSpPr txBox="1"/>
           <p:nvPr/>
         </p:nvSpPr>
@@ -14791,7 +14951,7 @@
       </p:sp>
       <p:sp>
         <p:nvSpPr>
-          <p:cNvPr id="307" name="" descr="{&quot;isTemplate&quot;:true,&quot;type&quot;:&quot;text&quot;}"/>
+          <p:cNvPr id="309" name="" descr="{&quot;isTemplate&quot;:true,&quot;type&quot;:&quot;text&quot;}"/>
           <p:cNvSpPr txBox="1"/>
           <p:nvPr/>
         </p:nvSpPr>
@@ -14836,7 +14996,7 @@
       </p:sp>
       <p:sp>
         <p:nvSpPr>
-          <p:cNvPr id="308" name="" descr="{&quot;isTemplate&quot;:true,&quot;type&quot;:&quot;text&quot;}"/>
+          <p:cNvPr id="310" name="" descr="{&quot;isTemplate&quot;:true,&quot;type&quot;:&quot;text&quot;}"/>
           <p:cNvSpPr txBox="1"/>
           <p:nvPr/>
         </p:nvSpPr>
@@ -14871,7 +15031,7 @@
       </p:sp>
       <p:sp>
         <p:nvSpPr>
-          <p:cNvPr id="309" name="" descr="{&quot;isTemplate&quot;:true,&quot;type&quot;:&quot;text&quot;}"/>
+          <p:cNvPr id="311" name="" descr="{&quot;isTemplate&quot;:true,&quot;type&quot;:&quot;text&quot;}"/>
           <p:cNvSpPr txBox="1"/>
           <p:nvPr/>
         </p:nvSpPr>
@@ -14906,7 +15066,7 @@
       </p:sp>
       <p:sp>
         <p:nvSpPr>
-          <p:cNvPr id="310" name="" descr="{&quot;isTemplate&quot;:true,&quot;type&quot;:&quot;text&quot;}"/>
+          <p:cNvPr id="312" name="" descr="{&quot;isTemplate&quot;:true,&quot;type&quot;:&quot;text&quot;}"/>
           <p:cNvSpPr txBox="1"/>
           <p:nvPr/>
         </p:nvSpPr>
@@ -14981,7 +15141,7 @@
       </p:sp>
       <p:sp>
         <p:nvSpPr>
-          <p:cNvPr id="311" name="" descr="{&quot;isTemplate&quot;:true,&quot;type&quot;:&quot;text&quot;}"/>
+          <p:cNvPr id="313" name="" descr="{&quot;isTemplate&quot;:true,&quot;type&quot;:&quot;text&quot;}"/>
           <p:cNvSpPr txBox="1"/>
           <p:nvPr/>
         </p:nvSpPr>
@@ -15016,7 +15176,7 @@
       </p:sp>
       <p:sp>
         <p:nvSpPr>
-          <p:cNvPr id="312" name="" descr="{&quot;isTemplate&quot;:true,&quot;type&quot;:&quot;text&quot;}"/>
+          <p:cNvPr id="314" name="" descr="{&quot;isTemplate&quot;:true,&quot;type&quot;:&quot;text&quot;}"/>
           <p:cNvSpPr txBox="1"/>
           <p:nvPr/>
         </p:nvSpPr>
@@ -15051,7 +15211,7 @@
       </p:sp>
       <p:sp>
         <p:nvSpPr>
-          <p:cNvPr id="313" name="" descr="{&quot;isTemplate&quot;:true,&quot;type&quot;:&quot;text&quot;}"/>
+          <p:cNvPr id="315" name="" descr="{&quot;isTemplate&quot;:true,&quot;type&quot;:&quot;text&quot;}"/>
           <p:cNvSpPr txBox="1"/>
           <p:nvPr/>
         </p:nvSpPr>
@@ -15126,7 +15286,7 @@
       </p:sp>
       <p:sp>
         <p:nvSpPr>
-          <p:cNvPr id="314" name="" descr="{&quot;isTemplate&quot;:true,&quot;type&quot;:&quot;text&quot;}"/>
+          <p:cNvPr id="316" name="" descr="{&quot;isTemplate&quot;:true,&quot;type&quot;:&quot;text&quot;}"/>
           <p:cNvSpPr txBox="1"/>
           <p:nvPr/>
         </p:nvSpPr>
@@ -15161,7 +15321,7 @@
       </p:sp>
       <p:sp>
         <p:nvSpPr>
-          <p:cNvPr id="315" name="" descr="{&quot;isTemplate&quot;:true,&quot;type&quot;:&quot;text&quot;}"/>
+          <p:cNvPr id="317" name="" descr="{&quot;isTemplate&quot;:true,&quot;type&quot;:&quot;text&quot;}"/>
           <p:cNvSpPr txBox="1"/>
           <p:nvPr/>
         </p:nvSpPr>
@@ -15196,7 +15356,7 @@
       </p:sp>
       <p:sp>
         <p:nvSpPr>
-          <p:cNvPr id="316" name="" descr="{&quot;isTemplate&quot;:true,&quot;type&quot;:&quot;text&quot;}"/>
+          <p:cNvPr id="318" name="" descr="{&quot;isTemplate&quot;:true,&quot;type&quot;:&quot;text&quot;}"/>
           <p:cNvSpPr txBox="1"/>
           <p:nvPr/>
         </p:nvSpPr>
@@ -15271,7 +15431,7 @@
       </p:sp>
       <p:sp>
         <p:nvSpPr>
-          <p:cNvPr id="317" name="" descr="{&quot;isTemplate&quot;:true,&quot;type&quot;:&quot;text&quot;}"/>
+          <p:cNvPr id="319" name="" descr="{&quot;isTemplate&quot;:true,&quot;type&quot;:&quot;text&quot;}"/>
           <p:cNvSpPr txBox="1"/>
           <p:nvPr/>
         </p:nvSpPr>
@@ -15306,7 +15466,7 @@
       </p:sp>
       <p:sp>
         <p:nvSpPr>
-          <p:cNvPr id="318" name="" descr="{&quot;isTemplate&quot;:true,&quot;type&quot;:&quot;text&quot;}"/>
+          <p:cNvPr id="320" name="" descr="{&quot;isTemplate&quot;:true,&quot;type&quot;:&quot;text&quot;}"/>
           <p:cNvSpPr txBox="1"/>
           <p:nvPr/>
         </p:nvSpPr>
@@ -15341,7 +15501,7 @@
       </p:sp>
       <p:sp>
         <p:nvSpPr>
-          <p:cNvPr id="319" name="" descr="{&quot;isTemplate&quot;:true,&quot;type&quot;:&quot;text&quot;}"/>
+          <p:cNvPr id="321" name="" descr="{&quot;isTemplate&quot;:true,&quot;type&quot;:&quot;text&quot;}"/>
           <p:cNvSpPr txBox="1"/>
           <p:nvPr/>
         </p:nvSpPr>
@@ -15396,7 +15556,7 @@
       </p:sp>
       <p:sp>
         <p:nvSpPr>
-          <p:cNvPr id="320" name=""/>
+          <p:cNvPr id="322" name=""/>
           <p:cNvSpPr/>
           <p:nvPr/>
         </p:nvSpPr>
@@ -15430,7 +15590,7 @@
       </p:sp>
       <p:sp>
         <p:nvSpPr>
-          <p:cNvPr id="321" name="" descr="{&quot;isTemplate&quot;:true,&quot;type&quot;:&quot;text&quot;}"/>
+          <p:cNvPr id="323" name="" descr="{&quot;isTemplate&quot;:true,&quot;type&quot;:&quot;text&quot;}"/>
           <p:cNvSpPr txBox="1"/>
           <p:nvPr/>
         </p:nvSpPr>
@@ -15465,7 +15625,7 @@
       </p:sp>
       <p:sp>
         <p:nvSpPr>
-          <p:cNvPr id="322" name="" descr="{&quot;isTemplate&quot;:true,&quot;type&quot;:&quot;text&quot;}"/>
+          <p:cNvPr id="324" name="" descr="{&quot;isTemplate&quot;:true,&quot;type&quot;:&quot;text&quot;}"/>
           <p:cNvSpPr txBox="1"/>
           <p:nvPr/>
         </p:nvSpPr>
@@ -15500,7 +15660,7 @@
       </p:sp>
       <p:sp>
         <p:nvSpPr>
-          <p:cNvPr id="323" name="" descr="{&quot;isTemplate&quot;:true,&quot;type&quot;:&quot;text&quot;}"/>
+          <p:cNvPr id="325" name="" descr="{&quot;isTemplate&quot;:true,&quot;type&quot;:&quot;text&quot;}"/>
           <p:cNvSpPr txBox="1"/>
           <p:nvPr/>
         </p:nvSpPr>
@@ -15535,7 +15695,7 @@
       </p:sp>
       <p:sp>
         <p:nvSpPr>
-          <p:cNvPr id="324" name="" descr="{&quot;isTemplate&quot;:true,&quot;type&quot;:&quot;text&quot;}"/>
+          <p:cNvPr id="326" name="" descr="{&quot;isTemplate&quot;:true,&quot;type&quot;:&quot;text&quot;}"/>
           <p:cNvSpPr txBox="1"/>
           <p:nvPr/>
         </p:nvSpPr>
@@ -15570,7 +15730,7 @@
       </p:sp>
       <p:sp>
         <p:nvSpPr>
-          <p:cNvPr id="325" name="" descr="{&quot;isTemplate&quot;:true,&quot;type&quot;:&quot;text&quot;}"/>
+          <p:cNvPr id="327" name="" descr="{&quot;isTemplate&quot;:true,&quot;type&quot;:&quot;text&quot;}"/>
           <p:cNvSpPr txBox="1"/>
           <p:nvPr/>
         </p:nvSpPr>
@@ -15605,7 +15765,7 @@
       </p:sp>
       <p:sp>
         <p:nvSpPr>
-          <p:cNvPr id="326" name="" descr="{&quot;isTemplate&quot;:true,&quot;type&quot;:&quot;text&quot;}"/>
+          <p:cNvPr id="328" name="" descr="{&quot;isTemplate&quot;:true,&quot;type&quot;:&quot;text&quot;}"/>
           <p:cNvSpPr txBox="1"/>
           <p:nvPr/>
         </p:nvSpPr>
@@ -15640,7 +15800,7 @@
       </p:sp>
       <p:sp>
         <p:nvSpPr>
-          <p:cNvPr id="327" name="" descr="{&quot;isTemplate&quot;:true,&quot;type&quot;:&quot;text&quot;}"/>
+          <p:cNvPr id="329" name="" descr="{&quot;isTemplate&quot;:true,&quot;type&quot;:&quot;text&quot;}"/>
           <p:cNvSpPr txBox="1"/>
           <p:nvPr/>
         </p:nvSpPr>
@@ -15675,7 +15835,7 @@
       </p:sp>
       <p:sp>
         <p:nvSpPr>
-          <p:cNvPr id="328" name="" descr="{&quot;isTemplate&quot;:true,&quot;type&quot;:&quot;text&quot;}"/>
+          <p:cNvPr id="330" name="" descr="{&quot;isTemplate&quot;:true,&quot;type&quot;:&quot;text&quot;}"/>
           <p:cNvSpPr txBox="1"/>
           <p:nvPr/>
         </p:nvSpPr>
@@ -15710,7 +15870,7 @@
       </p:sp>
       <p:sp>
         <p:nvSpPr>
-          <p:cNvPr id="329" name="" descr="{&quot;isTemplate&quot;:true,&quot;type&quot;:&quot;text&quot;}"/>
+          <p:cNvPr id="331" name="" descr="{&quot;isTemplate&quot;:true,&quot;type&quot;:&quot;text&quot;}"/>
           <p:cNvSpPr txBox="1"/>
           <p:nvPr/>
         </p:nvSpPr>
@@ -15765,7 +15925,7 @@
       </p:sp>
       <p:sp>
         <p:nvSpPr>
-          <p:cNvPr id="330" name=""/>
+          <p:cNvPr id="332" name=""/>
           <p:cNvSpPr/>
           <p:nvPr/>
         </p:nvSpPr>
@@ -15808,7 +15968,7 @@
       </p:sp>
       <p:sp>
         <p:nvSpPr>
-          <p:cNvPr id="331" name=""/>
+          <p:cNvPr id="333" name=""/>
           <p:cNvSpPr/>
           <p:nvPr/>
         </p:nvSpPr>
@@ -15837,7 +15997,7 @@
       </p:sp>
       <p:sp>
         <p:nvSpPr>
-          <p:cNvPr id="332" name="" descr="{&quot;isTemplate&quot;:true,&quot;type&quot;:&quot;text&quot;}"/>
+          <p:cNvPr id="334" name="" descr="{&quot;isTemplate&quot;:true,&quot;type&quot;:&quot;text&quot;}"/>
           <p:cNvSpPr txBox="1"/>
           <p:nvPr/>
         </p:nvSpPr>
@@ -15890,7 +16050,7 @@
       </p:sp>
       <p:sp>
         <p:nvSpPr>
-          <p:cNvPr id="333" name="" descr="{&quot;isTemplate&quot;:true,&quot;type&quot;:&quot;text&quot;}"/>
+          <p:cNvPr id="335" name="" descr="{&quot;isTemplate&quot;:true,&quot;type&quot;:&quot;text&quot;}"/>
           <p:cNvSpPr txBox="1"/>
           <p:nvPr/>
         </p:nvSpPr>
@@ -15955,7 +16115,7 @@
       </p:sp>
       <p:sp>
         <p:nvSpPr>
-          <p:cNvPr id="334" name="" descr="{&quot;isTemplate&quot;:true,&quot;type&quot;:&quot;text&quot;}"/>
+          <p:cNvPr id="336" name="" descr="{&quot;isTemplate&quot;:true,&quot;type&quot;:&quot;text&quot;}"/>
           <p:cNvSpPr txBox="1"/>
           <p:nvPr/>
         </p:nvSpPr>
@@ -15998,7 +16158,7 @@
   <p:cSld>
     <p:spTree>
       <p:nvGrpSpPr>
-        <p:cNvPr id="335" name="" descr="&lt;Slide style={{ width: 1280, height: 720, background: '#F6F8FD', padding: '56px 72px', flexDirection: 'column' }}&gt;&#13;&#10;  &lt;Box style={{ height: 96, flexDirection: 'row', justifyContent: 'space-between', alignItems: 'flex-start' }}&gt;&#13;&#10;    &lt;Box style={{ flexDirection: 'column', gap: 8 }}&gt;&#13;&#10;      &lt;Text style={{ fontSize: 34, fontWeight: 'bold', color: '#0C1222' }}&gt;AI 不会算错账，因为它不算账&lt;/Text&gt;&#13;&#10;      &lt;Text style={{ fontSize: 15, color: '#5C6780' }}&gt;所有数字只有一个实现，模型只负责理解问题与组织语言&lt;/Text&gt;&#13;&#10;    &lt;/Box&gt;&#13;&#10;    &lt;Box style={{ flexDirection: 'row', alignItems: 'center', gap: 6, padding: '5px 12px', background: '#EEF1FE', border: '1px solid #DDE2F5', borderRadius: 999 }}&gt;&#13;&#10;      &lt;Box style={{ width: 6, height: 6, borderRadius: 3, background: '#4C4DDC' }} /&gt;&#13;&#10;      &lt;Text style={{ fontSize: 12, color: '#4C4DDC', fontWeight: 'bold', letterSpacing: 1 }}&gt;AI 掌柜&lt;/Text&gt;&#13;&#10;    &lt;/Box&gt;&#13;&#10;  &lt;/Box&gt;&#13;&#10;  &lt;Box style={{ width: 72, height: 3, background: '#4C4DDC', borderRadius: 2, marginTop: 2, marginBottom: 12 }} /&gt;&#13;&#10;  &lt;Box style={{ flex: 1, paddingTop: 8 }}&gt;&#13;&#10;    &lt;Box style={{ flexDirection: 'row', gap: 28, alignItems: 'center' }}&gt;&#13;&#10;      &lt;Box style={{ flexDirection: 'column', width: 380 }}&gt;&#13;&#10;        &lt;Text style={{ fontSize: 13, color: '#5C6780', letterSpacing: 1 }}&gt;昨日营收（元）&lt;/Text&gt;&#13;&#10;        &lt;Text style={{ fontSize: 68, fontWeight: 'bold', color: '#0C1222', letterSpacing: -2 }}&gt;7,507.80&lt;/Text&gt;&#13;&#10;        &lt;Text style={{ fontSize: 13, color: '#5C6780', marginTop: 6 }}&gt;同星期基线 10,898.00 · 低 31.1%&lt;/Text&gt;&#13;&#10;      &lt;/Box&gt;&#13;&#10;      &lt;Box style={{ flex: 1, flexDirection: 'column', gap: 10 }}&gt;&#13;&#10;        &lt;Text style={{ fontSize: 13, color: '#5C6780' }}&gt;这个数字出现在三个地方，必须完全相等&lt;/Text&gt;&#13;&#10;        &lt;Box style={{ flexDirection: 'row', gap: 12 }}&gt;&#13;&#10;          &lt;Box style={{ flex: 1, background: '#FFFFFF', border: '1px solid #E3E8F5', borderRadius: 10, padding: 16 }}&gt;&#13;&#10;            &lt;Text style={{ fontSize: 15, color: '#0C1222' }}&gt;AI 驾驶舱&lt;/Text&gt;&#13;&#10;            &lt;Text style={{ fontSize: 12, color: '#5C6780', marginTop: 6 }}&gt;KPI 卡片&lt;/Text&gt;&#13;&#10;          &lt;/Box&gt;&#13;&#10;          &lt;Box style={{ flex: 1, background: '#FFFFFF', border: '1px solid #E3E8F5', borderRadius: 10, padding: 16 }}&gt;&#13;&#10;            &lt;Text style={{ fontSize: 15, color: '#0C1222' }}&gt;营收报表&lt;/Text&gt;&#13;&#10;            &lt;Text style={{ fontSize: 12, color: '#5C6780', marginTop: 6 }}&gt;按日汇总&lt;/Text&gt;&#13;&#10;          &lt;/Box&gt;&#13;&#10;          &lt;Box style={{ flex: 1, background: '#FFFFFF', border: '1px solid #E3E8F5', borderRadius: 10, padding: 16 }}&gt;&#13;&#10;            &lt;Text style={{ fontSize: 15, color: '#0C1222' }}&gt;AI 问答&lt;/Text&gt;&#13;&#10;            &lt;Text style={{ fontSize: 12, color: '#5C6780', marginTop: 6 }}&gt;SQL 结果&lt;/Text&gt;&#13;&#10;          &lt;/Box&gt;&#13;&#10;        &lt;/Box&gt;&#13;&#10;      &lt;/Box&gt;&#13;&#10;    &lt;/Box&gt;&#13;&#10;    &lt;Box style={{ marginTop: 26, background: '#FBFCFE', border: '1px solid #E3E8F5', borderRadius: 12, padding: 22 }}&gt;&#13;&#10;      &lt;Text style={{ fontSize: 12, color: '#8A93A8', letterSpacing: 1 }}&gt;analytics / metrics.py&lt;/Text&gt;&#13;&#10;      &lt;Text style={{ fontSize: 14, color: '#5C6780', marginTop: 10, lineHeight: 1.9 }}&gt;&#13;&#10;        def q_kpi(conn, d1, d2):&amp;nbsp;&amp;nbsp;&lt;span style={{ color: '#4C4DDC' }}&gt;# 全系统唯一的营收口径&lt;/span&gt;&lt;br /&gt;&#13;&#10;        &amp;nbsp;&amp;nbsp;revenue = SUM(final_amount) WHERE status='settled'&lt;br /&gt;&#13;&#10;        &amp;nbsp;&amp;nbsp;return dict(revenue=money(revenue), margin_rate=...)&#13;&#10;      &lt;/Text&gt;&#13;&#10;    &lt;/Box&gt;&#13;&#10;    &lt;Text style={{ fontSize: 14, color: '#5C6780', marginTop: 16 }}&gt;数字由 SQL 算出，模型只写解读；结论必须引用 evidence，点开能看到原始 SQL。&lt;/Text&gt;&#13;&#10;  &lt;/Box&gt;&#13;&#10;  &lt;Box style={{ height: 36, flexDirection: 'row', justifyContent: 'space-between', alignItems: 'flex-end' }}&gt;&#13;&#10;    &lt;Text style={{ fontSize: 12, color: '#8A93A8' }}&gt;2026 武汉 1024 · 产业应用赛道&lt;/Text&gt;&#13;&#10;    &lt;Text style={{ fontSize: 12, color: '#8A93A8' }}&gt;08 / 12&lt;/Text&gt;&#13;&#10;  &lt;/Box&gt;&#13;&#10;&lt;/Slide&gt;"/>
+        <p:cNvPr id="337" name=""/>
         <p:cNvGrpSpPr/>
         <p:nvPr/>
       </p:nvGrpSpPr>
@@ -16012,7 +16172,7 @@
       </p:grpSpPr>
       <p:sp>
         <p:nvSpPr>
-          <p:cNvPr id="336" name=""/>
+          <p:cNvPr id="338" name=""/>
           <p:cNvSpPr/>
           <p:nvPr/>
         </p:nvSpPr>
@@ -16031,12 +16191,15 @@
         </p:spPr>
         <p:txBody>
           <a:bodyPr/>
-          <a:p/>
-        </p:txBody>
-      </p:sp>
-      <p:sp>
-        <p:nvSpPr>
-          <p:cNvPr id="337" name="" descr="{&quot;isTemplate&quot;:true,&quot;type&quot;:&quot;text&quot;}"/>
+          <a:p>
+            <a:pPr/>
+            <a:endParaRPr/>
+          </a:p>
+        </p:txBody>
+      </p:sp>
+      <p:sp>
+        <p:nvSpPr>
+          <p:cNvPr id="339" name="" descr="{&quot;isTemplate&quot;:true,&quot;type&quot;:&quot;text&quot;}"/>
           <p:cNvSpPr txBox="1"/>
           <p:nvPr/>
         </p:nvSpPr>
@@ -16081,7 +16244,7 @@
       </p:sp>
       <p:sp>
         <p:nvSpPr>
-          <p:cNvPr id="338" name="" descr="{&quot;isTemplate&quot;:true,&quot;type&quot;:&quot;text&quot;}"/>
+          <p:cNvPr id="340" name="" descr="{&quot;isTemplate&quot;:true,&quot;type&quot;:&quot;text&quot;}"/>
           <p:cNvSpPr txBox="1"/>
           <p:nvPr/>
         </p:nvSpPr>
@@ -16116,7 +16279,7 @@
       </p:sp>
       <p:sp>
         <p:nvSpPr>
-          <p:cNvPr id="339" name=""/>
+          <p:cNvPr id="341" name=""/>
           <p:cNvSpPr/>
           <p:nvPr/>
         </p:nvSpPr>
@@ -16142,12 +16305,15 @@
         </p:spPr>
         <p:txBody>
           <a:bodyPr/>
-          <a:p/>
-        </p:txBody>
-      </p:sp>
-      <p:sp>
-        <p:nvSpPr>
-          <p:cNvPr id="340" name=""/>
+          <a:p>
+            <a:pPr/>
+            <a:endParaRPr/>
+          </a:p>
+        </p:txBody>
+      </p:sp>
+      <p:sp>
+        <p:nvSpPr>
+          <p:cNvPr id="342" name=""/>
           <p:cNvSpPr/>
           <p:nvPr/>
         </p:nvSpPr>
@@ -16168,12 +16334,15 @@
         </p:spPr>
         <p:txBody>
           <a:bodyPr/>
-          <a:p/>
-        </p:txBody>
-      </p:sp>
-      <p:sp>
-        <p:nvSpPr>
-          <p:cNvPr id="341" name="" descr="{&quot;isTemplate&quot;:true,&quot;type&quot;:&quot;text&quot;}"/>
+          <a:p>
+            <a:pPr/>
+            <a:endParaRPr/>
+          </a:p>
+        </p:txBody>
+      </p:sp>
+      <p:sp>
+        <p:nvSpPr>
+          <p:cNvPr id="343" name="" descr="{&quot;isTemplate&quot;:true,&quot;type&quot;:&quot;text&quot;}"/>
           <p:cNvSpPr txBox="1"/>
           <p:nvPr/>
         </p:nvSpPr>
@@ -16218,7 +16387,7 @@
       </p:sp>
       <p:sp>
         <p:nvSpPr>
-          <p:cNvPr id="342" name=""/>
+          <p:cNvPr id="344" name=""/>
           <p:cNvSpPr/>
           <p:nvPr/>
         </p:nvSpPr>
@@ -16239,12 +16408,15 @@
         </p:spPr>
         <p:txBody>
           <a:bodyPr/>
-          <a:p/>
-        </p:txBody>
-      </p:sp>
-      <p:sp>
-        <p:nvSpPr>
-          <p:cNvPr id="343" name="" descr="{&quot;isTemplate&quot;:true,&quot;type&quot;:&quot;text&quot;}"/>
+          <a:p>
+            <a:pPr/>
+            <a:endParaRPr/>
+          </a:p>
+        </p:txBody>
+      </p:sp>
+      <p:sp>
+        <p:nvSpPr>
+          <p:cNvPr id="345" name="" descr="{&quot;isTemplate&quot;:true,&quot;type&quot;:&quot;text&quot;}"/>
           <p:cNvSpPr txBox="1"/>
           <p:nvPr/>
         </p:nvSpPr>
@@ -16279,7 +16451,7 @@
       </p:sp>
       <p:sp>
         <p:nvSpPr>
-          <p:cNvPr id="344" name="" descr="{&quot;isTemplate&quot;:true,&quot;type&quot;:&quot;text&quot;}"/>
+          <p:cNvPr id="346" name="" descr="{&quot;isTemplate&quot;:true,&quot;type&quot;:&quot;text&quot;}"/>
           <p:cNvSpPr txBox="1"/>
           <p:nvPr/>
         </p:nvSpPr>
@@ -16314,7 +16486,7 @@
       </p:sp>
       <p:sp>
         <p:nvSpPr>
-          <p:cNvPr id="345" name="" descr="{&quot;isTemplate&quot;:true,&quot;type&quot;:&quot;text&quot;}"/>
+          <p:cNvPr id="347" name="" descr="{&quot;isTemplate&quot;:true,&quot;type&quot;:&quot;text&quot;}"/>
           <p:cNvSpPr txBox="1"/>
           <p:nvPr/>
         </p:nvSpPr>
@@ -16379,7 +16551,7 @@
       </p:sp>
       <p:sp>
         <p:nvSpPr>
-          <p:cNvPr id="346" name="" descr="{&quot;isTemplate&quot;:true,&quot;type&quot;:&quot;text&quot;}"/>
+          <p:cNvPr id="348" name="" descr="{&quot;isTemplate&quot;:true,&quot;type&quot;:&quot;text&quot;}"/>
           <p:cNvSpPr txBox="1"/>
           <p:nvPr/>
         </p:nvSpPr>
@@ -16414,7 +16586,7 @@
       </p:sp>
       <p:sp>
         <p:nvSpPr>
-          <p:cNvPr id="347" name=""/>
+          <p:cNvPr id="349" name=""/>
           <p:cNvSpPr/>
           <p:nvPr/>
         </p:nvSpPr>
@@ -16440,12 +16612,15 @@
         </p:spPr>
         <p:txBody>
           <a:bodyPr/>
-          <a:p/>
-        </p:txBody>
-      </p:sp>
-      <p:sp>
-        <p:nvSpPr>
-          <p:cNvPr id="348" name="" descr="{&quot;isTemplate&quot;:true,&quot;type&quot;:&quot;text&quot;}"/>
+          <a:p>
+            <a:pPr/>
+            <a:endParaRPr/>
+          </a:p>
+        </p:txBody>
+      </p:sp>
+      <p:sp>
+        <p:nvSpPr>
+          <p:cNvPr id="350" name="" descr="{&quot;isTemplate&quot;:true,&quot;type&quot;:&quot;text&quot;}"/>
           <p:cNvSpPr txBox="1"/>
           <p:nvPr/>
         </p:nvSpPr>
@@ -16490,7 +16665,7 @@
       </p:sp>
       <p:sp>
         <p:nvSpPr>
-          <p:cNvPr id="349" name="" descr="{&quot;isTemplate&quot;:true,&quot;type&quot;:&quot;text&quot;}"/>
+          <p:cNvPr id="351" name="" descr="{&quot;isTemplate&quot;:true,&quot;type&quot;:&quot;text&quot;}"/>
           <p:cNvSpPr txBox="1"/>
           <p:nvPr/>
         </p:nvSpPr>
@@ -16535,7 +16710,7 @@
       </p:sp>
       <p:sp>
         <p:nvSpPr>
-          <p:cNvPr id="350" name=""/>
+          <p:cNvPr id="352" name=""/>
           <p:cNvSpPr/>
           <p:nvPr/>
         </p:nvSpPr>
@@ -16561,12 +16736,15 @@
         </p:spPr>
         <p:txBody>
           <a:bodyPr/>
-          <a:p/>
-        </p:txBody>
-      </p:sp>
-      <p:sp>
-        <p:nvSpPr>
-          <p:cNvPr id="351" name="" descr="{&quot;isTemplate&quot;:true,&quot;type&quot;:&quot;text&quot;}"/>
+          <a:p>
+            <a:pPr/>
+            <a:endParaRPr/>
+          </a:p>
+        </p:txBody>
+      </p:sp>
+      <p:sp>
+        <p:nvSpPr>
+          <p:cNvPr id="353" name="" descr="{&quot;isTemplate&quot;:true,&quot;type&quot;:&quot;text&quot;}"/>
           <p:cNvSpPr txBox="1"/>
           <p:nvPr/>
         </p:nvSpPr>
@@ -16601,7 +16779,7 @@
       </p:sp>
       <p:sp>
         <p:nvSpPr>
-          <p:cNvPr id="352" name="" descr="{&quot;isTemplate&quot;:true,&quot;type&quot;:&quot;text&quot;}"/>
+          <p:cNvPr id="354" name="" descr="{&quot;isTemplate&quot;:true,&quot;type&quot;:&quot;text&quot;}"/>
           <p:cNvSpPr txBox="1"/>
           <p:nvPr/>
         </p:nvSpPr>
@@ -16636,7 +16814,7 @@
       </p:sp>
       <p:sp>
         <p:nvSpPr>
-          <p:cNvPr id="353" name=""/>
+          <p:cNvPr id="355" name=""/>
           <p:cNvSpPr/>
           <p:nvPr/>
         </p:nvSpPr>
@@ -16662,12 +16840,15 @@
         </p:spPr>
         <p:txBody>
           <a:bodyPr/>
-          <a:p/>
-        </p:txBody>
-      </p:sp>
-      <p:sp>
-        <p:nvSpPr>
-          <p:cNvPr id="354" name="" descr="{&quot;isTemplate&quot;:true,&quot;type&quot;:&quot;text&quot;}"/>
+          <a:p>
+            <a:pPr/>
+            <a:endParaRPr/>
+          </a:p>
+        </p:txBody>
+      </p:sp>
+      <p:sp>
+        <p:nvSpPr>
+          <p:cNvPr id="356" name="" descr="{&quot;isTemplate&quot;:true,&quot;type&quot;:&quot;text&quot;}"/>
           <p:cNvSpPr txBox="1"/>
           <p:nvPr/>
         </p:nvSpPr>
@@ -16712,7 +16893,7 @@
       </p:sp>
       <p:sp>
         <p:nvSpPr>
-          <p:cNvPr id="355" name="" descr="{&quot;isTemplate&quot;:true,&quot;type&quot;:&quot;text&quot;}"/>
+          <p:cNvPr id="357" name="" descr="{&quot;isTemplate&quot;:true,&quot;type&quot;:&quot;text&quot;}"/>
           <p:cNvSpPr txBox="1"/>
           <p:nvPr/>
         </p:nvSpPr>
@@ -16757,7 +16938,7 @@
       </p:sp>
       <p:sp>
         <p:nvSpPr>
-          <p:cNvPr id="356" name=""/>
+          <p:cNvPr id="358" name=""/>
           <p:cNvSpPr/>
           <p:nvPr/>
         </p:nvSpPr>
@@ -16783,12 +16964,15 @@
         </p:spPr>
         <p:txBody>
           <a:bodyPr/>
-          <a:p/>
-        </p:txBody>
-      </p:sp>
-      <p:sp>
-        <p:nvSpPr>
-          <p:cNvPr id="357" name="" descr="{&quot;isTemplate&quot;:true,&quot;type&quot;:&quot;text&quot;}"/>
+          <a:p>
+            <a:pPr/>
+            <a:endParaRPr/>
+          </a:p>
+        </p:txBody>
+      </p:sp>
+      <p:sp>
+        <p:nvSpPr>
+          <p:cNvPr id="359" name="" descr="{&quot;isTemplate&quot;:true,&quot;type&quot;:&quot;text&quot;}"/>
           <p:cNvSpPr txBox="1"/>
           <p:nvPr/>
         </p:nvSpPr>
@@ -16823,7 +17007,7 @@
       </p:sp>
       <p:sp>
         <p:nvSpPr>
-          <p:cNvPr id="358" name="" descr="{&quot;isTemplate&quot;:true,&quot;type&quot;:&quot;text&quot;}"/>
+          <p:cNvPr id="360" name="" descr="{&quot;isTemplate&quot;:true,&quot;type&quot;:&quot;text&quot;}"/>
           <p:cNvSpPr txBox="1"/>
           <p:nvPr/>
         </p:nvSpPr>
@@ -16914,7 +17098,7 @@
       </p:sp>
       <p:sp>
         <p:nvSpPr>
-          <p:cNvPr id="359" name="" descr="{&quot;isTemplate&quot;:true,&quot;type&quot;:&quot;text&quot;}"/>
+          <p:cNvPr id="361" name="" descr="{&quot;isTemplate&quot;:true,&quot;type&quot;:&quot;text&quot;}"/>
           <p:cNvSpPr txBox="1"/>
           <p:nvPr/>
         </p:nvSpPr>
@@ -17009,7 +17193,7 @@
       </p:sp>
       <p:sp>
         <p:nvSpPr>
-          <p:cNvPr id="360" name="" descr="{&quot;isTemplate&quot;:true,&quot;type&quot;:&quot;text&quot;}"/>
+          <p:cNvPr id="362" name="" descr="{&quot;isTemplate&quot;:true,&quot;type&quot;:&quot;text&quot;}"/>
           <p:cNvSpPr txBox="1"/>
           <p:nvPr/>
         </p:nvSpPr>
@@ -17074,7 +17258,7 @@
       </p:sp>
       <p:sp>
         <p:nvSpPr>
-          <p:cNvPr id="361" name="" descr="{&quot;isTemplate&quot;:true,&quot;type&quot;:&quot;text&quot;}"/>
+          <p:cNvPr id="363" name="" descr="{&quot;isTemplate&quot;:true,&quot;type&quot;:&quot;text&quot;}"/>
           <p:cNvSpPr txBox="1"/>
           <p:nvPr/>
         </p:nvSpPr>
@@ -17117,7 +17301,7 @@
   <p:cSld>
     <p:spTree>
       <p:nvGrpSpPr>
-        <p:cNvPr id="362" name="" descr="&lt;Slide style={{ width: 1280, height: 720, background: '#F6F8FD', padding: '56px 72px', flexDirection: 'column' }}&gt;&#10;  &lt;Box style={{ height: 96, flexDirection: 'row', justifyContent: 'space-between', alignItems: 'flex-start' }}&gt;&#10;    &lt;Box style={{ flexDirection: 'column', gap: 8 }}&gt;&#10;      &lt;Text style={{ fontSize: 34, fontWeight: 'bold', color: '#0C1222' }}&gt;先算清代价，再谈智能&lt;/Text&gt;&#10;      &lt;Text style={{ fontSize: 15, color: '#5C6780' }}&gt;左边是它在这套 180 天数据里真找出来的，右边是按建议执行后的测算&lt;/Text&gt;&#10;    &lt;/Box&gt;&#10;    &lt;Box style={{ flexDirection: 'row', alignItems: 'center', gap: 6, padding: '5px 12px', background: '#EEF1FE', border: '1px solid #DDE2F5', borderRadius: 999 }}&gt;&#10;      &lt;Box style={{ width: 6, height: 6, borderRadius: 3, background: '#4C4DDC' }} /&gt;&#10;      &lt;Text style={{ fontSize: 12, color: '#4C4DDC', fontWeight: 'bold', letterSpacing: 1 }}&gt;AI 掌柜&lt;/Text&gt;&#10;    &lt;/Box&gt;&#10;  &lt;/Box&gt;&#10;  &lt;Box style={{ width: 72, height: 3, background: '#4C4DDC', borderRadius: 2, marginTop: 2, marginBottom: 12 }} /&gt;&#10;  &lt;Box style={{ flex: 1, paddingTop: 8 }}&gt;&#10;    &lt;Box style={{ flexDirection: 'row', gap: 24 }}&gt;&#10;      &lt;Box style={{ flex: 1.15, flexDirection: 'column' }}&gt;&#10;        &lt;Text style={{ fontSize: 13, color: '#5C6780', letterSpacing: 1 }}&gt;实测 · 系统自己发现的五件事&lt;/Text&gt;&#10;        &lt;Box style={{ marginTop: 14, flexDirection: 'column', gap: 0 }}&gt;&#10;          &lt;Box style={{ paddingTop: 12, paddingBottom: 12, borderTop: '1px solid #E3E8F5', flexDirection: 'row', alignItems: 'baseline' }}&gt;&#10;            &lt;Text style={{ fontSize: 26, fontWeight: 'bold', color: '#4C4DDC', width: 96 }}&gt;10.6%&lt;/Text&gt;&#10;            &lt;Text style={{ fontSize: 14, color: '#0C1222' }}&gt;近 7 天折扣率，比前 30 天的 8.4% 高 2.2 个点&lt;/Text&gt;&#10;          &lt;/Box&gt;&#10;          &lt;Box style={{ paddingTop: 12, paddingBottom: 12, borderTop: '1px solid #E3E8F5', flexDirection: 'row', alignItems: 'baseline' }}&gt;&#10;            &lt;Text style={{ fontSize: 26, fontWeight: 'bold', color: '#4C4DDC', width: 96 }}&gt;1,476&lt;/Text&gt;&#10;            &lt;Text style={{ fontSize: 14, color: '#0C1222' }}&gt;元 · 按原折扣水平本可少让的金额&lt;/Text&gt;&#10;          &lt;/Box&gt;&#10;          &lt;Box style={{ paddingTop: 12, paddingBottom: 12, borderTop: '1px solid #E3E8F5', flexDirection: 'row', alignItems: 'baseline' }}&gt;&#10;            &lt;Text style={{ fontSize: 26, fontWeight: 'bold', color: '#4C4DDC', width: 96 }}&gt;20 道&lt;/Text&gt;&#10;            &lt;Text style={{ fontSize: 14, color: '#0C1222' }}&gt;菜连续 3 天 0 销量，占在售 9.7%&lt;/Text&gt;&#10;          &lt;/Box&gt;&#10;          &lt;Box style={{ paddingTop: 12, paddingBottom: 12, borderTop: '1px solid #E3E8F5', flexDirection: 'row', alignItems: 'baseline' }}&gt;&#10;            &lt;Text style={{ fontSize: 26, fontWeight: 'bold', color: '#4C4DDC', width: 96 }}&gt;1 种&lt;/Text&gt;&#10;            &lt;Text style={{ fontSize: 14, color: '#0C1222' }}&gt;食材可支撑不足 2 天（基围虾只剩 1.5 天）&lt;/Text&gt;&#10;          &lt;/Box&gt;&#10;          &lt;Box style={{ paddingTop: 12, paddingBottom: 12, borderTop: '1px solid #E3E8F5', borderBottom: '1px solid #E3E8F5', flexDirection: 'row', alignItems: 'baseline' }}&gt;&#10;            &lt;Text style={{ fontSize: 26, fontWeight: 'bold', color: '#4C4DDC', width: 96 }}&gt;57.8%&lt;/Text&gt;&#10;            &lt;Text style={{ fontSize: 14, color: '#0C1222' }}&gt;近 30 天毛利率，比目标低 2.2 个点&lt;/Text&gt;&#10;          &lt;/Box&gt;&#10;        &lt;/Box&gt;&#10;      &lt;/Box&gt;&#10;      &lt;Box style={{ flex: 1, background: '#EEF1FE', border: '1px solid #C9CDF6', borderRadius: 14, padding: 30, flexDirection: 'column', gap: 18, justifyContent: 'flex-start' }}&gt;&#10;        &lt;Box style={{ flexDirection: 'column', gap: 6 }}&gt;&#10;          &lt;Text style={{ fontSize: 13, color: '#4C4DDC', letterSpacing: 1 }}&gt;测算 · 补齐这 2.2 个点&lt;/Text&gt;&#10;          &lt;Text style={{ fontSize: 56, fontWeight: 'bold', color: '#0C1222', letterSpacing: -1 }}&gt;+9.0&lt;span style={{ fontSize: 22 }}&gt; 万/年&lt;/span&gt;&lt;/Text&gt;&#10;          &lt;Text style={{ fontSize: 13, color: '#5C6780' }}&gt;近 30 天营收 33.1 万 × 2.2pt × 12 个月&lt;/Text&gt;&#10;        &lt;/Box&gt;&#10;        &lt;Box style={{ flexDirection: 'column', gap: 8, marginTop: 6, paddingTop: 16, borderTop: '1px solid #3A3F63' }}&gt;&#10;          &lt;Text style={{ fontSize: 13, color: '#0C1222' }}&gt;怎么补：&lt;/Text&gt;&#10;          &lt;Text style={{ fontSize: 13, color: '#5C6780', lineHeight: 1.8 }}&gt;① 3 道瘦狗菜调价 5%~15%&lt;br /&gt;② 20 道滞销菜组套餐或下架&lt;br /&gt;③ 折扣收回 2 个点&lt;/Text&gt;&#10;        &lt;/Box&gt;&#10;        &lt;Text style={{ fontSize: 11, color: '#6B7490', lineHeight: 1.6, marginTop: 4 }}&gt;&#10;          左列全部由 SQL 从 180 天数据算出，脚本可复现；右侧为按当前规模的线性测算，不是承诺值。&#10;        &lt;/Text&gt;&#10;      &lt;/Box&gt;&#10;    &lt;/Box&gt;&#10;  &lt;/Box&gt;&#10;  &lt;Box style={{ height: 36, flexDirection: 'row', justifyContent: 'space-between', alignItems: 'flex-end' }}&gt;&#10;    &lt;Text style={{ fontSize: 12, color: '#8A93A8' }}&gt;2026 武汉 1024 · 产业应用赛道&lt;/Text&gt;&#10;    &lt;Text style={{ fontSize: 12, color: '#8A93A8' }}&gt;09 / 12&lt;/Text&gt;&#10;  &lt;/Box&gt;&#10;&lt;/Slide&gt;"/>
+        <p:cNvPr id="364" name=""/>
         <p:cNvGrpSpPr/>
         <p:nvPr/>
       </p:nvGrpSpPr>
@@ -17131,7 +17315,7 @@
       </p:grpSpPr>
       <p:sp>
         <p:nvSpPr>
-          <p:cNvPr id="363" name=""/>
+          <p:cNvPr id="365" name=""/>
           <p:cNvSpPr/>
           <p:nvPr/>
         </p:nvSpPr>
@@ -17150,12 +17334,15 @@
         </p:spPr>
         <p:txBody>
           <a:bodyPr/>
-          <a:p/>
-        </p:txBody>
-      </p:sp>
-      <p:sp>
-        <p:nvSpPr>
-          <p:cNvPr id="364" name="" descr="{&quot;isTemplate&quot;:true,&quot;type&quot;:&quot;text&quot;}"/>
+          <a:p>
+            <a:pPr/>
+            <a:endParaRPr/>
+          </a:p>
+        </p:txBody>
+      </p:sp>
+      <p:sp>
+        <p:nvSpPr>
+          <p:cNvPr id="366" name="" descr="{&quot;isTemplate&quot;:true,&quot;type&quot;:&quot;text&quot;}"/>
           <p:cNvSpPr txBox="1"/>
           <p:nvPr/>
         </p:nvSpPr>
@@ -17190,7 +17377,7 @@
       </p:sp>
       <p:sp>
         <p:nvSpPr>
-          <p:cNvPr id="365" name="" descr="{&quot;isTemplate&quot;:true,&quot;type&quot;:&quot;text&quot;}"/>
+          <p:cNvPr id="367" name="" descr="{&quot;isTemplate&quot;:true,&quot;type&quot;:&quot;text&quot;}"/>
           <p:cNvSpPr txBox="1"/>
           <p:nvPr/>
         </p:nvSpPr>
@@ -17245,7 +17432,7 @@
       </p:sp>
       <p:sp>
         <p:nvSpPr>
-          <p:cNvPr id="366" name=""/>
+          <p:cNvPr id="368" name=""/>
           <p:cNvSpPr/>
           <p:nvPr/>
         </p:nvSpPr>
@@ -17271,12 +17458,15 @@
         </p:spPr>
         <p:txBody>
           <a:bodyPr/>
-          <a:p/>
-        </p:txBody>
-      </p:sp>
-      <p:sp>
-        <p:nvSpPr>
-          <p:cNvPr id="367" name=""/>
+          <a:p>
+            <a:pPr/>
+            <a:endParaRPr/>
+          </a:p>
+        </p:txBody>
+      </p:sp>
+      <p:sp>
+        <p:nvSpPr>
+          <p:cNvPr id="369" name=""/>
           <p:cNvSpPr/>
           <p:nvPr/>
         </p:nvSpPr>
@@ -17297,12 +17487,15 @@
         </p:spPr>
         <p:txBody>
           <a:bodyPr/>
-          <a:p/>
-        </p:txBody>
-      </p:sp>
-      <p:sp>
-        <p:nvSpPr>
-          <p:cNvPr id="368" name="" descr="{&quot;isTemplate&quot;:true,&quot;type&quot;:&quot;text&quot;}"/>
+          <a:p>
+            <a:pPr/>
+            <a:endParaRPr/>
+          </a:p>
+        </p:txBody>
+      </p:sp>
+      <p:sp>
+        <p:nvSpPr>
+          <p:cNvPr id="370" name="" descr="{&quot;isTemplate&quot;:true,&quot;type&quot;:&quot;text&quot;}"/>
           <p:cNvSpPr txBox="1"/>
           <p:nvPr/>
         </p:nvSpPr>
@@ -17347,7 +17540,7 @@
       </p:sp>
       <p:sp>
         <p:nvSpPr>
-          <p:cNvPr id="369" name=""/>
+          <p:cNvPr id="371" name=""/>
           <p:cNvSpPr/>
           <p:nvPr/>
         </p:nvSpPr>
@@ -17368,12 +17561,15 @@
         </p:spPr>
         <p:txBody>
           <a:bodyPr/>
-          <a:p/>
-        </p:txBody>
-      </p:sp>
-      <p:sp>
-        <p:nvSpPr>
-          <p:cNvPr id="370" name="" descr="{&quot;isTemplate&quot;:true,&quot;type&quot;:&quot;text&quot;}"/>
+          <a:p>
+            <a:pPr/>
+            <a:endParaRPr/>
+          </a:p>
+        </p:txBody>
+      </p:sp>
+      <p:sp>
+        <p:nvSpPr>
+          <p:cNvPr id="372" name="" descr="{&quot;isTemplate&quot;:true,&quot;type&quot;:&quot;text&quot;}"/>
           <p:cNvSpPr txBox="1"/>
           <p:nvPr/>
         </p:nvSpPr>
@@ -17428,7 +17624,7 @@
       </p:sp>
       <p:sp>
         <p:nvSpPr>
-          <p:cNvPr id="371" name=""/>
+          <p:cNvPr id="373" name=""/>
           <p:cNvSpPr/>
           <p:nvPr/>
         </p:nvSpPr>
@@ -17463,12 +17659,15 @@
         </p:spPr>
         <p:txBody>
           <a:bodyPr/>
-          <a:p/>
-        </p:txBody>
-      </p:sp>
-      <p:sp>
-        <p:nvSpPr>
-          <p:cNvPr id="372" name="" descr="{&quot;isTemplate&quot;:true,&quot;type&quot;:&quot;text&quot;}"/>
+          <a:p>
+            <a:pPr/>
+            <a:endParaRPr/>
+          </a:p>
+        </p:txBody>
+      </p:sp>
+      <p:sp>
+        <p:nvSpPr>
+          <p:cNvPr id="374" name="" descr="{&quot;isTemplate&quot;:true,&quot;type&quot;:&quot;text&quot;}"/>
           <p:cNvSpPr txBox="1"/>
           <p:nvPr/>
         </p:nvSpPr>
@@ -17503,7 +17702,7 @@
       </p:sp>
       <p:sp>
         <p:nvSpPr>
-          <p:cNvPr id="373" name="" descr="{&quot;isTemplate&quot;:true,&quot;type&quot;:&quot;text&quot;}"/>
+          <p:cNvPr id="375" name="" descr="{&quot;isTemplate&quot;:true,&quot;type&quot;:&quot;text&quot;}"/>
           <p:cNvSpPr txBox="1"/>
           <p:nvPr/>
         </p:nvSpPr>
@@ -17618,7 +17817,7 @@
       </p:sp>
       <p:sp>
         <p:nvSpPr>
-          <p:cNvPr id="374" name=""/>
+          <p:cNvPr id="376" name=""/>
           <p:cNvSpPr/>
           <p:nvPr/>
         </p:nvSpPr>
@@ -17653,12 +17852,15 @@
         </p:spPr>
         <p:txBody>
           <a:bodyPr/>
-          <a:p/>
-        </p:txBody>
-      </p:sp>
-      <p:sp>
-        <p:nvSpPr>
-          <p:cNvPr id="375" name="" descr="{&quot;isTemplate&quot;:true,&quot;type&quot;:&quot;text&quot;}"/>
+          <a:p>
+            <a:pPr/>
+            <a:endParaRPr/>
+          </a:p>
+        </p:txBody>
+      </p:sp>
+      <p:sp>
+        <p:nvSpPr>
+          <p:cNvPr id="377" name="" descr="{&quot;isTemplate&quot;:true,&quot;type&quot;:&quot;text&quot;}"/>
           <p:cNvSpPr txBox="1"/>
           <p:nvPr/>
         </p:nvSpPr>
@@ -17693,7 +17895,7 @@
       </p:sp>
       <p:sp>
         <p:nvSpPr>
-          <p:cNvPr id="376" name="" descr="{&quot;isTemplate&quot;:true,&quot;type&quot;:&quot;text&quot;}"/>
+          <p:cNvPr id="378" name="" descr="{&quot;isTemplate&quot;:true,&quot;type&quot;:&quot;text&quot;}"/>
           <p:cNvSpPr txBox="1"/>
           <p:nvPr/>
         </p:nvSpPr>
@@ -17748,7 +17950,7 @@
       </p:sp>
       <p:sp>
         <p:nvSpPr>
-          <p:cNvPr id="377" name=""/>
+          <p:cNvPr id="379" name=""/>
           <p:cNvSpPr/>
           <p:nvPr/>
         </p:nvSpPr>
@@ -17783,12 +17985,15 @@
         </p:spPr>
         <p:txBody>
           <a:bodyPr/>
-          <a:p/>
-        </p:txBody>
-      </p:sp>
-      <p:sp>
-        <p:nvSpPr>
-          <p:cNvPr id="378" name="" descr="{&quot;isTemplate&quot;:true,&quot;type&quot;:&quot;text&quot;}"/>
+          <a:p>
+            <a:pPr/>
+            <a:endParaRPr/>
+          </a:p>
+        </p:txBody>
+      </p:sp>
+      <p:sp>
+        <p:nvSpPr>
+          <p:cNvPr id="380" name="" descr="{&quot;isTemplate&quot;:true,&quot;type&quot;:&quot;text&quot;}"/>
           <p:cNvSpPr txBox="1"/>
           <p:nvPr/>
         </p:nvSpPr>
@@ -17833,7 +18038,7 @@
       </p:sp>
       <p:sp>
         <p:nvSpPr>
-          <p:cNvPr id="379" name="" descr="{&quot;isTemplate&quot;:true,&quot;type&quot;:&quot;text&quot;}"/>
+          <p:cNvPr id="381" name="" descr="{&quot;isTemplate&quot;:true,&quot;type&quot;:&quot;text&quot;}"/>
           <p:cNvSpPr txBox="1"/>
           <p:nvPr/>
         </p:nvSpPr>
@@ -17918,7 +18123,7 @@
       </p:sp>
       <p:sp>
         <p:nvSpPr>
-          <p:cNvPr id="380" name=""/>
+          <p:cNvPr id="382" name=""/>
           <p:cNvSpPr/>
           <p:nvPr/>
         </p:nvSpPr>
@@ -17953,12 +18158,15 @@
         </p:spPr>
         <p:txBody>
           <a:bodyPr/>
-          <a:p/>
-        </p:txBody>
-      </p:sp>
-      <p:sp>
-        <p:nvSpPr>
-          <p:cNvPr id="381" name="" descr="{&quot;isTemplate&quot;:true,&quot;type&quot;:&quot;text&quot;}"/>
+          <a:p>
+            <a:pPr/>
+            <a:endParaRPr/>
+          </a:p>
+        </p:txBody>
+      </p:sp>
+      <p:sp>
+        <p:nvSpPr>
+          <p:cNvPr id="383" name="" descr="{&quot;isTemplate&quot;:true,&quot;type&quot;:&quot;text&quot;}"/>
           <p:cNvSpPr txBox="1"/>
           <p:nvPr/>
         </p:nvSpPr>
@@ -18003,7 +18211,7 @@
       </p:sp>
       <p:sp>
         <p:nvSpPr>
-          <p:cNvPr id="382" name="" descr="{&quot;isTemplate&quot;:true,&quot;type&quot;:&quot;text&quot;}"/>
+          <p:cNvPr id="384" name="" descr="{&quot;isTemplate&quot;:true,&quot;type&quot;:&quot;text&quot;}"/>
           <p:cNvSpPr txBox="1"/>
           <p:nvPr/>
         </p:nvSpPr>
@@ -18078,7 +18286,7 @@
       </p:sp>
       <p:sp>
         <p:nvSpPr>
-          <p:cNvPr id="383" name=""/>
+          <p:cNvPr id="385" name=""/>
           <p:cNvSpPr/>
           <p:nvPr/>
         </p:nvSpPr>
@@ -18113,12 +18321,15 @@
         </p:spPr>
         <p:txBody>
           <a:bodyPr/>
-          <a:p/>
-        </p:txBody>
-      </p:sp>
-      <p:sp>
-        <p:nvSpPr>
-          <p:cNvPr id="384" name=""/>
+          <a:p>
+            <a:pPr/>
+            <a:endParaRPr/>
+          </a:p>
+        </p:txBody>
+      </p:sp>
+      <p:sp>
+        <p:nvSpPr>
+          <p:cNvPr id="386" name=""/>
           <p:cNvSpPr/>
           <p:nvPr/>
         </p:nvSpPr>
@@ -18153,12 +18364,15 @@
         </p:spPr>
         <p:txBody>
           <a:bodyPr/>
-          <a:p/>
-        </p:txBody>
-      </p:sp>
-      <p:sp>
-        <p:nvSpPr>
-          <p:cNvPr id="385" name="" descr="{&quot;isTemplate&quot;:true,&quot;type&quot;:&quot;text&quot;}"/>
+          <a:p>
+            <a:pPr/>
+            <a:endParaRPr/>
+          </a:p>
+        </p:txBody>
+      </p:sp>
+      <p:sp>
+        <p:nvSpPr>
+          <p:cNvPr id="387" name="" descr="{&quot;isTemplate&quot;:true,&quot;type&quot;:&quot;text&quot;}"/>
           <p:cNvSpPr txBox="1"/>
           <p:nvPr/>
         </p:nvSpPr>
@@ -18193,7 +18407,7 @@
       </p:sp>
       <p:sp>
         <p:nvSpPr>
-          <p:cNvPr id="386" name="" descr="{&quot;isTemplate&quot;:true,&quot;type&quot;:&quot;text&quot;}"/>
+          <p:cNvPr id="388" name="" descr="{&quot;isTemplate&quot;:true,&quot;type&quot;:&quot;text&quot;}"/>
           <p:cNvSpPr txBox="1"/>
           <p:nvPr/>
         </p:nvSpPr>
@@ -18268,7 +18482,7 @@
       </p:sp>
       <p:sp>
         <p:nvSpPr>
-          <p:cNvPr id="387" name=""/>
+          <p:cNvPr id="389" name=""/>
           <p:cNvSpPr/>
           <p:nvPr/>
         </p:nvSpPr>
@@ -18294,12 +18508,15 @@
         </p:spPr>
         <p:txBody>
           <a:bodyPr/>
-          <a:p/>
-        </p:txBody>
-      </p:sp>
-      <p:sp>
-        <p:nvSpPr>
-          <p:cNvPr id="388" name="" descr="{&quot;isTemplate&quot;:true,&quot;type&quot;:&quot;text&quot;}"/>
+          <a:p>
+            <a:pPr/>
+            <a:endParaRPr/>
+          </a:p>
+        </p:txBody>
+      </p:sp>
+      <p:sp>
+        <p:nvSpPr>
+          <p:cNvPr id="390" name="" descr="{&quot;isTemplate&quot;:true,&quot;type&quot;:&quot;text&quot;}"/>
           <p:cNvSpPr txBox="1"/>
           <p:nvPr/>
         </p:nvSpPr>
@@ -18374,7 +18591,7 @@
       </p:sp>
       <p:sp>
         <p:nvSpPr>
-          <p:cNvPr id="389" name="" descr="{&quot;isTemplate&quot;:true,&quot;type&quot;:&quot;text&quot;}"/>
+          <p:cNvPr id="391" name="" descr="{&quot;isTemplate&quot;:true,&quot;type&quot;:&quot;text&quot;}"/>
           <p:cNvSpPr txBox="1"/>
           <p:nvPr/>
         </p:nvSpPr>
@@ -18449,7 +18666,7 @@
       </p:sp>
       <p:sp>
         <p:nvSpPr>
-          <p:cNvPr id="390" name="" descr="{&quot;isTemplate&quot;:true,&quot;type&quot;:&quot;text&quot;}"/>
+          <p:cNvPr id="392" name="" descr="{&quot;isTemplate&quot;:true,&quot;type&quot;:&quot;text&quot;}"/>
           <p:cNvSpPr txBox="1"/>
           <p:nvPr/>
         </p:nvSpPr>
@@ -18544,7 +18761,7 @@
       </p:sp>
       <p:sp>
         <p:nvSpPr>
-          <p:cNvPr id="391" name=""/>
+          <p:cNvPr id="393" name=""/>
           <p:cNvSpPr/>
           <p:nvPr/>
         </p:nvSpPr>
@@ -18579,12 +18796,15 @@
         </p:spPr>
         <p:txBody>
           <a:bodyPr/>
-          <a:p/>
-        </p:txBody>
-      </p:sp>
-      <p:sp>
-        <p:nvSpPr>
-          <p:cNvPr id="392" name="" descr="{&quot;isTemplate&quot;:true,&quot;type&quot;:&quot;text&quot;}"/>
+          <a:p>
+            <a:pPr/>
+            <a:endParaRPr/>
+          </a:p>
+        </p:txBody>
+      </p:sp>
+      <p:sp>
+        <p:nvSpPr>
+          <p:cNvPr id="394" name="" descr="{&quot;isTemplate&quot;:true,&quot;type&quot;:&quot;text&quot;}"/>
           <p:cNvSpPr txBox="1"/>
           <p:nvPr/>
         </p:nvSpPr>
@@ -18619,7 +18839,7 @@
       </p:sp>
       <p:sp>
         <p:nvSpPr>
-          <p:cNvPr id="393" name="" descr="{&quot;isTemplate&quot;:true,&quot;type&quot;:&quot;text&quot;}"/>
+          <p:cNvPr id="395" name="" descr="{&quot;isTemplate&quot;:true,&quot;type&quot;:&quot;text&quot;}"/>
           <p:cNvSpPr txBox="1"/>
           <p:nvPr/>
         </p:nvSpPr>
@@ -18750,7 +18970,7 @@
       </p:sp>
       <p:sp>
         <p:nvSpPr>
-          <p:cNvPr id="394" name="" descr="{&quot;isTemplate&quot;:true,&quot;type&quot;:&quot;text&quot;}"/>
+          <p:cNvPr id="396" name="" descr="{&quot;isTemplate&quot;:true,&quot;type&quot;:&quot;text&quot;}"/>
           <p:cNvSpPr txBox="1"/>
           <p:nvPr/>
         </p:nvSpPr>
@@ -18827,7 +19047,7 @@
       </p:sp>
       <p:sp>
         <p:nvSpPr>
-          <p:cNvPr id="395" name="" descr="{&quot;isTemplate&quot;:true,&quot;type&quot;:&quot;text&quot;}"/>
+          <p:cNvPr id="397" name="" descr="{&quot;isTemplate&quot;:true,&quot;type&quot;:&quot;text&quot;}"/>
           <p:cNvSpPr txBox="1"/>
           <p:nvPr/>
         </p:nvSpPr>
@@ -18892,7 +19112,7 @@
       </p:sp>
       <p:sp>
         <p:nvSpPr>
-          <p:cNvPr id="396" name="" descr="{&quot;isTemplate&quot;:true,&quot;type&quot;:&quot;text&quot;}"/>
+          <p:cNvPr id="398" name="" descr="{&quot;isTemplate&quot;:true,&quot;type&quot;:&quot;text&quot;}"/>
           <p:cNvSpPr txBox="1"/>
           <p:nvPr/>
         </p:nvSpPr>
